--- a/docs/apresentacao.pptx
+++ b/docs/apresentacao.pptx
@@ -260,7 +260,7 @@
             <a:spLocks noGrp="1" noChangeArrowheads="1"/>
             <a:extLst>
               <a:ext uri="smNativeData">
-                <pr:smNativeData xmlns:pr="smNativeData" xmlns="smNativeData" val="SMDATA_16_kRU2ahMAAAAlAAAAZAAAAA0AAAAAkAAAAEgAAACQAAAASAAAAAAAAAAAAAAAAAAAAAEAAABQAAAAAAAAAAAA4D8AAAAAAADgPwAAAAAAAOA/AAAAAAAA4D8AAAAAAADgPwAAAAAAAOA/AAAAAAAA4D8AAAAAAADgPwAAAAAAAOA/AAAAAAAA4D8CAAAAjAAAAAAAAAAAAAAA////AP///wgAAAAAAAAAAAAAAAAAAAAAAAAAAAAAAAAAAAAAeAAAAAEAAABAAAAAAAAAAAAAAABaAAAAAAAAAAAAAAAAAAAAAAAAAAAAAAAAAAAAAAAAAAAAAAAAAAAAAAAAAAAAAAAAAAAAAAAAAAAAAAAAAAAAAAAAAAAAAAAAAAAAFAAAADwAAAAAAAAAAAAAAAAAAAAPAAAAAQAAACMAAAAjAAAAIwAAAB4AAAAAAAAAZAAAAGQAAAAAAAAAZAAAAGQAAAAVAAAAYAAAAAAAAAAAAAAADwAAACADAAAAAAAAAAAAAAEAAACgMgAAVgcAAKr4//8BAAAAf39/AAEAAABkAAAAAAAAABQAAABAHwAAAAAAACYAAAAAAAAAwOD//wAAAAAmAAAAZAAAABYAAABMAAAAAAAAAAAAAAAEAAAAAAAAAAEAAADn5uYKAAAAACgAAAAoAAAAZAAAAGQAAAAAAAAAzMzMAAAAAABQAAAAUAAAAGQAAABkAAAAAAAAABcAAAAUAAAAAAAAAAAAAAD/fwAA/38AAAAAAAAJAAAABAAAAAAAAAAeAAAAaAAAAAAAAAAAAAAAAAAAAAAAAAAAAAAAECcAABAnAAAAAAAAAAAAAAAAAAAAAAAAAAAAAAAAAAAAAAAAAAAAABQAAAAAAAAAwMD/AAAAAABkAAAAMgAAAAAAAABkAAAAAAAAAH9/fwAKAAAAIgAAABgAAAAAAAAAAAAAAAAAAAAAAAAAAAAAAAAAAAAkAAAAJAAAAAAAAAAHAAAAAAAAAAAAAAAAAAAAAAAAAAAAAAAAAAAAf39/ACUAAABYAAAAAAAAAAAAAAAAAAAAAAAAAAAAAAAAAAAAAAAAAAAAAAAAAAAAAAAAAAAAAAA/AAAAAAAAAKCGAQAAAAAAAAAAAAAAAAAMAAAAAQAAAAAAAAAAAAAAAAAAAB8AAABUAAAA////AAAAAAEAAAAAAAAAAAAAAAAAAAAAAAAAAAAAAAAAAAAAAAAAAAAAAAB/f38AAAAAA8zMzADAwP8Af39/AAAAAAAAAAAAAAAAAAAAAAAAAAAAIQAAABgAAAAUAAAAAAAAAAAAAABIEgAA0wIAABAAAAAmAAAACAAAAD+PAAAAAAAAMAAAABQAAAAAAAAAAAD//wAAAQAAAP//AAABAA=="/>
+                <pr:smNativeData xmlns:pr="smNativeData" xmlns="smNativeData" val="SMDATA_16_V2g2ahMAAAAlAAAAZAAAAA0AAAAAkAAAAEgAAACQAAAASAAAAAAAAAAAAAAAAAAAAAEAAABQAAAAAAAAAAAA4D8AAAAAAADgPwAAAAAAAOA/AAAAAAAA4D8AAAAAAADgPwAAAAAAAOA/AAAAAAAA4D8AAAAAAADgPwAAAAAAAOA/AAAAAAAA4D8CAAAAjAAAAAAAAAAAAAAA////AP///wgAAAAAAAAAAAAAAAAAAAAAAAAAAAAAAAAAAAAAeAAAAAEAAABAAAAAAAAAAAAAAABaAAAAAAAAAAAAAAAAAAAAAAAAAAAAAAAAAAAAAAAAAAAAAAAAAAAAAAAAAAAAAAAAAAAAAAAAAAAAAAAAAAAAAAAAAAAAAAAAAAAAFAAAADwAAAAAAAAAAAAAAAAAAAAPAAAAAQAAACMAAAAjAAAAIwAAAB4AAAAAAAAAZAAAAGQAAAAAAAAAZAAAAGQAAAAVAAAAYAAAAAAAAAAAAAAADwAAACADAAAAAAAAAAAAAAEAAACgMgAAVgcAAKr4//8BAAAAf39/AAEAAABkAAAAAAAAABQAAABAHwAAAAAAACYAAAAAAAAAwOD//wAAAAAmAAAAZAAAABYAAABMAAAAAAAAAAAAAAAEAAAAAAAAAAEAAADn5uYKAAAAACgAAAAoAAAAZAAAAGQAAAAAAAAAzMzMAAAAAABQAAAAUAAAAGQAAABkAAAAAAAAABcAAAAUAAAAAAAAAAAAAAD/fwAA/38AAAAAAAAJAAAABAAAAAAAAAAeAAAAaAAAAAAAAAAAAAAAAAAAAAAAAAAAAAAAECcAABAnAAAAAAAAAAAAAAAAAAAAAAAAAAAAAAAAAAAAAAAAAAAAABQAAAAAAAAAwMD/AAAAAABkAAAAMgAAAAAAAABkAAAAAAAAAH9/fwAKAAAAIgAAABgAAAAAAAAAAAAAAAAAAAAAAAAAAAAAAAAAAAAkAAAAJAAAAAAAAAAHAAAAAAAAAAAAAAAAAAAAAAAAAAAAAAAAAAAAf39/ACUAAABYAAAAAAAAAAAAAAAAAAAAAAAAAAAAAAAAAAAAAAAAAAAAAAAAAAAAAAAAAAAAAAA/AAAAAAAAAKCGAQAAAAAAAAAAAAAAAAAMAAAAAQAAAAAAAAAAAAAAAAAAAB8AAABUAAAA////AAAAAAEAAAAAAAAAAAAAAAAAAAAAAAAAAAAAAAAAAAAAAAAAAAAAAAB/f38AAAAAA8zMzADAwP8Af39/AAAAAAAAAAAAAAAAAAAAAAAAAAAAIQAAABgAAAAUAAAAAAAAAAAAAABIEgAA0wIAABAAAAAmAAAACAAAAD+PAAAAAAAAMAAAABQAAAAAAAAAAAD//wAAAQAAAP//AAABAA=="/>
               </a:ext>
             </a:extLst>
           </p:cNvSpPr>
@@ -300,7 +300,7 @@
             <a:spLocks noGrp="1" noChangeArrowheads="1"/>
             <a:extLst>
               <a:ext uri="smNativeData">
-                <pr:smNativeData xmlns:pr="smNativeData" xmlns="smNativeData" val="SMDATA_16_kRU2ahMAAAAlAAAAZAAAAA0AAAAAkAAAAEgAAACQAAAASAAAAAAAAAAAAAAAAAAAAAEAAABQAAAAAAAAAAAA4D8AAAAAAADgPwAAAAAAAOA/AAAAAAAA4D8AAAAAAADgPwAAAAAAAOA/AAAAAAAA4D8AAAAAAADgPwAAAAAAAOA/AAAAAAAA4D8CAAAAjAAAAAAAAAAAAAAA////AP///wgAAAAAAAAAAAAAAAAAAAAAAAAAAAAAAAAAAAAAeAAAAAEAAABAAAAAAAAAAAAAAABaAAAAAAAAAAAAAAAAAAAAAAAAAAAAAAAAAAAAAAAAAAAAAAAAAAAAAAAAAAAAAAAAAAAAAAAAAAAAAAAAAAAAAAAAAAAAAAAAAAAAFAAAADwAAAAAAAAAAAAAAAAAAAAPAAAAAQAAACMAAAAjAAAAIwAAAB4AAAAAAAAAZAAAAGQAAAAAAAAAZAAAAGQAAAAVAAAAYAAAAAAAAAAAAAAADwAAACADAAAAAAAAAAAAAAEAAACgMgAAVgcAAKr4//8BAAAAf39/AAEAAABkAAAAAAAAABQAAABAHwAAAAAAACYAAAAAAAAAwOD//wAAAAAmAAAAZAAAABYAAABMAAAAAAAAAAAAAAAEAAAAAAAAAAEAAADn5uYKAAAAACgAAAAoAAAAZAAAAGQAAAAAAAAAzMzMAAAAAABQAAAAUAAAAGQAAABkAAAAAAAAABcAAAAUAAAAAAAAAAAAAAD/fwAA/38AAAAAAAAJAAAABAAAAFYAcgAeAAAAaAAAAAAAAAAAAAAAAAAAAAAAAAAAAAAAECcAABAnAAAAAAAAAAAAAAAAAAAAAAAAAAAAAAAAAAAAAAAAAAAAABQAAAAAAAAAwMD/AAAAAABkAAAAMgAAAAAAAABkAAAAAAAAAH9/fwAKAAAAIgAAABgAAAAAAAAAAAAAAAAAAAAAAAAAAAAAAAAAAAAkAAAAJAAAAAAAAAAHAAAAAAAAAAAAAAAAAAAAAAAAAAAAAAAAAAAAf39/ACUAAABYAAAAAAAAAAAAAAAAAAAAAAAAAAAAAAAAAAAAAAAAAAAAAAAAAAAAAAAAAAAAAAA/AAAAAAAAAKCGAQAAAAAAAAAAAAAAAAAMAAAAAQAAAAAAAAAAAAAAAAAAAB8AAABUAAAA////AAAAAAEAAAAAAAAAAAAAAAAAAAAAAAAAAAAAAAAAAAAAAAAAAAAAAAB/f38AAAAAA8zMzADAwP8Af39/AAAAAAAAAAAAAAAAAAAAAAAAAAAAIQAAABgAAAAUAAAA5hcAAAAAAAAuKgAA0wIAABAAAAAmAAAACAAAAD+PAAAAAAAAMAAAABQAAAAAAAAAAAD//wAAAQAAAP//AAABAA=="/>
+                <pr:smNativeData xmlns:pr="smNativeData" xmlns="smNativeData" val="SMDATA_16_V2g2ahMAAAAlAAAAZAAAAA0AAAAAkAAAAEgAAACQAAAASAAAAAAAAAAAAAAAAAAAAAEAAABQAAAAAAAAAAAA4D8AAAAAAADgPwAAAAAAAOA/AAAAAAAA4D8AAAAAAADgPwAAAAAAAOA/AAAAAAAA4D8AAAAAAADgPwAAAAAAAOA/AAAAAAAA4D8CAAAAjAAAAAAAAAAAAAAA////AP///wgAAAAAAAAAAAAAAAAAAAAAAAAAAAAAAAAAAAAAeAAAAAEAAABAAAAAAAAAAAAAAABaAAAAAAAAAAAAAAAAAAAAAAAAAAAAAAAAAAAAAAAAAAAAAAAAAAAAAAAAAAAAAAAAAAAAAAAAAAAAAAAAAAAAAAAAAAAAAAAAAAAAFAAAADwAAAAAAAAAAAAAAAAAAAAPAAAAAQAAACMAAAAjAAAAIwAAAB4AAAAAAAAAZAAAAGQAAAAAAAAAZAAAAGQAAAAVAAAAYAAAAAAAAAAAAAAADwAAACADAAAAAAAAAAAAAAEAAACgMgAAVgcAAKr4//8BAAAAf39/AAEAAABkAAAAAAAAABQAAABAHwAAAAAAACYAAAAAAAAAwOD//wAAAAAmAAAAZAAAABYAAABMAAAAAAAAAAAAAAAEAAAAAAAAAAEAAADn5uYKAAAAACgAAAAoAAAAZAAAAGQAAAAAAAAAzMzMAAAAAABQAAAAUAAAAGQAAABkAAAAAAAAABcAAAAUAAAAAAAAAAAAAAD/fwAA/38AAAAAAAAJAAAABAAAAFYAcgAeAAAAaAAAAAAAAAAAAAAAAAAAAAAAAAAAAAAAECcAABAnAAAAAAAAAAAAAAAAAAAAAAAAAAAAAAAAAAAAAAAAAAAAABQAAAAAAAAAwMD/AAAAAABkAAAAMgAAAAAAAABkAAAAAAAAAH9/fwAKAAAAIgAAABgAAAAAAAAAAAAAAAAAAAAAAAAAAAAAAAAAAAAkAAAAJAAAAAAAAAAHAAAAAAAAAAAAAAAAAAAAAAAAAAAAAAAAAAAAf39/ACUAAABYAAAAAAAAAAAAAAAAAAAAAAAAAAAAAAAAAAAAAAAAAAAAAAAAAAAAAAAAAAAAAAA/AAAAAAAAAKCGAQAAAAAAAAAAAAAAAAAMAAAAAQAAAAAAAAAAAAAAAAAAAB8AAABUAAAA////AAAAAAEAAAAAAAAAAAAAAAAAAAAAAAAAAAAAAAAAAAAAAAAAAAAAAAB/f38AAAAAA8zMzADAwP8Af39/AAAAAAAAAAAAAAAAAAAAAAAAAAAAIQAAABgAAAAUAAAA5hcAAAAAAAAuKgAA0wIAABAAAAAmAAAACAAAAD+PAAAAAAAAMAAAABQAAAAAAAAAAAD//wAAAQAAAP//AAABAA=="/>
               </a:ext>
             </a:extLst>
           </p:cNvSpPr>
@@ -330,7 +330,7 @@
           </a:lstStyle>
           <a:p>
             <a:pPr/>
-            <a:fld id="{09DDDDFC-B2E4-882B-AA65-447E932B5C11}" type="datetime1">
+            <a:fld id="{1B658DEB-A5F6-307B-B8DD-532EC3934E06}" type="datetime1">
               <a:t>7/23/19</a:t>
             </a:fld>
           </a:p>
@@ -343,7 +343,7 @@
             <a:spLocks noGrp="1" noChangeArrowheads="1"/>
             <a:extLst>
               <a:ext uri="smNativeData">
-                <pr:smNativeData xmlns:pr="smNativeData" xmlns="smNativeData" val="SMDATA_16_kRU2ahMAAAAlAAAAZAAAAC0AAAAAkAAAAEgAAACQAAAASAAAAAAAAAABAAAAAAAAAAEAAABQAAAAAAAAAAAA4D8AAAAAAADgPwAAAAAAAOA/AAAAAAAA4D8AAAAAAADgPwAAAAAAAOA/AAAAAAAA4D8AAAAAAADgPwAAAAAAAOA/AAAAAAAA4D8CAAAAjAAAAAAAAAAAAAAARHLEDP///wgAAAAAAAAAAAAAAAAAAAAAAAAAAAAAAAAAAAAAZAAAAAEAAABAAAAAAAAAAAAAAAAAAAAAAAAAAAAAAAAAAAAAAAAAAAAAAAAAAAAAAAAAAAAAAAAAAAAAAAAAAAAAAAAAAAAAAAAAAAAAAAAAAAAAAAAAAAAAAAAAAAAAFAAAADwAAAABAAAAAAAAAAAAAAAUAAAAAQAAACMAAAAjAAAAIwAAAB4AAAAAAAAAZAAAAGQAAAAAAAAAZAAAAGQAAAAVAAAAYAAAAAAAAAAAAAAADwAAACADAAAAAAAAAAAAAAEAAACgMgAAVgcAAKr4//8BAAAAf39/AAEAAABkAAAAAAAAABQAAABAHwAAAAAAACYAAAAAAAAAwOD//wAAAAAmAAAAZAAAABYAAABMAAAAAAAAAAAAAAAEAAAAAAAAAAEAAADn5uYKAAAAACgAAAAoAAAAZAAAAGQAAAAAAAAAzMzMAAAAAABQAAAAUAAAAGQAAABkAAAAAAAAABcAAAAUAAAAAAAAAAAAAAD/fwAA/38AAAAAAAAJAAAABAAAAMEDAAAeAAAAaAAAAAAAAAAAAAAAAAAAAAAAAAAAAAAAECcAABAnAAAAAAAAAAAAAAAAAAAAAAAAAAAAAAAAAAAAAAAAAAAAABQAAAAAAAAAwMD/AAAAAABkAAAAMgAAAAAAAABkAAAAAAAAAH9/fwAKAAAAIgAAABgAAAAAAAAAAAAAAAAAAAAAAAAAAAAAAAAAAAAkAAAAJAAAAAAAAAAHAAAAAAAAAAAAAAAAAAAAAAAAAAAAAAAAAAAAf39/ACUAAABYAAAAAAAAAAAAAAAAAAAAAAAAAAAAAAAAAAAAAAAAAAAAAAAAAAAAAAAAAAAAAAA/AAAAAAAAAKCGAQAAAAAAAAAAAAAAAAAMAAAAAQAAAAAAAAAAAAAAAAAAAB8AAABUAAAAAAAABQAAAAEAAAAAAAAAAAAAAAAAAAAAAAAAAAAAAAAAAAAAAAAAAAAAAAB/f38AAAAAA8zMzADAwP8Af39/AAAAAAAAAAAAAAAAAAAAAAAAAAAAIQAAABgAAAAUAAAAOAQAAAgHAAD4JQAABBoAABAAAAAmAAAACAAAAL8PAAD/HwAAMAAAABQAAAAAAAAAAAD//wAAAQAAAP//AAABAA=="/>
+                <pr:smNativeData xmlns:pr="smNativeData" xmlns="smNativeData" val="SMDATA_16_V2g2ahMAAAAlAAAAZAAAAC0AAAAAkAAAAEgAAACQAAAASAAAAAAAAAABAAAAAAAAAAEAAABQAAAAAAAAAAAA4D8AAAAAAADgPwAAAAAAAOA/AAAAAAAA4D8AAAAAAADgPwAAAAAAAOA/AAAAAAAA4D8AAAAAAADgPwAAAAAAAOA/AAAAAAAA4D8CAAAAjAAAAAAAAAAAAAAARHLEDP///wgAAAAAAAAAAAAAAAAAAAAAAAAAAAAAAAAAAAAAZAAAAAEAAABAAAAAAAAAAAAAAAAAAAAAAAAAAAAAAAAAAAAAAAAAAAAAAAAAAAAAAAAAAAAAAAAAAAAAAAAAAAAAAAAAAAAAAAAAAAAAAAAAAAAAAAAAAAAAAAAAAAAAFAAAADwAAAABAAAAAAAAAAAAAAAUAAAAAQAAACMAAAAjAAAAIwAAAB4AAAAAAAAAZAAAAGQAAAAAAAAAZAAAAGQAAAAVAAAAYAAAAAAAAAAAAAAADwAAACADAAAAAAAAAAAAAAEAAACgMgAAVgcAAKr4//8BAAAAf39/AAEAAABkAAAAAAAAABQAAABAHwAAAAAAACYAAAAAAAAAwOD//wAAAAAmAAAAZAAAABYAAABMAAAAAAAAAAAAAAAEAAAAAAAAAAEAAADn5uYKAAAAACgAAAAoAAAAZAAAAGQAAAAAAAAAzMzMAAAAAABQAAAAUAAAAGQAAABkAAAAAAAAABcAAAAUAAAAAAAAAAAAAAD/fwAA/38AAAAAAAAJAAAABAAAAMEDAAAeAAAAaAAAAAAAAAAAAAAAAAAAAAAAAAAAAAAAECcAABAnAAAAAAAAAAAAAAAAAAAAAAAAAAAAAAAAAAAAAAAAAAAAABQAAAAAAAAAwMD/AAAAAABkAAAAMgAAAAAAAABkAAAAAAAAAH9/fwAKAAAAIgAAABgAAAAAAAAAAAAAAAAAAAAAAAAAAAAAAAAAAAAkAAAAJAAAAAAAAAAHAAAAAAAAAAAAAAAAAAAAAAAAAAAAAAAAAAAAf39/ACUAAABYAAAAAAAAAAAAAAAAAAAAAAAAAAAAAAAAAAAAAAAAAAAAAAAAAAAAAAAAAAAAAAA/AAAAAAAAAKCGAQAAAAAAAAAAAAAAAAAMAAAAAQAAAAAAAAAAAAAAAAAAAB8AAABUAAAAAAAABQAAAAEAAAAAAAAAAAAAAAAAAAAAAAAAAAAAAAAAAAAAAAAAAAAAAAB/f38AAAAAA8zMzADAwP8Af39/AAAAAAAAAAAAAAAAAAAAAAAAAAAAIQAAABgAAAAUAAAAOAQAAAgHAAD4JQAABBoAABAAAAAmAAAACAAAAL8PAAD/HwAAMAAAABQAAAAAAAAAAAD//wAAAQAAAP//AAABAA=="/>
               </a:ext>
             </a:extLst>
           </p:cNvSpPr>
@@ -389,7 +389,7 @@
             <a:spLocks noGrp="1" noChangeArrowheads="1"/>
             <a:extLst>
               <a:ext uri="smNativeData">
-                <pr:smNativeData xmlns:pr="smNativeData" xmlns="smNativeData" val="SMDATA_16_kRU2ahMAAAAlAAAAZAAAAA0AAAAAkAAAAEgAAACQAAAASAAAAAAAAAAAAAAAAAAAAAEAAABQAAAAAAAAAAAA4D8AAAAAAADgPwAAAAAAAOA/AAAAAAAA4D8AAAAAAADgPwAAAAAAAOA/AAAAAAAA4D8AAAAAAADgPwAAAAAAAOA/AAAAAAAA4D8CAAAAjAAAAAAAAAAAAAAA////AP///wgAAAAAAAAAAAAAAAAAAAAAAAAAAAAAAAAAAAAAeAAAAAEAAABAAAAAAAAAAAAAAABaAAAAAAAAAAAAAAAAAAAAAAAAAAAAAAAAAAAAAAAAAAAAAAAAAAAAAAAAAAAAAAAAAAAAAAAAAAAAAAAAAAAAAAAAAAAAAAAAAAAAFAAAADwAAAAAAAAAAAAAAAAAAAAPAAAAAQAAACMAAAAjAAAAIwAAAB4AAAAAAAAAZAAAAGQAAAAAAAAAZAAAAGQAAAAVAAAAYAAAAAAAAAAAAAAADwAAACADAAAAAAAAAAAAAAEAAACgMgAAVgcAAKr4//8BAAAAf39/AAEAAABkAAAAAAAAABQAAABAHwAAAAAAACYAAAAAAAAAwOD//wAAAAAmAAAAZAAAABYAAABMAAAAAAAAAAAAAAAEAAAAAAAAAAEAAADn5uYKAAAAACgAAAAoAAAAZAAAAGQAAAAAAAAAzMzMAAAAAABQAAAAUAAAAGQAAABkAAAAAAAAABcAAAAUAAAAAAAAAAAAAAD/fwAA/38AAAAAAAAJAAAABAAAAAAAAAAeAAAAaAAAAAAAAAAAAAAAAAAAAAAAAAAAAAAAECcAABAnAAAAAAAAAAAAAAAAAAAAAAAAAAAAAAAAAAAAAAAAAAAAABQAAAAAAAAAwMD/AAAAAABkAAAAMgAAAAAAAABkAAAAAAAAAH9/fwAKAAAAIgAAABgAAAAAAAAAAAAAAAAAAAAAAAAAAAAAAAAAAAAkAAAAJAAAAAAAAAAHAAAAAAAAAAAAAAAAAAAAAAAAAAAAAAAAAAAAf39/ACUAAABYAAAAAAAAAAAAAAAAAAAAAAAAAAAAAAAAAAAAAAAAAAAAAAAAAAAAAAAAAAAAAAA/AAAAAAAAAKCGAQAAAAAAAAAAAAAAAAAMAAAAAQAAAAAAAAAAAAAAAAAAAB8AAABUAAAA////AAAAAAEAAAAAAAAAAAAAAAAAAAAAAAAAAAAAAAAAAAAAAAAAAAAAAAB/f38AAAAAA8zMzADAwP8Af39/AAAAAAAAAAAAAAAAAAAAAAAAAAAAIQAAABgAAAAUAAAAOAQAABIbAAD4JQAAODEAABAAAAAmAAAACAAAAD8PAAD/HwAAMAAAABQAAAAAAAAAAAD//wAAAQAAAP//AAABAA=="/>
+                <pr:smNativeData xmlns:pr="smNativeData" xmlns="smNativeData" val="SMDATA_16_V2g2ahMAAAAlAAAAZAAAAA0AAAAAkAAAAEgAAACQAAAASAAAAAAAAAAAAAAAAAAAAAEAAABQAAAAAAAAAAAA4D8AAAAAAADgPwAAAAAAAOA/AAAAAAAA4D8AAAAAAADgPwAAAAAAAOA/AAAAAAAA4D8AAAAAAADgPwAAAAAAAOA/AAAAAAAA4D8CAAAAjAAAAAAAAAAAAAAA////AP///wgAAAAAAAAAAAAAAAAAAAAAAAAAAAAAAAAAAAAAeAAAAAEAAABAAAAAAAAAAAAAAABaAAAAAAAAAAAAAAAAAAAAAAAAAAAAAAAAAAAAAAAAAAAAAAAAAAAAAAAAAAAAAAAAAAAAAAAAAAAAAAAAAAAAAAAAAAAAAAAAAAAAFAAAADwAAAAAAAAAAAAAAAAAAAAPAAAAAQAAACMAAAAjAAAAIwAAAB4AAAAAAAAAZAAAAGQAAAAAAAAAZAAAAGQAAAAVAAAAYAAAAAAAAAAAAAAADwAAACADAAAAAAAAAAAAAAEAAACgMgAAVgcAAKr4//8BAAAAf39/AAEAAABkAAAAAAAAABQAAABAHwAAAAAAACYAAAAAAAAAwOD//wAAAAAmAAAAZAAAABYAAABMAAAAAAAAAAAAAAAEAAAAAAAAAAEAAADn5uYKAAAAACgAAAAoAAAAZAAAAGQAAAAAAAAAzMzMAAAAAABQAAAAUAAAAGQAAABkAAAAAAAAABcAAAAUAAAAAAAAAAAAAAD/fwAA/38AAAAAAAAJAAAABAAAAAAAAAAeAAAAaAAAAAAAAAAAAAAAAAAAAAAAAAAAAAAAECcAABAnAAAAAAAAAAAAAAAAAAAAAAAAAAAAAAAAAAAAAAAAAAAAABQAAAAAAAAAwMD/AAAAAABkAAAAMgAAAAAAAABkAAAAAAAAAH9/fwAKAAAAIgAAABgAAAAAAAAAAAAAAAAAAAAAAAAAAAAAAAAAAAAkAAAAJAAAAAAAAAAHAAAAAAAAAAAAAAAAAAAAAAAAAAAAAAAAAAAAf39/ACUAAABYAAAAAAAAAAAAAAAAAAAAAAAAAAAAAAAAAAAAAAAAAAAAAAAAAAAAAAAAAAAAAAA/AAAAAAAAAKCGAQAAAAAAAAAAAAAAAAAMAAAAAQAAAAAAAAAAAAAAAAAAAB8AAABUAAAA////AAAAAAEAAAAAAAAAAAAAAAAAAAAAAAAAAAAAAAAAAAAAAAAAAAAAAAB/f38AAAAAA8zMzADAwP8Af39/AAAAAAAAAAAAAAAAAAAAAAAAAAAAIQAAABgAAAAUAAAAOAQAABIbAAD4JQAAODEAABAAAAAmAAAACAAAAD8PAAD/HwAAMAAAABQAAAAAAAAAAAD//wAAAQAAAP//AAABAA=="/>
               </a:ext>
             </a:extLst>
           </p:cNvSpPr>
@@ -466,7 +466,7 @@
             <a:spLocks noGrp="1" noChangeArrowheads="1"/>
             <a:extLst>
               <a:ext uri="smNativeData">
-                <pr:smNativeData xmlns:pr="smNativeData" xmlns="smNativeData" val="SMDATA_16_kRU2ahMAAAAlAAAAZAAAAA0AAAAAkAAAAEgAAACQAAAASAAAAAAAAAACAAAAAAAAAAEAAABQAAAAAAAAAAAA4D8AAAAAAADgPwAAAAAAAOA/AAAAAAAA4D8AAAAAAADgPwAAAAAAAOA/AAAAAAAA4D8AAAAAAADgPwAAAAAAAOA/AAAAAAAA4D8CAAAAjAAAAAAAAAAAAAAA////AP///wgAAAAAAAAAAAAAAAAAAAAAAAAAAAAAAAAAAAAAeAAAAAEAAABAAAAAAAAAAAAAAABaAAAAAAAAAAAAAAAAAAAAAAAAAAAAAAAAAAAAAAAAAAAAAAAAAAAAAAAAAAAAAAAAAAAAAAAAAAAAAAAAAAAAAAAAAAAAAAAAAAAAFAAAADwAAAAAAAAAAAAAAAAAAAAPAAAAAQAAACMAAAAjAAAAIwAAAB4AAAAAAAAAZAAAAGQAAAAAAAAAZAAAAGQAAAAVAAAAYAAAAAAAAAAAAAAADwAAACADAAAAAAAAAAAAAAEAAACgMgAAVgcAAKr4//8BAAAAf39/AAEAAABkAAAAAAAAABQAAABAHwAAAAAAACYAAAAAAAAAwOD//wAAAAAmAAAAZAAAABYAAABMAAAAAAAAAAAAAAAEAAAAAAAAAAEAAADn5uYKAAAAACgAAAAoAAAAZAAAAGQAAAAAAAAAzMzMAAAAAABQAAAAUAAAAGQAAABkAAAAAAAAABcAAAAUAAAAAAAAAAAAAAD/fwAA/38AAAAAAAAJAAAABAAAAFYAcgAeAAAAaAAAAAAAAAAAAAAAAAAAAAAAAAAAAAAAECcAABAnAAAAAAAAAAAAAAAAAAAAAAAAAAAAAAAAAAAAAAAAAAAAABQAAAAAAAAAwMD/AAAAAABkAAAAMgAAAAAAAABkAAAAAAAAAH9/fwAKAAAAIgAAABgAAAAAAAAAAAAAAAAAAAAAAAAAAAAAAAAAAAAkAAAAJAAAAAAAAAAHAAAAAAAAAAAAAAAAAAAAAAAAAAAAAAAAAAAAf39/ACUAAABYAAAAAAAAAAAAAAAAAAAAAAAAAAAAAAAAAAAAAAAAAAAAAAAAAAAAAAAAAAAAAAA/AAAAAAAAAKCGAQAAAAAAAAAAAAAAAAAMAAAAAQAAAAAAAAAAAAAAAAAAAB8AAABUAAAA////AAAAAAEAAAAAAAAAAAAAAAAAAAAAAAAAAAAAAAAAAAAAAAAAAAAAAAB/f38AAAAAA8zMzADAwP8Af39/AAAAAAAAAAAAAAAAAAAAAAAAAAAAIQAAABgAAAAUAAAAAAAAAG41AABIEgAAQDgAABAAAAAmAAAACAAAAL+PAAD/HwAAMAAAABQAAAAAAAAAAAD//wAAAQAAAP//AAABAA=="/>
+                <pr:smNativeData xmlns:pr="smNativeData" xmlns="smNativeData" val="SMDATA_16_V2g2ahMAAAAlAAAAZAAAAA0AAAAAkAAAAEgAAACQAAAASAAAAAAAAAACAAAAAAAAAAEAAABQAAAAAAAAAAAA4D8AAAAAAADgPwAAAAAAAOA/AAAAAAAA4D8AAAAAAADgPwAAAAAAAOA/AAAAAAAA4D8AAAAAAADgPwAAAAAAAOA/AAAAAAAA4D8CAAAAjAAAAAAAAAAAAAAA////AP///wgAAAAAAAAAAAAAAAAAAAAAAAAAAAAAAAAAAAAAeAAAAAEAAABAAAAAAAAAAAAAAABaAAAAAAAAAAAAAAAAAAAAAAAAAAAAAAAAAAAAAAAAAAAAAAAAAAAAAAAAAAAAAAAAAAAAAAAAAAAAAAAAAAAAAAAAAAAAAAAAAAAAFAAAADwAAAAAAAAAAAAAAAAAAAAPAAAAAQAAACMAAAAjAAAAIwAAAB4AAAAAAAAAZAAAAGQAAAAAAAAAZAAAAGQAAAAVAAAAYAAAAAAAAAAAAAAADwAAACADAAAAAAAAAAAAAAEAAACgMgAAVgcAAKr4//8BAAAAf39/AAEAAABkAAAAAAAAABQAAABAHwAAAAAAACYAAAAAAAAAwOD//wAAAAAmAAAAZAAAABYAAABMAAAAAAAAAAAAAAAEAAAAAAAAAAEAAADn5uYKAAAAACgAAAAoAAAAZAAAAGQAAAAAAAAAzMzMAAAAAABQAAAAUAAAAGQAAABkAAAAAAAAABcAAAAUAAAAAAAAAAAAAAD/fwAA/38AAAAAAAAJAAAABAAAAFYAcgAeAAAAaAAAAAAAAAAAAAAAAAAAAAAAAAAAAAAAECcAABAnAAAAAAAAAAAAAAAAAAAAAAAAAAAAAAAAAAAAAAAAAAAAABQAAAAAAAAAwMD/AAAAAABkAAAAMgAAAAAAAABkAAAAAAAAAH9/fwAKAAAAIgAAABgAAAAAAAAAAAAAAAAAAAAAAAAAAAAAAAAAAAAkAAAAJAAAAAAAAAAHAAAAAAAAAAAAAAAAAAAAAAAAAAAAAAAAAAAAf39/ACUAAABYAAAAAAAAAAAAAAAAAAAAAAAAAAAAAAAAAAAAAAAAAAAAAAAAAAAAAAAAAAAAAAA/AAAAAAAAAKCGAQAAAAAAAAAAAAAAAAAMAAAAAQAAAAAAAAAAAAAAAAAAAB8AAABUAAAA////AAAAAAEAAAAAAAAAAAAAAAAAAAAAAAAAAAAAAAAAAAAAAAAAAAAAAAB/f38AAAAAA8zMzADAwP8Af39/AAAAAAAAAAAAAAAAAAAAAAAAAAAAIQAAABgAAAAUAAAAAAAAAG41AABIEgAAQDgAABAAAAAmAAAACAAAAL+PAAD/HwAAMAAAABQAAAAAAAAAAAD//wAAAQAAAP//AAABAA=="/>
               </a:ext>
             </a:extLst>
           </p:cNvSpPr>
@@ -510,7 +510,7 @@
             <a:spLocks noGrp="1" noChangeArrowheads="1"/>
             <a:extLst>
               <a:ext uri="smNativeData">
-                <pr:smNativeData xmlns:pr="smNativeData" xmlns="smNativeData" val="SMDATA_16_kRU2ahMAAAAlAAAAZAAAAA0AAAAAkAAAAEgAAACQAAAASAAAAAAAAAACAAAAAAAAAAEAAABQAAAAAAAAAAAA4D8AAAAAAADgPwAAAAAAAOA/AAAAAAAA4D8AAAAAAADgPwAAAAAAAOA/AAAAAAAA4D8AAAAAAADgPwAAAAAAAOA/AAAAAAAA4D8CAAAAjAAAAAAAAAAAAAAA////AP///wgAAAAAAAAAAAAAAAAAAAAAAAAAAAAAAAAAAAAAeAAAAAEAAABAAAAAAAAAAAAAAABaAAAAAAAAAAAAAAAAAAAAAAAAAAAAAAAAAAAAAAAAAAAAAAAAAAAAAAAAAAAAAAAAAAAAAAAAAAAAAAAAAAAAAAAAAAAAAAAAAAAAFAAAADwAAAAAAAAAAAAAAAAAAAAPAAAAAQAAACMAAAAjAAAAIwAAAB4AAAAAAAAAZAAAAGQAAAAAAAAAZAAAAGQAAAAVAAAAYAAAAAAAAAAAAAAADwAAACADAAAAAAAAAAAAAAEAAACgMgAAVgcAAKr4//8BAAAAf39/AAEAAABkAAAAAAAAABQAAABAHwAAAAAAACYAAAAAAAAAwOD//wAAAAAmAAAAZAAAABYAAABMAAAAAAAAAAAAAAAEAAAAAAAAAAEAAADn5uYKAAAAACgAAAAoAAAAZAAAAGQAAAAAAAAAzMzMAAAAAABQAAAAUAAAAGQAAABkAAAAAAAAABcAAAAUAAAAAAAAAAAAAAD/fwAA/38AAAAAAAAJAAAABAAAAFkAaQAeAAAAaAAAAAAAAAAAAAAAAAAAAAAAAAAAAAAAECcAABAnAAAAAAAAAAAAAAAAAAAAAAAAAAAAAAAAAAAAAAAAAAAAABQAAAAAAAAAwMD/AAAAAABkAAAAMgAAAAAAAABkAAAAAAAAAH9/fwAKAAAAIgAAABgAAAAAAAAAAAAAAAAAAAAAAAAAAAAAAAAAAAAkAAAAJAAAAAAAAAAHAAAAAAAAAAAAAAAAAAAAAAAAAAAAAAAAAAAAf39/ACUAAABYAAAAAAAAAAAAAAAAAAAAAAAAAAAAAAAAAAAAAAAAAAAAAAAAAAAAAAAAAAAAAAA/AAAAAAAAAKCGAQAAAAAAAAAAAAAAAAAMAAAAAQAAAAAAAAAAAAAAAAAAAB8AAABUAAAA////AAAAAAEAAAAAAAAAAAAAAAAAAAAAAAAAAAAAAAAAAAAAAAAAAAAAAAB/f38AAAAAA8zMzADAwP8Af39/AAAAAAAAAAAAAAAAAAAAAAAAAAAAIQAAABgAAAAUAAAA5hcAAG41AAAuKgAAQDgAABAAAAAmAAAACAAAAL+PAAD/HwAAMAAAABQAAAAAAAAAAAD//wAAAQAAAP//AAABAA=="/>
+                <pr:smNativeData xmlns:pr="smNativeData" xmlns="smNativeData" val="SMDATA_16_V2g2ahMAAAAlAAAAZAAAAA0AAAAAkAAAAEgAAACQAAAASAAAAAAAAAACAAAAAAAAAAEAAABQAAAAAAAAAAAA4D8AAAAAAADgPwAAAAAAAOA/AAAAAAAA4D8AAAAAAADgPwAAAAAAAOA/AAAAAAAA4D8AAAAAAADgPwAAAAAAAOA/AAAAAAAA4D8CAAAAjAAAAAAAAAAAAAAA////AP///wgAAAAAAAAAAAAAAAAAAAAAAAAAAAAAAAAAAAAAeAAAAAEAAABAAAAAAAAAAAAAAABaAAAAAAAAAAAAAAAAAAAAAAAAAAAAAAAAAAAAAAAAAAAAAAAAAAAAAAAAAAAAAAAAAAAAAAAAAAAAAAAAAAAAAAAAAAAAAAAAAAAAFAAAADwAAAAAAAAAAAAAAAAAAAAPAAAAAQAAACMAAAAjAAAAIwAAAB4AAAAAAAAAZAAAAGQAAAAAAAAAZAAAAGQAAAAVAAAAYAAAAAAAAAAAAAAADwAAACADAAAAAAAAAAAAAAEAAACgMgAAVgcAAKr4//8BAAAAf39/AAEAAABkAAAAAAAAABQAAABAHwAAAAAAACYAAAAAAAAAwOD//wAAAAAmAAAAZAAAABYAAABMAAAAAAAAAAAAAAAEAAAAAAAAAAEAAADn5uYKAAAAACgAAAAoAAAAZAAAAGQAAAAAAAAAzMzMAAAAAABQAAAAUAAAAGQAAABkAAAAAAAAABcAAAAUAAAAAAAAAAAAAAD/fwAA/38AAAAAAAAJAAAABAAAAFkAaQAeAAAAaAAAAAAAAAAAAAAAAAAAAAAAAAAAAAAAECcAABAnAAAAAAAAAAAAAAAAAAAAAAAAAAAAAAAAAAAAAAAAAAAAABQAAAAAAAAAwMD/AAAAAABkAAAAMgAAAAAAAABkAAAAAAAAAH9/fwAKAAAAIgAAABgAAAAAAAAAAAAAAAAAAAAAAAAAAAAAAAAAAAAkAAAAJAAAAAAAAAAHAAAAAAAAAAAAAAAAAAAAAAAAAAAAAAAAAAAAf39/ACUAAABYAAAAAAAAAAAAAAAAAAAAAAAAAAAAAAAAAAAAAAAAAAAAAAAAAAAAAAAAAAAAAAA/AAAAAAAAAKCGAQAAAAAAAAAAAAAAAAAMAAAAAQAAAAAAAAAAAAAAAAAAAB8AAABUAAAA////AAAAAAEAAAAAAAAAAAAAAAAAAAAAAAAAAAAAAAAAAAAAAAAAAAAAAAB/f38AAAAAA8zMzADAwP8Af39/AAAAAAAAAAAAAAAAAAAAAAAAAAAAIQAAABgAAAAUAAAA5hcAAG41AAAuKgAAQDgAABAAAAAmAAAACAAAAL+PAAD/HwAAMAAAABQAAAAAAAAAAAD//wAAAQAAAP//AAABAA=="/>
               </a:ext>
             </a:extLst>
           </p:cNvSpPr>
@@ -544,7 +544,7 @@
           </a:lstStyle>
           <a:p>
             <a:pPr/>
-            <a:fld id="{2001ECBD-F3CD-541A-83B9-054FA2F77550}" type="slidenum">
+            <a:fld id="{69648869-2784-317E-CADC-D12BC6923C84}" type="slidenum">
               <a:t>‹#›</a:t>
             </a:fld>
           </a:p>
@@ -789,7 +789,7 @@
             <a:spLocks noGrp="1" noChangeArrowheads="1"/>
             <a:extLst>
               <a:ext uri="smNativeData">
-                <pr:smNativeData xmlns:pr="smNativeData" xmlns="smNativeData" val="SMDATA_16_kRU2ahMAAAAlAAAAZAAAAC0AAAAAkAAAAEgAAACQAAAASAAAAAAAAAABAAAAAAAAAAEAAABQAAAAAAAAAAAA4D8AAAAAAADgPwAAAAAAAOA/AAAAAAAA4D8AAAAAAADgPwAAAAAAAOA/AAAAAAAA4D8AAAAAAADgPwAAAAAAAOA/AAAAAAAA4D8CAAAAjAAAAAAAAAAAAAAARHLEDP///wgAAAAAAAAAAAAAAAAAAAAAAAAAAAAAAAAAAAAAZAAAAAEAAABAAAAAAAAAAAAAAAAAAAAAAAAAAAAAAAAAAAAAAAAAAAAAAAAAAAAAAAAAAAAAAAAAAAAAAAAAAAAAAAAAAAAAAAAAAAAAAAAAAAAAAAAAAAAAAAAAAAAAFAAAADwAAAABAAAAAAAAAAAAAAAUAAAAAQAAACMAAAAjAAAAIwAAAB4AAAAAAAAAZAAAAGQAAAAAAAAAZAAAAGQAAAAVAAAAYAAAAAAAAAAAAAAADwAAACADAAAAAAAAAAAAAAEAAACgMgAAVgcAAKr4//8BAAAAf39/AAEAAABkAAAAAAAAABQAAABAHwAAAAAAACYAAAAAAAAAwOD//wAAAAAmAAAAZAAAABYAAABMAAAAAAAAAAAAAAAEAAAAAAAAAAEAAADn5uYKAAAAACgAAAAoAAAAZAAAAGQAAAAAAAAAzMzMAAAAAABQAAAAUAAAAGQAAABkAAAAAAAAABcAAAAUAAAAAAAAAAAAAAD/fwAA/38AAAAAAAAJAAAABAAAAAAAAAAeAAAAaAAAAAAAAAAAAAAAAAAAAAAAAAAAAAAAECcAABAnAAAAAAAAAAAAAAAAAAAAAAAAAAAAAAAAAAAAAAAAAAAAABQAAAAAAAAAwMD/AAAAAABkAAAAMgAAAAAAAABkAAAAAAAAAH9/fwAKAAAAIgAAABgAAAAAAAAAAAAAAAAAAAAAAAAAAAAAAAAAAAAkAAAAJAAAAAAAAAAHAAAAAAAAAAAAAAAAAAAAAAAAAAAAAAAAAAAAf39/ACUAAABYAAAAAAAAAAAAAAAAAAAAAAAAAAAAAAAAAAAAAAAAAAAAAAAAAAAAAAAAAAAAAAA/AAAAAAAAAKCGAQAAAAAAAAAAAAAAAAAMAAAAAQAAAAAAAAAAAAAAAAAAAB8AAABUAAAAAAAABQAAAAEAAAAAAAAAAAAAAAAAAAAAAAAAAAAAAAAAAAAAAAAAAAAAAAB/f38AAAAAA8zMzADAwP8Af39/AAAAAAAAAAAAAAAAAAAAAAAAAAAAIQAAABgAAAAUAAAAOAQAAAgHAAD4JQAABBoAABAAAAAmAAAACAAAAAEAAAAAAAAAMAAAABQAAAAAAAAAAAD//wAAAQAAAP//AAABAA=="/>
+                <pr:smNativeData xmlns:pr="smNativeData" xmlns="smNativeData" val="SMDATA_16_V2g2ahMAAAAlAAAAZAAAAC0AAAAAkAAAAEgAAACQAAAASAAAAAAAAAABAAAAAAAAAAEAAABQAAAAAAAAAAAA4D8AAAAAAADgPwAAAAAAAOA/AAAAAAAA4D8AAAAAAADgPwAAAAAAAOA/AAAAAAAA4D8AAAAAAADgPwAAAAAAAOA/AAAAAAAA4D8CAAAAjAAAAAAAAAAAAAAARHLEDP///wgAAAAAAAAAAAAAAAAAAAAAAAAAAAAAAAAAAAAAZAAAAAEAAABAAAAAAAAAAAAAAAAAAAAAAAAAAAAAAAAAAAAAAAAAAAAAAAAAAAAAAAAAAAAAAAAAAAAAAAAAAAAAAAAAAAAAAAAAAAAAAAAAAAAAAAAAAAAAAAAAAAAAFAAAADwAAAABAAAAAAAAAAAAAAAUAAAAAQAAACMAAAAjAAAAIwAAAB4AAAAAAAAAZAAAAGQAAAAAAAAAZAAAAGQAAAAVAAAAYAAAAAAAAAAAAAAADwAAACADAAAAAAAAAAAAAAEAAACgMgAAVgcAAKr4//8BAAAAf39/AAEAAABkAAAAAAAAABQAAABAHwAAAAAAACYAAAAAAAAAwOD//wAAAAAmAAAAZAAAABYAAABMAAAAAAAAAAAAAAAEAAAAAAAAAAEAAADn5uYKAAAAACgAAAAoAAAAZAAAAGQAAAAAAAAAzMzMAAAAAABQAAAAUAAAAGQAAABkAAAAAAAAABcAAAAUAAAAAAAAAAAAAAD/fwAA/38AAAAAAAAJAAAABAAAAAAAAAAeAAAAaAAAAAAAAAAAAAAAAAAAAAAAAAAAAAAAECcAABAnAAAAAAAAAAAAAAAAAAAAAAAAAAAAAAAAAAAAAAAAAAAAABQAAAAAAAAAwMD/AAAAAABkAAAAMgAAAAAAAABkAAAAAAAAAH9/fwAKAAAAIgAAABgAAAAAAAAAAAAAAAAAAAAAAAAAAAAAAAAAAAAkAAAAJAAAAAAAAAAHAAAAAAAAAAAAAAAAAAAAAAAAAAAAAAAAAAAAf39/ACUAAABYAAAAAAAAAAAAAAAAAAAAAAAAAAAAAAAAAAAAAAAAAAAAAAAAAAAAAAAAAAAAAAA/AAAAAAAAAKCGAQAAAAAAAAAAAAAAAAAMAAAAAQAAAAAAAAAAAAAAAAAAAB8AAABUAAAAAAAABQAAAAEAAAAAAAAAAAAAAAAAAAAAAAAAAAAAAAAAAAAAAAAAAAAAAAB/f38AAAAAA8zMzADAwP8Af39/AAAAAAAAAAAAAAAAAAAAAAAAAAAAIQAAABgAAAAUAAAAOAQAAAgHAAD4JQAABBoAABAAAAAmAAAACAAAAAEAAAAAAAAAMAAAABQAAAAAAAAAAAD//wAAAQAAAP//AAABAA=="/>
               </a:ext>
             </a:extLst>
           </p:cNvSpPr>
@@ -811,7 +811,7 @@
             <a:spLocks noGrp="1" noChangeArrowheads="1"/>
             <a:extLst>
               <a:ext uri="smNativeData">
-                <pr:smNativeData xmlns:pr="smNativeData" xmlns="smNativeData" val="SMDATA_16_kRU2ahMAAAAlAAAAZAAAAA0AAAAAkAAAAEgAAACQAAAASAAAAAAAAAAAAAAAAAAAAAEAAABQAAAAAAAAAAAA4D8AAAAAAADgPwAAAAAAAOA/AAAAAAAA4D8AAAAAAADgPwAAAAAAAOA/AAAAAAAA4D8AAAAAAADgPwAAAAAAAOA/AAAAAAAA4D8CAAAAjAAAAAAAAAAAAAAA////AP///wgAAAAAAAAAAAAAAAAAAAAAAAAAAAAAAAAAAAAAeAAAAAEAAABAAAAAAAAAAAAAAABaAAAAAAAAAAAAAAAAAAAAAAAAAAAAAAAAAAAAAAAAAAAAAAAAAAAAAAAAAAAAAAAAAAAAAAAAAAAAAAAAAAAAAAAAAAAAAAAAAAAAFAAAADwAAAAAAAAAAAAAAAAAAAAPAAAAAQAAACMAAAAjAAAAIwAAAB4AAAAAAAAAZAAAAGQAAAAAAAAAZAAAAGQAAAAVAAAAYAAAAAAAAAAAAAAADwAAACADAAAAAAAAAAAAAAEAAACgMgAAVgcAAKr4//8BAAAAf39/AAEAAABkAAAAAAAAABQAAABAHwAAAAAAACYAAAAAAAAAwOD//wAAAAAmAAAAZAAAABYAAABMAAAAAAAAAAAAAAAEAAAAAAAAAAEAAADn5uYKAAAAACgAAAAoAAAAZAAAAGQAAAAAAAAAzMzMAAAAAABQAAAAUAAAAGQAAABkAAAAAAAAABcAAAAUAAAAAAAAAAAAAAD/fwAA/38AAAAAAAAJAAAABAAAAAAAAAAeAAAAaAAAAAAAAAAAAAAAAAAAAAAAAAAAAAAAECcAABAnAAAAAAAAAAAAAAAAAAAAAAAAAAAAAAAAAAAAAAAAAAAAABQAAAAAAAAAwMD/AAAAAABkAAAAMgAAAAAAAABkAAAAAAAAAH9/fwAKAAAAIgAAABgAAAAAAAAAAAAAAAAAAAAAAAAAAAAAAAAAAAAkAAAAJAAAAAAAAAAHAAAAAAAAAAAAAAAAAAAAAAAAAAAAAAAAAAAAf39/ACUAAABYAAAAAAAAAAAAAAAAAAAAAAAAAAAAAAAAAAAAAAAAAAAAAAAAAAAAAAAAAAAAAAA/AAAAAAAAAKCGAQAAAAAAAAAAAAAAAAAMAAAAAQAAAAAAAAAAAAAAAAAAAB8AAABUAAAA////AAAAAAEAAAAAAAAAAAAAAAAAAAAAAAAAAAAAAAAAAAAAAAAAAAAAAAB/f38AAAAAA8zMzADAwP8Af39/AAAAAAAAAAAAAAAAAAAAAAAAAAAAIQAAABgAAAAUAAAAOAQAABIbAAD4JQAAODEAABAAAAAmAAAACAAAAAEAAAAAAAAAMAAAABQAAAAAAAAAAAD//wAAAQAAAP//AAABAA=="/>
+                <pr:smNativeData xmlns:pr="smNativeData" xmlns="smNativeData" val="SMDATA_16_V2g2ahMAAAAlAAAAZAAAAA0AAAAAkAAAAEgAAACQAAAASAAAAAAAAAAAAAAAAAAAAAEAAABQAAAAAAAAAAAA4D8AAAAAAADgPwAAAAAAAOA/AAAAAAAA4D8AAAAAAADgPwAAAAAAAOA/AAAAAAAA4D8AAAAAAADgPwAAAAAAAOA/AAAAAAAA4D8CAAAAjAAAAAAAAAAAAAAA////AP///wgAAAAAAAAAAAAAAAAAAAAAAAAAAAAAAAAAAAAAeAAAAAEAAABAAAAAAAAAAAAAAABaAAAAAAAAAAAAAAAAAAAAAAAAAAAAAAAAAAAAAAAAAAAAAAAAAAAAAAAAAAAAAAAAAAAAAAAAAAAAAAAAAAAAAAAAAAAAAAAAAAAAFAAAADwAAAAAAAAAAAAAAAAAAAAPAAAAAQAAACMAAAAjAAAAIwAAAB4AAAAAAAAAZAAAAGQAAAAAAAAAZAAAAGQAAAAVAAAAYAAAAAAAAAAAAAAADwAAACADAAAAAAAAAAAAAAEAAACgMgAAVgcAAKr4//8BAAAAf39/AAEAAABkAAAAAAAAABQAAABAHwAAAAAAACYAAAAAAAAAwOD//wAAAAAmAAAAZAAAABYAAABMAAAAAAAAAAAAAAAEAAAAAAAAAAEAAADn5uYKAAAAACgAAAAoAAAAZAAAAGQAAAAAAAAAzMzMAAAAAABQAAAAUAAAAGQAAABkAAAAAAAAABcAAAAUAAAAAAAAAAAAAAD/fwAA/38AAAAAAAAJAAAABAAAAAAAAAAeAAAAaAAAAAAAAAAAAAAAAAAAAAAAAAAAAAAAECcAABAnAAAAAAAAAAAAAAAAAAAAAAAAAAAAAAAAAAAAAAAAAAAAABQAAAAAAAAAwMD/AAAAAABkAAAAMgAAAAAAAABkAAAAAAAAAH9/fwAKAAAAIgAAABgAAAAAAAAAAAAAAAAAAAAAAAAAAAAAAAAAAAAkAAAAJAAAAAAAAAAHAAAAAAAAAAAAAAAAAAAAAAAAAAAAAAAAAAAAf39/ACUAAABYAAAAAAAAAAAAAAAAAAAAAAAAAAAAAAAAAAAAAAAAAAAAAAAAAAAAAAAAAAAAAAA/AAAAAAAAAKCGAQAAAAAAAAAAAAAAAAAMAAAAAQAAAAAAAAAAAAAAAAAAAB8AAABUAAAA////AAAAAAEAAAAAAAAAAAAAAAAAAAAAAAAAAAAAAAAAAAAAAAAAAAAAAAB/f38AAAAAA8zMzADAwP8Af39/AAAAAAAAAAAAAAAAAAAAAAAAAAAAIQAAABgAAAAUAAAAOAQAABIbAAD4JQAAODEAABAAAAAmAAAACAAAAAEAAAAAAAAAMAAAABQAAAAAAAAAAAD//wAAAQAAAP//AAABAA=="/>
               </a:ext>
             </a:extLst>
           </p:cNvSpPr>
@@ -840,7 +840,7 @@
             <a:spLocks noGrp="1" noChangeArrowheads="1"/>
             <a:extLst>
               <a:ext uri="smNativeData">
-                <pr:smNativeData xmlns:pr="smNativeData" xmlns="smNativeData" val="SMDATA_16_kRU2ahMAAAAlAAAAZAAAAA0AAAAAkAAAAEgAAACQAAAASAAAAAAAAAACAAAAAAAAAAEAAABQAAAAAAAAAAAA4D8AAAAAAADgPwAAAAAAAOA/AAAAAAAA4D8AAAAAAADgPwAAAAAAAOA/AAAAAAAA4D8AAAAAAADgPwAAAAAAAOA/AAAAAAAA4D8CAAAAjAAAAAAAAAAAAAAA////AP///wgAAAAAAAAAAAAAAAAAAAAAAAAAAAAAAAAAAAAAeAAAAAEAAABAAAAAAAAAAAAAAABaAAAAAAAAAAAAAAAAAAAAAAAAAAAAAAAAAAAAAAAAAAAAAAAAAAAAAAAAAAAAAAAAAAAAAAAAAAAAAAAAAAAAAAAAAAAAAAAAAAAAFAAAADwAAAAAAAAAAAAAAAAAAAAPAAAAAQAAACMAAAAjAAAAIwAAAB4AAAAAAAAAZAAAAGQAAAAAAAAAZAAAAGQAAAAVAAAAYAAAAAAAAAAAAAAADwAAACADAAAAAAAAAAAAAAEAAACgMgAAVgcAAKr4//8BAAAAf39/AAEAAABkAAAAAAAAABQAAABAHwAAAAAAACYAAAAAAAAAwOD//wAAAAAmAAAAZAAAABYAAABMAAAAAAAAAAAAAAAEAAAAAAAAAAEAAADn5uYKAAAAACgAAAAoAAAAZAAAAGQAAAAAAAAAzMzMAAAAAABQAAAAUAAAAGQAAABkAAAAAAAAABcAAAAUAAAAAAAAAAAAAAD/fwAA/38AAAAAAAAJAAAABAAAAAAAAAAeAAAAaAAAAAAAAAAAAAAAAAAAAAAAAAAAAAAAECcAABAnAAAAAAAAAAAAAAAAAAAAAAAAAAAAAAAAAAAAAAAAAAAAABQAAAAAAAAAwMD/AAAAAABkAAAAMgAAAAAAAABkAAAAAAAAAH9/fwAKAAAAIgAAABgAAAAAAAAAAAAAAAAAAAAAAAAAAAAAAAAAAAAkAAAAJAAAAAAAAAAHAAAAAAAAAAAAAAAAAAAAAAAAAAAAAAAAAAAAf39/ACUAAABYAAAAAAAAAAAAAAAAAAAAAAAAAAAAAAAAAAAAAAAAAAAAAAAAAAAAAAAAAAAAAAA/AAAAAAAAAKCGAQAAAAAAAAAAAAAAAAAMAAAAAQAAAAAAAAAAAAAAAAAAAB8AAABUAAAA////AAAAAAEAAAAAAAAAAAAAAAAAAAAAAAAAAAAAAAAAAAAAAAAAAAAAAAB/f38AAAAAA8zMzADAwP8Af39/AAAAAAAAAAAAAAAAAAAAAAAAAAAAIQAAABgAAAAUAAAA5hcAAG41AAAuKgAAQDgAABAAAAAmAAAACAAAAAEAAAAAAAAAMAAAABQAAAAAAAAAAAD//wAAAQAAAP//AAABAA=="/>
+                <pr:smNativeData xmlns:pr="smNativeData" xmlns="smNativeData" val="SMDATA_16_V2g2ahMAAAAlAAAAZAAAAA0AAAAAkAAAAEgAAACQAAAASAAAAAAAAAACAAAAAAAAAAEAAABQAAAAAAAAAAAA4D8AAAAAAADgPwAAAAAAAOA/AAAAAAAA4D8AAAAAAADgPwAAAAAAAOA/AAAAAAAA4D8AAAAAAADgPwAAAAAAAOA/AAAAAAAA4D8CAAAAjAAAAAAAAAAAAAAA////AP///wgAAAAAAAAAAAAAAAAAAAAAAAAAAAAAAAAAAAAAeAAAAAEAAABAAAAAAAAAAAAAAABaAAAAAAAAAAAAAAAAAAAAAAAAAAAAAAAAAAAAAAAAAAAAAAAAAAAAAAAAAAAAAAAAAAAAAAAAAAAAAAAAAAAAAAAAAAAAAAAAAAAAFAAAADwAAAAAAAAAAAAAAAAAAAAPAAAAAQAAACMAAAAjAAAAIwAAAB4AAAAAAAAAZAAAAGQAAAAAAAAAZAAAAGQAAAAVAAAAYAAAAAAAAAAAAAAADwAAACADAAAAAAAAAAAAAAEAAACgMgAAVgcAAKr4//8BAAAAf39/AAEAAABkAAAAAAAAABQAAABAHwAAAAAAACYAAAAAAAAAwOD//wAAAAAmAAAAZAAAABYAAABMAAAAAAAAAAAAAAAEAAAAAAAAAAEAAADn5uYKAAAAACgAAAAoAAAAZAAAAGQAAAAAAAAAzMzMAAAAAABQAAAAUAAAAGQAAABkAAAAAAAAABcAAAAUAAAAAAAAAAAAAAD/fwAA/38AAAAAAAAJAAAABAAAAAAAAAAeAAAAaAAAAAAAAAAAAAAAAAAAAAAAAAAAAAAAECcAABAnAAAAAAAAAAAAAAAAAAAAAAAAAAAAAAAAAAAAAAAAAAAAABQAAAAAAAAAwMD/AAAAAABkAAAAMgAAAAAAAABkAAAAAAAAAH9/fwAKAAAAIgAAABgAAAAAAAAAAAAAAAAAAAAAAAAAAAAAAAAAAAAkAAAAJAAAAAAAAAAHAAAAAAAAAAAAAAAAAAAAAAAAAAAAAAAAAAAAf39/ACUAAABYAAAAAAAAAAAAAAAAAAAAAAAAAAAAAAAAAAAAAAAAAAAAAAAAAAAAAAAAAAAAAAA/AAAAAAAAAKCGAQAAAAAAAAAAAAAAAAAMAAAAAQAAAAAAAAAAAAAAAAAAAB8AAABUAAAA////AAAAAAEAAAAAAAAAAAAAAAAAAAAAAAAAAAAAAAAAAAAAAAAAAAAAAAB/f38AAAAAA8zMzADAwP8Af39/AAAAAAAAAAAAAAAAAAAAAAAAAAAAIQAAABgAAAAUAAAA5hcAAG41AAAuKgAAQDgAABAAAAAmAAAACAAAAAEAAAAAAAAAMAAAABQAAAAAAAAAAAD//wAAAQAAAP//AAABAA=="/>
               </a:ext>
             </a:extLst>
           </p:cNvSpPr>
@@ -859,7 +859,7 @@
           <a:lstStyle/>
           <a:p>
             <a:pPr/>
-            <a:fld id="{33F944BD-F3DE-ACB2-9041-05E70A0F6650}" type="slidenum">
+            <a:fld id="{0FABE30B-45E2-FE15-AC13-B340AD5D5AE6}" type="slidenum">
               <a:t>1</a:t>
             </a:fld>
           </a:p>
@@ -905,7 +905,7 @@
             <a:spLocks noGrp="1" noChangeArrowheads="1"/>
             <a:extLst>
               <a:ext uri="smNativeData">
-                <pr:smNativeData xmlns:pr="smNativeData" xmlns="smNativeData" val="SMDATA_16_kRU2ahMAAAAlAAAAZAAAAC0AAAAAkAAAAEgAAACQAAAASAAAAAAAAAABAAAAAAAAAAEAAABQAAAAAAAAAAAA4D8AAAAAAADgPwAAAAAAAOA/AAAAAAAA4D8AAAAAAADgPwAAAAAAAOA/AAAAAAAA4D8AAAAAAADgPwAAAAAAAOA/AAAAAAAA4D8CAAAAjAAAAAAAAAAAAAAARHLEDP///wgAAAAAAAAAAAAAAAAAAAAAAAAAAAAAAAAAAAAAZAAAAAEAAABAAAAAAAAAAAAAAAAAAAAAAAAAAAAAAAAAAAAAAAAAAAAAAAAAAAAAAAAAAAAAAAAAAAAAAAAAAAAAAAAAAAAAAAAAAAAAAAAAAAAAAAAAAAAAAAAAAAAAFAAAADwAAAABAAAAAAAAAAAAAAAUAAAAAQAAACMAAAAjAAAAIwAAAB4AAAAAAAAAZAAAAGQAAAAAAAAAZAAAAGQAAAAVAAAAYAAAAAAAAAAAAAAADwAAACADAAAAAAAAAAAAAAEAAACgMgAAVgcAAKr4//8BAAAAf39/AAEAAABkAAAAAAAAABQAAABAHwAAAAAAACYAAAAAAAAAwOD//wAAAAAmAAAAZAAAABYAAABMAAAAAAAAAAAAAAAEAAAAAAAAAAEAAADn5uYKAAAAACgAAAAoAAAAZAAAAGQAAAAAAAAAzMzMAAAAAABQAAAAUAAAAGQAAABkAAAAAAAAABcAAAAUAAAAAAAAAAAAAAD/fwAA/38AAAAAAAAJAAAABAAAAAAAAAAeAAAAaAAAAAAAAAAAAAAAAAAAAAAAAAAAAAAAECcAABAnAAAAAAAAAAAAAAAAAAAAAAAAAAAAAAAAAAAAAAAAAAAAABQAAAAAAAAAwMD/AAAAAABkAAAAMgAAAAAAAABkAAAAAAAAAH9/fwAKAAAAIgAAABgAAAAAAAAAAAAAAAAAAAAAAAAAAAAAAAAAAAAkAAAAJAAAAAAAAAAHAAAAAAAAAAAAAAAAAAAAAAAAAAAAAAAAAAAAf39/ACUAAABYAAAAAAAAAAAAAAAAAAAAAAAAAAAAAAAAAAAAAAAAAAAAAAAAAAAAAAAAAAAAAAA/AAAAAAAAAKCGAQAAAAAAAAAAAAAAAAAMAAAAAQAAAAAAAAAAAAAAAAAAAB8AAABUAAAAAAAABQAAAAEAAAAAAAAAAAAAAAAAAAAAAAAAAAAAAAAAAAAAAAAAAAAAAAB/f38AAAAAA8zMzADAwP8Af39/AAAAAAAAAAAAAAAAAAAAAAAAAAAAIQAAABgAAAAUAAAAOAQAAAgHAAD4JQAABBoAABAAAAAmAAAACAAAAAEAAAAAAAAAMAAAABQAAAAAAAAAAAD//wAAAQAAAP//AAABAA=="/>
+                <pr:smNativeData xmlns:pr="smNativeData" xmlns="smNativeData" val="SMDATA_16_V2g2ahMAAAAlAAAAZAAAAC0AAAAAkAAAAEgAAACQAAAASAAAAAAAAAABAAAAAAAAAAEAAABQAAAAAAAAAAAA4D8AAAAAAADgPwAAAAAAAOA/AAAAAAAA4D8AAAAAAADgPwAAAAAAAOA/AAAAAAAA4D8AAAAAAADgPwAAAAAAAOA/AAAAAAAA4D8CAAAAjAAAAAAAAAAAAAAARHLEDP///wgAAAAAAAAAAAAAAAAAAAAAAAAAAAAAAAAAAAAAZAAAAAEAAABAAAAAAAAAAAAAAAAAAAAAAAAAAAAAAAAAAAAAAAAAAAAAAAAAAAAAAAAAAAAAAAAAAAAAAAAAAAAAAAAAAAAAAAAAAAAAAAAAAAAAAAAAAAAAAAAAAAAAFAAAADwAAAABAAAAAAAAAAAAAAAUAAAAAQAAACMAAAAjAAAAIwAAAB4AAAAAAAAAZAAAAGQAAAAAAAAAZAAAAGQAAAAVAAAAYAAAAAAAAAAAAAAADwAAACADAAAAAAAAAAAAAAEAAACgMgAAVgcAAKr4//8BAAAAf39/AAEAAABkAAAAAAAAABQAAABAHwAAAAAAACYAAAAAAAAAwOD//wAAAAAmAAAAZAAAABYAAABMAAAAAAAAAAAAAAAEAAAAAAAAAAEAAADn5uYKAAAAACgAAAAoAAAAZAAAAGQAAAAAAAAAzMzMAAAAAABQAAAAUAAAAGQAAABkAAAAAAAAABcAAAAUAAAAAAAAAAAAAAD/fwAA/38AAAAAAAAJAAAABAAAAAAAAAAeAAAAaAAAAAAAAAAAAAAAAAAAAAAAAAAAAAAAECcAABAnAAAAAAAAAAAAAAAAAAAAAAAAAAAAAAAAAAAAAAAAAAAAABQAAAAAAAAAwMD/AAAAAABkAAAAMgAAAAAAAABkAAAAAAAAAH9/fwAKAAAAIgAAABgAAAAAAAAAAAAAAAAAAAAAAAAAAAAAAAAAAAAkAAAAJAAAAAAAAAAHAAAAAAAAAAAAAAAAAAAAAAAAAAAAAAAAAAAAf39/ACUAAABYAAAAAAAAAAAAAAAAAAAAAAAAAAAAAAAAAAAAAAAAAAAAAAAAAAAAAAAAAAAAAAA/AAAAAAAAAKCGAQAAAAAAAAAAAAAAAAAMAAAAAQAAAAAAAAAAAAAAAAAAAB8AAABUAAAAAAAABQAAAAEAAAAAAAAAAAAAAAAAAAAAAAAAAAAAAAAAAAAAAAAAAAAAAAB/f38AAAAAA8zMzADAwP8Af39/AAAAAAAAAAAAAAAAAAAAAAAAAAAAIQAAABgAAAAUAAAAOAQAAAgHAAD4JQAABBoAABAAAAAmAAAACAAAAAEAAAAAAAAAMAAAABQAAAAAAAAAAAD//wAAAQAAAP//AAABAA=="/>
               </a:ext>
             </a:extLst>
           </p:cNvSpPr>
@@ -927,7 +927,7 @@
             <a:spLocks noGrp="1" noChangeArrowheads="1"/>
             <a:extLst>
               <a:ext uri="smNativeData">
-                <pr:smNativeData xmlns:pr="smNativeData" xmlns="smNativeData" val="SMDATA_16_kRU2ahMAAAAlAAAAZAAAAA0AAAAAkAAAAEgAAACQAAAASAAAAAAAAAAAAAAAAAAAAAEAAABQAAAAAAAAAAAA4D8AAAAAAADgPwAAAAAAAOA/AAAAAAAA4D8AAAAAAADgPwAAAAAAAOA/AAAAAAAA4D8AAAAAAADgPwAAAAAAAOA/AAAAAAAA4D8CAAAAjAAAAAAAAAAAAAAARHLEDP///wgAAAAAAAAAAAAAAAAAAAAAAAAAAAAAAAAAAAAAZAAAAAEAAABAAAAAAAAAAAAAAAAAAAAAAAAAAAAAAAAAAAAAAAAAAAAAAAAAAAAAAAAAAAAAAAAAAAAAAAAAAAAAAAAAAAAAAAAAAAAAAAAAAAAAAAAAAAAAAAAAAAAAFAAAADwAAAAAAAAAAAAAAAAAAAkUAAAAAQAAABQAAAAUAAAAFAAAAAEAAAAAAAAAZAAAAGQAAAAAAAAAZAAAAGQAAAAVAAAAYAAAAAAAAAAAAAAADwAAACADAAAAAAAAAAAAAAEAAACgMgAAVgcAAKr4//8BAAAAf39/AAEAAABkAAAAAAAAABQAAABAHwAAAAAAACYAAAAAAAAAwOD//wAAAAAmAAAAZAAAABYAAABMAAAAAAAAAAAAAAAEAAAAAAAAAAEAAADn5uYKAAAAACgAAAAoAAAAZAAAAGQAAAAAAAAAzMzMAAAAAABQAAAAUAAAAGQAAABkAAAAAAAAABcAAAAUAAAAAAAAAAAAAAD/fwAA/38AAAAAAAAJAAAABAAAAAAAAAAeAAAAaAAAAAAAAAAAAAAAAAAAAAAAAAAAAAAAECcAABAnAAAAAAAAAAAAAAAAAAAAAAAAAAAAAAAAAAAAAAAAAAAAABQAAAAAAAAAwMD/AAAAAABkAAAAMgAAAAAAAABkAAAAAAAAAH9/fwAKAAAAIgAAABgAAAAAAAAAAAAAAAAAAAAAAAAAAAAAAAAAAAAkAAAAJAAAAAAAAAAHAAAAAAAAAAAAAAAAAAAAAAAAAAAAAAAAAAAAf39/ACUAAABYAAAAAAAAAAAAAAAAAAAAAAAAAAAAAAAAAAAAAAAAAAAAAAAAAAAAAAAAAAAAAAA/AAAAAAAAAKCGAQAAAAAAAAAAAAAAAAAMAAAAAQAAAAAAAAAAAAAAAAAAAB8AAABUAAAAAAAABQAAAAEAAAAAAAAAAAAAAAAAAAAAAAAAAAAAAAAAAAAAAAAAAAAAAAJ/f38AAAAAA8zMzADAwP8Af39/AAAAAAAAAAAAAAAAAAAAAAAAAAAAIQAAABgAAAAUAAAAOAQAABIbAAD4JQAAODEAABAAAAAmAAAACAAAAAEAAAAAAAAAMAAAABQAAAAAAAAAAAD//wAAAQAAAP//AAABAA=="/>
+                <pr:smNativeData xmlns:pr="smNativeData" xmlns="smNativeData" val="SMDATA_16_V2g2ahMAAAAlAAAAZAAAAA0AAAAAkAAAAEgAAACQAAAASAAAAAAAAAAAAAAAAAAAAAEAAABQAAAAAAAAAAAA4D8AAAAAAADgPwAAAAAAAOA/AAAAAAAA4D8AAAAAAADgPwAAAAAAAOA/AAAAAAAA4D8AAAAAAADgPwAAAAAAAOA/AAAAAAAA4D8CAAAAjAAAAAAAAAAAAAAARHLEDP///wgAAAAAAAAAAAAAAAAAAAAAAAAAAAAAAAAAAAAAZAAAAAEAAABAAAAAAAAAAAAAAAAAAAAAAAAAAAAAAAAAAAAAAAAAAAAAAAAAAAAAAAAAAAAAAAAAAAAAAAAAAAAAAAAAAAAAAAAAAAAAAAAAAAAAAAAAAAAAAAAAAAAAFAAAADwAAAAAAAAAAAAAAAAAAAkUAAAAAQAAABQAAAAUAAAAFAAAAAEAAAAAAAAAZAAAAGQAAAAAAAAAZAAAAGQAAAAVAAAAYAAAAAAAAAAAAAAADwAAACADAAAAAAAAAAAAAAEAAACgMgAAVgcAAKr4//8BAAAAf39/AAEAAABkAAAAAAAAABQAAABAHwAAAAAAACYAAAAAAAAAwOD//wAAAAAmAAAAZAAAABYAAABMAAAAAAAAAAAAAAAEAAAAAAAAAAEAAADn5uYKAAAAACgAAAAoAAAAZAAAAGQAAAAAAAAAzMzMAAAAAABQAAAAUAAAAGQAAABkAAAAAAAAABcAAAAUAAAAAAAAAAAAAAD/fwAA/38AAAAAAAAJAAAABAAAAAAAAAAeAAAAaAAAAAAAAAAAAAAAAAAAAAAAAAAAAAAAECcAABAnAAAAAAAAAAAAAAAAAAAAAAAAAAAAAAAAAAAAAAAAAAAAABQAAAAAAAAAwMD/AAAAAABkAAAAMgAAAAAAAABkAAAAAAAAAH9/fwAKAAAAIgAAABgAAAAAAAAAAAAAAAAAAAAAAAAAAAAAAAAAAAAkAAAAJAAAAAAAAAAHAAAAAAAAAAAAAAAAAAAAAAAAAAAAAAAAAAAAf39/ACUAAABYAAAAAAAAAAAAAAAAAAAAAAAAAAAAAAAAAAAAAAAAAAAAAAAAAAAAAAAAAAAAAAA/AAAAAAAAAKCGAQAAAAAAAAAAAAAAAAAMAAAAAQAAAAAAAAAAAAAAAAAAAB8AAABUAAAAAAAABQAAAAEAAAAAAAAAAAAAAAAAAAAAAAAAAAAAAAAAAAAAAAAAAAAAAAJ/f38AAAAAA8zMzADAwP8Af39/AAAAAAAAAAAAAAAAAAAAAAAAAAAAIQAAABgAAAAUAAAAOAQAABIbAAD4JQAAODEAABAAAAAmAAAACAAAAAEAAAAAAAAAMAAAABQAAAAAAAAAAAD//wAAAQAAAP//AAABAA=="/>
               </a:ext>
             </a:extLst>
           </p:cNvSpPr>
@@ -956,7 +956,7 @@
             <a:spLocks noGrp="1" noChangeArrowheads="1"/>
             <a:extLst>
               <a:ext uri="smNativeData">
-                <pr:smNativeData xmlns:pr="smNativeData" xmlns="smNativeData" val="SMDATA_16_kRU2ahMAAAAlAAAAZAAAAA0AAAAAkAAAAEgAAACQAAAASAAAAAAAAAACAAAAAAAAAAEAAABQAAAAAAAAAAAA4D8AAAAAAADgPwAAAAAAAOA/AAAAAAAA4D8AAAAAAADgPwAAAAAAAOA/AAAAAAAA4D8AAAAAAADgPwAAAAAAAOA/AAAAAAAA4D8CAAAAjAAAAAAAAAAAAAAARHLEDP///wgAAAAAAAAAAAAAAAAAAAAAAAAAAAAAAAAAAAAAZAAAAAEAAABAAAAAAAAAAAAAAAAAAAAAAAAAAAAAAAAAAAAAAAAAAAAAAAAAAAAAAAAAAAAAAAAAAAAAAAAAAAAAAAAAAAAAAAAAAAAAAAAAAAAAAAAAAAAAAAAAAAAAFAAAADwAAAAAAAAAAAAAAAAAAAkUAAAAAQAAABQAAAAUAAAAFAAAAAEAAAAAAAAAZAAAAGQAAAAAAAAAZAAAAGQAAAAVAAAAYAAAAAAAAAAAAAAADwAAACADAAAAAAAAAAAAAAEAAACgMgAAVgcAAKr4//8BAAAAf39/AAEAAABkAAAAAAAAABQAAABAHwAAAAAAACYAAAAAAAAAwOD//wAAAAAmAAAAZAAAABYAAABMAAAAAAAAAAAAAAAEAAAAAAAAAAEAAADn5uYKAAAAACgAAAAoAAAAZAAAAGQAAAAAAAAAzMzMAAAAAABQAAAAUAAAAGQAAABkAAAAAAAAABcAAAAUAAAAAAAAAAAAAAD/fwAA/38AAAAAAAAJAAAABAAAAAAAAAAeAAAAaAAAAAAAAAAAAAAAAAAAAAAAAAAAAAAAECcAABAnAAAAAAAAAAAAAAAAAAAAAAAAAAAAAAAAAAAAAAAAAAAAABQAAAAAAAAAwMD/AAAAAABkAAAAMgAAAAAAAABkAAAAAAAAAH9/fwAKAAAAIgAAABgAAAAAAAAAAAAAAAAAAAAAAAAAAAAAAAAAAAAkAAAAJAAAAAAAAAAHAAAAAAAAAAAAAAAAAAAAAAAAAAAAAAAAAAAAf39/ACUAAABYAAAAAAAAAAAAAAAAAAAAAAAAAAAAAAAAAAAAAAAAAAAAAAAAAAAAAAAAAAAAAAA/AAAAAAAAAKCGAQAAAAAAAAAAAAAAAAAMAAAAAQAAAAAAAAAAAAAAAAAAAB8AAABUAAAAAAAABQAAAAEAAAAAAAAAAAAAAAAAAAAAAAAAAAAAAAAAAAAAAAAAAAAAAAJ/f38AAAAAA8zMzADAwP8Af39/AAAAAAAAAAAAAAAAAAAAAAAAAAAAIQAAABgAAAAUAAAA5hcAAG41AAAuKgAAQDgAABAAAAAmAAAACAAAAAEAAAAAAAAAMAAAABQAAAAAAAAAAAD//wAAAQAAAP//AAABAA=="/>
+                <pr:smNativeData xmlns:pr="smNativeData" xmlns="smNativeData" val="SMDATA_16_V2g2ahMAAAAlAAAAZAAAAA0AAAAAkAAAAEgAAACQAAAASAAAAAAAAAACAAAAAAAAAAEAAABQAAAAAAAAAAAA4D8AAAAAAADgPwAAAAAAAOA/AAAAAAAA4D8AAAAAAADgPwAAAAAAAOA/AAAAAAAA4D8AAAAAAADgPwAAAAAAAOA/AAAAAAAA4D8CAAAAjAAAAAAAAAAAAAAARHLEDP///wgAAAAAAAAAAAAAAAAAAAAAAAAAAAAAAAAAAAAAZAAAAAEAAABAAAAAAAAAAAAAAAAAAAAAAAAAAAAAAAAAAAAAAAAAAAAAAAAAAAAAAAAAAAAAAAAAAAAAAAAAAAAAAAAAAAAAAAAAAAAAAAAAAAAAAAAAAAAAAAAAAAAAFAAAADwAAAAAAAAAAAAAAAAAAAkUAAAAAQAAABQAAAAUAAAAFAAAAAEAAAAAAAAAZAAAAGQAAAAAAAAAZAAAAGQAAAAVAAAAYAAAAAAAAAAAAAAADwAAACADAAAAAAAAAAAAAAEAAACgMgAAVgcAAKr4//8BAAAAf39/AAEAAABkAAAAAAAAABQAAABAHwAAAAAAACYAAAAAAAAAwOD//wAAAAAmAAAAZAAAABYAAABMAAAAAAAAAAAAAAAEAAAAAAAAAAEAAADn5uYKAAAAACgAAAAoAAAAZAAAAGQAAAAAAAAAzMzMAAAAAABQAAAAUAAAAGQAAABkAAAAAAAAABcAAAAUAAAAAAAAAAAAAAD/fwAA/38AAAAAAAAJAAAABAAAAAAAAAAeAAAAaAAAAAAAAAAAAAAAAAAAAAAAAAAAAAAAECcAABAnAAAAAAAAAAAAAAAAAAAAAAAAAAAAAAAAAAAAAAAAAAAAABQAAAAAAAAAwMD/AAAAAABkAAAAMgAAAAAAAABkAAAAAAAAAH9/fwAKAAAAIgAAABgAAAAAAAAAAAAAAAAAAAAAAAAAAAAAAAAAAAAkAAAAJAAAAAAAAAAHAAAAAAAAAAAAAAAAAAAAAAAAAAAAAAAAAAAAf39/ACUAAABYAAAAAAAAAAAAAAAAAAAAAAAAAAAAAAAAAAAAAAAAAAAAAAAAAAAAAAAAAAAAAAA/AAAAAAAAAKCGAQAAAAAAAAAAAAAAAAAMAAAAAQAAAAAAAAAAAAAAAAAAAB8AAABUAAAAAAAABQAAAAEAAAAAAAAAAAAAAAAAAAAAAAAAAAAAAAAAAAAAAAAAAAAAAAJ/f38AAAAAA8zMzADAwP8Af39/AAAAAAAAAAAAAAAAAAAAAAAAAAAAIQAAABgAAAAUAAAA5hcAAG41AAAuKgAAQDgAABAAAAAmAAAACAAAAAEAAAAAAAAAMAAAABQAAAAAAAAAAAD//wAAAQAAAP//AAABAA=="/>
               </a:ext>
             </a:extLst>
           </p:cNvSpPr>
@@ -975,7 +975,7 @@
           <a:lstStyle/>
           <a:p>
             <a:pPr/>
-            <a:fld id="{1CB1DA41-0FF1-E42C-BF09-F979944749AC}" type="slidenum">
+            <a:fld id="{50190B8E-C0BD-4CFD-F3A1-36A845EF0563}" type="slidenum">
               <a:rPr lang="en-us" cap="none"/>
               <a:t>10</a:t>
             </a:fld>
@@ -1023,7 +1023,7 @@
             <a:spLocks noGrp="1" noChangeArrowheads="1"/>
             <a:extLst>
               <a:ext uri="smNativeData">
-                <pr:smNativeData xmlns:pr="smNativeData" xmlns="smNativeData" val="SMDATA_16_kRU2ahMAAAAlAAAAZAAAAC0AAAAAkAAAAEgAAACQAAAASAAAAAAAAAABAAAAAAAAAAEAAABQAAAAAAAAAAAA4D8AAAAAAADgPwAAAAAAAOA/AAAAAAAA4D8AAAAAAADgPwAAAAAAAOA/AAAAAAAA4D8AAAAAAADgPwAAAAAAAOA/AAAAAAAA4D8CAAAAjAAAAAAAAAAAAAAARHLEDP///wgAAAAAAAAAAAAAAAAAAAAAAAAAAAAAAAAAAAAAZAAAAAEAAABAAAAAAAAAAAAAAAAAAAAAAAAAAAAAAAAAAAAAAAAAAAAAAAAAAAAAAAAAAAAAAAAAAAAAAAAAAAAAAAAAAAAAAAAAAAAAAAAAAAAAAAAAAAAAAAAAAAAAFAAAADwAAAABAAAAAAAAAAAAAAAUAAAAAQAAACMAAAAjAAAAIwAAAB4AAAAAAAAAZAAAAGQAAAAAAAAAZAAAAGQAAAAVAAAAYAAAAAAAAAAAAAAADwAAACADAAAAAAAAAAAAAAEAAACgMgAAVgcAAKr4//8BAAAAf39/AAEAAABkAAAAAAAAABQAAABAHwAAAAAAACYAAAAAAAAAwOD//wAAAAAmAAAAZAAAABYAAABMAAAAAAAAAAAAAAAEAAAAAAAAAAEAAADn5uYKAAAAACgAAAAoAAAAZAAAAGQAAAAAAAAAzMzMAAAAAABQAAAAUAAAAGQAAABkAAAAAAAAABcAAAAUAAAAAAAAAAAAAAD/fwAA/38AAAAAAAAJAAAABAAAAAAAAAAeAAAAaAAAAAAAAAAAAAAAAAAAAAAAAAAAAAAAECcAABAnAAAAAAAAAAAAAAAAAAAAAAAAAAAAAAAAAAAAAAAAAAAAABQAAAAAAAAAwMD/AAAAAABkAAAAMgAAAAAAAABkAAAAAAAAAH9/fwAKAAAAIgAAABgAAAAAAAAAAAAAAAAAAAAAAAAAAAAAAAAAAAAkAAAAJAAAAAAAAAAHAAAAAAAAAAAAAAAAAAAAAAAAAAAAAAAAAAAAf39/ACUAAABYAAAAAAAAAAAAAAAAAAAAAAAAAAAAAAAAAAAAAAAAAAAAAAAAAAAAAAAAAAAAAAA/AAAAAAAAAKCGAQAAAAAAAAAAAAAAAAAMAAAAAQAAAAAAAAAAAAAAAAAAAB8AAABUAAAAAAAABQAAAAEAAAAAAAAAAAAAAAAAAAAAAAAAAAAAAAAAAAAAAAAAAAAAAAB/f38AAAAAA8zMzADAwP8Af39/AAAAAAAAAAAAAAAAAAAAAAAAAAAAIQAAABgAAAAUAAAAOAQAAAgHAAD4JQAABBoAABAAAAAmAAAACAAAAAEAAAAAAAAAMAAAABQAAAAAAAAAAAD//wAAAQAAAP//AAABAA=="/>
+                <pr:smNativeData xmlns:pr="smNativeData" xmlns="smNativeData" val="SMDATA_16_V2g2ahMAAAAlAAAAZAAAAC0AAAAAkAAAAEgAAACQAAAASAAAAAAAAAABAAAAAAAAAAEAAABQAAAAAAAAAAAA4D8AAAAAAADgPwAAAAAAAOA/AAAAAAAA4D8AAAAAAADgPwAAAAAAAOA/AAAAAAAA4D8AAAAAAADgPwAAAAAAAOA/AAAAAAAA4D8CAAAAjAAAAAAAAAAAAAAARHLEDP///wgAAAAAAAAAAAAAAAAAAAAAAAAAAAAAAAAAAAAAZAAAAAEAAABAAAAAAAAAAAAAAAAAAAAAAAAAAAAAAAAAAAAAAAAAAAAAAAAAAAAAAAAAAAAAAAAAAAAAAAAAAAAAAAAAAAAAAAAAAAAAAAAAAAAAAAAAAAAAAAAAAAAAFAAAADwAAAABAAAAAAAAAAAAAAAUAAAAAQAAACMAAAAjAAAAIwAAAB4AAAAAAAAAZAAAAGQAAAAAAAAAZAAAAGQAAAAVAAAAYAAAAAAAAAAAAAAADwAAACADAAAAAAAAAAAAAAEAAACgMgAAVgcAAKr4//8BAAAAf39/AAEAAABkAAAAAAAAABQAAABAHwAAAAAAACYAAAAAAAAAwOD//wAAAAAmAAAAZAAAABYAAABMAAAAAAAAAAAAAAAEAAAAAAAAAAEAAADn5uYKAAAAACgAAAAoAAAAZAAAAGQAAAAAAAAAzMzMAAAAAABQAAAAUAAAAGQAAABkAAAAAAAAABcAAAAUAAAAAAAAAAAAAAD/fwAA/38AAAAAAAAJAAAABAAAAAAAAAAeAAAAaAAAAAAAAAAAAAAAAAAAAAAAAAAAAAAAECcAABAnAAAAAAAAAAAAAAAAAAAAAAAAAAAAAAAAAAAAAAAAAAAAABQAAAAAAAAAwMD/AAAAAABkAAAAMgAAAAAAAABkAAAAAAAAAH9/fwAKAAAAIgAAABgAAAAAAAAAAAAAAAAAAAAAAAAAAAAAAAAAAAAkAAAAJAAAAAAAAAAHAAAAAAAAAAAAAAAAAAAAAAAAAAAAAAAAAAAAf39/ACUAAABYAAAAAAAAAAAAAAAAAAAAAAAAAAAAAAAAAAAAAAAAAAAAAAAAAAAAAAAAAAAAAAA/AAAAAAAAAKCGAQAAAAAAAAAAAAAAAAAMAAAAAQAAAAAAAAAAAAAAAAAAAB8AAABUAAAAAAAABQAAAAEAAAAAAAAAAAAAAAAAAAAAAAAAAAAAAAAAAAAAAAAAAAAAAAB/f38AAAAAA8zMzADAwP8Af39/AAAAAAAAAAAAAAAAAAAAAAAAAAAAIQAAABgAAAAUAAAAOAQAAAgHAAD4JQAABBoAABAAAAAmAAAACAAAAAEAAAAAAAAAMAAAABQAAAAAAAAAAAD//wAAAQAAAP//AAABAA=="/>
               </a:ext>
             </a:extLst>
           </p:cNvSpPr>
@@ -1045,7 +1045,7 @@
             <a:spLocks noGrp="1" noChangeArrowheads="1"/>
             <a:extLst>
               <a:ext uri="smNativeData">
-                <pr:smNativeData xmlns:pr="smNativeData" xmlns="smNativeData" val="SMDATA_16_kRU2ahMAAAAlAAAAZAAAAA0AAAAAkAAAAEgAAACQAAAASAAAAAAAAAAAAAAAAAAAAAEAAABQAAAAAAAAAAAA4D8AAAAAAADgPwAAAAAAAOA/AAAAAAAA4D8AAAAAAADgPwAAAAAAAOA/AAAAAAAA4D8AAAAAAADgPwAAAAAAAOA/AAAAAAAA4D8CAAAAjAAAAAAAAAAAAAAARHLEDP///wgAAAAAAAAAAAAAAAAAAAAAAAAAAAAAAAAAAAAAZAAAAAEAAABAAAAAAAAAAAAAAAAAAAAAAAAAAAAAAAAAAAAAAAAAAAAAAAAAAAAAAAAAAAAAAAAAAAAAAAAAAAAAAAAAAAAAAAAAAAAAAAAAAAAAAAAAAAAAAAAAAAAAFAAAADwAAAAAAAAAAAAAAAAAAAkUAAAAAQAAABQAAAAUAAAAFAAAAAEAAAAAAAAAZAAAAGQAAAAAAAAAZAAAAGQAAAAVAAAAYAAAAAAAAAAAAAAADwAAACADAAAAAAAAAAAAAAEAAACgMgAAVgcAAKr4//8BAAAAf39/AAEAAABkAAAAAAAAABQAAABAHwAAAAAAACYAAAAAAAAAwOD//wAAAAAmAAAAZAAAABYAAABMAAAAAAAAAAAAAAAEAAAAAAAAAAEAAADn5uYKAAAAACgAAAAoAAAAZAAAAGQAAAAAAAAAzMzMAAAAAABQAAAAUAAAAGQAAABkAAAAAAAAABcAAAAUAAAAAAAAAAAAAAD/fwAA/38AAAAAAAAJAAAABAAAAAAAAAAeAAAAaAAAAAAAAAAAAAAAAAAAAAAAAAAAAAAAECcAABAnAAAAAAAAAAAAAAAAAAAAAAAAAAAAAAAAAAAAAAAAAAAAABQAAAAAAAAAwMD/AAAAAABkAAAAMgAAAAAAAABkAAAAAAAAAH9/fwAKAAAAIgAAABgAAAAAAAAAAAAAAAAAAAAAAAAAAAAAAAAAAAAkAAAAJAAAAAAAAAAHAAAAAAAAAAAAAAAAAAAAAAAAAAAAAAAAAAAAf39/ACUAAABYAAAAAAAAAAAAAAAAAAAAAAAAAAAAAAAAAAAAAAAAAAAAAAAAAAAAAAAAAAAAAAA/AAAAAAAAAKCGAQAAAAAAAAAAAAAAAAAMAAAAAQAAAAAAAAAAAAAAAAAAAB8AAABUAAAAAAAABQAAAAEAAAAAAAAAAAAAAAAAAAAAAAAAAAAAAAAAAAAAAAAAAAAAAAJ/f38AAAAAA8zMzADAwP8Af39/AAAAAAAAAAAAAAAAAAAAAAAAAAAAIQAAABgAAAAUAAAAOAQAABIbAAD4JQAAODEAABAAAAAmAAAACAAAAAEAAAAAAAAAMAAAABQAAAAAAAAAAAD//wAAAQAAAP//AAABAA=="/>
+                <pr:smNativeData xmlns:pr="smNativeData" xmlns="smNativeData" val="SMDATA_16_V2g2ahMAAAAlAAAAZAAAAA0AAAAAkAAAAEgAAACQAAAASAAAAAAAAAAAAAAAAAAAAAEAAABQAAAAAAAAAAAA4D8AAAAAAADgPwAAAAAAAOA/AAAAAAAA4D8AAAAAAADgPwAAAAAAAOA/AAAAAAAA4D8AAAAAAADgPwAAAAAAAOA/AAAAAAAA4D8CAAAAjAAAAAAAAAAAAAAARHLEDP///wgAAAAAAAAAAAAAAAAAAAAAAAAAAAAAAAAAAAAAZAAAAAEAAABAAAAAAAAAAAAAAAAAAAAAAAAAAAAAAAAAAAAAAAAAAAAAAAAAAAAAAAAAAAAAAAAAAAAAAAAAAAAAAAAAAAAAAAAAAAAAAAAAAAAAAAAAAAAAAAAAAAAAFAAAADwAAAAAAAAAAAAAAAAAAAkUAAAAAQAAABQAAAAUAAAAFAAAAAEAAAAAAAAAZAAAAGQAAAAAAAAAZAAAAGQAAAAVAAAAYAAAAAAAAAAAAAAADwAAACADAAAAAAAAAAAAAAEAAACgMgAAVgcAAKr4//8BAAAAf39/AAEAAABkAAAAAAAAABQAAABAHwAAAAAAACYAAAAAAAAAwOD//wAAAAAmAAAAZAAAABYAAABMAAAAAAAAAAAAAAAEAAAAAAAAAAEAAADn5uYKAAAAACgAAAAoAAAAZAAAAGQAAAAAAAAAzMzMAAAAAABQAAAAUAAAAGQAAABkAAAAAAAAABcAAAAUAAAAAAAAAAAAAAD/fwAA/38AAAAAAAAJAAAABAAAAAAAAAAeAAAAaAAAAAAAAAAAAAAAAAAAAAAAAAAAAAAAECcAABAnAAAAAAAAAAAAAAAAAAAAAAAAAAAAAAAAAAAAAAAAAAAAABQAAAAAAAAAwMD/AAAAAABkAAAAMgAAAAAAAABkAAAAAAAAAH9/fwAKAAAAIgAAABgAAAAAAAAAAAAAAAAAAAAAAAAAAAAAAAAAAAAkAAAAJAAAAAAAAAAHAAAAAAAAAAAAAAAAAAAAAAAAAAAAAAAAAAAAf39/ACUAAABYAAAAAAAAAAAAAAAAAAAAAAAAAAAAAAAAAAAAAAAAAAAAAAAAAAAAAAAAAAAAAAA/AAAAAAAAAKCGAQAAAAAAAAAAAAAAAAAMAAAAAQAAAAAAAAAAAAAAAAAAAB8AAABUAAAAAAAABQAAAAEAAAAAAAAAAAAAAAAAAAAAAAAAAAAAAAAAAAAAAAAAAAAAAAJ/f38AAAAAA8zMzADAwP8Af39/AAAAAAAAAAAAAAAAAAAAAAAAAAAAIQAAABgAAAAUAAAAOAQAABIbAAD4JQAAODEAABAAAAAmAAAACAAAAAEAAAAAAAAAMAAAABQAAAAAAAAAAAD//wAAAQAAAP//AAABAA=="/>
               </a:ext>
             </a:extLst>
           </p:cNvSpPr>
@@ -1074,7 +1074,7 @@
             <a:spLocks noGrp="1" noChangeArrowheads="1"/>
             <a:extLst>
               <a:ext uri="smNativeData">
-                <pr:smNativeData xmlns:pr="smNativeData" xmlns="smNativeData" val="SMDATA_16_kRU2ahMAAAAlAAAAZAAAAA0AAAAAkAAAAEgAAACQAAAASAAAAAAAAAACAAAAAAAAAAEAAABQAAAAAAAAAAAA4D8AAAAAAADgPwAAAAAAAOA/AAAAAAAA4D8AAAAAAADgPwAAAAAAAOA/AAAAAAAA4D8AAAAAAADgPwAAAAAAAOA/AAAAAAAA4D8CAAAAjAAAAAAAAAAAAAAARHLEDP///wgAAAAAAAAAAAAAAAAAAAAAAAAAAAAAAAAAAAAAZAAAAAEAAABAAAAAAAAAAAAAAAAAAAAAAAAAAAAAAAAAAAAAAAAAAAAAAAAAAAAAAAAAAAAAAAAAAAAAAAAAAAAAAAAAAAAAAAAAAAAAAAAAAAAAAAAAAAAAAAAAAAAAFAAAADwAAAAAAAAAAAAAAAAAAAkUAAAAAQAAABQAAAAUAAAAFAAAAAEAAAAAAAAAZAAAAGQAAAAAAAAAZAAAAGQAAAAVAAAAYAAAAAAAAAAAAAAADwAAACADAAAAAAAAAAAAAAEAAACgMgAAVgcAAKr4//8BAAAAf39/AAEAAABkAAAAAAAAABQAAABAHwAAAAAAACYAAAAAAAAAwOD//wAAAAAmAAAAZAAAABYAAABMAAAAAAAAAAAAAAAEAAAAAAAAAAEAAADn5uYKAAAAACgAAAAoAAAAZAAAAGQAAAAAAAAAzMzMAAAAAABQAAAAUAAAAGQAAABkAAAAAAAAABcAAAAUAAAAAAAAAAAAAAD/fwAA/38AAAAAAAAJAAAABAAAAAAAAAAeAAAAaAAAAAAAAAAAAAAAAAAAAAAAAAAAAAAAECcAABAnAAAAAAAAAAAAAAAAAAAAAAAAAAAAAAAAAAAAAAAAAAAAABQAAAAAAAAAwMD/AAAAAABkAAAAMgAAAAAAAABkAAAAAAAAAH9/fwAKAAAAIgAAABgAAAAAAAAAAAAAAAAAAAAAAAAAAAAAAAAAAAAkAAAAJAAAAAAAAAAHAAAAAAAAAAAAAAAAAAAAAAAAAAAAAAAAAAAAf39/ACUAAABYAAAAAAAAAAAAAAAAAAAAAAAAAAAAAAAAAAAAAAAAAAAAAAAAAAAAAAAAAAAAAAA/AAAAAAAAAKCGAQAAAAAAAAAAAAAAAAAMAAAAAQAAAAAAAAAAAAAAAAAAAB8AAABUAAAAAAAABQAAAAEAAAAAAAAAAAAAAAAAAAAAAAAAAAAAAAAAAAAAAAAAAAAAAAJ/f38AAAAAA8zMzADAwP8Af39/AAAAAAAAAAAAAAAAAAAAAAAAAAAAIQAAABgAAAAUAAAA5hcAAG41AAAuKgAAQDgAABAAAAAmAAAACAAAAAEAAAAAAAAAMAAAABQAAAAAAAAAAAD//wAAAQAAAP//AAABAA=="/>
+                <pr:smNativeData xmlns:pr="smNativeData" xmlns="smNativeData" val="SMDATA_16_V2g2ahMAAAAlAAAAZAAAAA0AAAAAkAAAAEgAAACQAAAASAAAAAAAAAACAAAAAAAAAAEAAABQAAAAAAAAAAAA4D8AAAAAAADgPwAAAAAAAOA/AAAAAAAA4D8AAAAAAADgPwAAAAAAAOA/AAAAAAAA4D8AAAAAAADgPwAAAAAAAOA/AAAAAAAA4D8CAAAAjAAAAAAAAAAAAAAARHLEDP///wgAAAAAAAAAAAAAAAAAAAAAAAAAAAAAAAAAAAAAZAAAAAEAAABAAAAAAAAAAAAAAAAAAAAAAAAAAAAAAAAAAAAAAAAAAAAAAAAAAAAAAAAAAAAAAAAAAAAAAAAAAAAAAAAAAAAAAAAAAAAAAAAAAAAAAAAAAAAAAAAAAAAAFAAAADwAAAAAAAAAAAAAAAAAAAkUAAAAAQAAABQAAAAUAAAAFAAAAAEAAAAAAAAAZAAAAGQAAAAAAAAAZAAAAGQAAAAVAAAAYAAAAAAAAAAAAAAADwAAACADAAAAAAAAAAAAAAEAAACgMgAAVgcAAKr4//8BAAAAf39/AAEAAABkAAAAAAAAABQAAABAHwAAAAAAACYAAAAAAAAAwOD//wAAAAAmAAAAZAAAABYAAABMAAAAAAAAAAAAAAAEAAAAAAAAAAEAAADn5uYKAAAAACgAAAAoAAAAZAAAAGQAAAAAAAAAzMzMAAAAAABQAAAAUAAAAGQAAABkAAAAAAAAABcAAAAUAAAAAAAAAAAAAAD/fwAA/38AAAAAAAAJAAAABAAAAAAAAAAeAAAAaAAAAAAAAAAAAAAAAAAAAAAAAAAAAAAAECcAABAnAAAAAAAAAAAAAAAAAAAAAAAAAAAAAAAAAAAAAAAAAAAAABQAAAAAAAAAwMD/AAAAAABkAAAAMgAAAAAAAABkAAAAAAAAAH9/fwAKAAAAIgAAABgAAAAAAAAAAAAAAAAAAAAAAAAAAAAAAAAAAAAkAAAAJAAAAAAAAAAHAAAAAAAAAAAAAAAAAAAAAAAAAAAAAAAAAAAAf39/ACUAAABYAAAAAAAAAAAAAAAAAAAAAAAAAAAAAAAAAAAAAAAAAAAAAAAAAAAAAAAAAAAAAAA/AAAAAAAAAKCGAQAAAAAAAAAAAAAAAAAMAAAAAQAAAAAAAAAAAAAAAAAAAB8AAABUAAAAAAAABQAAAAEAAAAAAAAAAAAAAAAAAAAAAAAAAAAAAAAAAAAAAAAAAAAAAAJ/f38AAAAAA8zMzADAwP8Af39/AAAAAAAAAAAAAAAAAAAAAAAAAAAAIQAAABgAAAAUAAAA5hcAAG41AAAuKgAAQDgAABAAAAAmAAAACAAAAAEAAAAAAAAAMAAAABQAAAAAAAAAAAD//wAAAQAAAP//AAABAA=="/>
               </a:ext>
             </a:extLst>
           </p:cNvSpPr>
@@ -1093,7 +1093,7 @@
           <a:lstStyle/>
           <a:p>
             <a:pPr/>
-            <a:fld id="{2B8952BA-F4C6-DCA4-8831-02F11C7F7E57}" type="slidenum">
+            <a:fld id="{34B7954E-00D9-E263-970F-F636DB4161A3}" type="slidenum">
               <a:rPr lang="en-us" cap="none"/>
               <a:t>11</a:t>
             </a:fld>
@@ -1141,7 +1141,7 @@
             <a:spLocks noGrp="1" noChangeArrowheads="1"/>
             <a:extLst>
               <a:ext uri="smNativeData">
-                <pr:smNativeData xmlns:pr="smNativeData" xmlns="smNativeData" val="SMDATA_16_kRU2ahMAAAAlAAAAZAAAAC0AAAAAkAAAAEgAAACQAAAASAAAAAAAAAABAAAAAAAAAAEAAABQAAAAAAAAAAAA4D8AAAAAAADgPwAAAAAAAOA/AAAAAAAA4D8AAAAAAADgPwAAAAAAAOA/AAAAAAAA4D8AAAAAAADgPwAAAAAAAOA/AAAAAAAA4D8CAAAAjAAAAAAAAAAAAAAARHLEDP///wgAAAAAAAAAAAAAAAAAAAAAAAAAAAAAAAAAAAAAZAAAAAEAAABAAAAAAAAAAAAAAAAAAAAAAAAAAAAAAAAAAAAAAAAAAAAAAAAAAAAAAAAAAAAAAAAAAAAAAAAAAAAAAAAAAAAAAAAAAAAAAAAAAAAAAAAAAAAAAAAAAAAAFAAAADwAAAABAAAAAAAAAAAAAAAUAAAAAQAAACMAAAAjAAAAIwAAAB4AAAAAAAAAZAAAAGQAAAAAAAAAZAAAAGQAAAAVAAAAYAAAAAAAAAAAAAAADwAAACADAAAAAAAAAAAAAAEAAACgMgAAVgcAAKr4//8BAAAAf39/AAEAAABkAAAAAAAAABQAAABAHwAAAAAAACYAAAAAAAAAwOD//wAAAAAmAAAAZAAAABYAAABMAAAAAAAAAAAAAAAEAAAAAAAAAAEAAADn5uYKAAAAACgAAAAoAAAAZAAAAGQAAAAAAAAAzMzMAAAAAABQAAAAUAAAAGQAAABkAAAAAAAAABcAAAAUAAAAAAAAAAAAAAD/fwAA/38AAAAAAAAJAAAABAAAAAAAAAAeAAAAaAAAAAAAAAAAAAAAAAAAAAAAAAAAAAAAECcAABAnAAAAAAAAAAAAAAAAAAAAAAAAAAAAAAAAAAAAAAAAAAAAABQAAAAAAAAAwMD/AAAAAABkAAAAMgAAAAAAAABkAAAAAAAAAH9/fwAKAAAAIgAAABgAAAAAAAAAAAAAAAAAAAAAAAAAAAAAAAAAAAAkAAAAJAAAAAAAAAAHAAAAAAAAAAAAAAAAAAAAAAAAAAAAAAAAAAAAf39/ACUAAABYAAAAAAAAAAAAAAAAAAAAAAAAAAAAAAAAAAAAAAAAAAAAAAAAAAAAAAAAAAAAAAA/AAAAAAAAAKCGAQAAAAAAAAAAAAAAAAAMAAAAAQAAAAAAAAAAAAAAAAAAAB8AAABUAAAAAAAABQAAAAEAAAAAAAAAAAAAAAAAAAAAAAAAAAAAAAAAAAAAAAAAAAAAAAB/f38AAAAAA8zMzADAwP8Af39/AAAAAAAAAAAAAAAAAAAAAAAAAAAAIQAAABgAAAAUAAAAOAQAAAgHAAD4JQAABBoAABAAAAAmAAAACAAAAAEAAAAAAAAAMAAAABQAAAAAAAAAAAD//wAAAQAAAP//AAABAA=="/>
+                <pr:smNativeData xmlns:pr="smNativeData" xmlns="smNativeData" val="SMDATA_16_V2g2ahMAAAAlAAAAZAAAAC0AAAAAkAAAAEgAAACQAAAASAAAAAAAAAABAAAAAAAAAAEAAABQAAAAAAAAAAAA4D8AAAAAAADgPwAAAAAAAOA/AAAAAAAA4D8AAAAAAADgPwAAAAAAAOA/AAAAAAAA4D8AAAAAAADgPwAAAAAAAOA/AAAAAAAA4D8CAAAAjAAAAAAAAAAAAAAARHLEDP///wgAAAAAAAAAAAAAAAAAAAAAAAAAAAAAAAAAAAAAZAAAAAEAAABAAAAAAAAAAAAAAAAAAAAAAAAAAAAAAAAAAAAAAAAAAAAAAAAAAAAAAAAAAAAAAAAAAAAAAAAAAAAAAAAAAAAAAAAAAAAAAAAAAAAAAAAAAAAAAAAAAAAAFAAAADwAAAABAAAAAAAAAAAAAAAUAAAAAQAAACMAAAAjAAAAIwAAAB4AAAAAAAAAZAAAAGQAAAAAAAAAZAAAAGQAAAAVAAAAYAAAAAAAAAAAAAAADwAAACADAAAAAAAAAAAAAAEAAACgMgAAVgcAAKr4//8BAAAAf39/AAEAAABkAAAAAAAAABQAAABAHwAAAAAAACYAAAAAAAAAwOD//wAAAAAmAAAAZAAAABYAAABMAAAAAAAAAAAAAAAEAAAAAAAAAAEAAADn5uYKAAAAACgAAAAoAAAAZAAAAGQAAAAAAAAAzMzMAAAAAABQAAAAUAAAAGQAAABkAAAAAAAAABcAAAAUAAAAAAAAAAAAAAD/fwAA/38AAAAAAAAJAAAABAAAAAAAAAAeAAAAaAAAAAAAAAAAAAAAAAAAAAAAAAAAAAAAECcAABAnAAAAAAAAAAAAAAAAAAAAAAAAAAAAAAAAAAAAAAAAAAAAABQAAAAAAAAAwMD/AAAAAABkAAAAMgAAAAAAAABkAAAAAAAAAH9/fwAKAAAAIgAAABgAAAAAAAAAAAAAAAAAAAAAAAAAAAAAAAAAAAAkAAAAJAAAAAAAAAAHAAAAAAAAAAAAAAAAAAAAAAAAAAAAAAAAAAAAf39/ACUAAABYAAAAAAAAAAAAAAAAAAAAAAAAAAAAAAAAAAAAAAAAAAAAAAAAAAAAAAAAAAAAAAA/AAAAAAAAAKCGAQAAAAAAAAAAAAAAAAAMAAAAAQAAAAAAAAAAAAAAAAAAAB8AAABUAAAAAAAABQAAAAEAAAAAAAAAAAAAAAAAAAAAAAAAAAAAAAAAAAAAAAAAAAAAAAB/f38AAAAAA8zMzADAwP8Af39/AAAAAAAAAAAAAAAAAAAAAAAAAAAAIQAAABgAAAAUAAAAOAQAAAgHAAD4JQAABBoAABAAAAAmAAAACAAAAAEAAAAAAAAAMAAAABQAAAAAAAAAAAD//wAAAQAAAP//AAABAA=="/>
               </a:ext>
             </a:extLst>
           </p:cNvSpPr>
@@ -1163,7 +1163,7 @@
             <a:spLocks noGrp="1" noChangeArrowheads="1"/>
             <a:extLst>
               <a:ext uri="smNativeData">
-                <pr:smNativeData xmlns:pr="smNativeData" xmlns="smNativeData" val="SMDATA_16_kRU2ahMAAAAlAAAAZAAAAA0AAAAAkAAAAEgAAACQAAAASAAAAAAAAAAAAAAAAAAAAAEAAABQAAAAAAAAAAAA4D8AAAAAAADgPwAAAAAAAOA/AAAAAAAA4D8AAAAAAADgPwAAAAAAAOA/AAAAAAAA4D8AAAAAAADgPwAAAAAAAOA/AAAAAAAA4D8CAAAAjAAAAAAAAAAAAAAARHLEDP///wgAAAAAAAAAAAAAAAAAAAAAAAAAAAAAAAAAAAAAZAAAAAEAAABAAAAAAAAAAAAAAAAAAAAAAAAAAAAAAAAAAAAAAAAAAAAAAAAAAAAAAAAAAAAAAAAAAAAAAAAAAAAAAAAAAAAAAAAAAAAAAAAAAAAAAAAAAAAAAAAAAAAAFAAAADwAAAAAAAAAAAAAAAAAAAkUAAAAAQAAABQAAAAUAAAAFAAAAAEAAAAAAAAAZAAAAGQAAAAAAAAAZAAAAGQAAAAVAAAAYAAAAAAAAAAAAAAADwAAACADAAAAAAAAAAAAAAEAAACgMgAAVgcAAKr4//8BAAAAf39/AAEAAABkAAAAAAAAABQAAABAHwAAAAAAACYAAAAAAAAAwOD//wAAAAAmAAAAZAAAABYAAABMAAAAAAAAAAAAAAAEAAAAAAAAAAEAAADn5uYKAAAAACgAAAAoAAAAZAAAAGQAAAAAAAAAzMzMAAAAAABQAAAAUAAAAGQAAABkAAAAAAAAABcAAAAUAAAAAAAAAAAAAAD/fwAA/38AAAAAAAAJAAAABAAAAAAAAAAeAAAAaAAAAAAAAAAAAAAAAAAAAAAAAAAAAAAAECcAABAnAAAAAAAAAAAAAAAAAAAAAAAAAAAAAAAAAAAAAAAAAAAAABQAAAAAAAAAwMD/AAAAAABkAAAAMgAAAAAAAABkAAAAAAAAAH9/fwAKAAAAIgAAABgAAAAAAAAAAAAAAAAAAAAAAAAAAAAAAAAAAAAkAAAAJAAAAAAAAAAHAAAAAAAAAAAAAAAAAAAAAAAAAAAAAAAAAAAAf39/ACUAAABYAAAAAAAAAAAAAAAAAAAAAAAAAAAAAAAAAAAAAAAAAAAAAAAAAAAAAAAAAAAAAAA/AAAAAAAAAKCGAQAAAAAAAAAAAAAAAAAMAAAAAQAAAAAAAAAAAAAAAAAAAB8AAABUAAAAAAAABQAAAAEAAAAAAAAAAAAAAAAAAAAAAAAAAAAAAAAAAAAAAAAAAAAAAAJ/f38AAAAAA8zMzADAwP8Af39/AAAAAAAAAAAAAAAAAAAAAAAAAAAAIQAAABgAAAAUAAAAOAQAABIbAAD4JQAAODEAABAAAAAmAAAACAAAAAEAAAAAAAAAMAAAABQAAAAAAAAAAAD//wAAAQAAAP//AAABAA=="/>
+                <pr:smNativeData xmlns:pr="smNativeData" xmlns="smNativeData" val="SMDATA_16_V2g2ahMAAAAlAAAAZAAAAA0AAAAAkAAAAEgAAACQAAAASAAAAAAAAAAAAAAAAAAAAAEAAABQAAAAAAAAAAAA4D8AAAAAAADgPwAAAAAAAOA/AAAAAAAA4D8AAAAAAADgPwAAAAAAAOA/AAAAAAAA4D8AAAAAAADgPwAAAAAAAOA/AAAAAAAA4D8CAAAAjAAAAAAAAAAAAAAARHLEDP///wgAAAAAAAAAAAAAAAAAAAAAAAAAAAAAAAAAAAAAZAAAAAEAAABAAAAAAAAAAAAAAAAAAAAAAAAAAAAAAAAAAAAAAAAAAAAAAAAAAAAAAAAAAAAAAAAAAAAAAAAAAAAAAAAAAAAAAAAAAAAAAAAAAAAAAAAAAAAAAAAAAAAAFAAAADwAAAAAAAAAAAAAAAAAAAkUAAAAAQAAABQAAAAUAAAAFAAAAAEAAAAAAAAAZAAAAGQAAAAAAAAAZAAAAGQAAAAVAAAAYAAAAAAAAAAAAAAADwAAACADAAAAAAAAAAAAAAEAAACgMgAAVgcAAKr4//8BAAAAf39/AAEAAABkAAAAAAAAABQAAABAHwAAAAAAACYAAAAAAAAAwOD//wAAAAAmAAAAZAAAABYAAABMAAAAAAAAAAAAAAAEAAAAAAAAAAEAAADn5uYKAAAAACgAAAAoAAAAZAAAAGQAAAAAAAAAzMzMAAAAAABQAAAAUAAAAGQAAABkAAAAAAAAABcAAAAUAAAAAAAAAAAAAAD/fwAA/38AAAAAAAAJAAAABAAAAAAAAAAeAAAAaAAAAAAAAAAAAAAAAAAAAAAAAAAAAAAAECcAABAnAAAAAAAAAAAAAAAAAAAAAAAAAAAAAAAAAAAAAAAAAAAAABQAAAAAAAAAwMD/AAAAAABkAAAAMgAAAAAAAABkAAAAAAAAAH9/fwAKAAAAIgAAABgAAAAAAAAAAAAAAAAAAAAAAAAAAAAAAAAAAAAkAAAAJAAAAAAAAAAHAAAAAAAAAAAAAAAAAAAAAAAAAAAAAAAAAAAAf39/ACUAAABYAAAAAAAAAAAAAAAAAAAAAAAAAAAAAAAAAAAAAAAAAAAAAAAAAAAAAAAAAAAAAAA/AAAAAAAAAKCGAQAAAAAAAAAAAAAAAAAMAAAAAQAAAAAAAAAAAAAAAAAAAB8AAABUAAAAAAAABQAAAAEAAAAAAAAAAAAAAAAAAAAAAAAAAAAAAAAAAAAAAAAAAAAAAAJ/f38AAAAAA8zMzADAwP8Af39/AAAAAAAAAAAAAAAAAAAAAAAAAAAAIQAAABgAAAAUAAAAOAQAABIbAAD4JQAAODEAABAAAAAmAAAACAAAAAEAAAAAAAAAMAAAABQAAAAAAAAAAAD//wAAAQAAAP//AAABAA=="/>
               </a:ext>
             </a:extLst>
           </p:cNvSpPr>
@@ -1192,7 +1192,7 @@
             <a:spLocks noGrp="1" noChangeArrowheads="1"/>
             <a:extLst>
               <a:ext uri="smNativeData">
-                <pr:smNativeData xmlns:pr="smNativeData" xmlns="smNativeData" val="SMDATA_16_kRU2ahMAAAAlAAAAZAAAAA0AAAAAkAAAAEgAAACQAAAASAAAAAAAAAACAAAAAAAAAAEAAABQAAAAAAAAAAAA4D8AAAAAAADgPwAAAAAAAOA/AAAAAAAA4D8AAAAAAADgPwAAAAAAAOA/AAAAAAAA4D8AAAAAAADgPwAAAAAAAOA/AAAAAAAA4D8CAAAAjAAAAAAAAAAAAAAARHLEDP///wgAAAAAAAAAAAAAAAAAAAAAAAAAAAAAAAAAAAAAZAAAAAEAAABAAAAAAAAAAAAAAAAAAAAAAAAAAAAAAAAAAAAAAAAAAAAAAAAAAAAAAAAAAAAAAAAAAAAAAAAAAAAAAAAAAAAAAAAAAAAAAAAAAAAAAAAAAAAAAAAAAAAAFAAAADwAAAAAAAAAAAAAAAAAAAkUAAAAAQAAABQAAAAUAAAAFAAAAAEAAAAAAAAAZAAAAGQAAAAAAAAAZAAAAGQAAAAVAAAAYAAAAAAAAAAAAAAADwAAACADAAAAAAAAAAAAAAEAAACgMgAAVgcAAKr4//8BAAAAf39/AAEAAABkAAAAAAAAABQAAABAHwAAAAAAACYAAAAAAAAAwOD//wAAAAAmAAAAZAAAABYAAABMAAAAAAAAAAAAAAAEAAAAAAAAAAEAAADn5uYKAAAAACgAAAAoAAAAZAAAAGQAAAAAAAAAzMzMAAAAAABQAAAAUAAAAGQAAABkAAAAAAAAABcAAAAUAAAAAAAAAAAAAAD/fwAA/38AAAAAAAAJAAAABAAAAAAAAAAeAAAAaAAAAAAAAAAAAAAAAAAAAAAAAAAAAAAAECcAABAnAAAAAAAAAAAAAAAAAAAAAAAAAAAAAAAAAAAAAAAAAAAAABQAAAAAAAAAwMD/AAAAAABkAAAAMgAAAAAAAABkAAAAAAAAAH9/fwAKAAAAIgAAABgAAAAAAAAAAAAAAAAAAAAAAAAAAAAAAAAAAAAkAAAAJAAAAAAAAAAHAAAAAAAAAAAAAAAAAAAAAAAAAAAAAAAAAAAAf39/ACUAAABYAAAAAAAAAAAAAAAAAAAAAAAAAAAAAAAAAAAAAAAAAAAAAAAAAAAAAAAAAAAAAAA/AAAAAAAAAKCGAQAAAAAAAAAAAAAAAAAMAAAAAQAAAAAAAAAAAAAAAAAAAB8AAABUAAAAAAAABQAAAAEAAAAAAAAAAAAAAAAAAAAAAAAAAAAAAAAAAAAAAAAAAAAAAAJ/f38AAAAAA8zMzADAwP8Af39/AAAAAAAAAAAAAAAAAAAAAAAAAAAAIQAAABgAAAAUAAAA5hcAAG41AAAuKgAAQDgAABAAAAAmAAAACAAAAAEAAAAAAAAAMAAAABQAAAAAAAAAAAD//wAAAQAAAP//AAABAA=="/>
+                <pr:smNativeData xmlns:pr="smNativeData" xmlns="smNativeData" val="SMDATA_16_V2g2ahMAAAAlAAAAZAAAAA0AAAAAkAAAAEgAAACQAAAASAAAAAAAAAACAAAAAAAAAAEAAABQAAAAAAAAAAAA4D8AAAAAAADgPwAAAAAAAOA/AAAAAAAA4D8AAAAAAADgPwAAAAAAAOA/AAAAAAAA4D8AAAAAAADgPwAAAAAAAOA/AAAAAAAA4D8CAAAAjAAAAAAAAAAAAAAARHLEDP///wgAAAAAAAAAAAAAAAAAAAAAAAAAAAAAAAAAAAAAZAAAAAEAAABAAAAAAAAAAAAAAAAAAAAAAAAAAAAAAAAAAAAAAAAAAAAAAAAAAAAAAAAAAAAAAAAAAAAAAAAAAAAAAAAAAAAAAAAAAAAAAAAAAAAAAAAAAAAAAAAAAAAAFAAAADwAAAAAAAAAAAAAAAAAAAkUAAAAAQAAABQAAAAUAAAAFAAAAAEAAAAAAAAAZAAAAGQAAAAAAAAAZAAAAGQAAAAVAAAAYAAAAAAAAAAAAAAADwAAACADAAAAAAAAAAAAAAEAAACgMgAAVgcAAKr4//8BAAAAf39/AAEAAABkAAAAAAAAABQAAABAHwAAAAAAACYAAAAAAAAAwOD//wAAAAAmAAAAZAAAABYAAABMAAAAAAAAAAAAAAAEAAAAAAAAAAEAAADn5uYKAAAAACgAAAAoAAAAZAAAAGQAAAAAAAAAzMzMAAAAAABQAAAAUAAAAGQAAABkAAAAAAAAABcAAAAUAAAAAAAAAAAAAAD/fwAA/38AAAAAAAAJAAAABAAAAAAAAAAeAAAAaAAAAAAAAAAAAAAAAAAAAAAAAAAAAAAAECcAABAnAAAAAAAAAAAAAAAAAAAAAAAAAAAAAAAAAAAAAAAAAAAAABQAAAAAAAAAwMD/AAAAAABkAAAAMgAAAAAAAABkAAAAAAAAAH9/fwAKAAAAIgAAABgAAAAAAAAAAAAAAAAAAAAAAAAAAAAAAAAAAAAkAAAAJAAAAAAAAAAHAAAAAAAAAAAAAAAAAAAAAAAAAAAAAAAAAAAAf39/ACUAAABYAAAAAAAAAAAAAAAAAAAAAAAAAAAAAAAAAAAAAAAAAAAAAAAAAAAAAAAAAAAAAAA/AAAAAAAAAKCGAQAAAAAAAAAAAAAAAAAMAAAAAQAAAAAAAAAAAAAAAAAAAB8AAABUAAAAAAAABQAAAAEAAAAAAAAAAAAAAAAAAAAAAAAAAAAAAAAAAAAAAAAAAAAAAAJ/f38AAAAAA8zMzADAwP8Af39/AAAAAAAAAAAAAAAAAAAAAAAAAAAAIQAAABgAAAAUAAAA5hcAAG41AAAuKgAAQDgAABAAAAAmAAAACAAAAAEAAAAAAAAAMAAAABQAAAAAAAAAAAD//wAAAQAAAP//AAABAA=="/>
               </a:ext>
             </a:extLst>
           </p:cNvSpPr>
@@ -1211,7 +1211,7 @@
           <a:lstStyle/>
           <a:p>
             <a:pPr/>
-            <a:fld id="{565EA569-27BB-0B53-F5E6-D106EBA80384}" type="slidenum">
+            <a:fld id="{1AF1B58A-C4F7-A443-B949-3216FB074F67}" type="slidenum">
               <a:rPr lang="en-us" cap="none"/>
               <a:t>12</a:t>
             </a:fld>
@@ -1259,7 +1259,7 @@
             <a:spLocks noGrp="1" noChangeArrowheads="1"/>
             <a:extLst>
               <a:ext uri="smNativeData">
-                <pr:smNativeData xmlns:pr="smNativeData" xmlns="smNativeData" val="SMDATA_16_kRU2ahMAAAAlAAAAZAAAAC0AAAAAkAAAAEgAAACQAAAASAAAAAAAAAABAAAAAAAAAAEAAABQAAAAAAAAAAAA4D8AAAAAAADgPwAAAAAAAOA/AAAAAAAA4D8AAAAAAADgPwAAAAAAAOA/AAAAAAAA4D8AAAAAAADgPwAAAAAAAOA/AAAAAAAA4D8CAAAAjAAAAAAAAAAAAAAARHLEDP///wgAAAAAAAAAAAAAAAAAAAAAAAAAAAAAAAAAAAAAZAAAAAEAAABAAAAAAAAAAAAAAAAAAAAAAAAAAAAAAAAAAAAAAAAAAAAAAAAAAAAAAAAAAAAAAAAAAAAAAAAAAAAAAAAAAAAAAAAAAAAAAAAAAAAAAAAAAAAAAAAAAAAAFAAAADwAAAABAAAAAAAAAAAAAAAUAAAAAQAAACMAAAAjAAAAIwAAAB4AAAAAAAAAZAAAAGQAAAAAAAAAZAAAAGQAAAAVAAAAYAAAAAAAAAAAAAAADwAAACADAAAAAAAAAAAAAAEAAACgMgAAVgcAAKr4//8BAAAAf39/AAEAAABkAAAAAAAAABQAAABAHwAAAAAAACYAAAAAAAAAwOD//wAAAAAmAAAAZAAAABYAAABMAAAAAAAAAAAAAAAEAAAAAAAAAAEAAADn5uYKAAAAACgAAAAoAAAAZAAAAGQAAAAAAAAAzMzMAAAAAABQAAAAUAAAAGQAAABkAAAAAAAAABcAAAAUAAAAAAAAAAAAAAD/fwAA/38AAAAAAAAJAAAABAAAAAAAAAAeAAAAaAAAAAAAAAAAAAAAAAAAAAAAAAAAAAAAECcAABAnAAAAAAAAAAAAAAAAAAAAAAAAAAAAAAAAAAAAAAAAAAAAABQAAAAAAAAAwMD/AAAAAABkAAAAMgAAAAAAAABkAAAAAAAAAH9/fwAKAAAAIgAAABgAAAAAAAAAAAAAAAAAAAAAAAAAAAAAAAAAAAAkAAAAJAAAAAAAAAAHAAAAAAAAAAAAAAAAAAAAAAAAAAAAAAAAAAAAf39/ACUAAABYAAAAAAAAAAAAAAAAAAAAAAAAAAAAAAAAAAAAAAAAAAAAAAAAAAAAAAAAAAAAAAA/AAAAAAAAAKCGAQAAAAAAAAAAAAAAAAAMAAAAAQAAAAAAAAAAAAAAAAAAAB8AAABUAAAAAAAABQAAAAEAAAAAAAAAAAAAAAAAAAAAAAAAAAAAAAAAAAAAAAAAAAAAAAB/f38AAAAAA8zMzADAwP8Af39/AAAAAAAAAAAAAAAAAAAAAAAAAAAAIQAAABgAAAAUAAAAOAQAAAgHAAD4JQAABBoAABAAAAAmAAAACAAAAAEAAAAAAAAAMAAAABQAAAAAAAAAAAD//wAAAQAAAP//AAABAA=="/>
+                <pr:smNativeData xmlns:pr="smNativeData" xmlns="smNativeData" val="SMDATA_16_V2g2ahMAAAAlAAAAZAAAAC0AAAAAkAAAAEgAAACQAAAASAAAAAAAAAABAAAAAAAAAAEAAABQAAAAAAAAAAAA4D8AAAAAAADgPwAAAAAAAOA/AAAAAAAA4D8AAAAAAADgPwAAAAAAAOA/AAAAAAAA4D8AAAAAAADgPwAAAAAAAOA/AAAAAAAA4D8CAAAAjAAAAAAAAAAAAAAARHLEDP///wgAAAAAAAAAAAAAAAAAAAAAAAAAAAAAAAAAAAAAZAAAAAEAAABAAAAAAAAAAAAAAAAAAAAAAAAAAAAAAAAAAAAAAAAAAAAAAAAAAAAAAAAAAAAAAAAAAAAAAAAAAAAAAAAAAAAAAAAAAAAAAAAAAAAAAAAAAAAAAAAAAAAAFAAAADwAAAABAAAAAAAAAAAAAAAUAAAAAQAAACMAAAAjAAAAIwAAAB4AAAAAAAAAZAAAAGQAAAAAAAAAZAAAAGQAAAAVAAAAYAAAAAAAAAAAAAAADwAAACADAAAAAAAAAAAAAAEAAACgMgAAVgcAAKr4//8BAAAAf39/AAEAAABkAAAAAAAAABQAAABAHwAAAAAAACYAAAAAAAAAwOD//wAAAAAmAAAAZAAAABYAAABMAAAAAAAAAAAAAAAEAAAAAAAAAAEAAADn5uYKAAAAACgAAAAoAAAAZAAAAGQAAAAAAAAAzMzMAAAAAABQAAAAUAAAAGQAAABkAAAAAAAAABcAAAAUAAAAAAAAAAAAAAD/fwAA/38AAAAAAAAJAAAABAAAAAAAAAAeAAAAaAAAAAAAAAAAAAAAAAAAAAAAAAAAAAAAECcAABAnAAAAAAAAAAAAAAAAAAAAAAAAAAAAAAAAAAAAAAAAAAAAABQAAAAAAAAAwMD/AAAAAABkAAAAMgAAAAAAAABkAAAAAAAAAH9/fwAKAAAAIgAAABgAAAAAAAAAAAAAAAAAAAAAAAAAAAAAAAAAAAAkAAAAJAAAAAAAAAAHAAAAAAAAAAAAAAAAAAAAAAAAAAAAAAAAAAAAf39/ACUAAABYAAAAAAAAAAAAAAAAAAAAAAAAAAAAAAAAAAAAAAAAAAAAAAAAAAAAAAAAAAAAAAA/AAAAAAAAAKCGAQAAAAAAAAAAAAAAAAAMAAAAAQAAAAAAAAAAAAAAAAAAAB8AAABUAAAAAAAABQAAAAEAAAAAAAAAAAAAAAAAAAAAAAAAAAAAAAAAAAAAAAAAAAAAAAB/f38AAAAAA8zMzADAwP8Af39/AAAAAAAAAAAAAAAAAAAAAAAAAAAAIQAAABgAAAAUAAAAOAQAAAgHAAD4JQAABBoAABAAAAAmAAAACAAAAAEAAAAAAAAAMAAAABQAAAAAAAAAAAD//wAAAQAAAP//AAABAA=="/>
               </a:ext>
             </a:extLst>
           </p:cNvSpPr>
@@ -1281,7 +1281,7 @@
             <a:spLocks noGrp="1" noChangeArrowheads="1"/>
             <a:extLst>
               <a:ext uri="smNativeData">
-                <pr:smNativeData xmlns:pr="smNativeData" xmlns="smNativeData" val="SMDATA_16_kRU2ahMAAAAlAAAAZAAAAA0AAAAAkAAAAEgAAACQAAAASAAAAAAAAAAAAAAAAAAAAAEAAABQAAAAAAAAAAAA4D8AAAAAAADgPwAAAAAAAOA/AAAAAAAA4D8AAAAAAADgPwAAAAAAAOA/AAAAAAAA4D8AAAAAAADgPwAAAAAAAOA/AAAAAAAA4D8CAAAAjAAAAAAAAAAAAAAARHLEDP///wgAAAAAAAAAAAAAAAAAAAAAAAAAAAAAAAAAAAAAZAAAAAEAAABAAAAAAAAAAAAAAAAAAAAAAAAAAAAAAAAAAAAAAAAAAAAAAAAAAAAAAAAAAAAAAAAAAAAAAAAAAAAAAAAAAAAAAAAAAAAAAAAAAAAAAAAAAAAAAAAAAAAAFAAAADwAAAAAAAAAAAAAAAAAAAkUAAAAAQAAABQAAAAUAAAAFAAAAAEAAAAAAAAAZAAAAGQAAAAAAAAAZAAAAGQAAAAVAAAAYAAAAAAAAAAAAAAADwAAACADAAAAAAAAAAAAAAEAAACgMgAAVgcAAKr4//8BAAAAf39/AAEAAABkAAAAAAAAABQAAABAHwAAAAAAACYAAAAAAAAAwOD//wAAAAAmAAAAZAAAABYAAABMAAAAAAAAAAAAAAAEAAAAAAAAAAEAAADn5uYKAAAAACgAAAAoAAAAZAAAAGQAAAAAAAAAzMzMAAAAAABQAAAAUAAAAGQAAABkAAAAAAAAABcAAAAUAAAAAAAAAAAAAAD/fwAA/38AAAAAAAAJAAAABAAAAAAAAAAeAAAAaAAAAAAAAAAAAAAAAAAAAAAAAAAAAAAAECcAABAnAAAAAAAAAAAAAAAAAAAAAAAAAAAAAAAAAAAAAAAAAAAAABQAAAAAAAAAwMD/AAAAAABkAAAAMgAAAAAAAABkAAAAAAAAAH9/fwAKAAAAIgAAABgAAAAAAAAAAAAAAAAAAAAAAAAAAAAAAAAAAAAkAAAAJAAAAAAAAAAHAAAAAAAAAAAAAAAAAAAAAAAAAAAAAAAAAAAAf39/ACUAAABYAAAAAAAAAAAAAAAAAAAAAAAAAAAAAAAAAAAAAAAAAAAAAAAAAAAAAAAAAAAAAAA/AAAAAAAAAKCGAQAAAAAAAAAAAAAAAAAMAAAAAQAAAAAAAAAAAAAAAAAAAB8AAABUAAAAAAAABQAAAAEAAAAAAAAAAAAAAAAAAAAAAAAAAAAAAAAAAAAAAAAAAAAAAAJ/f38AAAAAA8zMzADAwP8Af39/AAAAAAAAAAAAAAAAAAAAAAAAAAAAIQAAABgAAAAUAAAAOAQAABIbAAD4JQAAODEAABAAAAAmAAAACAAAAAEAAAAAAAAAMAAAABQAAAAAAAAAAAD//wAAAQAAAP//AAABAA=="/>
+                <pr:smNativeData xmlns:pr="smNativeData" xmlns="smNativeData" val="SMDATA_16_V2g2ahMAAAAlAAAAZAAAAA0AAAAAkAAAAEgAAACQAAAASAAAAAAAAAAAAAAAAAAAAAEAAABQAAAAAAAAAAAA4D8AAAAAAADgPwAAAAAAAOA/AAAAAAAA4D8AAAAAAADgPwAAAAAAAOA/AAAAAAAA4D8AAAAAAADgPwAAAAAAAOA/AAAAAAAA4D8CAAAAjAAAAAAAAAAAAAAARHLEDP///wgAAAAAAAAAAAAAAAAAAAAAAAAAAAAAAAAAAAAAZAAAAAEAAABAAAAAAAAAAAAAAAAAAAAAAAAAAAAAAAAAAAAAAAAAAAAAAAAAAAAAAAAAAAAAAAAAAAAAAAAAAAAAAAAAAAAAAAAAAAAAAAAAAAAAAAAAAAAAAAAAAAAAFAAAADwAAAAAAAAAAAAAAAAAAAkUAAAAAQAAABQAAAAUAAAAFAAAAAEAAAAAAAAAZAAAAGQAAAAAAAAAZAAAAGQAAAAVAAAAYAAAAAAAAAAAAAAADwAAACADAAAAAAAAAAAAAAEAAACgMgAAVgcAAKr4//8BAAAAf39/AAEAAABkAAAAAAAAABQAAABAHwAAAAAAACYAAAAAAAAAwOD//wAAAAAmAAAAZAAAABYAAABMAAAAAAAAAAAAAAAEAAAAAAAAAAEAAADn5uYKAAAAACgAAAAoAAAAZAAAAGQAAAAAAAAAzMzMAAAAAABQAAAAUAAAAGQAAABkAAAAAAAAABcAAAAUAAAAAAAAAAAAAAD/fwAA/38AAAAAAAAJAAAABAAAAAAAAAAeAAAAaAAAAAAAAAAAAAAAAAAAAAAAAAAAAAAAECcAABAnAAAAAAAAAAAAAAAAAAAAAAAAAAAAAAAAAAAAAAAAAAAAABQAAAAAAAAAwMD/AAAAAABkAAAAMgAAAAAAAABkAAAAAAAAAH9/fwAKAAAAIgAAABgAAAAAAAAAAAAAAAAAAAAAAAAAAAAAAAAAAAAkAAAAJAAAAAAAAAAHAAAAAAAAAAAAAAAAAAAAAAAAAAAAAAAAAAAAf39/ACUAAABYAAAAAAAAAAAAAAAAAAAAAAAAAAAAAAAAAAAAAAAAAAAAAAAAAAAAAAAAAAAAAAA/AAAAAAAAAKCGAQAAAAAAAAAAAAAAAAAMAAAAAQAAAAAAAAAAAAAAAAAAAB8AAABUAAAAAAAABQAAAAEAAAAAAAAAAAAAAAAAAAAAAAAAAAAAAAAAAAAAAAAAAAAAAAJ/f38AAAAAA8zMzADAwP8Af39/AAAAAAAAAAAAAAAAAAAAAAAAAAAAIQAAABgAAAAUAAAAOAQAABIbAAD4JQAAODEAABAAAAAmAAAACAAAAAEAAAAAAAAAMAAAABQAAAAAAAAAAAD//wAAAQAAAP//AAABAA=="/>
               </a:ext>
             </a:extLst>
           </p:cNvSpPr>
@@ -1310,7 +1310,7 @@
             <a:spLocks noGrp="1" noChangeArrowheads="1"/>
             <a:extLst>
               <a:ext uri="smNativeData">
-                <pr:smNativeData xmlns:pr="smNativeData" xmlns="smNativeData" val="SMDATA_16_kRU2ahMAAAAlAAAAZAAAAA0AAAAAkAAAAEgAAACQAAAASAAAAAAAAAACAAAAAAAAAAEAAABQAAAAAAAAAAAA4D8AAAAAAADgPwAAAAAAAOA/AAAAAAAA4D8AAAAAAADgPwAAAAAAAOA/AAAAAAAA4D8AAAAAAADgPwAAAAAAAOA/AAAAAAAA4D8CAAAAjAAAAAAAAAAAAAAARHLEDP///wgAAAAAAAAAAAAAAAAAAAAAAAAAAAAAAAAAAAAAZAAAAAEAAABAAAAAAAAAAAAAAAAAAAAAAAAAAAAAAAAAAAAAAAAAAAAAAAAAAAAAAAAAAAAAAAAAAAAAAAAAAAAAAAAAAAAAAAAAAAAAAAAAAAAAAAAAAAAAAAAAAAAAFAAAADwAAAAAAAAAAAAAAAAAAAkUAAAAAQAAABQAAAAUAAAAFAAAAAEAAAAAAAAAZAAAAGQAAAAAAAAAZAAAAGQAAAAVAAAAYAAAAAAAAAAAAAAADwAAACADAAAAAAAAAAAAAAEAAACgMgAAVgcAAKr4//8BAAAAf39/AAEAAABkAAAAAAAAABQAAABAHwAAAAAAACYAAAAAAAAAwOD//wAAAAAmAAAAZAAAABYAAABMAAAAAAAAAAAAAAAEAAAAAAAAAAEAAADn5uYKAAAAACgAAAAoAAAAZAAAAGQAAAAAAAAAzMzMAAAAAABQAAAAUAAAAGQAAABkAAAAAAAAABcAAAAUAAAAAAAAAAAAAAD/fwAA/38AAAAAAAAJAAAABAAAAAAAAAAeAAAAaAAAAAAAAAAAAAAAAAAAAAAAAAAAAAAAECcAABAnAAAAAAAAAAAAAAAAAAAAAAAAAAAAAAAAAAAAAAAAAAAAABQAAAAAAAAAwMD/AAAAAABkAAAAMgAAAAAAAABkAAAAAAAAAH9/fwAKAAAAIgAAABgAAAAAAAAAAAAAAAAAAAAAAAAAAAAAAAAAAAAkAAAAJAAAAAAAAAAHAAAAAAAAAAAAAAAAAAAAAAAAAAAAAAAAAAAAf39/ACUAAABYAAAAAAAAAAAAAAAAAAAAAAAAAAAAAAAAAAAAAAAAAAAAAAAAAAAAAAAAAAAAAAA/AAAAAAAAAKCGAQAAAAAAAAAAAAAAAAAMAAAAAQAAAAAAAAAAAAAAAAAAAB8AAABUAAAAAAAABQAAAAEAAAAAAAAAAAAAAAAAAAAAAAAAAAAAAAAAAAAAAAAAAAAAAAJ/f38AAAAAA8zMzADAwP8Af39/AAAAAAAAAAAAAAAAAAAAAAAAAAAAIQAAABgAAAAUAAAA5hcAAG41AAAuKgAAQDgAABAAAAAmAAAACAAAAAEAAAAAAAAAMAAAABQAAAAAAAAAAAD//wAAAQAAAP//AAABAA=="/>
+                <pr:smNativeData xmlns:pr="smNativeData" xmlns="smNativeData" val="SMDATA_16_V2g2ahMAAAAlAAAAZAAAAA0AAAAAkAAAAEgAAACQAAAASAAAAAAAAAACAAAAAAAAAAEAAABQAAAAAAAAAAAA4D8AAAAAAADgPwAAAAAAAOA/AAAAAAAA4D8AAAAAAADgPwAAAAAAAOA/AAAAAAAA4D8AAAAAAADgPwAAAAAAAOA/AAAAAAAA4D8CAAAAjAAAAAAAAAAAAAAARHLEDP///wgAAAAAAAAAAAAAAAAAAAAAAAAAAAAAAAAAAAAAZAAAAAEAAABAAAAAAAAAAAAAAAAAAAAAAAAAAAAAAAAAAAAAAAAAAAAAAAAAAAAAAAAAAAAAAAAAAAAAAAAAAAAAAAAAAAAAAAAAAAAAAAAAAAAAAAAAAAAAAAAAAAAAFAAAADwAAAAAAAAAAAAAAAAAAAkUAAAAAQAAABQAAAAUAAAAFAAAAAEAAAAAAAAAZAAAAGQAAAAAAAAAZAAAAGQAAAAVAAAAYAAAAAAAAAAAAAAADwAAACADAAAAAAAAAAAAAAEAAACgMgAAVgcAAKr4//8BAAAAf39/AAEAAABkAAAAAAAAABQAAABAHwAAAAAAACYAAAAAAAAAwOD//wAAAAAmAAAAZAAAABYAAABMAAAAAAAAAAAAAAAEAAAAAAAAAAEAAADn5uYKAAAAACgAAAAoAAAAZAAAAGQAAAAAAAAAzMzMAAAAAABQAAAAUAAAAGQAAABkAAAAAAAAABcAAAAUAAAAAAAAAAAAAAD/fwAA/38AAAAAAAAJAAAABAAAAAAAAAAeAAAAaAAAAAAAAAAAAAAAAAAAAAAAAAAAAAAAECcAABAnAAAAAAAAAAAAAAAAAAAAAAAAAAAAAAAAAAAAAAAAAAAAABQAAAAAAAAAwMD/AAAAAABkAAAAMgAAAAAAAABkAAAAAAAAAH9/fwAKAAAAIgAAABgAAAAAAAAAAAAAAAAAAAAAAAAAAAAAAAAAAAAkAAAAJAAAAAAAAAAHAAAAAAAAAAAAAAAAAAAAAAAAAAAAAAAAAAAAf39/ACUAAABYAAAAAAAAAAAAAAAAAAAAAAAAAAAAAAAAAAAAAAAAAAAAAAAAAAAAAAAAAAAAAAA/AAAAAAAAAKCGAQAAAAAAAAAAAAAAAAAMAAAAAQAAAAAAAAAAAAAAAAAAAB8AAABUAAAAAAAABQAAAAEAAAAAAAAAAAAAAAAAAAAAAAAAAAAAAAAAAAAAAAAAAAAAAAJ/f38AAAAAA8zMzADAwP8Af39/AAAAAAAAAAAAAAAAAAAAAAAAAAAAIQAAABgAAAAUAAAA5hcAAG41AAAuKgAAQDgAABAAAAAmAAAACAAAAAEAAAAAAAAAMAAAABQAAAAAAAAAAAD//wAAAQAAAP//AAABAA=="/>
               </a:ext>
             </a:extLst>
           </p:cNvSpPr>
@@ -1329,7 +1329,7 @@
           <a:lstStyle/>
           <a:p>
             <a:pPr/>
-            <a:fld id="{76A65A4C-029B-F3AC-D51E-F4F9145023A1}" type="slidenum">
+            <a:fld id="{21CC751C-52CC-9983-8274-A4D63B3A74F1}" type="slidenum">
               <a:rPr lang="en-us" cap="none"/>
               <a:t>13</a:t>
             </a:fld>
@@ -1377,7 +1377,7 @@
             <a:spLocks noGrp="1" noChangeArrowheads="1"/>
             <a:extLst>
               <a:ext uri="smNativeData">
-                <pr:smNativeData xmlns:pr="smNativeData" xmlns="smNativeData" val="SMDATA_16_kRU2ahMAAAAlAAAAZAAAAC0AAAAAkAAAAEgAAACQAAAASAAAAAAAAAABAAAAAAAAAAEAAABQAAAAAAAAAAAA4D8AAAAAAADgPwAAAAAAAOA/AAAAAAAA4D8AAAAAAADgPwAAAAAAAOA/AAAAAAAA4D8AAAAAAADgPwAAAAAAAOA/AAAAAAAA4D8CAAAAjAAAAAAAAAAAAAAARHLEDP///wgAAAAAAAAAAAAAAAAAAAAAAAAAAAAAAAAAAAAAZAAAAAEAAABAAAAAAAAAAAAAAAAAAAAAAAAAAAAAAAAAAAAAAAAAAAAAAAAAAAAAAAAAAAAAAAAAAAAAAAAAAAAAAAAAAAAAAAAAAAAAAAAAAAAAAAAAAAAAAAAAAAAAFAAAADwAAAABAAAAAAAAAAAAAAAUAAAAAQAAACMAAAAjAAAAIwAAAB4AAAAAAAAAZAAAAGQAAAAAAAAAZAAAAGQAAAAVAAAAYAAAAAAAAAAAAAAADwAAACADAAAAAAAAAAAAAAEAAACgMgAAVgcAAKr4//8BAAAAf39/AAEAAABkAAAAAAAAABQAAABAHwAAAAAAACYAAAAAAAAAwOD//wAAAAAmAAAAZAAAABYAAABMAAAAAAAAAAAAAAAEAAAAAAAAAAEAAADn5uYKAAAAACgAAAAoAAAAZAAAAGQAAAAAAAAAzMzMAAAAAABQAAAAUAAAAGQAAABkAAAAAAAAABcAAAAUAAAAAAAAAAAAAAD/fwAA/38AAAAAAAAJAAAABAAAAP////8eAAAAaAAAAAAAAAAAAAAAAAAAAAAAAAAAAAAAECcAABAnAAAAAAAAAAAAAAAAAAAAAAAAAAAAAAAAAAAAAAAAAAAAABQAAAAAAAAAwMD/AAAAAABkAAAAMgAAAAAAAABkAAAAAAAAAH9/fwAKAAAAIgAAABgAAAAAAAAAAAAAAAAAAAAAAAAAAAAAAAAAAAAkAAAAJAAAAAAAAAAHAAAAAAAAAAAAAAAAAAAAAAAAAAAAAAAAAAAAf39/ACUAAABYAAAAAAAAAAAAAAAAAAAAAAAAAAAAAAAAAAAAAAAAAAAAAAAAAAAAAAAAAAAAAAA/AAAAAAAAAKCGAQAAAAAAAAAAAAAAAAAMAAAAAQAAAAAAAAAAAAAAAAAAAB8AAABUAAAAAAAABQAAAAEAAAAAAAAAAAAAAAAAAAAAAAAAAAAAAAAAAAAAAAAAAAAAAAB/f38AAAAAA8zMzADAwP8Af39/AAAAAAAAAAAAAAAAAAAAAAAAAAAAIQAAABgAAAAUAAAAOAQAAAgHAAD4JQAABBoAABAAAAAmAAAACAAAAAEAAAAAAAAAMAAAABQAAAAAAAAAAAD//wAAAQAAAP//AAABAA=="/>
+                <pr:smNativeData xmlns:pr="smNativeData" xmlns="smNativeData" val="SMDATA_16_V2g2ahMAAAAlAAAAZAAAAC0AAAAAkAAAAEgAAACQAAAASAAAAAAAAAABAAAAAAAAAAEAAABQAAAAAAAAAAAA4D8AAAAAAADgPwAAAAAAAOA/AAAAAAAA4D8AAAAAAADgPwAAAAAAAOA/AAAAAAAA4D8AAAAAAADgPwAAAAAAAOA/AAAAAAAA4D8CAAAAjAAAAAAAAAAAAAAARHLEDP///wgAAAAAAAAAAAAAAAAAAAAAAAAAAAAAAAAAAAAAZAAAAAEAAABAAAAAAAAAAAAAAAAAAAAAAAAAAAAAAAAAAAAAAAAAAAAAAAAAAAAAAAAAAAAAAAAAAAAAAAAAAAAAAAAAAAAAAAAAAAAAAAAAAAAAAAAAAAAAAAAAAAAAFAAAADwAAAABAAAAAAAAAAAAAAAUAAAAAQAAACMAAAAjAAAAIwAAAB4AAAAAAAAAZAAAAGQAAAAAAAAAZAAAAGQAAAAVAAAAYAAAAAAAAAAAAAAADwAAACADAAAAAAAAAAAAAAEAAACgMgAAVgcAAKr4//8BAAAAf39/AAEAAABkAAAAAAAAABQAAABAHwAAAAAAACYAAAAAAAAAwOD//wAAAAAmAAAAZAAAABYAAABMAAAAAAAAAAAAAAAEAAAAAAAAAAEAAADn5uYKAAAAACgAAAAoAAAAZAAAAGQAAAAAAAAAzMzMAAAAAABQAAAAUAAAAGQAAABkAAAAAAAAABcAAAAUAAAAAAAAAAAAAAD/fwAA/38AAAAAAAAJAAAABAAAAP////8eAAAAaAAAAAAAAAAAAAAAAAAAAAAAAAAAAAAAECcAABAnAAAAAAAAAAAAAAAAAAAAAAAAAAAAAAAAAAAAAAAAAAAAABQAAAAAAAAAwMD/AAAAAABkAAAAMgAAAAAAAABkAAAAAAAAAH9/fwAKAAAAIgAAABgAAAAAAAAAAAAAAAAAAAAAAAAAAAAAAAAAAAAkAAAAJAAAAAAAAAAHAAAAAAAAAAAAAAAAAAAAAAAAAAAAAAAAAAAAf39/ACUAAABYAAAAAAAAAAAAAAAAAAAAAAAAAAAAAAAAAAAAAAAAAAAAAAAAAAAAAAAAAAAAAAA/AAAAAAAAAKCGAQAAAAAAAAAAAAAAAAAMAAAAAQAAAAAAAAAAAAAAAAAAAB8AAABUAAAAAAAABQAAAAEAAAAAAAAAAAAAAAAAAAAAAAAAAAAAAAAAAAAAAAAAAAAAAAB/f38AAAAAA8zMzADAwP8Af39/AAAAAAAAAAAAAAAAAAAAAAAAAAAAIQAAABgAAAAUAAAAOAQAAAgHAAD4JQAABBoAABAAAAAmAAAACAAAAAEAAAAAAAAAMAAAABQAAAAAAAAAAAD//wAAAQAAAP//AAABAA=="/>
               </a:ext>
             </a:extLst>
           </p:cNvSpPr>
@@ -1399,7 +1399,7 @@
             <a:spLocks noGrp="1" noChangeArrowheads="1"/>
             <a:extLst>
               <a:ext uri="smNativeData">
-                <pr:smNativeData xmlns:pr="smNativeData" xmlns="smNativeData" val="SMDATA_16_kRU2ahMAAAAlAAAAZAAAAA0AAAAAkAAAAEgAAACQAAAASAAAAAAAAAAAAAAAAAAAAAEAAABQAAAAAAAAAAAA4D8AAAAAAADgPwAAAAAAAOA/AAAAAAAA4D8AAAAAAADgPwAAAAAAAOA/AAAAAAAA4D8AAAAAAADgPwAAAAAAAOA/AAAAAAAA4D8CAAAAjAAAAAAAAAAAAAAARHLEDP///wgAAAAAAAAAAAAAAAAAAAAAAAAAAAAAAAAAAAAAZAAAAAEAAABAAAAAAAAAAAAAAAAAAAAAAAAAAAAAAAAAAAAAAAAAAAAAAAAAAAAAAAAAAAAAAAAAAAAAAAAAAAAAAAAAAAAAAAAAAAAAAAAAAAAAAAAAAAAAAAAAAAAAFAAAADwAAAAAAAAAAAAAAAAAAAkUAAAAAQAAABQAAAAUAAAAFAAAAAEAAAAAAAAAZAAAAGQAAAAAAAAAZAAAAGQAAAAVAAAAYAAAAAAAAAAAAAAADwAAACADAAAAAAAAAAAAAAEAAACgMgAAVgcAAKr4//8BAAAAf39/AAEAAABkAAAAAAAAABQAAABAHwAAAAAAACYAAAAAAAAAwOD//wAAAAAmAAAAZAAAABYAAABMAAAAAAAAAAAAAAAEAAAAAAAAAAEAAADn5uYKAAAAACgAAAAoAAAAZAAAAGQAAAAAAAAAzMzMAAAAAABQAAAAUAAAAGQAAABkAAAAAAAAABcAAAAUAAAAAAAAAAAAAAD/fwAA/38AAAAAAAAJAAAABAAAAP////8eAAAAaAAAAAAAAAAAAAAAAAAAAAAAAAAAAAAAECcAABAnAAAAAAAAAAAAAAAAAAAAAAAAAAAAAAAAAAAAAAAAAAAAABQAAAAAAAAAwMD/AAAAAABkAAAAMgAAAAAAAABkAAAAAAAAAH9/fwAKAAAAIgAAABgAAAAAAAAAAAAAAAAAAAAAAAAAAAAAAAAAAAAkAAAAJAAAAAAAAAAHAAAAAAAAAAAAAAAAAAAAAAAAAAAAAAAAAAAAf39/ACUAAABYAAAAAAAAAAAAAAAAAAAAAAAAAAAAAAAAAAAAAAAAAAAAAAAAAAAAAAAAAAAAAAA/AAAAAAAAAKCGAQAAAAAAAAAAAAAAAAAMAAAAAQAAAAAAAAAAAAAAAAAAAB8AAABUAAAAAAAABQAAAAEAAAAAAAAAAAAAAAAAAAAAAAAAAAAAAAAAAAAAAAAAAAAAAAJ/f38AAAAAA8zMzADAwP8Af39/AAAAAAAAAAAAAAAAAAAAAAAAAAAAIQAAABgAAAAUAAAAOAQAABIbAAD4JQAAODEAABAAAAAmAAAACAAAAAEAAAAAAAAAMAAAABQAAAAAAAAAAAD//wAAAQAAAP//AAABAA=="/>
+                <pr:smNativeData xmlns:pr="smNativeData" xmlns="smNativeData" val="SMDATA_16_V2g2ahMAAAAlAAAAZAAAAA0AAAAAkAAAAEgAAACQAAAASAAAAAAAAAAAAAAAAAAAAAEAAABQAAAAAAAAAAAA4D8AAAAAAADgPwAAAAAAAOA/AAAAAAAA4D8AAAAAAADgPwAAAAAAAOA/AAAAAAAA4D8AAAAAAADgPwAAAAAAAOA/AAAAAAAA4D8CAAAAjAAAAAAAAAAAAAAARHLEDP///wgAAAAAAAAAAAAAAAAAAAAAAAAAAAAAAAAAAAAAZAAAAAEAAABAAAAAAAAAAAAAAAAAAAAAAAAAAAAAAAAAAAAAAAAAAAAAAAAAAAAAAAAAAAAAAAAAAAAAAAAAAAAAAAAAAAAAAAAAAAAAAAAAAAAAAAAAAAAAAAAAAAAAFAAAADwAAAAAAAAAAAAAAAAAAAkUAAAAAQAAABQAAAAUAAAAFAAAAAEAAAAAAAAAZAAAAGQAAAAAAAAAZAAAAGQAAAAVAAAAYAAAAAAAAAAAAAAADwAAACADAAAAAAAAAAAAAAEAAACgMgAAVgcAAKr4//8BAAAAf39/AAEAAABkAAAAAAAAABQAAABAHwAAAAAAACYAAAAAAAAAwOD//wAAAAAmAAAAZAAAABYAAABMAAAAAAAAAAAAAAAEAAAAAAAAAAEAAADn5uYKAAAAACgAAAAoAAAAZAAAAGQAAAAAAAAAzMzMAAAAAABQAAAAUAAAAGQAAABkAAAAAAAAABcAAAAUAAAAAAAAAAAAAAD/fwAA/38AAAAAAAAJAAAABAAAAP////8eAAAAaAAAAAAAAAAAAAAAAAAAAAAAAAAAAAAAECcAABAnAAAAAAAAAAAAAAAAAAAAAAAAAAAAAAAAAAAAAAAAAAAAABQAAAAAAAAAwMD/AAAAAABkAAAAMgAAAAAAAABkAAAAAAAAAH9/fwAKAAAAIgAAABgAAAAAAAAAAAAAAAAAAAAAAAAAAAAAAAAAAAAkAAAAJAAAAAAAAAAHAAAAAAAAAAAAAAAAAAAAAAAAAAAAAAAAAAAAf39/ACUAAABYAAAAAAAAAAAAAAAAAAAAAAAAAAAAAAAAAAAAAAAAAAAAAAAAAAAAAAAAAAAAAAA/AAAAAAAAAKCGAQAAAAAAAAAAAAAAAAAMAAAAAQAAAAAAAAAAAAAAAAAAAB8AAABUAAAAAAAABQAAAAEAAAAAAAAAAAAAAAAAAAAAAAAAAAAAAAAAAAAAAAAAAAAAAAJ/f38AAAAAA8zMzADAwP8Af39/AAAAAAAAAAAAAAAAAAAAAAAAAAAAIQAAABgAAAAUAAAAOAQAABIbAAD4JQAAODEAABAAAAAmAAAACAAAAAEAAAAAAAAAMAAAABQAAAAAAAAAAAD//wAAAQAAAP//AAABAA=="/>
               </a:ext>
             </a:extLst>
           </p:cNvSpPr>
@@ -1428,7 +1428,7 @@
             <a:spLocks noGrp="1" noChangeArrowheads="1"/>
             <a:extLst>
               <a:ext uri="smNativeData">
-                <pr:smNativeData xmlns:pr="smNativeData" xmlns="smNativeData" val="SMDATA_16_kRU2ahMAAAAlAAAAZAAAAA0AAAAAkAAAAEgAAACQAAAASAAAAAAAAAACAAAAAAAAAAEAAABQAAAAAAAAAAAA4D8AAAAAAADgPwAAAAAAAOA/AAAAAAAA4D8AAAAAAADgPwAAAAAAAOA/AAAAAAAA4D8AAAAAAADgPwAAAAAAAOA/AAAAAAAA4D8CAAAAjAAAAAAAAAAAAAAARHLEDP///wgAAAAAAAAAAAAAAAAAAAAAAAAAAAAAAAAAAAAAZAAAAAEAAABAAAAAAAAAAAAAAAAAAAAAAAAAAAAAAAAAAAAAAAAAAAAAAAAAAAAAAAAAAAAAAAAAAAAAAAAAAAAAAAAAAAAAAAAAAAAAAAAAAAAAAAAAAAAAAAAAAAAAFAAAADwAAAAAAAAAAAAAAAAAAAkUAAAAAQAAABQAAAAUAAAAFAAAAAEAAAAAAAAAZAAAAGQAAAAAAAAAZAAAAGQAAAAVAAAAYAAAAAAAAAAAAAAADwAAACADAAAAAAAAAAAAAAEAAACgMgAAVgcAAKr4//8BAAAAf39/AAEAAABkAAAAAAAAABQAAABAHwAAAAAAACYAAAAAAAAAwOD//wAAAAAmAAAAZAAAABYAAABMAAAAAAAAAAAAAAAEAAAAAAAAAAEAAADn5uYKAAAAACgAAAAoAAAAZAAAAGQAAAAAAAAAzMzMAAAAAABQAAAAUAAAAGQAAABkAAAAAAAAABcAAAAUAAAAAAAAAAAAAAD/fwAA/38AAAAAAAAJAAAABAAAAAAAAAAeAAAAaAAAAAAAAAAAAAAAAAAAAAAAAAAAAAAAECcAABAnAAAAAAAAAAAAAAAAAAAAAAAAAAAAAAAAAAAAAAAAAAAAABQAAAAAAAAAwMD/AAAAAABkAAAAMgAAAAAAAABkAAAAAAAAAH9/fwAKAAAAIgAAABgAAAAAAAAAAAAAAAAAAAAAAAAAAAAAAAAAAAAkAAAAJAAAAAAAAAAHAAAAAAAAAAAAAAAAAAAAAAAAAAAAAAAAAAAAf39/ACUAAABYAAAAAAAAAAAAAAAAAAAAAAAAAAAAAAAAAAAAAAAAAAAAAAAAAAAAAAAAAAAAAAA/AAAAAAAAAKCGAQAAAAAAAAAAAAAAAAAMAAAAAQAAAAAAAAAAAAAAAAAAAB8AAABUAAAAAAAABQAAAAEAAAAAAAAAAAAAAAAAAAAAAAAAAAAAAAAAAAAAAAAAAAAAAAJ/f38AAAAAA8zMzADAwP8Af39/AAAAAAAAAAAAAAAAAAAAAAAAAAAAIQAAABgAAAAUAAAA5hcAAG41AAAuKgAAQDgAABAAAAAmAAAACAAAAAEAAAAAAAAAMAAAABQAAAAAAAAAAAD//wAAAQAAAP//AAABAA=="/>
+                <pr:smNativeData xmlns:pr="smNativeData" xmlns="smNativeData" val="SMDATA_16_V2g2ahMAAAAlAAAAZAAAAA0AAAAAkAAAAEgAAACQAAAASAAAAAAAAAACAAAAAAAAAAEAAABQAAAAAAAAAAAA4D8AAAAAAADgPwAAAAAAAOA/AAAAAAAA4D8AAAAAAADgPwAAAAAAAOA/AAAAAAAA4D8AAAAAAADgPwAAAAAAAOA/AAAAAAAA4D8CAAAAjAAAAAAAAAAAAAAARHLEDP///wgAAAAAAAAAAAAAAAAAAAAAAAAAAAAAAAAAAAAAZAAAAAEAAABAAAAAAAAAAAAAAAAAAAAAAAAAAAAAAAAAAAAAAAAAAAAAAAAAAAAAAAAAAAAAAAAAAAAAAAAAAAAAAAAAAAAAAAAAAAAAAAAAAAAAAAAAAAAAAAAAAAAAFAAAADwAAAAAAAAAAAAAAAAAAAkUAAAAAQAAABQAAAAUAAAAFAAAAAEAAAAAAAAAZAAAAGQAAAAAAAAAZAAAAGQAAAAVAAAAYAAAAAAAAAAAAAAADwAAACADAAAAAAAAAAAAAAEAAACgMgAAVgcAAKr4//8BAAAAf39/AAEAAABkAAAAAAAAABQAAABAHwAAAAAAACYAAAAAAAAAwOD//wAAAAAmAAAAZAAAABYAAABMAAAAAAAAAAAAAAAEAAAAAAAAAAEAAADn5uYKAAAAACgAAAAoAAAAZAAAAGQAAAAAAAAAzMzMAAAAAABQAAAAUAAAAGQAAABkAAAAAAAAABcAAAAUAAAAAAAAAAAAAAD/fwAA/38AAAAAAAAJAAAABAAAAAAAAAAeAAAAaAAAAAAAAAAAAAAAAAAAAAAAAAAAAAAAECcAABAnAAAAAAAAAAAAAAAAAAAAAAAAAAAAAAAAAAAAAAAAAAAAABQAAAAAAAAAwMD/AAAAAABkAAAAMgAAAAAAAABkAAAAAAAAAH9/fwAKAAAAIgAAABgAAAAAAAAAAAAAAAAAAAAAAAAAAAAAAAAAAAAkAAAAJAAAAAAAAAAHAAAAAAAAAAAAAAAAAAAAAAAAAAAAAAAAAAAAf39/ACUAAABYAAAAAAAAAAAAAAAAAAAAAAAAAAAAAAAAAAAAAAAAAAAAAAAAAAAAAAAAAAAAAAA/AAAAAAAAAKCGAQAAAAAAAAAAAAAAAAAMAAAAAQAAAAAAAAAAAAAAAAAAAB8AAABUAAAAAAAABQAAAAEAAAAAAAAAAAAAAAAAAAAAAAAAAAAAAAAAAAAAAAAAAAAAAAJ/f38AAAAAA8zMzADAwP8Af39/AAAAAAAAAAAAAAAAAAAAAAAAAAAAIQAAABgAAAAUAAAA5hcAAG41AAAuKgAAQDgAABAAAAAmAAAACAAAAAEAAAAAAAAAMAAAABQAAAAAAAAAAAD//wAAAQAAAP//AAABAA=="/>
               </a:ext>
             </a:extLst>
           </p:cNvSpPr>
@@ -1447,7 +1447,7 @@
           <a:lstStyle/>
           <a:p>
             <a:pPr/>
-            <a:fld id="{28E3533E-70C5-B6A5-8B5B-86F01D157DD3}" type="slidenum">
+            <a:fld id="{0DD48E83-CDE0-8178-AE6C-3B2DC022586E}" type="slidenum">
               <a:rPr lang="en-us" cap="none"/>
               <a:t>14</a:t>
             </a:fld>
@@ -1495,7 +1495,7 @@
             <a:spLocks noGrp="1" noChangeArrowheads="1"/>
             <a:extLst>
               <a:ext uri="smNativeData">
-                <pr:smNativeData xmlns:pr="smNativeData" xmlns="smNativeData" val="SMDATA_16_kRU2ahMAAAAlAAAAZAAAAC0AAAAAkAAAAEgAAACQAAAASAAAAAAAAAABAAAAAAAAAAEAAABQAAAAAAAAAAAA4D8AAAAAAADgPwAAAAAAAOA/AAAAAAAA4D8AAAAAAADgPwAAAAAAAOA/AAAAAAAA4D8AAAAAAADgPwAAAAAAAOA/AAAAAAAA4D8CAAAAjAAAAAAAAAAAAAAARHLEDP///wgAAAAAAAAAAAAAAAAAAAAAAAAAAAAAAAAAAAAAZAAAAAEAAABAAAAAAAAAAAAAAAAAAAAAAAAAAAAAAAAAAAAAAAAAAAAAAAAAAAAAAAAAAAAAAAAAAAAAAAAAAAAAAAAAAAAAAAAAAAAAAAAAAAAAAAAAAAAAAAAAAAAAFAAAADwAAAABAAAAAAAAAAAAAAAUAAAAAQAAACMAAAAjAAAAIwAAAB4AAAAAAAAAZAAAAGQAAAAAAAAAZAAAAGQAAAAVAAAAYAAAAAAAAAAAAAAADwAAACADAAAAAAAAAAAAAAEAAACgMgAAVgcAAKr4//8BAAAAf39/AAEAAABkAAAAAAAAABQAAABAHwAAAAAAACYAAAAAAAAAwOD//wAAAAAmAAAAZAAAABYAAABMAAAAAAAAAAAAAAAEAAAAAAAAAAEAAADn5uYKAAAAACgAAAAoAAAAZAAAAGQAAAAAAAAAzMzMAAAAAABQAAAAUAAAAGQAAABkAAAAAAAAABcAAAAUAAAAAAAAAAAAAAD/fwAA/38AAAAAAAAJAAAABAAAAAAAAAAeAAAAaAAAAAAAAAAAAAAAAAAAAAAAAAAAAAAAECcAABAnAAAAAAAAAAAAAAAAAAAAAAAAAAAAAAAAAAAAAAAAAAAAABQAAAAAAAAAwMD/AAAAAABkAAAAMgAAAAAAAABkAAAAAAAAAH9/fwAKAAAAIgAAABgAAAAAAAAAAAAAAAAAAAAAAAAAAAAAAAAAAAAkAAAAJAAAAAAAAAAHAAAAAAAAAAAAAAAAAAAAAAAAAAAAAAAAAAAAf39/ACUAAABYAAAAAAAAAAAAAAAAAAAAAAAAAAAAAAAAAAAAAAAAAAAAAAAAAAAAAAAAAAAAAAA/AAAAAAAAAKCGAQAAAAAAAAAAAAAAAAAMAAAAAQAAAAAAAAAAAAAAAAAAAB8AAABUAAAAAAAABQAAAAEAAAAAAAAAAAAAAAAAAAAAAAAAAAAAAAAAAAAAAAAAAAAAAAB/f38AAAAAA8zMzADAwP8Af39/AAAAAAAAAAAAAAAAAAAAAAAAAAAAIQAAABgAAAAUAAAAOAQAAAgHAAD4JQAABBoAABAAAAAmAAAACAAAAAEAAAAAAAAAMAAAABQAAAAAAAAAAAD//wAAAQAAAP//AAABAA=="/>
+                <pr:smNativeData xmlns:pr="smNativeData" xmlns="smNativeData" val="SMDATA_16_V2g2ahMAAAAlAAAAZAAAAC0AAAAAkAAAAEgAAACQAAAASAAAAAAAAAABAAAAAAAAAAEAAABQAAAAAAAAAAAA4D8AAAAAAADgPwAAAAAAAOA/AAAAAAAA4D8AAAAAAADgPwAAAAAAAOA/AAAAAAAA4D8AAAAAAADgPwAAAAAAAOA/AAAAAAAA4D8CAAAAjAAAAAAAAAAAAAAARHLEDP///wgAAAAAAAAAAAAAAAAAAAAAAAAAAAAAAAAAAAAAZAAAAAEAAABAAAAAAAAAAAAAAAAAAAAAAAAAAAAAAAAAAAAAAAAAAAAAAAAAAAAAAAAAAAAAAAAAAAAAAAAAAAAAAAAAAAAAAAAAAAAAAAAAAAAAAAAAAAAAAAAAAAAAFAAAADwAAAABAAAAAAAAAAAAAAAUAAAAAQAAACMAAAAjAAAAIwAAAB4AAAAAAAAAZAAAAGQAAAAAAAAAZAAAAGQAAAAVAAAAYAAAAAAAAAAAAAAADwAAACADAAAAAAAAAAAAAAEAAACgMgAAVgcAAKr4//8BAAAAf39/AAEAAABkAAAAAAAAABQAAABAHwAAAAAAACYAAAAAAAAAwOD//wAAAAAmAAAAZAAAABYAAABMAAAAAAAAAAAAAAAEAAAAAAAAAAEAAADn5uYKAAAAACgAAAAoAAAAZAAAAGQAAAAAAAAAzMzMAAAAAABQAAAAUAAAAGQAAABkAAAAAAAAABcAAAAUAAAAAAAAAAAAAAD/fwAA/38AAAAAAAAJAAAABAAAAAAAAAAeAAAAaAAAAAAAAAAAAAAAAAAAAAAAAAAAAAAAECcAABAnAAAAAAAAAAAAAAAAAAAAAAAAAAAAAAAAAAAAAAAAAAAAABQAAAAAAAAAwMD/AAAAAABkAAAAMgAAAAAAAABkAAAAAAAAAH9/fwAKAAAAIgAAABgAAAAAAAAAAAAAAAAAAAAAAAAAAAAAAAAAAAAkAAAAJAAAAAAAAAAHAAAAAAAAAAAAAAAAAAAAAAAAAAAAAAAAAAAAf39/ACUAAABYAAAAAAAAAAAAAAAAAAAAAAAAAAAAAAAAAAAAAAAAAAAAAAAAAAAAAAAAAAAAAAA/AAAAAAAAAKCGAQAAAAAAAAAAAAAAAAAMAAAAAQAAAAAAAAAAAAAAAAAAAB8AAABUAAAAAAAABQAAAAEAAAAAAAAAAAAAAAAAAAAAAAAAAAAAAAAAAAAAAAAAAAAAAAB/f38AAAAAA8zMzADAwP8Af39/AAAAAAAAAAAAAAAAAAAAAAAAAAAAIQAAABgAAAAUAAAAOAQAAAgHAAD4JQAABBoAABAAAAAmAAAACAAAAAEAAAAAAAAAMAAAABQAAAAAAAAAAAD//wAAAQAAAP//AAABAA=="/>
               </a:ext>
             </a:extLst>
           </p:cNvSpPr>
@@ -1517,7 +1517,7 @@
             <a:spLocks noGrp="1" noChangeArrowheads="1"/>
             <a:extLst>
               <a:ext uri="smNativeData">
-                <pr:smNativeData xmlns:pr="smNativeData" xmlns="smNativeData" val="SMDATA_16_kRU2ahMAAAAlAAAAZAAAAA0AAAAAkAAAAEgAAACQAAAASAAAAAAAAAAAAAAAAAAAAAEAAABQAAAAAAAAAAAA4D8AAAAAAADgPwAAAAAAAOA/AAAAAAAA4D8AAAAAAADgPwAAAAAAAOA/AAAAAAAA4D8AAAAAAADgPwAAAAAAAOA/AAAAAAAA4D8CAAAAjAAAAAAAAAAAAAAARHLEDP///wgAAAAAAAAAAAAAAAAAAAAAAAAAAAAAAAAAAAAAZAAAAAEAAABAAAAAAAAAAAAAAAAAAAAAAAAAAAAAAAAAAAAAAAAAAAAAAAAAAAAAAAAAAAAAAAAAAAAAAAAAAAAAAAAAAAAAAAAAAAAAAAAAAAAAAAAAAAAAAAAAAAAAFAAAADwAAAAAAAAAAAAAAAAAAAkUAAAAAQAAABQAAAAUAAAAFAAAAAEAAAAAAAAAZAAAAGQAAAAAAAAAZAAAAGQAAAAVAAAAYAAAAAAAAAAAAAAADwAAACADAAAAAAAAAAAAAAEAAACgMgAAVgcAAKr4//8BAAAAf39/AAEAAABkAAAAAAAAABQAAABAHwAAAAAAACYAAAAAAAAAwOD//wAAAAAmAAAAZAAAABYAAABMAAAAAAAAAAAAAAAEAAAAAAAAAAEAAADn5uYKAAAAACgAAAAoAAAAZAAAAGQAAAAAAAAAzMzMAAAAAABQAAAAUAAAAGQAAABkAAAAAAAAABcAAAAUAAAAAAAAAAAAAAD/fwAA/38AAAAAAAAJAAAABAAAAAAAAAAeAAAAaAAAAAAAAAAAAAAAAAAAAAAAAAAAAAAAECcAABAnAAAAAAAAAAAAAAAAAAAAAAAAAAAAAAAAAAAAAAAAAAAAABQAAAAAAAAAwMD/AAAAAABkAAAAMgAAAAAAAABkAAAAAAAAAH9/fwAKAAAAIgAAABgAAAAAAAAAAAAAAAAAAAAAAAAAAAAAAAAAAAAkAAAAJAAAAAAAAAAHAAAAAAAAAAAAAAAAAAAAAAAAAAAAAAAAAAAAf39/ACUAAABYAAAAAAAAAAAAAAAAAAAAAAAAAAAAAAAAAAAAAAAAAAAAAAAAAAAAAAAAAAAAAAA/AAAAAAAAAKCGAQAAAAAAAAAAAAAAAAAMAAAAAQAAAAAAAAAAAAAAAAAAAB8AAABUAAAAAAAABQAAAAEAAAAAAAAAAAAAAAAAAAAAAAAAAAAAAAAAAAAAAAAAAAAAAAJ/f38AAAAAA8zMzADAwP8Af39/AAAAAAAAAAAAAAAAAAAAAAAAAAAAIQAAABgAAAAUAAAAOAQAABIbAAD4JQAAODEAABAAAAAmAAAACAAAAAEAAAAAAAAAMAAAABQAAAAAAAAAAAD//wAAAQAAAP//AAABAA=="/>
+                <pr:smNativeData xmlns:pr="smNativeData" xmlns="smNativeData" val="SMDATA_16_V2g2ahMAAAAlAAAAZAAAAA0AAAAAkAAAAEgAAACQAAAASAAAAAAAAAAAAAAAAAAAAAEAAABQAAAAAAAAAAAA4D8AAAAAAADgPwAAAAAAAOA/AAAAAAAA4D8AAAAAAADgPwAAAAAAAOA/AAAAAAAA4D8AAAAAAADgPwAAAAAAAOA/AAAAAAAA4D8CAAAAjAAAAAAAAAAAAAAARHLEDP///wgAAAAAAAAAAAAAAAAAAAAAAAAAAAAAAAAAAAAAZAAAAAEAAABAAAAAAAAAAAAAAAAAAAAAAAAAAAAAAAAAAAAAAAAAAAAAAAAAAAAAAAAAAAAAAAAAAAAAAAAAAAAAAAAAAAAAAAAAAAAAAAAAAAAAAAAAAAAAAAAAAAAAFAAAADwAAAAAAAAAAAAAAAAAAAkUAAAAAQAAABQAAAAUAAAAFAAAAAEAAAAAAAAAZAAAAGQAAAAAAAAAZAAAAGQAAAAVAAAAYAAAAAAAAAAAAAAADwAAACADAAAAAAAAAAAAAAEAAACgMgAAVgcAAKr4//8BAAAAf39/AAEAAABkAAAAAAAAABQAAABAHwAAAAAAACYAAAAAAAAAwOD//wAAAAAmAAAAZAAAABYAAABMAAAAAAAAAAAAAAAEAAAAAAAAAAEAAADn5uYKAAAAACgAAAAoAAAAZAAAAGQAAAAAAAAAzMzMAAAAAABQAAAAUAAAAGQAAABkAAAAAAAAABcAAAAUAAAAAAAAAAAAAAD/fwAA/38AAAAAAAAJAAAABAAAAAAAAAAeAAAAaAAAAAAAAAAAAAAAAAAAAAAAAAAAAAAAECcAABAnAAAAAAAAAAAAAAAAAAAAAAAAAAAAAAAAAAAAAAAAAAAAABQAAAAAAAAAwMD/AAAAAABkAAAAMgAAAAAAAABkAAAAAAAAAH9/fwAKAAAAIgAAABgAAAAAAAAAAAAAAAAAAAAAAAAAAAAAAAAAAAAkAAAAJAAAAAAAAAAHAAAAAAAAAAAAAAAAAAAAAAAAAAAAAAAAAAAAf39/ACUAAABYAAAAAAAAAAAAAAAAAAAAAAAAAAAAAAAAAAAAAAAAAAAAAAAAAAAAAAAAAAAAAAA/AAAAAAAAAKCGAQAAAAAAAAAAAAAAAAAMAAAAAQAAAAAAAAAAAAAAAAAAAB8AAABUAAAAAAAABQAAAAEAAAAAAAAAAAAAAAAAAAAAAAAAAAAAAAAAAAAAAAAAAAAAAAJ/f38AAAAAA8zMzADAwP8Af39/AAAAAAAAAAAAAAAAAAAAAAAAAAAAIQAAABgAAAAUAAAAOAQAABIbAAD4JQAAODEAABAAAAAmAAAACAAAAAEAAAAAAAAAMAAAABQAAAAAAAAAAAD//wAAAQAAAP//AAABAA=="/>
               </a:ext>
             </a:extLst>
           </p:cNvSpPr>
@@ -1546,7 +1546,7 @@
             <a:spLocks noGrp="1" noChangeArrowheads="1"/>
             <a:extLst>
               <a:ext uri="smNativeData">
-                <pr:smNativeData xmlns:pr="smNativeData" xmlns="smNativeData" val="SMDATA_16_kRU2ahMAAAAlAAAAZAAAAA0AAAAAkAAAAEgAAACQAAAASAAAAAAAAAACAAAAAAAAAAEAAABQAAAAAAAAAAAA4D8AAAAAAADgPwAAAAAAAOA/AAAAAAAA4D8AAAAAAADgPwAAAAAAAOA/AAAAAAAA4D8AAAAAAADgPwAAAAAAAOA/AAAAAAAA4D8CAAAAjAAAAAAAAAAAAAAARHLEDP///wgAAAAAAAAAAAAAAAAAAAAAAAAAAAAAAAAAAAAAZAAAAAEAAABAAAAAAAAAAAAAAAAAAAAAAAAAAAAAAAAAAAAAAAAAAAAAAAAAAAAAAAAAAAAAAAAAAAAAAAAAAAAAAAAAAAAAAAAAAAAAAAAAAAAAAAAAAAAAAAAAAAAAFAAAADwAAAAAAAAAAAAAAAAAAAkUAAAAAQAAABQAAAAUAAAAFAAAAAEAAAAAAAAAZAAAAGQAAAAAAAAAZAAAAGQAAAAVAAAAYAAAAAAAAAAAAAAADwAAACADAAAAAAAAAAAAAAEAAACgMgAAVgcAAKr4//8BAAAAf39/AAEAAABkAAAAAAAAABQAAABAHwAAAAAAACYAAAAAAAAAwOD//wAAAAAmAAAAZAAAABYAAABMAAAAAAAAAAAAAAAEAAAAAAAAAAEAAADn5uYKAAAAACgAAAAoAAAAZAAAAGQAAAAAAAAAzMzMAAAAAABQAAAAUAAAAGQAAABkAAAAAAAAABcAAAAUAAAAAAAAAAAAAAD/fwAA/38AAAAAAAAJAAAABAAAAAAAAAAeAAAAaAAAAAAAAAAAAAAAAAAAAAAAAAAAAAAAECcAABAnAAAAAAAAAAAAAAAAAAAAAAAAAAAAAAAAAAAAAAAAAAAAABQAAAAAAAAAwMD/AAAAAABkAAAAMgAAAAAAAABkAAAAAAAAAH9/fwAKAAAAIgAAABgAAAAAAAAAAAAAAAAAAAAAAAAAAAAAAAAAAAAkAAAAJAAAAAAAAAAHAAAAAAAAAAAAAAAAAAAAAAAAAAAAAAAAAAAAf39/ACUAAABYAAAAAAAAAAAAAAAAAAAAAAAAAAAAAAAAAAAAAAAAAAAAAAAAAAAAAAAAAAAAAAA/AAAAAAAAAKCGAQAAAAAAAAAAAAAAAAAMAAAAAQAAAAAAAAAAAAAAAAAAAB8AAABUAAAAAAAABQAAAAEAAAAAAAAAAAAAAAAAAAAAAAAAAAAAAAAAAAAAAAAAAAAAAAJ/f38AAAAAA8zMzADAwP8Af39/AAAAAAAAAAAAAAAAAAAAAAAAAAAAIQAAABgAAAAUAAAA5hcAAG41AAAuKgAAQDgAABAAAAAmAAAACAAAAAEAAAAAAAAAMAAAABQAAAAAAAAAAAD//wAAAQAAAP//AAABAA=="/>
+                <pr:smNativeData xmlns:pr="smNativeData" xmlns="smNativeData" val="SMDATA_16_V2g2ahMAAAAlAAAAZAAAAA0AAAAAkAAAAEgAAACQAAAASAAAAAAAAAACAAAAAAAAAAEAAABQAAAAAAAAAAAA4D8AAAAAAADgPwAAAAAAAOA/AAAAAAAA4D8AAAAAAADgPwAAAAAAAOA/AAAAAAAA4D8AAAAAAADgPwAAAAAAAOA/AAAAAAAA4D8CAAAAjAAAAAAAAAAAAAAARHLEDP///wgAAAAAAAAAAAAAAAAAAAAAAAAAAAAAAAAAAAAAZAAAAAEAAABAAAAAAAAAAAAAAAAAAAAAAAAAAAAAAAAAAAAAAAAAAAAAAAAAAAAAAAAAAAAAAAAAAAAAAAAAAAAAAAAAAAAAAAAAAAAAAAAAAAAAAAAAAAAAAAAAAAAAFAAAADwAAAAAAAAAAAAAAAAAAAkUAAAAAQAAABQAAAAUAAAAFAAAAAEAAAAAAAAAZAAAAGQAAAAAAAAAZAAAAGQAAAAVAAAAYAAAAAAAAAAAAAAADwAAACADAAAAAAAAAAAAAAEAAACgMgAAVgcAAKr4//8BAAAAf39/AAEAAABkAAAAAAAAABQAAABAHwAAAAAAACYAAAAAAAAAwOD//wAAAAAmAAAAZAAAABYAAABMAAAAAAAAAAAAAAAEAAAAAAAAAAEAAADn5uYKAAAAACgAAAAoAAAAZAAAAGQAAAAAAAAAzMzMAAAAAABQAAAAUAAAAGQAAABkAAAAAAAAABcAAAAUAAAAAAAAAAAAAAD/fwAA/38AAAAAAAAJAAAABAAAAAAAAAAeAAAAaAAAAAAAAAAAAAAAAAAAAAAAAAAAAAAAECcAABAnAAAAAAAAAAAAAAAAAAAAAAAAAAAAAAAAAAAAAAAAAAAAABQAAAAAAAAAwMD/AAAAAABkAAAAMgAAAAAAAABkAAAAAAAAAH9/fwAKAAAAIgAAABgAAAAAAAAAAAAAAAAAAAAAAAAAAAAAAAAAAAAkAAAAJAAAAAAAAAAHAAAAAAAAAAAAAAAAAAAAAAAAAAAAAAAAAAAAf39/ACUAAABYAAAAAAAAAAAAAAAAAAAAAAAAAAAAAAAAAAAAAAAAAAAAAAAAAAAAAAAAAAAAAAA/AAAAAAAAAKCGAQAAAAAAAAAAAAAAAAAMAAAAAQAAAAAAAAAAAAAAAAAAAB8AAABUAAAAAAAABQAAAAEAAAAAAAAAAAAAAAAAAAAAAAAAAAAAAAAAAAAAAAAAAAAAAAJ/f38AAAAAA8zMzADAwP8Af39/AAAAAAAAAAAAAAAAAAAAAAAAAAAAIQAAABgAAAAUAAAA5hcAAG41AAAuKgAAQDgAABAAAAAmAAAACAAAAAEAAAAAAAAAMAAAABQAAAAAAAAAAAD//wAAAQAAAP//AAABAA=="/>
               </a:ext>
             </a:extLst>
           </p:cNvSpPr>
@@ -1565,7 +1565,7 @@
           <a:lstStyle/>
           <a:p>
             <a:pPr/>
-            <a:fld id="{71177026-689C-4286-D2AF-9ED33EE124CB}" type="slidenum">
+            <a:fld id="{2E46BA95-DBC3-134C-8DFE-2D19F4B07B78}" type="slidenum">
               <a:rPr lang="en-us" cap="none"/>
               <a:t>2</a:t>
             </a:fld>
@@ -1613,7 +1613,7 @@
             <a:spLocks noGrp="1" noChangeArrowheads="1"/>
             <a:extLst>
               <a:ext uri="smNativeData">
-                <pr:smNativeData xmlns:pr="smNativeData" xmlns="smNativeData" val="SMDATA_16_kRU2ahMAAAAlAAAAZAAAAC0AAAAAkAAAAEgAAACQAAAASAAAAAAAAAABAAAAAAAAAAEAAABQAAAAAAAAAAAA4D8AAAAAAADgPwAAAAAAAOA/AAAAAAAA4D8AAAAAAADgPwAAAAAAAOA/AAAAAAAA4D8AAAAAAADgPwAAAAAAAOA/AAAAAAAA4D8CAAAAjAAAAAAAAAAAAAAARHLEDP///wgAAAAAAAAAAAAAAAAAAAAAAAAAAAAAAAAAAAAAZAAAAAEAAABAAAAAAAAAAAAAAAAAAAAAAAAAAAAAAAAAAAAAAAAAAAAAAAAAAAAAAAAAAAAAAAAAAAAAAAAAAAAAAAAAAAAAAAAAAAAAAAAAAAAAAAAAAAAAAAAAAAAAFAAAADwAAAABAAAAAAAAAAAAAAAUAAAAAQAAACMAAAAjAAAAIwAAAB4AAAAAAAAAZAAAAGQAAAAAAAAAZAAAAGQAAAAVAAAAYAAAAAAAAAAAAAAADwAAACADAAAAAAAAAAAAAAEAAACgMgAAVgcAAKr4//8BAAAAf39/AAEAAABkAAAAAAAAABQAAABAHwAAAAAAACYAAAAAAAAAwOD//wAAAAAmAAAAZAAAABYAAABMAAAAAAAAAAAAAAAEAAAAAAAAAAEAAADn5uYKAAAAACgAAAAoAAAAZAAAAGQAAAAAAAAAzMzMAAAAAABQAAAAUAAAAGQAAABkAAAAAAAAABcAAAAUAAAAAAAAAAAAAAD/fwAA/38AAAAAAAAJAAAABAAAAAAAAAAeAAAAaAAAAAAAAAAAAAAAAAAAAAAAAAAAAAAAECcAABAnAAAAAAAAAAAAAAAAAAAAAAAAAAAAAAAAAAAAAAAAAAAAABQAAAAAAAAAwMD/AAAAAABkAAAAMgAAAAAAAABkAAAAAAAAAH9/fwAKAAAAIgAAABgAAAAAAAAAAAAAAAAAAAAAAAAAAAAAAAAAAAAkAAAAJAAAAAAAAAAHAAAAAAAAAAAAAAAAAAAAAAAAAAAAAAAAAAAAf39/ACUAAABYAAAAAAAAAAAAAAAAAAAAAAAAAAAAAAAAAAAAAAAAAAAAAAAAAAAAAAAAAAAAAAA/AAAAAAAAAKCGAQAAAAAAAAAAAAAAAAAMAAAAAQAAAAAAAAAAAAAAAAAAAB8AAABUAAAAAAAABQAAAAEAAAAAAAAAAAAAAAAAAAAAAAAAAAAAAAAAAAAAAAAAAAAAAAB/f38AAAAAA8zMzADAwP8Af39/AAAAAAAAAAAAAAAAAAAAAAAAAAAAIQAAABgAAAAUAAAAOAQAAAgHAAD4JQAABBoAABAAAAAmAAAACAAAAAEAAAAAAAAAMAAAABQAAAAAAAAAAAD//wAAAQAAAP//AAABAA=="/>
+                <pr:smNativeData xmlns:pr="smNativeData" xmlns="smNativeData" val="SMDATA_16_V2g2ahMAAAAlAAAAZAAAAC0AAAAAkAAAAEgAAACQAAAASAAAAAAAAAABAAAAAAAAAAEAAABQAAAAAAAAAAAA4D8AAAAAAADgPwAAAAAAAOA/AAAAAAAA4D8AAAAAAADgPwAAAAAAAOA/AAAAAAAA4D8AAAAAAADgPwAAAAAAAOA/AAAAAAAA4D8CAAAAjAAAAAAAAAAAAAAARHLEDP///wgAAAAAAAAAAAAAAAAAAAAAAAAAAAAAAAAAAAAAZAAAAAEAAABAAAAAAAAAAAAAAAAAAAAAAAAAAAAAAAAAAAAAAAAAAAAAAAAAAAAAAAAAAAAAAAAAAAAAAAAAAAAAAAAAAAAAAAAAAAAAAAAAAAAAAAAAAAAAAAAAAAAAFAAAADwAAAABAAAAAAAAAAAAAAAUAAAAAQAAACMAAAAjAAAAIwAAAB4AAAAAAAAAZAAAAGQAAAAAAAAAZAAAAGQAAAAVAAAAYAAAAAAAAAAAAAAADwAAACADAAAAAAAAAAAAAAEAAACgMgAAVgcAAKr4//8BAAAAf39/AAEAAABkAAAAAAAAABQAAABAHwAAAAAAACYAAAAAAAAAwOD//wAAAAAmAAAAZAAAABYAAABMAAAAAAAAAAAAAAAEAAAAAAAAAAEAAADn5uYKAAAAACgAAAAoAAAAZAAAAGQAAAAAAAAAzMzMAAAAAABQAAAAUAAAAGQAAABkAAAAAAAAABcAAAAUAAAAAAAAAAAAAAD/fwAA/38AAAAAAAAJAAAABAAAAAAAAAAeAAAAaAAAAAAAAAAAAAAAAAAAAAAAAAAAAAAAECcAABAnAAAAAAAAAAAAAAAAAAAAAAAAAAAAAAAAAAAAAAAAAAAAABQAAAAAAAAAwMD/AAAAAABkAAAAMgAAAAAAAABkAAAAAAAAAH9/fwAKAAAAIgAAABgAAAAAAAAAAAAAAAAAAAAAAAAAAAAAAAAAAAAkAAAAJAAAAAAAAAAHAAAAAAAAAAAAAAAAAAAAAAAAAAAAAAAAAAAAf39/ACUAAABYAAAAAAAAAAAAAAAAAAAAAAAAAAAAAAAAAAAAAAAAAAAAAAAAAAAAAAAAAAAAAAA/AAAAAAAAAKCGAQAAAAAAAAAAAAAAAAAMAAAAAQAAAAAAAAAAAAAAAAAAAB8AAABUAAAAAAAABQAAAAEAAAAAAAAAAAAAAAAAAAAAAAAAAAAAAAAAAAAAAAAAAAAAAAB/f38AAAAAA8zMzADAwP8Af39/AAAAAAAAAAAAAAAAAAAAAAAAAAAAIQAAABgAAAAUAAAAOAQAAAgHAAD4JQAABBoAABAAAAAmAAAACAAAAAEAAAAAAAAAMAAAABQAAAAAAAAAAAD//wAAAQAAAP//AAABAA=="/>
               </a:ext>
             </a:extLst>
           </p:cNvSpPr>
@@ -1635,7 +1635,7 @@
             <a:spLocks noGrp="1" noChangeArrowheads="1"/>
             <a:extLst>
               <a:ext uri="smNativeData">
-                <pr:smNativeData xmlns:pr="smNativeData" xmlns="smNativeData" val="SMDATA_16_kRU2ahMAAAAlAAAAZAAAAA0AAAAAkAAAAEgAAACQAAAASAAAAAAAAAAAAAAAAAAAAAEAAABQAAAAAAAAAAAA4D8AAAAAAADgPwAAAAAAAOA/AAAAAAAA4D8AAAAAAADgPwAAAAAAAOA/AAAAAAAA4D8AAAAAAADgPwAAAAAAAOA/AAAAAAAA4D8CAAAAjAAAAAAAAAAAAAAARHLEDP///wgAAAAAAAAAAAAAAAAAAAAAAAAAAAAAAAAAAAAAZAAAAAEAAABAAAAAAAAAAAAAAAAAAAAAAAAAAAAAAAAAAAAAAAAAAAAAAAAAAAAAAAAAAAAAAAAAAAAAAAAAAAAAAAAAAAAAAAAAAAAAAAAAAAAAAAAAAAAAAAAAAAAAFAAAADwAAAAAAAAAAAAAAAAAAAkUAAAAAQAAABQAAAAUAAAAFAAAAAEAAAAAAAAAZAAAAGQAAAAAAAAAZAAAAGQAAAAVAAAAYAAAAAAAAAAAAAAADwAAACADAAAAAAAAAAAAAAEAAACgMgAAVgcAAKr4//8BAAAAf39/AAEAAABkAAAAAAAAABQAAABAHwAAAAAAACYAAAAAAAAAwOD//wAAAAAmAAAAZAAAABYAAABMAAAAAAAAAAAAAAAEAAAAAAAAAAEAAADn5uYKAAAAACgAAAAoAAAAZAAAAGQAAAAAAAAAzMzMAAAAAABQAAAAUAAAAGQAAABkAAAAAAAAABcAAAAUAAAAAAAAAAAAAAD/fwAA/38AAAAAAAAJAAAABAAAAAAAAAAeAAAAaAAAAAAAAAAAAAAAAAAAAAAAAAAAAAAAECcAABAnAAAAAAAAAAAAAAAAAAAAAAAAAAAAAAAAAAAAAAAAAAAAABQAAAAAAAAAwMD/AAAAAABkAAAAMgAAAAAAAABkAAAAAAAAAH9/fwAKAAAAIgAAABgAAAAAAAAAAAAAAAAAAAAAAAAAAAAAAAAAAAAkAAAAJAAAAAAAAAAHAAAAAAAAAAAAAAAAAAAAAAAAAAAAAAAAAAAAf39/ACUAAABYAAAAAAAAAAAAAAAAAAAAAAAAAAAAAAAAAAAAAAAAAAAAAAAAAAAAAAAAAAAAAAA/AAAAAAAAAKCGAQAAAAAAAAAAAAAAAAAMAAAAAQAAAAAAAAAAAAAAAAAAAB8AAABUAAAAAAAABQAAAAEAAAAAAAAAAAAAAAAAAAAAAAAAAAAAAAAAAAAAAAAAAAAAAAJ/f38AAAAAA8zMzADAwP8Af39/AAAAAAAAAAAAAAAAAAAAAAAAAAAAIQAAABgAAAAUAAAAOAQAABIbAAD4JQAAODEAABAAAAAmAAAACAAAAAEAAAAAAAAAMAAAABQAAAAAAAAAAAD//wAAAQAAAP//AAABAA=="/>
+                <pr:smNativeData xmlns:pr="smNativeData" xmlns="smNativeData" val="SMDATA_16_V2g2ahMAAAAlAAAAZAAAAA0AAAAAkAAAAEgAAACQAAAASAAAAAAAAAAAAAAAAAAAAAEAAABQAAAAAAAAAAAA4D8AAAAAAADgPwAAAAAAAOA/AAAAAAAA4D8AAAAAAADgPwAAAAAAAOA/AAAAAAAA4D8AAAAAAADgPwAAAAAAAOA/AAAAAAAA4D8CAAAAjAAAAAAAAAAAAAAARHLEDP///wgAAAAAAAAAAAAAAAAAAAAAAAAAAAAAAAAAAAAAZAAAAAEAAABAAAAAAAAAAAAAAAAAAAAAAAAAAAAAAAAAAAAAAAAAAAAAAAAAAAAAAAAAAAAAAAAAAAAAAAAAAAAAAAAAAAAAAAAAAAAAAAAAAAAAAAAAAAAAAAAAAAAAFAAAADwAAAAAAAAAAAAAAAAAAAkUAAAAAQAAABQAAAAUAAAAFAAAAAEAAAAAAAAAZAAAAGQAAAAAAAAAZAAAAGQAAAAVAAAAYAAAAAAAAAAAAAAADwAAACADAAAAAAAAAAAAAAEAAACgMgAAVgcAAKr4//8BAAAAf39/AAEAAABkAAAAAAAAABQAAABAHwAAAAAAACYAAAAAAAAAwOD//wAAAAAmAAAAZAAAABYAAABMAAAAAAAAAAAAAAAEAAAAAAAAAAEAAADn5uYKAAAAACgAAAAoAAAAZAAAAGQAAAAAAAAAzMzMAAAAAABQAAAAUAAAAGQAAABkAAAAAAAAABcAAAAUAAAAAAAAAAAAAAD/fwAA/38AAAAAAAAJAAAABAAAAAAAAAAeAAAAaAAAAAAAAAAAAAAAAAAAAAAAAAAAAAAAECcAABAnAAAAAAAAAAAAAAAAAAAAAAAAAAAAAAAAAAAAAAAAAAAAABQAAAAAAAAAwMD/AAAAAABkAAAAMgAAAAAAAABkAAAAAAAAAH9/fwAKAAAAIgAAABgAAAAAAAAAAAAAAAAAAAAAAAAAAAAAAAAAAAAkAAAAJAAAAAAAAAAHAAAAAAAAAAAAAAAAAAAAAAAAAAAAAAAAAAAAf39/ACUAAABYAAAAAAAAAAAAAAAAAAAAAAAAAAAAAAAAAAAAAAAAAAAAAAAAAAAAAAAAAAAAAAA/AAAAAAAAAKCGAQAAAAAAAAAAAAAAAAAMAAAAAQAAAAAAAAAAAAAAAAAAAB8AAABUAAAAAAAABQAAAAEAAAAAAAAAAAAAAAAAAAAAAAAAAAAAAAAAAAAAAAAAAAAAAAJ/f38AAAAAA8zMzADAwP8Af39/AAAAAAAAAAAAAAAAAAAAAAAAAAAAIQAAABgAAAAUAAAAOAQAABIbAAD4JQAAODEAABAAAAAmAAAACAAAAAEAAAAAAAAAMAAAABQAAAAAAAAAAAD//wAAAQAAAP//AAABAA=="/>
               </a:ext>
             </a:extLst>
           </p:cNvSpPr>
@@ -1664,7 +1664,7 @@
             <a:spLocks noGrp="1" noChangeArrowheads="1"/>
             <a:extLst>
               <a:ext uri="smNativeData">
-                <pr:smNativeData xmlns:pr="smNativeData" xmlns="smNativeData" val="SMDATA_16_kRU2ahMAAAAlAAAAZAAAAA0AAAAAkAAAAEgAAACQAAAASAAAAAAAAAACAAAAAAAAAAEAAABQAAAAAAAAAAAA4D8AAAAAAADgPwAAAAAAAOA/AAAAAAAA4D8AAAAAAADgPwAAAAAAAOA/AAAAAAAA4D8AAAAAAADgPwAAAAAAAOA/AAAAAAAA4D8CAAAAjAAAAAAAAAAAAAAARHLEDP///wgAAAAAAAAAAAAAAAAAAAAAAAAAAAAAAAAAAAAAZAAAAAEAAABAAAAAAAAAAAAAAAAAAAAAAAAAAAAAAAAAAAAAAAAAAAAAAAAAAAAAAAAAAAAAAAAAAAAAAAAAAAAAAAAAAAAAAAAAAAAAAAAAAAAAAAAAAAAAAAAAAAAAFAAAADwAAAAAAAAAAAAAAAAAAAkUAAAAAQAAABQAAAAUAAAAFAAAAAEAAAAAAAAAZAAAAGQAAAAAAAAAZAAAAGQAAAAVAAAAYAAAAAAAAAAAAAAADwAAACADAAAAAAAAAAAAAAEAAACgMgAAVgcAAKr4//8BAAAAf39/AAEAAABkAAAAAAAAABQAAABAHwAAAAAAACYAAAAAAAAAwOD//wAAAAAmAAAAZAAAABYAAABMAAAAAAAAAAAAAAAEAAAAAAAAAAEAAADn5uYKAAAAACgAAAAoAAAAZAAAAGQAAAAAAAAAzMzMAAAAAABQAAAAUAAAAGQAAABkAAAAAAAAABcAAAAUAAAAAAAAAAAAAAD/fwAA/38AAAAAAAAJAAAABAAAAAAAAAAeAAAAaAAAAAAAAAAAAAAAAAAAAAAAAAAAAAAAECcAABAnAAAAAAAAAAAAAAAAAAAAAAAAAAAAAAAAAAAAAAAAAAAAABQAAAAAAAAAwMD/AAAAAABkAAAAMgAAAAAAAABkAAAAAAAAAH9/fwAKAAAAIgAAABgAAAAAAAAAAAAAAAAAAAAAAAAAAAAAAAAAAAAkAAAAJAAAAAAAAAAHAAAAAAAAAAAAAAAAAAAAAAAAAAAAAAAAAAAAf39/ACUAAABYAAAAAAAAAAAAAAAAAAAAAAAAAAAAAAAAAAAAAAAAAAAAAAAAAAAAAAAAAAAAAAA/AAAAAAAAAKCGAQAAAAAAAAAAAAAAAAAMAAAAAQAAAAAAAAAAAAAAAAAAAB8AAABUAAAAAAAABQAAAAEAAAAAAAAAAAAAAAAAAAAAAAAAAAAAAAAAAAAAAAAAAAAAAAJ/f38AAAAAA8zMzADAwP8Af39/AAAAAAAAAAAAAAAAAAAAAAAAAAAAIQAAABgAAAAUAAAA5hcAAG41AAAuKgAAQDgAABAAAAAmAAAACAAAAAEAAAAAAAAAMAAAABQAAAAAAAAAAAD//wAAAQAAAP//AAABAA=="/>
+                <pr:smNativeData xmlns:pr="smNativeData" xmlns="smNativeData" val="SMDATA_16_V2g2ahMAAAAlAAAAZAAAAA0AAAAAkAAAAEgAAACQAAAASAAAAAAAAAACAAAAAAAAAAEAAABQAAAAAAAAAAAA4D8AAAAAAADgPwAAAAAAAOA/AAAAAAAA4D8AAAAAAADgPwAAAAAAAOA/AAAAAAAA4D8AAAAAAADgPwAAAAAAAOA/AAAAAAAA4D8CAAAAjAAAAAAAAAAAAAAARHLEDP///wgAAAAAAAAAAAAAAAAAAAAAAAAAAAAAAAAAAAAAZAAAAAEAAABAAAAAAAAAAAAAAAAAAAAAAAAAAAAAAAAAAAAAAAAAAAAAAAAAAAAAAAAAAAAAAAAAAAAAAAAAAAAAAAAAAAAAAAAAAAAAAAAAAAAAAAAAAAAAAAAAAAAAFAAAADwAAAAAAAAAAAAAAAAAAAkUAAAAAQAAABQAAAAUAAAAFAAAAAEAAAAAAAAAZAAAAGQAAAAAAAAAZAAAAGQAAAAVAAAAYAAAAAAAAAAAAAAADwAAACADAAAAAAAAAAAAAAEAAACgMgAAVgcAAKr4//8BAAAAf39/AAEAAABkAAAAAAAAABQAAABAHwAAAAAAACYAAAAAAAAAwOD//wAAAAAmAAAAZAAAABYAAABMAAAAAAAAAAAAAAAEAAAAAAAAAAEAAADn5uYKAAAAACgAAAAoAAAAZAAAAGQAAAAAAAAAzMzMAAAAAABQAAAAUAAAAGQAAABkAAAAAAAAABcAAAAUAAAAAAAAAAAAAAD/fwAA/38AAAAAAAAJAAAABAAAAAAAAAAeAAAAaAAAAAAAAAAAAAAAAAAAAAAAAAAAAAAAECcAABAnAAAAAAAAAAAAAAAAAAAAAAAAAAAAAAAAAAAAAAAAAAAAABQAAAAAAAAAwMD/AAAAAABkAAAAMgAAAAAAAABkAAAAAAAAAH9/fwAKAAAAIgAAABgAAAAAAAAAAAAAAAAAAAAAAAAAAAAAAAAAAAAkAAAAJAAAAAAAAAAHAAAAAAAAAAAAAAAAAAAAAAAAAAAAAAAAAAAAf39/ACUAAABYAAAAAAAAAAAAAAAAAAAAAAAAAAAAAAAAAAAAAAAAAAAAAAAAAAAAAAAAAAAAAAA/AAAAAAAAAKCGAQAAAAAAAAAAAAAAAAAMAAAAAQAAAAAAAAAAAAAAAAAAAB8AAABUAAAAAAAABQAAAAEAAAAAAAAAAAAAAAAAAAAAAAAAAAAAAAAAAAAAAAAAAAAAAAJ/f38AAAAAA8zMzADAwP8Af39/AAAAAAAAAAAAAAAAAAAAAAAAAAAAIQAAABgAAAAUAAAA5hcAAG41AAAuKgAAQDgAABAAAAAmAAAACAAAAAEAAAAAAAAAMAAAABQAAAAAAAAAAAD//wAAAQAAAP//AAABAA=="/>
               </a:ext>
             </a:extLst>
           </p:cNvSpPr>
@@ -1683,7 +1683,7 @@
           <a:lstStyle/>
           <a:p>
             <a:pPr/>
-            <a:fld id="{0A5E80BE-F0E7-0B76-A9E6-0623CEA85F53}" type="slidenum">
+            <a:fld id="{12FBDD08-46FF-AE2B-B143-B07E930D47E5}" type="slidenum">
               <a:rPr lang="en-us" cap="none"/>
               <a:t>3</a:t>
             </a:fld>
@@ -1731,7 +1731,7 @@
             <a:spLocks noGrp="1" noChangeArrowheads="1"/>
             <a:extLst>
               <a:ext uri="smNativeData">
-                <pr:smNativeData xmlns:pr="smNativeData" xmlns="smNativeData" val="SMDATA_16_kRU2ahMAAAAlAAAAZAAAAC0AAAAAkAAAAEgAAACQAAAASAAAAAAAAAABAAAAAAAAAAEAAABQAAAAAAAAAAAA4D8AAAAAAADgPwAAAAAAAOA/AAAAAAAA4D8AAAAAAADgPwAAAAAAAOA/AAAAAAAA4D8AAAAAAADgPwAAAAAAAOA/AAAAAAAA4D8CAAAAjAAAAAAAAAAAAAAARHLEDP///wgAAAAAAAAAAAAAAAAAAAAAAAAAAAAAAAAAAAAAZAAAAAEAAABAAAAAAAAAAAAAAAAAAAAAAAAAAAAAAAAAAAAAAAAAAAAAAAAAAAAAAAAAAAAAAAAAAAAAAAAAAAAAAAAAAAAAAAAAAAAAAAAAAAAAAAAAAAAAAAAAAAAAFAAAADwAAAABAAAAAAAAAAAAAAAUAAAAAQAAACMAAAAjAAAAIwAAAB4AAAAAAAAAZAAAAGQAAAAAAAAAZAAAAGQAAAAVAAAAYAAAAAAAAAAAAAAADwAAACADAAAAAAAAAAAAAAEAAACgMgAAVgcAAKr4//8BAAAAf39/AAEAAABkAAAAAAAAABQAAABAHwAAAAAAACYAAAAAAAAAwOD//wAAAAAmAAAAZAAAABYAAABMAAAAAAAAAAAAAAAEAAAAAAAAAAEAAADn5uYKAAAAACgAAAAoAAAAZAAAAGQAAAAAAAAAzMzMAAAAAABQAAAAUAAAAGQAAABkAAAAAAAAABcAAAAUAAAAAAAAAAAAAAD/fwAA/38AAAAAAAAJAAAABAAAAFEAAAAeAAAAaAAAAAAAAAAAAAAAAAAAAAAAAAAAAAAAECcAABAnAAAAAAAAAAAAAAAAAAAAAAAAAAAAAAAAAAAAAAAAAAAAABQAAAAAAAAAwMD/AAAAAABkAAAAMgAAAAAAAABkAAAAAAAAAH9/fwAKAAAAIgAAABgAAAAAAAAAAAAAAAAAAAAAAAAAAAAAAAAAAAAkAAAAJAAAAAAAAAAHAAAAAAAAAAAAAAAAAAAAAAAAAAAAAAAAAAAAf39/ACUAAABYAAAAAAAAAAAAAAAAAAAAAAAAAAAAAAAAAAAAAAAAAAAAAAAAAAAAAAAAAAAAAAA/AAAAAAAAAKCGAQAAAAAAAAAAAAAAAAAMAAAAAQAAAAAAAAAAAAAAAAAAAB8AAABUAAAAAAAABQAAAAEAAAAAAAAAAAAAAAAAAAAAAAAAAAAAAAAAAAAAAAAAAAAAAAB/f38AAAAAA8zMzADAwP8Af39/AAAAAAAAAAAAAAAAAAAAAAAAAAAAIQAAABgAAAAUAAAAOAQAAAgHAAD4JQAABBoAABAAAAAmAAAACAAAAAEAAAAAAAAAMAAAABQAAAAAAAAAAAD//wAAAQAAAP//AAABAA=="/>
+                <pr:smNativeData xmlns:pr="smNativeData" xmlns="smNativeData" val="SMDATA_16_V2g2ahMAAAAlAAAAZAAAAC0AAAAAkAAAAEgAAACQAAAASAAAAAAAAAABAAAAAAAAAAEAAABQAAAAAAAAAAAA4D8AAAAAAADgPwAAAAAAAOA/AAAAAAAA4D8AAAAAAADgPwAAAAAAAOA/AAAAAAAA4D8AAAAAAADgPwAAAAAAAOA/AAAAAAAA4D8CAAAAjAAAAAAAAAAAAAAARHLEDP///wgAAAAAAAAAAAAAAAAAAAAAAAAAAAAAAAAAAAAAZAAAAAEAAABAAAAAAAAAAAAAAAAAAAAAAAAAAAAAAAAAAAAAAAAAAAAAAAAAAAAAAAAAAAAAAAAAAAAAAAAAAAAAAAAAAAAAAAAAAAAAAAAAAAAAAAAAAAAAAAAAAAAAFAAAADwAAAABAAAAAAAAAAAAAAAUAAAAAQAAACMAAAAjAAAAIwAAAB4AAAAAAAAAZAAAAGQAAAAAAAAAZAAAAGQAAAAVAAAAYAAAAAAAAAAAAAAADwAAACADAAAAAAAAAAAAAAEAAACgMgAAVgcAAKr4//8BAAAAf39/AAEAAABkAAAAAAAAABQAAABAHwAAAAAAACYAAAAAAAAAwOD//wAAAAAmAAAAZAAAABYAAABMAAAAAAAAAAAAAAAEAAAAAAAAAAEAAADn5uYKAAAAACgAAAAoAAAAZAAAAGQAAAAAAAAAzMzMAAAAAABQAAAAUAAAAGQAAABkAAAAAAAAABcAAAAUAAAAAAAAAAAAAAD/fwAA/38AAAAAAAAJAAAABAAAAFEAAAAeAAAAaAAAAAAAAAAAAAAAAAAAAAAAAAAAAAAAECcAABAnAAAAAAAAAAAAAAAAAAAAAAAAAAAAAAAAAAAAAAAAAAAAABQAAAAAAAAAwMD/AAAAAABkAAAAMgAAAAAAAABkAAAAAAAAAH9/fwAKAAAAIgAAABgAAAAAAAAAAAAAAAAAAAAAAAAAAAAAAAAAAAAkAAAAJAAAAAAAAAAHAAAAAAAAAAAAAAAAAAAAAAAAAAAAAAAAAAAAf39/ACUAAABYAAAAAAAAAAAAAAAAAAAAAAAAAAAAAAAAAAAAAAAAAAAAAAAAAAAAAAAAAAAAAAA/AAAAAAAAAKCGAQAAAAAAAAAAAAAAAAAMAAAAAQAAAAAAAAAAAAAAAAAAAB8AAABUAAAAAAAABQAAAAEAAAAAAAAAAAAAAAAAAAAAAAAAAAAAAAAAAAAAAAAAAAAAAAB/f38AAAAAA8zMzADAwP8Af39/AAAAAAAAAAAAAAAAAAAAAAAAAAAAIQAAABgAAAAUAAAAOAQAAAgHAAD4JQAABBoAABAAAAAmAAAACAAAAAEAAAAAAAAAMAAAABQAAAAAAAAAAAD//wAAAQAAAP//AAABAA=="/>
               </a:ext>
             </a:extLst>
           </p:cNvSpPr>
@@ -1753,7 +1753,7 @@
             <a:spLocks noGrp="1" noChangeArrowheads="1"/>
             <a:extLst>
               <a:ext uri="smNativeData">
-                <pr:smNativeData xmlns:pr="smNativeData" xmlns="smNativeData" val="SMDATA_16_kRU2ahMAAAAlAAAAZAAAAA0AAAAAkAAAAEgAAACQAAAASAAAAAAAAAAAAAAAAAAAAAEAAABQAAAAAAAAAAAA4D8AAAAAAADgPwAAAAAAAOA/AAAAAAAA4D8AAAAAAADgPwAAAAAAAOA/AAAAAAAA4D8AAAAAAADgPwAAAAAAAOA/AAAAAAAA4D8CAAAAjAAAAAAAAAAAAAAARHLEDP///wgAAAAAAAAAAAAAAAAAAAAAAAAAAAAAAAAAAAAAZAAAAAEAAABAAAAAAAAAAAAAAAAAAAAAAAAAAAAAAAAAAAAAAAAAAAAAAAAAAAAAAAAAAAAAAAAAAAAAAAAAAAAAAAAAAAAAAAAAAAAAAAAAAAAAAAAAAAAAAAAAAAAAFAAAADwAAAAAAAAAAAAAAAAAAAkUAAAAAQAAABQAAAAUAAAAFAAAAAEAAAAAAAAAZAAAAGQAAAAAAAAAZAAAAGQAAAAVAAAAYAAAAAAAAAAAAAAADwAAACADAAAAAAAAAAAAAAEAAACgMgAAVgcAAKr4//8BAAAAf39/AAEAAABkAAAAAAAAABQAAABAHwAAAAAAACYAAAAAAAAAwOD//wAAAAAmAAAAZAAAABYAAABMAAAAAAAAAAAAAAAEAAAAAAAAAAEAAADn5uYKAAAAACgAAAAoAAAAZAAAAGQAAAAAAAAAzMzMAAAAAABQAAAAUAAAAGQAAABkAAAAAAAAABcAAAAUAAAAAAAAAAAAAAD/fwAA/38AAAAAAAAJAAAABAAAAAAAAAAeAAAAaAAAAAAAAAAAAAAAAAAAAAAAAAAAAAAAECcAABAnAAAAAAAAAAAAAAAAAAAAAAAAAAAAAAAAAAAAAAAAAAAAABQAAAAAAAAAwMD/AAAAAABkAAAAMgAAAAAAAABkAAAAAAAAAH9/fwAKAAAAIgAAABgAAAAAAAAAAAAAAAAAAAAAAAAAAAAAAAAAAAAkAAAAJAAAAAAAAAAHAAAAAAAAAAAAAAAAAAAAAAAAAAAAAAAAAAAAf39/ACUAAABYAAAAAAAAAAAAAAAAAAAAAAAAAAAAAAAAAAAAAAAAAAAAAAAAAAAAAAAAAAAAAAA/AAAAAAAAAKCGAQAAAAAAAAAAAAAAAAAMAAAAAQAAAAAAAAAAAAAAAAAAAB8AAABUAAAAAAAABQAAAAEAAAAAAAAAAAAAAAAAAAAAAAAAAAAAAAAAAAAAAAAAAAAAAAJ/f38AAAAAA8zMzADAwP8Af39/AAAAAAAAAAAAAAAAAAAAAAAAAAAAIQAAABgAAAAUAAAAOAQAABIbAAD4JQAAODEAABAAAAAmAAAACAAAAAEAAAAAAAAAMAAAABQAAAAAAAAAAAD//wAAAQAAAP//AAABAA=="/>
+                <pr:smNativeData xmlns:pr="smNativeData" xmlns="smNativeData" val="SMDATA_16_V2g2ahMAAAAlAAAAZAAAAA0AAAAAkAAAAEgAAACQAAAASAAAAAAAAAAAAAAAAAAAAAEAAABQAAAAAAAAAAAA4D8AAAAAAADgPwAAAAAAAOA/AAAAAAAA4D8AAAAAAADgPwAAAAAAAOA/AAAAAAAA4D8AAAAAAADgPwAAAAAAAOA/AAAAAAAA4D8CAAAAjAAAAAAAAAAAAAAARHLEDP///wgAAAAAAAAAAAAAAAAAAAAAAAAAAAAAAAAAAAAAZAAAAAEAAABAAAAAAAAAAAAAAAAAAAAAAAAAAAAAAAAAAAAAAAAAAAAAAAAAAAAAAAAAAAAAAAAAAAAAAAAAAAAAAAAAAAAAAAAAAAAAAAAAAAAAAAAAAAAAAAAAAAAAFAAAADwAAAAAAAAAAAAAAAAAAAkUAAAAAQAAABQAAAAUAAAAFAAAAAEAAAAAAAAAZAAAAGQAAAAAAAAAZAAAAGQAAAAVAAAAYAAAAAAAAAAAAAAADwAAACADAAAAAAAAAAAAAAEAAACgMgAAVgcAAKr4//8BAAAAf39/AAEAAABkAAAAAAAAABQAAABAHwAAAAAAACYAAAAAAAAAwOD//wAAAAAmAAAAZAAAABYAAABMAAAAAAAAAAAAAAAEAAAAAAAAAAEAAADn5uYKAAAAACgAAAAoAAAAZAAAAGQAAAAAAAAAzMzMAAAAAABQAAAAUAAAAGQAAABkAAAAAAAAABcAAAAUAAAAAAAAAAAAAAD/fwAA/38AAAAAAAAJAAAABAAAAAAAAAAeAAAAaAAAAAAAAAAAAAAAAAAAAAAAAAAAAAAAECcAABAnAAAAAAAAAAAAAAAAAAAAAAAAAAAAAAAAAAAAAAAAAAAAABQAAAAAAAAAwMD/AAAAAABkAAAAMgAAAAAAAABkAAAAAAAAAH9/fwAKAAAAIgAAABgAAAAAAAAAAAAAAAAAAAAAAAAAAAAAAAAAAAAkAAAAJAAAAAAAAAAHAAAAAAAAAAAAAAAAAAAAAAAAAAAAAAAAAAAAf39/ACUAAABYAAAAAAAAAAAAAAAAAAAAAAAAAAAAAAAAAAAAAAAAAAAAAAAAAAAAAAAAAAAAAAA/AAAAAAAAAKCGAQAAAAAAAAAAAAAAAAAMAAAAAQAAAAAAAAAAAAAAAAAAAB8AAABUAAAAAAAABQAAAAEAAAAAAAAAAAAAAAAAAAAAAAAAAAAAAAAAAAAAAAAAAAAAAAJ/f38AAAAAA8zMzADAwP8Af39/AAAAAAAAAAAAAAAAAAAAAAAAAAAAIQAAABgAAAAUAAAAOAQAABIbAAD4JQAAODEAABAAAAAmAAAACAAAAAEAAAAAAAAAMAAAABQAAAAAAAAAAAD//wAAAQAAAP//AAABAA=="/>
               </a:ext>
             </a:extLst>
           </p:cNvSpPr>
@@ -1782,7 +1782,7 @@
             <a:spLocks noGrp="1" noChangeArrowheads="1"/>
             <a:extLst>
               <a:ext uri="smNativeData">
-                <pr:smNativeData xmlns:pr="smNativeData" xmlns="smNativeData" val="SMDATA_16_kRU2ahMAAAAlAAAAZAAAAA0AAAAAkAAAAEgAAACQAAAASAAAAAAAAAACAAAAAAAAAAEAAABQAAAAAAAAAAAA4D8AAAAAAADgPwAAAAAAAOA/AAAAAAAA4D8AAAAAAADgPwAAAAAAAOA/AAAAAAAA4D8AAAAAAADgPwAAAAAAAOA/AAAAAAAA4D8CAAAAjAAAAAAAAAAAAAAARHLEDP///wgAAAAAAAAAAAAAAAAAAAAAAAAAAAAAAAAAAAAAZAAAAAEAAABAAAAAAAAAAAAAAAAAAAAAAAAAAAAAAAAAAAAAAAAAAAAAAAAAAAAAAAAAAAAAAAAAAAAAAAAAAAAAAAAAAAAAAAAAAAAAAAAAAAAAAAAAAAAAAAAAAAAAFAAAADwAAAAAAAAAAAAAAAAAAAkUAAAAAQAAABQAAAAUAAAAFAAAAAEAAAAAAAAAZAAAAGQAAAAAAAAAZAAAAGQAAAAVAAAAYAAAAAAAAAAAAAAADwAAACADAAAAAAAAAAAAAAEAAACgMgAAVgcAAKr4//8BAAAAf39/AAEAAABkAAAAAAAAABQAAABAHwAAAAAAACYAAAAAAAAAwOD//wAAAAAmAAAAZAAAABYAAABMAAAAAAAAAAAAAAAEAAAAAAAAAAEAAADn5uYKAAAAACgAAAAoAAAAZAAAAGQAAAAAAAAAzMzMAAAAAABQAAAAUAAAAGQAAABkAAAAAAAAABcAAAAUAAAAAAAAAAAAAAD/fwAA/38AAAAAAAAJAAAABAAAAAAAAAAeAAAAaAAAAAAAAAAAAAAAAAAAAAAAAAAAAAAAECcAABAnAAAAAAAAAAAAAAAAAAAAAAAAAAAAAAAAAAAAAAAAAAAAABQAAAAAAAAAwMD/AAAAAABkAAAAMgAAAAAAAABkAAAAAAAAAH9/fwAKAAAAIgAAABgAAAAAAAAAAAAAAAAAAAAAAAAAAAAAAAAAAAAkAAAAJAAAAAAAAAAHAAAAAAAAAAAAAAAAAAAAAAAAAAAAAAAAAAAAf39/ACUAAABYAAAAAAAAAAAAAAAAAAAAAAAAAAAAAAAAAAAAAAAAAAAAAAAAAAAAAAAAAAAAAAA/AAAAAAAAAKCGAQAAAAAAAAAAAAAAAAAMAAAAAQAAAAAAAAAAAAAAAAAAAB8AAABUAAAAAAAABQAAAAEAAAAAAAAAAAAAAAAAAAAAAAAAAAAAAAAAAAAAAAAAAAAAAAJ/f38AAAAAA8zMzADAwP8Af39/AAAAAAAAAAAAAAAAAAAAAAAAAAAAIQAAABgAAAAUAAAA5hcAAG41AAAuKgAAQDgAABAAAAAmAAAACAAAAAEAAAAAAAAAMAAAABQAAAAAAAAAAAD//wAAAQAAAP//AAABAA=="/>
+                <pr:smNativeData xmlns:pr="smNativeData" xmlns="smNativeData" val="SMDATA_16_V2g2ahMAAAAlAAAAZAAAAA0AAAAAkAAAAEgAAACQAAAASAAAAAAAAAACAAAAAAAAAAEAAABQAAAAAAAAAAAA4D8AAAAAAADgPwAAAAAAAOA/AAAAAAAA4D8AAAAAAADgPwAAAAAAAOA/AAAAAAAA4D8AAAAAAADgPwAAAAAAAOA/AAAAAAAA4D8CAAAAjAAAAAAAAAAAAAAARHLEDP///wgAAAAAAAAAAAAAAAAAAAAAAAAAAAAAAAAAAAAAZAAAAAEAAABAAAAAAAAAAAAAAAAAAAAAAAAAAAAAAAAAAAAAAAAAAAAAAAAAAAAAAAAAAAAAAAAAAAAAAAAAAAAAAAAAAAAAAAAAAAAAAAAAAAAAAAAAAAAAAAAAAAAAFAAAADwAAAAAAAAAAAAAAAAAAAkUAAAAAQAAABQAAAAUAAAAFAAAAAEAAAAAAAAAZAAAAGQAAAAAAAAAZAAAAGQAAAAVAAAAYAAAAAAAAAAAAAAADwAAACADAAAAAAAAAAAAAAEAAACgMgAAVgcAAKr4//8BAAAAf39/AAEAAABkAAAAAAAAABQAAABAHwAAAAAAACYAAAAAAAAAwOD//wAAAAAmAAAAZAAAABYAAABMAAAAAAAAAAAAAAAEAAAAAAAAAAEAAADn5uYKAAAAACgAAAAoAAAAZAAAAGQAAAAAAAAAzMzMAAAAAABQAAAAUAAAAGQAAABkAAAAAAAAABcAAAAUAAAAAAAAAAAAAAD/fwAA/38AAAAAAAAJAAAABAAAAAAAAAAeAAAAaAAAAAAAAAAAAAAAAAAAAAAAAAAAAAAAECcAABAnAAAAAAAAAAAAAAAAAAAAAAAAAAAAAAAAAAAAAAAAAAAAABQAAAAAAAAAwMD/AAAAAABkAAAAMgAAAAAAAABkAAAAAAAAAH9/fwAKAAAAIgAAABgAAAAAAAAAAAAAAAAAAAAAAAAAAAAAAAAAAAAkAAAAJAAAAAAAAAAHAAAAAAAAAAAAAAAAAAAAAAAAAAAAAAAAAAAAf39/ACUAAABYAAAAAAAAAAAAAAAAAAAAAAAAAAAAAAAAAAAAAAAAAAAAAAAAAAAAAAAAAAAAAAA/AAAAAAAAAKCGAQAAAAAAAAAAAAAAAAAMAAAAAQAAAAAAAAAAAAAAAAAAAB8AAABUAAAAAAAABQAAAAEAAAAAAAAAAAAAAAAAAAAAAAAAAAAAAAAAAAAAAAAAAAAAAAJ/f38AAAAAA8zMzADAwP8Af39/AAAAAAAAAAAAAAAAAAAAAAAAAAAAIQAAABgAAAAUAAAA5hcAAG41AAAuKgAAQDgAABAAAAAmAAAACAAAAAEAAAAAAAAAMAAAABQAAAAAAAAAAAD//wAAAQAAAP//AAABAA=="/>
               </a:ext>
             </a:extLst>
           </p:cNvSpPr>
@@ -1801,7 +1801,7 @@
           <a:lstStyle/>
           <a:p>
             <a:pPr/>
-            <a:fld id="{7AA49712-5C97-F161-D91C-AA34D9522FFF}" type="slidenum">
+            <a:fld id="{75AAEF25-6B98-FF19-D612-9D4CA15C20C8}" type="slidenum">
               <a:rPr lang="en-us" cap="none"/>
               <a:t>4</a:t>
             </a:fld>
@@ -1849,7 +1849,7 @@
             <a:spLocks noGrp="1" noChangeArrowheads="1"/>
             <a:extLst>
               <a:ext uri="smNativeData">
-                <pr:smNativeData xmlns:pr="smNativeData" xmlns="smNativeData" val="SMDATA_16_kRU2ahMAAAAlAAAAZAAAAC0AAAAAkAAAAEgAAACQAAAASAAAAAAAAAABAAAAAAAAAAEAAABQAAAAAAAAAAAA4D8AAAAAAADgPwAAAAAAAOA/AAAAAAAA4D8AAAAAAADgPwAAAAAAAOA/AAAAAAAA4D8AAAAAAADgPwAAAAAAAOA/AAAAAAAA4D8CAAAAjAAAAAAAAAAAAAAARHLEDP///wgAAAAAAAAAAAAAAAAAAAAAAAAAAAAAAAAAAAAAZAAAAAEAAABAAAAAAAAAAAAAAAAAAAAAAAAAAAAAAAAAAAAAAAAAAAAAAAAAAAAAAAAAAAAAAAAAAAAAAAAAAAAAAAAAAAAAAAAAAAAAAAAAAAAAAAAAAAAAAAAAAAAAFAAAADwAAAABAAAAAAAAAAAAAAAUAAAAAQAAACMAAAAjAAAAIwAAAB4AAAAAAAAAZAAAAGQAAAAAAAAAZAAAAGQAAAAVAAAAYAAAAAAAAAAAAAAADwAAACADAAAAAAAAAAAAAAEAAACgMgAAVgcAAKr4//8BAAAAf39/AAEAAABkAAAAAAAAABQAAABAHwAAAAAAACYAAAAAAAAAwOD//wAAAAAmAAAAZAAAABYAAABMAAAAAAAAAAAAAAAEAAAAAAAAAAEAAADn5uYKAAAAACgAAAAoAAAAZAAAAGQAAAAAAAAAzMzMAAAAAABQAAAAUAAAAGQAAABkAAAAAAAAABcAAAAUAAAAAAAAAAAAAAD/fwAA/38AAAAAAAAJAAAABAAAAAAAAAAeAAAAaAAAAAAAAAAAAAAAAAAAAAAAAAAAAAAAECcAABAnAAAAAAAAAAAAAAAAAAAAAAAAAAAAAAAAAAAAAAAAAAAAABQAAAAAAAAAwMD/AAAAAABkAAAAMgAAAAAAAABkAAAAAAAAAH9/fwAKAAAAIgAAABgAAAAAAAAAAAAAAAAAAAAAAAAAAAAAAAAAAAAkAAAAJAAAAAAAAAAHAAAAAAAAAAAAAAAAAAAAAAAAAAAAAAAAAAAAf39/ACUAAABYAAAAAAAAAAAAAAAAAAAAAAAAAAAAAAAAAAAAAAAAAAAAAAAAAAAAAAAAAAAAAAA/AAAAAAAAAKCGAQAAAAAAAAAAAAAAAAAMAAAAAQAAAAAAAAAAAAAAAAAAAB8AAABUAAAAAAAABQAAAAEAAAAAAAAAAAAAAAAAAAAAAAAAAAAAAAAAAAAAAAAAAAAAAAB/f38AAAAAA8zMzADAwP8Af39/AAAAAAAAAAAAAAAAAAAAAAAAAAAAIQAAABgAAAAUAAAAOAQAAAgHAAD4JQAABBoAABAAAAAmAAAACAAAAAEAAAAAAAAAMAAAABQAAAAAAAAAAAD//wAAAQAAAP//AAABAA=="/>
+                <pr:smNativeData xmlns:pr="smNativeData" xmlns="smNativeData" val="SMDATA_16_V2g2ahMAAAAlAAAAZAAAAC0AAAAAkAAAAEgAAACQAAAASAAAAAAAAAABAAAAAAAAAAEAAABQAAAAAAAAAAAA4D8AAAAAAADgPwAAAAAAAOA/AAAAAAAA4D8AAAAAAADgPwAAAAAAAOA/AAAAAAAA4D8AAAAAAADgPwAAAAAAAOA/AAAAAAAA4D8CAAAAjAAAAAAAAAAAAAAARHLEDP///wgAAAAAAAAAAAAAAAAAAAAAAAAAAAAAAAAAAAAAZAAAAAEAAABAAAAAAAAAAAAAAAAAAAAAAAAAAAAAAAAAAAAAAAAAAAAAAAAAAAAAAAAAAAAAAAAAAAAAAAAAAAAAAAAAAAAAAAAAAAAAAAAAAAAAAAAAAAAAAAAAAAAAFAAAADwAAAABAAAAAAAAAAAAAAAUAAAAAQAAACMAAAAjAAAAIwAAAB4AAAAAAAAAZAAAAGQAAAAAAAAAZAAAAGQAAAAVAAAAYAAAAAAAAAAAAAAADwAAACADAAAAAAAAAAAAAAEAAACgMgAAVgcAAKr4//8BAAAAf39/AAEAAABkAAAAAAAAABQAAABAHwAAAAAAACYAAAAAAAAAwOD//wAAAAAmAAAAZAAAABYAAABMAAAAAAAAAAAAAAAEAAAAAAAAAAEAAADn5uYKAAAAACgAAAAoAAAAZAAAAGQAAAAAAAAAzMzMAAAAAABQAAAAUAAAAGQAAABkAAAAAAAAABcAAAAUAAAAAAAAAAAAAAD/fwAA/38AAAAAAAAJAAAABAAAAAAAAAAeAAAAaAAAAAAAAAAAAAAAAAAAAAAAAAAAAAAAECcAABAnAAAAAAAAAAAAAAAAAAAAAAAAAAAAAAAAAAAAAAAAAAAAABQAAAAAAAAAwMD/AAAAAABkAAAAMgAAAAAAAABkAAAAAAAAAH9/fwAKAAAAIgAAABgAAAAAAAAAAAAAAAAAAAAAAAAAAAAAAAAAAAAkAAAAJAAAAAAAAAAHAAAAAAAAAAAAAAAAAAAAAAAAAAAAAAAAAAAAf39/ACUAAABYAAAAAAAAAAAAAAAAAAAAAAAAAAAAAAAAAAAAAAAAAAAAAAAAAAAAAAAAAAAAAAA/AAAAAAAAAKCGAQAAAAAAAAAAAAAAAAAMAAAAAQAAAAAAAAAAAAAAAAAAAB8AAABUAAAAAAAABQAAAAEAAAAAAAAAAAAAAAAAAAAAAAAAAAAAAAAAAAAAAAAAAAAAAAB/f38AAAAAA8zMzADAwP8Af39/AAAAAAAAAAAAAAAAAAAAAAAAAAAAIQAAABgAAAAUAAAAOAQAAAgHAAD4JQAABBoAABAAAAAmAAAACAAAAAEAAAAAAAAAMAAAABQAAAAAAAAAAAD//wAAAQAAAP//AAABAA=="/>
               </a:ext>
             </a:extLst>
           </p:cNvSpPr>
@@ -1871,7 +1871,7 @@
             <a:spLocks noGrp="1" noChangeArrowheads="1"/>
             <a:extLst>
               <a:ext uri="smNativeData">
-                <pr:smNativeData xmlns:pr="smNativeData" xmlns="smNativeData" val="SMDATA_16_kRU2ahMAAAAlAAAAZAAAAA0AAAAAkAAAAEgAAACQAAAASAAAAAAAAAAAAAAAAAAAAAEAAABQAAAAAAAAAAAA4D8AAAAAAADgPwAAAAAAAOA/AAAAAAAA4D8AAAAAAADgPwAAAAAAAOA/AAAAAAAA4D8AAAAAAADgPwAAAAAAAOA/AAAAAAAA4D8CAAAAjAAAAAAAAAAAAAAARHLEDP///wgAAAAAAAAAAAAAAAAAAAAAAAAAAAAAAAAAAAAAZAAAAAEAAABAAAAAAAAAAAAAAAAAAAAAAAAAAAAAAAAAAAAAAAAAAAAAAAAAAAAAAAAAAAAAAAAAAAAAAAAAAAAAAAAAAAAAAAAAAAAAAAAAAAAAAAAAAAAAAAAAAAAAFAAAADwAAAAAAAAAAAAAAAAAAAkUAAAAAQAAABQAAAAUAAAAFAAAAAEAAAAAAAAAZAAAAGQAAAAAAAAAZAAAAGQAAAAVAAAAYAAAAAAAAAAAAAAADwAAACADAAAAAAAAAAAAAAEAAACgMgAAVgcAAKr4//8BAAAAf39/AAEAAABkAAAAAAAAABQAAABAHwAAAAAAACYAAAAAAAAAwOD//wAAAAAmAAAAZAAAABYAAABMAAAAAAAAAAAAAAAEAAAAAAAAAAEAAADn5uYKAAAAACgAAAAoAAAAZAAAAGQAAAAAAAAAzMzMAAAAAABQAAAAUAAAAGQAAABkAAAAAAAAABcAAAAUAAAAAAAAAAAAAAD/fwAA/38AAAAAAAAJAAAABAAAAAAAAAAeAAAAaAAAAAAAAAAAAAAAAAAAAAAAAAAAAAAAECcAABAnAAAAAAAAAAAAAAAAAAAAAAAAAAAAAAAAAAAAAAAAAAAAABQAAAAAAAAAwMD/AAAAAABkAAAAMgAAAAAAAABkAAAAAAAAAH9/fwAKAAAAIgAAABgAAAAAAAAAAAAAAAAAAAAAAAAAAAAAAAAAAAAkAAAAJAAAAAAAAAAHAAAAAAAAAAAAAAAAAAAAAAAAAAAAAAAAAAAAf39/ACUAAABYAAAAAAAAAAAAAAAAAAAAAAAAAAAAAAAAAAAAAAAAAAAAAAAAAAAAAAAAAAAAAAA/AAAAAAAAAKCGAQAAAAAAAAAAAAAAAAAMAAAAAQAAAAAAAAAAAAAAAAAAAB8AAABUAAAAAAAABQAAAAEAAAAAAAAAAAAAAAAAAAAAAAAAAAAAAAAAAAAAAAAAAAAAAAJ/f38AAAAAA8zMzADAwP8Af39/AAAAAAAAAAAAAAAAAAAAAAAAAAAAIQAAABgAAAAUAAAAOAQAABIbAAD4JQAAODEAABAAAAAmAAAACAAAAAEAAAAAAAAAMAAAABQAAAAAAAAAAAD//wAAAQAAAP//AAABAA=="/>
+                <pr:smNativeData xmlns:pr="smNativeData" xmlns="smNativeData" val="SMDATA_16_V2g2ahMAAAAlAAAAZAAAAA0AAAAAkAAAAEgAAACQAAAASAAAAAAAAAAAAAAAAAAAAAEAAABQAAAAAAAAAAAA4D8AAAAAAADgPwAAAAAAAOA/AAAAAAAA4D8AAAAAAADgPwAAAAAAAOA/AAAAAAAA4D8AAAAAAADgPwAAAAAAAOA/AAAAAAAA4D8CAAAAjAAAAAAAAAAAAAAARHLEDP///wgAAAAAAAAAAAAAAAAAAAAAAAAAAAAAAAAAAAAAZAAAAAEAAABAAAAAAAAAAAAAAAAAAAAAAAAAAAAAAAAAAAAAAAAAAAAAAAAAAAAAAAAAAAAAAAAAAAAAAAAAAAAAAAAAAAAAAAAAAAAAAAAAAAAAAAAAAAAAAAAAAAAAFAAAADwAAAAAAAAAAAAAAAAAAAkUAAAAAQAAABQAAAAUAAAAFAAAAAEAAAAAAAAAZAAAAGQAAAAAAAAAZAAAAGQAAAAVAAAAYAAAAAAAAAAAAAAADwAAACADAAAAAAAAAAAAAAEAAACgMgAAVgcAAKr4//8BAAAAf39/AAEAAABkAAAAAAAAABQAAABAHwAAAAAAACYAAAAAAAAAwOD//wAAAAAmAAAAZAAAABYAAABMAAAAAAAAAAAAAAAEAAAAAAAAAAEAAADn5uYKAAAAACgAAAAoAAAAZAAAAGQAAAAAAAAAzMzMAAAAAABQAAAAUAAAAGQAAABkAAAAAAAAABcAAAAUAAAAAAAAAAAAAAD/fwAA/38AAAAAAAAJAAAABAAAAAAAAAAeAAAAaAAAAAAAAAAAAAAAAAAAAAAAAAAAAAAAECcAABAnAAAAAAAAAAAAAAAAAAAAAAAAAAAAAAAAAAAAAAAAAAAAABQAAAAAAAAAwMD/AAAAAABkAAAAMgAAAAAAAABkAAAAAAAAAH9/fwAKAAAAIgAAABgAAAAAAAAAAAAAAAAAAAAAAAAAAAAAAAAAAAAkAAAAJAAAAAAAAAAHAAAAAAAAAAAAAAAAAAAAAAAAAAAAAAAAAAAAf39/ACUAAABYAAAAAAAAAAAAAAAAAAAAAAAAAAAAAAAAAAAAAAAAAAAAAAAAAAAAAAAAAAAAAAA/AAAAAAAAAKCGAQAAAAAAAAAAAAAAAAAMAAAAAQAAAAAAAAAAAAAAAAAAAB8AAABUAAAAAAAABQAAAAEAAAAAAAAAAAAAAAAAAAAAAAAAAAAAAAAAAAAAAAAAAAAAAAJ/f38AAAAAA8zMzADAwP8Af39/AAAAAAAAAAAAAAAAAAAAAAAAAAAAIQAAABgAAAAUAAAAOAQAABIbAAD4JQAAODEAABAAAAAmAAAACAAAAAEAAAAAAAAAMAAAABQAAAAAAAAAAAD//wAAAQAAAP//AAABAA=="/>
               </a:ext>
             </a:extLst>
           </p:cNvSpPr>
@@ -1900,7 +1900,7 @@
             <a:spLocks noGrp="1" noChangeArrowheads="1"/>
             <a:extLst>
               <a:ext uri="smNativeData">
-                <pr:smNativeData xmlns:pr="smNativeData" xmlns="smNativeData" val="SMDATA_16_kRU2ahMAAAAlAAAAZAAAAA0AAAAAkAAAAEgAAACQAAAASAAAAAAAAAACAAAAAAAAAAEAAABQAAAAAAAAAAAA4D8AAAAAAADgPwAAAAAAAOA/AAAAAAAA4D8AAAAAAADgPwAAAAAAAOA/AAAAAAAA4D8AAAAAAADgPwAAAAAAAOA/AAAAAAAA4D8CAAAAjAAAAAAAAAAAAAAARHLEDP///wgAAAAAAAAAAAAAAAAAAAAAAAAAAAAAAAAAAAAAZAAAAAEAAABAAAAAAAAAAAAAAAAAAAAAAAAAAAAAAAAAAAAAAAAAAAAAAAAAAAAAAAAAAAAAAAAAAAAAAAAAAAAAAAAAAAAAAAAAAAAAAAAAAAAAAAAAAAAAAAAAAAAAFAAAADwAAAAAAAAAAAAAAAAAAAkUAAAAAQAAABQAAAAUAAAAFAAAAAEAAAAAAAAAZAAAAGQAAAAAAAAAZAAAAGQAAAAVAAAAYAAAAAAAAAAAAAAADwAAACADAAAAAAAAAAAAAAEAAACgMgAAVgcAAKr4//8BAAAAf39/AAEAAABkAAAAAAAAABQAAABAHwAAAAAAACYAAAAAAAAAwOD//wAAAAAmAAAAZAAAABYAAABMAAAAAAAAAAAAAAAEAAAAAAAAAAEAAADn5uYKAAAAACgAAAAoAAAAZAAAAGQAAAAAAAAAzMzMAAAAAABQAAAAUAAAAGQAAABkAAAAAAAAABcAAAAUAAAAAAAAAAAAAAD/fwAA/38AAAAAAAAJAAAABAAAAAAAAAAeAAAAaAAAAAAAAAAAAAAAAAAAAAAAAAAAAAAAECcAABAnAAAAAAAAAAAAAAAAAAAAAAAAAAAAAAAAAAAAAAAAAAAAABQAAAAAAAAAwMD/AAAAAABkAAAAMgAAAAAAAABkAAAAAAAAAH9/fwAKAAAAIgAAABgAAAAAAAAAAAAAAAAAAAAAAAAAAAAAAAAAAAAkAAAAJAAAAAAAAAAHAAAAAAAAAAAAAAAAAAAAAAAAAAAAAAAAAAAAf39/ACUAAABYAAAAAAAAAAAAAAAAAAAAAAAAAAAAAAAAAAAAAAAAAAAAAAAAAAAAAAAAAAAAAAA/AAAAAAAAAKCGAQAAAAAAAAAAAAAAAAAMAAAAAQAAAAAAAAAAAAAAAAAAAB8AAABUAAAAAAAABQAAAAEAAAAAAAAAAAAAAAAAAAAAAAAAAAAAAAAAAAAAAAAAAAAAAAJ/f38AAAAAA8zMzADAwP8Af39/AAAAAAAAAAAAAAAAAAAAAAAAAAAAIQAAABgAAAAUAAAA5hcAAG41AAAuKgAAQDgAABAAAAAmAAAACAAAAAEAAAAAAAAAMAAAABQAAAAAAAAAAAD//wAAAQAAAP//AAABAA=="/>
+                <pr:smNativeData xmlns:pr="smNativeData" xmlns="smNativeData" val="SMDATA_16_V2g2ahMAAAAlAAAAZAAAAA0AAAAAkAAAAEgAAACQAAAASAAAAAAAAAACAAAAAAAAAAEAAABQAAAAAAAAAAAA4D8AAAAAAADgPwAAAAAAAOA/AAAAAAAA4D8AAAAAAADgPwAAAAAAAOA/AAAAAAAA4D8AAAAAAADgPwAAAAAAAOA/AAAAAAAA4D8CAAAAjAAAAAAAAAAAAAAARHLEDP///wgAAAAAAAAAAAAAAAAAAAAAAAAAAAAAAAAAAAAAZAAAAAEAAABAAAAAAAAAAAAAAAAAAAAAAAAAAAAAAAAAAAAAAAAAAAAAAAAAAAAAAAAAAAAAAAAAAAAAAAAAAAAAAAAAAAAAAAAAAAAAAAAAAAAAAAAAAAAAAAAAAAAAFAAAADwAAAAAAAAAAAAAAAAAAAkUAAAAAQAAABQAAAAUAAAAFAAAAAEAAAAAAAAAZAAAAGQAAAAAAAAAZAAAAGQAAAAVAAAAYAAAAAAAAAAAAAAADwAAACADAAAAAAAAAAAAAAEAAACgMgAAVgcAAKr4//8BAAAAf39/AAEAAABkAAAAAAAAABQAAABAHwAAAAAAACYAAAAAAAAAwOD//wAAAAAmAAAAZAAAABYAAABMAAAAAAAAAAAAAAAEAAAAAAAAAAEAAADn5uYKAAAAACgAAAAoAAAAZAAAAGQAAAAAAAAAzMzMAAAAAABQAAAAUAAAAGQAAABkAAAAAAAAABcAAAAUAAAAAAAAAAAAAAD/fwAA/38AAAAAAAAJAAAABAAAAAAAAAAeAAAAaAAAAAAAAAAAAAAAAAAAAAAAAAAAAAAAECcAABAnAAAAAAAAAAAAAAAAAAAAAAAAAAAAAAAAAAAAAAAAAAAAABQAAAAAAAAAwMD/AAAAAABkAAAAMgAAAAAAAABkAAAAAAAAAH9/fwAKAAAAIgAAABgAAAAAAAAAAAAAAAAAAAAAAAAAAAAAAAAAAAAkAAAAJAAAAAAAAAAHAAAAAAAAAAAAAAAAAAAAAAAAAAAAAAAAAAAAf39/ACUAAABYAAAAAAAAAAAAAAAAAAAAAAAAAAAAAAAAAAAAAAAAAAAAAAAAAAAAAAAAAAAAAAA/AAAAAAAAAKCGAQAAAAAAAAAAAAAAAAAMAAAAAQAAAAAAAAAAAAAAAAAAAB8AAABUAAAAAAAABQAAAAEAAAAAAAAAAAAAAAAAAAAAAAAAAAAAAAAAAAAAAAAAAAAAAAJ/f38AAAAAA8zMzADAwP8Af39/AAAAAAAAAAAAAAAAAAAAAAAAAAAAIQAAABgAAAAUAAAA5hcAAG41AAAuKgAAQDgAABAAAAAmAAAACAAAAAEAAAAAAAAAMAAAABQAAAAAAAAAAAD//wAAAQAAAP//AAABAA=="/>
               </a:ext>
             </a:extLst>
           </p:cNvSpPr>
@@ -1919,7 +1919,7 @@
           <a:lstStyle/>
           <a:p>
             <a:pPr/>
-            <a:fld id="{48D102F5-BBA5-84F4-EB69-4DA14C271D18}" type="slidenum">
+            <a:fld id="{7D8C3056-1890-D9C6-DE34-EE937E7A28BB}" type="slidenum">
               <a:rPr lang="en-us" cap="none"/>
               <a:t>5</a:t>
             </a:fld>
@@ -1967,7 +1967,7 @@
             <a:spLocks noGrp="1" noChangeArrowheads="1"/>
             <a:extLst>
               <a:ext uri="smNativeData">
-                <pr:smNativeData xmlns:pr="smNativeData" xmlns="smNativeData" val="SMDATA_16_kRU2ahMAAAAlAAAAZAAAAC0AAAAAkAAAAEgAAACQAAAASAAAAAAAAAABAAAAAAAAAAEAAABQAAAAAAAAAAAA4D8AAAAAAADgPwAAAAAAAOA/AAAAAAAA4D8AAAAAAADgPwAAAAAAAOA/AAAAAAAA4D8AAAAAAADgPwAAAAAAAOA/AAAAAAAA4D8CAAAAjAAAAAAAAAAAAAAARHLEDP///wgAAAAAAAAAAAAAAAAAAAAAAAAAAAAAAAAAAAAAZAAAAAEAAABAAAAAAAAAAAAAAAAAAAAAAAAAAAAAAAAAAAAAAAAAAAAAAAAAAAAAAAAAAAAAAAAAAAAAAAAAAAAAAAAAAAAAAAAAAAAAAAAAAAAAAAAAAAAAAAAAAAAAFAAAADwAAAABAAAAAAAAAAAAAAAUAAAAAQAAACMAAAAjAAAAIwAAAB4AAAAAAAAAZAAAAGQAAAAAAAAAZAAAAGQAAAAVAAAAYAAAAAAAAAAAAAAADwAAACADAAAAAAAAAAAAAAEAAACgMgAAVgcAAKr4//8BAAAAf39/AAEAAABkAAAAAAAAABQAAABAHwAAAAAAACYAAAAAAAAAwOD//wAAAAAmAAAAZAAAABYAAABMAAAAAAAAAAAAAAAEAAAAAAAAAAEAAADn5uYKAAAAACgAAAAoAAAAZAAAAGQAAAAAAAAAzMzMAAAAAABQAAAAUAAAAGQAAABkAAAAAAAAABcAAAAUAAAAAAAAAAAAAAD/fwAA/38AAAAAAAAJAAAABAAAAAAAAAAeAAAAaAAAAAAAAAAAAAAAAAAAAAAAAAAAAAAAECcAABAnAAAAAAAAAAAAAAAAAAAAAAAAAAAAAAAAAAAAAAAAAAAAABQAAAAAAAAAwMD/AAAAAABkAAAAMgAAAAAAAABkAAAAAAAAAH9/fwAKAAAAIgAAABgAAAAAAAAAAAAAAAAAAAAAAAAAAAAAAAAAAAAkAAAAJAAAAAAAAAAHAAAAAAAAAAAAAAAAAAAAAAAAAAAAAAAAAAAAf39/ACUAAABYAAAAAAAAAAAAAAAAAAAAAAAAAAAAAAAAAAAAAAAAAAAAAAAAAAAAAAAAAAAAAAA/AAAAAAAAAKCGAQAAAAAAAAAAAAAAAAAMAAAAAQAAAAAAAAAAAAAAAAAAAB8AAABUAAAAAAAABQAAAAEAAAAAAAAAAAAAAAAAAAAAAAAAAAAAAAAAAAAAAAAAAAAAAAB/f38AAAAAA8zMzADAwP8Af39/AAAAAAAAAAAAAAAAAAAAAAAAAAAAIQAAABgAAAAUAAAAOAQAAAgHAAD4JQAABBoAABAAAAAmAAAACAAAAAEAAAAAAAAAMAAAABQAAAAAAAAAAAD//wAAAQAAAP//AAABAA=="/>
+                <pr:smNativeData xmlns:pr="smNativeData" xmlns="smNativeData" val="SMDATA_16_V2g2ahMAAAAlAAAAZAAAAC0AAAAAkAAAAEgAAACQAAAASAAAAAAAAAABAAAAAAAAAAEAAABQAAAAAAAAAAAA4D8AAAAAAADgPwAAAAAAAOA/AAAAAAAA4D8AAAAAAADgPwAAAAAAAOA/AAAAAAAA4D8AAAAAAADgPwAAAAAAAOA/AAAAAAAA4D8CAAAAjAAAAAAAAAAAAAAARHLEDP///wgAAAAAAAAAAAAAAAAAAAAAAAAAAAAAAAAAAAAAZAAAAAEAAABAAAAAAAAAAAAAAAAAAAAAAAAAAAAAAAAAAAAAAAAAAAAAAAAAAAAAAAAAAAAAAAAAAAAAAAAAAAAAAAAAAAAAAAAAAAAAAAAAAAAAAAAAAAAAAAAAAAAAFAAAADwAAAABAAAAAAAAAAAAAAAUAAAAAQAAACMAAAAjAAAAIwAAAB4AAAAAAAAAZAAAAGQAAAAAAAAAZAAAAGQAAAAVAAAAYAAAAAAAAAAAAAAADwAAACADAAAAAAAAAAAAAAEAAACgMgAAVgcAAKr4//8BAAAAf39/AAEAAABkAAAAAAAAABQAAABAHwAAAAAAACYAAAAAAAAAwOD//wAAAAAmAAAAZAAAABYAAABMAAAAAAAAAAAAAAAEAAAAAAAAAAEAAADn5uYKAAAAACgAAAAoAAAAZAAAAGQAAAAAAAAAzMzMAAAAAABQAAAAUAAAAGQAAABkAAAAAAAAABcAAAAUAAAAAAAAAAAAAAD/fwAA/38AAAAAAAAJAAAABAAAAAAAAAAeAAAAaAAAAAAAAAAAAAAAAAAAAAAAAAAAAAAAECcAABAnAAAAAAAAAAAAAAAAAAAAAAAAAAAAAAAAAAAAAAAAAAAAABQAAAAAAAAAwMD/AAAAAABkAAAAMgAAAAAAAABkAAAAAAAAAH9/fwAKAAAAIgAAABgAAAAAAAAAAAAAAAAAAAAAAAAAAAAAAAAAAAAkAAAAJAAAAAAAAAAHAAAAAAAAAAAAAAAAAAAAAAAAAAAAAAAAAAAAf39/ACUAAABYAAAAAAAAAAAAAAAAAAAAAAAAAAAAAAAAAAAAAAAAAAAAAAAAAAAAAAAAAAAAAAA/AAAAAAAAAKCGAQAAAAAAAAAAAAAAAAAMAAAAAQAAAAAAAAAAAAAAAAAAAB8AAABUAAAAAAAABQAAAAEAAAAAAAAAAAAAAAAAAAAAAAAAAAAAAAAAAAAAAAAAAAAAAAB/f38AAAAAA8zMzADAwP8Af39/AAAAAAAAAAAAAAAAAAAAAAAAAAAAIQAAABgAAAAUAAAAOAQAAAgHAAD4JQAABBoAABAAAAAmAAAACAAAAAEAAAAAAAAAMAAAABQAAAAAAAAAAAD//wAAAQAAAP//AAABAA=="/>
               </a:ext>
             </a:extLst>
           </p:cNvSpPr>
@@ -1989,7 +1989,7 @@
             <a:spLocks noGrp="1" noChangeArrowheads="1"/>
             <a:extLst>
               <a:ext uri="smNativeData">
-                <pr:smNativeData xmlns:pr="smNativeData" xmlns="smNativeData" val="SMDATA_16_kRU2ahMAAAAlAAAAZAAAAA0AAAAAkAAAAEgAAACQAAAASAAAAAAAAAAAAAAAAAAAAAEAAABQAAAAAAAAAAAA4D8AAAAAAADgPwAAAAAAAOA/AAAAAAAA4D8AAAAAAADgPwAAAAAAAOA/AAAAAAAA4D8AAAAAAADgPwAAAAAAAOA/AAAAAAAA4D8CAAAAjAAAAAAAAAAAAAAARHLEDP///wgAAAAAAAAAAAAAAAAAAAAAAAAAAAAAAAAAAAAAZAAAAAEAAABAAAAAAAAAAAAAAAAAAAAAAAAAAAAAAAAAAAAAAAAAAAAAAAAAAAAAAAAAAAAAAAAAAAAAAAAAAAAAAAAAAAAAAAAAAAAAAAAAAAAAAAAAAAAAAAAAAAAAFAAAADwAAAAAAAAAAAAAAAAAAAkUAAAAAQAAABQAAAAUAAAAFAAAAAEAAAAAAAAAZAAAAGQAAAAAAAAAZAAAAGQAAAAVAAAAYAAAAAAAAAAAAAAADwAAACADAAAAAAAAAAAAAAEAAACgMgAAVgcAAKr4//8BAAAAf39/AAEAAABkAAAAAAAAABQAAABAHwAAAAAAACYAAAAAAAAAwOD//wAAAAAmAAAAZAAAABYAAABMAAAAAAAAAAAAAAAEAAAAAAAAAAEAAADn5uYKAAAAACgAAAAoAAAAZAAAAGQAAAAAAAAAzMzMAAAAAABQAAAAUAAAAGQAAABkAAAAAAAAABcAAAAUAAAAAAAAAAAAAAD/fwAA/38AAAAAAAAJAAAABAAAAAAAAAAeAAAAaAAAAAAAAAAAAAAAAAAAAAAAAAAAAAAAECcAABAnAAAAAAAAAAAAAAAAAAAAAAAAAAAAAAAAAAAAAAAAAAAAABQAAAAAAAAAwMD/AAAAAABkAAAAMgAAAAAAAABkAAAAAAAAAH9/fwAKAAAAIgAAABgAAAAAAAAAAAAAAAAAAAAAAAAAAAAAAAAAAAAkAAAAJAAAAAAAAAAHAAAAAAAAAAAAAAAAAAAAAAAAAAAAAAAAAAAAf39/ACUAAABYAAAAAAAAAAAAAAAAAAAAAAAAAAAAAAAAAAAAAAAAAAAAAAAAAAAAAAAAAAAAAAA/AAAAAAAAAKCGAQAAAAAAAAAAAAAAAAAMAAAAAQAAAAAAAAAAAAAAAAAAAB8AAABUAAAAAAAABQAAAAEAAAAAAAAAAAAAAAAAAAAAAAAAAAAAAAAAAAAAAAAAAAAAAAJ/f38AAAAAA8zMzADAwP8Af39/AAAAAAAAAAAAAAAAAAAAAAAAAAAAIQAAABgAAAAUAAAAOAQAABIbAAD4JQAAODEAABAAAAAmAAAACAAAAAEAAAAAAAAAMAAAABQAAAAAAAAAAAD//wAAAQAAAP//AAABAA=="/>
+                <pr:smNativeData xmlns:pr="smNativeData" xmlns="smNativeData" val="SMDATA_16_V2g2ahMAAAAlAAAAZAAAAA0AAAAAkAAAAEgAAACQAAAASAAAAAAAAAAAAAAAAAAAAAEAAABQAAAAAAAAAAAA4D8AAAAAAADgPwAAAAAAAOA/AAAAAAAA4D8AAAAAAADgPwAAAAAAAOA/AAAAAAAA4D8AAAAAAADgPwAAAAAAAOA/AAAAAAAA4D8CAAAAjAAAAAAAAAAAAAAARHLEDP///wgAAAAAAAAAAAAAAAAAAAAAAAAAAAAAAAAAAAAAZAAAAAEAAABAAAAAAAAAAAAAAAAAAAAAAAAAAAAAAAAAAAAAAAAAAAAAAAAAAAAAAAAAAAAAAAAAAAAAAAAAAAAAAAAAAAAAAAAAAAAAAAAAAAAAAAAAAAAAAAAAAAAAFAAAADwAAAAAAAAAAAAAAAAAAAkUAAAAAQAAABQAAAAUAAAAFAAAAAEAAAAAAAAAZAAAAGQAAAAAAAAAZAAAAGQAAAAVAAAAYAAAAAAAAAAAAAAADwAAACADAAAAAAAAAAAAAAEAAACgMgAAVgcAAKr4//8BAAAAf39/AAEAAABkAAAAAAAAABQAAABAHwAAAAAAACYAAAAAAAAAwOD//wAAAAAmAAAAZAAAABYAAABMAAAAAAAAAAAAAAAEAAAAAAAAAAEAAADn5uYKAAAAACgAAAAoAAAAZAAAAGQAAAAAAAAAzMzMAAAAAABQAAAAUAAAAGQAAABkAAAAAAAAABcAAAAUAAAAAAAAAAAAAAD/fwAA/38AAAAAAAAJAAAABAAAAAAAAAAeAAAAaAAAAAAAAAAAAAAAAAAAAAAAAAAAAAAAECcAABAnAAAAAAAAAAAAAAAAAAAAAAAAAAAAAAAAAAAAAAAAAAAAABQAAAAAAAAAwMD/AAAAAABkAAAAMgAAAAAAAABkAAAAAAAAAH9/fwAKAAAAIgAAABgAAAAAAAAAAAAAAAAAAAAAAAAAAAAAAAAAAAAkAAAAJAAAAAAAAAAHAAAAAAAAAAAAAAAAAAAAAAAAAAAAAAAAAAAAf39/ACUAAABYAAAAAAAAAAAAAAAAAAAAAAAAAAAAAAAAAAAAAAAAAAAAAAAAAAAAAAAAAAAAAAA/AAAAAAAAAKCGAQAAAAAAAAAAAAAAAAAMAAAAAQAAAAAAAAAAAAAAAAAAAB8AAABUAAAAAAAABQAAAAEAAAAAAAAAAAAAAAAAAAAAAAAAAAAAAAAAAAAAAAAAAAAAAAJ/f38AAAAAA8zMzADAwP8Af39/AAAAAAAAAAAAAAAAAAAAAAAAAAAAIQAAABgAAAAUAAAAOAQAABIbAAD4JQAAODEAABAAAAAmAAAACAAAAAEAAAAAAAAAMAAAABQAAAAAAAAAAAD//wAAAQAAAP//AAABAA=="/>
               </a:ext>
             </a:extLst>
           </p:cNvSpPr>
@@ -2018,7 +2018,7 @@
             <a:spLocks noGrp="1" noChangeArrowheads="1"/>
             <a:extLst>
               <a:ext uri="smNativeData">
-                <pr:smNativeData xmlns:pr="smNativeData" xmlns="smNativeData" val="SMDATA_16_kRU2ahMAAAAlAAAAZAAAAA0AAAAAkAAAAEgAAACQAAAASAAAAAAAAAACAAAAAAAAAAEAAABQAAAAAAAAAAAA4D8AAAAAAADgPwAAAAAAAOA/AAAAAAAA4D8AAAAAAADgPwAAAAAAAOA/AAAAAAAA4D8AAAAAAADgPwAAAAAAAOA/AAAAAAAA4D8CAAAAjAAAAAAAAAAAAAAARHLEDP///wgAAAAAAAAAAAAAAAAAAAAAAAAAAAAAAAAAAAAAZAAAAAEAAABAAAAAAAAAAAAAAAAAAAAAAAAAAAAAAAAAAAAAAAAAAAAAAAAAAAAAAAAAAAAAAAAAAAAAAAAAAAAAAAAAAAAAAAAAAAAAAAAAAAAAAAAAAAAAAAAAAAAAFAAAADwAAAAAAAAAAAAAAAAAAAkUAAAAAQAAABQAAAAUAAAAFAAAAAEAAAAAAAAAZAAAAGQAAAAAAAAAZAAAAGQAAAAVAAAAYAAAAAAAAAAAAAAADwAAACADAAAAAAAAAAAAAAEAAACgMgAAVgcAAKr4//8BAAAAf39/AAEAAABkAAAAAAAAABQAAABAHwAAAAAAACYAAAAAAAAAwOD//wAAAAAmAAAAZAAAABYAAABMAAAAAAAAAAAAAAAEAAAAAAAAAAEAAADn5uYKAAAAACgAAAAoAAAAZAAAAGQAAAAAAAAAzMzMAAAAAABQAAAAUAAAAGQAAABkAAAAAAAAABcAAAAUAAAAAAAAAAAAAAD/fwAA/38AAAAAAAAJAAAABAAAAKB5BIUeAAAAaAAAAAAAAAAAAAAAAAAAAAAAAAAAAAAAECcAABAnAAAAAAAAAAAAAAAAAAAAAAAAAAAAAAAAAAAAAAAAAAAAABQAAAAAAAAAwMD/AAAAAABkAAAAMgAAAAAAAABkAAAAAAAAAH9/fwAKAAAAIgAAABgAAAAAAAAAAAAAAAAAAAAAAAAAAAAAAAAAAAAkAAAAJAAAAAAAAAAHAAAAAAAAAAAAAAAAAAAAAAAAAAAAAAAAAAAAf39/ACUAAABYAAAAAAAAAAAAAAAAAAAAAAAAAAAAAAAAAAAAAAAAAAAAAAAAAAAAAAAAAAAAAAA/AAAAAAAAAKCGAQAAAAAAAAAAAAAAAAAMAAAAAQAAAAAAAAAAAAAAAAAAAB8AAABUAAAAAAAABQAAAAEAAAAAAAAAAAAAAAAAAAAAAAAAAAAAAAAAAAAAAAAAAAAAAAJ/f38AAAAAA8zMzADAwP8Af39/AAAAAAAAAAAAAAAAAAAAAAAAAAAAIQAAABgAAAAUAAAA5hcAAG41AAAuKgAAQDgAABAAAAAmAAAACAAAAAEAAAAAAAAAMAAAABQAAAAAAAAAAAD//wAAAQAAAP//AAABAA=="/>
+                <pr:smNativeData xmlns:pr="smNativeData" xmlns="smNativeData" val="SMDATA_16_V2g2ahMAAAAlAAAAZAAAAA0AAAAAkAAAAEgAAACQAAAASAAAAAAAAAACAAAAAAAAAAEAAABQAAAAAAAAAAAA4D8AAAAAAADgPwAAAAAAAOA/AAAAAAAA4D8AAAAAAADgPwAAAAAAAOA/AAAAAAAA4D8AAAAAAADgPwAAAAAAAOA/AAAAAAAA4D8CAAAAjAAAAAAAAAAAAAAARHLEDP///wgAAAAAAAAAAAAAAAAAAAAAAAAAAAAAAAAAAAAAZAAAAAEAAABAAAAAAAAAAAAAAAAAAAAAAAAAAAAAAAAAAAAAAAAAAAAAAAAAAAAAAAAAAAAAAAAAAAAAAAAAAAAAAAAAAAAAAAAAAAAAAAAAAAAAAAAAAAAAAAAAAAAAFAAAADwAAAAAAAAAAAAAAAAAAAkUAAAAAQAAABQAAAAUAAAAFAAAAAEAAAAAAAAAZAAAAGQAAAAAAAAAZAAAAGQAAAAVAAAAYAAAAAAAAAAAAAAADwAAACADAAAAAAAAAAAAAAEAAACgMgAAVgcAAKr4//8BAAAAf39/AAEAAABkAAAAAAAAABQAAABAHwAAAAAAACYAAAAAAAAAwOD//wAAAAAmAAAAZAAAABYAAABMAAAAAAAAAAAAAAAEAAAAAAAAAAEAAADn5uYKAAAAACgAAAAoAAAAZAAAAGQAAAAAAAAAzMzMAAAAAABQAAAAUAAAAGQAAABkAAAAAAAAABcAAAAUAAAAAAAAAAAAAAD/fwAA/38AAAAAAAAJAAAABAAAAKB5BIUeAAAAaAAAAAAAAAAAAAAAAAAAAAAAAAAAAAAAECcAABAnAAAAAAAAAAAAAAAAAAAAAAAAAAAAAAAAAAAAAAAAAAAAABQAAAAAAAAAwMD/AAAAAABkAAAAMgAAAAAAAABkAAAAAAAAAH9/fwAKAAAAIgAAABgAAAAAAAAAAAAAAAAAAAAAAAAAAAAAAAAAAAAkAAAAJAAAAAAAAAAHAAAAAAAAAAAAAAAAAAAAAAAAAAAAAAAAAAAAf39/ACUAAABYAAAAAAAAAAAAAAAAAAAAAAAAAAAAAAAAAAAAAAAAAAAAAAAAAAAAAAAAAAAAAAA/AAAAAAAAAKCGAQAAAAAAAAAAAAAAAAAMAAAAAQAAAAAAAAAAAAAAAAAAAB8AAABUAAAAAAAABQAAAAEAAAAAAAAAAAAAAAAAAAAAAAAAAAAAAAAAAAAAAAAAAAAAAAJ/f38AAAAAA8zMzADAwP8Af39/AAAAAAAAAAAAAAAAAAAAAAAAAAAAIQAAABgAAAAUAAAA5hcAAG41AAAuKgAAQDgAABAAAAAmAAAACAAAAAEAAAAAAAAAMAAAABQAAAAAAAAAAAD//wAAAQAAAP//AAABAA=="/>
               </a:ext>
             </a:extLst>
           </p:cNvSpPr>
@@ -2037,7 +2037,7 @@
           <a:lstStyle/>
           <a:p>
             <a:pPr/>
-            <a:fld id="{121F2CAF-E1FF-4ADA-B1A7-178F62E94742}" type="slidenum">
+            <a:fld id="{5DDA75AE-E0B0-8F83-FE62-16D63B2C0843}" type="slidenum">
               <a:rPr lang="en-us" cap="none"/>
               <a:t>6</a:t>
             </a:fld>
@@ -2085,7 +2085,7 @@
             <a:spLocks noGrp="1" noChangeArrowheads="1"/>
             <a:extLst>
               <a:ext uri="smNativeData">
-                <pr:smNativeData xmlns:pr="smNativeData" xmlns="smNativeData" val="SMDATA_16_kRU2ahMAAAAlAAAAZAAAAC0AAAAAkAAAAEgAAACQAAAASAAAAAAAAAABAAAAAAAAAAEAAABQAAAAAAAAAAAA4D8AAAAAAADgPwAAAAAAAOA/AAAAAAAA4D8AAAAAAADgPwAAAAAAAOA/AAAAAAAA4D8AAAAAAADgPwAAAAAAAOA/AAAAAAAA4D8CAAAAjAAAAAAAAAAAAAAARHLEDP///wgAAAAAAAAAAAAAAAAAAAAAAAAAAAAAAAAAAAAAZAAAAAEAAABAAAAAAAAAAAAAAAAAAAAAAAAAAAAAAAAAAAAAAAAAAAAAAAAAAAAAAAAAAAAAAAAAAAAAAAAAAAAAAAAAAAAAAAAAAAAAAAAAAAAAAAAAAAAAAAAAAAAAFAAAADwAAAABAAAAAAAAAAAAAAAUAAAAAQAAACMAAAAjAAAAIwAAAB4AAAAAAAAAZAAAAGQAAAAAAAAAZAAAAGQAAAAVAAAAYAAAAAAAAAAAAAAADwAAACADAAAAAAAAAAAAAAEAAACgMgAAVgcAAKr4//8BAAAAf39/AAEAAABkAAAAAAAAABQAAABAHwAAAAAAACYAAAAAAAAAwOD//wAAAAAmAAAAZAAAABYAAABMAAAAAAAAAAAAAAAEAAAAAAAAAAEAAADn5uYKAAAAACgAAAAoAAAAZAAAAGQAAAAAAAAAzMzMAAAAAABQAAAAUAAAAGQAAABkAAAAAAAAABcAAAAUAAAAAAAAAAAAAAD/fwAA/38AAAAAAAAJAAAABAAAAAAAAAAeAAAAaAAAAAAAAAAAAAAAAAAAAAAAAAAAAAAAECcAABAnAAAAAAAAAAAAAAAAAAAAAAAAAAAAAAAAAAAAAAAAAAAAABQAAAAAAAAAwMD/AAAAAABkAAAAMgAAAAAAAABkAAAAAAAAAH9/fwAKAAAAIgAAABgAAAAAAAAAAAAAAAAAAAAAAAAAAAAAAAAAAAAkAAAAJAAAAAAAAAAHAAAAAAAAAAAAAAAAAAAAAAAAAAAAAAAAAAAAf39/ACUAAABYAAAAAAAAAAAAAAAAAAAAAAAAAAAAAAAAAAAAAAAAAAAAAAAAAAAAAAAAAAAAAAA/AAAAAAAAAKCGAQAAAAAAAAAAAAAAAAAMAAAAAQAAAAAAAAAAAAAAAAAAAB8AAABUAAAAAAAABQAAAAEAAAAAAAAAAAAAAAAAAAAAAAAAAAAAAAAAAAAAAAAAAAAAAAB/f38AAAAAA8zMzADAwP8Af39/AAAAAAAAAAAAAAAAAAAAAAAAAAAAIQAAABgAAAAUAAAAOAQAAAgHAAD4JQAABBoAABAAAAAmAAAACAAAAAEAAAAAAAAAMAAAABQAAAAAAAAAAAD//wAAAQAAAP//AAABAA=="/>
+                <pr:smNativeData xmlns:pr="smNativeData" xmlns="smNativeData" val="SMDATA_16_V2g2ahMAAAAlAAAAZAAAAC0AAAAAkAAAAEgAAACQAAAASAAAAAAAAAABAAAAAAAAAAEAAABQAAAAAAAAAAAA4D8AAAAAAADgPwAAAAAAAOA/AAAAAAAA4D8AAAAAAADgPwAAAAAAAOA/AAAAAAAA4D8AAAAAAADgPwAAAAAAAOA/AAAAAAAA4D8CAAAAjAAAAAAAAAAAAAAARHLEDP///wgAAAAAAAAAAAAAAAAAAAAAAAAAAAAAAAAAAAAAZAAAAAEAAABAAAAAAAAAAAAAAAAAAAAAAAAAAAAAAAAAAAAAAAAAAAAAAAAAAAAAAAAAAAAAAAAAAAAAAAAAAAAAAAAAAAAAAAAAAAAAAAAAAAAAAAAAAAAAAAAAAAAAFAAAADwAAAABAAAAAAAAAAAAAAAUAAAAAQAAACMAAAAjAAAAIwAAAB4AAAAAAAAAZAAAAGQAAAAAAAAAZAAAAGQAAAAVAAAAYAAAAAAAAAAAAAAADwAAACADAAAAAAAAAAAAAAEAAACgMgAAVgcAAKr4//8BAAAAf39/AAEAAABkAAAAAAAAABQAAABAHwAAAAAAACYAAAAAAAAAwOD//wAAAAAmAAAAZAAAABYAAABMAAAAAAAAAAAAAAAEAAAAAAAAAAEAAADn5uYKAAAAACgAAAAoAAAAZAAAAGQAAAAAAAAAzMzMAAAAAABQAAAAUAAAAGQAAABkAAAAAAAAABcAAAAUAAAAAAAAAAAAAAD/fwAA/38AAAAAAAAJAAAABAAAAAAAAAAeAAAAaAAAAAAAAAAAAAAAAAAAAAAAAAAAAAAAECcAABAnAAAAAAAAAAAAAAAAAAAAAAAAAAAAAAAAAAAAAAAAAAAAABQAAAAAAAAAwMD/AAAAAABkAAAAMgAAAAAAAABkAAAAAAAAAH9/fwAKAAAAIgAAABgAAAAAAAAAAAAAAAAAAAAAAAAAAAAAAAAAAAAkAAAAJAAAAAAAAAAHAAAAAAAAAAAAAAAAAAAAAAAAAAAAAAAAAAAAf39/ACUAAABYAAAAAAAAAAAAAAAAAAAAAAAAAAAAAAAAAAAAAAAAAAAAAAAAAAAAAAAAAAAAAAA/AAAAAAAAAKCGAQAAAAAAAAAAAAAAAAAMAAAAAQAAAAAAAAAAAAAAAAAAAB8AAABUAAAAAAAABQAAAAEAAAAAAAAAAAAAAAAAAAAAAAAAAAAAAAAAAAAAAAAAAAAAAAB/f38AAAAAA8zMzADAwP8Af39/AAAAAAAAAAAAAAAAAAAAAAAAAAAAIQAAABgAAAAUAAAAOAQAAAgHAAD4JQAABBoAABAAAAAmAAAACAAAAAEAAAAAAAAAMAAAABQAAAAAAAAAAAD//wAAAQAAAP//AAABAA=="/>
               </a:ext>
             </a:extLst>
           </p:cNvSpPr>
@@ -2107,7 +2107,7 @@
             <a:spLocks noGrp="1" noChangeArrowheads="1"/>
             <a:extLst>
               <a:ext uri="smNativeData">
-                <pr:smNativeData xmlns:pr="smNativeData" xmlns="smNativeData" val="SMDATA_16_kRU2ahMAAAAlAAAAZAAAAA0AAAAAkAAAAEgAAACQAAAASAAAAAAAAAAAAAAAAAAAAAEAAABQAAAAAAAAAAAA4D8AAAAAAADgPwAAAAAAAOA/AAAAAAAA4D8AAAAAAADgPwAAAAAAAOA/AAAAAAAA4D8AAAAAAADgPwAAAAAAAOA/AAAAAAAA4D8CAAAAjAAAAAAAAAAAAAAARHLEDP///wgAAAAAAAAAAAAAAAAAAAAAAAAAAAAAAAAAAAAAZAAAAAEAAABAAAAAAAAAAAAAAAAAAAAAAAAAAAAAAAAAAAAAAAAAAAAAAAAAAAAAAAAAAAAAAAAAAAAAAAAAAAAAAAAAAAAAAAAAAAAAAAAAAAAAAAAAAAAAAAAAAAAAFAAAADwAAAAAAAAAAAAAAAAAAAkUAAAAAQAAABQAAAAUAAAAFAAAAAEAAAAAAAAAZAAAAGQAAAAAAAAAZAAAAGQAAAAVAAAAYAAAAAAAAAAAAAAADwAAACADAAAAAAAAAAAAAAEAAACgMgAAVgcAAKr4//8BAAAAf39/AAEAAABkAAAAAAAAABQAAABAHwAAAAAAACYAAAAAAAAAwOD//wAAAAAmAAAAZAAAABYAAABMAAAAAAAAAAAAAAAEAAAAAAAAAAEAAADn5uYKAAAAACgAAAAoAAAAZAAAAGQAAAAAAAAAzMzMAAAAAABQAAAAUAAAAGQAAABkAAAAAAAAABcAAAAUAAAAAAAAAAAAAAD/fwAA/38AAAAAAAAJAAAABAAAAAAAAAAeAAAAaAAAAAAAAAAAAAAAAAAAAAAAAAAAAAAAECcAABAnAAAAAAAAAAAAAAAAAAAAAAAAAAAAAAAAAAAAAAAAAAAAABQAAAAAAAAAwMD/AAAAAABkAAAAMgAAAAAAAABkAAAAAAAAAH9/fwAKAAAAIgAAABgAAAAAAAAAAAAAAAAAAAAAAAAAAAAAAAAAAAAkAAAAJAAAAAAAAAAHAAAAAAAAAAAAAAAAAAAAAAAAAAAAAAAAAAAAf39/ACUAAABYAAAAAAAAAAAAAAAAAAAAAAAAAAAAAAAAAAAAAAAAAAAAAAAAAAAAAAAAAAAAAAA/AAAAAAAAAKCGAQAAAAAAAAAAAAAAAAAMAAAAAQAAAAAAAAAAAAAAAAAAAB8AAABUAAAAAAAABQAAAAEAAAAAAAAAAAAAAAAAAAAAAAAAAAAAAAAAAAAAAAAAAAAAAAJ/f38AAAAAA8zMzADAwP8Af39/AAAAAAAAAAAAAAAAAAAAAAAAAAAAIQAAABgAAAAUAAAAOAQAABIbAAD4JQAAODEAABAAAAAmAAAACAAAAAEAAAAAAAAAMAAAABQAAAAAAAAAAAD//wAAAQAAAP//AAABAA=="/>
+                <pr:smNativeData xmlns:pr="smNativeData" xmlns="smNativeData" val="SMDATA_16_V2g2ahMAAAAlAAAAZAAAAA0AAAAAkAAAAEgAAACQAAAASAAAAAAAAAAAAAAAAAAAAAEAAABQAAAAAAAAAAAA4D8AAAAAAADgPwAAAAAAAOA/AAAAAAAA4D8AAAAAAADgPwAAAAAAAOA/AAAAAAAA4D8AAAAAAADgPwAAAAAAAOA/AAAAAAAA4D8CAAAAjAAAAAAAAAAAAAAARHLEDP///wgAAAAAAAAAAAAAAAAAAAAAAAAAAAAAAAAAAAAAZAAAAAEAAABAAAAAAAAAAAAAAAAAAAAAAAAAAAAAAAAAAAAAAAAAAAAAAAAAAAAAAAAAAAAAAAAAAAAAAAAAAAAAAAAAAAAAAAAAAAAAAAAAAAAAAAAAAAAAAAAAAAAAFAAAADwAAAAAAAAAAAAAAAAAAAkUAAAAAQAAABQAAAAUAAAAFAAAAAEAAAAAAAAAZAAAAGQAAAAAAAAAZAAAAGQAAAAVAAAAYAAAAAAAAAAAAAAADwAAACADAAAAAAAAAAAAAAEAAACgMgAAVgcAAKr4//8BAAAAf39/AAEAAABkAAAAAAAAABQAAABAHwAAAAAAACYAAAAAAAAAwOD//wAAAAAmAAAAZAAAABYAAABMAAAAAAAAAAAAAAAEAAAAAAAAAAEAAADn5uYKAAAAACgAAAAoAAAAZAAAAGQAAAAAAAAAzMzMAAAAAABQAAAAUAAAAGQAAABkAAAAAAAAABcAAAAUAAAAAAAAAAAAAAD/fwAA/38AAAAAAAAJAAAABAAAAAAAAAAeAAAAaAAAAAAAAAAAAAAAAAAAAAAAAAAAAAAAECcAABAnAAAAAAAAAAAAAAAAAAAAAAAAAAAAAAAAAAAAAAAAAAAAABQAAAAAAAAAwMD/AAAAAABkAAAAMgAAAAAAAABkAAAAAAAAAH9/fwAKAAAAIgAAABgAAAAAAAAAAAAAAAAAAAAAAAAAAAAAAAAAAAAkAAAAJAAAAAAAAAAHAAAAAAAAAAAAAAAAAAAAAAAAAAAAAAAAAAAAf39/ACUAAABYAAAAAAAAAAAAAAAAAAAAAAAAAAAAAAAAAAAAAAAAAAAAAAAAAAAAAAAAAAAAAAA/AAAAAAAAAKCGAQAAAAAAAAAAAAAAAAAMAAAAAQAAAAAAAAAAAAAAAAAAAB8AAABUAAAAAAAABQAAAAEAAAAAAAAAAAAAAAAAAAAAAAAAAAAAAAAAAAAAAAAAAAAAAAJ/f38AAAAAA8zMzADAwP8Af39/AAAAAAAAAAAAAAAAAAAAAAAAAAAAIQAAABgAAAAUAAAAOAQAABIbAAD4JQAAODEAABAAAAAmAAAACAAAAAEAAAAAAAAAMAAAABQAAAAAAAAAAAD//wAAAQAAAP//AAABAA=="/>
               </a:ext>
             </a:extLst>
           </p:cNvSpPr>
@@ -2136,7 +2136,7 @@
             <a:spLocks noGrp="1" noChangeArrowheads="1"/>
             <a:extLst>
               <a:ext uri="smNativeData">
-                <pr:smNativeData xmlns:pr="smNativeData" xmlns="smNativeData" val="SMDATA_16_kRU2ahMAAAAlAAAAZAAAAA0AAAAAkAAAAEgAAACQAAAASAAAAAAAAAACAAAAAAAAAAEAAABQAAAAAAAAAAAA4D8AAAAAAADgPwAAAAAAAOA/AAAAAAAA4D8AAAAAAADgPwAAAAAAAOA/AAAAAAAA4D8AAAAAAADgPwAAAAAAAOA/AAAAAAAA4D8CAAAAjAAAAAAAAAAAAAAARHLEDP///wgAAAAAAAAAAAAAAAAAAAAAAAAAAAAAAAAAAAAAZAAAAAEAAABAAAAAAAAAAAAAAAAAAAAAAAAAAAAAAAAAAAAAAAAAAAAAAAAAAAAAAAAAAAAAAAAAAAAAAAAAAAAAAAAAAAAAAAAAAAAAAAAAAAAAAAAAAAAAAAAAAAAAFAAAADwAAAAAAAAAAAAAAAAAAAkUAAAAAQAAABQAAAAUAAAAFAAAAAEAAAAAAAAAZAAAAGQAAAAAAAAAZAAAAGQAAAAVAAAAYAAAAAAAAAAAAAAADwAAACADAAAAAAAAAAAAAAEAAACgMgAAVgcAAKr4//8BAAAAf39/AAEAAABkAAAAAAAAABQAAABAHwAAAAAAACYAAAAAAAAAwOD//wAAAAAmAAAAZAAAABYAAABMAAAAAAAAAAAAAAAEAAAAAAAAAAEAAADn5uYKAAAAACgAAAAoAAAAZAAAAGQAAAAAAAAAzMzMAAAAAABQAAAAUAAAAGQAAABkAAAAAAAAABcAAAAUAAAAAAAAAAAAAAD/fwAA/38AAAAAAAAJAAAABAAAAAAAAAAeAAAAaAAAAAAAAAAAAAAAAAAAAAAAAAAAAAAAECcAABAnAAAAAAAAAAAAAAAAAAAAAAAAAAAAAAAAAAAAAAAAAAAAABQAAAAAAAAAwMD/AAAAAABkAAAAMgAAAAAAAABkAAAAAAAAAH9/fwAKAAAAIgAAABgAAAAAAAAAAAAAAAAAAAAAAAAAAAAAAAAAAAAkAAAAJAAAAAAAAAAHAAAAAAAAAAAAAAAAAAAAAAAAAAAAAAAAAAAAf39/ACUAAABYAAAAAAAAAAAAAAAAAAAAAAAAAAAAAAAAAAAAAAAAAAAAAAAAAAAAAAAAAAAAAAA/AAAAAAAAAKCGAQAAAAAAAAAAAAAAAAAMAAAAAQAAAAAAAAAAAAAAAAAAAB8AAABUAAAAAAAABQAAAAEAAAAAAAAAAAAAAAAAAAAAAAAAAAAAAAAAAAAAAAAAAAAAAAJ/f38AAAAAA8zMzADAwP8Af39/AAAAAAAAAAAAAAAAAAAAAAAAAAAAIQAAABgAAAAUAAAA5hcAAG41AAAuKgAAQDgAABAAAAAmAAAACAAAAAEAAAAAAAAAMAAAABQAAAAAAAAAAAD//wAAAQAAAP//AAABAA=="/>
+                <pr:smNativeData xmlns:pr="smNativeData" xmlns="smNativeData" val="SMDATA_16_V2g2ahMAAAAlAAAAZAAAAA0AAAAAkAAAAEgAAACQAAAASAAAAAAAAAACAAAAAAAAAAEAAABQAAAAAAAAAAAA4D8AAAAAAADgPwAAAAAAAOA/AAAAAAAA4D8AAAAAAADgPwAAAAAAAOA/AAAAAAAA4D8AAAAAAADgPwAAAAAAAOA/AAAAAAAA4D8CAAAAjAAAAAAAAAAAAAAARHLEDP///wgAAAAAAAAAAAAAAAAAAAAAAAAAAAAAAAAAAAAAZAAAAAEAAABAAAAAAAAAAAAAAAAAAAAAAAAAAAAAAAAAAAAAAAAAAAAAAAAAAAAAAAAAAAAAAAAAAAAAAAAAAAAAAAAAAAAAAAAAAAAAAAAAAAAAAAAAAAAAAAAAAAAAFAAAADwAAAAAAAAAAAAAAAAAAAkUAAAAAQAAABQAAAAUAAAAFAAAAAEAAAAAAAAAZAAAAGQAAAAAAAAAZAAAAGQAAAAVAAAAYAAAAAAAAAAAAAAADwAAACADAAAAAAAAAAAAAAEAAACgMgAAVgcAAKr4//8BAAAAf39/AAEAAABkAAAAAAAAABQAAABAHwAAAAAAACYAAAAAAAAAwOD//wAAAAAmAAAAZAAAABYAAABMAAAAAAAAAAAAAAAEAAAAAAAAAAEAAADn5uYKAAAAACgAAAAoAAAAZAAAAGQAAAAAAAAAzMzMAAAAAABQAAAAUAAAAGQAAABkAAAAAAAAABcAAAAUAAAAAAAAAAAAAAD/fwAA/38AAAAAAAAJAAAABAAAAAAAAAAeAAAAaAAAAAAAAAAAAAAAAAAAAAAAAAAAAAAAECcAABAnAAAAAAAAAAAAAAAAAAAAAAAAAAAAAAAAAAAAAAAAAAAAABQAAAAAAAAAwMD/AAAAAABkAAAAMgAAAAAAAABkAAAAAAAAAH9/fwAKAAAAIgAAABgAAAAAAAAAAAAAAAAAAAAAAAAAAAAAAAAAAAAkAAAAJAAAAAAAAAAHAAAAAAAAAAAAAAAAAAAAAAAAAAAAAAAAAAAAf39/ACUAAABYAAAAAAAAAAAAAAAAAAAAAAAAAAAAAAAAAAAAAAAAAAAAAAAAAAAAAAAAAAAAAAA/AAAAAAAAAKCGAQAAAAAAAAAAAAAAAAAMAAAAAQAAAAAAAAAAAAAAAAAAAB8AAABUAAAAAAAABQAAAAEAAAAAAAAAAAAAAAAAAAAAAAAAAAAAAAAAAAAAAAAAAAAAAAJ/f38AAAAAA8zMzADAwP8Af39/AAAAAAAAAAAAAAAAAAAAAAAAAAAAIQAAABgAAAAUAAAA5hcAAG41AAAuKgAAQDgAABAAAAAmAAAACAAAAAEAAAAAAAAAMAAAABQAAAAAAAAAAAD//wAAAQAAAP//AAABAA=="/>
               </a:ext>
             </a:extLst>
           </p:cNvSpPr>
@@ -2155,7 +2155,7 @@
           <a:lstStyle/>
           <a:p>
             <a:pPr/>
-            <a:fld id="{7CFEA359-1791-AB55-DF46-E100ED0829B4}" type="slidenum">
+            <a:fld id="{41103B03-4DAC-45CD-E2A8-BB9875E614EE}" type="slidenum">
               <a:rPr lang="en-us" cap="none"/>
               <a:t>7</a:t>
             </a:fld>
@@ -2203,7 +2203,7 @@
             <a:spLocks noGrp="1" noChangeArrowheads="1"/>
             <a:extLst>
               <a:ext uri="smNativeData">
-                <pr:smNativeData xmlns:pr="smNativeData" xmlns="smNativeData" val="SMDATA_16_kRU2ahMAAAAlAAAAZAAAAC0AAAAAkAAAAEgAAACQAAAASAAAAAAAAAABAAAAAAAAAAEAAABQAAAAAAAAAAAA4D8AAAAAAADgPwAAAAAAAOA/AAAAAAAA4D8AAAAAAADgPwAAAAAAAOA/AAAAAAAA4D8AAAAAAADgPwAAAAAAAOA/AAAAAAAA4D8CAAAAjAAAAAAAAAAAAAAARHLEDP///wgAAAAAAAAAAAAAAAAAAAAAAAAAAAAAAAAAAAAAZAAAAAEAAABAAAAAAAAAAAAAAAAAAAAAAAAAAAAAAAAAAAAAAAAAAAAAAAAAAAAAAAAAAAAAAAAAAAAAAAAAAAAAAAAAAAAAAAAAAAAAAAAAAAAAAAAAAAAAAAAAAAAAFAAAADwAAAABAAAAAAAAAAAAAAAUAAAAAQAAACMAAAAjAAAAIwAAAB4AAAAAAAAAZAAAAGQAAAAAAAAAZAAAAGQAAAAVAAAAYAAAAAAAAAAAAAAADwAAACADAAAAAAAAAAAAAAEAAACgMgAAVgcAAKr4//8BAAAAf39/AAEAAABkAAAAAAAAABQAAABAHwAAAAAAACYAAAAAAAAAwOD//wAAAAAmAAAAZAAAABYAAABMAAAAAAAAAAAAAAAEAAAAAAAAAAEAAADn5uYKAAAAACgAAAAoAAAAZAAAAGQAAAAAAAAAzMzMAAAAAABQAAAAUAAAAGQAAABkAAAAAAAAABcAAAAUAAAAAAAAAAAAAAD/fwAA/38AAAAAAAAJAAAABAAAAAAAAAAeAAAAaAAAAAAAAAAAAAAAAAAAAAAAAAAAAAAAECcAABAnAAAAAAAAAAAAAAAAAAAAAAAAAAAAAAAAAAAAAAAAAAAAABQAAAAAAAAAwMD/AAAAAABkAAAAMgAAAAAAAABkAAAAAAAAAH9/fwAKAAAAIgAAABgAAAAAAAAAAAAAAAAAAAAAAAAAAAAAAAAAAAAkAAAAJAAAAAAAAAAHAAAAAAAAAAAAAAAAAAAAAAAAAAAAAAAAAAAAf39/ACUAAABYAAAAAAAAAAAAAAAAAAAAAAAAAAAAAAAAAAAAAAAAAAAAAAAAAAAAAAAAAAAAAAA/AAAAAAAAAKCGAQAAAAAAAAAAAAAAAAAMAAAAAQAAAAAAAAAAAAAAAAAAAB8AAABUAAAAAAAABQAAAAEAAAAAAAAAAAAAAAAAAAAAAAAAAAAAAAAAAAAAAAAAAAAAAAB/f38AAAAAA8zMzADAwP8Af39/AAAAAAAAAAAAAAAAAAAAAAAAAAAAIQAAABgAAAAUAAAAOAQAAAgHAAD4JQAABBoAABAAAAAmAAAACAAAAAEAAAAAAAAAMAAAABQAAAAAAAAAAAD//wAAAQAAAP//AAABAA=="/>
+                <pr:smNativeData xmlns:pr="smNativeData" xmlns="smNativeData" val="SMDATA_16_V2g2ahMAAAAlAAAAZAAAAC0AAAAAkAAAAEgAAACQAAAASAAAAAAAAAABAAAAAAAAAAEAAABQAAAAAAAAAAAA4D8AAAAAAADgPwAAAAAAAOA/AAAAAAAA4D8AAAAAAADgPwAAAAAAAOA/AAAAAAAA4D8AAAAAAADgPwAAAAAAAOA/AAAAAAAA4D8CAAAAjAAAAAAAAAAAAAAARHLEDP///wgAAAAAAAAAAAAAAAAAAAAAAAAAAAAAAAAAAAAAZAAAAAEAAABAAAAAAAAAAAAAAAAAAAAAAAAAAAAAAAAAAAAAAAAAAAAAAAAAAAAAAAAAAAAAAAAAAAAAAAAAAAAAAAAAAAAAAAAAAAAAAAAAAAAAAAAAAAAAAAAAAAAAFAAAADwAAAABAAAAAAAAAAAAAAAUAAAAAQAAACMAAAAjAAAAIwAAAB4AAAAAAAAAZAAAAGQAAAAAAAAAZAAAAGQAAAAVAAAAYAAAAAAAAAAAAAAADwAAACADAAAAAAAAAAAAAAEAAACgMgAAVgcAAKr4//8BAAAAf39/AAEAAABkAAAAAAAAABQAAABAHwAAAAAAACYAAAAAAAAAwOD//wAAAAAmAAAAZAAAABYAAABMAAAAAAAAAAAAAAAEAAAAAAAAAAEAAADn5uYKAAAAACgAAAAoAAAAZAAAAGQAAAAAAAAAzMzMAAAAAABQAAAAUAAAAGQAAABkAAAAAAAAABcAAAAUAAAAAAAAAAAAAAD/fwAA/38AAAAAAAAJAAAABAAAAAAAAAAeAAAAaAAAAAAAAAAAAAAAAAAAAAAAAAAAAAAAECcAABAnAAAAAAAAAAAAAAAAAAAAAAAAAAAAAAAAAAAAAAAAAAAAABQAAAAAAAAAwMD/AAAAAABkAAAAMgAAAAAAAABkAAAAAAAAAH9/fwAKAAAAIgAAABgAAAAAAAAAAAAAAAAAAAAAAAAAAAAAAAAAAAAkAAAAJAAAAAAAAAAHAAAAAAAAAAAAAAAAAAAAAAAAAAAAAAAAAAAAf39/ACUAAABYAAAAAAAAAAAAAAAAAAAAAAAAAAAAAAAAAAAAAAAAAAAAAAAAAAAAAAAAAAAAAAA/AAAAAAAAAKCGAQAAAAAAAAAAAAAAAAAMAAAAAQAAAAAAAAAAAAAAAAAAAB8AAABUAAAAAAAABQAAAAEAAAAAAAAAAAAAAAAAAAAAAAAAAAAAAAAAAAAAAAAAAAAAAAB/f38AAAAAA8zMzADAwP8Af39/AAAAAAAAAAAAAAAAAAAAAAAAAAAAIQAAABgAAAAUAAAAOAQAAAgHAAD4JQAABBoAABAAAAAmAAAACAAAAAEAAAAAAAAAMAAAABQAAAAAAAAAAAD//wAAAQAAAP//AAABAA=="/>
               </a:ext>
             </a:extLst>
           </p:cNvSpPr>
@@ -2225,7 +2225,7 @@
             <a:spLocks noGrp="1" noChangeArrowheads="1"/>
             <a:extLst>
               <a:ext uri="smNativeData">
-                <pr:smNativeData xmlns:pr="smNativeData" xmlns="smNativeData" val="SMDATA_16_kRU2ahMAAAAlAAAAZAAAAA0AAAAAkAAAAEgAAACQAAAASAAAAAAAAAAAAAAAAAAAAAEAAABQAAAAAAAAAAAA4D8AAAAAAADgPwAAAAAAAOA/AAAAAAAA4D8AAAAAAADgPwAAAAAAAOA/AAAAAAAA4D8AAAAAAADgPwAAAAAAAOA/AAAAAAAA4D8CAAAAjAAAAAAAAAAAAAAARHLEDP///wgAAAAAAAAAAAAAAAAAAAAAAAAAAAAAAAAAAAAAZAAAAAEAAABAAAAAAAAAAAAAAAAAAAAAAAAAAAAAAAAAAAAAAAAAAAAAAAAAAAAAAAAAAAAAAAAAAAAAAAAAAAAAAAAAAAAAAAAAAAAAAAAAAAAAAAAAAAAAAAAAAAAAFAAAADwAAAAAAAAAAAAAAAAAAAkUAAAAAQAAABQAAAAUAAAAFAAAAAEAAAAAAAAAZAAAAGQAAAAAAAAAZAAAAGQAAAAVAAAAYAAAAAAAAAAAAAAADwAAACADAAAAAAAAAAAAAAEAAACgMgAAVgcAAKr4//8BAAAAf39/AAEAAABkAAAAAAAAABQAAABAHwAAAAAAACYAAAAAAAAAwOD//wAAAAAmAAAAZAAAABYAAABMAAAAAAAAAAAAAAAEAAAAAAAAAAEAAADn5uYKAAAAACgAAAAoAAAAZAAAAGQAAAAAAAAAzMzMAAAAAABQAAAAUAAAAGQAAABkAAAAAAAAABcAAAAUAAAAAAAAAAAAAAD/fwAA/38AAAAAAAAJAAAABAAAAMAfAAAeAAAAaAAAAAAAAAAAAAAAAAAAAAAAAAAAAAAAECcAABAnAAAAAAAAAAAAAAAAAAAAAAAAAAAAAAAAAAAAAAAAAAAAABQAAAAAAAAAwMD/AAAAAABkAAAAMgAAAAAAAABkAAAAAAAAAH9/fwAKAAAAIgAAABgAAAAAAAAAAAAAAAAAAAAAAAAAAAAAAAAAAAAkAAAAJAAAAAAAAAAHAAAAAAAAAAAAAAAAAAAAAAAAAAAAAAAAAAAAf39/ACUAAABYAAAAAAAAAAAAAAAAAAAAAAAAAAAAAAAAAAAAAAAAAAAAAAAAAAAAAAAAAAAAAAA/AAAAAAAAAKCGAQAAAAAAAAAAAAAAAAAMAAAAAQAAAAAAAAAAAAAAAAAAAB8AAABUAAAAAAAABQAAAAEAAAAAAAAAAAAAAAAAAAAAAAAAAAAAAAAAAAAAAAAAAAAAAAJ/f38AAAAAA8zMzADAwP8Af39/AAAAAAAAAAAAAAAAAAAAAAAAAAAAIQAAABgAAAAUAAAAOAQAABIbAAD4JQAAODEAABAAAAAmAAAACAAAAAEAAAAAAAAAMAAAABQAAAAAAAAAAAD//wAAAQAAAP//AAABAA=="/>
+                <pr:smNativeData xmlns:pr="smNativeData" xmlns="smNativeData" val="SMDATA_16_V2g2ahMAAAAlAAAAZAAAAA0AAAAAkAAAAEgAAACQAAAASAAAAAAAAAAAAAAAAAAAAAEAAABQAAAAAAAAAAAA4D8AAAAAAADgPwAAAAAAAOA/AAAAAAAA4D8AAAAAAADgPwAAAAAAAOA/AAAAAAAA4D8AAAAAAADgPwAAAAAAAOA/AAAAAAAA4D8CAAAAjAAAAAAAAAAAAAAARHLEDP///wgAAAAAAAAAAAAAAAAAAAAAAAAAAAAAAAAAAAAAZAAAAAEAAABAAAAAAAAAAAAAAAAAAAAAAAAAAAAAAAAAAAAAAAAAAAAAAAAAAAAAAAAAAAAAAAAAAAAAAAAAAAAAAAAAAAAAAAAAAAAAAAAAAAAAAAAAAAAAAAAAAAAAFAAAADwAAAAAAAAAAAAAAAAAAAkUAAAAAQAAABQAAAAUAAAAFAAAAAEAAAAAAAAAZAAAAGQAAAAAAAAAZAAAAGQAAAAVAAAAYAAAAAAAAAAAAAAADwAAACADAAAAAAAAAAAAAAEAAACgMgAAVgcAAKr4//8BAAAAf39/AAEAAABkAAAAAAAAABQAAABAHwAAAAAAACYAAAAAAAAAwOD//wAAAAAmAAAAZAAAABYAAABMAAAAAAAAAAAAAAAEAAAAAAAAAAEAAADn5uYKAAAAACgAAAAoAAAAZAAAAGQAAAAAAAAAzMzMAAAAAABQAAAAUAAAAGQAAABkAAAAAAAAABcAAAAUAAAAAAAAAAAAAAD/fwAA/38AAAAAAAAJAAAABAAAAMAfAAAeAAAAaAAAAAAAAAAAAAAAAAAAAAAAAAAAAAAAECcAABAnAAAAAAAAAAAAAAAAAAAAAAAAAAAAAAAAAAAAAAAAAAAAABQAAAAAAAAAwMD/AAAAAABkAAAAMgAAAAAAAABkAAAAAAAAAH9/fwAKAAAAIgAAABgAAAAAAAAAAAAAAAAAAAAAAAAAAAAAAAAAAAAkAAAAJAAAAAAAAAAHAAAAAAAAAAAAAAAAAAAAAAAAAAAAAAAAAAAAf39/ACUAAABYAAAAAAAAAAAAAAAAAAAAAAAAAAAAAAAAAAAAAAAAAAAAAAAAAAAAAAAAAAAAAAA/AAAAAAAAAKCGAQAAAAAAAAAAAAAAAAAMAAAAAQAAAAAAAAAAAAAAAAAAAB8AAABUAAAAAAAABQAAAAEAAAAAAAAAAAAAAAAAAAAAAAAAAAAAAAAAAAAAAAAAAAAAAAJ/f38AAAAAA8zMzADAwP8Af39/AAAAAAAAAAAAAAAAAAAAAAAAAAAAIQAAABgAAAAUAAAAOAQAABIbAAD4JQAAODEAABAAAAAmAAAACAAAAAEAAAAAAAAAMAAAABQAAAAAAAAAAAD//wAAAQAAAP//AAABAA=="/>
               </a:ext>
             </a:extLst>
           </p:cNvSpPr>
@@ -2254,7 +2254,7 @@
             <a:spLocks noGrp="1" noChangeArrowheads="1"/>
             <a:extLst>
               <a:ext uri="smNativeData">
-                <pr:smNativeData xmlns:pr="smNativeData" xmlns="smNativeData" val="SMDATA_16_kRU2ahMAAAAlAAAAZAAAAA0AAAAAkAAAAEgAAACQAAAASAAAAAAAAAACAAAAAAAAAAEAAABQAAAAAAAAAAAA4D8AAAAAAADgPwAAAAAAAOA/AAAAAAAA4D8AAAAAAADgPwAAAAAAAOA/AAAAAAAA4D8AAAAAAADgPwAAAAAAAOA/AAAAAAAA4D8CAAAAjAAAAAAAAAAAAAAARHLEDP///wgAAAAAAAAAAAAAAAAAAAAAAAAAAAAAAAAAAAAAZAAAAAEAAABAAAAAAAAAAAAAAAAAAAAAAAAAAAAAAAAAAAAAAAAAAAAAAAAAAAAAAAAAAAAAAAAAAAAAAAAAAAAAAAAAAAAAAAAAAAAAAAAAAAAAAAAAAAAAAAAAAAAAFAAAADwAAAAAAAAAAAAAAAAAAAkUAAAAAQAAABQAAAAUAAAAFAAAAAEAAAAAAAAAZAAAAGQAAAAAAAAAZAAAAGQAAAAVAAAAYAAAAAAAAAAAAAAADwAAACADAAAAAAAAAAAAAAEAAACgMgAAVgcAAKr4//8BAAAAf39/AAEAAABkAAAAAAAAABQAAABAHwAAAAAAACYAAAAAAAAAwOD//wAAAAAmAAAAZAAAABYAAABMAAAAAAAAAAAAAAAEAAAAAAAAAAEAAADn5uYKAAAAACgAAAAoAAAAZAAAAGQAAAAAAAAAzMzMAAAAAABQAAAAUAAAAGQAAABkAAAAAAAAABcAAAAUAAAAAAAAAAAAAAD/fwAA/38AAAAAAAAJAAAABAAAAAAAAAAeAAAAaAAAAAAAAAAAAAAAAAAAAAAAAAAAAAAAECcAABAnAAAAAAAAAAAAAAAAAAAAAAAAAAAAAAAAAAAAAAAAAAAAABQAAAAAAAAAwMD/AAAAAABkAAAAMgAAAAAAAABkAAAAAAAAAH9/fwAKAAAAIgAAABgAAAAAAAAAAAAAAAAAAAAAAAAAAAAAAAAAAAAkAAAAJAAAAAAAAAAHAAAAAAAAAAAAAAAAAAAAAAAAAAAAAAAAAAAAf39/ACUAAABYAAAAAAAAAAAAAAAAAAAAAAAAAAAAAAAAAAAAAAAAAAAAAAAAAAAAAAAAAAAAAAA/AAAAAAAAAKCGAQAAAAAAAAAAAAAAAAAMAAAAAQAAAAAAAAAAAAAAAAAAAB8AAABUAAAAAAAABQAAAAEAAAAAAAAAAAAAAAAAAAAAAAAAAAAAAAAAAAAAAAAAAAAAAAJ/f38AAAAAA8zMzADAwP8Af39/AAAAAAAAAAAAAAAAAAAAAAAAAAAAIQAAABgAAAAUAAAA5hcAAG41AAAuKgAAQDgAABAAAAAmAAAACAAAAAEAAAAAAAAAMAAAABQAAAAAAAAAAAD//wAAAQAAAP//AAABAA=="/>
+                <pr:smNativeData xmlns:pr="smNativeData" xmlns="smNativeData" val="SMDATA_16_V2g2ahMAAAAlAAAAZAAAAA0AAAAAkAAAAEgAAACQAAAASAAAAAAAAAACAAAAAAAAAAEAAABQAAAAAAAAAAAA4D8AAAAAAADgPwAAAAAAAOA/AAAAAAAA4D8AAAAAAADgPwAAAAAAAOA/AAAAAAAA4D8AAAAAAADgPwAAAAAAAOA/AAAAAAAA4D8CAAAAjAAAAAAAAAAAAAAARHLEDP///wgAAAAAAAAAAAAAAAAAAAAAAAAAAAAAAAAAAAAAZAAAAAEAAABAAAAAAAAAAAAAAAAAAAAAAAAAAAAAAAAAAAAAAAAAAAAAAAAAAAAAAAAAAAAAAAAAAAAAAAAAAAAAAAAAAAAAAAAAAAAAAAAAAAAAAAAAAAAAAAAAAAAAFAAAADwAAAAAAAAAAAAAAAAAAAkUAAAAAQAAABQAAAAUAAAAFAAAAAEAAAAAAAAAZAAAAGQAAAAAAAAAZAAAAGQAAAAVAAAAYAAAAAAAAAAAAAAADwAAACADAAAAAAAAAAAAAAEAAACgMgAAVgcAAKr4//8BAAAAf39/AAEAAABkAAAAAAAAABQAAABAHwAAAAAAACYAAAAAAAAAwOD//wAAAAAmAAAAZAAAABYAAABMAAAAAAAAAAAAAAAEAAAAAAAAAAEAAADn5uYKAAAAACgAAAAoAAAAZAAAAGQAAAAAAAAAzMzMAAAAAABQAAAAUAAAAGQAAABkAAAAAAAAABcAAAAUAAAAAAAAAAAAAAD/fwAA/38AAAAAAAAJAAAABAAAAAAAAAAeAAAAaAAAAAAAAAAAAAAAAAAAAAAAAAAAAAAAECcAABAnAAAAAAAAAAAAAAAAAAAAAAAAAAAAAAAAAAAAAAAAAAAAABQAAAAAAAAAwMD/AAAAAABkAAAAMgAAAAAAAABkAAAAAAAAAH9/fwAKAAAAIgAAABgAAAAAAAAAAAAAAAAAAAAAAAAAAAAAAAAAAAAkAAAAJAAAAAAAAAAHAAAAAAAAAAAAAAAAAAAAAAAAAAAAAAAAAAAAf39/ACUAAABYAAAAAAAAAAAAAAAAAAAAAAAAAAAAAAAAAAAAAAAAAAAAAAAAAAAAAAAAAAAAAAA/AAAAAAAAAKCGAQAAAAAAAAAAAAAAAAAMAAAAAQAAAAAAAAAAAAAAAAAAAB8AAABUAAAAAAAABQAAAAEAAAAAAAAAAAAAAAAAAAAAAAAAAAAAAAAAAAAAAAAAAAAAAAJ/f38AAAAAA8zMzADAwP8Af39/AAAAAAAAAAAAAAAAAAAAAAAAAAAAIQAAABgAAAAUAAAA5hcAAG41AAAuKgAAQDgAABAAAAAmAAAACAAAAAEAAAAAAAAAMAAAABQAAAAAAAAAAAD//wAAAQAAAP//AAABAA=="/>
               </a:ext>
             </a:extLst>
           </p:cNvSpPr>
@@ -2273,7 +2273,7 @@
           <a:lstStyle/>
           <a:p>
             <a:pPr/>
-            <a:fld id="{506E125D-13BD-3BE4-F3D6-E5B15C9805B0}" type="slidenum">
+            <a:fld id="{193D18C5-8BF4-68EE-BA85-7DBB56CB4C28}" type="slidenum">
               <a:rPr lang="en-us" cap="none"/>
               <a:t>8</a:t>
             </a:fld>
@@ -2321,7 +2321,7 @@
             <a:spLocks noGrp="1" noChangeArrowheads="1"/>
             <a:extLst>
               <a:ext uri="smNativeData">
-                <pr:smNativeData xmlns:pr="smNativeData" xmlns="smNativeData" val="SMDATA_16_kRU2ahMAAAAlAAAAZAAAAC0AAAAAkAAAAEgAAACQAAAASAAAAAAAAAABAAAAAAAAAAEAAABQAAAAAAAAAAAA4D8AAAAAAADgPwAAAAAAAOA/AAAAAAAA4D8AAAAAAADgPwAAAAAAAOA/AAAAAAAA4D8AAAAAAADgPwAAAAAAAOA/AAAAAAAA4D8CAAAAjAAAAAAAAAAAAAAARHLEDP///wgAAAAAAAAAAAAAAAAAAAAAAAAAAAAAAAAAAAAAZAAAAAEAAABAAAAAAAAAAAAAAAAAAAAAAAAAAAAAAAAAAAAAAAAAAAAAAAAAAAAAAAAAAAAAAAAAAAAAAAAAAAAAAAAAAAAAAAAAAAAAAAAAAAAAAAAAAAAAAAAAAAAAFAAAADwAAAABAAAAAAAAAAAAAAAUAAAAAQAAACMAAAAjAAAAIwAAAB4AAAAAAAAAZAAAAGQAAAAAAAAAZAAAAGQAAAAVAAAAYAAAAAAAAAAAAAAADwAAACADAAAAAAAAAAAAAAEAAACgMgAAVgcAAKr4//8BAAAAf39/AAEAAABkAAAAAAAAABQAAABAHwAAAAAAACYAAAAAAAAAwOD//wAAAAAmAAAAZAAAABYAAABMAAAAAAAAAAAAAAAEAAAAAAAAAAEAAADn5uYKAAAAACgAAAAoAAAAZAAAAGQAAAAAAAAAzMzMAAAAAABQAAAAUAAAAGQAAABkAAAAAAAAABcAAAAUAAAAAAAAAAAAAAD/fwAA/38AAAAAAAAJAAAABAAAAAAAAAAeAAAAaAAAAAAAAAAAAAAAAAAAAAAAAAAAAAAAECcAABAnAAAAAAAAAAAAAAAAAAAAAAAAAAAAAAAAAAAAAAAAAAAAABQAAAAAAAAAwMD/AAAAAABkAAAAMgAAAAAAAABkAAAAAAAAAH9/fwAKAAAAIgAAABgAAAAAAAAAAAAAAAAAAAAAAAAAAAAAAAAAAAAkAAAAJAAAAAAAAAAHAAAAAAAAAAAAAAAAAAAAAAAAAAAAAAAAAAAAf39/ACUAAABYAAAAAAAAAAAAAAAAAAAAAAAAAAAAAAAAAAAAAAAAAAAAAAAAAAAAAAAAAAAAAAA/AAAAAAAAAKCGAQAAAAAAAAAAAAAAAAAMAAAAAQAAAAAAAAAAAAAAAAAAAB8AAABUAAAAAAAABQAAAAEAAAAAAAAAAAAAAAAAAAAAAAAAAAAAAAAAAAAAAAAAAAAAAAB/f38AAAAAA8zMzADAwP8Af39/AAAAAAAAAAAAAAAAAAAAAAAAAAAAIQAAABgAAAAUAAAAOAQAAAgHAAD4JQAABBoAABAAAAAmAAAACAAAAAEAAAAAAAAAMAAAABQAAAAAAAAAAAD//wAAAQAAAP//AAABAA=="/>
+                <pr:smNativeData xmlns:pr="smNativeData" xmlns="smNativeData" val="SMDATA_16_V2g2ahMAAAAlAAAAZAAAAC0AAAAAkAAAAEgAAACQAAAASAAAAAAAAAABAAAAAAAAAAEAAABQAAAAAAAAAAAA4D8AAAAAAADgPwAAAAAAAOA/AAAAAAAA4D8AAAAAAADgPwAAAAAAAOA/AAAAAAAA4D8AAAAAAADgPwAAAAAAAOA/AAAAAAAA4D8CAAAAjAAAAAAAAAAAAAAARHLEDP///wgAAAAAAAAAAAAAAAAAAAAAAAAAAAAAAAAAAAAAZAAAAAEAAABAAAAAAAAAAAAAAAAAAAAAAAAAAAAAAAAAAAAAAAAAAAAAAAAAAAAAAAAAAAAAAAAAAAAAAAAAAAAAAAAAAAAAAAAAAAAAAAAAAAAAAAAAAAAAAAAAAAAAFAAAADwAAAABAAAAAAAAAAAAAAAUAAAAAQAAACMAAAAjAAAAIwAAAB4AAAAAAAAAZAAAAGQAAAAAAAAAZAAAAGQAAAAVAAAAYAAAAAAAAAAAAAAADwAAACADAAAAAAAAAAAAAAEAAACgMgAAVgcAAKr4//8BAAAAf39/AAEAAABkAAAAAAAAABQAAABAHwAAAAAAACYAAAAAAAAAwOD//wAAAAAmAAAAZAAAABYAAABMAAAAAAAAAAAAAAAEAAAAAAAAAAEAAADn5uYKAAAAACgAAAAoAAAAZAAAAGQAAAAAAAAAzMzMAAAAAABQAAAAUAAAAGQAAABkAAAAAAAAABcAAAAUAAAAAAAAAAAAAAD/fwAA/38AAAAAAAAJAAAABAAAAAAAAAAeAAAAaAAAAAAAAAAAAAAAAAAAAAAAAAAAAAAAECcAABAnAAAAAAAAAAAAAAAAAAAAAAAAAAAAAAAAAAAAAAAAAAAAABQAAAAAAAAAwMD/AAAAAABkAAAAMgAAAAAAAABkAAAAAAAAAH9/fwAKAAAAIgAAABgAAAAAAAAAAAAAAAAAAAAAAAAAAAAAAAAAAAAkAAAAJAAAAAAAAAAHAAAAAAAAAAAAAAAAAAAAAAAAAAAAAAAAAAAAf39/ACUAAABYAAAAAAAAAAAAAAAAAAAAAAAAAAAAAAAAAAAAAAAAAAAAAAAAAAAAAAAAAAAAAAA/AAAAAAAAAKCGAQAAAAAAAAAAAAAAAAAMAAAAAQAAAAAAAAAAAAAAAAAAAB8AAABUAAAAAAAABQAAAAEAAAAAAAAAAAAAAAAAAAAAAAAAAAAAAAAAAAAAAAAAAAAAAAB/f38AAAAAA8zMzADAwP8Af39/AAAAAAAAAAAAAAAAAAAAAAAAAAAAIQAAABgAAAAUAAAAOAQAAAgHAAD4JQAABBoAABAAAAAmAAAACAAAAAEAAAAAAAAAMAAAABQAAAAAAAAAAAD//wAAAQAAAP//AAABAA=="/>
               </a:ext>
             </a:extLst>
           </p:cNvSpPr>
@@ -2343,7 +2343,7 @@
             <a:spLocks noGrp="1" noChangeArrowheads="1"/>
             <a:extLst>
               <a:ext uri="smNativeData">
-                <pr:smNativeData xmlns:pr="smNativeData" xmlns="smNativeData" val="SMDATA_16_kRU2ahMAAAAlAAAAZAAAAA0AAAAAkAAAAEgAAACQAAAASAAAAAAAAAAAAAAAAAAAAAEAAABQAAAAAAAAAAAA4D8AAAAAAADgPwAAAAAAAOA/AAAAAAAA4D8AAAAAAADgPwAAAAAAAOA/AAAAAAAA4D8AAAAAAADgPwAAAAAAAOA/AAAAAAAA4D8CAAAAjAAAAAAAAAAAAAAARHLEDP///wgAAAAAAAAAAAAAAAAAAAAAAAAAAAAAAAAAAAAAZAAAAAEAAABAAAAAAAAAAAAAAAAAAAAAAAAAAAAAAAAAAAAAAAAAAAAAAAAAAAAAAAAAAAAAAAAAAAAAAAAAAAAAAAAAAAAAAAAAAAAAAAAAAAAAAAAAAAAAAAAAAAAAFAAAADwAAAAAAAAAAAAAAAAAAAkUAAAAAQAAABQAAAAUAAAAFAAAAAEAAAAAAAAAZAAAAGQAAAAAAAAAZAAAAGQAAAAVAAAAYAAAAAAAAAAAAAAADwAAACADAAAAAAAAAAAAAAEAAACgMgAAVgcAAKr4//8BAAAAf39/AAEAAABkAAAAAAAAABQAAABAHwAAAAAAACYAAAAAAAAAwOD//wAAAAAmAAAAZAAAABYAAABMAAAAAAAAAAAAAAAEAAAAAAAAAAEAAADn5uYKAAAAACgAAAAoAAAAZAAAAGQAAAAAAAAAzMzMAAAAAABQAAAAUAAAAGQAAABkAAAAAAAAABcAAAAUAAAAAAAAAAAAAAD/fwAA/38AAAAAAAAJAAAABAAAAAAAAAAeAAAAaAAAAAAAAAAAAAAAAAAAAAAAAAAAAAAAECcAABAnAAAAAAAAAAAAAAAAAAAAAAAAAAAAAAAAAAAAAAAAAAAAABQAAAAAAAAAwMD/AAAAAABkAAAAMgAAAAAAAABkAAAAAAAAAH9/fwAKAAAAIgAAABgAAAAAAAAAAAAAAAAAAAAAAAAAAAAAAAAAAAAkAAAAJAAAAAAAAAAHAAAAAAAAAAAAAAAAAAAAAAAAAAAAAAAAAAAAf39/ACUAAABYAAAAAAAAAAAAAAAAAAAAAAAAAAAAAAAAAAAAAAAAAAAAAAAAAAAAAAAAAAAAAAA/AAAAAAAAAKCGAQAAAAAAAAAAAAAAAAAMAAAAAQAAAAAAAAAAAAAAAAAAAB8AAABUAAAAAAAABQAAAAEAAAAAAAAAAAAAAAAAAAAAAAAAAAAAAAAAAAAAAAAAAAAAAAJ/f38AAAAAA8zMzADAwP8Af39/AAAAAAAAAAAAAAAAAAAAAAAAAAAAIQAAABgAAAAUAAAAOAQAABIbAAD4JQAAODEAABAAAAAmAAAACAAAAAEAAAAAAAAAMAAAABQAAAAAAAAAAAD//wAAAQAAAP//AAABAA=="/>
+                <pr:smNativeData xmlns:pr="smNativeData" xmlns="smNativeData" val="SMDATA_16_V2g2ahMAAAAlAAAAZAAAAA0AAAAAkAAAAEgAAACQAAAASAAAAAAAAAAAAAAAAAAAAAEAAABQAAAAAAAAAAAA4D8AAAAAAADgPwAAAAAAAOA/AAAAAAAA4D8AAAAAAADgPwAAAAAAAOA/AAAAAAAA4D8AAAAAAADgPwAAAAAAAOA/AAAAAAAA4D8CAAAAjAAAAAAAAAAAAAAARHLEDP///wgAAAAAAAAAAAAAAAAAAAAAAAAAAAAAAAAAAAAAZAAAAAEAAABAAAAAAAAAAAAAAAAAAAAAAAAAAAAAAAAAAAAAAAAAAAAAAAAAAAAAAAAAAAAAAAAAAAAAAAAAAAAAAAAAAAAAAAAAAAAAAAAAAAAAAAAAAAAAAAAAAAAAFAAAADwAAAAAAAAAAAAAAAAAAAkUAAAAAQAAABQAAAAUAAAAFAAAAAEAAAAAAAAAZAAAAGQAAAAAAAAAZAAAAGQAAAAVAAAAYAAAAAAAAAAAAAAADwAAACADAAAAAAAAAAAAAAEAAACgMgAAVgcAAKr4//8BAAAAf39/AAEAAABkAAAAAAAAABQAAABAHwAAAAAAACYAAAAAAAAAwOD//wAAAAAmAAAAZAAAABYAAABMAAAAAAAAAAAAAAAEAAAAAAAAAAEAAADn5uYKAAAAACgAAAAoAAAAZAAAAGQAAAAAAAAAzMzMAAAAAABQAAAAUAAAAGQAAABkAAAAAAAAABcAAAAUAAAAAAAAAAAAAAD/fwAA/38AAAAAAAAJAAAABAAAAAAAAAAeAAAAaAAAAAAAAAAAAAAAAAAAAAAAAAAAAAAAECcAABAnAAAAAAAAAAAAAAAAAAAAAAAAAAAAAAAAAAAAAAAAAAAAABQAAAAAAAAAwMD/AAAAAABkAAAAMgAAAAAAAABkAAAAAAAAAH9/fwAKAAAAIgAAABgAAAAAAAAAAAAAAAAAAAAAAAAAAAAAAAAAAAAkAAAAJAAAAAAAAAAHAAAAAAAAAAAAAAAAAAAAAAAAAAAAAAAAAAAAf39/ACUAAABYAAAAAAAAAAAAAAAAAAAAAAAAAAAAAAAAAAAAAAAAAAAAAAAAAAAAAAAAAAAAAAA/AAAAAAAAAKCGAQAAAAAAAAAAAAAAAAAMAAAAAQAAAAAAAAAAAAAAAAAAAB8AAABUAAAAAAAABQAAAAEAAAAAAAAAAAAAAAAAAAAAAAAAAAAAAAAAAAAAAAAAAAAAAAJ/f38AAAAAA8zMzADAwP8Af39/AAAAAAAAAAAAAAAAAAAAAAAAAAAAIQAAABgAAAAUAAAAOAQAABIbAAD4JQAAODEAABAAAAAmAAAACAAAAAEAAAAAAAAAMAAAABQAAAAAAAAAAAD//wAAAQAAAP//AAABAA=="/>
               </a:ext>
             </a:extLst>
           </p:cNvSpPr>
@@ -2372,7 +2372,7 @@
             <a:spLocks noGrp="1" noChangeArrowheads="1"/>
             <a:extLst>
               <a:ext uri="smNativeData">
-                <pr:smNativeData xmlns:pr="smNativeData" xmlns="smNativeData" val="SMDATA_16_kRU2ahMAAAAlAAAAZAAAAA0AAAAAkAAAAEgAAACQAAAASAAAAAAAAAACAAAAAAAAAAEAAABQAAAAAAAAAAAA4D8AAAAAAADgPwAAAAAAAOA/AAAAAAAA4D8AAAAAAADgPwAAAAAAAOA/AAAAAAAA4D8AAAAAAADgPwAAAAAAAOA/AAAAAAAA4D8CAAAAjAAAAAAAAAAAAAAARHLEDP///wgAAAAAAAAAAAAAAAAAAAAAAAAAAAAAAAAAAAAAZAAAAAEAAABAAAAAAAAAAAAAAAAAAAAAAAAAAAAAAAAAAAAAAAAAAAAAAAAAAAAAAAAAAAAAAAAAAAAAAAAAAAAAAAAAAAAAAAAAAAAAAAAAAAAAAAAAAAAAAAAAAAAAFAAAADwAAAAAAAAAAAAAAAAAAAkUAAAAAQAAABQAAAAUAAAAFAAAAAEAAAAAAAAAZAAAAGQAAAAAAAAAZAAAAGQAAAAVAAAAYAAAAAAAAAAAAAAADwAAACADAAAAAAAAAAAAAAEAAACgMgAAVgcAAKr4//8BAAAAf39/AAEAAABkAAAAAAAAABQAAABAHwAAAAAAACYAAAAAAAAAwOD//wAAAAAmAAAAZAAAABYAAABMAAAAAAAAAAAAAAAEAAAAAAAAAAEAAADn5uYKAAAAACgAAAAoAAAAZAAAAGQAAAAAAAAAzMzMAAAAAABQAAAAUAAAAGQAAABkAAAAAAAAABcAAAAUAAAAAAAAAAAAAAD/fwAA/38AAAAAAAAJAAAABAAAAAAAAAAeAAAAaAAAAAAAAAAAAAAAAAAAAAAAAAAAAAAAECcAABAnAAAAAAAAAAAAAAAAAAAAAAAAAAAAAAAAAAAAAAAAAAAAABQAAAAAAAAAwMD/AAAAAABkAAAAMgAAAAAAAABkAAAAAAAAAH9/fwAKAAAAIgAAABgAAAAAAAAAAAAAAAAAAAAAAAAAAAAAAAAAAAAkAAAAJAAAAAAAAAAHAAAAAAAAAAAAAAAAAAAAAAAAAAAAAAAAAAAAf39/ACUAAABYAAAAAAAAAAAAAAAAAAAAAAAAAAAAAAAAAAAAAAAAAAAAAAAAAAAAAAAAAAAAAAA/AAAAAAAAAKCGAQAAAAAAAAAAAAAAAAAMAAAAAQAAAAAAAAAAAAAAAAAAAB8AAABUAAAAAAAABQAAAAEAAAAAAAAAAAAAAAAAAAAAAAAAAAAAAAAAAAAAAAAAAAAAAAJ/f38AAAAAA8zMzADAwP8Af39/AAAAAAAAAAAAAAAAAAAAAAAAAAAAIQAAABgAAAAUAAAA5hcAAG41AAAuKgAAQDgAABAAAAAmAAAACAAAAAEAAAAAAAAAMAAAABQAAAAAAAAAAAD//wAAAQAAAP//AAABAA=="/>
+                <pr:smNativeData xmlns:pr="smNativeData" xmlns="smNativeData" val="SMDATA_16_V2g2ahMAAAAlAAAAZAAAAA0AAAAAkAAAAEgAAACQAAAASAAAAAAAAAACAAAAAAAAAAEAAABQAAAAAAAAAAAA4D8AAAAAAADgPwAAAAAAAOA/AAAAAAAA4D8AAAAAAADgPwAAAAAAAOA/AAAAAAAA4D8AAAAAAADgPwAAAAAAAOA/AAAAAAAA4D8CAAAAjAAAAAAAAAAAAAAARHLEDP///wgAAAAAAAAAAAAAAAAAAAAAAAAAAAAAAAAAAAAAZAAAAAEAAABAAAAAAAAAAAAAAAAAAAAAAAAAAAAAAAAAAAAAAAAAAAAAAAAAAAAAAAAAAAAAAAAAAAAAAAAAAAAAAAAAAAAAAAAAAAAAAAAAAAAAAAAAAAAAAAAAAAAAFAAAADwAAAAAAAAAAAAAAAAAAAkUAAAAAQAAABQAAAAUAAAAFAAAAAEAAAAAAAAAZAAAAGQAAAAAAAAAZAAAAGQAAAAVAAAAYAAAAAAAAAAAAAAADwAAACADAAAAAAAAAAAAAAEAAACgMgAAVgcAAKr4//8BAAAAf39/AAEAAABkAAAAAAAAABQAAABAHwAAAAAAACYAAAAAAAAAwOD//wAAAAAmAAAAZAAAABYAAABMAAAAAAAAAAAAAAAEAAAAAAAAAAEAAADn5uYKAAAAACgAAAAoAAAAZAAAAGQAAAAAAAAAzMzMAAAAAABQAAAAUAAAAGQAAABkAAAAAAAAABcAAAAUAAAAAAAAAAAAAAD/fwAA/38AAAAAAAAJAAAABAAAAAAAAAAeAAAAaAAAAAAAAAAAAAAAAAAAAAAAAAAAAAAAECcAABAnAAAAAAAAAAAAAAAAAAAAAAAAAAAAAAAAAAAAAAAAAAAAABQAAAAAAAAAwMD/AAAAAABkAAAAMgAAAAAAAABkAAAAAAAAAH9/fwAKAAAAIgAAABgAAAAAAAAAAAAAAAAAAAAAAAAAAAAAAAAAAAAkAAAAJAAAAAAAAAAHAAAAAAAAAAAAAAAAAAAAAAAAAAAAAAAAAAAAf39/ACUAAABYAAAAAAAAAAAAAAAAAAAAAAAAAAAAAAAAAAAAAAAAAAAAAAAAAAAAAAAAAAAAAAA/AAAAAAAAAKCGAQAAAAAAAAAAAAAAAAAMAAAAAQAAAAAAAAAAAAAAAAAAAB8AAABUAAAAAAAABQAAAAEAAAAAAAAAAAAAAAAAAAAAAAAAAAAAAAAAAAAAAAAAAAAAAAJ/f38AAAAAA8zMzADAwP8Af39/AAAAAAAAAAAAAAAAAAAAAAAAAAAAIQAAABgAAAAUAAAA5hcAAG41AAAuKgAAQDgAABAAAAAmAAAACAAAAAEAAAAAAAAAMAAAABQAAAAAAAAAAAD//wAAAQAAAP//AAABAA=="/>
               </a:ext>
             </a:extLst>
           </p:cNvSpPr>
@@ -2391,7 +2391,7 @@
           <a:lstStyle/>
           <a:p>
             <a:pPr/>
-            <a:fld id="{32A5A4B2-FCDF-F052-911D-0A07EA53675F}" type="slidenum">
+            <a:fld id="{049AE636-78E9-CF10-A722-8E45A86C51DB}" type="slidenum">
               <a:rPr lang="en-us" cap="none"/>
               <a:t>9</a:t>
             </a:fld>
@@ -3135,7 +3135,7 @@
           <p:cNvSpPr>
             <a:extLst>
               <a:ext uri="smNativeData">
-                <pr:smNativeData xmlns:pr="smNativeData" xmlns="smNativeData" val="SMDATA_16_kRU2ahMAAAAlAAAAZgAAAA0AAAAAkAAAAEgAAACQAAAASAAAAAAAAAAAAAAAAAAAAAEAAABQAAAAAAAAAAAA8D8AAAAAAADwPwAAAAAAAOA/AAAAAAAA4D8AAAAAAADgPwAAAAAAAOA/AAAAAAAA4D8AAAAAAADgPwAAAAAAAOA/AAAAAAAA4D8CAAAAjAAAAAEAAAAAAAAAHDpeAP///wgAAAAAAAAAAAAAAAAAAAAAAAAAAAAAAAAAAAAAeAAAAAEAAABAAAAAAAAAAAAAAABaAAAAAAAAAAAAAAAAAAAAAAAAAAAAAAAAAAAAAAAAAAAAAAAAAAAAAAAAAAAAAAAAAAAAAAAAAAAAAAAAAAAAAAAAAAAAAAAAAAAAFAAAADwAAAAAAAAAAAAAAAAAAAAPAAAAAQAAACMAAAAjAAAAIwAAAB4AAAAAAAAAZAAAAGQAAAAAAAAAZAAAAGQAAAAVAAAAYAAAAAAAAAAAAAAADwAAACADAAAAAAAAAAAAAAEAAACgMgAAVgcAAKr4//8BAAAAf39/AAEAAABkAAAAAAAAABQAAABAHwAAAAAAACYAAAAAAAAAwOD//wAAAAAmAAAAZAAAABYAAABMAAAAAAAAAAAAAAAEAAAAAAAAAAEAAADn5uYKAAAAACgAAAAoAAAAZAAAAGQAAAAAAAAAzMzMAAAAAABQAAAAUAAAAGQAAABkAAAAAAAAABcAAAAUAAAAAAAAAAAAAAD/fwAA/38AAAAAAAAJAAAABAAAAAAAAAAeAAAAaAAAAAAAAAAAAAAAAAAAAAAAAAAAAAAAECcAABAnAAAAAAAAAAAAAAAAAAAAAAAAAAAAAAAAAAAAAAAAAAAAABQAAAAAAAAAwMD/AAAAAABkAAAAMgAAAAAAAABkAAAAAAAAAH9/fwAKAAAAIgAAABgAAAAAAAAAAAAAAAAAAAAAAAAAAAAAAAAAAAAkAAAAJAAAAAAAAAAHAAAAAAAAAAAAAAAAAAAAAAAAAAAAAAAAAAAAf39/ACUAAABYAAAAAAAAAAAAAAAAAAAAAAAAAAAAAAAAAAAAAAAAAAAAAAAAAAAAAAAAAAAAAAA/AAAAAAAAAKCGAQAAAAAAAAAAAAAAAAAMAAAAAQAAAAAAAAAAAAAAAAAAAB8AAABUAAAAHDpeAP///wEAAAAAAAAAAAAAAAAAAAAAAAAAAAAAAAAAAAAAAAAAAAAAAAB/f38A5+bmA8zMzADAwP8Af39/AAAAAAAAAAAAAAAAAAAAAAAAAAAAIQAAABgAAAAUAAAA0EEAAND5///QUwAA0AsAABAAAAAmAAAACAAAAP//////////MAAAABQAAAAAAAAAAAD//wAAAQAAAP//AAABAA=="/>
+                <pr:smNativeData xmlns:pr="smNativeData" xmlns="smNativeData" val="SMDATA_16_V2g2ahMAAAAlAAAAZgAAAA0AAAAAkAAAAEgAAACQAAAASAAAAAAAAAAAAAAAAAAAAAEAAABQAAAAAAAAAAAA8D8AAAAAAADwPwAAAAAAAOA/AAAAAAAA4D8AAAAAAADgPwAAAAAAAOA/AAAAAAAA4D8AAAAAAADgPwAAAAAAAOA/AAAAAAAA4D8CAAAAjAAAAAEAAAAAAAAAHDpeAP///wgAAAAAAAAAAAAAAAAAAAAAAAAAAAAAAAAAAAAAeAAAAAEAAABAAAAAAAAAAAAAAABaAAAAAAAAAAAAAAAAAAAAAAAAAAAAAAAAAAAAAAAAAAAAAAAAAAAAAAAAAAAAAAAAAAAAAAAAAAAAAAAAAAAAAAAAAAAAAAAAAAAAFAAAADwAAAAAAAAAAAAAAAAAAAAPAAAAAQAAACMAAAAjAAAAIwAAAB4AAAAAAAAAZAAAAGQAAAAAAAAAZAAAAGQAAAAVAAAAYAAAAAAAAAAAAAAADwAAACADAAAAAAAAAAAAAAEAAACgMgAAVgcAAKr4//8BAAAAf39/AAEAAABkAAAAAAAAABQAAABAHwAAAAAAACYAAAAAAAAAwOD//wAAAAAmAAAAZAAAABYAAABMAAAAAAAAAAAAAAAEAAAAAAAAAAEAAADn5uYKAAAAACgAAAAoAAAAZAAAAGQAAAAAAAAAzMzMAAAAAABQAAAAUAAAAGQAAABkAAAAAAAAABcAAAAUAAAAAAAAAAAAAAD/fwAA/38AAAAAAAAJAAAABAAAAAAAAAAeAAAAaAAAAAAAAAAAAAAAAAAAAAAAAAAAAAAAECcAABAnAAAAAAAAAAAAAAAAAAAAAAAAAAAAAAAAAAAAAAAAAAAAABQAAAAAAAAAwMD/AAAAAABkAAAAMgAAAAAAAABkAAAAAAAAAH9/fwAKAAAAIgAAABgAAAAAAAAAAAAAAAAAAAAAAAAAAAAAAAAAAAAkAAAAJAAAAAAAAAAHAAAAAAAAAAAAAAAAAAAAAAAAAAAAAAAAAAAAf39/ACUAAABYAAAAAAAAAAAAAAAAAAAAAAAAAAAAAAAAAAAAAAAAAAAAAAAAAAAAAAAAAAAAAAA/AAAAAAAAAKCGAQAAAAAAAAAAAAAAAAAMAAAAAQAAAAAAAAAAAAAAAAAAAB8AAABUAAAAHDpeAP///wEAAAAAAAAAAAAAAAAAAAAAAAAAAAAAAAAAAAAAAAAAAAAAAAB/f38A5+bmA8zMzADAwP8Af39/AAAAAAAAAAAAAAAAAAAAAAAAAAAAIQAAABgAAAAUAAAA0EEAAND5///QUwAA0AsAABAAAAAmAAAACAAAAP//////////MAAAABQAAAAAAAAAAAD//wAAAQAAAP//AAABAA=="/>
               </a:ext>
             </a:extLst>
           </p:cNvSpPr>
@@ -3164,7 +3164,7 @@
           <p:cNvSpPr>
             <a:extLst>
               <a:ext uri="smNativeData">
-                <pr:smNativeData xmlns:pr="smNativeData" xmlns="smNativeData" val="SMDATA_16_kRU2ahMAAAAlAAAAZgAAAA0AAAAAkAAAAEgAAACQAAAASAAAAAAAAAAAAAAAAAAAAAEAAABQAAAAAAAAAAAA8D8AAAAAAADwPwAAAAAAAOA/AAAAAAAA4D8AAAAAAADgPwAAAAAAAOA/AAAAAAAA4D8AAAAAAADgPwAAAAAAAOA/AAAAAAAA4D8CAAAAjAAAAAEAAAAAAAAAHDpeAP///wgAAAAAAAAAAAAAAAAAAAAAAAAAAAAAAAAAAAAAeAAAAAEAAABAAAAAAAAAAAAAAABaAAAAAAAAAAAAAAAAAAAAAAAAAAAAAAAAAAAAAAAAAAAAAAAAAAAAAAAAAAAAAAAAAAAAAAAAAAAAAAAAAAAAAAAAAAAAAAAAAAAAFAAAADwAAAAAAAAAAAAAAAAAAAAPAAAAAQAAACMAAAAjAAAAIwAAAB4AAAAAAAAAZAAAAGQAAAAAAAAAZAAAAGQAAAAVAAAAYAAAAAAAAAAAAAAADwAAACADAAAAAAAAAAAAAAEAAACgMgAAVgcAAKr4//8BAAAAf39/AAEAAABkAAAAAAAAABQAAABAHwAAAAAAACYAAAAAAAAAwOD//wAAAAAmAAAAZAAAABYAAABMAAAAAAAAAAAAAAAEAAAAAAAAAAEAAADn5uYKAAAAACgAAAAoAAAAZAAAAGQAAAAAAAAAzMzMAAAAAABQAAAAUAAAAGQAAABkAAAAAAAAABcAAAAUAAAAAAAAAAAAAAD/fwAA/38AAAAAAAAJAAAABAAAAAAAAAAeAAAAaAAAAAAAAAAAAAAAAAAAAAAAAAAAAAAAECcAABAnAAAAAAAAAAAAAAAAAAAAAAAAAAAAAAAAAAAAAAAAAAAAABQAAAAAAAAAwMD/AAAAAABkAAAAMgAAAAAAAABkAAAAAAAAAH9/fwAKAAAAIgAAABgAAAAAAAAAAAAAAAAAAAAAAAAAAAAAAAAAAAAkAAAAJAAAAAAAAAAHAAAAAAAAAAAAAAAAAAAAAAAAAAAAAAAAAAAAf39/ACUAAABYAAAAAAAAAAAAAAAAAAAAAAAAAAAAAAAAAAAAAAAAAAAAAAAAAAAAAAAAAAAAAAA/AAAAAAAAAKCGAQAAAAAAAAAAAAAAAAAMAAAAAQAAAAAAAAAAAAAAAAAAAB8AAABUAAAAHDpeAP///wEAAAAAAAAAAAAAAAAAAAAAAAAAAAAAAAAAAAAAAAAAAAAAAAB/f38A5+bmA8zMzADAwP8Af39/AAAAAAAAAAAAAAAAAAAAAAAAAAAAIQAAABgAAAAUAAAAUEYAAGAeAADwVAAAAC0AABAAAAAmAAAACAAAAP//////////MAAAABQAAAAAAAAAAAD//wAAAQAAAP//AAABAA=="/>
+                <pr:smNativeData xmlns:pr="smNativeData" xmlns="smNativeData" val="SMDATA_16_V2g2ahMAAAAlAAAAZgAAAA0AAAAAkAAAAEgAAACQAAAASAAAAAAAAAAAAAAAAAAAAAEAAABQAAAAAAAAAAAA8D8AAAAAAADwPwAAAAAAAOA/AAAAAAAA4D8AAAAAAADgPwAAAAAAAOA/AAAAAAAA4D8AAAAAAADgPwAAAAAAAOA/AAAAAAAA4D8CAAAAjAAAAAEAAAAAAAAAHDpeAP///wgAAAAAAAAAAAAAAAAAAAAAAAAAAAAAAAAAAAAAeAAAAAEAAABAAAAAAAAAAAAAAABaAAAAAAAAAAAAAAAAAAAAAAAAAAAAAAAAAAAAAAAAAAAAAAAAAAAAAAAAAAAAAAAAAAAAAAAAAAAAAAAAAAAAAAAAAAAAAAAAAAAAFAAAADwAAAAAAAAAAAAAAAAAAAAPAAAAAQAAACMAAAAjAAAAIwAAAB4AAAAAAAAAZAAAAGQAAAAAAAAAZAAAAGQAAAAVAAAAYAAAAAAAAAAAAAAADwAAACADAAAAAAAAAAAAAAEAAACgMgAAVgcAAKr4//8BAAAAf39/AAEAAABkAAAAAAAAABQAAABAHwAAAAAAACYAAAAAAAAAwOD//wAAAAAmAAAAZAAAABYAAABMAAAAAAAAAAAAAAAEAAAAAAAAAAEAAADn5uYKAAAAACgAAAAoAAAAZAAAAGQAAAAAAAAAzMzMAAAAAABQAAAAUAAAAGQAAABkAAAAAAAAABcAAAAUAAAAAAAAAAAAAAD/fwAA/38AAAAAAAAJAAAABAAAAAAAAAAeAAAAaAAAAAAAAAAAAAAAAAAAAAAAAAAAAAAAECcAABAnAAAAAAAAAAAAAAAAAAAAAAAAAAAAAAAAAAAAAAAAAAAAABQAAAAAAAAAwMD/AAAAAABkAAAAMgAAAAAAAABkAAAAAAAAAH9/fwAKAAAAIgAAABgAAAAAAAAAAAAAAAAAAAAAAAAAAAAAAAAAAAAkAAAAJAAAAAAAAAAHAAAAAAAAAAAAAAAAAAAAAAAAAAAAAAAAAAAAf39/ACUAAABYAAAAAAAAAAAAAAAAAAAAAAAAAAAAAAAAAAAAAAAAAAAAAAAAAAAAAAAAAAAAAAA/AAAAAAAAAKCGAQAAAAAAAAAAAAAAAAAMAAAAAQAAAAAAAAAAAAAAAAAAAB8AAABUAAAAHDpeAP///wEAAAAAAAAAAAAAAAAAAAAAAAAAAAAAAAAAAAAAAAAAAAAAAAB/f38A5+bmA8zMzADAwP8Af39/AAAAAAAAAAAAAAAAAAAAAAAAAAAAIQAAABgAAAAUAAAAUEYAAGAeAADwVAAAAC0AABAAAAAmAAAACAAAAP//////////MAAAABQAAAAAAAAAAAD//wAAAQAAAP//AAABAA=="/>
               </a:ext>
             </a:extLst>
           </p:cNvSpPr>
@@ -3193,7 +3193,7 @@
           <p:cNvSpPr>
             <a:extLst>
               <a:ext uri="smNativeData">
-                <pr:smNativeData xmlns:pr="smNativeData" xmlns="smNativeData" val="SMDATA_16_kRU2ahMAAAAlAAAAZAAAAA0AAAAAkAAAAEgAAACQAAAASAAAAAAAAAABAAAAAAAAAAEAAABQAAAAAAAAAAAA4D8AAAAAAADgPwAAAAAAAOA/AAAAAAAA4D8AAAAAAADgPwAAAAAAAOA/AAAAAAAA4D8AAAAAAADgPwAAAAAAAOA/AAAAAAAA4D8CAAAAjAAAAAAAAAAAAAAARHLEDP///wgAAAAAAAAAAAAAAAAAAAAAAAAAAAAAAAAAAAAAZAAAAAEAAABAAAAAAAAAAAAAAAAAAAAAAAAAAAAAAAAAAAAAAAAAAAAAAAAAAAAAAAAAAAAAAAAAAAAAAAAAAAAAAAAAAAAAAAAAAAAAAAAAAAAAAAAAAAAAAAAAAAAAFAAAADwAAAAAAAAAAAAAAAAAAAAPAAAAAQAAACMAAAAjAAAAIwAAAB4AAAAAAAAAZAAAAGQAAAAAAAAAZAAAAGQAAAAVAAAAYAAAAAAAAAAAAAAADwAAACADAAAAAAAAAAAAAAEAAACgMgAAVgcAAKr4//8BAAAAf39/AAEAAABkAAAAAAAAABQAAABAHwAAAAAAACYAAAAAAAAAwOD//wAAAAAmAAAAZAAAABYAAABMAAAAAAAAAAAAAAAEAAAAAAAAAAEAAADn5uYKAAAAACgAAAAoAAAAZAAAAGQAAAAAAAAAzMzMAAAAAABQAAAAUAAAAGQAAABkAAAAAAAAABcAAAAUAAAAAAAAAAAAAAD/fwAA/38AAAAAAAAJAAAABAAAAAAAAAAeAAAAaAAAAAAAAAAAAAAAAAAAAAAAAAAAAAAAECcAABAnAAAAAAAAAAAAAAAAAAAAAAAAAAAAAAAAAAAAAAAAAAAAABQAAAAAAAAAwMD/AAAAAABkAAAAMgAAAAAAAABkAAAAAAAAAH9/fwAKAAAAIgAAABgAAAAAAAAAAAAAAAAAAAAAAAAAAAAAAAAAAAAkAAAAJAAAAAAAAAAHAAAAAAAAAAAAAAAAAAAAAAAAAAAAAAAAAAAAf39/ACUAAABYAAAAAAAAAAAAAAAAAAAAAAAAAAAAAAAAAAAAAAAAAAAAAAAAAAAAAAAAAAAAAAA/AAAAAAAAAKCGAQAAAAAAAAAAAAAAAAAMAAAAAQAAAAAAAAAAAAAAAAAAAB8AAABUAAAARHLEBf///wEAAAAAAAAAAAAAAAAAAAAAAAAAAAAAAAAAAAAAAAAAAAAAAAB/f38A5+bmA8zMzADAwP8Af39/AAAAAAAAAAAAAAAAAAAAAAAAAAAAIQAAABgAAAAUAAAAYAMAAHAIAABAQQAAsAoAABAAAAAmAAAACAAAAP//////////MAAAABQAAAAAAAAAAAD//wAAAQAAAP//AAABAA=="/>
+                <pr:smNativeData xmlns:pr="smNativeData" xmlns="smNativeData" val="SMDATA_16_V2g2ahMAAAAlAAAAZAAAAA0AAAAAkAAAAEgAAACQAAAASAAAAAAAAAABAAAAAAAAAAEAAABQAAAAAAAAAAAA4D8AAAAAAADgPwAAAAAAAOA/AAAAAAAA4D8AAAAAAADgPwAAAAAAAOA/AAAAAAAA4D8AAAAAAADgPwAAAAAAAOA/AAAAAAAA4D8CAAAAjAAAAAAAAAAAAAAARHLEDP///wgAAAAAAAAAAAAAAAAAAAAAAAAAAAAAAAAAAAAAZAAAAAEAAABAAAAAAAAAAAAAAAAAAAAAAAAAAAAAAAAAAAAAAAAAAAAAAAAAAAAAAAAAAAAAAAAAAAAAAAAAAAAAAAAAAAAAAAAAAAAAAAAAAAAAAAAAAAAAAAAAAAAAFAAAADwAAAAAAAAAAAAAAAAAAAAPAAAAAQAAACMAAAAjAAAAIwAAAB4AAAAAAAAAZAAAAGQAAAAAAAAAZAAAAGQAAAAVAAAAYAAAAAAAAAAAAAAADwAAACADAAAAAAAAAAAAAAEAAACgMgAAVgcAAKr4//8BAAAAf39/AAEAAABkAAAAAAAAABQAAABAHwAAAAAAACYAAAAAAAAAwOD//wAAAAAmAAAAZAAAABYAAABMAAAAAAAAAAAAAAAEAAAAAAAAAAEAAADn5uYKAAAAACgAAAAoAAAAZAAAAGQAAAAAAAAAzMzMAAAAAABQAAAAUAAAAGQAAABkAAAAAAAAABcAAAAUAAAAAAAAAAAAAAD/fwAA/38AAAAAAAAJAAAABAAAAAAAAAAeAAAAaAAAAAAAAAAAAAAAAAAAAAAAAAAAAAAAECcAABAnAAAAAAAAAAAAAAAAAAAAAAAAAAAAAAAAAAAAAAAAAAAAABQAAAAAAAAAwMD/AAAAAABkAAAAMgAAAAAAAABkAAAAAAAAAH9/fwAKAAAAIgAAABgAAAAAAAAAAAAAAAAAAAAAAAAAAAAAAAAAAAAkAAAAJAAAAAAAAAAHAAAAAAAAAAAAAAAAAAAAAAAAAAAAAAAAAAAAf39/ACUAAABYAAAAAAAAAAAAAAAAAAAAAAAAAAAAAAAAAAAAAAAAAAAAAAAAAAAAAAAAAAAAAAA/AAAAAAAAAKCGAQAAAAAAAAAAAAAAAAAMAAAAAQAAAAAAAAAAAAAAAAAAAB8AAABUAAAARHLEBf///wEAAAAAAAAAAAAAAAAAAAAAAAAAAAAAAAAAAAAAAAAAAAAAAAB/f38A5+bmA8zMzADAwP8Af39/AAAAAAAAAAAAAAAAAAAAAAAAAAAAIQAAABgAAAAUAAAAYAMAAHAIAABAQQAAsAoAABAAAAAmAAAACAAAAP//////////MAAAABQAAAAAAAAAAAD//wAAAQAAAP//AAABAA=="/>
               </a:ext>
             </a:extLst>
           </p:cNvSpPr>
@@ -3221,7 +3221,7 @@
               <a:buNone/>
             </a:pPr>
             <a:r>
-              <a:rPr lang="en-us" sz="1300" b="1" cap="none" spc="40">
+              <a:rPr lang="en-us" sz="1300" b="1" cap="none" spc="9">
                 <a:solidFill>
                   <a:srgbClr val="E0A038"/>
                 </a:solidFill>
@@ -3229,7 +3229,7 @@
               <a:t>DEFESA DE </a:t>
             </a:r>
             <a:r>
-              <a:rPr lang="en-us" sz="1300" b="1" cap="none" spc="40">
+              <a:rPr lang="en-us" sz="1300" b="1" cap="none" spc="9">
                 <a:solidFill>
                   <a:srgbClr val="E0A038"/>
                 </a:solidFill>
@@ -3237,7 +3237,7 @@
               <a:t>BANCA · </a:t>
             </a:r>
             <a:r>
-              <a:rPr lang="en-us" sz="1300" b="1" cap="none" spc="40">
+              <a:rPr lang="en-us" sz="1300" b="1" cap="none" spc="9">
                 <a:solidFill>
                   <a:srgbClr val="E0A038"/>
                 </a:solidFill>
@@ -3245,7 +3245,7 @@
               <a:t>SSP/</a:t>
             </a:r>
             <a:r>
-              <a:rPr lang="en-us" sz="1300" b="1" cap="none" spc="40">
+              <a:rPr lang="en-us" sz="1300" b="1" cap="none" spc="9">
                 <a:solidFill>
                   <a:srgbClr val="E0A038"/>
                 </a:solidFill>
@@ -3262,7 +3262,7 @@
           <p:cNvSpPr>
             <a:extLst>
               <a:ext uri="smNativeData">
-                <pr:smNativeData xmlns:pr="smNativeData" xmlns="smNativeData" val="SMDATA_16_kRU2ahMAAAAlAAAAZAAAAA0AAAAAkAAAAEgAAACQAAAASAAAAAAAAAABAAAAAAAAAAEAAABQAAAAAAAAAAAA4D8AAAAAAADgPwAAAAAAAOA/AAAAAAAA4D8AAAAAAADgPwAAAAAAAOA/AAAAAAAA4D8AAAAAAADgPwAAAAAAAOA/AAAAAAAA4D8CAAAAjAAAAAAAAAAAAAAARHLEDP///wgAAAAAAAAAAAAAAAAAAAAAAAAAAAAAAAAAAAAAZAAAAAEAAABAAAAAAAAAAAAAAAAAAAAAAAAAAAAAAAAAAAAAAAAAAAAAAAAAAAAAAAAAAAAAAAAAAAAAAAAAAAAAAAAAAAAAAAAAAAAAAAAAAAAAAAAAAAAAAAAAAAAAFAAAADwAAAAAAAAAAAAAAAAAAAAPAAAAAQAAACMAAAAjAAAAIwAAAB4AAAAAAAAAZAAAAGQAAAAAAAAAZAAAAGQAAAAVAAAAYAAAAAAAAAAAAAAADwAAACADAAAAAAAAAAAAAAEAAACgMgAAVgcAAKr4//8BAAAAf39/AAEAAABkAAAAAAAAABQAAABAHwAAAAAAACYAAAAAAAAAwOD//wAAAAAmAAAAZAAAABYAAABMAAAAAAAAAAAAAAAEAAAAAAAAAAEAAADn5uYKAAAAACgAAAAoAAAAZAAAAGQAAAAAAAAAzMzMAAAAAABQAAAAUAAAAGQAAABkAAAAAAAAABcAAAAUAAAAAAAAAAAAAAD/fwAA/38AAAAAAAAJAAAABAAAAP////8eAAAAaAAAAAAAAAAAAAAAAAAAAAAAAAAAAAAAECcAABAnAAAAAAAAAAAAAAAAAAAAAAAAAAAAAAAAAAAAAAAAAAAAABQAAAAAAAAAwMD/AAAAAABkAAAAMgAAAAAAAABkAAAAAAAAAH9/fwAKAAAAIgAAABgAAAAAAAAAAAAAAAAAAAAAAAAAAAAAAAAAAAAkAAAAJAAAAAAAAAAHAAAAAAAAAAAAAAAAAAAAAAAAAAAAAAAAAAAAf39/ACUAAABYAAAAAAAAAAAAAAAAAAAAAAAAAAAAAAAAAAAAAAAAAAAAAAAAAAAAAAAAAAAAAAA/AAAAAAAAAKCGAQAAAAAAAAAAAAAAAAAMAAAAAQAAAAAAAAAAAAAAAAAAAB8AAABUAAAARHLEBf///wEAAAAAAAAAAAAAAAAAAAAAAAAAAAAAAAAAAAAAAAAAAAAAAAB/f38A5+bmA8zMzADAwP8Af39/AAAAAAAAAAAAAAAAAAAAAAAAAAAAIQAAABgAAAAUAAAAYAMAAEALAADARQAA0BQAABAAAAAmAAAACAAAAP//////////MAAAABQAAAAAAAAAAAD//wAAAQAAAP//AAABAA=="/>
+                <pr:smNativeData xmlns:pr="smNativeData" xmlns="smNativeData" val="SMDATA_16_V2g2ahMAAAAlAAAAZAAAAA0AAAAAkAAAAEgAAACQAAAASAAAAAAAAAABAAAAAAAAAAEAAABQAAAAAAAAAAAA4D8AAAAAAADgPwAAAAAAAOA/AAAAAAAA4D8AAAAAAADgPwAAAAAAAOA/AAAAAAAA4D8AAAAAAADgPwAAAAAAAOA/AAAAAAAA4D8CAAAAjAAAAAAAAAAAAAAARHLEDP///wgAAAAAAAAAAAAAAAAAAAAAAAAAAAAAAAAAAAAAZAAAAAEAAABAAAAAAAAAAAAAAAAAAAAAAAAAAAAAAAAAAAAAAAAAAAAAAAAAAAAAAAAAAAAAAAAAAAAAAAAAAAAAAAAAAAAAAAAAAAAAAAAAAAAAAAAAAAAAAAAAAAAAFAAAADwAAAAAAAAAAAAAAAAAAAAPAAAAAQAAACMAAAAjAAAAIwAAAB4AAAAAAAAAZAAAAGQAAAAAAAAAZAAAAGQAAAAVAAAAYAAAAAAAAAAAAAAADwAAACADAAAAAAAAAAAAAAEAAACgMgAAVgcAAKr4//8BAAAAf39/AAEAAABkAAAAAAAAABQAAABAHwAAAAAAACYAAAAAAAAAwOD//wAAAAAmAAAAZAAAABYAAABMAAAAAAAAAAAAAAAEAAAAAAAAAAEAAADn5uYKAAAAACgAAAAoAAAAZAAAAGQAAAAAAAAAzMzMAAAAAABQAAAAUAAAAGQAAABkAAAAAAAAABcAAAAUAAAAAAAAAAAAAAD/fwAA/38AAAAAAAAJAAAABAAAAP////8eAAAAaAAAAAAAAAAAAAAAAAAAAAAAAAAAAAAAECcAABAnAAAAAAAAAAAAAAAAAAAAAAAAAAAAAAAAAAAAAAAAAAAAABQAAAAAAAAAwMD/AAAAAABkAAAAMgAAAAAAAABkAAAAAAAAAH9/fwAKAAAAIgAAABgAAAAAAAAAAAAAAAAAAAAAAAAAAAAAAAAAAAAkAAAAJAAAAAAAAAAHAAAAAAAAAAAAAAAAAAAAAAAAAAAAAAAAAAAAf39/ACUAAABYAAAAAAAAAAAAAAAAAAAAAAAAAAAAAAAAAAAAAAAAAAAAAAAAAAAAAAAAAAAAAAA/AAAAAAAAAKCGAQAAAAAAAAAAAAAAAAAMAAAAAQAAAAAAAAAAAAAAAAAAAB8AAABUAAAARHLEBf///wEAAAAAAAAAAAAAAAAAAAAAAAAAAAAAAAAAAAAAAAAAAAAAAAB/f38A5+bmA8zMzADAwP8Af39/AAAAAAAAAAAAAAAAAAAAAAAAAAAAIQAAABgAAAAUAAAAYAMAAEALAADARQAA0BQAABAAAAAmAAAACAAAAP//////////MAAAABQAAAAAAAAAAAD//wAAAQAAAP//AAABAA=="/>
               </a:ext>
             </a:extLst>
           </p:cNvSpPr>
@@ -3335,7 +3335,7 @@
           <p:cNvSpPr>
             <a:extLst>
               <a:ext uri="smNativeData">
-                <pr:smNativeData xmlns:pr="smNativeData" xmlns="smNativeData" val="SMDATA_16_kRU2ahMAAAAlAAAAZAAAAA0AAAAAkAAAAEgAAACQAAAASAAAAAAAAAABAAAAAAAAAAEAAABQAAAAAAAAAAAA4D8AAAAAAADgPwAAAAAAAOA/AAAAAAAA4D8AAAAAAADgPwAAAAAAAOA/AAAAAAAA4D8AAAAAAADgPwAAAAAAAOA/AAAAAAAA4D8CAAAAjAAAAAAAAAAAAAAARHLEDP///wgAAAAAAAAAAAAAAAAAAAAAAAAAAAAAAAAAAAAAZAAAAAEAAABAAAAAAAAAAAAAAAAAAAAAAAAAAAAAAAAAAAAAAAAAAAAAAAAAAAAAAAAAAAAAAAAAAAAAAAAAAAAAAAAAAAAAAAAAAAAAAAAAAAAAAAAAAAAAAAAAAAAAFAAAADwAAAAAAAAAAAAAAAAAAAAPAAAAAQAAACMAAAAjAAAAIwAAAB4AAAAAAAAAZAAAAGQAAAAAAAAAZAAAAGQAAAAVAAAAYAAAAAAAAAAAAAAADwAAACADAAAAAAAAAAAAAAEAAACgMgAAVgcAAKr4//8BAAAAf39/AAEAAABkAAAAAAAAABQAAABAHwAAAAAAACYAAAAAAAAAwOD//wAAAAAmAAAAZAAAABYAAABMAAAAAAAAAAAAAAAEAAAAAAAAAAEAAADn5uYKAAAAACgAAAAoAAAAZAAAAGQAAAAAAAAAzMzMAAAAAABQAAAAUAAAAGQAAABkAAAAAAAAABcAAAAUAAAAAAAAAAAAAAD/fwAA/38AAAAAAAAJAAAABAAAAFCMt/8eAAAAaAAAAAAAAAAAAAAAAAAAAAAAAAAAAAAAECcAABAnAAAAAAAAAAAAAAAAAAAAAAAAAAAAAAAAAAAAAAAAAAAAABQAAAAAAAAAwMD/AAAAAABkAAAAMgAAAAAAAABkAAAAAAAAAH9/fwAKAAAAIgAAABgAAAAAAAAAAAAAAAAAAAAAAAAAAAAAAAAAAAAkAAAAJAAAAAAAAAAHAAAAAAAAAAAAAAAAAAAAAAAAAAAAAAAAAAAAf39/ACUAAABYAAAAAAAAAAAAAAAAAAAAAAAAAAAAAAAAAAAAAAAAAAAAAAAAAAAAAAAAAAAAAAA/AAAAAAAAAKCGAQAAAAAAAAAAAAAAAAAMAAAAAQAAAAAAAAAAAAAAAAAAAB8AAABUAAAARHLEBf///wEAAAAAAAAAAAAAAAAAAAAAAAAAAAAAAAAAAAAAAAAAAAAAAAB/f38A5+bmA8zMzADAwP8Af39/AAAAAAAAAAAAAAAAAAAAAAAAAAAAIQAAABgAAAAUAAAAYAMAAGAVAABAQQAAUBkAABAAAAAmAAAACAAAAP//////////MAAAABQAAAAAAAAAAAD//wAAAQAAAP//AAABAA=="/>
+                <pr:smNativeData xmlns:pr="smNativeData" xmlns="smNativeData" val="SMDATA_16_V2g2ahMAAAAlAAAAZAAAAA0AAAAAkAAAAEgAAACQAAAASAAAAAAAAAABAAAAAAAAAAEAAABQAAAAAAAAAAAA4D8AAAAAAADgPwAAAAAAAOA/AAAAAAAA4D8AAAAAAADgPwAAAAAAAOA/AAAAAAAA4D8AAAAAAADgPwAAAAAAAOA/AAAAAAAA4D8CAAAAjAAAAAAAAAAAAAAARHLEDP///wgAAAAAAAAAAAAAAAAAAAAAAAAAAAAAAAAAAAAAZAAAAAEAAABAAAAAAAAAAAAAAAAAAAAAAAAAAAAAAAAAAAAAAAAAAAAAAAAAAAAAAAAAAAAAAAAAAAAAAAAAAAAAAAAAAAAAAAAAAAAAAAAAAAAAAAAAAAAAAAAAAAAAFAAAADwAAAAAAAAAAAAAAAAAAAAPAAAAAQAAACMAAAAjAAAAIwAAAB4AAAAAAAAAZAAAAGQAAAAAAAAAZAAAAGQAAAAVAAAAYAAAAAAAAAAAAAAADwAAACADAAAAAAAAAAAAAAEAAACgMgAAVgcAAKr4//8BAAAAf39/AAEAAABkAAAAAAAAABQAAABAHwAAAAAAACYAAAAAAAAAwOD//wAAAAAmAAAAZAAAABYAAABMAAAAAAAAAAAAAAAEAAAAAAAAAAEAAADn5uYKAAAAACgAAAAoAAAAZAAAAGQAAAAAAAAAzMzMAAAAAABQAAAAUAAAAGQAAABkAAAAAAAAABcAAAAUAAAAAAAAAAAAAAD/fwAA/38AAAAAAAAJAAAABAAAAFCMt/8eAAAAaAAAAAAAAAAAAAAAAAAAAAAAAAAAAAAAECcAABAnAAAAAAAAAAAAAAAAAAAAAAAAAAAAAAAAAAAAAAAAAAAAABQAAAAAAAAAwMD/AAAAAABkAAAAMgAAAAAAAABkAAAAAAAAAH9/fwAKAAAAIgAAABgAAAAAAAAAAAAAAAAAAAAAAAAAAAAAAAAAAAAkAAAAJAAAAAAAAAAHAAAAAAAAAAAAAAAAAAAAAAAAAAAAAAAAAAAAf39/ACUAAABYAAAAAAAAAAAAAAAAAAAAAAAAAAAAAAAAAAAAAAAAAAAAAAAAAAAAAAAAAAAAAAA/AAAAAAAAAKCGAQAAAAAAAAAAAAAAAAAMAAAAAQAAAAAAAAAAAAAAAAAAAB8AAABUAAAARHLEBf///wEAAAAAAAAAAAAAAAAAAAAAAAAAAAAAAAAAAAAAAAAAAAAAAAB/f38A5+bmA8zMzADAwP8Af39/AAAAAAAAAAAAAAAAAAAAAAAAAAAAIQAAABgAAAAUAAAAYAMAAGAVAABAQQAAUBkAAAAAAAAmAAAACAAAAP//////////MAAAABQAAAAAAAAAAAD//wAAAQAAAP//AAABAA=="/>
               </a:ext>
             </a:extLst>
           </p:cNvSpPr>
@@ -3371,7 +3371,7 @@
                 <a:ea typeface="Georgia" pitchFamily="0" charset="0"/>
                 <a:cs typeface="Georgia" pitchFamily="0" charset="0"/>
               </a:rPr>
-              <a:t>Localização </a:t>
+              <a:t>Existe </a:t>
             </a:r>
             <a:r>
               <a:rPr lang="en-us" sz="2100" i="1" cap="none">
@@ -3382,7 +3382,7 @@
                 <a:ea typeface="Georgia" pitchFamily="0" charset="0"/>
                 <a:cs typeface="Georgia" pitchFamily="0" charset="0"/>
               </a:rPr>
-              <a:t>ajuda </a:t>
+              <a:t>uma </a:t>
             </a:r>
             <a:r>
               <a:rPr lang="en-us" sz="2100" i="1" cap="none">
@@ -3393,7 +3393,7 @@
                 <a:ea typeface="Georgia" pitchFamily="0" charset="0"/>
                 <a:cs typeface="Georgia" pitchFamily="0" charset="0"/>
               </a:rPr>
-              <a:t>mais </a:t>
+              <a:t>relação </a:t>
             </a:r>
             <a:r>
               <a:rPr lang="en-us" sz="2100" i="1" cap="none">
@@ -3404,7 +3404,7 @@
                 <a:ea typeface="Georgia" pitchFamily="0" charset="0"/>
                 <a:cs typeface="Georgia" pitchFamily="0" charset="0"/>
               </a:rPr>
-              <a:t>quando junto do </a:t>
+              <a:t>entre </a:t>
             </a:r>
             <a:r>
               <a:rPr lang="en-us" sz="2100" i="1" cap="none">
@@ -3415,7 +3415,29 @@
                 <a:ea typeface="Georgia" pitchFamily="0" charset="0"/>
                 <a:cs typeface="Georgia" pitchFamily="0" charset="0"/>
               </a:rPr>
-              <a:t>horário?</a:t>
+              <a:t>localidade, </a:t>
+            </a:r>
+            <a:r>
+              <a:rPr lang="en-us" sz="2100" i="1" cap="none">
+                <a:solidFill>
+                  <a:srgbClr val="F6E2BC"/>
+                </a:solidFill>
+                <a:latin typeface="Georgia" pitchFamily="0" charset="0"/>
+                <a:ea typeface="Georgia" pitchFamily="0" charset="0"/>
+                <a:cs typeface="Georgia" pitchFamily="0" charset="0"/>
+              </a:rPr>
+              <a:t>horário e a </a:t>
+            </a:r>
+            <a:r>
+              <a:rPr lang="en-us" sz="2100" i="1" cap="none">
+                <a:solidFill>
+                  <a:srgbClr val="F6E2BC"/>
+                </a:solidFill>
+                <a:latin typeface="Georgia" pitchFamily="0" charset="0"/>
+                <a:ea typeface="Georgia" pitchFamily="0" charset="0"/>
+                <a:cs typeface="Georgia" pitchFamily="0" charset="0"/>
+              </a:rPr>
+              <a:t>natureza do crime?</a:t>
             </a:r>
             <a:endParaRPr lang="en-us" sz="2100" cap="none"/>
           </a:p>
@@ -3427,7 +3449,7 @@
           <p:cNvSpPr>
             <a:extLst>
               <a:ext uri="smNativeData">
-                <pr:smNativeData xmlns:pr="smNativeData" xmlns="smNativeData" val="SMDATA_16_kRU2ahMAAAAlAAAAZAAAAA0AAAAAkAAAAEgAAACQAAAASAAAAAAAAAABAAAAAAAAAAEAAABQAAAAAAAAAAAA4D8AAAAAAADgPwAAAAAAAOA/AAAAAAAA4D8AAAAAAADgPwAAAAAAAOA/AAAAAAAA4D8AAAAAAADgPwAAAAAAAOA/AAAAAAAA4D8CAAAAjAAAAAAAAAAAAAAARHLEDP///wgAAAAAAAAAAAAAAAAAAAAAAAAAAAAAAAAAAAAAZAAAAAEAAABAAAAAAAAAAAAAAAAAAAAAAAAAAAAAAAAAAAAAAAAAAAAAAAAAAAAAAAAAAAAAAAAAAAAAAAAAAAAAAAAAAAAAAAAAAAAAAAAAAAAAAAAAAAAAAAAAAAAAFAAAADwAAAAAAAAAAAAAAAAAAAAPAAAAAQAAACMAAAAjAAAAIwAAAB4AAAAAAAAAZAAAAGQAAAAAAAAAZAAAAGQAAAAVAAAAYAAAAAAAAAAAAAAADwAAACADAAAAAAAAAAAAAAEAAACgMgAAVgcAAKr4//8BAAAAf39/AAEAAABkAAAAAAAAABQAAABAHwAAAAAAACYAAAAAAAAAwOD//wAAAAAmAAAAZAAAABYAAABMAAAAAAAAAAAAAAAEAAAAAAAAAAEAAADn5uYKAAAAACgAAAAoAAAAZAAAAGQAAAAAAAAAzMzMAAAAAABQAAAAUAAAAGQAAABkAAAAAAAAABcAAAAUAAAAAAAAAAAAAAD/fwAA/38AAAAAAAAJAAAABAAAAP////8eAAAAaAAAAAAAAAAAAAAAAAAAAAAAAAAAAAAAECcAABAnAAAAAAAAAAAAAAAAAAAAAAAAAAAAAAAAAAAAAAAAAAAAABQAAAAAAAAAwMD/AAAAAABkAAAAMgAAAAAAAABkAAAAAAAAAH9/fwAKAAAAIgAAABgAAAAAAAAAAAAAAAAAAAAAAAAAAAAAAAAAAAAkAAAAJAAAAAAAAAAHAAAAAAAAAAAAAAAAAAAAAAAAAAAAAAAAAAAAf39/ACUAAABYAAAAAAAAAAAAAAAAAAAAAAAAAAAAAAAAAAAAAAAAAAAAAAAAAAAAAAAAAAAAAAA/AAAAAAAAAKCGAQAAAAAAAAAAAAAAAAAMAAAAAQAAAAAAAAAAAAAAAAAAAB8AAABUAAAARHLEBf///wEAAAAAAAAAAAAAAAAAAAAAAAAAAAAAAAAAAAAAAAAAAAAAAAB/f38A5+bmA8zMzADAwP8Af39/AAAAAAAAAAAAAAAAAAAAAAAAAAAAIQAAABgAAAAUAAAAYAMAABAgAABAQQAAUCIAABAAAAAmAAAACAAAAP//////////MAAAABQAAAAAAAAAAAD//wAAAQAAAP//AAABAA=="/>
+                <pr:smNativeData xmlns:pr="smNativeData" xmlns="smNativeData" val="SMDATA_16_V2g2ahMAAAAlAAAAZAAAAA0AAAAAkAAAAEgAAACQAAAASAAAAAAAAAABAAAAAAAAAAEAAABQAAAAAAAAAAAA4D8AAAAAAADgPwAAAAAAAOA/AAAAAAAA4D8AAAAAAADgPwAAAAAAAOA/AAAAAAAA4D8AAAAAAADgPwAAAAAAAOA/AAAAAAAA4D8CAAAAjAAAAAAAAAAAAAAARHLEDP///wgAAAAAAAAAAAAAAAAAAAAAAAAAAAAAAAAAAAAAZAAAAAEAAABAAAAAAAAAAAAAAAAAAAAAAAAAAAAAAAAAAAAAAAAAAAAAAAAAAAAAAAAAAAAAAAAAAAAAAAAAAAAAAAAAAAAAAAAAAAAAAAAAAAAAAAAAAAAAAAAAAAAAFAAAADwAAAAAAAAAAAAAAAAAAAAPAAAAAQAAACMAAAAjAAAAIwAAAB4AAAAAAAAAZAAAAGQAAAAAAAAAZAAAAGQAAAAVAAAAYAAAAAAAAAAAAAAADwAAACADAAAAAAAAAAAAAAEAAACgMgAAVgcAAKr4//8BAAAAf39/AAEAAABkAAAAAAAAABQAAABAHwAAAAAAACYAAAAAAAAAwOD//wAAAAAmAAAAZAAAABYAAABMAAAAAAAAAAAAAAAEAAAAAAAAAAEAAADn5uYKAAAAACgAAAAoAAAAZAAAAGQAAAAAAAAAzMzMAAAAAABQAAAAUAAAAGQAAABkAAAAAAAAABcAAAAUAAAAAAAAAAAAAAD/fwAA/38AAAAAAAAJAAAABAAAAP////8eAAAAaAAAAAAAAAAAAAAAAAAAAAAAAAAAAAAAECcAABAnAAAAAAAAAAAAAAAAAAAAAAAAAAAAAAAAAAAAAAAAAAAAABQAAAAAAAAAwMD/AAAAAABkAAAAMgAAAAAAAABkAAAAAAAAAH9/fwAKAAAAIgAAABgAAAAAAAAAAAAAAAAAAAAAAAAAAAAAAAAAAAAkAAAAJAAAAAAAAAAHAAAAAAAAAAAAAAAAAAAAAAAAAAAAAAAAAAAAf39/ACUAAABYAAAAAAAAAAAAAAAAAAAAAAAAAAAAAAAAAAAAAAAAAAAAAAAAAAAAAAAAAAAAAAA/AAAAAAAAAKCGAQAAAAAAAAAAAAAAAAAMAAAAAQAAAAAAAAAAAAAAAAAAAB8AAABUAAAARHLEBf///wEAAAAAAAAAAAAAAAAAAAAAAAAAAAAAAAAAAAAAAAAAAAAAAAB/f38A5+bmA8zMzADAwP8Af39/AAAAAAAAAAAAAAAAAAAAAAAAAAAAIQAAABgAAAAUAAAAYAMAABAgAABAQQAAUCIAABAAAAAmAAAACAAAAP//////////MAAAABQAAAAAAAAAAAD//wAAAQAAAP//AAABAA=="/>
               </a:ext>
             </a:extLst>
           </p:cNvSpPr>
@@ -3512,7 +3534,7 @@
           <p:cNvSpPr>
             <a:extLst>
               <a:ext uri="smNativeData">
-                <pr:smNativeData xmlns:pr="smNativeData" xmlns="smNativeData" val="SMDATA_16_kRU2ahMAAAAlAAAAZAAAAA0AAAAAkAAAAEgAAACQAAAASAAAAAAAAAABAAAAAAAAAAEAAABQAAAAAAAAAAAA4D8AAAAAAADgPwAAAAAAAOA/AAAAAAAA4D8AAAAAAADgPwAAAAAAAOA/AAAAAAAA4D8AAAAAAADgPwAAAAAAAOA/AAAAAAAA4D8CAAAAjAAAAAAAAAAAAAAARHLEDP///wgAAAAAAAAAAAAAAAAAAAAAAAAAAAAAAAAAAAAAZAAAAAEAAABAAAAAAAAAAAAAAAAAAAAAAAAAAAAAAAAAAAAAAAAAAAAAAAAAAAAAAAAAAAAAAAAAAAAAAAAAAAAAAAAAAAAAAAAAAAAAAAAAAAAAAAAAAAAAAAAAAAAAFAAAADwAAAAAAAAAAAAAAAAAAAAPAAAAAQAAACMAAAAjAAAAIwAAAB4AAAAAAAAAZAAAAGQAAAAAAAAAZAAAAGQAAAAVAAAAYAAAAAAAAAAAAAAADwAAACADAAAAAAAAAAAAAAEAAACgMgAAVgcAAKr4//8BAAAAf39/AAEAAABkAAAAAAAAABQAAABAHwAAAAAAACYAAAAAAAAAwOD//wAAAAAmAAAAZAAAABYAAABMAAAAAAAAAAAAAAAEAAAAAAAAAAEAAADn5uYKAAAAACgAAAAoAAAAZAAAAGQAAAAAAAAAzMzMAAAAAABQAAAAUAAAAGQAAABkAAAAAAAAABcAAAAUAAAAAAAAAAAAAAD/fwAA/38AAAAAAAAJAAAABAAAAAAAAAAeAAAAaAAAAAAAAAAAAAAAAAAAAAAAAAAAAAAAECcAABAnAAAAAAAAAAAAAAAAAAAAAAAAAAAAAAAAAAAAAAAAAAAAABQAAAAAAAAAwMD/AAAAAABkAAAAMgAAAAAAAABkAAAAAAAAAH9/fwAKAAAAIgAAABgAAAAAAAAAAAAAAAAAAAAAAAAAAAAAAAAAAAAkAAAAJAAAAAAAAAAHAAAAAAAAAAAAAAAAAAAAAAAAAAAAAAAAAAAAf39/ACUAAABYAAAAAAAAAAAAAAAAAAAAAAAAAAAAAAAAAAAAAAAAAAAAAAAAAAAAAAAAAAAAAAA/AAAAAAAAAKCGAQAAAAAAAAAAAAAAAAAMAAAAAQAAAAAAAAAAAAAAAAAAAB8AAABUAAAARHLEBf///wEAAAAAAAAAAAAAAAAAAAAAAAAAAAAAAAAAAAAAAAAAAAAAAAB/f38A5+bmA8zMzADAwP8Af39/AAAAAAAAAAAAAAAAAAAAAAAAAAAAIQAAABgAAAAUAAAAYAMAAJAkAAAQRAAA0CYAABAAAAAmAAAACAAAAP//////////MAAAABQAAAAAAAAAAAD//wAAAQAAAP//AAABAA=="/>
+                <pr:smNativeData xmlns:pr="smNativeData" xmlns="smNativeData" val="SMDATA_16_V2g2ahMAAAAlAAAAZAAAAA0AAAAAkAAAAEgAAACQAAAASAAAAAAAAAABAAAAAAAAAAEAAABQAAAAAAAAAAAA4D8AAAAAAADgPwAAAAAAAOA/AAAAAAAA4D8AAAAAAADgPwAAAAAAAOA/AAAAAAAA4D8AAAAAAADgPwAAAAAAAOA/AAAAAAAA4D8CAAAAjAAAAAAAAAAAAAAARHLEDP///wgAAAAAAAAAAAAAAAAAAAAAAAAAAAAAAAAAAAAAZAAAAAEAAABAAAAAAAAAAAAAAAAAAAAAAAAAAAAAAAAAAAAAAAAAAAAAAAAAAAAAAAAAAAAAAAAAAAAAAAAAAAAAAAAAAAAAAAAAAAAAAAAAAAAAAAAAAAAAAAAAAAAAFAAAADwAAAAAAAAAAAAAAAAAAAAPAAAAAQAAACMAAAAjAAAAIwAAAB4AAAAAAAAAZAAAAGQAAAAAAAAAZAAAAGQAAAAVAAAAYAAAAAAAAAAAAAAADwAAACADAAAAAAAAAAAAAAEAAACgMgAAVgcAAKr4//8BAAAAf39/AAEAAABkAAAAAAAAABQAAABAHwAAAAAAACYAAAAAAAAAwOD//wAAAAAmAAAAZAAAABYAAABMAAAAAAAAAAAAAAAEAAAAAAAAAAEAAADn5uYKAAAAACgAAAAoAAAAZAAAAGQAAAAAAAAAzMzMAAAAAABQAAAAUAAAAGQAAABkAAAAAAAAABcAAAAUAAAAAAAAAAAAAAD/fwAA/38AAAAAAAAJAAAABAAAAAAAAAAeAAAAaAAAAAAAAAAAAAAAAAAAAAAAAAAAAAAAECcAABAnAAAAAAAAAAAAAAAAAAAAAAAAAAAAAAAAAAAAAAAAAAAAABQAAAAAAAAAwMD/AAAAAABkAAAAMgAAAAAAAABkAAAAAAAAAH9/fwAKAAAAIgAAABgAAAAAAAAAAAAAAAAAAAAAAAAAAAAAAAAAAAAkAAAAJAAAAAAAAAAHAAAAAAAAAAAAAAAAAAAAAAAAAAAAAAAAAAAAf39/ACUAAABYAAAAAAAAAAAAAAAAAAAAAAAAAAAAAAAAAAAAAAAAAAAAAAAAAAAAAAAAAAAAAAA/AAAAAAAAAKCGAQAAAAAAAAAAAAAAAAAMAAAAAQAAAAAAAAAAAAAAAAAAAB8AAABUAAAARHLEBf///wEAAAAAAAAAAAAAAAAAAAAAAAAAAAAAAAAAAAAAAAAAAAAAAAB/f38A5+bmA8zMzADAwP8Af39/AAAAAAAAAAAAAAAAAAAAAAAAAAAAIQAAABgAAAAUAAAAYAMAAJAkAAAQRAAA0CYAAAAAAAAmAAAACAAAAP//////////MAAAABQAAAAAAAAAAAD//wAAAQAAAP//AAABAA=="/>
               </a:ext>
             </a:extLst>
           </p:cNvSpPr>
@@ -3545,9 +3567,21 @@
                   <a:srgbClr val="5B7691"/>
                 </a:solidFill>
               </a:rPr>
-              <a:t>Apresentadores: ______________   ·   ______________   ·   ______________</a:t>
-            </a:r>
-            <a:endParaRPr lang="en-us" sz="1200" cap="none"/>
+              <a:t>Apresentadores:   Anderson   ·   </a:t>
+            </a:r>
+            <a:r>
+              <a:rPr lang="en-us" sz="1200" cap="none">
+                <a:solidFill>
+                  <a:srgbClr val="5B7691"/>
+                </a:solidFill>
+              </a:rPr>
+              <a:t>Flávio   ·  Roberto</a:t>
+            </a:r>
+            <a:endParaRPr lang="en-us" sz="1200" cap="none">
+              <a:solidFill>
+                <a:srgbClr val="5B7691"/>
+              </a:solidFill>
+            </a:endParaRPr>
           </a:p>
         </p:txBody>
       </p:sp>
@@ -3597,7 +3631,7 @@
           <p:cNvSpPr>
             <a:extLst>
               <a:ext uri="smNativeData">
-                <pr:smNativeData xmlns:pr="smNativeData" xmlns="smNativeData" val="SMDATA_16_kRU2ahMAAAAlAAAAZAAAAA0AAAAAkAAAAEgAAACQAAAASAAAAAAAAAABAAAAAAAAAAEAAABQAAAAAAAAAAAA4D8AAAAAAADgPwAAAAAAAOA/AAAAAAAA4D8AAAAAAADgPwAAAAAAAOA/AAAAAAAA4D8AAAAAAADgPwAAAAAAAOA/AAAAAAAA4D8CAAAAjAAAAAAAAAAAAAAARHLEDP///wgAAAAAAAAAAAAAAAAAAAAAAAAAAAAAAAAAAAAAZAAAAAEAAABAAAAAAAAAAAAAAAAAAAAAAAAAAAAAAAAAAAAAAAAAAAAAAAAAAAAAAAAAAAAAAAAAAAAAAAAAAAAAAAAAAAAAAAAAAAAAAAAAAAAAAAAAAAAAAAAAAAAAFAAAADwAAAAAAAAAAAAAAAAAAAAPAAAAAQAAACMAAAAjAAAAIwAAAB4AAAAAAAAAZAAAAGQAAAAAAAAAZAAAAGQAAAAVAAAAYAAAAAAAAAAAAAAADwAAACADAAAAAAAAAAAAAAEAAACgMgAAVgcAAKr4//8BAAAAf39/AAEAAABkAAAAAAAAABQAAABAHwAAAAAAACYAAAAAAAAAwOD//wAAAAAmAAAAZAAAABYAAABMAAAAAAAAAAAAAAAEAAAAAAAAAAEAAADn5uYKAAAAACgAAAAoAAAAZAAAAGQAAAAAAAAAzMzMAAAAAABQAAAAUAAAAGQAAABkAAAAAAAAABcAAAAUAAAAAAAAAAAAAAD/fwAA/38AAAAAAAAJAAAABAAAAKQIAAAeAAAAaAAAAAAAAAAAAAAAAAAAAAAAAAAAAAAAECcAABAnAAAAAAAAAAAAAAAAAAAAAAAAAAAAAAAAAAAAAAAAAAAAABQAAAAAAAAAwMD/AAAAAABkAAAAMgAAAAAAAABkAAAAAAAAAH9/fwAKAAAAIgAAABgAAAAAAAAAAAAAAAAAAAAAAAAAAAAAAAAAAAAkAAAAJAAAAAAAAAAHAAAAAAAAAAAAAAAAAAAAAAAAAAAAAAAAAAAAf39/ACUAAABYAAAAAAAAAAAAAAAAAAAAAAAAAAAAAAAAAAAAAAAAAAAAAAAAAAAAAAAAAAAAAAA/AAAAAAAAAKCGAQAAAAAAAAAAAAAAAAAMAAAAAQAAAAAAAAAAAAAAAAAAAB8AAABUAAAARHLEBf///wEAAAAAAAAAAAAAAAAAAAAAAAAAAAAAAAAAAAAAAAAAAAAAAAB/f38A5+bmA8zMzADAwP8Af39/AAAAAAAAAAAAAAAAAAAAAAAAAAAAIQAAABgAAAAUAAAAYAMAACABAACgRwAA0AIAABAAAAAmAAAACAAAAP//////////MAAAABQAAAAAAAAAAAD//wAAAQAAAP//AAABAA=="/>
+                <pr:smNativeData xmlns:pr="smNativeData" xmlns="smNativeData" val="SMDATA_16_V2g2ahMAAAAlAAAAZAAAAA0AAAAAkAAAAEgAAACQAAAASAAAAAAAAAABAAAAAAAAAAEAAABQAAAAAAAAAAAA4D8AAAAAAADgPwAAAAAAAOA/AAAAAAAA4D8AAAAAAADgPwAAAAAAAOA/AAAAAAAA4D8AAAAAAADgPwAAAAAAAOA/AAAAAAAA4D8CAAAAjAAAAAAAAAAAAAAARHLEDP///wgAAAAAAAAAAAAAAAAAAAAAAAAAAAAAAAAAAAAAZAAAAAEAAABAAAAAAAAAAAAAAAAAAAAAAAAAAAAAAAAAAAAAAAAAAAAAAAAAAAAAAAAAAAAAAAAAAAAAAAAAAAAAAAAAAAAAAAAAAAAAAAAAAAAAAAAAAAAAAAAAAAAAFAAAADwAAAAAAAAAAAAAAAAAAAAPAAAAAQAAACMAAAAjAAAAIwAAAB4AAAAAAAAAZAAAAGQAAAAAAAAAZAAAAGQAAAAVAAAAYAAAAAAAAAAAAAAADwAAACADAAAAAAAAAAAAAAEAAACgMgAAVgcAAKr4//8BAAAAf39/AAEAAABkAAAAAAAAABQAAABAHwAAAAAAACYAAAAAAAAAwOD//wAAAAAmAAAAZAAAABYAAABMAAAAAAAAAAAAAAAEAAAAAAAAAAEAAADn5uYKAAAAACgAAAAoAAAAZAAAAGQAAAAAAAAAzMzMAAAAAABQAAAAUAAAAGQAAABkAAAAAAAAABcAAAAUAAAAAAAAAAAAAAD/fwAA/38AAAAAAAAJAAAABAAAAKQIAAAeAAAAaAAAAAAAAAAAAAAAAAAAAAAAAAAAAAAAECcAABAnAAAAAAAAAAAAAAAAAAAAAAAAAAAAAAAAAAAAAAAAAAAAABQAAAAAAAAAwMD/AAAAAABkAAAAMgAAAAAAAABkAAAAAAAAAH9/fwAKAAAAIgAAABgAAAAAAAAAAAAAAAAAAAAAAAAAAAAAAAAAAAAkAAAAJAAAAAAAAAAHAAAAAAAAAAAAAAAAAAAAAAAAAAAAAAAAAAAAf39/ACUAAABYAAAAAAAAAAAAAAAAAAAAAAAAAAAAAAAAAAAAAAAAAAAAAAAAAAAAAAAAAAAAAAA/AAAAAAAAAKCGAQAAAAAAAAAAAAAAAAAMAAAAAQAAAAAAAAAAAAAAAAAAAB8AAABUAAAARHLEBf///wEAAAAAAAAAAAAAAAAAAAAAAAAAAAAAAAAAAAAAAAAAAAAAAAB/f38A5+bmA8zMzADAwP8Af39/AAAAAAAAAAAAAAAAAAAAAAAAAAAAIQAAABgAAAAUAAAAYAMAACABAACgRwAA0AIAABAAAAAmAAAACAAAAP//////////MAAAABQAAAAAAAAAAAD//wAAAQAAAP//AAABAA=="/>
               </a:ext>
             </a:extLst>
           </p:cNvSpPr>
@@ -3625,7 +3659,7 @@
               <a:buNone/>
             </a:pPr>
             <a:r>
-              <a:rPr lang="en-us" sz="1200" b="1" cap="none" spc="40">
+              <a:rPr lang="en-us" sz="1200" b="1" cap="none" spc="8">
                 <a:solidFill>
                   <a:srgbClr val="E0A038"/>
                 </a:solidFill>
@@ -3642,7 +3676,7 @@
           <p:cNvSpPr>
             <a:extLst>
               <a:ext uri="smNativeData">
-                <pr:smNativeData xmlns:pr="smNativeData" xmlns="smNativeData" val="SMDATA_16_kRU2ahMAAAAlAAAAZAAAAA0AAAAAkAAAAEgAAACQAAAASAAAAAAAAAABAAAAAAAAAAEAAABQAAAAAAAAAAAA4D8AAAAAAADgPwAAAAAAAOA/AAAAAAAA4D8AAAAAAADgPwAAAAAAAOA/AAAAAAAA4D8AAAAAAADgPwAAAAAAAOA/AAAAAAAA4D8CAAAAjAAAAAAAAAAAAAAARHLEDP///wgAAAAAAAAAAAAAAAAAAAAAAAAAAAAAAAAAAAAAZAAAAAEAAABAAAAAAAAAAAAAAAAAAAAAAAAAAAAAAAAAAAAAAAAAAAAAAAAAAAAAAAAAAAAAAAAAAAAAAAAAAAAAAAAAAAAAAAAAAAAAAAAAAAAAAAAAAAAAAAAAAAAAFAAAADwAAAAAAAAAAAAAAAAAAAAPAAAAAQAAACMAAAAjAAAAIwAAAB4AAAAAAAAAZAAAAGQAAAAAAAAAZAAAAGQAAAAVAAAAYAAAAAAAAAAAAAAADwAAACADAAAAAAAAAAAAAAEAAACgMgAAVgcAAKr4//8BAAAAf39/AAEAAABkAAAAAAAAABQAAABAHwAAAAAAACYAAAAAAAAAwOD//wAAAAAmAAAAZAAAABYAAABMAAAAAAAAAAAAAAAEAAAAAAAAAAEAAADn5uYKAAAAACgAAAAoAAAAZAAAAGQAAAAAAAAAzMzMAAAAAABQAAAAUAAAAGQAAABkAAAAAAAAABcAAAAUAAAAAAAAAAAAAAD/fwAA/38AAAAAAAAJAAAABAAAACDpVDweAAAAaAAAAAAAAAAAAAAAAAAAAAAAAAAAAAAAECcAABAnAAAAAAAAAAAAAAAAAAAAAAAAAAAAAAAAAAAAAAAAAAAAABQAAAAAAAAAwMD/AAAAAABkAAAAMgAAAAAAAABkAAAAAAAAAH9/fwAKAAAAIgAAABgAAAAAAAAAAAAAAAAAAAAAAAAAAAAAAAAAAAAkAAAAJAAAAAAAAAAHAAAAAAAAAAAAAAAAAAAAAAAAAAAAAAAAAAAAf39/ACUAAABYAAAAAAAAAAAAAAAAAAAAAAAAAAAAAAAAAAAAAAAAAAAAAAAAAAAAAAAAAAAAAAA/AAAAAAAAAKCGAQAAAAAAAAAAAAAAAAAMAAAAAQAAAAAAAAAAAAAAAAAAAB8AAABUAAAARHLEBf///wEAAAAAAAAAAAAAAAAAAAAAAAAAAAAAAAAAAAAAAAAAAAAAAAB/f38A5+bmA8zMzADAwP8Af39/AAAAAAAAAAAAAAAAAAAAAAAAAAAAIQAAABgAAAAUAAAAYAMAAF0CAACgRwAA3QYAABAAAAAmAAAACAAAAP//////////MAAAABQAAAAAAAAAAAD//wAAAQAAAP//AAABAA=="/>
+                <pr:smNativeData xmlns:pr="smNativeData" xmlns="smNativeData" val="SMDATA_16_V2g2ahMAAAAlAAAAZAAAAA0AAAAAkAAAAEgAAACQAAAASAAAAAAAAAABAAAAAAAAAAEAAABQAAAAAAAAAAAA4D8AAAAAAADgPwAAAAAAAOA/AAAAAAAA4D8AAAAAAADgPwAAAAAAAOA/AAAAAAAA4D8AAAAAAADgPwAAAAAAAOA/AAAAAAAA4D8CAAAAjAAAAAAAAAAAAAAARHLEDP///wgAAAAAAAAAAAAAAAAAAAAAAAAAAAAAAAAAAAAAZAAAAAEAAABAAAAAAAAAAAAAAAAAAAAAAAAAAAAAAAAAAAAAAAAAAAAAAAAAAAAAAAAAAAAAAAAAAAAAAAAAAAAAAAAAAAAAAAAAAAAAAAAAAAAAAAAAAAAAAAAAAAAAFAAAADwAAAAAAAAAAAAAAAAAAAAPAAAAAQAAACMAAAAjAAAAIwAAAB4AAAAAAAAAZAAAAGQAAAAAAAAAZAAAAGQAAAAVAAAAYAAAAAAAAAAAAAAADwAAACADAAAAAAAAAAAAAAEAAACgMgAAVgcAAKr4//8BAAAAf39/AAEAAABkAAAAAAAAABQAAABAHwAAAAAAACYAAAAAAAAAwOD//wAAAAAmAAAAZAAAABYAAABMAAAAAAAAAAAAAAAEAAAAAAAAAAEAAADn5uYKAAAAACgAAAAoAAAAZAAAAGQAAAAAAAAAzMzMAAAAAABQAAAAUAAAAGQAAABkAAAAAAAAABcAAAAUAAAAAAAAAAAAAAD/fwAA/38AAAAAAAAJAAAABAAAACDpVDweAAAAaAAAAAAAAAAAAAAAAAAAAAAAAAAAAAAAECcAABAnAAAAAAAAAAAAAAAAAAAAAAAAAAAAAAAAAAAAAAAAAAAAABQAAAAAAAAAwMD/AAAAAABkAAAAMgAAAAAAAABkAAAAAAAAAH9/fwAKAAAAIgAAABgAAAAAAAAAAAAAAAAAAAAAAAAAAAAAAAAAAAAkAAAAJAAAAAAAAAAHAAAAAAAAAAAAAAAAAAAAAAAAAAAAAAAAAAAAf39/ACUAAABYAAAAAAAAAAAAAAAAAAAAAAAAAAAAAAAAAAAAAAAAAAAAAAAAAAAAAAAAAAAAAAA/AAAAAAAAAKCGAQAAAAAAAAAAAAAAAAAMAAAAAQAAAAAAAAAAAAAAAAAAAB8AAABUAAAARHLEBf///wEAAAAAAAAAAAAAAAAAAAAAAAAAAAAAAAAAAAAAAAAAAAAAAAB/f38A5+bmA8zMzADAwP8Af39/AAAAAAAAAAAAAAAAAAAAAAAAAAAAIQAAABgAAAAUAAAAYAMAAF0CAACgRwAA3QYAABAAAAAmAAAACAAAAP//////////MAAAABQAAAAAAAAAAAD//wAAAQAAAP//AAABAA=="/>
               </a:ext>
             </a:extLst>
           </p:cNvSpPr>
@@ -3701,7 +3735,7 @@
           <p:cNvSpPr>
             <a:extLst>
               <a:ext uri="smNativeData">
-                <pr:smNativeData xmlns:pr="smNativeData" xmlns="smNativeData" val="SMDATA_16_kRU2ahMAAAAlAAAAZQAAAA0AAAAAkAAAAEgAAACQAAAASAAAAAAAAAAAAAAAAAAAAAEAAABQAAAA4q/JGvUQ0T8AAAAAAADwvwAAAAAAAOA/AAAAAAAA4D8AAAAAAADgPwAAAAAAAOA/AAAAAAAA4D8AAAAAAADgPwAAAAAAAOA/AAAAAAAA4D8CAAAAjAAAAAEAAAAAAAAA7/P4AP///wgAAAAAAAAAAAAAAAAAAAAAAAAAAAAAAAAAAAAAeAAAAAEAAABAAAAAAAAAAAAAAABaAAAAAAAAAAAAAAAAAAAAAAAAAAAAAAAAAAAAAAAAAAAAAAAAAAAAAAAAAAAAAAAAAAAAAAAAAAAAAAAAAAAAAAAAAAAAAAAAAAAAFAAAADwAAAABAAAAAAAAANjg6AAUAAAAAQAAACMAAAAjAAAAIwAAAB4AAAAAAAAAZAAAAGQAAAAAAAAAZAAAAGQAAAAVAAAAYAAAAAAAAAAAAAAADwAAACADAAAAAAAAAAAAAAEAAACgMgAAVgcAAKr4//8BAAAAf39/AAEAAABkAAAAAAAAABQAAABAHwAAAAAAACYAAAAAAAAAwOD//wAAAAAmAAAAZAAAABYAAABMAAAAAQAAAAAAAAAGAAAAAAAAAAEAAAC5xNAAPAAAAAAAAAAoAAAAZAAAAGQAAAAAAAAAy8vLADwAAAAAAAAAKAAAAGQAAABkAAAAAAAAABcAAAAUAAAAAAAAAAAAAAD/fwAA/38AAAAAAAAJAAAABAAAAAAAAAAeAAAAaAAAAAAAAAAAAAAAAAAAAAAAAAAAAAAAECcAABAnAAAAAAAAAAAAAAAAAAAAAAAAAAAAAAAAAAAAAAAAAAAAAHgAAAAAAAAAwMD/AAAAAAAAAAAAAAAAAAAAAABkAAAAAAAAAH9/fwAKAAAAIgAAABgAAAAAAAAAAAAAAAAAAAAAAAAAAAAAAAAAAAAkAAAAJAAAAAAAAAAHAAAAAAAAAAAAAAAAAAAAAAAAAAAAAAAAAAAAf39/ACUAAABYAAAAAAAAAAAAAAAAAAAAAAAAAAAAAAAAAAAAAAAAAAAAAAAAAAAAAAAAAAAAAAA/AAAAAAAAAKCGAQAAAAAAAAAAAAAAAAAMAAAAAQAAAAAAAAAAAAAAAAAAAB8AAABUAAAA7/P4AP///wEAAAAAAAAAAAAAAAAAAAAAAAAAAAAAAAAAAAAAAAAAANjg6AB/f38AucTQAMvLywDAwP8Af39/AAAAAAAAAAAAAAAAAAAAAAAAAAAAIQAAABgAAAAUAAAAYAMAACAKAADADwAAgA0AABAAAAAmAAAACAAAAP//////////MAAAABQAAAAAAAAAAAD//wAAAQAAAP//AAABAA=="/>
+                <pr:smNativeData xmlns:pr="smNativeData" xmlns="smNativeData" val="SMDATA_16_V2g2ahMAAAAlAAAAZQAAAA0AAAAAkAAAAEgAAACQAAAASAAAAAAAAAAAAAAAAAAAAAEAAABQAAAA4q/JGvUQ0T8AAAAAAAAAAAAAAAAAAOA/AAAAAAAA4D8AAAAAAADgPwAAAAAAAOA/AAAAAAAA4D8AAAAAAADgPwAAAAAAAOA/AAAAAAAA4D8CAAAAjAAAAAEAAAAAAAAA7/P4AP///wgAAAAAAAAAAAAAAAAAAAAAAAAAAAAAAAAAAAAAeAAAAAEAAABAAAAAAAAAAAAAAABaAAAAAAAAAAAAAAAAAAAAAAAAAAAAAAAAAAAAAAAAAAAAAAAAAAAAAAAAAAAAAAAAAAAAAAAAAAAAAAAAAAAAAAAAAAAAAAAAAAAAFAAAADwAAAABAAAAAAAAANjg6AAUAAAAAQAAACMAAAAjAAAAIwAAAB4AAAAAAAAAZAAAAGQAAAAAAAAAZAAAAGQAAAAVAAAAYAAAAAAAAAAAAAAADwAAACADAAAAAAAAAAAAAAEAAACgMgAAVgcAAKr4//8BAAAAf39/AAEAAABkAAAAAAAAABQAAABAHwAAAAAAACYAAAAAAAAAwOD//wAAAAAmAAAAZAAAABYAAABMAAAAAQAAAAAAAAAGAAAAAAAAAAEAAAC5xNAAPAAAAAAAAAAoAAAAZAAAAGQAAAAAAAAAy8vLADwAAAAAAAAAKAAAAGQAAABkAAAAAAAAABcAAAAUAAAAAAAAAAAAAAD/fwAA/38AAAAAAAAJAAAABAAAAAAAAAAeAAAAaAAAAAAAAAAAAAAAAAAAAAAAAAAAAAAAECcAABAnAAAAAAAAAAAAAAAAAAAAAAAAAAAAAAAAAAAAAAAAAAAAAHgAAAAAAAAAwMD/AAAAAAAAAAAAAAAAAAAAAABkAAAAAAAAAH9/fwAKAAAAIgAAABgAAAAAAAAAAAAAAAAAAAAAAAAAAAAAAAAAAAAkAAAAJAAAAAAAAAAHAAAAAAAAAAAAAAAAAAAAAAAAAAAAAAAAAAAAf39/ACUAAABYAAAAAAAAAAAAAAAAAAAAAAAAAAAAAAAAAAAAAAAAAAAAAAAAAAAAAAAAAAAAAAA/AAAAAAAAAKCGAQAAAAAAAAAAAAAAAAAMAAAAAQAAAAAAAAAAAAAAAAAAAB8AAABUAAAA7/P4AP///wEAAAAAAAAAAAAAAAAAAAAAAAAAAAAAAAAAAAAAAAAAANjg6AB/f38AucTQAMvLywDAwP8Af39/AAAAAAAAAAAAAAAAAAAAAAAAAAAAIQAAABgAAAAUAAAAYAMAACAKAADADwAAgA0AABAAAAAmAAAACAAAAP//////////MAAAABQAAAAAAAAAAAD//wAAAQAAAP//AAABAA=="/>
               </a:ext>
             </a:extLst>
           </p:cNvSpPr>
@@ -3743,7 +3777,7 @@
           <p:cNvSpPr>
             <a:extLst>
               <a:ext uri="smNativeData">
-                <pr:smNativeData xmlns:pr="smNativeData" xmlns="smNativeData" val="SMDATA_16_kRU2ahMAAAAlAAAAZAAAAA0AAAAAAAAAAAAAAAAAAAAAAAAAAAAAAAABAAAAAAAAAAEAAABQAAAAAAAAAAAA4D8AAAAAAADgPwAAAAAAAOA/AAAAAAAA4D8AAAAAAADgPwAAAAAAAOA/AAAAAAAA4D8AAAAAAADgPwAAAAAAAOA/AAAAAAAA4D8CAAAAjAAAAAAAAAAAAAAARHLEDP///wgAAAAAAAAAAAAAAAAAAAAAAAAAAAAAAAAAAAAAZAAAAAEAAABAAAAAAAAAAAAAAAAAAAAAAAAAAAAAAAAAAAAAAAAAAAAAAAAAAAAAAAAAAAAAAAAAAAAAAAAAAAAAAAAAAAAAAAAAAAAAAAAAAAAAAAAAAAAAAAAAAAAAFAAAADwAAAAAAAAAAAAAAAAAAAAPAAAAAQAAACMAAAAjAAAAIwAAAB4AAAAAAAAAZAAAAGQAAAAAAAAAZAAAAGQAAAAVAAAAYAAAAAAAAAAAAAAADwAAACADAAAAAAAAAAAAAAEAAACgMgAAVgcAAKr4//8BAAAAf39/AAEAAABkAAAAAAAAABQAAABAHwAAAAAAACYAAAAAAAAAwOD//wAAAAAmAAAAZAAAABYAAABMAAAAAAAAAAAAAAAEAAAAAAAAAAEAAADn5uYKAAAAACgAAAAoAAAAZAAAAGQAAAAAAAAAzMzMAAAAAABQAAAAUAAAAGQAAABkAAAAAAAAABcAAAAUAAAAAAAAAAAAAAD/fwAA/38AAAAAAAAJAAAABAAAAFUJAAAeAAAAaAAAAAAAAAAAAAAAAAAAAAAAAAAAAAAAECcAABAnAAAAAAAAAAAAAAAAAAAAAAAAAAAAAAAAAAAAAAAAAAAAABQAAAAAAAAAwMD/AAAAAABkAAAAMgAAAAAAAABkAAAAAAAAAH9/fwAKAAAAIgAAABgAAAAAAAAAAAAAAAAAAAAAAAAAAAAAAAAAAAAkAAAAJAAAAAAAAAAHAAAAAAAAAAAAAAAAAAAAAAAAAAAAAAAAAAAAf39/ACUAAABYAAAAAAAAAAAAAAAAAAAAAAAAAAAAAAAAAAAAAAAAAAAAAAAAAAAAAAAAAAAAAAA/AAAAAAAAAKCGAQAAAAAAAAAAAAAAAAAMAAAAAQAAAAAAAAAAAAAAAAAAAB8AAABUAAAARHLEBf///wEAAAAAAAAAAAAAAAAAAAAAAAAAAAAAAAAAAAAAAAAAAAAAAAB/f38A5+bmA8zMzADAwP8Af39/AAAAAAAAAAAAAAAAAAAAAAAAAAAAIQAAABgAAAAUAAAAYAMAACAKAADADwAAgA0AABAAAAAmAAAACAAAAP//////////MAAAABQAAAAAAAAAAAD//wAAAQAAAP//AAABAA=="/>
+                <pr:smNativeData xmlns:pr="smNativeData" xmlns="smNativeData" val="SMDATA_16_V2g2ahMAAAAlAAAAZAAAAA0AAAAAAAAAAAAAAAAAAAAAAAAAAAAAAAABAAAAAAAAAAEAAABQAAAAAAAAAAAA4D8AAAAAAADgPwAAAAAAAOA/AAAAAAAA4D8AAAAAAADgPwAAAAAAAOA/AAAAAAAA4D8AAAAAAADgPwAAAAAAAOA/AAAAAAAA4D8CAAAAjAAAAAAAAAAAAAAARHLEDP///wgAAAAAAAAAAAAAAAAAAAAAAAAAAAAAAAAAAAAAZAAAAAEAAABAAAAAAAAAAAAAAAAAAAAAAAAAAAAAAAAAAAAAAAAAAAAAAAAAAAAAAAAAAAAAAAAAAAAAAAAAAAAAAAAAAAAAAAAAAAAAAAAAAAAAAAAAAAAAAAAAAAAAFAAAADwAAAAAAAAAAAAAAAAAAAAPAAAAAQAAACMAAAAjAAAAIwAAAB4AAAAAAAAAZAAAAGQAAAAAAAAAZAAAAGQAAAAVAAAAYAAAAAAAAAAAAAAADwAAACADAAAAAAAAAAAAAAEAAACgMgAAVgcAAKr4//8BAAAAf39/AAEAAABkAAAAAAAAABQAAABAHwAAAAAAACYAAAAAAAAAwOD//wAAAAAmAAAAZAAAABYAAABMAAAAAAAAAAAAAAAEAAAAAAAAAAEAAADn5uYKAAAAACgAAAAoAAAAZAAAAGQAAAAAAAAAzMzMAAAAAABQAAAAUAAAAGQAAABkAAAAAAAAABcAAAAUAAAAAAAAAAAAAAD/fwAA/38AAAAAAAAJAAAABAAAAFUJAAAeAAAAaAAAAAAAAAAAAAAAAAAAAAAAAAAAAAAAECcAABAnAAAAAAAAAAAAAAAAAAAAAAAAAAAAAAAAAAAAAAAAAAAAABQAAAAAAAAAwMD/AAAAAABkAAAAMgAAAAAAAABkAAAAAAAAAH9/fwAKAAAAIgAAABgAAAAAAAAAAAAAAAAAAAAAAAAAAAAAAAAAAAAkAAAAJAAAAAAAAAAHAAAAAAAAAAAAAAAAAAAAAAAAAAAAAAAAAAAAf39/ACUAAABYAAAAAAAAAAAAAAAAAAAAAAAAAAAAAAAAAAAAAAAAAAAAAAAAAAAAAAAAAAAAAAA/AAAAAAAAAKCGAQAAAAAAAAAAAAAAAAAMAAAAAQAAAAAAAAAAAAAAAAAAAB8AAABUAAAARHLEBf///wEAAAAAAAAAAAAAAAAAAAAAAAAAAAAAAAAAAAAAAAAAAAAAAAB/f38A5+bmA8zMzADAwP8Af39/AAAAAAAAAAAAAAAAAAAAAAAAAAAAIQAAABgAAAAUAAAAYAMAACAKAADADwAAgA0AABAAAAAmAAAACAAAAP//////////MAAAABQAAAAAAAAAAAD//wAAAQAAAP//AAABAA=="/>
               </a:ext>
             </a:extLst>
           </p:cNvSpPr>
@@ -3791,7 +3825,7 @@
           <p:cNvSpPr>
             <a:extLst>
               <a:ext uri="smNativeData">
-                <pr:smNativeData xmlns:pr="smNativeData" xmlns="smNativeData" val="SMDATA_16_kRU2ahMAAAAlAAAAZQAAAA0AAAAAkAAAAEgAAACQAAAASAAAAAAAAAAAAAAAAAAAAAEAAABQAAAA4q/JGvUQ0T8AAAAAAADwvwAAAAAAAOA/AAAAAAAA4D8AAAAAAADgPwAAAAAAAOA/AAAAAAAA4D8AAAAAAADgPwAAAAAAAOA/AAAAAAAA4D8CAAAAjAAAAAEAAAAAAAAA7/P4AP///wgAAAAAAAAAAAAAAAAAAAAAAAAAAAAAAAAAAAAAeAAAAAEAAABAAAAAAAAAAAAAAABaAAAAAAAAAAAAAAAAAAAAAAAAAAAAAAAAAAAAAAAAAAAAAAAAAAAAAAAAAAAAAAAAAAAAAAAAAAAAAAAAAAAAAAAAAAAAAAAAAAAAFAAAADwAAAABAAAAAAAAANjg6AAUAAAAAQAAACMAAAAjAAAAIwAAAB4AAAAAAAAAZAAAAGQAAAAAAAAAZAAAAGQAAAAVAAAAYAAAAAAAAAAAAAAADwAAACADAAAAAAAAAAAAAAEAAACgMgAAVgcAAKr4//8BAAAAf39/AAEAAABkAAAAAAAAABQAAABAHwAAAAAAACYAAAAAAAAAwOD//wAAAAAmAAAAZAAAABYAAABMAAAAAQAAAAAAAAAGAAAAAAAAAAEAAAC5xNAAPAAAAAAAAAAoAAAAZAAAAGQAAAAAAAAAy8vLADwAAAAAAAAAKAAAAGQAAABkAAAAAAAAABcAAAAUAAAAAAAAAAAAAAD/fwAA/38AAAAAAAAJAAAABAAAAAA5AAAeAAAAaAAAAAAAAAAAAAAAAAAAAAAAAAAAAAAAECcAABAnAAAAAAAAAAAAAAAAAAAAAAAAAAAAAAAAAAAAAAAAAAAAAHgAAAAAAAAAwMD/AAAAAAAAAAAAAAAAAAAAAABkAAAAAAAAAH9/fwAKAAAAIgAAABgAAAAAAAAAAAAAAAAAAAAAAAAAAAAAAAAAAAAkAAAAJAAAAAAAAAAHAAAAAAAAAAAAAAAAAAAAAAAAAAAAAAAAAAAAf39/ACUAAABYAAAAAAAAAAAAAAAAAAAAAAAAAAAAAAAAAAAAAAAAAAAAAAAAAAAAAAAAAAAAAAA/AAAAAAAAAKCGAQAAAAAAAAAAAAAAAAAMAAAAAQAAAAAAAAAAAAAAAAAAAB8AAABUAAAA7/P4AP///wEAAAAAAAAAAAAAAAAAAAAAAAAAAAAAAAAAAAAAAAAAANjg6AB/f38AucTQAMvLywDAwP8Af39/AAAAAAAAAAAAAAAAAAAAAAAAAAAAIQAAABgAAAAUAAAAYAMAAIMOAADADwAA4xEAABAAAAAmAAAACAAAAP//////////MAAAABQAAAAAAAAAAAD//wAAAQAAAP//AAABAA=="/>
+                <pr:smNativeData xmlns:pr="smNativeData" xmlns="smNativeData" val="SMDATA_16_V2g2ahMAAAAlAAAAZQAAAA0AAAAAkAAAAEgAAACQAAAASAAAAAAAAAAAAAAAAAAAAAEAAABQAAAA4q/JGvUQ0T8AAAAAAAAAAAAAAAAAAOA/AAAAAAAA4D8AAAAAAADgPwAAAAAAAOA/AAAAAAAA4D8AAAAAAADgPwAAAAAAAOA/AAAAAAAA4D8CAAAAjAAAAAEAAAAAAAAA7/P4AP///wgAAAAAAAAAAAAAAAAAAAAAAAAAAAAAAAAAAAAAeAAAAAEAAABAAAAAAAAAAAAAAABaAAAAAAAAAAAAAAAAAAAAAAAAAAAAAAAAAAAAAAAAAAAAAAAAAAAAAAAAAAAAAAAAAAAAAAAAAAAAAAAAAAAAAAAAAAAAAAAAAAAAFAAAADwAAAABAAAAAAAAANjg6AAUAAAAAQAAACMAAAAjAAAAIwAAAB4AAAAAAAAAZAAAAGQAAAAAAAAAZAAAAGQAAAAVAAAAYAAAAAAAAAAAAAAADwAAACADAAAAAAAAAAAAAAEAAACgMgAAVgcAAKr4//8BAAAAf39/AAEAAABkAAAAAAAAABQAAABAHwAAAAAAACYAAAAAAAAAwOD//wAAAAAmAAAAZAAAABYAAABMAAAAAQAAAAAAAAAGAAAAAAAAAAEAAAC5xNAAPAAAAAAAAAAoAAAAZAAAAGQAAAAAAAAAy8vLADwAAAAAAAAAKAAAAGQAAABkAAAAAAAAABcAAAAUAAAAAAAAAAAAAAD/fwAA/38AAAAAAAAJAAAABAAAAAA5AAAeAAAAaAAAAAAAAAAAAAAAAAAAAAAAAAAAAAAAECcAABAnAAAAAAAAAAAAAAAAAAAAAAAAAAAAAAAAAAAAAAAAAAAAAHgAAAAAAAAAwMD/AAAAAAAAAAAAAAAAAAAAAABkAAAAAAAAAH9/fwAKAAAAIgAAABgAAAAAAAAAAAAAAAAAAAAAAAAAAAAAAAAAAAAkAAAAJAAAAAAAAAAHAAAAAAAAAAAAAAAAAAAAAAAAAAAAAAAAAAAAf39/ACUAAABYAAAAAAAAAAAAAAAAAAAAAAAAAAAAAAAAAAAAAAAAAAAAAAAAAAAAAAAAAAAAAAA/AAAAAAAAAKCGAQAAAAAAAAAAAAAAAAAMAAAAAQAAAAAAAAAAAAAAAAAAAB8AAABUAAAA7/P4AP///wEAAAAAAAAAAAAAAAAAAAAAAAAAAAAAAAAAAAAAAAAAANjg6AB/f38AucTQAMvLywDAwP8Af39/AAAAAAAAAAAAAAAAAAAAAAAAAAAAIQAAABgAAAAUAAAAYAMAAIMOAADADwAA4xEAABAAAAAmAAAACAAAAP//////////MAAAABQAAAAAAAAAAAD//wAAAQAAAP//AAABAA=="/>
               </a:ext>
             </a:extLst>
           </p:cNvSpPr>
@@ -3833,7 +3867,7 @@
           <p:cNvSpPr>
             <a:extLst>
               <a:ext uri="smNativeData">
-                <pr:smNativeData xmlns:pr="smNativeData" xmlns="smNativeData" val="SMDATA_16_kRU2ahMAAAAlAAAAZAAAAA0AAAAAAAAAAAAAAAAAAAAAAAAAAAAAAAABAAAAAAAAAAEAAABQAAAAAAAAAAAA4D8AAAAAAADgPwAAAAAAAOA/AAAAAAAA4D8AAAAAAADgPwAAAAAAAOA/AAAAAAAA4D8AAAAAAADgPwAAAAAAAOA/AAAAAAAA4D8CAAAAjAAAAAAAAAAAAAAARHLEDP///wgAAAAAAAAAAAAAAAAAAAAAAAAAAAAAAAAAAAAAZAAAAAEAAABAAAAAAAAAAAAAAAAAAAAAAAAAAAAAAAAAAAAAAAAAAAAAAAAAAAAAAAAAAAAAAAAAAAAAAAAAAAAAAAAAAAAAAAAAAAAAAAAAAAAAAAAAAAAAAAAAAAAAFAAAADwAAAAAAAAAAAAAAAAAAAAPAAAAAQAAACMAAAAjAAAAIwAAAB4AAAAAAAAAZAAAAGQAAAAAAAAAZAAAAGQAAAAVAAAAYAAAAAAAAAAAAAAADwAAACADAAAAAAAAAAAAAAEAAACgMgAAVgcAAKr4//8BAAAAf39/AAEAAABkAAAAAAAAABQAAABAHwAAAAAAACYAAAAAAAAAwOD//wAAAAAmAAAAZAAAABYAAABMAAAAAAAAAAAAAAAEAAAAAAAAAAEAAADn5uYKAAAAACgAAAAoAAAAZAAAAGQAAAAAAAAAzMzMAAAAAABQAAAAUAAAAGQAAABkAAAAAAAAABcAAAAUAAAAAAAAAAAAAAD/fwAA/38AAAAAAAAJAAAABAAAAAAAAAAeAAAAaAAAAAAAAAAAAAAAAAAAAAAAAAAAAAAAECcAABAnAAAAAAAAAAAAAAAAAAAAAAAAAAAAAAAAAAAAAAAAAAAAABQAAAAAAAAAwMD/AAAAAABkAAAAMgAAAAAAAABkAAAAAAAAAH9/fwAKAAAAIgAAABgAAAAAAAAAAAAAAAAAAAAAAAAAAAAAAAAAAAAkAAAAJAAAAAAAAAAHAAAAAAAAAAAAAAAAAAAAAAAAAAAAAAAAAAAAf39/ACUAAABYAAAAAAAAAAAAAAAAAAAAAAAAAAAAAAAAAAAAAAAAAAAAAAAAAAAAAAAAAAAAAAA/AAAAAAAAAKCGAQAAAAAAAAAAAAAAAAAMAAAAAQAAAAAAAAAAAAAAAAAAAB8AAABUAAAARHLEBf///wEAAAAAAAAAAAAAAAAAAAAAAAAAAAAAAAAAAAAAAAAAAAAAAAB/f38A5+bmA8zMzADAwP8Af39/AAAAAAAAAAAAAAAAAAAAAAAAAAAAIQAAABgAAAAUAAAAYAMAAIMOAADADwAA4xEAABAAAAAmAAAACAAAAP//////////MAAAABQAAAAAAAAAAAD//wAAAQAAAP//AAABAA=="/>
+                <pr:smNativeData xmlns:pr="smNativeData" xmlns="smNativeData" val="SMDATA_16_V2g2ahMAAAAlAAAAZAAAAA0AAAAAAAAAAAAAAAAAAAAAAAAAAAAAAAABAAAAAAAAAAEAAABQAAAAAAAAAAAA4D8AAAAAAADgPwAAAAAAAOA/AAAAAAAA4D8AAAAAAADgPwAAAAAAAOA/AAAAAAAA4D8AAAAAAADgPwAAAAAAAOA/AAAAAAAA4D8CAAAAjAAAAAAAAAAAAAAARHLEDP///wgAAAAAAAAAAAAAAAAAAAAAAAAAAAAAAAAAAAAAZAAAAAEAAABAAAAAAAAAAAAAAAAAAAAAAAAAAAAAAAAAAAAAAAAAAAAAAAAAAAAAAAAAAAAAAAAAAAAAAAAAAAAAAAAAAAAAAAAAAAAAAAAAAAAAAAAAAAAAAAAAAAAAFAAAADwAAAAAAAAAAAAAAAAAAAAPAAAAAQAAACMAAAAjAAAAIwAAAB4AAAAAAAAAZAAAAGQAAAAAAAAAZAAAAGQAAAAVAAAAYAAAAAAAAAAAAAAADwAAACADAAAAAAAAAAAAAAEAAACgMgAAVgcAAKr4//8BAAAAf39/AAEAAABkAAAAAAAAABQAAABAHwAAAAAAACYAAAAAAAAAwOD//wAAAAAmAAAAZAAAABYAAABMAAAAAAAAAAAAAAAEAAAAAAAAAAEAAADn5uYKAAAAACgAAAAoAAAAZAAAAGQAAAAAAAAAzMzMAAAAAABQAAAAUAAAAGQAAABkAAAAAAAAABcAAAAUAAAAAAAAAAAAAAD/fwAA/38AAAAAAAAJAAAABAAAAAAAAAAeAAAAaAAAAAAAAAAAAAAAAAAAAAAAAAAAAAAAECcAABAnAAAAAAAAAAAAAAAAAAAAAAAAAAAAAAAAAAAAAAAAAAAAABQAAAAAAAAAwMD/AAAAAABkAAAAMgAAAAAAAABkAAAAAAAAAH9/fwAKAAAAIgAAABgAAAAAAAAAAAAAAAAAAAAAAAAAAAAAAAAAAAAkAAAAJAAAAAAAAAAHAAAAAAAAAAAAAAAAAAAAAAAAAAAAAAAAAAAAf39/ACUAAABYAAAAAAAAAAAAAAAAAAAAAAAAAAAAAAAAAAAAAAAAAAAAAAAAAAAAAAAAAAAAAAA/AAAAAAAAAKCGAQAAAAAAAAAAAAAAAAAMAAAAAQAAAAAAAAAAAAAAAAAAAB8AAABUAAAARHLEBf///wEAAAAAAAAAAAAAAAAAAAAAAAAAAAAAAAAAAAAAAAAAAAAAAAB/f38A5+bmA8zMzADAwP8Af39/AAAAAAAAAAAAAAAAAAAAAAAAAAAAIQAAABgAAAAUAAAAYAMAAIMOAADADwAA4xEAABAAAAAmAAAACAAAAP//////////MAAAABQAAAAAAAAAAAD//wAAAQAAAP//AAABAA=="/>
               </a:ext>
             </a:extLst>
           </p:cNvSpPr>
@@ -3881,7 +3915,7 @@
           <p:cNvSpPr>
             <a:extLst>
               <a:ext uri="smNativeData">
-                <pr:smNativeData xmlns:pr="smNativeData" xmlns="smNativeData" val="SMDATA_16_kRU2ahMAAAAlAAAAZQAAAA0AAAAAkAAAAEgAAACQAAAASAAAAAAAAAAAAAAAAAAAAAEAAABQAAAA4q/JGvUQ0T8AAAAAAADwvwAAAAAAAOA/AAAAAAAA4D8AAAAAAADgPwAAAAAAAOA/AAAAAAAA4D8AAAAAAADgPwAAAAAAAOA/AAAAAAAA4D8CAAAAjAAAAAEAAAAAAAAA7/P4AP///wgAAAAAAAAAAAAAAAAAAAAAAAAAAAAAAAAAAAAAeAAAAAEAAABAAAAAAAAAAAAAAABaAAAAAAAAAAAAAAAAAAAAAAAAAAAAAAAAAAAAAAAAAAAAAAAAAAAAAAAAAAAAAAAAAAAAAAAAAAAAAAAAAAAAAAAAAAAAAAAAAAAAFAAAADwAAAABAAAAAAAAANjg6AAUAAAAAQAAACMAAAAjAAAAIwAAAB4AAAAAAAAAZAAAAGQAAAAAAAAAZAAAAGQAAAAVAAAAYAAAAAAAAAAAAAAADwAAACADAAAAAAAAAAAAAAEAAACgMgAAVgcAAKr4//8BAAAAf39/AAEAAABkAAAAAAAAABQAAABAHwAAAAAAACYAAAAAAAAAwOD//wAAAAAmAAAAZAAAABYAAABMAAAAAQAAAAAAAAAGAAAAAAAAAAEAAAC5xNAAPAAAAAAAAAAoAAAAZAAAAGQAAAAAAAAAy8vLADwAAAAAAAAAKAAAAGQAAABkAAAAAAAAABcAAAAUAAAAAAAAAAAAAAD/fwAA/38AAAAAAAAJAAAABAAAAEYCAAAeAAAAaAAAAAAAAAAAAAAAAAAAAAAAAAAAAAAAECcAABAnAAAAAAAAAAAAAAAAAAAAAAAAAAAAAAAAAAAAAAAAAAAAAHgAAAAAAAAAwMD/AAAAAAAAAAAAAAAAAAAAAABkAAAAAAAAAH9/fwAKAAAAIgAAABgAAAAAAAAAAAAAAAAAAAAAAAAAAAAAAAAAAAAkAAAAJAAAAAAAAAAHAAAAAAAAAAAAAAAAAAAAAAAAAAAAAAAAAAAAf39/ACUAAABYAAAAAAAAAAAAAAAAAAAAAAAAAAAAAAAAAAAAAAAAAAAAAAAAAAAAAAAAAAAAAAA/AAAAAAAAAKCGAQAAAAAAAAAAAAAAAAAMAAAAAQAAAAAAAAAAAAAAAAAAAB8AAABUAAAA7/P4AP///wEAAAAAAAAAAAAAAAAAAAAAAAAAAAAAAAAAAAAAAAAAANjg6AB/f38AucTQAMvLywDAwP8Af39/AAAAAAAAAAAAAAAAAAAAAAAAAAAAIQAAABgAAAAUAAAAYAMAAOYSAADADwAARhYAABAAAAAmAAAACAAAAP//////////MAAAABQAAAAAAAAAAAD//wAAAQAAAP//AAABAA=="/>
+                <pr:smNativeData xmlns:pr="smNativeData" xmlns="smNativeData" val="SMDATA_16_V2g2ahMAAAAlAAAAZQAAAA0AAAAAkAAAAEgAAACQAAAASAAAAAAAAAAAAAAAAAAAAAEAAABQAAAA4q/JGvUQ0T8AAAAAAAAAAAAAAAAAAOA/AAAAAAAA4D8AAAAAAADgPwAAAAAAAOA/AAAAAAAA4D8AAAAAAADgPwAAAAAAAOA/AAAAAAAA4D8CAAAAjAAAAAEAAAAAAAAA7/P4AP///wgAAAAAAAAAAAAAAAAAAAAAAAAAAAAAAAAAAAAAeAAAAAEAAABAAAAAAAAAAAAAAABaAAAAAAAAAAAAAAAAAAAAAAAAAAAAAAAAAAAAAAAAAAAAAAAAAAAAAAAAAAAAAAAAAAAAAAAAAAAAAAAAAAAAAAAAAAAAAAAAAAAAFAAAADwAAAABAAAAAAAAANjg6AAUAAAAAQAAACMAAAAjAAAAIwAAAB4AAAAAAAAAZAAAAGQAAAAAAAAAZAAAAGQAAAAVAAAAYAAAAAAAAAAAAAAADwAAACADAAAAAAAAAAAAAAEAAACgMgAAVgcAAKr4//8BAAAAf39/AAEAAABkAAAAAAAAABQAAABAHwAAAAAAACYAAAAAAAAAwOD//wAAAAAmAAAAZAAAABYAAABMAAAAAQAAAAAAAAAGAAAAAAAAAAEAAAC5xNAAPAAAAAAAAAAoAAAAZAAAAGQAAAAAAAAAy8vLADwAAAAAAAAAKAAAAGQAAABkAAAAAAAAABcAAAAUAAAAAAAAAAAAAAD/fwAA/38AAAAAAAAJAAAABAAAAEYCAAAeAAAAaAAAAAAAAAAAAAAAAAAAAAAAAAAAAAAAECcAABAnAAAAAAAAAAAAAAAAAAAAAAAAAAAAAAAAAAAAAAAAAAAAAHgAAAAAAAAAwMD/AAAAAAAAAAAAAAAAAAAAAABkAAAAAAAAAH9/fwAKAAAAIgAAABgAAAAAAAAAAAAAAAAAAAAAAAAAAAAAAAAAAAAkAAAAJAAAAAAAAAAHAAAAAAAAAAAAAAAAAAAAAAAAAAAAAAAAAAAAf39/ACUAAABYAAAAAAAAAAAAAAAAAAAAAAAAAAAAAAAAAAAAAAAAAAAAAAAAAAAAAAAAAAAAAAA/AAAAAAAAAKCGAQAAAAAAAAAAAAAAAAAMAAAAAQAAAAAAAAAAAAAAAAAAAB8AAABUAAAA7/P4AP///wEAAAAAAAAAAAAAAAAAAAAAAAAAAAAAAAAAAAAAAAAAANjg6AB/f38AucTQAMvLywDAwP8Af39/AAAAAAAAAAAAAAAAAAAAAAAAAAAAIQAAABgAAAAUAAAAYAMAAOYSAADADwAARhYAABAAAAAmAAAACAAAAP//////////MAAAABQAAAAAAAAAAAD//wAAAQAAAP//AAABAA=="/>
               </a:ext>
             </a:extLst>
           </p:cNvSpPr>
@@ -3923,7 +3957,7 @@
           <p:cNvSpPr>
             <a:extLst>
               <a:ext uri="smNativeData">
-                <pr:smNativeData xmlns:pr="smNativeData" xmlns="smNativeData" val="SMDATA_16_kRU2ahMAAAAlAAAAZAAAAA0AAAAAAAAAAAAAAAAAAAAAAAAAAAAAAAABAAAAAAAAAAEAAABQAAAAAAAAAAAA4D8AAAAAAADgPwAAAAAAAOA/AAAAAAAA4D8AAAAAAADgPwAAAAAAAOA/AAAAAAAA4D8AAAAAAADgPwAAAAAAAOA/AAAAAAAA4D8CAAAAjAAAAAAAAAAAAAAARHLEDP///wgAAAAAAAAAAAAAAAAAAAAAAAAAAAAAAAAAAAAAZAAAAAEAAABAAAAAAAAAAAAAAAAAAAAAAAAAAAAAAAAAAAAAAAAAAAAAAAAAAAAAAAAAAAAAAAAAAAAAAAAAAAAAAAAAAAAAAAAAAAAAAAAAAAAAAAAAAAAAAAAAAAAAFAAAADwAAAAAAAAAAAAAAAAAAAAPAAAAAQAAACMAAAAjAAAAIwAAAB4AAAAAAAAAZAAAAGQAAAAAAAAAZAAAAGQAAAAVAAAAYAAAAAAAAAAAAAAADwAAACADAAAAAAAAAAAAAAEAAACgMgAAVgcAAKr4//8BAAAAf39/AAEAAABkAAAAAAAAABQAAABAHwAAAAAAACYAAAAAAAAAwOD//wAAAAAmAAAAZAAAABYAAABMAAAAAAAAAAAAAAAEAAAAAAAAAAEAAADn5uYKAAAAACgAAAAoAAAAZAAAAGQAAAAAAAAAzMzMAAAAAABQAAAAUAAAAGQAAABkAAAAAAAAABcAAAAUAAAAAAAAAAAAAAD/fwAA/38AAAAAAAAJAAAABAAAAAAAAAAeAAAAaAAAAAAAAAAAAAAAAAAAAAAAAAAAAAAAECcAABAnAAAAAAAAAAAAAAAAAAAAAAAAAAAAAAAAAAAAAAAAAAAAABQAAAAAAAAAwMD/AAAAAABkAAAAMgAAAAAAAABkAAAAAAAAAH9/fwAKAAAAIgAAABgAAAAAAAAAAAAAAAAAAAAAAAAAAAAAAAAAAAAkAAAAJAAAAAAAAAAHAAAAAAAAAAAAAAAAAAAAAAAAAAAAAAAAAAAAf39/ACUAAABYAAAAAAAAAAAAAAAAAAAAAAAAAAAAAAAAAAAAAAAAAAAAAAAAAAAAAAAAAAAAAAA/AAAAAAAAAKCGAQAAAAAAAAAAAAAAAAAMAAAAAQAAAAAAAAAAAAAAAAAAAB8AAABUAAAARHLEBf///wEAAAAAAAAAAAAAAAAAAAAAAAAAAAAAAAAAAAAAAAAAAAAAAAB/f38A5+bmA8zMzADAwP8Af39/AAAAAAAAAAAAAAAAAAAAAAAAAAAAIQAAABgAAAAUAAAAYAMAAOYSAADADwAARhYAABAAAAAmAAAACAAAAP//////////MAAAABQAAAAAAAAAAAD//wAAAQAAAP//AAABAA=="/>
+                <pr:smNativeData xmlns:pr="smNativeData" xmlns="smNativeData" val="SMDATA_16_V2g2ahMAAAAlAAAAZAAAAA0AAAAAAAAAAAAAAAAAAAAAAAAAAAAAAAABAAAAAAAAAAEAAABQAAAAAAAAAAAA4D8AAAAAAADgPwAAAAAAAOA/AAAAAAAA4D8AAAAAAADgPwAAAAAAAOA/AAAAAAAA4D8AAAAAAADgPwAAAAAAAOA/AAAAAAAA4D8CAAAAjAAAAAAAAAAAAAAARHLEDP///wgAAAAAAAAAAAAAAAAAAAAAAAAAAAAAAAAAAAAAZAAAAAEAAABAAAAAAAAAAAAAAAAAAAAAAAAAAAAAAAAAAAAAAAAAAAAAAAAAAAAAAAAAAAAAAAAAAAAAAAAAAAAAAAAAAAAAAAAAAAAAAAAAAAAAAAAAAAAAAAAAAAAAFAAAADwAAAAAAAAAAAAAAAAAAAAPAAAAAQAAACMAAAAjAAAAIwAAAB4AAAAAAAAAZAAAAGQAAAAAAAAAZAAAAGQAAAAVAAAAYAAAAAAAAAAAAAAADwAAACADAAAAAAAAAAAAAAEAAACgMgAAVgcAAKr4//8BAAAAf39/AAEAAABkAAAAAAAAABQAAABAHwAAAAAAACYAAAAAAAAAwOD//wAAAAAmAAAAZAAAABYAAABMAAAAAAAAAAAAAAAEAAAAAAAAAAEAAADn5uYKAAAAACgAAAAoAAAAZAAAAGQAAAAAAAAAzMzMAAAAAABQAAAAUAAAAGQAAABkAAAAAAAAABcAAAAUAAAAAAAAAAAAAAD/fwAA/38AAAAAAAAJAAAABAAAAAAAAAAeAAAAaAAAAAAAAAAAAAAAAAAAAAAAAAAAAAAAECcAABAnAAAAAAAAAAAAAAAAAAAAAAAAAAAAAAAAAAAAAAAAAAAAABQAAAAAAAAAwMD/AAAAAABkAAAAMgAAAAAAAABkAAAAAAAAAH9/fwAKAAAAIgAAABgAAAAAAAAAAAAAAAAAAAAAAAAAAAAAAAAAAAAkAAAAJAAAAAAAAAAHAAAAAAAAAAAAAAAAAAAAAAAAAAAAAAAAAAAAf39/ACUAAABYAAAAAAAAAAAAAAAAAAAAAAAAAAAAAAAAAAAAAAAAAAAAAAAAAAAAAAAAAAAAAAA/AAAAAAAAAKCGAQAAAAAAAAAAAAAAAAAMAAAAAQAAAAAAAAAAAAAAAAAAAB8AAABUAAAARHLEBf///wEAAAAAAAAAAAAAAAAAAAAAAAAAAAAAAAAAAAAAAAAAAAAAAAB/f38A5+bmA8zMzADAwP8Af39/AAAAAAAAAAAAAAAAAAAAAAAAAAAAIQAAABgAAAAUAAAAYAMAAOYSAADADwAARhYAABAAAAAmAAAACAAAAP//////////MAAAABQAAAAAAAAAAAD//wAAAQAAAP//AAABAA=="/>
               </a:ext>
             </a:extLst>
           </p:cNvSpPr>
@@ -3971,7 +4005,7 @@
           <p:cNvSpPr>
             <a:extLst>
               <a:ext uri="smNativeData">
-                <pr:smNativeData xmlns:pr="smNativeData" xmlns="smNativeData" val="SMDATA_16_kRU2ahMAAAAlAAAACgAAAA0AAAAAkAAAAEgAAACQAAAASAAAAAAAAAAAAAAAAAAAAAEAAABQAAAAAAAAAAAA4D8AAAAAAADgPwAAAAAAAOA/AAAAAAAA4D8AAAAAAADgPwAAAAAAAOA/AAAAAAAA4D8AAAAAAADgPwAAAAAAAOA/AAAAAAAA4D8CAAAAjAAAAAAAAAAAAAAARHLEDP///wgAAAAAAAAAAAAAAAAAAAAAAAAAAAAAAAAAAAAAZAAAAAEAAABAAAAAAAAAAAAAAAAAAAAAAAAAAAAAAAAAAAAAAAAAAAAAAAAAAAAAAAAAAAAAAAAAAAAAAAAAAAAAAAAAAAAAAAAAAAAAAAAAAAAAAAAAAAAAAAAAAAAAFAAAADwAAAABAAAAAAAAAOCgOAAyAAAAAQAAACMAAAAjAAAAIwAAAB4AAAAAAAAAZAAAAGQAAAACAAAAZAAAAGQAAAAVAAAAYAAAAAAAAAAAAAAADwAAACADAAAAAAAAAAAAAAEAAACgMgAAVgcAAKr4//8BAAAAf39/AAEAAABkAAAAAAAAABQAAABAHwAAAAAAACYAAAAAAAAAwOD//wAAAAAmAAAAZAAAABYAAABMAAAAAAAAAAAAAAAEAAAAAAAAAAEAAADn5uYKAAAAACgAAAAoAAAAZAAAAGQAAAAAAAAAzMzMAAAAAABQAAAAUAAAAGQAAABkAAAAAAAAABcAAAAUAAAAAAAAAAAAAAD/fwAA/38AAAAAAAAJAAAABAAAAP////8eAAAAaAAAAAAAAAAAAAAAAAAAAAAAAAAAAAAAECcAABAnAAAAAAAAAAAAAAAAAAAAAAAAAAAAAAAAAAAAAAAAAAAAABQAAAAAAAAAwMD/AAAAAABkAAAAMgAAAAAAAABkAAAAAAAAAH9/fwAKAAAAIgAAABgAAAAAAAAAAAAAAAAAAAAAAAAAAAAAAAAAAAAkAAAAJAAAAAAAAAAHAAAAAAAAAAAAAAAAAAAAAAAAAAAAAAAAAAAAf39/ACUAAABYAAAAAAAAAAAAAAAAAAAAAAAAAAAAAAAAAAAAAAAAAAAAAAAAAAAAAAAAAAAAAAA/AAAAAAAAAKCGAQAAAAAAAAAAAAAAAAAMAAAAAQAAAAAAAAAAAAAAAAAAAB8AAABUAAAARHLEBf///wEAAAAAAAAAAAAAAAAAAAAAAAAAAAAAAAAAAAAAAAAAAOCgOAB/f38A5+bmA8zMzADAwP8Af39/AAAAAAAAAAAAAAAAAAAAAAAAAAAAIQAAABgAAAAUAAAAUBAAABAOAADwFQAAEA4AABAAAAAmAAAACAAAAP//////////MAAAABQAAAAAAAAAAAD//wAAAQAAAP//AAABAA=="/>
+                <pr:smNativeData xmlns:pr="smNativeData" xmlns="smNativeData" val="SMDATA_16_V2g2ahMAAAAlAAAACgAAAA0AAAAAkAAAAEgAAACQAAAASAAAAAAAAAAAAAAAAAAAAAEAAABQAAAAAAAAAAAA4D8AAAAAAADgPwAAAAAAAOA/AAAAAAAA4D8AAAAAAADgPwAAAAAAAOA/AAAAAAAA4D8AAAAAAADgPwAAAAAAAOA/AAAAAAAA4D8CAAAAjAAAAAAAAAAAAAAARHLEDP///wgAAAAAAAAAAAAAAAAAAAAAAAAAAAAAAAAAAAAAZAAAAAEAAABAAAAAAAAAAAAAAAAAAAAAAAAAAAAAAAAAAAAAAAAAAAAAAAAAAAAAAAAAAAAAAAAAAAAAAAAAAAAAAAAAAAAAAAAAAAAAAAAAAAAAAAAAAAAAAAAAAAAAFAAAADwAAAABAAAAAAAAAOCgOAAyAAAAAQAAACMAAAAjAAAAIwAAAB4AAAAAAAAAZAAAAGQAAAACAAAAZAAAAGQAAAAVAAAAYAAAAAAAAAAAAAAADwAAACADAAAAAAAAAAAAAAEAAACgMgAAVgcAAKr4//8BAAAAf39/AAEAAABkAAAAAAAAABQAAABAHwAAAAAAACYAAAAAAAAAwOD//wAAAAAmAAAAZAAAABYAAABMAAAAAAAAAAAAAAAEAAAAAAAAAAEAAADn5uYKAAAAACgAAAAoAAAAZAAAAGQAAAAAAAAAzMzMAAAAAABQAAAAUAAAAGQAAABkAAAAAAAAABcAAAAUAAAAAAAAAAAAAAD/fwAA/38AAAAAAAAJAAAABAAAAP////8eAAAAaAAAAAAAAAAAAAAAAAAAAAAAAAAAAAAAECcAABAnAAAAAAAAAAAAAAAAAAAAAAAAAAAAAAAAAAAAAAAAAAAAABQAAAAAAAAAwMD/AAAAAABkAAAAMgAAAAAAAABkAAAAAAAAAH9/fwAKAAAAIgAAABgAAAAAAAAAAAAAAAAAAAAAAAAAAAAAAAAAAAAkAAAAJAAAAAAAAAAHAAAAAAAAAAAAAAAAAAAAAAAAAAAAAAAAAAAAf39/ACUAAABYAAAAAAAAAAAAAAAAAAAAAAAAAAAAAAAAAAAAAAAAAAAAAAAAAAAAAAAAAAAAAAA/AAAAAAAAAKCGAQAAAAAAAAAAAAAAAAAMAAAAAQAAAAAAAAAAAAAAAAAAAB8AAABUAAAARHLEBf///wEAAAAAAAAAAAAAAAAAAAAAAAAAAAAAAAAAAAAAAAAAAOCgOAB/f38A5+bmA8zMzADAwP8Af39/AAAAAAAAAAAAAAAAAAAAAAAAAAAAIQAAABgAAAAUAAAAUBAAABAOAADwFQAAEA4AABAAAAAmAAAACAAAAP//////////MAAAABQAAAAAAAAAAAD//wAAAQAAAP//AAABAA=="/>
               </a:ext>
             </a:extLst>
           </p:cNvSpPr>
@@ -4003,7 +4037,7 @@
           <p:cNvSpPr>
             <a:extLst>
               <a:ext uri="smNativeData">
-                <pr:smNativeData xmlns:pr="smNativeData" xmlns="smNativeData" val="SMDATA_16_kRU2ahMAAAAlAAAAZQAAAA0AAAAAkAAAAEgAAACQAAAASAAAAAAAAAAAAAAAAAAAAAEAAABQAAAAexSuR+F6xD8AAAAAAADwvwAAAAAAAOA/AAAAAAAA4D8AAAAAAADgPwAAAAAAAOA/AAAAAAAA4D8AAAAAAADgPwAAAAAAAOA/AAAAAAAA4D8CAAAAjAAAAAEAAAAAAAAADyRAAP///wgAAAAAAAAAAAAAAAAAAAAAAAAAAAAAAAAAAAAAeAAAAAEAAABAAAAAAAAAAAAAAABaAAAAAAAAAAAAAAAAAAAAAAAAAAAAAAAAAAAAAAAAAAAAAAAAAAAAAAAAAAAAAAAAAAAAAAAAAAAAAAAAAAAAAAAAAAAAAAAAAAAAFAAAADwAAAAAAAAAAAAAAAAAAAAPAAAAAQAAACMAAAAjAAAAIwAAAB4AAAAAAAAAZAAAAGQAAAAAAAAAZAAAAGQAAAAVAAAAYAAAAAAAAAAAAAAADwAAACADAAAAAAAAAAAAAAEAAACgMgAAVgcAAKr4//8BAAAAf39/AAEAAABkAAAAAAAAABQAAABAHwAAAAAAACYAAAAAAAAAwOD//wAAAAAmAAAAZAAAABYAAABMAAAAAQAAAAAAAAAGAAAAAAAAAAEAAAC5xNAAPAAAAAAAAAAoAAAAZAAAAGQAAAAAAAAAy8vLADwAAAAAAAAAKAAAAGQAAABkAAAAAAAAABcAAAAUAAAAAAAAAAAAAAD/fwAA/38AAAAAAAAJAAAABAAAAAAAAAAeAAAAaAAAAAAAAAAAAAAAAAAAAAAAAAAAAAAAECcAABAnAAAAAAAAAAAAAAAAAAAAAAAAAAAAAAAAAAAAAAAAAAAAAHgAAAAAAAAAwMD/AAAAAAAAAAAAAAAAAAAAAABkAAAAAAAAAH9/fwAKAAAAIgAAABgAAAAAAAAAAAAAAAAAAAAAAAAAAAAAAAAAAAAkAAAAJAAAAAAAAAAHAAAAAAAAAAAAAAAAAAAAAAAAAAAAAAAAAAAAf39/ACUAAABYAAAAAAAAAAAAAAAAAAAAAAAAAAAAAAAAAAAAAAAAAAAAAAAAAAAAAAAAAAAAAAA/AAAAAAAAAKCGAQAAAAAAAAAAAAAAAAAMAAAAAQAAAAAAAAAAAAAAAAAAAB8AAABUAAAADyRAAP///wEAAAAAAAAAAAAAAAAAAAAAAAAAAAAAAAAAAAAAAAAAAAAAAAB/f38AucTQAMvLywDAwP8Af39/AAAAAAAAAAAAAAAAAAAAAAAAAAAAIQAAABgAAAAUAAAAgBYAAEALAACQJAAA4BAAABAAAAAmAAAACAAAAP//////////MAAAABQAAAAAAAAAAAD//wAAAQAAAP//AAABAA=="/>
+                <pr:smNativeData xmlns:pr="smNativeData" xmlns="smNativeData" val="SMDATA_16_V2g2ahMAAAAlAAAAZQAAAA0AAAAAkAAAAEgAAACQAAAASAAAAAAAAAAAAAAAAAAAAAEAAABQAAAAexSuR+F6xD8AAAAAAAAAAAAAAAAAAOA/AAAAAAAA4D8AAAAAAADgPwAAAAAAAOA/AAAAAAAA4D8AAAAAAADgPwAAAAAAAOA/AAAAAAAA4D8CAAAAjAAAAAEAAAAAAAAADyRAAP///wgAAAAAAAAAAAAAAAAAAAAAAAAAAAAAAAAAAAAAeAAAAAEAAABAAAAAAAAAAAAAAABaAAAAAAAAAAAAAAAAAAAAAAAAAAAAAAAAAAAAAAAAAAAAAAAAAAAAAAAAAAAAAAAAAAAAAAAAAAAAAAAAAAAAAAAAAAAAAAAAAAAAFAAAADwAAAAAAAAAAAAAAAAAAAAPAAAAAQAAACMAAAAjAAAAIwAAAB4AAAAAAAAAZAAAAGQAAAAAAAAAZAAAAGQAAAAVAAAAYAAAAAAAAAAAAAAADwAAACADAAAAAAAAAAAAAAEAAACgMgAAVgcAAKr4//8BAAAAf39/AAEAAABkAAAAAAAAABQAAABAHwAAAAAAACYAAAAAAAAAwOD//wAAAAAmAAAAZAAAABYAAABMAAAAAQAAAAAAAAAGAAAAAAAAAAEAAAC5xNAAPAAAAAAAAAAoAAAAZAAAAGQAAAAAAAAAy8vLADwAAAAAAAAAKAAAAGQAAABkAAAAAAAAABcAAAAUAAAAAAAAAAAAAAD/fwAA/38AAAAAAAAJAAAABAAAAAAAAAAeAAAAaAAAAAAAAAAAAAAAAAAAAAAAAAAAAAAAECcAABAnAAAAAAAAAAAAAAAAAAAAAAAAAAAAAAAAAAAAAAAAAAAAAHgAAAAAAAAAwMD/AAAAAAAAAAAAAAAAAAAAAABkAAAAAAAAAH9/fwAKAAAAIgAAABgAAAAAAAAAAAAAAAAAAAAAAAAAAAAAAAAAAAAkAAAAJAAAAAAAAAAHAAAAAAAAAAAAAAAAAAAAAAAAAAAAAAAAAAAAf39/ACUAAABYAAAAAAAAAAAAAAAAAAAAAAAAAAAAAAAAAAAAAAAAAAAAAAAAAAAAAAAAAAAAAAA/AAAAAAAAAKCGAQAAAAAAAAAAAAAAAAAMAAAAAQAAAAAAAAAAAAAAAAAAAB8AAABUAAAADyRAAP///wEAAAAAAAAAAAAAAAAAAAAAAAAAAAAAAAAAAAAAAAAAAAAAAAB/f38AucTQAMvLywDAwP8Af39/AAAAAAAAAAAAAAAAAAAAAAAAAAAAIQAAABgAAAAUAAAAgBYAAEALAACQJAAA4BAAABAAAAAmAAAACAAAAP//////////MAAAABQAAAAAAAAAAAD//wAAAQAAAP//AAABAA=="/>
               </a:ext>
             </a:extLst>
           </p:cNvSpPr>
@@ -4040,7 +4074,7 @@
           <p:cNvSpPr>
             <a:extLst>
               <a:ext uri="smNativeData">
-                <pr:smNativeData xmlns:pr="smNativeData" xmlns="smNativeData" val="SMDATA_16_kRU2ahMAAAAlAAAAZAAAAA0AAAAAAAAAAAAAAAAAAAAAAAAAAAAAAAABAAAAAAAAAAEAAABQAAAAAAAAAAAA4D8AAAAAAADgPwAAAAAAAOA/AAAAAAAA4D8AAAAAAADgPwAAAAAAAOA/AAAAAAAA4D8AAAAAAADgPwAAAAAAAOA/AAAAAAAA4D8CAAAAjAAAAAAAAAAAAAAARHLEDP///wgAAAAAAAAAAAAAAAAAAAAAAAAAAAAAAAAAAAAAZAAAAAEAAABAAAAAAAAAAAAAAAAAAAAAAAAAAAAAAAAAAAAAAAAAAAAAAAAAAAAAAAAAAAAAAAAAAAAAAAAAAAAAAAAAAAAAAAAAAAAAAAAAAAAAAAAAAAAAAAAAAAAAFAAAADwAAAAAAAAAAAAAAAAAAAAPAAAAAQAAACMAAAAjAAAAIwAAAB4AAAAAAAAAZAAAAGQAAAAAAAAAZAAAAGQAAAAVAAAAYAAAAAAAAAAAAAAADwAAACADAAAAAAAAAAAAAAEAAACgMgAAVgcAAKr4//8BAAAAf39/AAEAAABkAAAAAAAAABQAAABAHwAAAAAAACYAAAAAAAAAwOD//wAAAAAmAAAAZAAAABYAAABMAAAAAAAAAAAAAAAEAAAAAAAAAAEAAADn5uYKAAAAACgAAAAoAAAAZAAAAGQAAAAAAAAAzMzMAAAAAABQAAAAUAAAAGQAAABkAAAAAAAAABcAAAAUAAAAAAAAAAAAAAD/fwAA/38AAAAAAAAJAAAABAAAAAAAAAAeAAAAaAAAAAAAAAAAAAAAAAAAAAAAAAAAAAAAECcAABAnAAAAAAAAAAAAAAAAAAAAAAAAAAAAAAAAAAAAAAAAAAAAABQAAAAAAAAAwMD/AAAAAABkAAAAMgAAAAAAAABkAAAAAAAAAH9/fwAKAAAAIgAAABgAAAAAAAAAAAAAAAAAAAAAAAAAAAAAAAAAAAAkAAAAJAAAAAAAAAAHAAAAAAAAAAAAAAAAAAAAAAAAAAAAAAAAAAAAf39/ACUAAABYAAAAAAAAAAAAAAAAAAAAAAAAAAAAAAAAAAAAAAAAAAAAAAAAAAAAAAAAAAAAAAA/AAAAAAAAAKCGAQAAAAAAAAAAAAAAAAAMAAAAAQAAAAAAAAAAAAAAAAAAAB8AAABUAAAARHLEBf///wEAAAAAAAAAAAAAAAAAAAAAAAAAAAAAAAAAAAAAAAAAAAAAAAB/f38A5+bmA8zMzADAwP8Af39/AAAAAAAAAAAAAAAAAAAAAAAAAAAAIQAAABgAAAAUAAAAgBYAAEALAACQJAAA4BAAABAAAAAmAAAACAAAAP//////////MAAAABQAAAAAAAAAAAD//wAAAQAAAP//AAABAA=="/>
+                <pr:smNativeData xmlns:pr="smNativeData" xmlns="smNativeData" val="SMDATA_16_V2g2ahMAAAAlAAAAZAAAAA0AAAAAAAAAAAAAAAAAAAAAAAAAAAAAAAABAAAAAAAAAAEAAABQAAAAAAAAAAAA4D8AAAAAAADgPwAAAAAAAOA/AAAAAAAA4D8AAAAAAADgPwAAAAAAAOA/AAAAAAAA4D8AAAAAAADgPwAAAAAAAOA/AAAAAAAA4D8CAAAAjAAAAAAAAAAAAAAARHLEDP///wgAAAAAAAAAAAAAAAAAAAAAAAAAAAAAAAAAAAAAZAAAAAEAAABAAAAAAAAAAAAAAAAAAAAAAAAAAAAAAAAAAAAAAAAAAAAAAAAAAAAAAAAAAAAAAAAAAAAAAAAAAAAAAAAAAAAAAAAAAAAAAAAAAAAAAAAAAAAAAAAAAAAAFAAAADwAAAAAAAAAAAAAAAAAAAAPAAAAAQAAACMAAAAjAAAAIwAAAB4AAAAAAAAAZAAAAGQAAAAAAAAAZAAAAGQAAAAVAAAAYAAAAAAAAAAAAAAADwAAACADAAAAAAAAAAAAAAEAAACgMgAAVgcAAKr4//8BAAAAf39/AAEAAABkAAAAAAAAABQAAABAHwAAAAAAACYAAAAAAAAAwOD//wAAAAAmAAAAZAAAABYAAABMAAAAAAAAAAAAAAAEAAAAAAAAAAEAAADn5uYKAAAAACgAAAAoAAAAZAAAAGQAAAAAAAAAzMzMAAAAAABQAAAAUAAAAGQAAABkAAAAAAAAABcAAAAUAAAAAAAAAAAAAAD/fwAA/38AAAAAAAAJAAAABAAAAAAAAAAeAAAAaAAAAAAAAAAAAAAAAAAAAAAAAAAAAAAAECcAABAnAAAAAAAAAAAAAAAAAAAAAAAAAAAAAAAAAAAAAAAAAAAAABQAAAAAAAAAwMD/AAAAAABkAAAAMgAAAAAAAABkAAAAAAAAAH9/fwAKAAAAIgAAABgAAAAAAAAAAAAAAAAAAAAAAAAAAAAAAAAAAAAkAAAAJAAAAAAAAAAHAAAAAAAAAAAAAAAAAAAAAAAAAAAAAAAAAAAAf39/ACUAAABYAAAAAAAAAAAAAAAAAAAAAAAAAAAAAAAAAAAAAAAAAAAAAAAAAAAAAAAAAAAAAAA/AAAAAAAAAKCGAQAAAAAAAAAAAAAAAAAMAAAAAQAAAAAAAAAAAAAAAAAAAB8AAABUAAAARHLEBf///wEAAAAAAAAAAAAAAAAAAAAAAAAAAAAAAAAAAAAAAAAAAAAAAAB/f38A5+bmA8zMzADAwP8Af39/AAAAAAAAAAAAAAAAAAAAAAAAAAAAIQAAABgAAAAUAAAAgBYAAEALAACQJAAA4BAAABAAAAAmAAAACAAAAP//////////MAAAABQAAAAAAAAAAAD//wAAAQAAAP//AAABAA=="/>
               </a:ext>
             </a:extLst>
           </p:cNvSpPr>
@@ -4088,7 +4122,7 @@
           <p:cNvSpPr>
             <a:extLst>
               <a:ext uri="smNativeData">
-                <pr:smNativeData xmlns:pr="smNativeData" xmlns="smNativeData" val="SMDATA_16_kRU2ahMAAAAlAAAACgAAAA0AAAAAkAAAAEgAAACQAAAASAAAAAAAAAAAAAAAAAAAAAEAAABQAAAAAAAAAAAA4D8AAAAAAADgPwAAAAAAAOA/AAAAAAAA4D8AAAAAAADgPwAAAAAAAOA/AAAAAAAA4D8AAAAAAADgPwAAAAAAAOA/AAAAAAAA4D8CAAAAjAAAAAAAAAAAAAAARHLEDP///wgAAAAAAAAAAAAAAAAAAAAAAAAAAAAAAAAAAAAAZAAAAAEAAABAAAAAAAAAAAAAAAAAAAAAAAAAAAAAAAAAAAAAAAAAAAAAAAAAAAAAAAAAAAAAAAAAAAAAAAAAAAAAAAAAAAAAAAAAAAAAAAAAAAAAAAAAAAAAAAAAAAAAFAAAADwAAAABAAAAAAAAAOCgOAAyAAAAAQAAACMAAAAjAAAAIwAAAB4AAAAAAAAAZAAAAGQAAAACAAAAZAAAAGQAAAAVAAAAYAAAAAAAAAAAAAAADwAAACADAAAAAAAAAAAAAAEAAACgMgAAVgcAAKr4//8BAAAAf39/AAEAAABkAAAAAAAAABQAAABAHwAAAAAAACYAAAAAAAAAwOD//wAAAAAmAAAAZAAAABYAAABMAAAAAAAAAAAAAAAEAAAAAAAAAAEAAADn5uYKAAAAACgAAAAoAAAAZAAAAGQAAAAAAAAAzMzMAAAAAABQAAAAUAAAAGQAAABkAAAAAAAAABcAAAAUAAAAAAAAAAAAAAD/fwAA/38AAAAAAAAJAAAABAAAAAAAAAAeAAAAaAAAAAAAAAAAAAAAAAAAAAAAAAAAAAAAECcAABAnAAAAAAAAAAAAAAAAAAAAAAAAAAAAAAAAAAAAAAAAAAAAABQAAAAAAAAAwMD/AAAAAABkAAAAMgAAAAAAAABkAAAAAAAAAH9/fwAKAAAAIgAAABgAAAAAAAAAAAAAAAAAAAAAAAAAAAAAAAAAAAAkAAAAJAAAAAAAAAAHAAAAAAAAAAAAAAAAAAAAAAAAAAAAAAAAAAAAf39/ACUAAABYAAAAAAAAAAAAAAAAAAAAAAAAAAAAAAAAAAAAAAAAAAAAAAAAAAAAAAAAAAAAAAA/AAAAAAAAAKCGAQAAAAAAAAAAAAAAAAAMAAAAAQAAAAAAAAAAAAAAAAAAAB8AAABUAAAARHLEBf///wEAAAAAAAAAAAAAAAAAAAAAAAAAAAAAAAAAAAAAAAAAAOCgOAB/f38A5+bmA8zMzADAwP8Af39/AAAAAAAAAAAAAAAAAAAAAAAAAAAAIQAAABgAAAAUAAAAICUAABAOAADAKgAAEA4AABAAAAAmAAAACAAAAP//////////MAAAABQAAAAAAAAAAAD//wAAAQAAAP//AAABAA=="/>
+                <pr:smNativeData xmlns:pr="smNativeData" xmlns="smNativeData" val="SMDATA_16_V2g2ahMAAAAlAAAACgAAAA0AAAAAkAAAAEgAAACQAAAASAAAAAAAAAAAAAAAAAAAAAEAAABQAAAAAAAAAAAA4D8AAAAAAADgPwAAAAAAAOA/AAAAAAAA4D8AAAAAAADgPwAAAAAAAOA/AAAAAAAA4D8AAAAAAADgPwAAAAAAAOA/AAAAAAAA4D8CAAAAjAAAAAAAAAAAAAAARHLEDP///wgAAAAAAAAAAAAAAAAAAAAAAAAAAAAAAAAAAAAAZAAAAAEAAABAAAAAAAAAAAAAAAAAAAAAAAAAAAAAAAAAAAAAAAAAAAAAAAAAAAAAAAAAAAAAAAAAAAAAAAAAAAAAAAAAAAAAAAAAAAAAAAAAAAAAAAAAAAAAAAAAAAAAFAAAADwAAAABAAAAAAAAAOCgOAAyAAAAAQAAACMAAAAjAAAAIwAAAB4AAAAAAAAAZAAAAGQAAAACAAAAZAAAAGQAAAAVAAAAYAAAAAAAAAAAAAAADwAAACADAAAAAAAAAAAAAAEAAACgMgAAVgcAAKr4//8BAAAAf39/AAEAAABkAAAAAAAAABQAAABAHwAAAAAAACYAAAAAAAAAwOD//wAAAAAmAAAAZAAAABYAAABMAAAAAAAAAAAAAAAEAAAAAAAAAAEAAADn5uYKAAAAACgAAAAoAAAAZAAAAGQAAAAAAAAAzMzMAAAAAABQAAAAUAAAAGQAAABkAAAAAAAAABcAAAAUAAAAAAAAAAAAAAD/fwAA/38AAAAAAAAJAAAABAAAAAAAAAAeAAAAaAAAAAAAAAAAAAAAAAAAAAAAAAAAAAAAECcAABAnAAAAAAAAAAAAAAAAAAAAAAAAAAAAAAAAAAAAAAAAAAAAABQAAAAAAAAAwMD/AAAAAABkAAAAMgAAAAAAAABkAAAAAAAAAH9/fwAKAAAAIgAAABgAAAAAAAAAAAAAAAAAAAAAAAAAAAAAAAAAAAAkAAAAJAAAAAAAAAAHAAAAAAAAAAAAAAAAAAAAAAAAAAAAAAAAAAAAf39/ACUAAABYAAAAAAAAAAAAAAAAAAAAAAAAAAAAAAAAAAAAAAAAAAAAAAAAAAAAAAAAAAAAAAA/AAAAAAAAAKCGAQAAAAAAAAAAAAAAAAAMAAAAAQAAAAAAAAAAAAAAAAAAAB8AAABUAAAARHLEBf///wEAAAAAAAAAAAAAAAAAAAAAAAAAAAAAAAAAAAAAAAAAAOCgOAB/f38A5+bmA8zMzADAwP8Af39/AAAAAAAAAAAAAAAAAAAAAAAAAAAAIQAAABgAAAAUAAAAICUAABAOAADAKgAAEA4AABAAAAAmAAAACAAAAP//////////MAAAABQAAAAAAAAAAAD//wAAAQAAAP//AAABAA=="/>
               </a:ext>
             </a:extLst>
           </p:cNvSpPr>
@@ -4120,7 +4154,7 @@
           <p:cNvSpPr>
             <a:extLst>
               <a:ext uri="smNativeData">
-                <pr:smNativeData xmlns:pr="smNativeData" xmlns="smNativeData" val="SMDATA_16_kRU2ahMAAAAlAAAAZQAAAA0AAAAAkAAAAEgAAACQAAAASAAAAAAAAAAAAAAAAAAAAAEAAABQAAAAexSuR+F6xD8AAAAAAADwvwAAAAAAAOA/AAAAAAAA4D8AAAAAAADgPwAAAAAAAOA/AAAAAAAA4D8AAAAAAADgPwAAAAAAAOA/AAAAAAAA4D8CAAAAjAAAAAEAAAAAAAAA9uK8AP///wgAAAAAAAAAAAAAAAAAAAAAAAAAAAAAAAAAAAAAeAAAAAEAAABAAAAAAAAAAAAAAABaAAAAAAAAAAAAAAAAAAAAAAAAAAAAAAAAAAAAAAAAAAAAAAAAAAAAAAAAAAAAAAAAAAAAAAAAAAAAAAAAAAAAAAAAAAAAAAAAAAAAFAAAADwAAAAAAAAAAAAAAAAAAAAPAAAAAQAAACMAAAAjAAAAIwAAAB4AAAAAAAAAZAAAAGQAAAAAAAAAZAAAAGQAAAAVAAAAYAAAAAAAAAAAAAAADwAAACADAAAAAAAAAAAAAAEAAACgMgAAVgcAAKr4//8BAAAAf39/AAEAAABkAAAAAAAAABQAAABAHwAAAAAAACYAAAAAAAAAwOD//wAAAAAmAAAAZAAAABYAAABMAAAAAQAAAAAAAAAGAAAAAAAAAAEAAAC5xNAAPAAAAAAAAAAoAAAAZAAAAGQAAAAAAAAAy8vLADwAAAAAAAAAKAAAAGQAAABkAAAAAAAAABcAAAAUAAAAAAAAAAAAAAD/fwAA/38AAAAAAAAJAAAABAAAAAAAAAAeAAAAaAAAAAAAAAAAAAAAAAAAAAAAAAAAAAAAECcAABAnAAAAAAAAAAAAAAAAAAAAAAAAAAAAAAAAAAAAAAAAAAAAAHgAAAAAAAAAwMD/AAAAAAAAAAAAAAAAAAAAAABkAAAAAAAAAH9/fwAKAAAAIgAAABgAAAAAAAAAAAAAAAAAAAAAAAAAAAAAAAAAAAAkAAAAJAAAAAAAAAAHAAAAAAAAAAAAAAAAAAAAAAAAAAAAAAAAAAAAf39/ACUAAABYAAAAAAAAAAAAAAAAAAAAAAAAAAAAAAAAAAAAAAAAAAAAAAAAAAAAAAAAAAAAAAA/AAAAAAAAAKCGAQAAAAAAAAAAAAAAAAAMAAAAAQAAAAAAAAAAAAAAAAAAAB8AAABUAAAA9uK8AP///wEAAAAAAAAAAAAAAAAAAAAAAAAAAAAAAAAAAAAAAAAAAAAAAAB/f38AucTQAMvLywDAwP8Af39/AAAAAAAAAAAAAAAAAAAAAAAAAAAAIQAAABgAAAAUAAAAUCsAAEALAADAPAAA4BAAABAAAAAmAAAACAAAAP//////////MAAAABQAAAAAAAAAAAD//wAAAQAAAP//AAABAA=="/>
+                <pr:smNativeData xmlns:pr="smNativeData" xmlns="smNativeData" val="SMDATA_16_V2g2ahMAAAAlAAAAZQAAAA0AAAAAkAAAAEgAAACQAAAASAAAAAAAAAAAAAAAAAAAAAEAAABQAAAAexSuR+F6xD8AAAAAAAAAAAAAAAAAAOA/AAAAAAAA4D8AAAAAAADgPwAAAAAAAOA/AAAAAAAA4D8AAAAAAADgPwAAAAAAAOA/AAAAAAAA4D8CAAAAjAAAAAEAAAAAAAAA9uK8AP///wgAAAAAAAAAAAAAAAAAAAAAAAAAAAAAAAAAAAAAeAAAAAEAAABAAAAAAAAAAAAAAABaAAAAAAAAAAAAAAAAAAAAAAAAAAAAAAAAAAAAAAAAAAAAAAAAAAAAAAAAAAAAAAAAAAAAAAAAAAAAAAAAAAAAAAAAAAAAAAAAAAAAFAAAADwAAAAAAAAAAAAAAAAAAAAPAAAAAQAAACMAAAAjAAAAIwAAAB4AAAAAAAAAZAAAAGQAAAAAAAAAZAAAAGQAAAAVAAAAYAAAAAAAAAAAAAAADwAAACADAAAAAAAAAAAAAAEAAACgMgAAVgcAAKr4//8BAAAAf39/AAEAAABkAAAAAAAAABQAAABAHwAAAAAAACYAAAAAAAAAwOD//wAAAAAmAAAAZAAAABYAAABMAAAAAQAAAAAAAAAGAAAAAAAAAAEAAAC5xNAAPAAAAAAAAAAoAAAAZAAAAGQAAAAAAAAAy8vLADwAAAAAAAAAKAAAAGQAAABkAAAAAAAAABcAAAAUAAAAAAAAAAAAAAD/fwAA/38AAAAAAAAJAAAABAAAAAAAAAAeAAAAaAAAAAAAAAAAAAAAAAAAAAAAAAAAAAAAECcAABAnAAAAAAAAAAAAAAAAAAAAAAAAAAAAAAAAAAAAAAAAAAAAAHgAAAAAAAAAwMD/AAAAAAAAAAAAAAAAAAAAAABkAAAAAAAAAH9/fwAKAAAAIgAAABgAAAAAAAAAAAAAAAAAAAAAAAAAAAAAAAAAAAAkAAAAJAAAAAAAAAAHAAAAAAAAAAAAAAAAAAAAAAAAAAAAAAAAAAAAf39/ACUAAABYAAAAAAAAAAAAAAAAAAAAAAAAAAAAAAAAAAAAAAAAAAAAAAAAAAAAAAAAAAAAAAA/AAAAAAAAAKCGAQAAAAAAAAAAAAAAAAAMAAAAAQAAAAAAAAAAAAAAAAAAAB8AAABUAAAA9uK8AP///wEAAAAAAAAAAAAAAAAAAAAAAAAAAAAAAAAAAAAAAAAAAAAAAAB/f38AucTQAMvLywDAwP8Af39/AAAAAAAAAAAAAAAAAAAAAAAAAAAAIQAAABgAAAAUAAAAUCsAAEALAADAPAAA4BAAABAAAAAmAAAACAAAAP//////////MAAAABQAAAAAAAAAAAD//wAAAQAAAP//AAABAA=="/>
               </a:ext>
             </a:extLst>
           </p:cNvSpPr>
@@ -4157,7 +4191,7 @@
           <p:cNvSpPr>
             <a:extLst>
               <a:ext uri="smNativeData">
-                <pr:smNativeData xmlns:pr="smNativeData" xmlns="smNativeData" val="SMDATA_16_kRU2ahMAAAAlAAAAZAAAAA0AAAAAAAAAAAAAAAAAAAAAAAAAAAAAAAABAAAAAAAAAAEAAABQAAAAAAAAAAAA4D8AAAAAAADgPwAAAAAAAOA/AAAAAAAA4D8AAAAAAADgPwAAAAAAAOA/AAAAAAAA4D8AAAAAAADgPwAAAAAAAOA/AAAAAAAA4D8CAAAAjAAAAAAAAAAAAAAARHLEDP///wgAAAAAAAAAAAAAAAAAAAAAAAAAAAAAAAAAAAAAZAAAAAEAAABAAAAAAAAAAAAAAAAAAAAAAAAAAAAAAAAAAAAAAAAAAAAAAAAAAAAAAAAAAAAAAAAAAAAAAAAAAAAAAAAAAAAAAAAAAAAAAAAAAAAAAAAAAAAAAAAAAAAAFAAAADwAAAAAAAAAAAAAAAAAAAAPAAAAAQAAACMAAAAjAAAAIwAAAB4AAAAAAAAAZAAAAGQAAAAAAAAAZAAAAGQAAAAVAAAAYAAAAAAAAAAAAAAADwAAACADAAAAAAAAAAAAAAEAAACgMgAAVgcAAKr4//8BAAAAf39/AAEAAABkAAAAAAAAABQAAABAHwAAAAAAACYAAAAAAAAAwOD//wAAAAAmAAAAZAAAABYAAABMAAAAAAAAAAAAAAAEAAAAAAAAAAEAAADn5uYKAAAAACgAAAAoAAAAZAAAAGQAAAAAAAAAzMzMAAAAAABQAAAAUAAAAGQAAABkAAAAAAAAABcAAAAUAAAAAAAAAAAAAAD/fwAA/38AAAAAAAAJAAAABAAAAAAAAAAeAAAAaAAAAAAAAAAAAAAAAAAAAAAAAAAAAAAAECcAABAnAAAAAAAAAAAAAAAAAAAAAAAAAAAAAAAAAAAAAAAAAAAAABQAAAAAAAAAwMD/AAAAAABkAAAAMgAAAAAAAABkAAAAAAAAAH9/fwAKAAAAIgAAABgAAAAAAAAAAAAAAAAAAAAAAAAAAAAAAAAAAAAkAAAAJAAAAAAAAAAHAAAAAAAAAAAAAAAAAAAAAAAAAAAAAAAAAAAAf39/ACUAAABYAAAAAAAAAAAAAAAAAAAAAAAAAAAAAAAAAAAAAAAAAAAAAAAAAAAAAAAAAAAAAAA/AAAAAAAAAKCGAQAAAAAAAAAAAAAAAAAMAAAAAQAAAAAAAAAAAAAAAAAAAB8AAABUAAAARHLEBf///wEAAAAAAAAAAAAAAAAAAAAAAAAAAAAAAAAAAAAAAAAAAAAAAAB/f38A5+bmA8zMzADAwP8Af39/AAAAAAAAAAAAAAAAAAAAAAAAAAAAIQAAABgAAAAUAAAAUCsAAEALAADAPAAA4BAAABAAAAAmAAAACAAAAP//////////MAAAABQAAAAAAAAAAAD//wAAAQAAAP//AAABAA=="/>
+                <pr:smNativeData xmlns:pr="smNativeData" xmlns="smNativeData" val="SMDATA_16_V2g2ahMAAAAlAAAAZAAAAA0AAAAAAAAAAAAAAAAAAAAAAAAAAAAAAAABAAAAAAAAAAEAAABQAAAAAAAAAAAA4D8AAAAAAADgPwAAAAAAAOA/AAAAAAAA4D8AAAAAAADgPwAAAAAAAOA/AAAAAAAA4D8AAAAAAADgPwAAAAAAAOA/AAAAAAAA4D8CAAAAjAAAAAAAAAAAAAAARHLEDP///wgAAAAAAAAAAAAAAAAAAAAAAAAAAAAAAAAAAAAAZAAAAAEAAABAAAAAAAAAAAAAAAAAAAAAAAAAAAAAAAAAAAAAAAAAAAAAAAAAAAAAAAAAAAAAAAAAAAAAAAAAAAAAAAAAAAAAAAAAAAAAAAAAAAAAAAAAAAAAAAAAAAAAFAAAADwAAAAAAAAAAAAAAAAAAAAPAAAAAQAAACMAAAAjAAAAIwAAAB4AAAAAAAAAZAAAAGQAAAAAAAAAZAAAAGQAAAAVAAAAYAAAAAAAAAAAAAAADwAAACADAAAAAAAAAAAAAAEAAACgMgAAVgcAAKr4//8BAAAAf39/AAEAAABkAAAAAAAAABQAAABAHwAAAAAAACYAAAAAAAAAwOD//wAAAAAmAAAAZAAAABYAAABMAAAAAAAAAAAAAAAEAAAAAAAAAAEAAADn5uYKAAAAACgAAAAoAAAAZAAAAGQAAAAAAAAAzMzMAAAAAABQAAAAUAAAAGQAAABkAAAAAAAAABcAAAAUAAAAAAAAAAAAAAD/fwAA/38AAAAAAAAJAAAABAAAAAAAAAAeAAAAaAAAAAAAAAAAAAAAAAAAAAAAAAAAAAAAECcAABAnAAAAAAAAAAAAAAAAAAAAAAAAAAAAAAAAAAAAAAAAAAAAABQAAAAAAAAAwMD/AAAAAABkAAAAMgAAAAAAAABkAAAAAAAAAH9/fwAKAAAAIgAAABgAAAAAAAAAAAAAAAAAAAAAAAAAAAAAAAAAAAAkAAAAJAAAAAAAAAAHAAAAAAAAAAAAAAAAAAAAAAAAAAAAAAAAAAAAf39/ACUAAABYAAAAAAAAAAAAAAAAAAAAAAAAAAAAAAAAAAAAAAAAAAAAAAAAAAAAAAAAAAAAAAA/AAAAAAAAAKCGAQAAAAAAAAAAAAAAAAAMAAAAAQAAAAAAAAAAAAAAAAAAAB8AAABUAAAARHLEBf///wEAAAAAAAAAAAAAAAAAAAAAAAAAAAAAAAAAAAAAAAAAAAAAAAB/f38A5+bmA8zMzADAwP8Af39/AAAAAAAAAAAAAAAAAAAAAAAAAAAAIQAAABgAAAAUAAAAUCsAAEALAADAPAAA4BAAABAAAAAmAAAACAAAAP//////////MAAAABQAAAAAAAAAAAD//wAAAQAAAP//AAABAA=="/>
               </a:ext>
             </a:extLst>
           </p:cNvSpPr>
@@ -4218,7 +4252,7 @@
           <p:cNvSpPr>
             <a:extLst>
               <a:ext uri="smNativeData">
-                <pr:smNativeData xmlns:pr="smNativeData" xmlns="smNativeData" val="SMDATA_16_kRU2ahMAAAAlAAAAZAAAAA0AAAAAkAAAAEgAAACQAAAASAAAAAAAAAAAAAAAAAAAAAEAAABQAAAAAAAAAAAA4D8AAAAAAADgPwAAAAAAAOA/AAAAAAAA4D8AAAAAAADgPwAAAAAAAOA/AAAAAAAA4D8AAAAAAADgPwAAAAAAAOA/AAAAAAAA4D8CAAAAjAAAAAAAAAAAAAAARHLEDP///wgAAAAAAAAAAAAAAAAAAAAAAAAAAAAAAAAAAAAAZAAAAAEAAABAAAAAAAAAAAAAAAAAAAAAAAAAAAAAAAAAAAAAAAAAAAAAAAAAAAAAAAAAAAAAAAAAAAAAAAAAAAAAAAAAAAAAAAAAAAAAAAAAAAAAAAAAAAAAAAAAAAAAFAAAADwAAAAAAAAAAAAAAAAAAAAPAAAAAQAAACMAAAAjAAAAIwAAAB4AAAAAAAAAZAAAAGQAAAAAAAAAZAAAAGQAAAAVAAAAYAAAAAAAAAAAAAAADwAAACADAAAAAAAAAAAAAAEAAACgMgAAVgcAAKr4//8BAAAAf39/AAEAAABkAAAAAAAAABQAAABAHwAAAAAAACYAAAAAAAAAwOD//wAAAAAmAAAAZAAAABYAAABMAAAAAAAAAAAAAAAEAAAAAAAAAAEAAADn5uYKAAAAACgAAAAoAAAAZAAAAGQAAAAAAAAAzMzMAAAAAABQAAAAUAAAAGQAAABkAAAAAAAAABcAAAAUAAAAAAAAAAAAAAD/fwAA/38AAAAAAAAJAAAABAAAAAAAAAAeAAAAaAAAAAAAAAAAAAAAAAAAAAAAAAAAAAAAECcAABAnAAAAAAAAAAAAAAAAAAAAAAAAAAAAAAAAAAAAAAAAAAAAABQAAAAAAAAAwMD/AAAAAABkAAAAMgAAAAAAAABkAAAAAAAAAH9/fwAKAAAAIgAAABgAAAAAAAAAAAAAAAAAAAAAAAAAAAAAAAAAAAAkAAAAJAAAAAAAAAAHAAAAAAAAAAAAAAAAAAAAAAAAAAAAAAAAAAAAf39/ACUAAABYAAAAAAAAAAAAAAAAAAAAAAAAAAAAAAAAAAAAAAAAAAAAAAAAAAAAAAAAAAAAAAA/AAAAAAAAAKCGAQAAAAAAAAAAAAAAAAAMAAAAAQAAAAAAAAAAAAAAAAAAAB8AAABUAAAARHLEBf///wEAAAAAAAAAAAAAAAAAAAAAAAAAAAAAAAAAAAAAAAAAAAAAAAB/f38A5+bmA8zMzADAwP8Af39/AAAAAAAAAAAAAAAAAAAAAAAAAAAAIQAAABgAAAAUAAAAYAMAAKAXAADgRgAAsCUAABAAAAAmAAAACAAAAP//////////MAAAABQAAAAAAAAAAAD//wAAAQAAAP//AAABAA=="/>
+                <pr:smNativeData xmlns:pr="smNativeData" xmlns="smNativeData" val="SMDATA_16_V2g2ahMAAAAlAAAAZAAAAA0AAAAAkAAAAEgAAACQAAAASAAAAAAAAAAAAAAAAAAAAAEAAABQAAAAAAAAAAAA4D8AAAAAAADgPwAAAAAAAOA/AAAAAAAA4D8AAAAAAADgPwAAAAAAAOA/AAAAAAAA4D8AAAAAAADgPwAAAAAAAOA/AAAAAAAA4D8CAAAAjAAAAAAAAAAAAAAARHLEDP///wgAAAAAAAAAAAAAAAAAAAAAAAAAAAAAAAAAAAAAZAAAAAEAAABAAAAAAAAAAAAAAAAAAAAAAAAAAAAAAAAAAAAAAAAAAAAAAAAAAAAAAAAAAAAAAAAAAAAAAAAAAAAAAAAAAAAAAAAAAAAAAAAAAAAAAAAAAAAAAAAAAAAAFAAAADwAAAAAAAAAAAAAAAAAAAAPAAAAAQAAACMAAAAjAAAAIwAAAB4AAAAAAAAAZAAAAGQAAAAAAAAAZAAAAGQAAAAVAAAAYAAAAAAAAAAAAAAADwAAACADAAAAAAAAAAAAAAEAAACgMgAAVgcAAKr4//8BAAAAf39/AAEAAABkAAAAAAAAABQAAABAHwAAAAAAACYAAAAAAAAAwOD//wAAAAAmAAAAZAAAABYAAABMAAAAAAAAAAAAAAAEAAAAAAAAAAEAAADn5uYKAAAAACgAAAAoAAAAZAAAAGQAAAAAAAAAzMzMAAAAAABQAAAAUAAAAGQAAABkAAAAAAAAABcAAAAUAAAAAAAAAAAAAAD/fwAA/38AAAAAAAAJAAAABAAAAAAAAAAeAAAAaAAAAAAAAAAAAAAAAAAAAAAAAAAAAAAAECcAABAnAAAAAAAAAAAAAAAAAAAAAAAAAAAAAAAAAAAAAAAAAAAAABQAAAAAAAAAwMD/AAAAAABkAAAAMgAAAAAAAABkAAAAAAAAAH9/fwAKAAAAIgAAABgAAAAAAAAAAAAAAAAAAAAAAAAAAAAAAAAAAAAkAAAAJAAAAAAAAAAHAAAAAAAAAAAAAAAAAAAAAAAAAAAAAAAAAAAAf39/ACUAAABYAAAAAAAAAAAAAAAAAAAAAAAAAAAAAAAAAAAAAAAAAAAAAAAAAAAAAAAAAAAAAAA/AAAAAAAAAKCGAQAAAAAAAAAAAAAAAAAMAAAAAQAAAAAAAAAAAAAAAAAAAB8AAABUAAAARHLEBf///wEAAAAAAAAAAAAAAAAAAAAAAAAAAAAAAAAAAAAAAAAAAAAAAAB/f38A5+bmA8zMzADAwP8Af39/AAAAAAAAAAAAAAAAAAAAAAAAAAAAIQAAABgAAAAUAAAAYAMAAKAXAADgRgAAsCUAAAAAAAAmAAAACAAAAP//////////MAAAABQAAAAAAAAAAAD//wAAAQAAAP//AAABAA=="/>
               </a:ext>
             </a:extLst>
           </p:cNvSpPr>
@@ -4281,20 +4315,76 @@
               </a:rPr>
               <a:t>tipo de crime (20 classes).</a:t>
             </a:r>
+            <a:endParaRPr lang="en-us" sz="1550" cap="none">
+              <a:solidFill>
+                <a:srgbClr val="283441"/>
+              </a:solidFill>
+            </a:endParaRPr>
+          </a:p>
+          <a:p>
+            <a:pPr marL="177800" indent="-177800" algn="l">
+              <a:spcAft>
+                <a:spcPts val="800"/>
+              </a:spcAft>
+              <a:buSzTx/>
+              <a:buChar char="•"/>
+            </a:pPr>
             <a:r>
               <a:rPr lang="en-us" sz="1550" cap="none">
                 <a:solidFill>
                   <a:srgbClr val="283441"/>
                 </a:solidFill>
               </a:rPr>
-              <a:t>Comparados Dummy (base-rate), </a:t>
-            </a:r>
+              <a:t>Comparados: </a:t>
+            </a:r>
+            <a:endParaRPr lang="en-us" sz="1550" cap="none">
+              <a:solidFill>
+                <a:srgbClr val="283441"/>
+              </a:solidFill>
+            </a:endParaRPr>
+          </a:p>
+          <a:p>
+            <a:pPr marL="342900" indent="-171450" algn="l" defTabSz="914400">
+              <a:spcAft>
+                <a:spcPts val="0"/>
+              </a:spcAft>
+              <a:buSzTx/>
+              <a:buChar char="•"/>
+              <a:tabLst>
+                <a:tab pos="171450" algn="l"/>
+              </a:tabLst>
+            </a:pPr>
             <a:r>
               <a:rPr lang="en-us" sz="1550" cap="none">
                 <a:solidFill>
                   <a:srgbClr val="283441"/>
                 </a:solidFill>
               </a:rPr>
+              <a:t>Dummy (base-rate); </a:t>
+            </a:r>
+            <a:endParaRPr lang="en-us" sz="1550" cap="none">
+              <a:solidFill>
+                <a:srgbClr val="283441"/>
+              </a:solidFill>
+            </a:endParaRPr>
+          </a:p>
+          <a:p>
+            <a:pPr marL="342900" indent="-171450" algn="l" defTabSz="914400">
+              <a:spcAft>
+                <a:spcPts val="0"/>
+              </a:spcAft>
+              <a:buSzTx/>
+              <a:buChar char="•"/>
+              <a:tabLst>
+                <a:tab pos="171450" algn="l"/>
+              </a:tabLst>
+            </a:pPr>
+            <a:r>
+              <a:rPr lang="en-us" sz="1550" cap="none">
+                <a:solidFill>
+                  <a:srgbClr val="283441"/>
+                </a:solidFill>
+              </a:rPr>
               <a:t>Regressão </a:t>
             </a:r>
             <a:r>
@@ -4303,16 +4393,50 @@
                   <a:srgbClr val="283441"/>
                 </a:solidFill>
               </a:rPr>
-              <a:t>Logística, </a:t>
-            </a:r>
+              <a:t>Logística; </a:t>
+            </a:r>
+            <a:endParaRPr lang="en-us" sz="1550" cap="none">
+              <a:solidFill>
+                <a:srgbClr val="283441"/>
+              </a:solidFill>
+            </a:endParaRPr>
+          </a:p>
+          <a:p>
+            <a:pPr marL="342900" indent="-171450" algn="l" defTabSz="914400">
+              <a:spcAft>
+                <a:spcPts val="0"/>
+              </a:spcAft>
+              <a:buSzTx/>
+              <a:buChar char="•"/>
+              <a:tabLst>
+                <a:tab pos="171450" algn="l"/>
+              </a:tabLst>
+            </a:pPr>
             <a:r>
               <a:rPr lang="en-us" sz="1550" cap="none">
                 <a:solidFill>
                   <a:srgbClr val="283441"/>
                 </a:solidFill>
               </a:rPr>
-              <a:t>RandomForest e </a:t>
-            </a:r>
+              <a:t>RandomForest; e</a:t>
+            </a:r>
+            <a:endParaRPr lang="en-us" sz="1550" cap="none">
+              <a:solidFill>
+                <a:srgbClr val="283441"/>
+              </a:solidFill>
+            </a:endParaRPr>
+          </a:p>
+          <a:p>
+            <a:pPr marL="342900" indent="-171450" algn="l" defTabSz="914400">
+              <a:spcAft>
+                <a:spcPts val="0"/>
+              </a:spcAft>
+              <a:buSzTx/>
+              <a:buChar char="•"/>
+              <a:tabLst>
+                <a:tab pos="171450" algn="l"/>
+              </a:tabLst>
+            </a:pPr>
             <a:r>
               <a:rPr lang="en-us" sz="1550" cap="none">
                 <a:solidFill>
@@ -4369,8 +4493,26 @@
               </a:rPr>
               <a:t>mil teste).</a:t>
             </a:r>
-            <a:r>
-              <a:rPr lang="en-us" sz="1550" b="1" cap="none">
+            <a:endParaRPr lang="en-us" sz="1550" cap="none">
+              <a:solidFill>
+                <a:srgbClr val="283441"/>
+              </a:solidFill>
+            </a:endParaRPr>
+          </a:p>
+          <a:p>
+            <a:pPr marL="177800" indent="-177800" algn="l">
+              <a:spcBef>
+                <a:spcPts val="800"/>
+              </a:spcBef>
+              <a:spcAft>
+                <a:spcPts val="800"/>
+              </a:spcAft>
+              <a:buSzTx/>
+              <a:buChar char="•"/>
+              <a:defRPr b="1" cap="none"/>
+            </a:pPr>
+            <a:r>
+              <a:rPr lang="en-us" sz="1550" cap="none">
                 <a:solidFill>
                   <a:srgbClr val="283441"/>
                 </a:solidFill>
@@ -4378,7 +4520,7 @@
               <a:t>Modelo </a:t>
             </a:r>
             <a:r>
-              <a:rPr lang="en-us" sz="1550" b="1" cap="none">
+              <a:rPr lang="en-us" sz="1550" cap="none">
                 <a:solidFill>
                   <a:srgbClr val="283441"/>
                 </a:solidFill>
@@ -4386,7 +4528,7 @@
               <a:t>escolhido </a:t>
             </a:r>
             <a:r>
-              <a:rPr lang="en-us" sz="1550" b="1" cap="none">
+              <a:rPr lang="en-us" sz="1550" cap="none">
                 <a:solidFill>
                   <a:srgbClr val="283441"/>
                 </a:solidFill>
@@ -4394,7 +4536,7 @@
               <a:t>pelo </a:t>
             </a:r>
             <a:r>
-              <a:rPr lang="en-us" sz="1550" b="1" cap="none">
+              <a:rPr lang="en-us" sz="1550" cap="none">
                 <a:solidFill>
                   <a:srgbClr val="283441"/>
                 </a:solidFill>
@@ -4402,7 +4544,7 @@
               <a:t>acerto </a:t>
             </a:r>
             <a:r>
-              <a:rPr lang="en-us" sz="1550" b="1" cap="none">
+              <a:rPr lang="en-us" sz="1550" cap="none">
                 <a:solidFill>
                   <a:srgbClr val="283441"/>
                 </a:solidFill>
@@ -4410,7 +4552,7 @@
               <a:t>da </a:t>
             </a:r>
             <a:r>
-              <a:rPr lang="en-us" sz="1550" b="1" cap="none">
+              <a:rPr lang="en-us" sz="1550" cap="none">
                 <a:solidFill>
                   <a:srgbClr val="283441"/>
                 </a:solidFill>
@@ -4418,7 +4560,7 @@
               <a:t>1ª </a:t>
             </a:r>
             <a:r>
-              <a:rPr lang="en-us" sz="1550" b="1" cap="none">
+              <a:rPr lang="en-us" sz="1550" cap="none">
                 <a:solidFill>
                   <a:srgbClr val="283441"/>
                 </a:solidFill>
@@ -4426,7 +4568,7 @@
               <a:t>opção (top-1), </a:t>
             </a:r>
             <a:r>
-              <a:rPr lang="en-us" sz="1550" b="1" cap="none">
+              <a:rPr lang="en-us" sz="1550" cap="none">
                 <a:solidFill>
                   <a:srgbClr val="283441"/>
                 </a:solidFill>
@@ -4434,7 +4576,7 @@
               <a:t>não </a:t>
             </a:r>
             <a:r>
-              <a:rPr lang="en-us" sz="1550" b="1" cap="none">
+              <a:rPr lang="en-us" sz="1550" cap="none">
                 <a:solidFill>
                   <a:srgbClr val="283441"/>
                 </a:solidFill>
@@ -4495,7 +4637,7 @@
           <p:cNvSpPr>
             <a:extLst>
               <a:ext uri="smNativeData">
-                <pr:smNativeData xmlns:pr="smNativeData" xmlns="smNativeData" val="SMDATA_16_kRU2ahMAAAAlAAAAZAAAAA0AAAAAkAAAAEgAAACQAAAASAAAAAAAAAABAAAAAAAAAAEAAABQAAAAAAAAAAAA4D8AAAAAAADgPwAAAAAAAOA/AAAAAAAA4D8AAAAAAADgPwAAAAAAAOA/AAAAAAAA4D8AAAAAAADgPwAAAAAAAOA/AAAAAAAA4D8CAAAAjAAAAAAAAAAAAAAARHLEDP///wgAAAAAAAAAAAAAAAAAAAAAAAAAAAAAAAAAAAAAZAAAAAEAAABAAAAAAAAAAAAAAAAAAAAAAAAAAAAAAAAAAAAAAAAAAAAAAAAAAAAAAAAAAAAAAAAAAAAAAAAAAAAAAAAAAAAAAAAAAAAAAAAAAAAAAAAAAAAAAAAAAAAAFAAAADwAAAAAAAAAAAAAAAAAAAAPAAAAAQAAACMAAAAjAAAAIwAAAB4AAAAAAAAAZAAAAGQAAAAAAAAAZAAAAGQAAAAVAAAAYAAAAAAAAAAAAAAADwAAACADAAAAAAAAAAAAAAEAAACgMgAAVgcAAKr4//8BAAAAf39/AAEAAABkAAAAAAAAABQAAABAHwAAAAAAACYAAAAAAAAAwOD//wAAAAAmAAAAZAAAABYAAABMAAAAAAAAAAAAAAAEAAAAAAAAAAEAAADn5uYKAAAAACgAAAAoAAAAZAAAAGQAAAAAAAAAzMzMAAAAAABQAAAAUAAAAGQAAABkAAAAAAAAABcAAAAUAAAAAAAAAAAAAAD/fwAA/38AAAAAAAAJAAAABAAAAAApAAAeAAAAaAAAAAAAAAAAAAAAAAAAAAAAAAAAAAAAECcAABAnAAAAAAAAAAAAAAAAAAAAAAAAAAAAAAAAAAAAAAAAAAAAABQAAAAAAAAAwMD/AAAAAABkAAAAMgAAAAAAAABkAAAAAAAAAH9/fwAKAAAAIgAAABgAAAAAAAAAAAAAAAAAAAAAAAAAAAAAAAAAAAAkAAAAJAAAAAAAAAAHAAAAAAAAAAAAAAAAAAAAAAAAAAAAAAAAAAAAf39/ACUAAABYAAAAAAAAAAAAAAAAAAAAAAAAAAAAAAAAAAAAAAAAAAAAAAAAAAAAAAAAAAAAAAA/AAAAAAAAAKCGAQAAAAAAAAAAAAAAAAAMAAAAAQAAAAAAAAAAAAAAAAAAAB8AAABUAAAARHLEBf///wEAAAAAAAAAAAAAAAAAAAAAAAAAAAAAAAAAAAAAAAAAAAAAAAB/f38A5+bmA8zMzADAwP8Af39/AAAAAAAAAAAAAAAAAAAAAAAAAAAAIQAAABgAAAAUAAAAYAMAACABAACgRwAA0AIAABAAAAAmAAAACAAAAP//////////MAAAABQAAAAAAAAAAAD//wAAAQAAAP//AAABAA=="/>
+                <pr:smNativeData xmlns:pr="smNativeData" xmlns="smNativeData" val="SMDATA_16_V2g2ahMAAAAlAAAAZAAAAA0AAAAAkAAAAEgAAACQAAAASAAAAAAAAAABAAAAAAAAAAEAAABQAAAAAAAAAAAA4D8AAAAAAADgPwAAAAAAAOA/AAAAAAAA4D8AAAAAAADgPwAAAAAAAOA/AAAAAAAA4D8AAAAAAADgPwAAAAAAAOA/AAAAAAAA4D8CAAAAjAAAAAAAAAAAAAAARHLEDP///wgAAAAAAAAAAAAAAAAAAAAAAAAAAAAAAAAAAAAAZAAAAAEAAABAAAAAAAAAAAAAAAAAAAAAAAAAAAAAAAAAAAAAAAAAAAAAAAAAAAAAAAAAAAAAAAAAAAAAAAAAAAAAAAAAAAAAAAAAAAAAAAAAAAAAAAAAAAAAAAAAAAAAFAAAADwAAAAAAAAAAAAAAAAAAAAPAAAAAQAAACMAAAAjAAAAIwAAAB4AAAAAAAAAZAAAAGQAAAAAAAAAZAAAAGQAAAAVAAAAYAAAAAAAAAAAAAAADwAAACADAAAAAAAAAAAAAAEAAACgMgAAVgcAAKr4//8BAAAAf39/AAEAAABkAAAAAAAAABQAAABAHwAAAAAAACYAAAAAAAAAwOD//wAAAAAmAAAAZAAAABYAAABMAAAAAAAAAAAAAAAEAAAAAAAAAAEAAADn5uYKAAAAACgAAAAoAAAAZAAAAGQAAAAAAAAAzMzMAAAAAABQAAAAUAAAAGQAAABkAAAAAAAAABcAAAAUAAAAAAAAAAAAAAD/fwAA/38AAAAAAAAJAAAABAAAAAApAAAeAAAAaAAAAAAAAAAAAAAAAAAAAAAAAAAAAAAAECcAABAnAAAAAAAAAAAAAAAAAAAAAAAAAAAAAAAAAAAAAAAAAAAAABQAAAAAAAAAwMD/AAAAAABkAAAAMgAAAAAAAABkAAAAAAAAAH9/fwAKAAAAIgAAABgAAAAAAAAAAAAAAAAAAAAAAAAAAAAAAAAAAAAkAAAAJAAAAAAAAAAHAAAAAAAAAAAAAAAAAAAAAAAAAAAAAAAAAAAAf39/ACUAAABYAAAAAAAAAAAAAAAAAAAAAAAAAAAAAAAAAAAAAAAAAAAAAAAAAAAAAAAAAAAAAAA/AAAAAAAAAKCGAQAAAAAAAAAAAAAAAAAMAAAAAQAAAAAAAAAAAAAAAAAAAB8AAABUAAAARHLEBf///wEAAAAAAAAAAAAAAAAAAAAAAAAAAAAAAAAAAAAAAAAAAAAAAAB/f38A5+bmA8zMzADAwP8Af39/AAAAAAAAAAAAAAAAAAAAAAAAAAAAIQAAABgAAAAUAAAAYAMAACABAACgRwAA0AIAABAAAAAmAAAACAAAAP//////////MAAAABQAAAAAAAAAAAD//wAAAQAAAP//AAABAA=="/>
               </a:ext>
             </a:extLst>
           </p:cNvSpPr>
@@ -4523,7 +4665,7 @@
               <a:buNone/>
             </a:pPr>
             <a:r>
-              <a:rPr lang="en-us" sz="1200" b="1" cap="none" spc="40">
+              <a:rPr lang="en-us" sz="1200" b="1" cap="none" spc="8">
                 <a:solidFill>
                   <a:srgbClr val="E0A038"/>
                 </a:solidFill>
@@ -4540,7 +4682,7 @@
           <p:cNvSpPr>
             <a:extLst>
               <a:ext uri="smNativeData">
-                <pr:smNativeData xmlns:pr="smNativeData" xmlns="smNativeData" val="SMDATA_16_kRU2ahMAAAAlAAAAZAAAAA0AAAAAkAAAAEgAAACQAAAASAAAAAAAAAABAAAAAAAAAAEAAABQAAAAAAAAAAAA4D8AAAAAAADgPwAAAAAAAOA/AAAAAAAA4D8AAAAAAADgPwAAAAAAAOA/AAAAAAAA4D8AAAAAAADgPwAAAAAAAOA/AAAAAAAA4D8CAAAAjAAAAAAAAAAAAAAARHLEDP///wgAAAAAAAAAAAAAAAAAAAAAAAAAAAAAAAAAAAAAZAAAAAEAAABAAAAAAAAAAAAAAAAAAAAAAAAAAAAAAAAAAAAAAAAAAAAAAAAAAAAAAAAAAAAAAAAAAAAAAAAAAAAAAAAAAAAAAAAAAAAAAAAAAAAAAAAAAAAAAAAAAAAAFAAAADwAAAAAAAAAAAAAAAAAAAAPAAAAAQAAACMAAAAjAAAAIwAAAB4AAAAAAAAAZAAAAGQAAAAAAAAAZAAAAGQAAAAVAAAAYAAAAAAAAAAAAAAADwAAACADAAAAAAAAAAAAAAEAAACgMgAAVgcAAKr4//8BAAAAf39/AAEAAABkAAAAAAAAABQAAABAHwAAAAAAACYAAAAAAAAAwOD//wAAAAAmAAAAZAAAABYAAABMAAAAAAAAAAAAAAAEAAAAAAAAAAEAAADn5uYKAAAAACgAAAAoAAAAZAAAAGQAAAAAAAAAzMzMAAAAAABQAAAAUAAAAGQAAABkAAAAAAAAABcAAAAUAAAAAAAAAAAAAAD/fwAA/38AAAAAAAAJAAAABAAAAAAAAAAeAAAAaAAAAAAAAAAAAAAAAAAAAAAAAAAAAAAAECcAABAnAAAAAAAAAAAAAAAAAAAAAAAAAAAAAAAAAAAAAAAAAAAAABQAAAAAAAAAwMD/AAAAAABkAAAAMgAAAAAAAABkAAAAAAAAAH9/fwAKAAAAIgAAABgAAAAAAAAAAAAAAAAAAAAAAAAAAAAAAAAAAAAkAAAAJAAAAAAAAAAHAAAAAAAAAAAAAAAAAAAAAAAAAAAAAAAAAAAAf39/ACUAAABYAAAAAAAAAAAAAAAAAAAAAAAAAAAAAAAAAAAAAAAAAAAAAAAAAAAAAAAAAAAAAAA/AAAAAAAAAKCGAQAAAAAAAAAAAAAAAAAMAAAAAQAAAAAAAAAAAAAAAAAAAB8AAABUAAAARHLEBf///wEAAAAAAAAAAAAAAAAAAAAAAAAAAAAAAAAAAAAAAAAAAAAAAAB/f38A5+bmA8zMzADAwP8Af39/AAAAAAAAAAAAAAAAAAAAAAAAAAAAIQAAABgAAAAUAAAAYAMAAF0CAACgRwAA3QYAABAAAAAmAAAACAAAAP//////////MAAAABQAAAAAAAAAAAD//wAAAQAAAP//AAABAA=="/>
+                <pr:smNativeData xmlns:pr="smNativeData" xmlns="smNativeData" val="SMDATA_16_V2g2ahMAAAAlAAAAZAAAAA0AAAAAkAAAAEgAAACQAAAASAAAAAAAAAABAAAAAAAAAAEAAABQAAAAAAAAAAAA4D8AAAAAAADgPwAAAAAAAOA/AAAAAAAA4D8AAAAAAADgPwAAAAAAAOA/AAAAAAAA4D8AAAAAAADgPwAAAAAAAOA/AAAAAAAA4D8CAAAAjAAAAAAAAAAAAAAARHLEDP///wgAAAAAAAAAAAAAAAAAAAAAAAAAAAAAAAAAAAAAZAAAAAEAAABAAAAAAAAAAAAAAAAAAAAAAAAAAAAAAAAAAAAAAAAAAAAAAAAAAAAAAAAAAAAAAAAAAAAAAAAAAAAAAAAAAAAAAAAAAAAAAAAAAAAAAAAAAAAAAAAAAAAAFAAAADwAAAAAAAAAAAAAAAAAAAAPAAAAAQAAACMAAAAjAAAAIwAAAB4AAAAAAAAAZAAAAGQAAAAAAAAAZAAAAGQAAAAVAAAAYAAAAAAAAAAAAAAADwAAACADAAAAAAAAAAAAAAEAAACgMgAAVgcAAKr4//8BAAAAf39/AAEAAABkAAAAAAAAABQAAABAHwAAAAAAACYAAAAAAAAAwOD//wAAAAAmAAAAZAAAABYAAABMAAAAAAAAAAAAAAAEAAAAAAAAAAEAAADn5uYKAAAAACgAAAAoAAAAZAAAAGQAAAAAAAAAzMzMAAAAAABQAAAAUAAAAGQAAABkAAAAAAAAABcAAAAUAAAAAAAAAAAAAAD/fwAA/38AAAAAAAAJAAAABAAAAAAAAAAeAAAAaAAAAAAAAAAAAAAAAAAAAAAAAAAAAAAAECcAABAnAAAAAAAAAAAAAAAAAAAAAAAAAAAAAAAAAAAAAAAAAAAAABQAAAAAAAAAwMD/AAAAAABkAAAAMgAAAAAAAABkAAAAAAAAAH9/fwAKAAAAIgAAABgAAAAAAAAAAAAAAAAAAAAAAAAAAAAAAAAAAAAkAAAAJAAAAAAAAAAHAAAAAAAAAAAAAAAAAAAAAAAAAAAAAAAAAAAAf39/ACUAAABYAAAAAAAAAAAAAAAAAAAAAAAAAAAAAAAAAAAAAAAAAAAAAAAAAAAAAAAAAAAAAAA/AAAAAAAAAKCGAQAAAAAAAAAAAAAAAAAMAAAAAQAAAAAAAAAAAAAAAAAAAB8AAABUAAAARHLEBf///wEAAAAAAAAAAAAAAAAAAAAAAAAAAAAAAAAAAAAAAAAAAAAAAAB/f38A5+bmA8zMzADAwP8Af39/AAAAAAAAAAAAAAAAAAAAAAAAAAAAIQAAABgAAAAUAAAAYAMAAF0CAACgRwAA3QYAABAAAAAmAAAACAAAAP//////////MAAAABQAAAAAAAAAAAD//wAAAQAAAP//AAABAA=="/>
               </a:ext>
             </a:extLst>
           </p:cNvSpPr>
@@ -4610,7 +4752,7 @@
           <p:cNvSpPr>
             <a:extLst>
               <a:ext uri="smNativeData">
-                <pr:smNativeData xmlns:pr="smNativeData" xmlns="smNativeData" val="SMDATA_16_kRU2ahMAAAAlAAAAZQAAAA0AAAAAkAAAAEgAAACQAAAASAAAAAAAAAAAAAAAAAAAAAEAAABQAAAA6N7DJcedoj8AAAAAAADwvwAAAAAAAOA/AAAAAAAA4D8AAAAAAADgPwAAAAAAAOA/AAAAAAAA4D8AAAAAAADgPwAAAAAAAOA/AAAAAAAA4D8CAAAAjAAAAAEAAAAAAAAADyRAAP///wgAAAAAAAAAAAAAAAAAAAAAAAAAAAAAAAAAAAAAeAAAAAEAAABAAAAAAAAAAAAAAABaAAAAAAAAAAAAAAAAAAAAAAAAAAAAAAAAAAAAAAAAAAAAAAAAAAAAAAAAAAAAAAAAAAAAAAAAAAAAAAAAAAAAAAAAAAAAAAAAAAAAFAAAADwAAAAAAAAAAAAAAAAAAAAPAAAAAQAAACMAAAAjAAAAIwAAAB4AAAAAAAAAZAAAAGQAAAAAAAAAZAAAAGQAAAAVAAAAYAAAAAAAAAAAAAAADwAAACADAAAAAAAAAAAAAAEAAACgMgAAVgcAAKr4//8BAAAAf39/AAEAAABkAAAAAAAAABQAAABAHwAAAAAAACYAAAAAAAAAwOD//wAAAAAmAAAAZAAAABYAAABMAAAAAQAAAAAAAAAGAAAAAAAAAAEAAAC5xNAAPAAAAAAAAAAoAAAAZAAAAGQAAAAAAAAAy8vLADwAAAAAAAAAKAAAAGQAAABkAAAAAAAAABcAAAAUAAAAAAAAAAAAAAD/fwAA/38AAAAAAAAJAAAABAAAAAAAAAAeAAAAaAAAAAAAAAAAAAAAAAAAAAAAAAAAAAAAECcAABAnAAAAAAAAAAAAAAAAAAAAAAAAAAAAAAAAAAAAAAAAAAAAAHgAAAAAAAAAwMD/AAAAAAAAAAAAAAAAAAAAAABkAAAAAAAAAH9/fwAKAAAAIgAAABgAAAAAAAAAAAAAAAAAAAAAAAAAAAAAAAAAAAAkAAAAJAAAAAAAAAAHAAAAAAAAAAAAAAAAAAAAAAAAAAAAAAAAAAAAf39/ACUAAABYAAAAAAAAAAAAAAAAAAAAAAAAAAAAAAAAAAAAAAAAAAAAAAAAAAAAAAAAAAAAAAA/AAAAAAAAAKCGAQAAAAAAAAAAAAAAAAAMAAAAAQAAAAAAAAAAAAAAAAAAAB8AAABUAAAADyRAAP///wEAAAAAAAAAAAAAAAAAAAAAAAAAAAAAAAAAAAAAAAAAAAAAAAB/f38AucTQAMvLywDAwP8Af39/AAAAAAAAAAAAAAAAAAAAAAAAAAAAIQAAABgAAAAUAAAAYAMAAJAJAABAHQAAUCIAABAAAAAmAAAACAAAAP//////////MAAAABQAAAAAAAAAAAD//wAAAQAAAP//AAABAA=="/>
+                <pr:smNativeData xmlns:pr="smNativeData" xmlns="smNativeData" val="SMDATA_16_V2g2ahMAAAAlAAAAZQAAAA0AAAAAkAAAAEgAAACQAAAASAAAAAAAAAAAAAAAAAAAAAEAAABQAAAA6N7DJcedoj8AAAAAAAAAAAAAAAAAAOA/AAAAAAAA4D8AAAAAAADgPwAAAAAAAOA/AAAAAAAA4D8AAAAAAADgPwAAAAAAAOA/AAAAAAAA4D8CAAAAjAAAAAEAAAAAAAAADyRAAP///wgAAAAAAAAAAAAAAAAAAAAAAAAAAAAAAAAAAAAAeAAAAAEAAABAAAAAAAAAAAAAAABaAAAAAAAAAAAAAAAAAAAAAAAAAAAAAAAAAAAAAAAAAAAAAAAAAAAAAAAAAAAAAAAAAAAAAAAAAAAAAAAAAAAAAAAAAAAAAAAAAAAAFAAAADwAAAAAAAAAAAAAAAAAAAAPAAAAAQAAACMAAAAjAAAAIwAAAB4AAAAAAAAAZAAAAGQAAAAAAAAAZAAAAGQAAAAVAAAAYAAAAAAAAAAAAAAADwAAACADAAAAAAAAAAAAAAEAAACgMgAAVgcAAKr4//8BAAAAf39/AAEAAABkAAAAAAAAABQAAABAHwAAAAAAACYAAAAAAAAAwOD//wAAAAAmAAAAZAAAABYAAABMAAAAAQAAAAAAAAAGAAAAAAAAAAEAAAC5xNAAPAAAAAAAAAAoAAAAZAAAAGQAAAAAAAAAy8vLADwAAAAAAAAAKAAAAGQAAABkAAAAAAAAABcAAAAUAAAAAAAAAAAAAAD/fwAA/38AAAAAAAAJAAAABAAAAAAAAAAeAAAAaAAAAAAAAAAAAAAAAAAAAAAAAAAAAAAAECcAABAnAAAAAAAAAAAAAAAAAAAAAAAAAAAAAAAAAAAAAAAAAAAAAHgAAAAAAAAAwMD/AAAAAAAAAAAAAAAAAAAAAABkAAAAAAAAAH9/fwAKAAAAIgAAABgAAAAAAAAAAAAAAAAAAAAAAAAAAAAAAAAAAAAkAAAAJAAAAAAAAAAHAAAAAAAAAAAAAAAAAAAAAAAAAAAAAAAAAAAAf39/ACUAAABYAAAAAAAAAAAAAAAAAAAAAAAAAAAAAAAAAAAAAAAAAAAAAAAAAAAAAAAAAAAAAAA/AAAAAAAAAKCGAQAAAAAAAAAAAAAAAAAMAAAAAQAAAAAAAAAAAAAAAAAAAB8AAABUAAAADyRAAP///wEAAAAAAAAAAAAAAAAAAAAAAAAAAAAAAAAAAAAAAAAAAAAAAAB/f38AucTQAMvLywDAwP8Af39/AAAAAAAAAAAAAAAAAAAAAAAAAAAAIQAAABgAAAAUAAAAYAMAAJAJAABAHQAAUCIAABAAAAAmAAAACAAAAP//////////MAAAABQAAAAAAAAAAAD//wAAAQAAAP//AAABAA=="/>
               </a:ext>
             </a:extLst>
           </p:cNvSpPr>
@@ -4647,7 +4789,7 @@
           <p:cNvSpPr>
             <a:extLst>
               <a:ext uri="smNativeData">
-                <pr:smNativeData xmlns:pr="smNativeData" xmlns="smNativeData" val="SMDATA_16_kRU2ahMAAAAlAAAAZAAAAA0AAAAAkAAAAEgAAACQAAAASAAAAAAAAAABAAAAAAAAAAEAAABQAAAAAAAAAAAA4D8AAAAAAADgPwAAAAAAAOA/AAAAAAAA4D8AAAAAAADgPwAAAAAAAOA/AAAAAAAA4D8AAAAAAADgPwAAAAAAAOA/AAAAAAAA4D8CAAAAjAAAAAAAAAAAAAAARHLEDP///wgAAAAAAAAAAAAAAAAAAAAAAAAAAAAAAAAAAAAAZAAAAAEAAABAAAAAAAAAAAAAAAAAAAAAAAAAAAAAAAAAAAAAAAAAAAAAAAAAAAAAAAAAAAAAAAAAAAAAAAAAAAAAAAAAAAAAAAAAAAAAAAAAAAAAAAAAAAAAAAAAAAAAFAAAADwAAAAAAAAAAAAAAAAAAAAPAAAAAQAAACMAAAAjAAAAIwAAAB4AAAAAAAAAZAAAAGQAAAAAAAAAZAAAAGQAAAAVAAAAYAAAAAAAAAAAAAAADwAAACADAAAAAAAAAAAAAAEAAACgMgAAVgcAAKr4//8BAAAAf39/AAEAAABkAAAAAAAAABQAAABAHwAAAAAAACYAAAAAAAAAwOD//wAAAAAmAAAAZAAAABYAAABMAAAAAAAAAAAAAAAEAAAAAAAAAAEAAADn5uYKAAAAACgAAAAoAAAAZAAAAGQAAAAAAAAAzMzMAAAAAABQAAAAUAAAAGQAAABkAAAAAAAAABcAAAAUAAAAAAAAAAAAAAD/fwAA/38AAAAAAAAJAAAABAAAAIAwBToeAAAAaAAAAAAAAAAAAAAAAAAAAAAAAAAAAAAAECcAABAnAAAAAAAAAAAAAAAAAAAAAAAAAAAAAAAAAAAAAAAAAAAAABQAAAAAAAAAwMD/AAAAAABkAAAAMgAAAAAAAABkAAAAAAAAAH9/fwAKAAAAIgAAABgAAAAAAAAAAAAAAAAAAAAAAAAAAAAAAAAAAAAkAAAAJAAAAAAAAAAHAAAAAAAAAAAAAAAAAAAAAAAAAAAAAAAAAAAAf39/ACUAAABYAAAAAAAAAAAAAAAAAAAAAAAAAAAAAAAAAAAAAAAAAAAAAAAAAAAAAAAAAAAAAAA/AAAAAAAAAKCGAQAAAAAAAAAAAAAAAAAMAAAAAQAAAAAAAAAAAAAAAAAAAB8AAABUAAAARHLEBf///wEAAAAAAAAAAAAAAAAAAAAAAAAAAAAAAAAAAAAAAAAAAAAAAAB/f38A5+bmA8zMzADAwP8Af39/AAAAAAAAAAAAAAAAAAAAAAAAAAAAIQAAABgAAAAUAAAAYAMAAPgKAABAHQAAyA0AABAAAAAmAAAACAAAAP//////////MAAAABQAAAAAAAAAAAD//wAAAQAAAP//AAABAA=="/>
+                <pr:smNativeData xmlns:pr="smNativeData" xmlns="smNativeData" val="SMDATA_16_V2g2ahMAAAAlAAAAZAAAAA0AAAAAkAAAAEgAAACQAAAASAAAAAAAAAABAAAAAAAAAAEAAABQAAAAAAAAAAAA4D8AAAAAAADgPwAAAAAAAOA/AAAAAAAA4D8AAAAAAADgPwAAAAAAAOA/AAAAAAAA4D8AAAAAAADgPwAAAAAAAOA/AAAAAAAA4D8CAAAAjAAAAAAAAAAAAAAARHLEDP///wgAAAAAAAAAAAAAAAAAAAAAAAAAAAAAAAAAAAAAZAAAAAEAAABAAAAAAAAAAAAAAAAAAAAAAAAAAAAAAAAAAAAAAAAAAAAAAAAAAAAAAAAAAAAAAAAAAAAAAAAAAAAAAAAAAAAAAAAAAAAAAAAAAAAAAAAAAAAAAAAAAAAAFAAAADwAAAAAAAAAAAAAAAAAAAAPAAAAAQAAACMAAAAjAAAAIwAAAB4AAAAAAAAAZAAAAGQAAAAAAAAAZAAAAGQAAAAVAAAAYAAAAAAAAAAAAAAADwAAACADAAAAAAAAAAAAAAEAAACgMgAAVgcAAKr4//8BAAAAf39/AAEAAABkAAAAAAAAABQAAABAHwAAAAAAACYAAAAAAAAAwOD//wAAAAAmAAAAZAAAABYAAABMAAAAAAAAAAAAAAAEAAAAAAAAAAEAAADn5uYKAAAAACgAAAAoAAAAZAAAAGQAAAAAAAAAzMzMAAAAAABQAAAAUAAAAGQAAABkAAAAAAAAABcAAAAUAAAAAAAAAAAAAAD/fwAA/38AAAAAAAAJAAAABAAAAIAwBToeAAAAaAAAAAAAAAAAAAAAAAAAAAAAAAAAAAAAECcAABAnAAAAAAAAAAAAAAAAAAAAAAAAAAAAAAAAAAAAAAAAAAAAABQAAAAAAAAAwMD/AAAAAABkAAAAMgAAAAAAAABkAAAAAAAAAH9/fwAKAAAAIgAAABgAAAAAAAAAAAAAAAAAAAAAAAAAAAAAAAAAAAAkAAAAJAAAAAAAAAAHAAAAAAAAAAAAAAAAAAAAAAAAAAAAAAAAAAAAf39/ACUAAABYAAAAAAAAAAAAAAAAAAAAAAAAAAAAAAAAAAAAAAAAAAAAAAAAAAAAAAAAAAAAAAA/AAAAAAAAAKCGAQAAAAAAAAAAAAAAAAAMAAAAAQAAAAAAAAAAAAAAAAAAAB8AAABUAAAARHLEBf///wEAAAAAAAAAAAAAAAAAAAAAAAAAAAAAAAAAAAAAAAAAAAAAAAB/f38A5+bmA8zMzADAwP8Af39/AAAAAAAAAAAAAAAAAAAAAAAAAAAAIQAAABgAAAAUAAAAYAMAAPgKAABAHQAAyA0AABAAAAAmAAAACAAAAP//////////MAAAABQAAAAAAAAAAAD//wAAAQAAAP//AAABAA=="/>
               </a:ext>
             </a:extLst>
           </p:cNvSpPr>
@@ -4706,7 +4848,7 @@
           <p:cNvSpPr>
             <a:extLst>
               <a:ext uri="smNativeData">
-                <pr:smNativeData xmlns:pr="smNativeData" xmlns="smNativeData" val="SMDATA_16_kRU2ahMAAAAlAAAAZAAAAA0AAAAAkAAAAEgAAACQAAAASAAAAAAAAAABAAAAAAAAAAEAAABQAAAAAAAAAAAA4D8AAAAAAADgPwAAAAAAAOA/AAAAAAAA4D8AAAAAAADgPwAAAAAAAOA/AAAAAAAA4D8AAAAAAADgPwAAAAAAAOA/AAAAAAAA4D8CAAAAjAAAAAAAAAAAAAAARHLEDP///wgAAAAAAAAAAAAAAAAAAAAAAAAAAAAAAAAAAAAAZAAAAAEAAABAAAAAAAAAAAAAAAAAAAAAAAAAAAAAAAAAAAAAAAAAAAAAAAAAAAAAAAAAAAAAAAAAAAAAAAAAAAAAAAAAAAAAAAAAAAAAAAAAAAAAAAAAAAAAAAAAAAAAFAAAADwAAAAAAAAAAAAAAAAAAAAPAAAAAQAAACMAAAAjAAAAIwAAAB4AAAAAAAAAZAAAAGQAAAAAAAAAZAAAAGQAAAAVAAAAYAAAAAAAAAAAAAAADwAAACADAAAAAAAAAAAAAAEAAACgMgAAVgcAAKr4//8BAAAAf39/AAEAAABkAAAAAAAAABQAAABAHwAAAAAAACYAAAAAAAAAwOD//wAAAAAmAAAAZAAAABYAAABMAAAAAAAAAAAAAAAEAAAAAAAAAAEAAADn5uYKAAAAACgAAAAoAAAAZAAAAGQAAAAAAAAAzMzMAAAAAABQAAAAUAAAAGQAAABkAAAAAAAAABcAAAAUAAAAAAAAAAAAAAD/fwAA/38AAAAAAAAJAAAABAAAAIAwBToeAAAAaAAAAAAAAAAAAAAAAAAAAAAAAAAAAAAAECcAABAnAAAAAAAAAAAAAAAAAAAAAAAAAAAAAAAAAAAAAAAAAAAAABQAAAAAAAAAwMD/AAAAAABkAAAAMgAAAAAAAABkAAAAAAAAAH9/fwAKAAAAIgAAABgAAAAAAAAAAAAAAAAAAAAAAAAAAAAAAAAAAAAkAAAAJAAAAAAAAAAHAAAAAAAAAAAAAAAAAAAAAAAAAAAAAAAAAAAAf39/ACUAAABYAAAAAAAAAAAAAAAAAAAAAAAAAAAAAAAAAAAAAAAAAAAAAAAAAAAAAAAAAAAAAAA/AAAAAAAAAKCGAQAAAAAAAAAAAAAAAAAMAAAAAQAAAAAAAAAAAAAAAAAAAB8AAABUAAAARHLEBf///wEAAAAAAAAAAAAAAAAAAAAAAAAAAAAAAAAAAAAAAAAAAAAAAAB/f38A5+bmA8zMzADAwP8Af39/AAAAAAAAAAAAAAAAAAAAAAAAAAAAIQAAABgAAAAUAAAAWAUAAFgOAADYGwAAmBAAABAAAAAmAAAACAAAAP//////////MAAAABQAAAAAAAAAAAD//wAAAQAAAP//AAABAA=="/>
+                <pr:smNativeData xmlns:pr="smNativeData" xmlns="smNativeData" val="SMDATA_16_V2g2ahMAAAAlAAAAZAAAAA0AAAAAkAAAAEgAAACQAAAASAAAAAAAAAABAAAAAAAAAAEAAABQAAAAAAAAAAAA4D8AAAAAAADgPwAAAAAAAOA/AAAAAAAA4D8AAAAAAADgPwAAAAAAAOA/AAAAAAAA4D8AAAAAAADgPwAAAAAAAOA/AAAAAAAA4D8CAAAAjAAAAAAAAAAAAAAARHLEDP///wgAAAAAAAAAAAAAAAAAAAAAAAAAAAAAAAAAAAAAZAAAAAEAAABAAAAAAAAAAAAAAAAAAAAAAAAAAAAAAAAAAAAAAAAAAAAAAAAAAAAAAAAAAAAAAAAAAAAAAAAAAAAAAAAAAAAAAAAAAAAAAAAAAAAAAAAAAAAAAAAAAAAAFAAAADwAAAAAAAAAAAAAAAAAAAAPAAAAAQAAACMAAAAjAAAAIwAAAB4AAAAAAAAAZAAAAGQAAAAAAAAAZAAAAGQAAAAVAAAAYAAAAAAAAAAAAAAADwAAACADAAAAAAAAAAAAAAEAAACgMgAAVgcAAKr4//8BAAAAf39/AAEAAABkAAAAAAAAABQAAABAHwAAAAAAACYAAAAAAAAAwOD//wAAAAAmAAAAZAAAABYAAABMAAAAAAAAAAAAAAAEAAAAAAAAAAEAAADn5uYKAAAAACgAAAAoAAAAZAAAAGQAAAAAAAAAzMzMAAAAAABQAAAAUAAAAGQAAABkAAAAAAAAABcAAAAUAAAAAAAAAAAAAAD/fwAA/38AAAAAAAAJAAAABAAAAIAwBToeAAAAaAAAAAAAAAAAAAAAAAAAAAAAAAAAAAAAECcAABAnAAAAAAAAAAAAAAAAAAAAAAAAAAAAAAAAAAAAAAAAAAAAABQAAAAAAAAAwMD/AAAAAABkAAAAMgAAAAAAAABkAAAAAAAAAH9/fwAKAAAAIgAAABgAAAAAAAAAAAAAAAAAAAAAAAAAAAAAAAAAAAAkAAAAJAAAAAAAAAAHAAAAAAAAAAAAAAAAAAAAAAAAAAAAAAAAAAAAf39/ACUAAABYAAAAAAAAAAAAAAAAAAAAAAAAAAAAAAAAAAAAAAAAAAAAAAAAAAAAAAAAAAAAAAA/AAAAAAAAAKCGAQAAAAAAAAAAAAAAAAAMAAAAAQAAAAAAAAAAAAAAAAAAAB8AAABUAAAARHLEBf///wEAAAAAAAAAAAAAAAAAAAAAAAAAAAAAAAAAAAAAAAAAAAAAAAB/f38A5+bmA8zMzADAwP8Af39/AAAAAAAAAAAAAAAAAAAAAAAAAAAAIQAAABgAAAAUAAAAWAUAAFgOAADYGwAAmBAAABAAAAAmAAAACAAAAP//////////MAAAABQAAAAAAAAAAAD//wAAAQAAAP//AAABAA=="/>
               </a:ext>
             </a:extLst>
           </p:cNvSpPr>
@@ -4767,7 +4909,7 @@
           <p:cNvSpPr>
             <a:extLst>
               <a:ext uri="smNativeData">
-                <pr:smNativeData xmlns:pr="smNativeData" xmlns="smNativeData" val="SMDATA_16_kRU2ahMAAAAlAAAAZQAAAA0AAAAAkAAAAEgAAACQAAAASAAAAAAAAAAAAAAAAAAAAAEAAABQAAAA+fcZFw6E0D8AAAAAAADwvwAAAAAAAOA/AAAAAAAA4D8AAAAAAADgPwAAAAAAAOA/AAAAAAAA4D8AAAAAAADgPwAAAAAAAOA/AAAAAAAA4D8CAAAAjAAAAAEAAAAAAAAAHDpeAP///wgAAAAAAAAAAAAAAAAAAAAAAAAAAAAAAAAAAAAAeAAAAAEAAABAAAAAAAAAAAAAAABaAAAAAAAAAAAAAAAAAAAAAAAAAAAAAAAAAAAAAAAAAAAAAAAAAAAAAAAAAAAAAAAAAAAAAAAAAAAAAAAAAAAAAAAAAAAAAAAAAAAAFAAAADwAAAAAAAAAAAAAAAAAAAAPAAAAAQAAACMAAAAjAAAAIwAAAB4AAAAAAAAAZAAAAGQAAAAAAAAAZAAAAGQAAAAVAAAAYAAAAAAAAAAAAAAADwAAACADAAAAAAAAAAAAAAEAAACgMgAAVgcAAKr4//8BAAAAf39/AAEAAABkAAAAAAAAABQAAABAHwAAAAAAACYAAAAAAAAAwOD//wAAAAAmAAAAZAAAABYAAABMAAAAAQAAAAAAAAAGAAAAAAAAAAEAAAC5xNAAPAAAAAAAAAAoAAAAZAAAAGQAAAAAAAAAy8vLADwAAAAAAAAAKAAAAGQAAABkAAAAAAAAABcAAAAUAAAAAAAAAAAAAAD/fwAA/38AAAAAAAAJAAAABAAAAAAAAAAeAAAAaAAAAAAAAAAAAAAAAAAAAAAAAAAAAAAAECcAABAnAAAAAAAAAAAAAAAAAAAAAAAAAAAAAAAAAAAAAAAAAAAAAHgAAAAAAAAAwMD/AAAAAAAAAAAAAAAAAAAAAABkAAAAAAAAAH9/fwAKAAAAIgAAABgAAAAAAAAAAAAAAAAAAAAAAAAAAAAAAAAAAAAkAAAAJAAAAAAAAAAHAAAAAAAAAAAAAAAAAAAAAAAAAAAAAAAAAAAAf39/ACUAAABYAAAAAAAAAAAAAAAAAAAAAAAAAAAAAAAAAAAAAAAAAAAAAAAAAAAAAAAAAAAAAAA/AAAAAAAAAKCGAQAAAAAAAAAAAAAAAAAMAAAAAQAAAAAAAAAAAAAAAAAAAB8AAABUAAAAHDpeAP///wEAAAAAAAAAAAAAAAAAAAAAAAAAAAAAAAAAAAAAAAAAAAAAAAB/f38AucTQAMvLywDAwP8Af39/AAAAAAAAAAAAAAAAAAAAAAAAAAAAIQAAABgAAAAUAAAAWAUAACgRAABIGwAApRQAABAAAAAmAAAACAAAAP//////////MAAAABQAAAAAAAAAAAD//wAAAQAAAP//AAABAA=="/>
+                <pr:smNativeData xmlns:pr="smNativeData" xmlns="smNativeData" val="SMDATA_16_V2g2ahMAAAAlAAAAZQAAAA0AAAAAkAAAAEgAAACQAAAASAAAAAAAAAAAAAAAAAAAAAEAAABQAAAA+fcZFw6E0D8AAAAAAAAAAAAAAAAAAOA/AAAAAAAA4D8AAAAAAADgPwAAAAAAAOA/AAAAAAAA4D8AAAAAAADgPwAAAAAAAOA/AAAAAAAA4D8CAAAAjAAAAAEAAAAAAAAAHDpeAP///wgAAAAAAAAAAAAAAAAAAAAAAAAAAAAAAAAAAAAAeAAAAAEAAABAAAAAAAAAAAAAAABaAAAAAAAAAAAAAAAAAAAAAAAAAAAAAAAAAAAAAAAAAAAAAAAAAAAAAAAAAAAAAAAAAAAAAAAAAAAAAAAAAAAAAAAAAAAAAAAAAAAAFAAAADwAAAAAAAAAAAAAAAAAAAAPAAAAAQAAACMAAAAjAAAAIwAAAB4AAAAAAAAAZAAAAGQAAAAAAAAAZAAAAGQAAAAVAAAAYAAAAAAAAAAAAAAADwAAACADAAAAAAAAAAAAAAEAAACgMgAAVgcAAKr4//8BAAAAf39/AAEAAABkAAAAAAAAABQAAABAHwAAAAAAACYAAAAAAAAAwOD//wAAAAAmAAAAZAAAABYAAABMAAAAAQAAAAAAAAAGAAAAAAAAAAEAAAC5xNAAPAAAAAAAAAAoAAAAZAAAAGQAAAAAAAAAy8vLADwAAAAAAAAAKAAAAGQAAABkAAAAAAAAABcAAAAUAAAAAAAAAAAAAAD/fwAA/38AAAAAAAAJAAAABAAAAAAAAAAeAAAAaAAAAAAAAAAAAAAAAAAAAAAAAAAAAAAAECcAABAnAAAAAAAAAAAAAAAAAAAAAAAAAAAAAAAAAAAAAAAAAAAAAHgAAAAAAAAAwMD/AAAAAAAAAAAAAAAAAAAAAABkAAAAAAAAAH9/fwAKAAAAIgAAABgAAAAAAAAAAAAAAAAAAAAAAAAAAAAAAAAAAAAkAAAAJAAAAAAAAAAHAAAAAAAAAAAAAAAAAAAAAAAAAAAAAAAAAAAAf39/ACUAAABYAAAAAAAAAAAAAAAAAAAAAAAAAAAAAAAAAAAAAAAAAAAAAAAAAAAAAAAAAAAAAAA/AAAAAAAAAKCGAQAAAAAAAAAAAAAAAAAMAAAAAQAAAAAAAAAAAAAAAAAAAB8AAABUAAAAHDpeAP///wEAAAAAAAAAAAAAAAAAAAAAAAAAAAAAAAAAAAAAAAAAAAAAAAB/f38AucTQAMvLywDAwP8Af39/AAAAAAAAAAAAAAAAAAAAAAAAAAAAIQAAABgAAAAUAAAAWAUAACgRAABIGwAApRQAABAAAAAmAAAACAAAAP//////////MAAAABQAAAAAAAAAAAD//wAAAQAAAP//AAABAA=="/>
               </a:ext>
             </a:extLst>
           </p:cNvSpPr>
@@ -4804,7 +4946,7 @@
           <p:cNvSpPr>
             <a:extLst>
               <a:ext uri="smNativeData">
-                <pr:smNativeData xmlns:pr="smNativeData" xmlns="smNativeData" val="SMDATA_16_kRU2ahMAAAAlAAAAZAAAAA0AAAAAAAAAAAAAAAAAAAAAAAAAAAAAAAABAAAAAAAAAAEAAABQAAAAAAAAAAAA4D8AAAAAAADgPwAAAAAAAOA/AAAAAAAA4D8AAAAAAADgPwAAAAAAAOA/AAAAAAAA4D8AAAAAAADgPwAAAAAAAOA/AAAAAAAA4D8CAAAAjAAAAAAAAAAAAAAARHLEDP///wgAAAAAAAAAAAAAAAAAAAAAAAAAAAAAAAAAAAAAZAAAAAEAAABAAAAAAAAAAAAAAAAAAAAAAAAAAAAAAAAAAAAAAAAAAAAAAAAAAAAAAAAAAAAAAAAAAAAAAAAAAAAAAAAAAAAAAAAAAAAAAAAAAAAAAAAAAAAAAAAAAAAAFAAAADwAAAAAAAAAAAAAAAAAAAAPAAAAAQAAACMAAAAjAAAAIwAAAB4AAAAAAAAAZAAAAGQAAAAAAAAAZAAAAGQAAAAVAAAAYAAAAAAAAAAAAAAADwAAACADAAAAAAAAAAAAAAEAAACgMgAAVgcAAKr4//8BAAAAf39/AAEAAABkAAAAAAAAABQAAABAHwAAAAAAACYAAAAAAAAAwOD//wAAAAAmAAAAZAAAABYAAABMAAAAAAAAAAAAAAAEAAAAAAAAAAEAAADn5uYKAAAAACgAAAAoAAAAZAAAAGQAAAAAAAAAzMzMAAAAAABQAAAAUAAAAGQAAABkAAAAAAAAABcAAAAUAAAAAAAAAAAAAAD/fwAA/38AAAAAAAAJAAAABAAAAAAAAAAeAAAAaAAAAAAAAAAAAAAAAAAAAAAAAAAAAAAAECcAABAnAAAAAAAAAAAAAAAAAAAAAAAAAAAAAAAAAAAAAAAAAAAAABQAAAAAAAAAwMD/AAAAAABkAAAAMgAAAAAAAABkAAAAAAAAAH9/fwAKAAAAIgAAABgAAAAAAAAAAAAAAAAAAAAAAAAAAAAAAAAAAAAkAAAAJAAAAAAAAAAHAAAAAAAAAAAAAAAAAAAAAAAAAAAAAAAAAAAAf39/ACUAAABYAAAAAAAAAAAAAAAAAAAAAAAAAAAAAAAAAAAAAAAAAAAAAAAAAAAAAAAAAAAAAAA/AAAAAAAAAKCGAQAAAAAAAAAAAAAAAAAMAAAAAQAAAAAAAAAAAAAAAAAAAB8AAABUAAAARHLEBf///wEAAAAAAAAAAAAAAAAAAAAAAAAAAAAAAAAAAAAAAAAAAAAAAAB/f38A5+bmA8zMzADAwP8Af39/AAAAAAAAAAAAAAAAAAAAAAAAAAAAIQAAABgAAAAUAAAAwAYAACgRAAAAGwAApRQAABAAAAAmAAAACAAAAP//////////MAAAABQAAAAAAAAAAAD//wAAAQAAAP//AAABAA=="/>
+                <pr:smNativeData xmlns:pr="smNativeData" xmlns="smNativeData" val="SMDATA_16_V2g2ahMAAAAlAAAAZAAAAA0AAAAAAAAAAAAAAAAAAAAAAAAAAAAAAAABAAAAAAAAAAEAAABQAAAAAAAAAAAA4D8AAAAAAADgPwAAAAAAAOA/AAAAAAAA4D8AAAAAAADgPwAAAAAAAOA/AAAAAAAA4D8AAAAAAADgPwAAAAAAAOA/AAAAAAAA4D8CAAAAjAAAAAAAAAAAAAAARHLEDP///wgAAAAAAAAAAAAAAAAAAAAAAAAAAAAAAAAAAAAAZAAAAAEAAABAAAAAAAAAAAAAAAAAAAAAAAAAAAAAAAAAAAAAAAAAAAAAAAAAAAAAAAAAAAAAAAAAAAAAAAAAAAAAAAAAAAAAAAAAAAAAAAAAAAAAAAAAAAAAAAAAAAAAFAAAADwAAAAAAAAAAAAAAAAAAAAPAAAAAQAAACMAAAAjAAAAIwAAAB4AAAAAAAAAZAAAAGQAAAAAAAAAZAAAAGQAAAAVAAAAYAAAAAAAAAAAAAAADwAAACADAAAAAAAAAAAAAAEAAACgMgAAVgcAAKr4//8BAAAAf39/AAEAAABkAAAAAAAAABQAAABAHwAAAAAAACYAAAAAAAAAwOD//wAAAAAmAAAAZAAAABYAAABMAAAAAAAAAAAAAAAEAAAAAAAAAAEAAADn5uYKAAAAACgAAAAoAAAAZAAAAGQAAAAAAAAAzMzMAAAAAABQAAAAUAAAAGQAAABkAAAAAAAAABcAAAAUAAAAAAAAAAAAAAD/fwAA/38AAAAAAAAJAAAABAAAAAAAAAAeAAAAaAAAAAAAAAAAAAAAAAAAAAAAAAAAAAAAECcAABAnAAAAAAAAAAAAAAAAAAAAAAAAAAAAAAAAAAAAAAAAAAAAABQAAAAAAAAAwMD/AAAAAABkAAAAMgAAAAAAAABkAAAAAAAAAH9/fwAKAAAAIgAAABgAAAAAAAAAAAAAAAAAAAAAAAAAAAAAAAAAAAAkAAAAJAAAAAAAAAAHAAAAAAAAAAAAAAAAAAAAAAAAAAAAAAAAAAAAf39/ACUAAABYAAAAAAAAAAAAAAAAAAAAAAAAAAAAAAAAAAAAAAAAAAAAAAAAAAAAAAAAAAAAAAA/AAAAAAAAAKCGAQAAAAAAAAAAAAAAAAAMAAAAAQAAAAAAAAAAAAAAAAAAAB8AAABUAAAARHLEBf///wEAAAAAAAAAAAAAAAAAAAAAAAAAAAAAAAAAAAAAAAAAAAAAAAB/f38A5+bmA8zMzADAwP8Af39/AAAAAAAAAAAAAAAAAAAAAAAAAAAAIQAAABgAAAAUAAAAwAYAACgRAAAAGwAApRQAABAAAAAmAAAACAAAAP//////////MAAAABQAAAAAAAAAAAD//wAAAQAAAP//AAABAA=="/>
               </a:ext>
             </a:extLst>
           </p:cNvSpPr>
@@ -4857,7 +4999,7 @@
           <p:cNvSpPr>
             <a:extLst>
               <a:ext uri="smNativeData">
-                <pr:smNativeData xmlns:pr="smNativeData" xmlns="smNativeData" val="SMDATA_16_kRU2ahMAAAAlAAAAZQAAAA0AAAAAkAAAAEgAAACQAAAASAAAAAAAAAAAAAAAAAAAAAEAAABQAAAA+fcZFw6E0D8AAAAAAADwvwAAAAAAAOA/AAAAAAAA4D8AAAAAAADgPwAAAAAAAOA/AAAAAAAA4D8AAAAAAADgPwAAAAAAAOA/AAAAAAAA4D8CAAAAjAAAAAEAAAAAAAAAHDpeAP///wgAAAAAAAAAAAAAAAAAAAAAAAAAAAAAAAAAAAAAeAAAAAEAAABAAAAAAAAAAAAAAABaAAAAAAAAAAAAAAAAAAAAAAAAAAAAAAAAAAAAAAAAAAAAAAAAAAAAAAAAAAAAAAAAAAAAAAAAAAAAAAAAAAAAAAAAAAAAAAAAAAAAFAAAADwAAAAAAAAAAAAAAAAAAAAPAAAAAQAAACMAAAAjAAAAIwAAAB4AAAAAAAAAZAAAAGQAAAAAAAAAZAAAAGQAAAAVAAAAYAAAAAAAAAAAAAAADwAAACADAAAAAAAAAAAAAAEAAACgMgAAVgcAAKr4//8BAAAAf39/AAEAAABkAAAAAAAAABQAAABAHwAAAAAAACYAAAAAAAAAwOD//wAAAAAmAAAAZAAAABYAAABMAAAAAQAAAAAAAAAGAAAAAAAAAAEAAAC5xNAAPAAAAAAAAAAoAAAAZAAAAGQAAAAAAAAAy8vLADwAAAAAAAAAKAAAAGQAAABkAAAAAAAAABcAAAAUAAAAAAAAAAAAAAD/fwAA/38AAAAAAAAJAAAABAAAAPMoAAAeAAAAaAAAAAAAAAAAAAAAAAAAAAAAAAAAAAAAECcAABAnAAAAAAAAAAAAAAAAAAAAAAAAAAAAAAAAAAAAAAAAAAAAAHgAAAAAAAAAwMD/AAAAAAAAAAAAAAAAAAAAAABkAAAAAAAAAH9/fwAKAAAAIgAAABgAAAAAAAAAAAAAAAAAAAAAAAAAAAAAAAAAAAAkAAAAJAAAAAAAAAAHAAAAAAAAAAAAAAAAAAAAAAAAAAAAAAAAAAAAf39/ACUAAABYAAAAAAAAAAAAAAAAAAAAAAAAAAAAAAAAAAAAAAAAAAAAAAAAAAAAAAAAAAAAAAA/AAAAAAAAAKCGAQAAAAAAAAAAAAAAAAAMAAAAAQAAAAAAAAAAAAAAAAAAAB8AAABUAAAAHDpeAP///wEAAAAAAAAAAAAAAAAAAAAAAAAAAAAAAAAAAAAAAAAAAAAAAAB/f38AucTQAMvLywDAwP8Af39/AAAAAAAAAAAAAAAAAAAAAAAAAAAAIQAAABgAAAAUAAAAWAUAAIsVAABIGwAACBkAABAAAAAmAAAACAAAAP//////////MAAAABQAAAAAAAAAAAD//wAAAQAAAP//AAABAA=="/>
+                <pr:smNativeData xmlns:pr="smNativeData" xmlns="smNativeData" val="SMDATA_16_V2g2ahMAAAAlAAAAZQAAAA0AAAAAkAAAAEgAAACQAAAASAAAAAAAAAAAAAAAAAAAAAEAAABQAAAA+fcZFw6E0D8AAAAAAAAAAAAAAAAAAOA/AAAAAAAA4D8AAAAAAADgPwAAAAAAAOA/AAAAAAAA4D8AAAAAAADgPwAAAAAAAOA/AAAAAAAA4D8CAAAAjAAAAAEAAAAAAAAAHDpeAP///wgAAAAAAAAAAAAAAAAAAAAAAAAAAAAAAAAAAAAAeAAAAAEAAABAAAAAAAAAAAAAAABaAAAAAAAAAAAAAAAAAAAAAAAAAAAAAAAAAAAAAAAAAAAAAAAAAAAAAAAAAAAAAAAAAAAAAAAAAAAAAAAAAAAAAAAAAAAAAAAAAAAAFAAAADwAAAAAAAAAAAAAAAAAAAAPAAAAAQAAACMAAAAjAAAAIwAAAB4AAAAAAAAAZAAAAGQAAAAAAAAAZAAAAGQAAAAVAAAAYAAAAAAAAAAAAAAADwAAACADAAAAAAAAAAAAAAEAAACgMgAAVgcAAKr4//8BAAAAf39/AAEAAABkAAAAAAAAABQAAABAHwAAAAAAACYAAAAAAAAAwOD//wAAAAAmAAAAZAAAABYAAABMAAAAAQAAAAAAAAAGAAAAAAAAAAEAAAC5xNAAPAAAAAAAAAAoAAAAZAAAAGQAAAAAAAAAy8vLADwAAAAAAAAAKAAAAGQAAABkAAAAAAAAABcAAAAUAAAAAAAAAAAAAAD/fwAA/38AAAAAAAAJAAAABAAAAPMoAAAeAAAAaAAAAAAAAAAAAAAAAAAAAAAAAAAAAAAAECcAABAnAAAAAAAAAAAAAAAAAAAAAAAAAAAAAAAAAAAAAAAAAAAAAHgAAAAAAAAAwMD/AAAAAAAAAAAAAAAAAAAAAABkAAAAAAAAAH9/fwAKAAAAIgAAABgAAAAAAAAAAAAAAAAAAAAAAAAAAAAAAAAAAAAkAAAAJAAAAAAAAAAHAAAAAAAAAAAAAAAAAAAAAAAAAAAAAAAAAAAAf39/ACUAAABYAAAAAAAAAAAAAAAAAAAAAAAAAAAAAAAAAAAAAAAAAAAAAAAAAAAAAAAAAAAAAAA/AAAAAAAAAKCGAQAAAAAAAAAAAAAAAAAMAAAAAQAAAAAAAAAAAAAAAAAAAB8AAABUAAAAHDpeAP///wEAAAAAAAAAAAAAAAAAAAAAAAAAAAAAAAAAAAAAAAAAAAAAAAB/f38AucTQAMvLywDAwP8Af39/AAAAAAAAAAAAAAAAAAAAAAAAAAAAIQAAABgAAAAUAAAAWAUAAIsVAABIGwAACBkAABAAAAAmAAAACAAAAP//////////MAAAABQAAAAAAAAAAAD//wAAAQAAAP//AAABAA=="/>
               </a:ext>
             </a:extLst>
           </p:cNvSpPr>
@@ -4894,7 +5036,7 @@
           <p:cNvSpPr>
             <a:extLst>
               <a:ext uri="smNativeData">
-                <pr:smNativeData xmlns:pr="smNativeData" xmlns="smNativeData" val="SMDATA_16_kRU2ahMAAAAlAAAAZAAAAA0AAAAAAAAAAAAAAAAAAAAAAAAAAAAAAAABAAAAAAAAAAEAAABQAAAAAAAAAAAA4D8AAAAAAADgPwAAAAAAAOA/AAAAAAAA4D8AAAAAAADgPwAAAAAAAOA/AAAAAAAA4D8AAAAAAADgPwAAAAAAAOA/AAAAAAAA4D8CAAAAjAAAAAAAAAAAAAAARHLEDP///wgAAAAAAAAAAAAAAAAAAAAAAAAAAAAAAAAAAAAAZAAAAAEAAABAAAAAAAAAAAAAAAAAAAAAAAAAAAAAAAAAAAAAAAAAAAAAAAAAAAAAAAAAAAAAAAAAAAAAAAAAAAAAAAAAAAAAAAAAAAAAAAAAAAAAAAAAAAAAAAAAAAAAFAAAADwAAAAAAAAAAAAAAAAAAAAPAAAAAQAAACMAAAAjAAAAIwAAAB4AAAAAAAAAZAAAAGQAAAAAAAAAZAAAAGQAAAAVAAAAYAAAAAAAAAAAAAAADwAAACADAAAAAAAAAAAAAAEAAACgMgAAVgcAAKr4//8BAAAAf39/AAEAAABkAAAAAAAAABQAAABAHwAAAAAAACYAAAAAAAAAwOD//wAAAAAmAAAAZAAAABYAAABMAAAAAAAAAAAAAAAEAAAAAAAAAAEAAADn5uYKAAAAACgAAAAoAAAAZAAAAGQAAAAAAAAAzMzMAAAAAABQAAAAUAAAAGQAAABkAAAAAAAAABcAAAAUAAAAAAAAAAAAAAD/fwAA/38AAAAAAAAJAAAABAAAAEkCAAAeAAAAaAAAAAAAAAAAAAAAAAAAAAAAAAAAAAAAECcAABAnAAAAAAAAAAAAAAAAAAAAAAAAAAAAAAAAAAAAAAAAAAAAABQAAAAAAAAAwMD/AAAAAABkAAAAMgAAAAAAAABkAAAAAAAAAH9/fwAKAAAAIgAAABgAAAAAAAAAAAAAAAAAAAAAAAAAAAAAAAAAAAAkAAAAJAAAAAAAAAAHAAAAAAAAAAAAAAAAAAAAAAAAAAAAAAAAAAAAf39/ACUAAABYAAAAAAAAAAAAAAAAAAAAAAAAAAAAAAAAAAAAAAAAAAAAAAAAAAAAAAAAAAAAAAA/AAAAAAAAAKCGAQAAAAAAAAAAAAAAAAAMAAAAAQAAAAAAAAAAAAAAAAAAAB8AAABUAAAARHLEBf///wEAAAAAAAAAAAAAAAAAAAAAAAAAAAAAAAAAAAAAAAAAAAAAAAB/f38A5+bmA8zMzADAwP8Af39/AAAAAAAAAAAAAAAAAAAAAAAAAAAAIQAAABgAAAAUAAAAwAYAAIsVAAAAGwAACBkAABAAAAAmAAAACAAAAP//////////MAAAABQAAAAAAAAAAAD//wAAAQAAAP//AAABAA=="/>
+                <pr:smNativeData xmlns:pr="smNativeData" xmlns="smNativeData" val="SMDATA_16_V2g2ahMAAAAlAAAAZAAAAA0AAAAAAAAAAAAAAAAAAAAAAAAAAAAAAAABAAAAAAAAAAEAAABQAAAAAAAAAAAA4D8AAAAAAADgPwAAAAAAAOA/AAAAAAAA4D8AAAAAAADgPwAAAAAAAOA/AAAAAAAA4D8AAAAAAADgPwAAAAAAAOA/AAAAAAAA4D8CAAAAjAAAAAAAAAAAAAAARHLEDP///wgAAAAAAAAAAAAAAAAAAAAAAAAAAAAAAAAAAAAAZAAAAAEAAABAAAAAAAAAAAAAAAAAAAAAAAAAAAAAAAAAAAAAAAAAAAAAAAAAAAAAAAAAAAAAAAAAAAAAAAAAAAAAAAAAAAAAAAAAAAAAAAAAAAAAAAAAAAAAAAAAAAAAFAAAADwAAAAAAAAAAAAAAAAAAAAPAAAAAQAAACMAAAAjAAAAIwAAAB4AAAAAAAAAZAAAAGQAAAAAAAAAZAAAAGQAAAAVAAAAYAAAAAAAAAAAAAAADwAAACADAAAAAAAAAAAAAAEAAACgMgAAVgcAAKr4//8BAAAAf39/AAEAAABkAAAAAAAAABQAAABAHwAAAAAAACYAAAAAAAAAwOD//wAAAAAmAAAAZAAAABYAAABMAAAAAAAAAAAAAAAEAAAAAAAAAAEAAADn5uYKAAAAACgAAAAoAAAAZAAAAGQAAAAAAAAAzMzMAAAAAABQAAAAUAAAAGQAAABkAAAAAAAAABcAAAAUAAAAAAAAAAAAAAD/fwAA/38AAAAAAAAJAAAABAAAAEkCAAAeAAAAaAAAAAAAAAAAAAAAAAAAAAAAAAAAAAAAECcAABAnAAAAAAAAAAAAAAAAAAAAAAAAAAAAAAAAAAAAAAAAAAAAABQAAAAAAAAAwMD/AAAAAABkAAAAMgAAAAAAAABkAAAAAAAAAH9/fwAKAAAAIgAAABgAAAAAAAAAAAAAAAAAAAAAAAAAAAAAAAAAAAAkAAAAJAAAAAAAAAAHAAAAAAAAAAAAAAAAAAAAAAAAAAAAAAAAAAAAf39/ACUAAABYAAAAAAAAAAAAAAAAAAAAAAAAAAAAAAAAAAAAAAAAAAAAAAAAAAAAAAAAAAAAAAA/AAAAAAAAAKCGAQAAAAAAAAAAAAAAAAAMAAAAAQAAAAAAAAAAAAAAAAAAAB8AAABUAAAARHLEBf///wEAAAAAAAAAAAAAAAAAAAAAAAAAAAAAAAAAAAAAAAAAAAAAAAB/f38A5+bmA8zMzADAwP8Af39/AAAAAAAAAAAAAAAAAAAAAAAAAAAAIQAAABgAAAAUAAAAwAYAAIsVAAAAGwAACBkAABAAAAAmAAAACAAAAP//////////MAAAABQAAAAAAAAAAAD//wAAAQAAAP//AAABAA=="/>
               </a:ext>
             </a:extLst>
           </p:cNvSpPr>
@@ -4947,7 +5089,7 @@
           <p:cNvSpPr>
             <a:extLst>
               <a:ext uri="smNativeData">
-                <pr:smNativeData xmlns:pr="smNativeData" xmlns="smNativeData" val="SMDATA_16_kRU2ahMAAAAlAAAAZQAAAA0AAAAAkAAAAEgAAACQAAAASAAAAAAAAAAAAAAAAAAAAAEAAABQAAAA+fcZFw6E0D8AAAAAAADwvwAAAAAAAOA/AAAAAAAA4D8AAAAAAADgPwAAAAAAAOA/AAAAAAAA4D8AAAAAAADgPwAAAAAAAOA/AAAAAAAA4D8CAAAAjAAAAAEAAAAAAAAA4KA4AP///wgAAAAAAAAAAAAAAAAAAAAAAAAAAAAAAAAAAAAAeAAAAAEAAABAAAAAAAAAAAAAAABaAAAAAAAAAAAAAAAAAAAAAAAAAAAAAAAAAAAAAAAAAAAAAAAAAAAAAAAAAAAAAAAAAAAAAAAAAAAAAAAAAAAAAAAAAAAAAAAAAAAAFAAAADwAAAAAAAAAAAAAAAAAAAAPAAAAAQAAACMAAAAjAAAAIwAAAB4AAAAAAAAAZAAAAGQAAAAAAAAAZAAAAGQAAAAVAAAAYAAAAAAAAAAAAAAADwAAACADAAAAAAAAAAAAAAEAAACgMgAAVgcAAKr4//8BAAAAf39/AAEAAABkAAAAAAAAABQAAABAHwAAAAAAACYAAAAAAAAAwOD//wAAAAAmAAAAZAAAABYAAABMAAAAAQAAAAAAAAAGAAAAAAAAAAEAAAC5xNAAPAAAAAAAAAAoAAAAZAAAAGQAAAAAAAAAy8vLADwAAAAAAAAAKAAAAGQAAABkAAAAAAAAABcAAAAUAAAAAAAAAAAAAAD/fwAA/38AAAAAAAAJAAAABAAAAP////8eAAAAaAAAAAAAAAAAAAAAAAAAAAAAAAAAAAAAECcAABAnAAAAAAAAAAAAAAAAAAAAAAAAAAAAAAAAAAAAAAAAAAAAAHgAAAAAAAAAwMD/AAAAAAAAAAAAAAAAAAAAAABkAAAAAAAAAH9/fwAKAAAAIgAAABgAAAAAAAAAAAAAAAAAAAAAAAAAAAAAAAAAAAAkAAAAJAAAAAAAAAAHAAAAAAAAAAAAAAAAAAAAAAAAAAAAAAAAAAAAf39/ACUAAABYAAAAAAAAAAAAAAAAAAAAAAAAAAAAAAAAAAAAAAAAAAAAAAAAAAAAAAAAAAAAAAA/AAAAAAAAAKCGAQAAAAAAAAAAAAAAAAAMAAAAAQAAAAAAAAAAAAAAAAAAAB8AAABUAAAA4KA4AP///wEAAAAAAAAAAAAAAAAAAAAAAAAAAAAAAAAAAAAAAAAAAAAAAAB/f38AucTQAMvLywDAwP8Af39/AAAAAAAAAAAAAAAAAAAAAAAAAAAAIQAAABgAAAAUAAAAWAUAAO4ZAABIGwAAax0AABAAAAAmAAAACAAAAP//////////MAAAABQAAAAAAAAAAAD//wAAAQAAAP//AAABAA=="/>
+                <pr:smNativeData xmlns:pr="smNativeData" xmlns="smNativeData" val="SMDATA_16_V2g2ahMAAAAlAAAAZQAAAA0AAAAAkAAAAEgAAACQAAAASAAAAAAAAAAAAAAAAAAAAAEAAABQAAAA+fcZFw6E0D8AAAAAAAAAAAAAAAAAAOA/AAAAAAAA4D8AAAAAAADgPwAAAAAAAOA/AAAAAAAA4D8AAAAAAADgPwAAAAAAAOA/AAAAAAAA4D8CAAAAjAAAAAEAAAAAAAAA4KA4AP///wgAAAAAAAAAAAAAAAAAAAAAAAAAAAAAAAAAAAAAeAAAAAEAAABAAAAAAAAAAAAAAABaAAAAAAAAAAAAAAAAAAAAAAAAAAAAAAAAAAAAAAAAAAAAAAAAAAAAAAAAAAAAAAAAAAAAAAAAAAAAAAAAAAAAAAAAAAAAAAAAAAAAFAAAADwAAAAAAAAAAAAAAAAAAAAPAAAAAQAAACMAAAAjAAAAIwAAAB4AAAAAAAAAZAAAAGQAAAAAAAAAZAAAAGQAAAAVAAAAYAAAAAAAAAAAAAAADwAAACADAAAAAAAAAAAAAAEAAACgMgAAVgcAAKr4//8BAAAAf39/AAEAAABkAAAAAAAAABQAAABAHwAAAAAAACYAAAAAAAAAwOD//wAAAAAmAAAAZAAAABYAAABMAAAAAQAAAAAAAAAGAAAAAAAAAAEAAAC5xNAAPAAAAAAAAAAoAAAAZAAAAGQAAAAAAAAAy8vLADwAAAAAAAAAKAAAAGQAAABkAAAAAAAAABcAAAAUAAAAAAAAAAAAAAD/fwAA/38AAAAAAAAJAAAABAAAAP////8eAAAAaAAAAAAAAAAAAAAAAAAAAAAAAAAAAAAAECcAABAnAAAAAAAAAAAAAAAAAAAAAAAAAAAAAAAAAAAAAAAAAAAAAHgAAAAAAAAAwMD/AAAAAAAAAAAAAAAAAAAAAABkAAAAAAAAAH9/fwAKAAAAIgAAABgAAAAAAAAAAAAAAAAAAAAAAAAAAAAAAAAAAAAkAAAAJAAAAAAAAAAHAAAAAAAAAAAAAAAAAAAAAAAAAAAAAAAAAAAAf39/ACUAAABYAAAAAAAAAAAAAAAAAAAAAAAAAAAAAAAAAAAAAAAAAAAAAAAAAAAAAAAAAAAAAAA/AAAAAAAAAKCGAQAAAAAAAAAAAAAAAAAMAAAAAQAAAAAAAAAAAAAAAAAAAB8AAABUAAAA4KA4AP///wEAAAAAAAAAAAAAAAAAAAAAAAAAAAAAAAAAAAAAAAAAAAAAAAB/f38AucTQAMvLywDAwP8Af39/AAAAAAAAAAAAAAAAAAAAAAAAAAAAIQAAABgAAAAUAAAAWAUAAO4ZAABIGwAAax0AABAAAAAmAAAACAAAAP//////////MAAAABQAAAAAAAAAAAD//wAAAQAAAP//AAABAA=="/>
               </a:ext>
             </a:extLst>
           </p:cNvSpPr>
@@ -4984,7 +5126,7 @@
           <p:cNvSpPr>
             <a:extLst>
               <a:ext uri="smNativeData">
-                <pr:smNativeData xmlns:pr="smNativeData" xmlns="smNativeData" val="SMDATA_16_kRU2ahMAAAAlAAAAZAAAAA0AAAAAAAAAAAAAAAAAAAAAAAAAAAAAAAABAAAAAAAAAAEAAABQAAAAAAAAAAAA4D8AAAAAAADgPwAAAAAAAOA/AAAAAAAA4D8AAAAAAADgPwAAAAAAAOA/AAAAAAAA4D8AAAAAAADgPwAAAAAAAOA/AAAAAAAA4D8CAAAAjAAAAAAAAAAAAAAARHLEDP///wgAAAAAAAAAAAAAAAAAAAAAAAAAAAAAAAAAAAAAZAAAAAEAAABAAAAAAAAAAAAAAAAAAAAAAAAAAAAAAAAAAAAAAAAAAAAAAAAAAAAAAAAAAAAAAAAAAAAAAAAAAAAAAAAAAAAAAAAAAAAAAAAAAAAAAAAAAAAAAAAAAAAAFAAAADwAAAAAAAAAAAAAAAAAAAAPAAAAAQAAACMAAAAjAAAAIwAAAB4AAAAAAAAAZAAAAGQAAAAAAAAAZAAAAGQAAAAVAAAAYAAAAAAAAAAAAAAADwAAACADAAAAAAAAAAAAAAEAAACgMgAAVgcAAKr4//8BAAAAf39/AAEAAABkAAAAAAAAABQAAABAHwAAAAAAACYAAAAAAAAAwOD//wAAAAAmAAAAZAAAABYAAABMAAAAAAAAAAAAAAAEAAAAAAAAAAEAAADn5uYKAAAAACgAAAAoAAAAZAAAAGQAAAAAAAAAzMzMAAAAAABQAAAAUAAAAGQAAABkAAAAAAAAABcAAAAUAAAAAAAAAAAAAAD/fwAA/38AAAAAAAAJAAAABAAAAP////8eAAAAaAAAAAAAAAAAAAAAAAAAAAAAAAAAAAAAECcAABAnAAAAAAAAAAAAAAAAAAAAAAAAAAAAAAAAAAAAAAAAAAAAABQAAAAAAAAAwMD/AAAAAABkAAAAMgAAAAAAAABkAAAAAAAAAH9/fwAKAAAAIgAAABgAAAAAAAAAAAAAAAAAAAAAAAAAAAAAAAAAAAAkAAAAJAAAAAAAAAAHAAAAAAAAAAAAAAAAAAAAAAAAAAAAAAAAAAAAf39/ACUAAABYAAAAAAAAAAAAAAAAAAAAAAAAAAAAAAAAAAAAAAAAAAAAAAAAAAAAAAAAAAAAAAA/AAAAAAAAAKCGAQAAAAAAAAAAAAAAAAAMAAAAAQAAAAAAAAAAAAAAAAAAAB8AAABUAAAARHLEBf///wEAAAAAAAAAAAAAAAAAAAAAAAAAAAAAAAAAAAAAAAAAAAAAAAB/f38A5+bmA8zMzADAwP8Af39/AAAAAAAAAAAAAAAAAAAAAAAAAAAAIQAAABgAAAAUAAAAwAYAAO4ZAAAAGwAAax0AABAAAAAmAAAACAAAAP//////////MAAAABQAAAAAAAAAAAD//wAAAQAAAP//AAABAA=="/>
+                <pr:smNativeData xmlns:pr="smNativeData" xmlns="smNativeData" val="SMDATA_16_V2g2ahMAAAAlAAAAZAAAAA0AAAAAAAAAAAAAAAAAAAAAAAAAAAAAAAABAAAAAAAAAAEAAABQAAAAAAAAAAAA4D8AAAAAAADgPwAAAAAAAOA/AAAAAAAA4D8AAAAAAADgPwAAAAAAAOA/AAAAAAAA4D8AAAAAAADgPwAAAAAAAOA/AAAAAAAA4D8CAAAAjAAAAAAAAAAAAAAARHLEDP///wgAAAAAAAAAAAAAAAAAAAAAAAAAAAAAAAAAAAAAZAAAAAEAAABAAAAAAAAAAAAAAAAAAAAAAAAAAAAAAAAAAAAAAAAAAAAAAAAAAAAAAAAAAAAAAAAAAAAAAAAAAAAAAAAAAAAAAAAAAAAAAAAAAAAAAAAAAAAAAAAAAAAAFAAAADwAAAAAAAAAAAAAAAAAAAAPAAAAAQAAACMAAAAjAAAAIwAAAB4AAAAAAAAAZAAAAGQAAAAAAAAAZAAAAGQAAAAVAAAAYAAAAAAAAAAAAAAADwAAACADAAAAAAAAAAAAAAEAAACgMgAAVgcAAKr4//8BAAAAf39/AAEAAABkAAAAAAAAABQAAABAHwAAAAAAACYAAAAAAAAAwOD//wAAAAAmAAAAZAAAABYAAABMAAAAAAAAAAAAAAAEAAAAAAAAAAEAAADn5uYKAAAAACgAAAAoAAAAZAAAAGQAAAAAAAAAzMzMAAAAAABQAAAAUAAAAGQAAABkAAAAAAAAABcAAAAUAAAAAAAAAAAAAAD/fwAA/38AAAAAAAAJAAAABAAAAP////8eAAAAaAAAAAAAAAAAAAAAAAAAAAAAAAAAAAAAECcAABAnAAAAAAAAAAAAAAAAAAAAAAAAAAAAAAAAAAAAAAAAAAAAABQAAAAAAAAAwMD/AAAAAABkAAAAMgAAAAAAAABkAAAAAAAAAH9/fwAKAAAAIgAAABgAAAAAAAAAAAAAAAAAAAAAAAAAAAAAAAAAAAAkAAAAJAAAAAAAAAAHAAAAAAAAAAAAAAAAAAAAAAAAAAAAAAAAAAAAf39/ACUAAABYAAAAAAAAAAAAAAAAAAAAAAAAAAAAAAAAAAAAAAAAAAAAAAAAAAAAAAAAAAAAAAA/AAAAAAAAAKCGAQAAAAAAAAAAAAAAAAAMAAAAAQAAAAAAAAAAAAAAAAAAAB8AAABUAAAARHLEBf///wEAAAAAAAAAAAAAAAAAAAAAAAAAAAAAAAAAAAAAAAAAAAAAAAB/f38A5+bmA8zMzADAwP8Af39/AAAAAAAAAAAAAAAAAAAAAAAAAAAAIQAAABgAAAAUAAAAwAYAAO4ZAAAAGwAAax0AABAAAAAmAAAACAAAAP//////////MAAAABQAAAAAAAAAAAD//wAAAQAAAP//AAABAA=="/>
               </a:ext>
             </a:extLst>
           </p:cNvSpPr>
@@ -5053,7 +5195,7 @@
           <p:cNvSpPr>
             <a:extLst>
               <a:ext uri="smNativeData">
-                <pr:smNativeData xmlns:pr="smNativeData" xmlns="smNativeData" val="SMDATA_16_kRU2ahMAAAAlAAAAZAAAAA0AAAAAkAAAAEgAAACQAAAASAAAAAAAAAABAAAAAAAAAAEAAABQAAAAAAAAAAAA4D8AAAAAAADgPwAAAAAAAOA/AAAAAAAA4D8AAAAAAADgPwAAAAAAAOA/AAAAAAAA4D8AAAAAAADgPwAAAAAAAOA/AAAAAAAA4D8CAAAAjAAAAAAAAAAAAAAARHLEDP///wgAAAAAAAAAAAAAAAAAAAAAAAAAAAAAAAAAAAAAZAAAAAEAAABAAAAAAAAAAAAAAAAAAAAAAAAAAAAAAAAAAAAAAAAAAAAAAAAAAAAAAAAAAAAAAAAAAAAAAAAAAAAAAAAAAAAAAAAAAAAAAAAAAAAAAAAAAAAAAAAAAAAAFAAAADwAAAAAAAAAAAAAAAAAAAAPAAAAAQAAACMAAAAjAAAAIwAAAB4AAAAAAAAAZAAAAGQAAAAAAAAAZAAAAGQAAAAVAAAAYAAAAAAAAAAAAAAADwAAACADAAAAAAAAAAAAAAEAAACgMgAAVgcAAKr4//8BAAAAf39/AAEAAABkAAAAAAAAABQAAABAHwAAAAAAACYAAAAAAAAAwOD//wAAAAAmAAAAZAAAABYAAABMAAAAAAAAAAAAAAAEAAAAAAAAAAEAAADn5uYKAAAAACgAAAAoAAAAZAAAAGQAAAAAAAAAzMzMAAAAAABQAAAAUAAAAGQAAABkAAAAAAAAABcAAAAUAAAAAAAAAAAAAAD/fwAA/38AAAAAAAAJAAAABAAAALgAQC8eAAAAaAAAAAAAAAAAAAAAAAAAAAAAAAAAAAAAECcAABAnAAAAAAAAAAAAAAAAAAAAAAAAAAAAAAAAAAAAAAAAAAAAABQAAAAAAAAAwMD/AAAAAABkAAAAMgAAAAAAAABkAAAAAAAAAH9/fwAKAAAAIgAAABgAAAAAAAAAAAAAAAAAAAAAAAAAAAAAAAAAAAAkAAAAJAAAAAAAAAAHAAAAAAAAAAAAAAAAAAAAAAAAAAAAAAAAAAAAf39/ACUAAABYAAAAAAAAAAAAAAAAAAAAAAAAAAAAAAAAAAAAAAAAAAAAAAAAAAAAAAAAAAAAAAA/AAAAAAAAAKCGAQAAAAAAAAAAAAAAAAAMAAAAAQAAAAAAAAAAAAAAAAAAAB8AAABUAAAARHLEBf///wEAAAAAAAAAAAAAAAAAAAAAAAAAAAAAAAAAAAAAAAAAAAAAAAB/f38A5+bmA8zMzADAwP8Af39/AAAAAAAAAAAAAAAAAAAAAAAAAAAAIQAAABgAAAAUAAAAYAMAAOAiAABAHQAAsCUAABAAAAAmAAAACAAAAP//////////MAAAABQAAAAAAAAAAAD//wAAAQAAAP//AAABAA=="/>
+                <pr:smNativeData xmlns:pr="smNativeData" xmlns="smNativeData" val="SMDATA_16_V2g2ahMAAAAlAAAAZAAAAA0AAAAAkAAAAEgAAACQAAAASAAAAAAAAAABAAAAAAAAAAEAAABQAAAAAAAAAAAA4D8AAAAAAADgPwAAAAAAAOA/AAAAAAAA4D8AAAAAAADgPwAAAAAAAOA/AAAAAAAA4D8AAAAAAADgPwAAAAAAAOA/AAAAAAAA4D8CAAAAjAAAAAAAAAAAAAAARHLEDP///wgAAAAAAAAAAAAAAAAAAAAAAAAAAAAAAAAAAAAAZAAAAAEAAABAAAAAAAAAAAAAAAAAAAAAAAAAAAAAAAAAAAAAAAAAAAAAAAAAAAAAAAAAAAAAAAAAAAAAAAAAAAAAAAAAAAAAAAAAAAAAAAAAAAAAAAAAAAAAAAAAAAAAFAAAADwAAAAAAAAAAAAAAAAAAAAPAAAAAQAAACMAAAAjAAAAIwAAAB4AAAAAAAAAZAAAAGQAAAAAAAAAZAAAAGQAAAAVAAAAYAAAAAAAAAAAAAAADwAAACADAAAAAAAAAAAAAAEAAACgMgAAVgcAAKr4//8BAAAAf39/AAEAAABkAAAAAAAAABQAAABAHwAAAAAAACYAAAAAAAAAwOD//wAAAAAmAAAAZAAAABYAAABMAAAAAAAAAAAAAAAEAAAAAAAAAAEAAADn5uYKAAAAACgAAAAoAAAAZAAAAGQAAAAAAAAAzMzMAAAAAABQAAAAUAAAAGQAAABkAAAAAAAAABcAAAAUAAAAAAAAAAAAAAD/fwAA/38AAAAAAAAJAAAABAAAALgAQC8eAAAAaAAAAAAAAAAAAAAAAAAAAAAAAAAAAAAAECcAABAnAAAAAAAAAAAAAAAAAAAAAAAAAAAAAAAAAAAAAAAAAAAAABQAAAAAAAAAwMD/AAAAAABkAAAAMgAAAAAAAABkAAAAAAAAAH9/fwAKAAAAIgAAABgAAAAAAAAAAAAAAAAAAAAAAAAAAAAAAAAAAAAkAAAAJAAAAAAAAAAHAAAAAAAAAAAAAAAAAAAAAAAAAAAAAAAAAAAAf39/ACUAAABYAAAAAAAAAAAAAAAAAAAAAAAAAAAAAAAAAAAAAAAAAAAAAAAAAAAAAAAAAAAAAAA/AAAAAAAAAKCGAQAAAAAAAAAAAAAAAAAMAAAAAQAAAAAAAAAAAAAAAAAAAB8AAABUAAAARHLEBf///wEAAAAAAAAAAAAAAAAAAAAAAAAAAAAAAAAAAAAAAAAAAAAAAAB/f38A5+bmA8zMzADAwP8Af39/AAAAAAAAAAAAAAAAAAAAAAAAAAAAIQAAABgAAAAUAAAAYAMAAOAiAABAHQAAsCUAABAAAAAmAAAACAAAAP//////////MAAAABQAAAAAAAAAAAD//wAAAQAAAP//AAABAA=="/>
               </a:ext>
             </a:extLst>
           </p:cNvSpPr>
@@ -5154,7 +5296,7 @@
           <p:cNvSpPr>
             <a:extLst>
               <a:ext uri="smNativeData">
-                <pr:smNativeData xmlns:pr="smNativeData" xmlns="smNativeData" val="SMDATA_16_kRU2ahMAAAAlAAAAZAAAAA0AAAAAkAAAAEgAAACQAAAASAAAAAAAAAABAAAAAAAAAAEAAABQAAAAAAAAAAAA4D8AAAAAAADgPwAAAAAAAOA/AAAAAAAA4D8AAAAAAADgPwAAAAAAAOA/AAAAAAAA4D8AAAAAAADgPwAAAAAAAOA/AAAAAAAA4D8CAAAAjAAAAAAAAAAAAAAARHLEDP///wgAAAAAAAAAAAAAAAAAAAAAAAAAAAAAAAAAAAAAZAAAAAEAAABAAAAAAAAAAAAAAAAAAAAAAAAAAAAAAAAAAAAAAAAAAAAAAAAAAAAAAAAAAAAAAAAAAAAAAAAAAAAAAAAAAAAAAAAAAAAAAAAAAAAAAAAAAAAAAAAAAAAAFAAAADwAAAAAAAAAAAAAAAAAAAAPAAAAAQAAACMAAAAjAAAAIwAAAB4AAAAAAAAAZAAAAGQAAAAAAAAAZAAAAGQAAAAVAAAAYAAAAAAAAAAAAAAADwAAACADAAAAAAAAAAAAAAEAAACgMgAAVgcAAKr4//8BAAAAf39/AAEAAABkAAAAAAAAABQAAABAHwAAAAAAACYAAAAAAAAAwOD//wAAAAAmAAAAZAAAABYAAABMAAAAAAAAAAAAAAAEAAAAAAAAAAEAAADn5uYKAAAAACgAAAAoAAAAZAAAAGQAAAAAAAAAzMzMAAAAAABQAAAAUAAAAGQAAABkAAAAAAAAABcAAAAUAAAAAAAAAAAAAAD/fwAA/38AAAAAAAAJAAAABAAAAAAAAAAeAAAAaAAAAAAAAAAAAAAAAAAAAAAAAAAAAAAAECcAABAnAAAAAAAAAAAAAAAAAAAAAAAAAAAAAAAAAAAAAAAAAAAAABQAAAAAAAAAwMD/AAAAAABkAAAAMgAAAAAAAABkAAAAAAAAAH9/fwAKAAAAIgAAABgAAAAAAAAAAAAAAAAAAAAAAAAAAAAAAAAAAAAkAAAAJAAAAAAAAAAHAAAAAAAAAAAAAAAAAAAAAAAAAAAAAAAAAAAAf39/ACUAAABYAAAAAAAAAAAAAAAAAAAAAAAAAAAAAAAAAAAAAAAAAAAAAAAAAAAAAAAAAAAAAAA/AAAAAAAAAKCGAQAAAAAAAAAAAAAAAAAMAAAAAQAAAAAAAAAAAAAAAAAAAB8AAABUAAAARHLEBf///wEAAAAAAAAAAAAAAAAAAAAAAAAAAAAAAAAAAAAAAAAAAAAAAAB/f38A5+bmA8zMzADAwP8Af39/AAAAAAAAAAAAAAAAAAAAAAAAAAAAIQAAABgAAAAUAAAAwCEAANgJAABwRwAAGAwAABAAAAAmAAAACAAAAP//////////MAAAABQAAAAAAAAAAAD//wAAAQAAAP//AAABAA=="/>
+                <pr:smNativeData xmlns:pr="smNativeData" xmlns="smNativeData" val="SMDATA_16_V2g2ahMAAAAlAAAAZAAAAA0AAAAAkAAAAEgAAACQAAAASAAAAAAAAAABAAAAAAAAAAEAAABQAAAAAAAAAAAA4D8AAAAAAADgPwAAAAAAAOA/AAAAAAAA4D8AAAAAAADgPwAAAAAAAOA/AAAAAAAA4D8AAAAAAADgPwAAAAAAAOA/AAAAAAAA4D8CAAAAjAAAAAAAAAAAAAAARHLEDP///wgAAAAAAAAAAAAAAAAAAAAAAAAAAAAAAAAAAAAAZAAAAAEAAABAAAAAAAAAAAAAAAAAAAAAAAAAAAAAAAAAAAAAAAAAAAAAAAAAAAAAAAAAAAAAAAAAAAAAAAAAAAAAAAAAAAAAAAAAAAAAAAAAAAAAAAAAAAAAAAAAAAAAFAAAADwAAAAAAAAAAAAAAAAAAAAPAAAAAQAAACMAAAAjAAAAIwAAAB4AAAAAAAAAZAAAAGQAAAAAAAAAZAAAAGQAAAAVAAAAYAAAAAAAAAAAAAAADwAAACADAAAAAAAAAAAAAAEAAACgMgAAVgcAAKr4//8BAAAAf39/AAEAAABkAAAAAAAAABQAAABAHwAAAAAAACYAAAAAAAAAwOD//wAAAAAmAAAAZAAAABYAAABMAAAAAAAAAAAAAAAEAAAAAAAAAAEAAADn5uYKAAAAACgAAAAoAAAAZAAAAGQAAAAAAAAAzMzMAAAAAABQAAAAUAAAAGQAAABkAAAAAAAAABcAAAAUAAAAAAAAAAAAAAD/fwAA/38AAAAAAAAJAAAABAAAAAAAAAAeAAAAaAAAAAAAAAAAAAAAAAAAAAAAAAAAAAAAECcAABAnAAAAAAAAAAAAAAAAAAAAAAAAAAAAAAAAAAAAAAAAAAAAABQAAAAAAAAAwMD/AAAAAABkAAAAMgAAAAAAAABkAAAAAAAAAH9/fwAKAAAAIgAAABgAAAAAAAAAAAAAAAAAAAAAAAAAAAAAAAAAAAAkAAAAJAAAAAAAAAAHAAAAAAAAAAAAAAAAAAAAAAAAAAAAAAAAAAAAf39/ACUAAABYAAAAAAAAAAAAAAAAAAAAAAAAAAAAAAAAAAAAAAAAAAAAAAAAAAAAAAAAAAAAAAA/AAAAAAAAAKCGAQAAAAAAAAAAAAAAAAAMAAAAAQAAAAAAAAAAAAAAAAAAAB8AAABUAAAARHLEBf///wEAAAAAAAAAAAAAAAAAAAAAAAAAAAAAAAAAAAAAAAAAAAAAAAB/f38A5+bmA8zMzADAwP8Af39/AAAAAAAAAAAAAAAAAAAAAAAAAAAAIQAAABgAAAAUAAAAwCEAANgJAABwRwAAGAwAABAAAAAmAAAACAAAAP//////////MAAAABQAAAAAAAAAAAD//wAAAQAAAP//AAABAA=="/>
               </a:ext>
             </a:extLst>
           </p:cNvSpPr>
@@ -5231,7 +5373,7 @@
           <p:cNvSpPr>
             <a:extLst>
               <a:ext uri="smNativeData">
-                <pr:smNativeData xmlns:pr="smNativeData" xmlns="smNativeData" val="SMDATA_16_kRU2ahMAAAAlAAAAZQAAAA0AAAAAkAAAAEgAAACQAAAASAAAAAAAAAAAAAAAAAAAAAEAAABQAAAA4UBIFjCBwz8AAAAAAADwvwAAAAAAAOA/AAAAAAAA4D8AAAAAAADgPwAAAAAAAOA/AAAAAAAA4D8AAAAAAADgPwAAAAAAAOA/AAAAAAAA4D8CAAAAjAAAAAEAAAAAAAAA7/P4AP///wgAAAAAAAAAAAAAAAAAAAAAAAAAAAAAAAAAAAAAeAAAAAEAAABAAAAAAAAAAAAAAABaAAAAAAAAAAAAAAAAAAAAAAAAAAAAAAAAAAAAAAAAAAAAAAAAAAAAAAAAAAAAAAAAAAAAAAAAAAAAAAAAAAAAAAAAAAAAAAAAAAAAFAAAADwAAAABAAAAAAAAANjg6AAUAAAAAQAAACMAAAAjAAAAIwAAAB4AAAAAAAAAZAAAAGQAAAAAAAAAZAAAAGQAAAAVAAAAYAAAAAAAAAAAAAAADwAAACADAAAAAAAAAAAAAAEAAACgMgAAVgcAAKr4//8BAAAAf39/AAEAAABkAAAAAAAAABQAAABAHwAAAAAAACYAAAAAAAAAwOD//wAAAAAmAAAAZAAAABYAAABMAAAAAQAAAAAAAAAGAAAAAAAAAAEAAAC5xNAAPAAAAAAAAAAoAAAAZAAAAGQAAAAAAAAAy8vLADwAAAAAAAAAKAAAAGQAAABkAAAAAAAAABcAAAAUAAAAAAAAAAAAAAD/fwAA/38AAAAAAAAJAAAABAAAAAAAAAAeAAAAaAAAAAAAAAAAAAAAAAAAAAAAAAAAAAAAECcAABAnAAAAAAAAAAAAAAAAAAAAAAAAAAAAAAAAAAAAAAAAAAAAAHgAAAAAAAAAwMD/AAAAAAAAAAAAAAAAAAAAAABkAAAAAAAAAH9/fwAKAAAAIgAAABgAAAAAAAAAAAAAAAAAAAAAAAAAAAAAAAAAAAAkAAAAJAAAAAAAAAAHAAAAAAAAAAAAAAAAAAAAAAAAAAAAAAAAAAAAf39/ACUAAABYAAAAAAAAAAAAAAAAAAAAAAAAAAAAAAAAAAAAAAAAAAAAAAAAAAAAAAAAAAAAAAA/AAAAAAAAAKCGAQAAAAAAAAAAAAAAAAAMAAAAAQAAAAAAAAAAAAAAAAAAAB8AAABUAAAA7/P4AP///wEAAAAAAAAAAAAAAAAAAAAAAAAAAAAAAAAAAAAAAAAAANjg6AB/f38AucTQAMvLywDAwP8Af39/AAAAAAAAAAAAAAAAAAAAAAAAAAAAIQAAABgAAAAUAAAAwCEAAPAMAABwRwAA2BIAABAAAAAmAAAACAAAAP//////////MAAAABQAAAAAAAAAAAD//wAAAQAAAP//AAABAA=="/>
+                <pr:smNativeData xmlns:pr="smNativeData" xmlns="smNativeData" val="SMDATA_16_V2g2ahMAAAAlAAAAZQAAAA0AAAAAkAAAAEgAAACQAAAASAAAAAAAAAAAAAAAAAAAAAEAAABQAAAA4UBIFjCBwz8AAAAAAAAAAAAAAAAAAOA/AAAAAAAA4D8AAAAAAADgPwAAAAAAAOA/AAAAAAAA4D8AAAAAAADgPwAAAAAAAOA/AAAAAAAA4D8CAAAAjAAAAAEAAAAAAAAA7/P4AP///wgAAAAAAAAAAAAAAAAAAAAAAAAAAAAAAAAAAAAAeAAAAAEAAABAAAAAAAAAAAAAAABaAAAAAAAAAAAAAAAAAAAAAAAAAAAAAAAAAAAAAAAAAAAAAAAAAAAAAAAAAAAAAAAAAAAAAAAAAAAAAAAAAAAAAAAAAAAAAAAAAAAAFAAAADwAAAABAAAAAAAAANjg6AAUAAAAAQAAACMAAAAjAAAAIwAAAB4AAAAAAAAAZAAAAGQAAAAAAAAAZAAAAGQAAAAVAAAAYAAAAAAAAAAAAAAADwAAACADAAAAAAAAAAAAAAEAAACgMgAAVgcAAKr4//8BAAAAf39/AAEAAABkAAAAAAAAABQAAABAHwAAAAAAACYAAAAAAAAAwOD//wAAAAAmAAAAZAAAABYAAABMAAAAAQAAAAAAAAAGAAAAAAAAAAEAAAC5xNAAPAAAAAAAAAAoAAAAZAAAAGQAAAAAAAAAy8vLADwAAAAAAAAAKAAAAGQAAABkAAAAAAAAABcAAAAUAAAAAAAAAAAAAAD/fwAA/38AAAAAAAAJAAAABAAAAAAAAAAeAAAAaAAAAAAAAAAAAAAAAAAAAAAAAAAAAAAAECcAABAnAAAAAAAAAAAAAAAAAAAAAAAAAAAAAAAAAAAAAAAAAAAAAHgAAAAAAAAAwMD/AAAAAAAAAAAAAAAAAAAAAABkAAAAAAAAAH9/fwAKAAAAIgAAABgAAAAAAAAAAAAAAAAAAAAAAAAAAAAAAAAAAAAkAAAAJAAAAAAAAAAHAAAAAAAAAAAAAAAAAAAAAAAAAAAAAAAAAAAAf39/ACUAAABYAAAAAAAAAAAAAAAAAAAAAAAAAAAAAAAAAAAAAAAAAAAAAAAAAAAAAAAAAAAAAAA/AAAAAAAAAKCGAQAAAAAAAAAAAAAAAAAMAAAAAQAAAAAAAAAAAAAAAAAAAB8AAABUAAAA7/P4AP///wEAAAAAAAAAAAAAAAAAAAAAAAAAAAAAAAAAAAAAAAAAANjg6AB/f38AucTQAMvLywDAwP8Af39/AAAAAAAAAAAAAAAAAAAAAAAAAAAAIQAAABgAAAAUAAAAwCEAAPAMAABwRwAA2BIAABAAAAAmAAAACAAAAP//////////MAAAABQAAAAAAAAAAAD//wAAAQAAAP//AAABAA=="/>
               </a:ext>
             </a:extLst>
           </p:cNvSpPr>
@@ -5273,7 +5415,7 @@
           <p:cNvSpPr>
             <a:extLst>
               <a:ext uri="smNativeData">
-                <pr:smNativeData xmlns:pr="smNativeData" xmlns="smNativeData" val="SMDATA_16_kRU2ahMAAAAlAAAAZAAAAA0AAAAAkAAAAEgAAACQAAAASAAAAAAAAAABAAAAAAAAAAEAAABQAAAAAAAAAAAA4D8AAAAAAADgPwAAAAAAAOA/AAAAAAAA4D8AAAAAAADgPwAAAAAAAOA/AAAAAAAA4D8AAAAAAADgPwAAAAAAAOA/AAAAAAAA4D8CAAAAjAAAAAAAAAAAAAAARHLEDP///wgAAAAAAAAAAAAAAAAAAAAAAAAAAAAAAAAAAAAAZAAAAAEAAABAAAAAAAAAAAAAAAAAAAAAAAAAAAAAAAAAAAAAAAAAAAAAAAAAAAAAAAAAAAAAAAAAAAAAAAAAAAAAAAAAAAAAAAAAAAAAAAAAAAAAAAAAAAAAAAAAAAAAFAAAADwAAAAAAAAAAAAAAAAAAAAPAAAAAQAAACMAAAAjAAAAIwAAAB4AAAAAAAAAZAAAAGQAAAAAAAAAZAAAAGQAAAAVAAAAYAAAAAAAAAAAAAAADwAAACADAAAAAAAAAAAAAAEAAACgMgAAVgcAAKr4//8BAAAAf39/AAEAAABkAAAAAAAAABQAAABAHwAAAAAAACYAAAAAAAAAwOD//wAAAAAmAAAAZAAAABYAAABMAAAAAAAAAAAAAAAEAAAAAAAAAAEAAADn5uYKAAAAACgAAAAoAAAAZAAAAGQAAAAAAAAAzMzMAAAAAABQAAAAUAAAAGQAAABkAAAAAAAAABcAAAAUAAAAAAAAAAAAAAD/fwAA/38AAAAAAAAJAAAABAAAAEYCAAAeAAAAaAAAAAAAAAAAAAAAAAAAAAAAAAAAAAAAECcAABAnAAAAAAAAAAAAAAAAAAAAAAAAAAAAAAAAAAAAAAAAAAAAABQAAAAAAAAAwMD/AAAAAABkAAAAMgAAAAAAAABkAAAAAAAAAH9/fwAKAAAAIgAAABgAAAAAAAAAAAAAAAAAAAAAAAAAAAAAAAAAAAAkAAAAJAAAAAAAAAAHAAAAAAAAAAAAAAAAAAAAAAAAAAAAAAAAAAAAf39/ACUAAABYAAAAAAAAAAAAAAAAAAAAAAAAAAAAAAAAAAAAAAAAAAAAAAAAAAAAAAAAAAAAAAA/AAAAAAAAAKCGAQAAAAAAAAAAAAAAAAAMAAAAAQAAAAAAAAAAAAAAAAAAAB8AAABUAAAARHLEBf///wEAAAAAAAAAAAAAAAAAAAAAAAAAAAAAAAAAAAAAAAAAAAAAAAB/f38A5+bmA8zMzADAwP8Af39/AAAAAAAAAAAAAAAAAAAAAAAAAAAAIQAAABgAAAAUAAAAKCMAAJ0NAAAIRgAA3Q8AABAAAAAmAAAACAAAAP//////////MAAAABQAAAAAAAAAAAD//wAAAQAAAP//AAABAA=="/>
+                <pr:smNativeData xmlns:pr="smNativeData" xmlns="smNativeData" val="SMDATA_16_V2g2ahMAAAAlAAAAZAAAAA0AAAAAkAAAAEgAAACQAAAASAAAAAAAAAABAAAAAAAAAAEAAABQAAAAAAAAAAAA4D8AAAAAAADgPwAAAAAAAOA/AAAAAAAA4D8AAAAAAADgPwAAAAAAAOA/AAAAAAAA4D8AAAAAAADgPwAAAAAAAOA/AAAAAAAA4D8CAAAAjAAAAAAAAAAAAAAARHLEDP///wgAAAAAAAAAAAAAAAAAAAAAAAAAAAAAAAAAAAAAZAAAAAEAAABAAAAAAAAAAAAAAAAAAAAAAAAAAAAAAAAAAAAAAAAAAAAAAAAAAAAAAAAAAAAAAAAAAAAAAAAAAAAAAAAAAAAAAAAAAAAAAAAAAAAAAAAAAAAAAAAAAAAAFAAAADwAAAAAAAAAAAAAAAAAAAAPAAAAAQAAACMAAAAjAAAAIwAAAB4AAAAAAAAAZAAAAGQAAAAAAAAAZAAAAGQAAAAVAAAAYAAAAAAAAAAAAAAADwAAACADAAAAAAAAAAAAAAEAAACgMgAAVgcAAKr4//8BAAAAf39/AAEAAABkAAAAAAAAABQAAABAHwAAAAAAACYAAAAAAAAAwOD//wAAAAAmAAAAZAAAABYAAABMAAAAAAAAAAAAAAAEAAAAAAAAAAEAAADn5uYKAAAAACgAAAAoAAAAZAAAAGQAAAAAAAAAzMzMAAAAAABQAAAAUAAAAGQAAABkAAAAAAAAABcAAAAUAAAAAAAAAAAAAAD/fwAA/38AAAAAAAAJAAAABAAAAEYCAAAeAAAAaAAAAAAAAAAAAAAAAAAAAAAAAAAAAAAAECcAABAnAAAAAAAAAAAAAAAAAAAAAAAAAAAAAAAAAAAAAAAAAAAAABQAAAAAAAAAwMD/AAAAAABkAAAAMgAAAAAAAABkAAAAAAAAAH9/fwAKAAAAIgAAABgAAAAAAAAAAAAAAAAAAAAAAAAAAAAAAAAAAAAkAAAAJAAAAAAAAAAHAAAAAAAAAAAAAAAAAAAAAAAAAAAAAAAAAAAAf39/ACUAAABYAAAAAAAAAAAAAAAAAAAAAAAAAAAAAAAAAAAAAAAAAAAAAAAAAAAAAAAAAAAAAAA/AAAAAAAAAKCGAQAAAAAAAAAAAAAAAAAMAAAAAQAAAAAAAAAAAAAAAAAAAB8AAABUAAAARHLEBf///wEAAAAAAAAAAAAAAAAAAAAAAAAAAAAAAAAAAAAAAAAAAAAAAAB/f38A5+bmA8zMzADAwP8Af39/AAAAAAAAAAAAAAAAAAAAAAAAAAAAIQAAABgAAAAUAAAAKCMAAJ0NAAAIRgAA3Q8AABAAAAAmAAAACAAAAP//////////MAAAABQAAAAAAAAAAAD//wAAAQAAAP//AAABAA=="/>
               </a:ext>
             </a:extLst>
           </p:cNvSpPr>
@@ -5343,7 +5485,7 @@
           <p:cNvSpPr>
             <a:extLst>
               <a:ext uri="smNativeData">
-                <pr:smNativeData xmlns:pr="smNativeData" xmlns="smNativeData" val="SMDATA_16_kRU2ahMAAAAlAAAAZAAAAA0AAAAAkAAAAEgAAACQAAAASAAAAAAAAAABAAAAAAAAAAEAAABQAAAAAAAAAAAA4D8AAAAAAADgPwAAAAAAAOA/AAAAAAAA4D8AAAAAAADgPwAAAAAAAOA/AAAAAAAA4D8AAAAAAADgPwAAAAAAAOA/AAAAAAAA4D8CAAAAjAAAAAAAAAAAAAAARHLEDP///wgAAAAAAAAAAAAAAAAAAAAAAAAAAAAAAAAAAAAAZAAAAAEAAABAAAAAAAAAAAAAAAAAAAAAAAAAAAAAAAAAAAAAAAAAAAAAAAAAAAAAAAAAAAAAAAAAAAAAAAAAAAAAAAAAAAAAAAAAAAAAAAAAAAAAAAAAAAAAAAAAAAAAFAAAADwAAAAAAAAAAAAAAAAAAAAPAAAAAQAAACMAAAAjAAAAIwAAAB4AAAAAAAAAZAAAAGQAAAAAAAAAZAAAAGQAAAAVAAAAYAAAAAAAAAAAAAAADwAAACADAAAAAAAAAAAAAAEAAACgMgAAVgcAAKr4//8BAAAAf39/AAEAAABkAAAAAAAAABQAAABAHwAAAAAAACYAAAAAAAAAwOD//wAAAAAmAAAAZAAAABYAAABMAAAAAAAAAAAAAAAEAAAAAAAAAAEAAADn5uYKAAAAACgAAAAoAAAAZAAAAGQAAAAAAAAAzMzMAAAAAABQAAAAUAAAAGQAAABkAAAAAAAAABcAAAAUAAAAAAAAAAAAAAD/fwAA/38AAAAAAAAJAAAABAAAAFwAAAAeAAAAaAAAAAAAAAAAAAAAAAAAAAAAAAAAAAAAECcAABAnAAAAAAAAAAAAAAAAAAAAAAAAAAAAAAAAAAAAAAAAAAAAABQAAAAAAAAAwMD/AAAAAABkAAAAMgAAAAAAAABkAAAAAAAAAH9/fwAKAAAAIgAAABgAAAAAAAAAAAAAAAAAAAAAAAAAAAAAAAAAAAAkAAAAJAAAAAAAAAAHAAAAAAAAAAAAAAAAAAAAAAAAAAAAAAAAAAAAf39/ACUAAABYAAAAAAAAAAAAAAAAAAAAAAAAAAAAAAAAAAAAAAAAAAAAAAAAAAAAAAAAAAAAAAA/AAAAAAAAAKCGAQAAAAAAAAAAAAAAAAAMAAAAAQAAAAAAAAAAAAAAAAAAAB8AAABUAAAARHLEBf///wEAAAAAAAAAAAAAAAAAAAAAAAAAAAAAAAAAAAAAAAAAAAAAAAB/f38A5+bmA8zMzADAwP8Af39/AAAAAAAAAAAAAAAAAAAAAAAAAAAAIQAAABgAAAAUAAAAKCMAAAgQAAAIRgAASBIAABAAAAAmAAAACAAAAP//////////MAAAABQAAAAAAAAAAAD//wAAAQAAAP//AAABAA=="/>
+                <pr:smNativeData xmlns:pr="smNativeData" xmlns="smNativeData" val="SMDATA_16_V2g2ahMAAAAlAAAAZAAAAA0AAAAAkAAAAEgAAACQAAAASAAAAAAAAAABAAAAAAAAAAEAAABQAAAAAAAAAAAA4D8AAAAAAADgPwAAAAAAAOA/AAAAAAAA4D8AAAAAAADgPwAAAAAAAOA/AAAAAAAA4D8AAAAAAADgPwAAAAAAAOA/AAAAAAAA4D8CAAAAjAAAAAAAAAAAAAAARHLEDP///wgAAAAAAAAAAAAAAAAAAAAAAAAAAAAAAAAAAAAAZAAAAAEAAABAAAAAAAAAAAAAAAAAAAAAAAAAAAAAAAAAAAAAAAAAAAAAAAAAAAAAAAAAAAAAAAAAAAAAAAAAAAAAAAAAAAAAAAAAAAAAAAAAAAAAAAAAAAAAAAAAAAAAFAAAADwAAAAAAAAAAAAAAAAAAAAPAAAAAQAAACMAAAAjAAAAIwAAAB4AAAAAAAAAZAAAAGQAAAAAAAAAZAAAAGQAAAAVAAAAYAAAAAAAAAAAAAAADwAAACADAAAAAAAAAAAAAAEAAACgMgAAVgcAAKr4//8BAAAAf39/AAEAAABkAAAAAAAAABQAAABAHwAAAAAAACYAAAAAAAAAwOD//wAAAAAmAAAAZAAAABYAAABMAAAAAAAAAAAAAAAEAAAAAAAAAAEAAADn5uYKAAAAACgAAAAoAAAAZAAAAGQAAAAAAAAAzMzMAAAAAABQAAAAUAAAAGQAAABkAAAAAAAAABcAAAAUAAAAAAAAAAAAAAD/fwAA/38AAAAAAAAJAAAABAAAAFwAAAAeAAAAaAAAAAAAAAAAAAAAAAAAAAAAAAAAAAAAECcAABAnAAAAAAAAAAAAAAAAAAAAAAAAAAAAAAAAAAAAAAAAAAAAABQAAAAAAAAAwMD/AAAAAABkAAAAMgAAAAAAAABkAAAAAAAAAH9/fwAKAAAAIgAAABgAAAAAAAAAAAAAAAAAAAAAAAAAAAAAAAAAAAAkAAAAJAAAAAAAAAAHAAAAAAAAAAAAAAAAAAAAAAAAAAAAAAAAAAAAf39/ACUAAABYAAAAAAAAAAAAAAAAAAAAAAAAAAAAAAAAAAAAAAAAAAAAAAAAAAAAAAAAAAAAAAA/AAAAAAAAAKCGAQAAAAAAAAAAAAAAAAAMAAAAAQAAAAAAAAAAAAAAAAAAAB8AAABUAAAARHLEBf///wEAAAAAAAAAAAAAAAAAAAAAAAAAAAAAAAAAAAAAAAAAAAAAAAB/f38A5+bmA8zMzADAwP8Af39/AAAAAAAAAAAAAAAAAAAAAAAAAAAAIQAAABgAAAAUAAAAKCMAAAgQAAAIRgAASBIAABAAAAAmAAAACAAAAP//////////MAAAABQAAAAAAAAAAAD//wAAAQAAAP//AAABAA=="/>
               </a:ext>
             </a:extLst>
           </p:cNvSpPr>
@@ -5413,7 +5555,7 @@
           <p:cNvSpPr>
             <a:extLst>
               <a:ext uri="smNativeData">
-                <pr:smNativeData xmlns:pr="smNativeData" xmlns="smNativeData" val="SMDATA_16_kRU2ahMAAAAlAAAAZQAAAA0AAAAAkAAAAEgAAACQAAAASAAAAAAAAAAAAAAAAAAAAAEAAABQAAAA4UBIFjCBwz8AAAAAAADwvwAAAAAAAOA/AAAAAAAA4D8AAAAAAADgPwAAAAAAAOA/AAAAAAAA4D8AAAAAAADgPwAAAAAAAOA/AAAAAAAA4D8CAAAAjAAAAAEAAAAAAAAA7/P4AP///wgAAAAAAAAAAAAAAAAAAAAAAAAAAAAAAAAAAAAAeAAAAAEAAABAAAAAAAAAAAAAAABaAAAAAAAAAAAAAAAAAAAAAAAAAAAAAAAAAAAAAAAAAAAAAAAAAAAAAAAAAAAAAAAAAAAAAAAAAAAAAAAAAAAAAAAAAAAAAAAAAAAAFAAAADwAAAABAAAAAAAAANjg6AAUAAAAAQAAACMAAAAjAAAAIwAAAB4AAAAAAAAAZAAAAGQAAAAAAAAAZAAAAGQAAAAVAAAAYAAAAAAAAAAAAAAADwAAACADAAAAAAAAAAAAAAEAAACgMgAAVgcAAKr4//8BAAAAf39/AAEAAABkAAAAAAAAABQAAABAHwAAAAAAACYAAAAAAAAAwOD//wAAAAAmAAAAZAAAABYAAABMAAAAAQAAAAAAAAAGAAAAAAAAAAEAAAC5xNAAPAAAAAAAAAAoAAAAZAAAAGQAAAAAAAAAy8vLADwAAAAAAAAAKAAAAGQAAABkAAAAAAAAABcAAAAUAAAAAAAAAAAAAAD/fwAA/38AAAAAAAAJAAAABAAAAAAAAAAeAAAAaAAAAAAAAAAAAAAAAAAAAAAAAAAAAAAAECcAABAnAAAAAAAAAAAAAAAAAAAAAAAAAAAAAAAAAAAAAAAAAAAAAHgAAAAAAAAAwMD/AAAAAAAAAAAAAAAAAAAAAABkAAAAAAAAAH9/fwAKAAAAIgAAABgAAAAAAAAAAAAAAAAAAAAAAAAAAAAAAAAAAAAkAAAAJAAAAAAAAAAHAAAAAAAAAAAAAAAAAAAAAAAAAAAAAAAAAAAAf39/ACUAAABYAAAAAAAAAAAAAAAAAAAAAAAAAAAAAAAAAAAAAAAAAAAAAAAAAAAAAAAAAAAAAAA/AAAAAAAAAKCGAQAAAAAAAAAAAAAAAAAMAAAAAQAAAAAAAAAAAAAAAAAAAB8AAABUAAAA7/P4AP///wEAAAAAAAAAAAAAAAAAAAAAAAAAAAAAAAAAAAAAAAAAANjg6AB/f38AucTQAMvLywDAwP8Af39/AAAAAAAAAAAAAAAAAAAAAAAAAAAAIQAAABgAAAAUAAAAwCEAAPgTAABwRwAA4BkAABAAAAAmAAAACAAAAP//////////MAAAABQAAAAAAAAAAAD//wAAAQAAAP//AAABAA=="/>
+                <pr:smNativeData xmlns:pr="smNativeData" xmlns="smNativeData" val="SMDATA_16_V2g2ahMAAAAlAAAAZQAAAA0AAAAAkAAAAEgAAACQAAAASAAAAAAAAAAAAAAAAAAAAAEAAABQAAAA4UBIFjCBwz8AAAAAAAAAAAAAAAAAAOA/AAAAAAAA4D8AAAAAAADgPwAAAAAAAOA/AAAAAAAA4D8AAAAAAADgPwAAAAAAAOA/AAAAAAAA4D8CAAAAjAAAAAEAAAAAAAAA7/P4AP///wgAAAAAAAAAAAAAAAAAAAAAAAAAAAAAAAAAAAAAeAAAAAEAAABAAAAAAAAAAAAAAABaAAAAAAAAAAAAAAAAAAAAAAAAAAAAAAAAAAAAAAAAAAAAAAAAAAAAAAAAAAAAAAAAAAAAAAAAAAAAAAAAAAAAAAAAAAAAAAAAAAAAFAAAADwAAAABAAAAAAAAANjg6AAUAAAAAQAAACMAAAAjAAAAIwAAAB4AAAAAAAAAZAAAAGQAAAAAAAAAZAAAAGQAAAAVAAAAYAAAAAAAAAAAAAAADwAAACADAAAAAAAAAAAAAAEAAACgMgAAVgcAAKr4//8BAAAAf39/AAEAAABkAAAAAAAAABQAAABAHwAAAAAAACYAAAAAAAAAwOD//wAAAAAmAAAAZAAAABYAAABMAAAAAQAAAAAAAAAGAAAAAAAAAAEAAAC5xNAAPAAAAAAAAAAoAAAAZAAAAGQAAAAAAAAAy8vLADwAAAAAAAAAKAAAAGQAAABkAAAAAAAAABcAAAAUAAAAAAAAAAAAAAD/fwAA/38AAAAAAAAJAAAABAAAAAAAAAAeAAAAaAAAAAAAAAAAAAAAAAAAAAAAAAAAAAAAECcAABAnAAAAAAAAAAAAAAAAAAAAAAAAAAAAAAAAAAAAAAAAAAAAAHgAAAAAAAAAwMD/AAAAAAAAAAAAAAAAAAAAAABkAAAAAAAAAH9/fwAKAAAAIgAAABgAAAAAAAAAAAAAAAAAAAAAAAAAAAAAAAAAAAAkAAAAJAAAAAAAAAAHAAAAAAAAAAAAAAAAAAAAAAAAAAAAAAAAAAAAf39/ACUAAABYAAAAAAAAAAAAAAAAAAAAAAAAAAAAAAAAAAAAAAAAAAAAAAAAAAAAAAAAAAAAAAA/AAAAAAAAAKCGAQAAAAAAAAAAAAAAAAAMAAAAAQAAAAAAAAAAAAAAAAAAAB8AAABUAAAA7/P4AP///wEAAAAAAAAAAAAAAAAAAAAAAAAAAAAAAAAAAAAAAAAAANjg6AB/f38AucTQAMvLywDAwP8Af39/AAAAAAAAAAAAAAAAAAAAAAAAAAAAIQAAABgAAAAUAAAAwCEAAPgTAABwRwAA4BkAABAAAAAmAAAACAAAAP//////////MAAAABQAAAAAAAAAAAD//wAAAQAAAP//AAABAA=="/>
               </a:ext>
             </a:extLst>
           </p:cNvSpPr>
@@ -5455,7 +5597,7 @@
           <p:cNvSpPr>
             <a:extLst>
               <a:ext uri="smNativeData">
-                <pr:smNativeData xmlns:pr="smNativeData" xmlns="smNativeData" val="SMDATA_16_kRU2ahMAAAAlAAAAZAAAAA0AAAAAkAAAAEgAAACQAAAASAAAAAAAAAABAAAAAAAAAAEAAABQAAAAAAAAAAAA4D8AAAAAAADgPwAAAAAAAOA/AAAAAAAA4D8AAAAAAADgPwAAAAAAAOA/AAAAAAAA4D8AAAAAAADgPwAAAAAAAOA/AAAAAAAA4D8CAAAAjAAAAAAAAAAAAAAARHLEDP///wgAAAAAAAAAAAAAAAAAAAAAAAAAAAAAAAAAAAAAZAAAAAEAAABAAAAAAAAAAAAAAAAAAAAAAAAAAAAAAAAAAAAAAAAAAAAAAAAAAAAAAAAAAAAAAAAAAAAAAAAAAAAAAAAAAAAAAAAAAAAAAAAAAAAAAAAAAAAAAAAAAAAAFAAAADwAAAAAAAAAAAAAAAAAAAAPAAAAAQAAACMAAAAjAAAAIwAAAB4AAAAAAAAAZAAAAGQAAAAAAAAAZAAAAGQAAAAVAAAAYAAAAAAAAAAAAAAADwAAACADAAAAAAAAAAAAAAEAAACgMgAAVgcAAKr4//8BAAAAf39/AAEAAABkAAAAAAAAABQAAABAHwAAAAAAACYAAAAAAAAAwOD//wAAAAAmAAAAZAAAABYAAABMAAAAAAAAAAAAAAAEAAAAAAAAAAEAAADn5uYKAAAAACgAAAAoAAAAZAAAAGQAAAAAAAAAzMzMAAAAAABQAAAAUAAAAGQAAABkAAAAAAAAABcAAAAUAAAAAAAAAAAAAAD/fwAA/38AAAAAAAAJAAAABAAAAAAAAAAeAAAAaAAAAAAAAAAAAAAAAAAAAAAAAAAAAAAAECcAABAnAAAAAAAAAAAAAAAAAAAAAAAAAAAAAAAAAAAAAAAAAAAAABQAAAAAAAAAwMD/AAAAAABkAAAAMgAAAAAAAABkAAAAAAAAAH9/fwAKAAAAIgAAABgAAAAAAAAAAAAAAAAAAAAAAAAAAAAAAAAAAAAkAAAAJAAAAAAAAAAHAAAAAAAAAAAAAAAAAAAAAAAAAAAAAAAAAAAAf39/ACUAAABYAAAAAAAAAAAAAAAAAAAAAAAAAAAAAAAAAAAAAAAAAAAAAAAAAAAAAAAAAAAAAAA/AAAAAAAAAKCGAQAAAAAAAAAAAAAAAAAMAAAAAQAAAAAAAAAAAAAAAAAAAB8AAABUAAAARHLEBf///wEAAAAAAAAAAAAAAAAAAAAAAAAAAAAAAAAAAAAAAAAAAAAAAAB/f38A5+bmA8zMzADAwP8Af39/AAAAAAAAAAAAAAAAAAAAAAAAAAAAIQAAABgAAAAUAAAAKCMAAKUUAAAIRgAA5RYAABAAAAAmAAAACAAAAP//////////MAAAABQAAAAAAAAAAAD//wAAAQAAAP//AAABAA=="/>
+                <pr:smNativeData xmlns:pr="smNativeData" xmlns="smNativeData" val="SMDATA_16_V2g2ahMAAAAlAAAAZAAAAA0AAAAAkAAAAEgAAACQAAAASAAAAAAAAAABAAAAAAAAAAEAAABQAAAAAAAAAAAA4D8AAAAAAADgPwAAAAAAAOA/AAAAAAAA4D8AAAAAAADgPwAAAAAAAOA/AAAAAAAA4D8AAAAAAADgPwAAAAAAAOA/AAAAAAAA4D8CAAAAjAAAAAAAAAAAAAAARHLEDP///wgAAAAAAAAAAAAAAAAAAAAAAAAAAAAAAAAAAAAAZAAAAAEAAABAAAAAAAAAAAAAAAAAAAAAAAAAAAAAAAAAAAAAAAAAAAAAAAAAAAAAAAAAAAAAAAAAAAAAAAAAAAAAAAAAAAAAAAAAAAAAAAAAAAAAAAAAAAAAAAAAAAAAFAAAADwAAAAAAAAAAAAAAAAAAAAPAAAAAQAAACMAAAAjAAAAIwAAAB4AAAAAAAAAZAAAAGQAAAAAAAAAZAAAAGQAAAAVAAAAYAAAAAAAAAAAAAAADwAAACADAAAAAAAAAAAAAAEAAACgMgAAVgcAAKr4//8BAAAAf39/AAEAAABkAAAAAAAAABQAAABAHwAAAAAAACYAAAAAAAAAwOD//wAAAAAmAAAAZAAAABYAAABMAAAAAAAAAAAAAAAEAAAAAAAAAAEAAADn5uYKAAAAACgAAAAoAAAAZAAAAGQAAAAAAAAAzMzMAAAAAABQAAAAUAAAAGQAAABkAAAAAAAAABcAAAAUAAAAAAAAAAAAAAD/fwAA/38AAAAAAAAJAAAABAAAAAAAAAAeAAAAaAAAAAAAAAAAAAAAAAAAAAAAAAAAAAAAECcAABAnAAAAAAAAAAAAAAAAAAAAAAAAAAAAAAAAAAAAAAAAAAAAABQAAAAAAAAAwMD/AAAAAABkAAAAMgAAAAAAAABkAAAAAAAAAH9/fwAKAAAAIgAAABgAAAAAAAAAAAAAAAAAAAAAAAAAAAAAAAAAAAAkAAAAJAAAAAAAAAAHAAAAAAAAAAAAAAAAAAAAAAAAAAAAAAAAAAAAf39/ACUAAABYAAAAAAAAAAAAAAAAAAAAAAAAAAAAAAAAAAAAAAAAAAAAAAAAAAAAAAAAAAAAAAA/AAAAAAAAAKCGAQAAAAAAAAAAAAAAAAAMAAAAAQAAAAAAAAAAAAAAAAAAAB8AAABUAAAARHLEBf///wEAAAAAAAAAAAAAAAAAAAAAAAAAAAAAAAAAAAAAAAAAAAAAAAB/f38A5+bmA8zMzADAwP8Af39/AAAAAAAAAAAAAAAAAAAAAAAAAAAAIQAAABgAAAAUAAAAKCMAAKUUAAAIRgAA5RYAABAAAAAmAAAACAAAAP//////////MAAAABQAAAAAAAAAAAD//wAAAQAAAP//AAABAA=="/>
               </a:ext>
             </a:extLst>
           </p:cNvSpPr>
@@ -5525,7 +5667,7 @@
           <p:cNvSpPr>
             <a:extLst>
               <a:ext uri="smNativeData">
-                <pr:smNativeData xmlns:pr="smNativeData" xmlns="smNativeData" val="SMDATA_16_kRU2ahMAAAAlAAAAZAAAAA0AAAAAkAAAAEgAAACQAAAASAAAAAAAAAABAAAAAAAAAAEAAABQAAAAAAAAAAAA4D8AAAAAAADgPwAAAAAAAOA/AAAAAAAA4D8AAAAAAADgPwAAAAAAAOA/AAAAAAAA4D8AAAAAAADgPwAAAAAAAOA/AAAAAAAA4D8CAAAAjAAAAAAAAAAAAAAARHLEDP///wgAAAAAAAAAAAAAAAAAAAAAAAAAAAAAAAAAAAAAZAAAAAEAAABAAAAAAAAAAAAAAAAAAAAAAAAAAAAAAAAAAAAAAAAAAAAAAAAAAAAAAAAAAAAAAAAAAAAAAAAAAAAAAAAAAAAAAAAAAAAAAAAAAAAAAAAAAAAAAAAAAAAAFAAAADwAAAAAAAAAAAAAAAAAAAAPAAAAAQAAACMAAAAjAAAAIwAAAB4AAAAAAAAAZAAAAGQAAAAAAAAAZAAAAGQAAAAVAAAAYAAAAAAAAAAAAAAADwAAACADAAAAAAAAAAAAAAEAAACgMgAAVgcAAKr4//8BAAAAf39/AAEAAABkAAAAAAAAABQAAABAHwAAAAAAACYAAAAAAAAAwOD//wAAAAAmAAAAZAAAABYAAABMAAAAAAAAAAAAAAAEAAAAAAAAAAEAAADn5uYKAAAAACgAAAAoAAAAZAAAAGQAAAAAAAAAzMzMAAAAAABQAAAAUAAAAGQAAABkAAAAAAAAABcAAAAUAAAAAAAAAAAAAAD/fwAA/38AAAAAAAAJAAAABAAAAAAAAAAeAAAAaAAAAAAAAAAAAAAAAAAAAAAAAAAAAAAAECcAABAnAAAAAAAAAAAAAAAAAAAAAAAAAAAAAAAAAAAAAAAAAAAAABQAAAAAAAAAwMD/AAAAAABkAAAAMgAAAAAAAABkAAAAAAAAAH9/fwAKAAAAIgAAABgAAAAAAAAAAAAAAAAAAAAAAAAAAAAAAAAAAAAkAAAAJAAAAAAAAAAHAAAAAAAAAAAAAAAAAAAAAAAAAAAAAAAAAAAAf39/ACUAAABYAAAAAAAAAAAAAAAAAAAAAAAAAAAAAAAAAAAAAAAAAAAAAAAAAAAAAAAAAAAAAAA/AAAAAAAAAKCGAQAAAAAAAAAAAAAAAAAMAAAAAQAAAAAAAAAAAAAAAAAAAB8AAABUAAAARHLEBf///wEAAAAAAAAAAAAAAAAAAAAAAAAAAAAAAAAAAAAAAAAAAAAAAAB/f38A5+bmA8zMzADAwP8Af39/AAAAAAAAAAAAAAAAAAAAAAAAAAAAIQAAABgAAAAUAAAAKCMAABAXAAAIRgAAUBkAABAAAAAmAAAACAAAAP//////////MAAAABQAAAAAAAAAAAD//wAAAQAAAP//AAABAA=="/>
+                <pr:smNativeData xmlns:pr="smNativeData" xmlns="smNativeData" val="SMDATA_16_V2g2ahMAAAAlAAAAZAAAAA0AAAAAkAAAAEgAAACQAAAASAAAAAAAAAABAAAAAAAAAAEAAABQAAAAAAAAAAAA4D8AAAAAAADgPwAAAAAAAOA/AAAAAAAA4D8AAAAAAADgPwAAAAAAAOA/AAAAAAAA4D8AAAAAAADgPwAAAAAAAOA/AAAAAAAA4D8CAAAAjAAAAAAAAAAAAAAARHLEDP///wgAAAAAAAAAAAAAAAAAAAAAAAAAAAAAAAAAAAAAZAAAAAEAAABAAAAAAAAAAAAAAAAAAAAAAAAAAAAAAAAAAAAAAAAAAAAAAAAAAAAAAAAAAAAAAAAAAAAAAAAAAAAAAAAAAAAAAAAAAAAAAAAAAAAAAAAAAAAAAAAAAAAAFAAAADwAAAAAAAAAAAAAAAAAAAAPAAAAAQAAACMAAAAjAAAAIwAAAB4AAAAAAAAAZAAAAGQAAAAAAAAAZAAAAGQAAAAVAAAAYAAAAAAAAAAAAAAADwAAACADAAAAAAAAAAAAAAEAAACgMgAAVgcAAKr4//8BAAAAf39/AAEAAABkAAAAAAAAABQAAABAHwAAAAAAACYAAAAAAAAAwOD//wAAAAAmAAAAZAAAABYAAABMAAAAAAAAAAAAAAAEAAAAAAAAAAEAAADn5uYKAAAAACgAAAAoAAAAZAAAAGQAAAAAAAAAzMzMAAAAAABQAAAAUAAAAGQAAABkAAAAAAAAABcAAAAUAAAAAAAAAAAAAAD/fwAA/38AAAAAAAAJAAAABAAAAAAAAAAeAAAAaAAAAAAAAAAAAAAAAAAAAAAAAAAAAAAAECcAABAnAAAAAAAAAAAAAAAAAAAAAAAAAAAAAAAAAAAAAAAAAAAAABQAAAAAAAAAwMD/AAAAAABkAAAAMgAAAAAAAABkAAAAAAAAAH9/fwAKAAAAIgAAABgAAAAAAAAAAAAAAAAAAAAAAAAAAAAAAAAAAAAkAAAAJAAAAAAAAAAHAAAAAAAAAAAAAAAAAAAAAAAAAAAAAAAAAAAAf39/ACUAAABYAAAAAAAAAAAAAAAAAAAAAAAAAAAAAAAAAAAAAAAAAAAAAAAAAAAAAAAAAAAAAAA/AAAAAAAAAKCGAQAAAAAAAAAAAAAAAAAMAAAAAQAAAAAAAAAAAAAAAAAAAB8AAABUAAAARHLEBf///wEAAAAAAAAAAAAAAAAAAAAAAAAAAAAAAAAAAAAAAAAAAAAAAAB/f38A5+bmA8zMzADAwP8Af39/AAAAAAAAAAAAAAAAAAAAAAAAAAAAIQAAABgAAAAUAAAAKCMAABAXAAAIRgAAUBkAABAAAAAmAAAACAAAAP//////////MAAAABQAAAAAAAAAAAD//wAAAQAAAP//AAABAA=="/>
               </a:ext>
             </a:extLst>
           </p:cNvSpPr>
@@ -5606,7 +5748,7 @@
           <p:cNvSpPr>
             <a:extLst>
               <a:ext uri="smNativeData">
-                <pr:smNativeData xmlns:pr="smNativeData" xmlns="smNativeData" val="SMDATA_16_kRU2ahMAAAAlAAAAZAAAAA0AAAAAkAAAAEgAAACQAAAASAAAAAAAAAAAAAAAAAAAAAEAAABQAAAAAAAAAAAA4D8AAAAAAADgPwAAAAAAAOA/AAAAAAAA4D8AAAAAAADgPwAAAAAAAOA/AAAAAAAA4D8AAAAAAADgPwAAAAAAAOA/AAAAAAAA4D8CAAAAjAAAAAAAAAAAAAAARHLEDP///wgAAAAAAAAAAAAAAAAAAAAAAAAAAAAAAAAAAAAAZAAAAAEAAABAAAAAAAAAAAAAAAAAAAAAAAAAAAAAAAAAAAAAAAAAAAAAAAAAAAAAAAAAAAAAAAAAAAAAAAAAAAAAAAAAAAAAAAAAAAAAAAAAAAAAAAAAAAAAAAAAAAAAFAAAADwAAAAAAAAAAAAAAAAAAAAPAAAAAQAAACMAAAAjAAAAIwAAAB4AAAAAAAAAZAAAAGQAAAAAAAAAZAAAAGQAAAAVAAAAYAAAAAAAAAAAAAAADwAAACADAAAAAAAAAAAAAAEAAACgMgAAVgcAAKr4//8BAAAAf39/AAEAAABkAAAAAAAAABQAAABAHwAAAAAAACYAAAAAAAAAwOD//wAAAAAmAAAAZAAAABYAAABMAAAAAAAAAAAAAAAEAAAAAAAAAAEAAADn5uYKAAAAACgAAAAoAAAAZAAAAGQAAAAAAAAAzMzMAAAAAABQAAAAUAAAAGQAAABkAAAAAAAAABcAAAAUAAAAAAAAAAAAAAD/fwAA/38AAAAAAAAJAAAABAAAAAAAAAAeAAAAaAAAAAAAAAAAAAAAAAAAAAAAAAAAAAAAECcAABAnAAAAAAAAAAAAAAAAAAAAAAAAAAAAAAAAAAAAAAAAAAAAABQAAAAAAAAAwMD/AAAAAABkAAAAMgAAAAAAAABkAAAAAAAAAH9/fwAKAAAAIgAAABgAAAAAAAAAAAAAAAAAAAAAAAAAAAAAAAAAAAAkAAAAJAAAAAAAAAAHAAAAAAAAAAAAAAAAAAAAAAAAAAAAAAAAAAAAf39/ACUAAABYAAAAAAAAAAAAAAAAAAAAAAAAAAAAAAAAAAAAAAAAAAAAAAAAAAAAAAAAAAAAAAA/AAAAAAAAAKCGAQAAAAAAAAAAAAAAAAAMAAAAAQAAAAAAAAAAAAAAAAAAAB8AAABUAAAARHLEBf///wEAAAAAAAAAAAAAAAAAAAAAAAAAAAAAAAAAAAAAAAAAAAAAAAB/f38A5+bmA8zMzADAwP8Af39/AAAAAAAAAAAAAAAAAAAAAAAAAAAAIQAAABgAAAAUAAAAwCEAACAcAABwRwAAACQAABAAAAAmAAAACAAAAP//////////MAAAABQAAAAAAAAAAAD//wAAAQAAAP//AAABAA=="/>
+                <pr:smNativeData xmlns:pr="smNativeData" xmlns="smNativeData" val="SMDATA_16_V2g2ahMAAAAlAAAAZAAAAA0AAAAAkAAAAEgAAACQAAAASAAAAAAAAAAAAAAAAAAAAAEAAABQAAAAAAAAAAAA4D8AAAAAAADgPwAAAAAAAOA/AAAAAAAA4D8AAAAAAADgPwAAAAAAAOA/AAAAAAAA4D8AAAAAAADgPwAAAAAAAOA/AAAAAAAA4D8CAAAAjAAAAAAAAAAAAAAARHLEDP///wgAAAAAAAAAAAAAAAAAAAAAAAAAAAAAAAAAAAAAZAAAAAEAAABAAAAAAAAAAAAAAAAAAAAAAAAAAAAAAAAAAAAAAAAAAAAAAAAAAAAAAAAAAAAAAAAAAAAAAAAAAAAAAAAAAAAAAAAAAAAAAAAAAAAAAAAAAAAAAAAAAAAAFAAAADwAAAAAAAAAAAAAAAAAAAAPAAAAAQAAACMAAAAjAAAAIwAAAB4AAAAAAAAAZAAAAGQAAAAAAAAAZAAAAGQAAAAVAAAAYAAAAAAAAAAAAAAADwAAACADAAAAAAAAAAAAAAEAAACgMgAAVgcAAKr4//8BAAAAf39/AAEAAABkAAAAAAAAABQAAABAHwAAAAAAACYAAAAAAAAAwOD//wAAAAAmAAAAZAAAABYAAABMAAAAAAAAAAAAAAAEAAAAAAAAAAEAAADn5uYKAAAAACgAAAAoAAAAZAAAAGQAAAAAAAAAzMzMAAAAAABQAAAAUAAAAGQAAABkAAAAAAAAABcAAAAUAAAAAAAAAAAAAAD/fwAA/38AAAAAAAAJAAAABAAAAAAAAAAeAAAAaAAAAAAAAAAAAAAAAAAAAAAAAAAAAAAAECcAABAnAAAAAAAAAAAAAAAAAAAAAAAAAAAAAAAAAAAAAAAAAAAAABQAAAAAAAAAwMD/AAAAAABkAAAAMgAAAAAAAABkAAAAAAAAAH9/fwAKAAAAIgAAABgAAAAAAAAAAAAAAAAAAAAAAAAAAAAAAAAAAAAkAAAAJAAAAAAAAAAHAAAAAAAAAAAAAAAAAAAAAAAAAAAAAAAAAAAAf39/ACUAAABYAAAAAAAAAAAAAAAAAAAAAAAAAAAAAAAAAAAAAAAAAAAAAAAAAAAAAAAAAAAAAAA/AAAAAAAAAKCGAQAAAAAAAAAAAAAAAAAMAAAAAQAAAAAAAAAAAAAAAAAAAB8AAABUAAAARHLEBf///wEAAAAAAAAAAAAAAAAAAAAAAAAAAAAAAAAAAAAAAAAAAAAAAAB/f38A5+bmA8zMzADAwP8Af39/AAAAAAAAAAAAAAAAAAAAAAAAAAAAIQAAABgAAAAUAAAAwCEAACAcAABwRwAAACQAAAAAAAAmAAAACAAAAP//////////MAAAABQAAAAAAAAAAAD//wAAAQAAAP//AAABAA=="/>
               </a:ext>
             </a:extLst>
           </p:cNvSpPr>
@@ -5653,6 +5795,20 @@
               </a:rPr>
               <a:t>opções de menu. </a:t>
             </a:r>
+            <a:endParaRPr lang="en-us" sz="1500" b="1" cap="none">
+              <a:solidFill>
+                <a:srgbClr val="283441"/>
+              </a:solidFill>
+            </a:endParaRPr>
+          </a:p>
+          <a:p>
+            <a:pPr marL="177800" indent="-177800" algn="l">
+              <a:spcAft>
+                <a:spcPts val="800"/>
+              </a:spcAft>
+              <a:buSzTx/>
+              <a:buChar char="•"/>
+            </a:pPr>
             <a:r>
               <a:rPr lang="en-us" sz="1500" b="1" cap="none">
                 <a:solidFill>
@@ -5743,7 +5899,7 @@
           <p:cNvSpPr>
             <a:extLst>
               <a:ext uri="smNativeData">
-                <pr:smNativeData xmlns:pr="smNativeData" xmlns="smNativeData" val="SMDATA_16_kRU2ahMAAAAlAAAAZAAAAA0AAAAAkAAAAEgAAACQAAAASAAAAAAAAAABAAAAAAAAAAEAAABQAAAAAAAAAAAA4D8AAAAAAADgPwAAAAAAAOA/AAAAAAAA4D8AAAAAAADgPwAAAAAAAOA/AAAAAAAA4D8AAAAAAADgPwAAAAAAAOA/AAAAAAAA4D8CAAAAjAAAAAAAAAAAAAAARHLEDP///wgAAAAAAAAAAAAAAAAAAAAAAAAAAAAAAAAAAAAAZAAAAAEAAABAAAAAAAAAAAAAAAAAAAAAAAAAAAAAAAAAAAAAAAAAAAAAAAAAAAAAAAAAAAAAAAAAAAAAAAAAAAAAAAAAAAAAAAAAAAAAAAAAAAAAAAAAAAAAAAAAAAAAFAAAADwAAAAAAAAAAAAAAAAAAAAPAAAAAQAAACMAAAAjAAAAIwAAAB4AAAAAAAAAZAAAAGQAAAAAAAAAZAAAAGQAAAAVAAAAYAAAAAAAAAAAAAAADwAAACADAAAAAAAAAAAAAAEAAACgMgAAVgcAAKr4//8BAAAAf39/AAEAAABkAAAAAAAAABQAAABAHwAAAAAAACYAAAAAAAAAwOD//wAAAAAmAAAAZAAAABYAAABMAAAAAAAAAAAAAAAEAAAAAAAAAAEAAADn5uYKAAAAACgAAAAoAAAAZAAAAGQAAAAAAAAAzMzMAAAAAABQAAAAUAAAAGQAAABkAAAAAAAAABcAAAAUAAAAAAAAAAAAAAD/fwAA/38AAAAAAAAJAAAABAAAAAEAAAAeAAAAaAAAAAAAAAAAAAAAAAAAAAAAAAAAAAAAECcAABAnAAAAAAAAAAAAAAAAAAAAAAAAAAAAAAAAAAAAAAAAAAAAABQAAAAAAAAAwMD/AAAAAABkAAAAMgAAAAAAAABkAAAAAAAAAH9/fwAKAAAAIgAAABgAAAAAAAAAAAAAAAAAAAAAAAAAAAAAAAAAAAAkAAAAJAAAAAAAAAAHAAAAAAAAAAAAAAAAAAAAAAAAAAAAAAAAAAAAf39/ACUAAABYAAAAAAAAAAAAAAAAAAAAAAAAAAAAAAAAAAAAAAAAAAAAAAAAAAAAAAAAAAAAAAA/AAAAAAAAAKCGAQAAAAAAAAAAAAAAAAAMAAAAAQAAAAAAAAAAAAAAAAAAAB8AAABUAAAARHLEBf///wEAAAAAAAAAAAAAAAAAAAAAAAAAAAAAAAAAAAAAAAAAAAAAAAB/f38A5+bmA8zMzADAwP8Af39/AAAAAAAAAAAAAAAAAAAAAAAAAAAAIQAAABgAAAAUAAAAYAMAACABAACgRwAA0AIAABAAAAAmAAAACAAAAP//////////MAAAABQAAAAAAAAAAAD//wAAAQAAAP//AAABAA=="/>
+                <pr:smNativeData xmlns:pr="smNativeData" xmlns="smNativeData" val="SMDATA_16_V2g2ahMAAAAlAAAAZAAAAA0AAAAAkAAAAEgAAACQAAAASAAAAAAAAAABAAAAAAAAAAEAAABQAAAAAAAAAAAA4D8AAAAAAADgPwAAAAAAAOA/AAAAAAAA4D8AAAAAAADgPwAAAAAAAOA/AAAAAAAA4D8AAAAAAADgPwAAAAAAAOA/AAAAAAAA4D8CAAAAjAAAAAAAAAAAAAAARHLEDP///wgAAAAAAAAAAAAAAAAAAAAAAAAAAAAAAAAAAAAAZAAAAAEAAABAAAAAAAAAAAAAAAAAAAAAAAAAAAAAAAAAAAAAAAAAAAAAAAAAAAAAAAAAAAAAAAAAAAAAAAAAAAAAAAAAAAAAAAAAAAAAAAAAAAAAAAAAAAAAAAAAAAAAFAAAADwAAAAAAAAAAAAAAAAAAAAPAAAAAQAAACMAAAAjAAAAIwAAAB4AAAAAAAAAZAAAAGQAAAAAAAAAZAAAAGQAAAAVAAAAYAAAAAAAAAAAAAAADwAAACADAAAAAAAAAAAAAAEAAACgMgAAVgcAAKr4//8BAAAAf39/AAEAAABkAAAAAAAAABQAAABAHwAAAAAAACYAAAAAAAAAwOD//wAAAAAmAAAAZAAAABYAAABMAAAAAAAAAAAAAAAEAAAAAAAAAAEAAADn5uYKAAAAACgAAAAoAAAAZAAAAGQAAAAAAAAAzMzMAAAAAABQAAAAUAAAAGQAAABkAAAAAAAAABcAAAAUAAAAAAAAAAAAAAD/fwAA/38AAAAAAAAJAAAABAAAAAEAAAAeAAAAaAAAAAAAAAAAAAAAAAAAAAAAAAAAAAAAECcAABAnAAAAAAAAAAAAAAAAAAAAAAAAAAAAAAAAAAAAAAAAAAAAABQAAAAAAAAAwMD/AAAAAABkAAAAMgAAAAAAAABkAAAAAAAAAH9/fwAKAAAAIgAAABgAAAAAAAAAAAAAAAAAAAAAAAAAAAAAAAAAAAAkAAAAJAAAAAAAAAAHAAAAAAAAAAAAAAAAAAAAAAAAAAAAAAAAAAAAf39/ACUAAABYAAAAAAAAAAAAAAAAAAAAAAAAAAAAAAAAAAAAAAAAAAAAAAAAAAAAAAAAAAAAAAA/AAAAAAAAAKCGAQAAAAAAAAAAAAAAAAAMAAAAAQAAAAAAAAAAAAAAAAAAAB8AAABUAAAARHLEBf///wEAAAAAAAAAAAAAAAAAAAAAAAAAAAAAAAAAAAAAAAAAAAAAAAB/f38A5+bmA8zMzADAwP8Af39/AAAAAAAAAAAAAAAAAAAAAAAAAAAAIQAAABgAAAAUAAAAYAMAACABAACgRwAA0AIAABAAAAAmAAAACAAAAP//////////MAAAABQAAAAAAAAAAAD//wAAAQAAAP//AAABAA=="/>
               </a:ext>
             </a:extLst>
           </p:cNvSpPr>
@@ -5771,7 +5927,7 @@
               <a:buNone/>
             </a:pPr>
             <a:r>
-              <a:rPr lang="en-us" sz="1200" b="1" cap="none" spc="40">
+              <a:rPr lang="en-us" sz="1200" b="1" cap="none" spc="8">
                 <a:solidFill>
                   <a:srgbClr val="E0A038"/>
                 </a:solidFill>
@@ -5779,7 +5935,7 @@
               <a:t>RESULTADOS · </a:t>
             </a:r>
             <a:r>
-              <a:rPr lang="en-us" sz="1200" b="1" cap="none" spc="40">
+              <a:rPr lang="en-us" sz="1200" b="1" cap="none" spc="8">
                 <a:solidFill>
                   <a:srgbClr val="E0A038"/>
                 </a:solidFill>
@@ -5796,7 +5952,7 @@
           <p:cNvSpPr>
             <a:extLst>
               <a:ext uri="smNativeData">
-                <pr:smNativeData xmlns:pr="smNativeData" xmlns="smNativeData" val="SMDATA_16_kRU2ahMAAAAlAAAAZAAAAA0AAAAAkAAAAEgAAACQAAAASAAAAAAAAAABAAAAAAAAAAEAAABQAAAAAAAAAAAA4D8AAAAAAADgPwAAAAAAAOA/AAAAAAAA4D8AAAAAAADgPwAAAAAAAOA/AAAAAAAA4D8AAAAAAADgPwAAAAAAAOA/AAAAAAAA4D8CAAAAjAAAAAAAAAAAAAAARHLEDP///wgAAAAAAAAAAAAAAAAAAAAAAAAAAAAAAAAAAAAAZAAAAAEAAABAAAAAAAAAAAAAAAAAAAAAAAAAAAAAAAAAAAAAAAAAAAAAAAAAAAAAAAAAAAAAAAAAAAAAAAAAAAAAAAAAAAAAAAAAAAAAAAAAAAAAAAAAAAAAAAAAAAAAFAAAADwAAAAAAAAAAAAAAAAAAAAPAAAAAQAAACMAAAAjAAAAIwAAAB4AAAAAAAAAZAAAAGQAAAAAAAAAZAAAAGQAAAAVAAAAYAAAAAAAAAAAAAAADwAAACADAAAAAAAAAAAAAAEAAACgMgAAVgcAAKr4//8BAAAAf39/AAEAAABkAAAAAAAAABQAAABAHwAAAAAAACYAAAAAAAAAwOD//wAAAAAmAAAAZAAAABYAAABMAAAAAAAAAAAAAAAEAAAAAAAAAAEAAADn5uYKAAAAACgAAAAoAAAAZAAAAGQAAAAAAAAAzMzMAAAAAABQAAAAUAAAAGQAAABkAAAAAAAAABcAAAAUAAAAAAAAAAAAAAD/fwAA/38AAAAAAAAJAAAABAAAAHCLTDweAAAAaAAAAAAAAAAAAAAAAAAAAAAAAAAAAAAAECcAABAnAAAAAAAAAAAAAAAAAAAAAAAAAAAAAAAAAAAAAAAAAAAAABQAAAAAAAAAwMD/AAAAAABkAAAAMgAAAAAAAABkAAAAAAAAAH9/fwAKAAAAIgAAABgAAAAAAAAAAAAAAAAAAAAAAAAAAAAAAAAAAAAkAAAAJAAAAAAAAAAHAAAAAAAAAAAAAAAAAAAAAAAAAAAAAAAAAAAAf39/ACUAAABYAAAAAAAAAAAAAAAAAAAAAAAAAAAAAAAAAAAAAAAAAAAAAAAAAAAAAAAAAAAAAAA/AAAAAAAAAKCGAQAAAAAAAAAAAAAAAAAMAAAAAQAAAAAAAAAAAAAAAAAAAB8AAABUAAAARHLEBf///wEAAAAAAAAAAAAAAAAAAAAAAAAAAAAAAAAAAAAAAAAAAAAAAAB/f38A5+bmA8zMzADAwP8Af39/AAAAAAAAAAAAAAAAAAAAAAAAAAAAIQAAABgAAAAUAAAAYAMAAF0CAACgRwAA3QYAABAAAAAmAAAACAAAAP//////////MAAAABQAAAAAAAAAAAD//wAAAQAAAP//AAABAA=="/>
+                <pr:smNativeData xmlns:pr="smNativeData" xmlns="smNativeData" val="SMDATA_16_V2g2ahMAAAAlAAAAZAAAAA0AAAAAkAAAAEgAAACQAAAASAAAAAAAAAABAAAAAAAAAAEAAABQAAAAAAAAAAAA4D8AAAAAAADgPwAAAAAAAOA/AAAAAAAA4D8AAAAAAADgPwAAAAAAAOA/AAAAAAAA4D8AAAAAAADgPwAAAAAAAOA/AAAAAAAA4D8CAAAAjAAAAAAAAAAAAAAARHLEDP///wgAAAAAAAAAAAAAAAAAAAAAAAAAAAAAAAAAAAAAZAAAAAEAAABAAAAAAAAAAAAAAAAAAAAAAAAAAAAAAAAAAAAAAAAAAAAAAAAAAAAAAAAAAAAAAAAAAAAAAAAAAAAAAAAAAAAAAAAAAAAAAAAAAAAAAAAAAAAAAAAAAAAAFAAAADwAAAAAAAAAAAAAAAAAAAAPAAAAAQAAACMAAAAjAAAAIwAAAB4AAAAAAAAAZAAAAGQAAAAAAAAAZAAAAGQAAAAVAAAAYAAAAAAAAAAAAAAADwAAACADAAAAAAAAAAAAAAEAAACgMgAAVgcAAKr4//8BAAAAf39/AAEAAABkAAAAAAAAABQAAABAHwAAAAAAACYAAAAAAAAAwOD//wAAAAAmAAAAZAAAABYAAABMAAAAAAAAAAAAAAAEAAAAAAAAAAEAAADn5uYKAAAAACgAAAAoAAAAZAAAAGQAAAAAAAAAzMzMAAAAAABQAAAAUAAAAGQAAABkAAAAAAAAABcAAAAUAAAAAAAAAAAAAAD/fwAA/38AAAAAAAAJAAAABAAAAHCLTDweAAAAaAAAAAAAAAAAAAAAAAAAAAAAAAAAAAAAECcAABAnAAAAAAAAAAAAAAAAAAAAAAAAAAAAAAAAAAAAAAAAAAAAABQAAAAAAAAAwMD/AAAAAABkAAAAMgAAAAAAAABkAAAAAAAAAH9/fwAKAAAAIgAAABgAAAAAAAAAAAAAAAAAAAAAAAAAAAAAAAAAAAAkAAAAJAAAAAAAAAAHAAAAAAAAAAAAAAAAAAAAAAAAAAAAAAAAAAAAf39/ACUAAABYAAAAAAAAAAAAAAAAAAAAAAAAAAAAAAAAAAAAAAAAAAAAAAAAAAAAAAAAAAAAAAA/AAAAAAAAAKCGAQAAAAAAAAAAAAAAAAAMAAAAAQAAAAAAAAAAAAAAAAAAAB8AAABUAAAARHLEBf///wEAAAAAAAAAAAAAAAAAAAAAAAAAAAAAAAAAAAAAAAAAAAAAAAB/f38A5+bmA8zMzADAwP8Af39/AAAAAAAAAAAAAAAAAAAAAAAAAAAAIQAAABgAAAAUAAAAYAMAAF0CAACgRwAA3QYAABAAAAAmAAAACAAAAP//////////MAAAABQAAAAAAAAAAAD//wAAAQAAAP//AAABAA=="/>
               </a:ext>
             </a:extLst>
           </p:cNvSpPr>
@@ -5855,7 +6011,7 @@
           <p:cNvSpPr>
             <a:extLst>
               <a:ext uri="smNativeData">
-                <pr:smNativeData xmlns:pr="smNativeData" xmlns="smNativeData" val="SMDATA_16_kRU2ahMAAAAlAAAAZAAAAA0AAAAAAAAAAAAAAAAAAAAAAAAAAAAAAAABAAAAAAAAAAEAAABQAAAAAAAAAAAA4D8AAAAAAADgPwAAAAAAAOA/AAAAAAAA4D8AAAAAAADgPwAAAAAAAOA/AAAAAAAA4D8AAAAAAADgPwAAAAAAAOA/AAAAAAAA4D8CAAAAjAAAAAAAAAAAAAAARHLEDP///wgAAAAAAAAAAAAAAAAAAAAAAAAAAAAAAAAAAAAAZAAAAAEAAABAAAAAAAAAAAAAAAAAAAAAAAAAAAAAAAAAAAAAAAAAAAAAAAAAAAAAAAAAAAAAAAAAAAAAAAAAAAAAAAAAAAAAAAAAAAAAAAAAAAAAAAAAAAAAAAAAAAAAFAAAADwAAAAAAAAAAAAAAAAAAAAPAAAAAQAAACMAAAAjAAAAIwAAAB4AAAAAAAAAZAAAAGQAAAAAAAAAZAAAAGQAAAAVAAAAYAAAAAAAAAAAAAAADwAAACADAAAAAAAAAAAAAAEAAACgMgAAVgcAAKr4//8BAAAAf39/AAEAAABkAAAAAAAAABQAAABAHwAAAAAAACYAAAAAAAAAwOD//wAAAAAmAAAAZAAAABYAAABMAAAAAAAAAAAAAAAEAAAAAAAAAAEAAADn5uYKAAAAACgAAAAoAAAAZAAAAGQAAAAAAAAAzMzMAAAAAABQAAAAUAAAAGQAAABkAAAAAAAAABcAAAAUAAAAAAAAAAAAAAD/fwAA/38AAAAAAAAJAAAABAAAAG4LAAAeAAAAaAAAAAAAAAAAAAAAAAAAAAAAAAAAAAAAECcAABAnAAAAAAAAAAAAAAAAAAAAAAAAAAAAAAAAAAAAAAAAAAAAABQAAAAAAAAAwMD/AAAAAABkAAAAMgAAAAAAAABkAAAAAAAAAH9/fwAKAAAAIgAAABgAAAAAAAAAAAAAAAAAAAAAAAAAAAAAAAAAAAAkAAAAJAAAAAAAAAAHAAAAAAAAAAAAAAAAAAAAAAAAAAAAAAAAAAAAf39/ACUAAABYAAAAAAAAAAAAAAAAAAAAAAAAAAAAAAAAAAAAAAAAAAAAAAAAAAAAAAAAAAAAAAA/AAAAAAAAAKCGAQAAAAAAAAAAAAAAAAAMAAAAAQAAAAAAAAAAAAAAAAAAAB8AAABUAAAARHLEBf///wEAAAAAAAAAAAAAAAAAAAAAAAAAAAAAAAAAAAAAAAAAAAAAAAB/f38A5+bmA8zMzADAwP8Af39/AAAAAAAAAAAAAAAAAAAAAAAAAAAAIQAAABgAAAAUAAAAYAMAALgIAABAJgAAOA0AABAAAAAmAAAACAAAAP//////////MAAAABQAAAAAAAAAAAD//wAAAQAAAP//AAABAA=="/>
+                <pr:smNativeData xmlns:pr="smNativeData" xmlns="smNativeData" val="SMDATA_16_V2g2ahMAAAAlAAAAZAAAAA0AAAAAAAAAAAAAAAAAAAAAAAAAAAAAAAABAAAAAAAAAAEAAABQAAAAAAAAAAAA4D8AAAAAAADgPwAAAAAAAOA/AAAAAAAA4D8AAAAAAADgPwAAAAAAAOA/AAAAAAAA4D8AAAAAAADgPwAAAAAAAOA/AAAAAAAA4D8CAAAAjAAAAAAAAAAAAAAARHLEDP///wgAAAAAAAAAAAAAAAAAAAAAAAAAAAAAAAAAAAAAZAAAAAEAAABAAAAAAAAAAAAAAAAAAAAAAAAAAAAAAAAAAAAAAAAAAAAAAAAAAAAAAAAAAAAAAAAAAAAAAAAAAAAAAAAAAAAAAAAAAAAAAAAAAAAAAAAAAAAAAAAAAAAAFAAAADwAAAAAAAAAAAAAAAAAAAAPAAAAAQAAACMAAAAjAAAAIwAAAB4AAAAAAAAAZAAAAGQAAAAAAAAAZAAAAGQAAAAVAAAAYAAAAAAAAAAAAAAADwAAACADAAAAAAAAAAAAAAEAAACgMgAAVgcAAKr4//8BAAAAf39/AAEAAABkAAAAAAAAABQAAABAHwAAAAAAACYAAAAAAAAAwOD//wAAAAAmAAAAZAAAABYAAABMAAAAAAAAAAAAAAAEAAAAAAAAAAEAAADn5uYKAAAAACgAAAAoAAAAZAAAAGQAAAAAAAAAzMzMAAAAAABQAAAAUAAAAGQAAABkAAAAAAAAABcAAAAUAAAAAAAAAAAAAAD/fwAA/38AAAAAAAAJAAAABAAAAG4LAAAeAAAAaAAAAAAAAAAAAAAAAAAAAAAAAAAAAAAAECcAABAnAAAAAAAAAAAAAAAAAAAAAAAAAAAAAAAAAAAAAAAAAAAAABQAAAAAAAAAwMD/AAAAAABkAAAAMgAAAAAAAABkAAAAAAAAAH9/fwAKAAAAIgAAABgAAAAAAAAAAAAAAAAAAAAAAAAAAAAAAAAAAAAkAAAAJAAAAAAAAAAHAAAAAAAAAAAAAAAAAAAAAAAAAAAAAAAAAAAAf39/ACUAAABYAAAAAAAAAAAAAAAAAAAAAAAAAAAAAAAAAAAAAAAAAAAAAAAAAAAAAAAAAAAAAAA/AAAAAAAAAKCGAQAAAAAAAAAAAAAAAAAMAAAAAQAAAAAAAAAAAAAAAAAAAB8AAABUAAAARHLEBf///wEAAAAAAAAAAAAAAAAAAAAAAAAAAAAAAAAAAAAAAAAAAAAAAAB/f38A5+bmA8zMzADAwP8Af39/AAAAAAAAAAAAAAAAAAAAAAAAAAAAIQAAABgAAAAUAAAAYAMAALgIAABAJgAAOA0AABAAAAAmAAAACAAAAP//////////MAAAABQAAAAAAAAAAAD//wAAAQAAAP//AAABAA=="/>
               </a:ext>
             </a:extLst>
           </p:cNvSpPr>
@@ -5908,7 +6064,7 @@
           <p:cNvSpPr>
             <a:extLst>
               <a:ext uri="smNativeData">
-                <pr:smNativeData xmlns:pr="smNativeData" xmlns="smNativeData" val="SMDATA_16_kRU2ahMAAAAlAAAAZAAAAA0AAAAAkAAAAEgAAACQAAAASAAAAAAAAAABAAAAAAAAAAEAAABQAAAAAAAAAAAA4D8AAAAAAADgPwAAAAAAAOA/AAAAAAAA4D8AAAAAAADgPwAAAAAAAOA/AAAAAAAA4D8AAAAAAADgPwAAAAAAAOA/AAAAAAAA4D8CAAAAjAAAAAAAAAAAAAAARHLEDP///wgAAAAAAAAAAAAAAAAAAAAAAAAAAAAAAAAAAAAAZAAAAAEAAABAAAAAAAAAAAAAAAAAAAAAAAAAAAAAAAAAAAAAAAAAAAAAAAAAAAAAAAAAAAAAAAAAAAAAAAAAAAAAAAAAAAAAAAAAAAAAAAAAAAAAAAAAAAAAAAAAAAAAFAAAADwAAAAAAAAAAAAAAAAAAAAPAAAAAQAAACMAAAAjAAAAIwAAAB4AAAAAAAAAZAAAAGQAAAAAAAAAZAAAAGQAAAAVAAAAYAAAAAAAAAAAAAAADwAAACADAAAAAAAAAAAAAAEAAACgMgAAVgcAAKr4//8BAAAAf39/AAEAAABkAAAAAAAAABQAAABAHwAAAAAAACYAAAAAAAAAwOD//wAAAAAmAAAAZAAAABYAAABMAAAAAAAAAAAAAAAEAAAAAAAAAAEAAADn5uYKAAAAACgAAAAoAAAAZAAAAGQAAAAAAAAAzMzMAAAAAABQAAAAUAAAAGQAAABkAAAAAAAAABcAAAAUAAAAAAAAAAAAAAD/fwAA/38AAAAAAAAJAAAABAAAAAAAAAAeAAAAaAAAAAAAAAAAAAAAAAAAAAAAAAAAAAAAECcAABAnAAAAAAAAAAAAAAAAAAAAAAAAAAAAAAAAAAAAAAAAAAAAABQAAAAAAAAAwMD/AAAAAABkAAAAMgAAAAAAAABkAAAAAAAAAH9/fwAKAAAAIgAAABgAAAAAAAAAAAAAAAAAAAAAAAAAAAAAAAAAAAAkAAAAJAAAAAAAAAAHAAAAAAAAAAAAAAAAAAAAAAAAAAAAAAAAAAAAf39/ACUAAABYAAAAAAAAAAAAAAAAAAAAAAAAAAAAAAAAAAAAAAAAAAAAAAAAAAAAAAAAAAAAAAA/AAAAAAAAAKCGAQAAAAAAAAAAAAAAAAAMAAAAAQAAAAAAAAAAAAAAAAAAAB8AAABUAAAARHLEBf///wEAAAAAAAAAAAAAAAAAAAAAAAAAAAAAAAAAAAAAAAAAAAAAAAB/f38A5+bmA8zMzADAwP8Af39/AAAAAAAAAAAAAAAAAAAAAAAAAAAAIQAAABgAAAAUAAAAYAMAADgNAABAJgAAeA8AABAAAAAmAAAACAAAAP//////////MAAAABQAAAAAAAAAAAD//wAAAQAAAP//AAABAA=="/>
+                <pr:smNativeData xmlns:pr="smNativeData" xmlns="smNativeData" val="SMDATA_16_V2g2ahMAAAAlAAAAZAAAAA0AAAAAkAAAAEgAAACQAAAASAAAAAAAAAABAAAAAAAAAAEAAABQAAAAAAAAAAAA4D8AAAAAAADgPwAAAAAAAOA/AAAAAAAA4D8AAAAAAADgPwAAAAAAAOA/AAAAAAAA4D8AAAAAAADgPwAAAAAAAOA/AAAAAAAA4D8CAAAAjAAAAAAAAAAAAAAARHLEDP///wgAAAAAAAAAAAAAAAAAAAAAAAAAAAAAAAAAAAAAZAAAAAEAAABAAAAAAAAAAAAAAAAAAAAAAAAAAAAAAAAAAAAAAAAAAAAAAAAAAAAAAAAAAAAAAAAAAAAAAAAAAAAAAAAAAAAAAAAAAAAAAAAAAAAAAAAAAAAAAAAAAAAAFAAAADwAAAAAAAAAAAAAAAAAAAAPAAAAAQAAACMAAAAjAAAAIwAAAB4AAAAAAAAAZAAAAGQAAAAAAAAAZAAAAGQAAAAVAAAAYAAAAAAAAAAAAAAADwAAACADAAAAAAAAAAAAAAEAAACgMgAAVgcAAKr4//8BAAAAf39/AAEAAABkAAAAAAAAABQAAABAHwAAAAAAACYAAAAAAAAAwOD//wAAAAAmAAAAZAAAABYAAABMAAAAAAAAAAAAAAAEAAAAAAAAAAEAAADn5uYKAAAAACgAAAAoAAAAZAAAAGQAAAAAAAAAzMzMAAAAAABQAAAAUAAAAGQAAABkAAAAAAAAABcAAAAUAAAAAAAAAAAAAAD/fwAA/38AAAAAAAAJAAAABAAAAAAAAAAeAAAAaAAAAAAAAAAAAAAAAAAAAAAAAAAAAAAAECcAABAnAAAAAAAAAAAAAAAAAAAAAAAAAAAAAAAAAAAAAAAAAAAAABQAAAAAAAAAwMD/AAAAAABkAAAAMgAAAAAAAABkAAAAAAAAAH9/fwAKAAAAIgAAABgAAAAAAAAAAAAAAAAAAAAAAAAAAAAAAAAAAAAkAAAAJAAAAAAAAAAHAAAAAAAAAAAAAAAAAAAAAAAAAAAAAAAAAAAAf39/ACUAAABYAAAAAAAAAAAAAAAAAAAAAAAAAAAAAAAAAAAAAAAAAAAAAAAAAAAAAAAAAAAAAAA/AAAAAAAAAKCGAQAAAAAAAAAAAAAAAAAMAAAAAQAAAAAAAAAAAAAAAAAAAB8AAABUAAAARHLEBf///wEAAAAAAAAAAAAAAAAAAAAAAAAAAAAAAAAAAAAAAAAAAAAAAAB/f38A5+bmA8zMzADAwP8Af39/AAAAAAAAAAAAAAAAAAAAAAAAAAAAIQAAABgAAAAUAAAAYAMAADgNAABAJgAAeA8AABAAAAAmAAAACAAAAP//////////MAAAABQAAAAAAAAAAAD//wAAAQAAAP//AAABAA=="/>
               </a:ext>
             </a:extLst>
           </p:cNvSpPr>
@@ -5977,7 +6133,7 @@
           <p:cNvSpPr>
             <a:extLst>
               <a:ext uri="smNativeData">
-                <pr:smNativeData xmlns:pr="smNativeData" xmlns="smNativeData" val="SMDATA_16_kRU2ahMAAAAlAAAAZAAAAA0AAAAAAAAAAAAAAAAAAAAAAAAAAAAAAAABAAAAAAAAAAEAAABQAAAAAAAAAAAA4D8AAAAAAADgPwAAAAAAAOA/AAAAAAAA4D8AAAAAAADgPwAAAAAAAOA/AAAAAAAA4D8AAAAAAADgPwAAAAAAAOA/AAAAAAAA4D8CAAAAjAAAAAAAAAAAAAAARHLEDP///wgAAAAAAAAAAAAAAAAAAAAAAAAAAAAAAAAAAAAAZAAAAAEAAABAAAAAAAAAAAAAAAAAAAAAAAAAAAAAAAAAAAAAAAAAAAAAAAAAAAAAAAAAAAAAAAAAAAAAAAAAAAAAAAAAAAAAAAAAAAAAAAAAAAAAAAAAAAAAAAAAAAAAFAAAADwAAAAAAAAAAAAAAAAAAAAPAAAAAQAAACMAAAAjAAAAIwAAAB4AAAAAAAAAZAAAAGQAAAAAAAAAZAAAAGQAAAAVAAAAYAAAAAAAAAAAAAAADwAAACADAAAAAAAAAAAAAAEAAACgMgAAVgcAAKr4//8BAAAAf39/AAEAAABkAAAAAAAAABQAAABAHwAAAAAAACYAAAAAAAAAwOD//wAAAAAmAAAAZAAAABYAAABMAAAAAAAAAAAAAAAEAAAAAAAAAAEAAADn5uYKAAAAACgAAAAoAAAAZAAAAGQAAAAAAAAAzMzMAAAAAABQAAAAUAAAAGQAAABkAAAAAAAAABcAAAAUAAAAAAAAAAAAAAD/fwAA/38AAAAAAAAJAAAABAAAAP////8eAAAAaAAAAAAAAAAAAAAAAAAAAAAAAAAAAAAAECcAABAnAAAAAAAAAAAAAAAAAAAAAAAAAAAAAAAAAAAAAAAAAAAAABQAAAAAAAAAwMD/AAAAAABkAAAAMgAAAAAAAABkAAAAAAAAAH9/fwAKAAAAIgAAABgAAAAAAAAAAAAAAAAAAAAAAAAAAAAAAAAAAAAkAAAAJAAAAAAAAAAHAAAAAAAAAAAAAAAAAAAAAAAAAAAAAAAAAAAAf39/ACUAAABYAAAAAAAAAAAAAAAAAAAAAAAAAAAAAAAAAAAAAAAAAAAAAAAAAAAAAAAAAAAAAAA/AAAAAAAAAKCGAQAAAAAAAAAAAAAAAAAMAAAAAQAAAAAAAAAAAAAAAAAAAB8AAABUAAAARHLEBf///wEAAAAAAAAAAAAAAAAAAAAAAAAAAAAAAAAAAAAAAAAAAAAAAAB/f38A5+bmA8zMzADAwP8Af39/AAAAAAAAAAAAAAAAAAAAAAAAAAAAIQAAABgAAAAUAAAAYAMAAJgQAABAJgAAiBQAABAAAAAmAAAACAAAAP//////////MAAAABQAAAAAAAAAAAD//wAAAQAAAP//AAABAA=="/>
+                <pr:smNativeData xmlns:pr="smNativeData" xmlns="smNativeData" val="SMDATA_16_V2g2ahMAAAAlAAAAZAAAAA0AAAAAAAAAAAAAAAAAAAAAAAAAAAAAAAABAAAAAAAAAAEAAABQAAAAAAAAAAAA4D8AAAAAAADgPwAAAAAAAOA/AAAAAAAA4D8AAAAAAADgPwAAAAAAAOA/AAAAAAAA4D8AAAAAAADgPwAAAAAAAOA/AAAAAAAA4D8CAAAAjAAAAAAAAAAAAAAARHLEDP///wgAAAAAAAAAAAAAAAAAAAAAAAAAAAAAAAAAAAAAZAAAAAEAAABAAAAAAAAAAAAAAAAAAAAAAAAAAAAAAAAAAAAAAAAAAAAAAAAAAAAAAAAAAAAAAAAAAAAAAAAAAAAAAAAAAAAAAAAAAAAAAAAAAAAAAAAAAAAAAAAAAAAAFAAAADwAAAAAAAAAAAAAAAAAAAAPAAAAAQAAACMAAAAjAAAAIwAAAB4AAAAAAAAAZAAAAGQAAAAAAAAAZAAAAGQAAAAVAAAAYAAAAAAAAAAAAAAADwAAACADAAAAAAAAAAAAAAEAAACgMgAAVgcAAKr4//8BAAAAf39/AAEAAABkAAAAAAAAABQAAABAHwAAAAAAACYAAAAAAAAAwOD//wAAAAAmAAAAZAAAABYAAABMAAAAAAAAAAAAAAAEAAAAAAAAAAEAAADn5uYKAAAAACgAAAAoAAAAZAAAAGQAAAAAAAAAzMzMAAAAAABQAAAAUAAAAGQAAABkAAAAAAAAABcAAAAUAAAAAAAAAAAAAAD/fwAA/38AAAAAAAAJAAAABAAAAP////8eAAAAaAAAAAAAAAAAAAAAAAAAAAAAAAAAAAAAECcAABAnAAAAAAAAAAAAAAAAAAAAAAAAAAAAAAAAAAAAAAAAAAAAABQAAAAAAAAAwMD/AAAAAABkAAAAMgAAAAAAAABkAAAAAAAAAH9/fwAKAAAAIgAAABgAAAAAAAAAAAAAAAAAAAAAAAAAAAAAAAAAAAAkAAAAJAAAAAAAAAAHAAAAAAAAAAAAAAAAAAAAAAAAAAAAAAAAAAAAf39/ACUAAABYAAAAAAAAAAAAAAAAAAAAAAAAAAAAAAAAAAAAAAAAAAAAAAAAAAAAAAAAAAAAAAA/AAAAAAAAAKCGAQAAAAAAAAAAAAAAAAAMAAAAAQAAAAAAAAAAAAAAAAAAAB8AAABUAAAARHLEBf///wEAAAAAAAAAAAAAAAAAAAAAAAAAAAAAAAAAAAAAAAAAAAAAAAB/f38A5+bmA8zMzADAwP8Af39/AAAAAAAAAAAAAAAAAAAAAAAAAAAAIQAAABgAAAAUAAAAYAMAAJgQAABAJgAAiBQAABAAAAAmAAAACAAAAP//////////MAAAABQAAAAAAAAAAAD//wAAAQAAAP//AAABAA=="/>
               </a:ext>
             </a:extLst>
           </p:cNvSpPr>
@@ -6030,7 +6186,7 @@
           <p:cNvSpPr>
             <a:extLst>
               <a:ext uri="smNativeData">
-                <pr:smNativeData xmlns:pr="smNativeData" xmlns="smNativeData" val="SMDATA_16_kRU2ahMAAAAlAAAAZAAAAA0AAAAAkAAAAEgAAACQAAAASAAAAAAAAAABAAAAAAAAAAEAAABQAAAAAAAAAAAA4D8AAAAAAADgPwAAAAAAAOA/AAAAAAAA4D8AAAAAAADgPwAAAAAAAOA/AAAAAAAA4D8AAAAAAADgPwAAAAAAAOA/AAAAAAAA4D8CAAAAjAAAAAAAAAAAAAAARHLEDP///wgAAAAAAAAAAAAAAAAAAAAAAAAAAAAAAAAAAAAAZAAAAAEAAABAAAAAAAAAAAAAAAAAAAAAAAAAAAAAAAAAAAAAAAAAAAAAAAAAAAAAAAAAAAAAAAAAAAAAAAAAAAAAAAAAAAAAAAAAAAAAAAAAAAAAAAAAAAAAAAAAAAAAFAAAADwAAAAAAAAAAAAAAAAAAAAPAAAAAQAAACMAAAAjAAAAIwAAAB4AAAAAAAAAZAAAAGQAAAAAAAAAZAAAAGQAAAAVAAAAYAAAAAAAAAAAAAAADwAAACADAAAAAAAAAAAAAAEAAACgMgAAVgcAAKr4//8BAAAAf39/AAEAAABkAAAAAAAAABQAAABAHwAAAAAAACYAAAAAAAAAwOD//wAAAAAmAAAAZAAAABYAAABMAAAAAAAAAAAAAAAEAAAAAAAAAAEAAADn5uYKAAAAACgAAAAoAAAAZAAAAGQAAAAAAAAAzMzMAAAAAABQAAAAUAAAAGQAAABkAAAAAAAAABcAAAAUAAAAAAAAAAAAAAD/fwAA/38AAAAAAAAJAAAABAAAAP////8eAAAAaAAAAAAAAAAAAAAAAAAAAAAAAAAAAAAAECcAABAnAAAAAAAAAAAAAAAAAAAAAAAAAAAAAAAAAAAAAAAAAAAAABQAAAAAAAAAwMD/AAAAAABkAAAAMgAAAAAAAABkAAAAAAAAAH9/fwAKAAAAIgAAABgAAAAAAAAAAAAAAAAAAAAAAAAAAAAAAAAAAAAkAAAAJAAAAAAAAAAHAAAAAAAAAAAAAAAAAAAAAAAAAAAAAAAAAAAAf39/ACUAAABYAAAAAAAAAAAAAAAAAAAAAAAAAAAAAAAAAAAAAAAAAAAAAAAAAAAAAAAAAAAAAAA/AAAAAAAAAKCGAQAAAAAAAAAAAAAAAAAMAAAAAQAAAAAAAAAAAAAAAAAAAB8AAABUAAAARHLEBf///wEAAAAAAAAAAAAAAAAAAAAAAAAAAAAAAAAAAAAAAAAAAAAAAAB/f38A5+bmA8zMzADAwP8Af39/AAAAAAAAAAAAAAAAAAAAAAAAAAAAIQAAABgAAAAUAAAAYAMAAIgUAABAJgAAyBYAABAAAAAmAAAACAAAAP//////////MAAAABQAAAAAAAAAAAD//wAAAQAAAP//AAABAA=="/>
+                <pr:smNativeData xmlns:pr="smNativeData" xmlns="smNativeData" val="SMDATA_16_V2g2ahMAAAAlAAAAZAAAAA0AAAAAkAAAAEgAAACQAAAASAAAAAAAAAABAAAAAAAAAAEAAABQAAAAAAAAAAAA4D8AAAAAAADgPwAAAAAAAOA/AAAAAAAA4D8AAAAAAADgPwAAAAAAAOA/AAAAAAAA4D8AAAAAAADgPwAAAAAAAOA/AAAAAAAA4D8CAAAAjAAAAAAAAAAAAAAARHLEDP///wgAAAAAAAAAAAAAAAAAAAAAAAAAAAAAAAAAAAAAZAAAAAEAAABAAAAAAAAAAAAAAAAAAAAAAAAAAAAAAAAAAAAAAAAAAAAAAAAAAAAAAAAAAAAAAAAAAAAAAAAAAAAAAAAAAAAAAAAAAAAAAAAAAAAAAAAAAAAAAAAAAAAAFAAAADwAAAAAAAAAAAAAAAAAAAAPAAAAAQAAACMAAAAjAAAAIwAAAB4AAAAAAAAAZAAAAGQAAAAAAAAAZAAAAGQAAAAVAAAAYAAAAAAAAAAAAAAADwAAACADAAAAAAAAAAAAAAEAAACgMgAAVgcAAKr4//8BAAAAf39/AAEAAABkAAAAAAAAABQAAABAHwAAAAAAACYAAAAAAAAAwOD//wAAAAAmAAAAZAAAABYAAABMAAAAAAAAAAAAAAAEAAAAAAAAAAEAAADn5uYKAAAAACgAAAAoAAAAZAAAAGQAAAAAAAAAzMzMAAAAAABQAAAAUAAAAGQAAABkAAAAAAAAABcAAAAUAAAAAAAAAAAAAAD/fwAA/38AAAAAAAAJAAAABAAAAP////8eAAAAaAAAAAAAAAAAAAAAAAAAAAAAAAAAAAAAECcAABAnAAAAAAAAAAAAAAAAAAAAAAAAAAAAAAAAAAAAAAAAAAAAABQAAAAAAAAAwMD/AAAAAABkAAAAMgAAAAAAAABkAAAAAAAAAH9/fwAKAAAAIgAAABgAAAAAAAAAAAAAAAAAAAAAAAAAAAAAAAAAAAAkAAAAJAAAAAAAAAAHAAAAAAAAAAAAAAAAAAAAAAAAAAAAAAAAAAAAf39/ACUAAABYAAAAAAAAAAAAAAAAAAAAAAAAAAAAAAAAAAAAAAAAAAAAAAAAAAAAAAAAAAAAAAA/AAAAAAAAAKCGAQAAAAAAAAAAAAAAAAAMAAAAAQAAAAAAAAAAAAAAAAAAAB8AAABUAAAARHLEBf///wEAAAAAAAAAAAAAAAAAAAAAAAAAAAAAAAAAAAAAAAAAAAAAAAB/f38A5+bmA8zMzADAwP8Af39/AAAAAAAAAAAAAAAAAAAAAAAAAAAAIQAAABgAAAAUAAAAYAMAAIgUAABAJgAAyBYAABAAAAAmAAAACAAAAP//////////MAAAABQAAAAAAAAAAAD//wAAAQAAAP//AAABAA=="/>
               </a:ext>
             </a:extLst>
           </p:cNvSpPr>
@@ -6115,7 +6271,7 @@
           <p:cNvSpPr>
             <a:extLst>
               <a:ext uri="smNativeData">
-                <pr:smNativeData xmlns:pr="smNativeData" xmlns="smNativeData" val="SMDATA_16_kRU2ahMAAAAlAAAAZQAAAA0AAAAAkAAAAEgAAACQAAAASAAAAAAAAAAAAAAAAAAAAAEAAABQAAAAkpbK2xFOuz8AAAAAAADwvwAAAAAAAOA/AAAAAAAA4D8AAAAAAADgPwAAAAAAAOA/AAAAAAAA4D8AAAAAAADgPwAAAAAAAOA/AAAAAAAA4D8CAAAAjAAAAAEAAAAAAAAA7/P4AP///wgAAAAAAAAAAAAAAAAAAAAAAAAAAAAAAAAAAAAAeAAAAAEAAABAAAAAAAAAAAAAAABaAAAAAAAAAAAAAAAAAAAAAAAAAAAAAAAAAAAAAAAAAAAAAAAAAAAAAAAAAAAAAAAAAAAAAAAAAAAAAAAAAAAAAAAAAAAAAAAAAAAAFAAAADwAAAAAAAAAAAAAAAAAAAAPAAAAAQAAACMAAAAjAAAAIwAAAB4AAAAAAAAAZAAAAGQAAAAAAAAAZAAAAGQAAAAVAAAAYAAAAAAAAAAAAAAADwAAACADAAAAAAAAAAAAAAEAAACgMgAAVgcAAKr4//8BAAAAf39/AAEAAABkAAAAAAAAABQAAABAHwAAAAAAACYAAAAAAAAAwOD//wAAAAAmAAAAZAAAABYAAABMAAAAAQAAAAAAAAAGAAAAAAAAAAEAAAC5xNAAPAAAAAAAAAAoAAAAZAAAAGQAAAAAAAAAy8vLADwAAAAAAAAAKAAAAGQAAABkAAAAAAAAABcAAAAUAAAAAAAAAAAAAAD/fwAA/38AAAAAAAAJAAAABAAAANBCPDweAAAAaAAAAAAAAAAAAAAAAAAAAAAAAAAAAAAAECcAABAnAAAAAAAAAAAAAAAAAAAAAAAAAAAAAAAAAAAAAAAAAAAAAHgAAAAAAAAAwMD/AAAAAAAAAAAAAAAAAAAAAABkAAAAAAAAAH9/fwAKAAAAIgAAABgAAAAAAAAAAAAAAAAAAAAAAAAAAAAAAAAAAAAkAAAAJAAAAAAAAAAHAAAAAAAAAAAAAAAAAAAAAAAAAAAAAAAAAAAAf39/ACUAAABYAAAAAAAAAAAAAAAAAAAAAAAAAAAAAAAAAAAAAAAAAAAAAAAAAAAAAAAAAAAAAAA/AAAAAAAAAKCGAQAAAAAAAAAAAAAAAAAMAAAAAQAAAAAAAAAAAAAAAAAAAB8AAABUAAAA7/P4AP///wEAAAAAAAAAAAAAAAAAAAAAAAAAAAAAAAAAAAAAAAAAAAAAAAB/f38AucTQAMvLywDAwP8Af39/AAAAAAAAAAAAAAAAAAAAAAAAAAAAIQAAABgAAAAUAAAAYAMAAOgXAAAgJQAAWCAAABAAAAAmAAAACAAAAP//////////MAAAABQAAAAAAAAAAAD//wAAAQAAAP//AAABAA=="/>
+                <pr:smNativeData xmlns:pr="smNativeData" xmlns="smNativeData" val="SMDATA_16_V2g2ahMAAAAlAAAAZQAAAA0AAAAAkAAAAEgAAACQAAAASAAAAAAAAAAAAAAAAAAAAAEAAABQAAAAkpbK2xFOuz8AAAAAAAAAAAAAAAAAAOA/AAAAAAAA4D8AAAAAAADgPwAAAAAAAOA/AAAAAAAA4D8AAAAAAADgPwAAAAAAAOA/AAAAAAAA4D8CAAAAjAAAAAEAAAAAAAAA7/P4AP///wgAAAAAAAAAAAAAAAAAAAAAAAAAAAAAAAAAAAAAeAAAAAEAAABAAAAAAAAAAAAAAABaAAAAAAAAAAAAAAAAAAAAAAAAAAAAAAAAAAAAAAAAAAAAAAAAAAAAAAAAAAAAAAAAAAAAAAAAAAAAAAAAAAAAAAAAAAAAAAAAAAAAFAAAADwAAAAAAAAAAAAAAAAAAAAPAAAAAQAAACMAAAAjAAAAIwAAAB4AAAAAAAAAZAAAAGQAAAAAAAAAZAAAAGQAAAAVAAAAYAAAAAAAAAAAAAAADwAAACADAAAAAAAAAAAAAAEAAACgMgAAVgcAAKr4//8BAAAAf39/AAEAAABkAAAAAAAAABQAAABAHwAAAAAAACYAAAAAAAAAwOD//wAAAAAmAAAAZAAAABYAAABMAAAAAQAAAAAAAAAGAAAAAAAAAAEAAAC5xNAAPAAAAAAAAAAoAAAAZAAAAGQAAAAAAAAAy8vLADwAAAAAAAAAKAAAAGQAAABkAAAAAAAAABcAAAAUAAAAAAAAAAAAAAD/fwAA/38AAAAAAAAJAAAABAAAANBCPDweAAAAaAAAAAAAAAAAAAAAAAAAAAAAAAAAAAAAECcAABAnAAAAAAAAAAAAAAAAAAAAAAAAAAAAAAAAAAAAAAAAAAAAAHgAAAAAAAAAwMD/AAAAAAAAAAAAAAAAAAAAAABkAAAAAAAAAH9/fwAKAAAAIgAAABgAAAAAAAAAAAAAAAAAAAAAAAAAAAAAAAAAAAAkAAAAJAAAAAAAAAAHAAAAAAAAAAAAAAAAAAAAAAAAAAAAAAAAAAAAf39/ACUAAABYAAAAAAAAAAAAAAAAAAAAAAAAAAAAAAAAAAAAAAAAAAAAAAAAAAAAAAAAAAAAAAA/AAAAAAAAAKCGAQAAAAAAAAAAAAAAAAAMAAAAAQAAAAAAAAAAAAAAAAAAAB8AAABUAAAA7/P4AP///wEAAAAAAAAAAAAAAAAAAAAAAAAAAAAAAAAAAAAAAAAAAAAAAAB/f38AucTQAMvLywDAwP8Af39/AAAAAAAAAAAAAAAAAAAAAAAAAAAAIQAAABgAAAAUAAAAYAMAAOgXAAAgJQAAWCAAABAAAAAmAAAACAAAAP//////////MAAAABQAAAAAAAAAAAD//wAAAQAAAP//AAABAA=="/>
               </a:ext>
             </a:extLst>
           </p:cNvSpPr>
@@ -6152,7 +6308,7 @@
           <p:cNvSpPr>
             <a:extLst>
               <a:ext uri="smNativeData">
-                <pr:smNativeData xmlns:pr="smNativeData" xmlns="smNativeData" val="SMDATA_16_kRU2ahMAAAAlAAAAZAAAAA0AAAAAkAAAAEgAAACQAAAASAAAAAAAAAABAAAAAAAAAAEAAABQAAAAAAAAAAAA4D8AAAAAAADgPwAAAAAAAOA/AAAAAAAA4D8AAAAAAADgPwAAAAAAAOA/AAAAAAAA4D8AAAAAAADgPwAAAAAAAOA/AAAAAAAA4D8CAAAAjAAAAAAAAAAAAAAARHLEDP///wgAAAAAAAAAAAAAAAAAAAAAAAAAAAAAAAAAAAAAZAAAAAEAAABAAAAAAAAAAAAAAAAAAAAAAAAAAAAAAAAAAAAAAAAAAAAAAAAAAAAAAAAAAAAAAAAAAAAAAAAAAAAAAAAAAAAAAAAAAAAAAAAAAAAAAAAAAAAAAAAAAAAAFAAAADwAAAAAAAAAAAAAAAAAAAAPAAAAAQAAACMAAAAjAAAAIwAAAB4AAAAAAAAAZAAAAGQAAAAAAAAAZAAAAGQAAAAVAAAAYAAAAAAAAAAAAAAADwAAACADAAAAAAAAAAAAAAEAAACgMgAAVgcAAKr4//8BAAAAf39/AAEAAABkAAAAAAAAABQAAABAHwAAAAAAACYAAAAAAAAAwOD//wAAAAAmAAAAZAAAABYAAABMAAAAAAAAAAAAAAAEAAAAAAAAAAEAAADn5uYKAAAAACgAAAAoAAAAZAAAAGQAAAAAAAAAzMzMAAAAAABQAAAAUAAAAGQAAABkAAAAAAAAABcAAAAUAAAAAAAAAAAAAAD/fwAA/38AAAAAAAAJAAAABAAAAAAAAAAeAAAAaAAAAAAAAAAAAAAAAAAAAAAAAAAAAAAAECcAABAnAAAAAAAAAAAAAAAAAAAAAAAAAAAAAAAAAAAAAAAAAAAAABQAAAAAAAAAwMD/AAAAAABkAAAAMgAAAAAAAABkAAAAAAAAAH9/fwAKAAAAIgAAABgAAAAAAAAAAAAAAAAAAAAAAAAAAAAAAAAAAAAkAAAAJAAAAAAAAAAHAAAAAAAAAAAAAAAAAAAAAAAAAAAAAAAAAAAAf39/ACUAAABYAAAAAAAAAAAAAAAAAAAAAAAAAAAAAAAAAAAAAAAAAAAAAAAAAAAAAAAAAAAAAAA/AAAAAAAAAKCGAQAAAAAAAAAAAAAAAAAMAAAAAQAAAAAAAAAAAAAAAAAAAB8AAABUAAAARHLEBf///wEAAAAAAAAAAAAAAAAAAAAAAAAAAAAAAAAAAAAAAAAAAAAAAAB/f38A5+bmA8zMzADAwP8Af39/AAAAAAAAAAAAAAAAAAAAAAAAAAAAIQAAABgAAAAUAAAAyAQAAMAYAABIJAAAkBsAABAAAAAmAAAACAAAAP//////////MAAAABQAAAAAAAAAAAD//wAAAQAAAP//AAABAA=="/>
+                <pr:smNativeData xmlns:pr="smNativeData" xmlns="smNativeData" val="SMDATA_16_V2g2ahMAAAAlAAAAZAAAAA0AAAAAkAAAAEgAAACQAAAASAAAAAAAAAABAAAAAAAAAAEAAABQAAAAAAAAAAAA4D8AAAAAAADgPwAAAAAAAOA/AAAAAAAA4D8AAAAAAADgPwAAAAAAAOA/AAAAAAAA4D8AAAAAAADgPwAAAAAAAOA/AAAAAAAA4D8CAAAAjAAAAAAAAAAAAAAARHLEDP///wgAAAAAAAAAAAAAAAAAAAAAAAAAAAAAAAAAAAAAZAAAAAEAAABAAAAAAAAAAAAAAAAAAAAAAAAAAAAAAAAAAAAAAAAAAAAAAAAAAAAAAAAAAAAAAAAAAAAAAAAAAAAAAAAAAAAAAAAAAAAAAAAAAAAAAAAAAAAAAAAAAAAAFAAAADwAAAAAAAAAAAAAAAAAAAAPAAAAAQAAACMAAAAjAAAAIwAAAB4AAAAAAAAAZAAAAGQAAAAAAAAAZAAAAGQAAAAVAAAAYAAAAAAAAAAAAAAADwAAACADAAAAAAAAAAAAAAEAAACgMgAAVgcAAKr4//8BAAAAf39/AAEAAABkAAAAAAAAABQAAABAHwAAAAAAACYAAAAAAAAAwOD//wAAAAAmAAAAZAAAABYAAABMAAAAAAAAAAAAAAAEAAAAAAAAAAEAAADn5uYKAAAAACgAAAAoAAAAZAAAAGQAAAAAAAAAzMzMAAAAAABQAAAAUAAAAGQAAABkAAAAAAAAABcAAAAUAAAAAAAAAAAAAAD/fwAA/38AAAAAAAAJAAAABAAAAAAAAAAeAAAAaAAAAAAAAAAAAAAAAAAAAAAAAAAAAAAAECcAABAnAAAAAAAAAAAAAAAAAAAAAAAAAAAAAAAAAAAAAAAAAAAAABQAAAAAAAAAwMD/AAAAAABkAAAAMgAAAAAAAABkAAAAAAAAAH9/fwAKAAAAIgAAABgAAAAAAAAAAAAAAAAAAAAAAAAAAAAAAAAAAAAkAAAAJAAAAAAAAAAHAAAAAAAAAAAAAAAAAAAAAAAAAAAAAAAAAAAAf39/ACUAAABYAAAAAAAAAAAAAAAAAAAAAAAAAAAAAAAAAAAAAAAAAAAAAAAAAAAAAAAAAAAAAAA/AAAAAAAAAKCGAQAAAAAAAAAAAAAAAAAMAAAAAQAAAAAAAAAAAAAAAAAAAB8AAABUAAAARHLEBf///wEAAAAAAAAAAAAAAAAAAAAAAAAAAAAAAAAAAAAAAAAAAAAAAAB/f38A5+bmA8zMzADAwP8Af39/AAAAAAAAAAAAAAAAAAAAAAAAAAAAIQAAABgAAAAUAAAAyAQAAMAYAABIJAAAkBsAABAAAAAmAAAACAAAAP//////////MAAAABQAAAAAAAAAAAD//wAAAQAAAP//AAABAA=="/>
               </a:ext>
             </a:extLst>
           </p:cNvSpPr>
@@ -6209,7 +6365,7 @@
           <p:cNvSpPr>
             <a:extLst>
               <a:ext uri="smNativeData">
-                <pr:smNativeData xmlns:pr="smNativeData" xmlns="smNativeData" val="SMDATA_16_kRU2ahMAAAAlAAAAZAAAAA0AAAAAkAAAAEgAAACQAAAASAAAAAAAAAABAAAAAAAAAAEAAABQAAAAAAAAAAAA4D8AAAAAAADgPwAAAAAAAOA/AAAAAAAA4D8AAAAAAADgPwAAAAAAAOA/AAAAAAAA4D8AAAAAAADgPwAAAAAAAOA/AAAAAAAA4D8CAAAAjAAAAAAAAAAAAAAARHLEDP///wgAAAAAAAAAAAAAAAAAAAAAAAAAAAAAAAAAAAAAZAAAAAEAAABAAAAAAAAAAAAAAAAAAAAAAAAAAAAAAAAAAAAAAAAAAAAAAAAAAAAAAAAAAAAAAAAAAAAAAAAAAAAAAAAAAAAAAAAAAAAAAAAAAAAAAAAAAAAAAAAAAAAAFAAAADwAAAAAAAAAAAAAAAAAAAAPAAAAAQAAACMAAAAjAAAAIwAAAB4AAAAAAAAAZAAAAGQAAAAAAAAAZAAAAGQAAAAVAAAAYAAAAAAAAAAAAAAADwAAACADAAAAAAAAAAAAAAEAAACgMgAAVgcAAKr4//8BAAAAf39/AAEAAABkAAAAAAAAABQAAABAHwAAAAAAACYAAAAAAAAAwOD//wAAAAAmAAAAZAAAABYAAABMAAAAAAAAAAAAAAAEAAAAAAAAAAEAAADn5uYKAAAAACgAAAAoAAAAZAAAAGQAAAAAAAAAzMzMAAAAAABQAAAAUAAAAGQAAABkAAAAAAAAABcAAAAUAAAAAAAAAAAAAAD/fwAA/38AAAAAAAAJAAAABAAAAAAAAAAeAAAAaAAAAAAAAAAAAAAAAAAAAAAAAAAAAAAAECcAABAnAAAAAAAAAAAAAAAAAAAAAAAAAAAAAAAAAAAAAAAAAAAAABQAAAAAAAAAwMD/AAAAAABkAAAAMgAAAAAAAABkAAAAAAAAAH9/fwAKAAAAIgAAABgAAAAAAAAAAAAAAAAAAAAAAAAAAAAAAAAAAAAkAAAAJAAAAAAAAAAHAAAAAAAAAAAAAAAAAAAAAAAAAAAAAAAAAAAAf39/ACUAAABYAAAAAAAAAAAAAAAAAAAAAAAAAAAAAAAAAAAAAAAAAAAAAAAAAAAAAAAAAAAAAAA/AAAAAAAAAKCGAQAAAAAAAAAAAAAAAAAMAAAAAQAAAAAAAAAAAAAAAAAAAB8AAABUAAAARHLEBf///wEAAAAAAAAAAAAAAAAAAAAAAAAAAAAAAAAAAAAAAAAAAAAAAAB/f38A5+bmA8zMzADAwP8Af39/AAAAAAAAAAAAAAAAAAAAAAAAAAAAIQAAABgAAAAUAAAAyAQAANgbAABIJAAAOB8AABAAAAAmAAAACAAAAP//////////MAAAABQAAAAAAAAAAAD//wAAAQAAAP//AAABAA=="/>
+                <pr:smNativeData xmlns:pr="smNativeData" xmlns="smNativeData" val="SMDATA_16_V2g2ahMAAAAlAAAAZAAAAA0AAAAAkAAAAEgAAACQAAAASAAAAAAAAAABAAAAAAAAAAEAAABQAAAAAAAAAAAA4D8AAAAAAADgPwAAAAAAAOA/AAAAAAAA4D8AAAAAAADgPwAAAAAAAOA/AAAAAAAA4D8AAAAAAADgPwAAAAAAAOA/AAAAAAAA4D8CAAAAjAAAAAAAAAAAAAAARHLEDP///wgAAAAAAAAAAAAAAAAAAAAAAAAAAAAAAAAAAAAAZAAAAAEAAABAAAAAAAAAAAAAAAAAAAAAAAAAAAAAAAAAAAAAAAAAAAAAAAAAAAAAAAAAAAAAAAAAAAAAAAAAAAAAAAAAAAAAAAAAAAAAAAAAAAAAAAAAAAAAAAAAAAAAFAAAADwAAAAAAAAAAAAAAAAAAAAPAAAAAQAAACMAAAAjAAAAIwAAAB4AAAAAAAAAZAAAAGQAAAAAAAAAZAAAAGQAAAAVAAAAYAAAAAAAAAAAAAAADwAAACADAAAAAAAAAAAAAAEAAACgMgAAVgcAAKr4//8BAAAAf39/AAEAAABkAAAAAAAAABQAAABAHwAAAAAAACYAAAAAAAAAwOD//wAAAAAmAAAAZAAAABYAAABMAAAAAAAAAAAAAAAEAAAAAAAAAAEAAADn5uYKAAAAACgAAAAoAAAAZAAAAGQAAAAAAAAAzMzMAAAAAABQAAAAUAAAAGQAAABkAAAAAAAAABcAAAAUAAAAAAAAAAAAAAD/fwAA/38AAAAAAAAJAAAABAAAAAAAAAAeAAAAaAAAAAAAAAAAAAAAAAAAAAAAAAAAAAAAECcAABAnAAAAAAAAAAAAAAAAAAAAAAAAAAAAAAAAAAAAAAAAAAAAABQAAAAAAAAAwMD/AAAAAABkAAAAMgAAAAAAAABkAAAAAAAAAH9/fwAKAAAAIgAAABgAAAAAAAAAAAAAAAAAAAAAAAAAAAAAAAAAAAAkAAAAJAAAAAAAAAAHAAAAAAAAAAAAAAAAAAAAAAAAAAAAAAAAAAAAf39/ACUAAABYAAAAAAAAAAAAAAAAAAAAAAAAAAAAAAAAAAAAAAAAAAAAAAAAAAAAAAAAAAAAAAA/AAAAAAAAAKCGAQAAAAAAAAAAAAAAAAAMAAAAAQAAAAAAAAAAAAAAAAAAAB8AAABUAAAARHLEBf///wEAAAAAAAAAAAAAAAAAAAAAAAAAAAAAAAAAAAAAAAAAAAAAAAB/f38A5+bmA8zMzADAwP8Af39/AAAAAAAAAAAAAAAAAAAAAAAAAAAAIQAAABgAAAAUAAAAyAQAANgbAABIJAAAOB8AABAAAAAmAAAACAAAAP//////////MAAAABQAAAAAAAAAAAD//wAAAQAAAP//AAABAA=="/>
               </a:ext>
             </a:extLst>
           </p:cNvSpPr>
@@ -6294,7 +6450,7 @@
           <p:cNvSpPr>
             <a:extLst>
               <a:ext uri="smNativeData">
-                <pr:smNativeData xmlns:pr="smNativeData" xmlns="smNativeData" val="SMDATA_16_kRU2ahMAAAAlAAAAZAAAAA0AAAAAkAAAAEgAAACQAAAASAAAAAAAAAABAAAAAAAAAAEAAABQAAAAAAAAAAAA4D8AAAAAAADgPwAAAAAAAOA/AAAAAAAA4D8AAAAAAADgPwAAAAAAAOA/AAAAAAAA4D8AAAAAAADgPwAAAAAAAOA/AAAAAAAA4D8CAAAAjAAAAAAAAAAAAAAARHLEDP///wgAAAAAAAAAAAAAAAAAAAAAAAAAAAAAAAAAAAAAZAAAAAEAAABAAAAAAAAAAAAAAAAAAAAAAAAAAAAAAAAAAAAAAAAAAAAAAAAAAAAAAAAAAAAAAAAAAAAAAAAAAAAAAAAAAAAAAAAAAAAAAAAAAAAAAAAAAAAAAAAAAAAAFAAAADwAAAAAAAAAAAAAAAAAAAAPAAAAAQAAACMAAAAjAAAAIwAAAB4AAAAAAAAAZAAAAGQAAAAAAAAAZAAAAGQAAAAVAAAAYAAAAAAAAAAAAAAADwAAACADAAAAAAAAAAAAAAEAAACgMgAAVgcAAKr4//8BAAAAf39/AAEAAABkAAAAAAAAABQAAABAHwAAAAAAACYAAAAAAAAAwOD//wAAAAAmAAAAZAAAABYAAABMAAAAAAAAAAAAAAAEAAAAAAAAAAEAAADn5uYKAAAAACgAAAAoAAAAZAAAAGQAAAAAAAAAzMzMAAAAAABQAAAAUAAAAGQAAABkAAAAAAAAABcAAAAUAAAAAAAAAAAAAAD/fwAA/38AAAAAAAAJAAAABAAAAAAAAAAeAAAAaAAAAAAAAAAAAAAAAAAAAAAAAAAAAAAAECcAABAnAAAAAAAAAAAAAAAAAAAAAAAAAAAAAAAAAAAAAAAAAAAAABQAAAAAAAAAwMD/AAAAAABkAAAAMgAAAAAAAABkAAAAAAAAAH9/fwAKAAAAIgAAABgAAAAAAAAAAAAAAAAAAAAAAAAAAAAAAAAAAAAkAAAAJAAAAAAAAAAHAAAAAAAAAAAAAAAAAAAAAAAAAAAAAAAAAAAAf39/ACUAAABYAAAAAAAAAAAAAAAAAAAAAAAAAAAAAAAAAAAAAAAAAAAAAAAAAAAAAAAAAAAAAAA/AAAAAAAAAKCGAQAAAAAAAAAAAAAAAAAMAAAAAQAAAAAAAAAAAAAAAAAAAB8AAABUAAAARHLEBf///wEAAAAAAAAAAAAAAAAAAAAAAAAAAAAAAAAAAAAAAAAAAAAAAAB/f38A5+bmA8zMzADAwP8Af39/AAAAAAAAAAAAAAAAAAAAAAAAAAAAIQAAABgAAAAUAAAAYAMAAMAhAAAgJQAA0CYAABAAAAAmAAAACAAAAP//////////MAAAABQAAAAAAAAAAAD//wAAAQAAAP//AAABAA=="/>
+                <pr:smNativeData xmlns:pr="smNativeData" xmlns="smNativeData" val="SMDATA_16_V2g2ahMAAAAlAAAAZAAAAA0AAAAAkAAAAEgAAACQAAAASAAAAAAAAAABAAAAAAAAAAEAAABQAAAAAAAAAAAA4D8AAAAAAADgPwAAAAAAAOA/AAAAAAAA4D8AAAAAAADgPwAAAAAAAOA/AAAAAAAA4D8AAAAAAADgPwAAAAAAAOA/AAAAAAAA4D8CAAAAjAAAAAAAAAAAAAAARHLEDP///wgAAAAAAAAAAAAAAAAAAAAAAAAAAAAAAAAAAAAAZAAAAAEAAABAAAAAAAAAAAAAAAAAAAAAAAAAAAAAAAAAAAAAAAAAAAAAAAAAAAAAAAAAAAAAAAAAAAAAAAAAAAAAAAAAAAAAAAAAAAAAAAAAAAAAAAAAAAAAAAAAAAAAFAAAADwAAAAAAAAAAAAAAAAAAAAPAAAAAQAAACMAAAAjAAAAIwAAAB4AAAAAAAAAZAAAAGQAAAAAAAAAZAAAAGQAAAAVAAAAYAAAAAAAAAAAAAAADwAAACADAAAAAAAAAAAAAAEAAACgMgAAVgcAAKr4//8BAAAAf39/AAEAAABkAAAAAAAAABQAAABAHwAAAAAAACYAAAAAAAAAwOD//wAAAAAmAAAAZAAAABYAAABMAAAAAAAAAAAAAAAEAAAAAAAAAAEAAADn5uYKAAAAACgAAAAoAAAAZAAAAGQAAAAAAAAAzMzMAAAAAABQAAAAUAAAAGQAAABkAAAAAAAAABcAAAAUAAAAAAAAAAAAAAD/fwAA/38AAAAAAAAJAAAABAAAAAAAAAAeAAAAaAAAAAAAAAAAAAAAAAAAAAAAAAAAAAAAECcAABAnAAAAAAAAAAAAAAAAAAAAAAAAAAAAAAAAAAAAAAAAAAAAABQAAAAAAAAAwMD/AAAAAABkAAAAMgAAAAAAAABkAAAAAAAAAH9/fwAKAAAAIgAAABgAAAAAAAAAAAAAAAAAAAAAAAAAAAAAAAAAAAAkAAAAJAAAAAAAAAAHAAAAAAAAAAAAAAAAAAAAAAAAAAAAAAAAAAAAf39/ACUAAABYAAAAAAAAAAAAAAAAAAAAAAAAAAAAAAAAAAAAAAAAAAAAAAAAAAAAAAAAAAAAAAA/AAAAAAAAAKCGAQAAAAAAAAAAAAAAAAAMAAAAAQAAAAAAAAAAAAAAAAAAAB8AAABUAAAARHLEBf///wEAAAAAAAAAAAAAAAAAAAAAAAAAAAAAAAAAAAAAAAAAAAAAAAB/f38A5+bmA8zMzADAwP8Af39/AAAAAAAAAAAAAAAAAAAAAAAAAAAAIQAAABgAAAAUAAAAYAMAAMAhAAAgJQAA0CYAABAAAAAmAAAACAAAAP//////////MAAAABQAAAAAAAAAAAD//wAAAQAAAP//AAABAA=="/>
               </a:ext>
             </a:extLst>
           </p:cNvSpPr>
@@ -6403,7 +6559,7 @@
           <p:cNvSpPr>
             <a:extLst>
               <a:ext uri="smNativeData">
-                <pr:smNativeData xmlns:pr="smNativeData" xmlns="smNativeData" val="SMDATA_16_kRU2ahMAAAAlAAAAZQAAAA0AAAAAkAAAAEgAAACQAAAASAAAAAAAAAAAAAAAAAAAAAEAAABQAAAAZB75g4Hnnj8AAAAAAADwvwAAAAAAAOA/AAAAAAAA4D8AAAAAAADgPwAAAAAAAOA/AAAAAAAA4D8AAAAAAADgPwAAAAAAAOA/AAAAAAAA4D8CAAAAjAAAAAEAAAAAAAAA7/P4AP///wgAAAAAAAAAAAAAAAAAAAAAAAAAAAAAAAAAAAAAeAAAAAEAAABAAAAAAAAAAAAAAABaAAAAAAAAAAAAAAAAAAAAAAAAAAAAAAAAAAAAAAAAAAAAAAAAAAAAAAAAAAAAAAAAAAAAAAAAAAAAAAAAAAAAAAAAAAAAAAAAAAAAFAAAADwAAAAAAAAAAAAAAAAAAAAPAAAAAQAAACMAAAAjAAAAIwAAAB4AAAAAAAAAZAAAAGQAAAAAAAAAZAAAAGQAAAAVAAAAYAAAAAAAAAAAAAAADwAAACADAAAAAAAAAAAAAAEAAACgMgAAVgcAAKr4//8BAAAAf39/AAEAAABkAAAAAAAAABQAAABAHwAAAAAAACYAAAAAAAAAwOD//wAAAAAmAAAAZAAAABYAAABMAAAAAQAAAAAAAAAGAAAAAAAAAAEAAAC5xNAAPAAAAAAAAAAoAAAAZAAAAGQAAAAAAAAAy8vLADwAAAAAAAAAKAAAAGQAAABkAAAAAAAAABcAAAAUAAAAAAAAAAAAAAD/fwAA/38AAAAAAAAJAAAABAAAAAAAAAAeAAAAaAAAAAAAAAAAAAAAAAAAAAAAAAAAAAAAECcAABAnAAAAAAAAAAAAAAAAAAAAAAAAAAAAAAAAAAAAAAAAAAAAAHgAAAAAAAAAwMD/AAAAAAAAAAAAAAAAAAAAAABkAAAAAAAAAH9/fwAKAAAAIgAAABgAAAAAAAAAAAAAAAAAAAAAAAAAAAAAAAAAAAAkAAAAJAAAAAAAAAAHAAAAAAAAAAAAAAAAAAAAAAAAAAAAAAAAAAAAf39/ACUAAABYAAAAAAAAAAAAAAAAAAAAAAAAAAAAAAAAAAAAAAAAAAAAAAAAAAAAAAAAAAAAAAA/AAAAAAAAAKCGAQAAAAAAAAAAAAAAAAAMAAAAAQAAAAAAAAAAAAAAAAAAAB8AAABUAAAA7/P4AP///wEAAAAAAAAAAAAAAAAAAAAAAAAAAAAAAAAAAAAAAAAAAAAAAAB/f38AucTQAMvLywDAwP8Af39/AAAAAAAAAAAAAAAAAAAAAAAAAAAAIQAAABgAAAAUAAAA0CYAALgIAABwRwAAiCYAABAAAAAmAAAACAAAAP//////////MAAAABQAAAAAAAAAAAD//wAAAQAAAP//AAABAA=="/>
+                <pr:smNativeData xmlns:pr="smNativeData" xmlns="smNativeData" val="SMDATA_16_V2g2ahMAAAAlAAAAZQAAAA0AAAAAkAAAAEgAAACQAAAASAAAAAAAAAAAAAAAAAAAAAEAAABQAAAAZB75g4Hnnj8AAAAAAAAAAAAAAAAAAOA/AAAAAAAA4D8AAAAAAADgPwAAAAAAAOA/AAAAAAAA4D8AAAAAAADgPwAAAAAAAOA/AAAAAAAA4D8CAAAAjAAAAAEAAAAAAAAA7/P4AP///wgAAAAAAAAAAAAAAAAAAAAAAAAAAAAAAAAAAAAAeAAAAAEAAABAAAAAAAAAAAAAAABaAAAAAAAAAAAAAAAAAAAAAAAAAAAAAAAAAAAAAAAAAAAAAAAAAAAAAAAAAAAAAAAAAAAAAAAAAAAAAAAAAAAAAAAAAAAAAAAAAAAAFAAAADwAAAAAAAAAAAAAAAAAAAAPAAAAAQAAACMAAAAjAAAAIwAAAB4AAAAAAAAAZAAAAGQAAAAAAAAAZAAAAGQAAAAVAAAAYAAAAAAAAAAAAAAADwAAACADAAAAAAAAAAAAAAEAAACgMgAAVgcAAKr4//8BAAAAf39/AAEAAABkAAAAAAAAABQAAABAHwAAAAAAACYAAAAAAAAAwOD//wAAAAAmAAAAZAAAABYAAABMAAAAAQAAAAAAAAAGAAAAAAAAAAEAAAC5xNAAPAAAAAAAAAAoAAAAZAAAAGQAAAAAAAAAy8vLADwAAAAAAAAAKAAAAGQAAABkAAAAAAAAABcAAAAUAAAAAAAAAAAAAAD/fwAA/38AAAAAAAAJAAAABAAAAAAAAAAeAAAAaAAAAAAAAAAAAAAAAAAAAAAAAAAAAAAAECcAABAnAAAAAAAAAAAAAAAAAAAAAAAAAAAAAAAAAAAAAAAAAAAAAHgAAAAAAAAAwMD/AAAAAAAAAAAAAAAAAAAAAABkAAAAAAAAAH9/fwAKAAAAIgAAABgAAAAAAAAAAAAAAAAAAAAAAAAAAAAAAAAAAAAkAAAAJAAAAAAAAAAHAAAAAAAAAAAAAAAAAAAAAAAAAAAAAAAAAAAAf39/ACUAAABYAAAAAAAAAAAAAAAAAAAAAAAAAAAAAAAAAAAAAAAAAAAAAAAAAAAAAAAAAAAAAAA/AAAAAAAAAKCGAQAAAAAAAAAAAAAAAAAMAAAAAQAAAAAAAAAAAAAAAAAAAB8AAABUAAAA7/P4AP///wEAAAAAAAAAAAAAAAAAAAAAAAAAAAAAAAAAAAAAAAAAAAAAAAB/f38AucTQAMvLywDAwP8Af39/AAAAAAAAAAAAAAAAAAAAAAAAAAAAIQAAABgAAAAUAAAA0CYAALgIAABwRwAAiCYAABAAAAAmAAAACAAAAP//////////MAAAABQAAAAAAAAAAAD//wAAAQAAAP//AAABAA=="/>
               </a:ext>
             </a:extLst>
           </p:cNvSpPr>
@@ -6441,7 +6597,7 @@
             <a:picLocks noChangeAspect="1"/>
             <a:extLst>
               <a:ext uri="smNativeData">
-                <pr:smNativeData xmlns:pr="smNativeData" xmlns="smNativeData" val="SMDATA_18_kRU2ahMAAAAlAAAAEQAAAC0AAAAAkAAAAEgAAACQAAAASAAAAAAAAAAAAAAAAAAAAAEAAABQAAAAAAAAAAAA4D8AAAAAAADgPwAAAAAAAOA/AAAAAAAA4D8AAAAAAADgPwAAAAAAAOA/AAAAAAAA4D8AAAAAAADgPwAAAAAAAOA/AAAAAAAA4D8CAAAAjAAAAAAAAAAAAAAARHLEDP///wgAAAAAAAAAAAAAAAAAAAAAAAAAAAAAAAAAAAAAZAAAAAEAAABAAAAAAAAAAAAAAAAAAAAAAAAAAAAAAAAAAAAAAAAAAAAAAAAAAAAAAAAAAAAAAAAAAAAAAAAAAAAAAAAAAAAAAAAAAAAAAAAAAAAAAAAAAAAAAAAAAAAAFAAAADwAAAAAAAAAAAAAAAAAAAkUAAAAAQAAABQAAAAUAAAAFAAAAAEAAAAAAAAAZAAAAGQAAAAAAAAAZAAAAGQAAAAVAAAAYAAAAAAAAAAAAAAADwAAACADAAAAAAAAAAAAAAEAAACgMgAAVgcAAKr4//8BAAAAf39/AAEAAABkAAAAAAAAABQAAABAHwAAAAAAACYAAAAAAAAAwOD//wAAAAAmAAAAZAAAABYAAABMAAAAAAAAAAAAAAAEAAAAAAAAAAEAAADn5uYKAAAAACgAAAAoAAAAZAAAAGQAAAAAAAAAzMzMAAAAAABQAAAAUAAAAGQAAABkAAAAAAAAAAcAAAA4AAAAAAAAAAAAAAAAAAAA////AAAAAAAAAAAAAAAAAAAAAAAAAAAAAAAAAAAAAABkAAAAZAAAAAAAAAAjAAAABAAAAGQAAAAXAAAAFAAAAAAAAAAAAAAA/38AAP9/AAAAAAAACQAAAAQAAAAAAAAAHgAAAGgAAAAAAAAAAAAAAAAAAAAAAAAAAAAAABAnAAAQJwAAAAAAAAAAAAAAAAAAAAAAAAAAAAAAAAAAAAAAAAAAAAAUAAAAAAAAAMDA/wAAAAAAZAAAADIAAAAAAAAAZAAAAAAAAAB/f38ACgAAACIAAAAYAAAAAAAAAAAAAAAAAAAAAAAAAAAAAAAAAAAAJAAAACQAAAAAAAAABwAAAAAAAAAAAAAAAAAAAAAAAAAAAAAAAAAAAH9/fwAlAAAAWAAAAAAAAAAAAAAAAAAAAAAAAAAAAAAAAAAAAAAAAAAAAAAAAAAAAAAAAAAAAAAAPwAAAAAAAACghgEAAAAAAAAAAAAAAAAADAAAAAEAAAAAAAAAAAAAAAAAAAAfAAAAVAAAAERyxAX///8BAAAAAAAAAAAAAAAAAAAAAAAAAAAAAAAAAAAAAAAAAAAAAAACf39/AOfm5gPMzMwAwMD/AH9/fwAAAAAAAAAAAAAAAAD///8AAAAAACEAAAAYAAAAFAAAAKgnAACQCQAAmEYAALAlAAAQAAAAJgAAAAgAAAD//////////zAAAAAUAAAAAAAAAAAA//8AAAEAAAD//wAAAQA="/>
+                <pr:smNativeData xmlns:pr="smNativeData" xmlns="smNativeData" val="SMDATA_18_V2g2ahMAAAAlAAAAEQAAAC0AAAAAkAAAAEgAAACQAAAASAAAAAAAAAAAAAAAAAAAAAEAAABQAAAAAAAAAAAA4D8AAAAAAADgPwAAAAAAAOA/AAAAAAAA4D8AAAAAAADgPwAAAAAAAOA/AAAAAAAA4D8AAAAAAADgPwAAAAAAAOA/AAAAAAAA4D8CAAAAjAAAAAAAAAAAAAAARHLEDP///wgAAAAAAAAAAAAAAAAAAAAAAAAAAAAAAAAAAAAAZAAAAAEAAABAAAAAAAAAAAAAAAAAAAAAAAAAAAAAAAAAAAAAAAAAAAAAAAAAAAAAAAAAAAAAAAAAAAAAAAAAAAAAAAAAAAAAAAAAAAAAAAAAAAAAAAAAAAAAAAAAAAAAFAAAADwAAAAAAAAAAAAAAAAAAAkUAAAAAQAAABQAAAAUAAAAFAAAAAEAAAAAAAAAZAAAAGQAAAAAAAAAZAAAAGQAAAAVAAAAYAAAAAAAAAAAAAAADwAAACADAAAAAAAAAAAAAAEAAACgMgAAVgcAAKr4//8BAAAAf39/AAEAAABkAAAAAAAAABQAAABAHwAAAAAAACYAAAAAAAAAwOD//wAAAAAmAAAAZAAAABYAAABMAAAAAAAAAAAAAAAEAAAAAAAAAAEAAADn5uYKAAAAACgAAAAoAAAAZAAAAGQAAAAAAAAAzMzMAAAAAABQAAAAUAAAAGQAAABkAAAAAAAAAAcAAAA4AAAAAAAAAAAAAAAAAAAA////AAAAAAAAAAAAAAAAAAAAAAAAAAAAAAAAAAAAAABkAAAAZAAAAAAAAAAjAAAABAAAAGQAAAAXAAAAFAAAAAAAAAAAAAAA/38AAP9/AAAAAAAACQAAAAQAAAAAAAAAHgAAAGgAAAAAAAAAAAAAAAAAAAAAAAAAAAAAABAnAAAQJwAAAAAAAAAAAAAAAAAAAAAAAAAAAAAAAAAAAAAAAAAAAAAUAAAAAAAAAMDA/wAAAAAAZAAAADIAAAAAAAAAZAAAAAAAAAB/f38ACgAAACIAAAAYAAAAAAAAAAAAAAAAAAAAAAAAAAAAAAAAAAAAJAAAACQAAAAAAAAABwAAAAAAAAAAAAAAAAAAAAAAAAAAAAAAAAAAAH9/fwAlAAAAWAAAAAAAAAAAAAAAAAAAAAAAAAAAAAAAAAAAAAAAAAAAAAAAAAAAAAAAAAAAAAAAPwAAAAAAAACghgEAAAAAAAAAAAAAAAAADAAAAAEAAAAAAAAAAAAAAAAAAAAfAAAAVAAAAERyxAX///8BAAAAAAAAAAAAAAAAAAAAAAAAAAAAAAAAAAAAAAAAAAAAAAACf39/AOfm5gPMzMwAwMD/AH9/fwAAAAAAAAAAAAAAAAD///8AAAAAACEAAAAYAAAAFAAAAKgnAACQCQAAmEYAALAlAAAQAAAAJgAAAAgAAAD//////////zAAAAAUAAAAAAAAAAAA//8AAAEAAAD//wAAAQA="/>
               </a:ext>
             </a:extLst>
           </p:cNvPicPr>
@@ -6514,7 +6670,7 @@
           <p:cNvSpPr>
             <a:extLst>
               <a:ext uri="smNativeData">
-                <pr:smNativeData xmlns:pr="smNativeData" xmlns="smNativeData" val="SMDATA_16_kRU2ahMAAAAlAAAAZAAAAA0AAAAAkAAAAEgAAACQAAAASAAAAAAAAAABAAAAAAAAAAEAAABQAAAAAAAAAAAA4D8AAAAAAADgPwAAAAAAAOA/AAAAAAAA4D8AAAAAAADgPwAAAAAAAOA/AAAAAAAA4D8AAAAAAADgPwAAAAAAAOA/AAAAAAAA4D8CAAAAjAAAAAAAAAAAAAAARHLEDP///wgAAAAAAAAAAAAAAAAAAAAAAAAAAAAAAAAAAAAAZAAAAAEAAABAAAAAAAAAAAAAAAAAAAAAAAAAAAAAAAAAAAAAAAAAAAAAAAAAAAAAAAAAAAAAAAAAAAAAAAAAAAAAAAAAAAAAAAAAAAAAAAAAAAAAAAAAAAAAAAAAAAAAFAAAADwAAAAAAAAAAAAAAAAAAAAPAAAAAQAAACMAAAAjAAAAIwAAAB4AAAAAAAAAZAAAAGQAAAAAAAAAZAAAAGQAAAAVAAAAYAAAAAAAAAAAAAAADwAAACADAAAAAAAAAAAAAAEAAACgMgAAVgcAAKr4//8BAAAAf39/AAEAAABkAAAAAAAAABQAAABAHwAAAAAAACYAAAAAAAAAwOD//wAAAAAmAAAAZAAAABYAAABMAAAAAAAAAAAAAAAEAAAAAAAAAAEAAADn5uYKAAAAACgAAAAoAAAAZAAAAGQAAAAAAAAAzMzMAAAAAABQAAAAUAAAAGQAAABkAAAAAAAAABcAAAAUAAAAAAAAAAAAAAD/fwAA/38AAAAAAAAJAAAABAAAAGj9//8eAAAAaAAAAAAAAAAAAAAAAAAAAAAAAAAAAAAAECcAABAnAAAAAAAAAAAAAAAAAAAAAAAAAAAAAAAAAAAAAAAAAAAAABQAAAAAAAAAwMD/AAAAAABkAAAAMgAAAAAAAABkAAAAAAAAAH9/fwAKAAAAIgAAABgAAAAAAAAAAAAAAAAAAAAAAAAAAAAAAAAAAAAkAAAAJAAAAAAAAAAHAAAAAAAAAAAAAAAAAAAAAAAAAAAAAAAAAAAAf39/ACUAAABYAAAAAAAAAAAAAAAAAAAAAAAAAAAAAAAAAAAAAAAAAAAAAAAAAAAAAAAAAAAAAAA/AAAAAAAAAKCGAQAAAAAAAAAAAAAAAAAMAAAAAQAAAAAAAAAAAAAAAAAAAB8AAABUAAAARHLEBf///wEAAAAAAAAAAAAAAAAAAAAAAAAAAAAAAAAAAAAAAAAAAAAAAAB/f38A5+bmA8zMzADAwP8Af39/AAAAAAAAAAAAAAAAAAAAAAAAAAAAIQAAABgAAAAUAAAAYAMAACABAACgRwAA0AIAABAAAAAmAAAACAAAAP//////////MAAAABQAAAAAAAAAAAD//wAAAQAAAP//AAABAA=="/>
+                <pr:smNativeData xmlns:pr="smNativeData" xmlns="smNativeData" val="SMDATA_16_V2g2ahMAAAAlAAAAZAAAAA0AAAAAkAAAAEgAAACQAAAASAAAAAAAAAABAAAAAAAAAAEAAABQAAAAAAAAAAAA4D8AAAAAAADgPwAAAAAAAOA/AAAAAAAA4D8AAAAAAADgPwAAAAAAAOA/AAAAAAAA4D8AAAAAAADgPwAAAAAAAOA/AAAAAAAA4D8CAAAAjAAAAAAAAAAAAAAARHLEDP///wgAAAAAAAAAAAAAAAAAAAAAAAAAAAAAAAAAAAAAZAAAAAEAAABAAAAAAAAAAAAAAAAAAAAAAAAAAAAAAAAAAAAAAAAAAAAAAAAAAAAAAAAAAAAAAAAAAAAAAAAAAAAAAAAAAAAAAAAAAAAAAAAAAAAAAAAAAAAAAAAAAAAAFAAAADwAAAAAAAAAAAAAAAAAAAAPAAAAAQAAACMAAAAjAAAAIwAAAB4AAAAAAAAAZAAAAGQAAAAAAAAAZAAAAGQAAAAVAAAAYAAAAAAAAAAAAAAADwAAACADAAAAAAAAAAAAAAEAAACgMgAAVgcAAKr4//8BAAAAf39/AAEAAABkAAAAAAAAABQAAABAHwAAAAAAACYAAAAAAAAAwOD//wAAAAAmAAAAZAAAABYAAABMAAAAAAAAAAAAAAAEAAAAAAAAAAEAAADn5uYKAAAAACgAAAAoAAAAZAAAAGQAAAAAAAAAzMzMAAAAAABQAAAAUAAAAGQAAABkAAAAAAAAABcAAAAUAAAAAAAAAAAAAAD/fwAA/38AAAAAAAAJAAAABAAAAGj9//8eAAAAaAAAAAAAAAAAAAAAAAAAAAAAAAAAAAAAECcAABAnAAAAAAAAAAAAAAAAAAAAAAAAAAAAAAAAAAAAAAAAAAAAABQAAAAAAAAAwMD/AAAAAABkAAAAMgAAAAAAAABkAAAAAAAAAH9/fwAKAAAAIgAAABgAAAAAAAAAAAAAAAAAAAAAAAAAAAAAAAAAAAAkAAAAJAAAAAAAAAAHAAAAAAAAAAAAAAAAAAAAAAAAAAAAAAAAAAAAf39/ACUAAABYAAAAAAAAAAAAAAAAAAAAAAAAAAAAAAAAAAAAAAAAAAAAAAAAAAAAAAAAAAAAAAA/AAAAAAAAAKCGAQAAAAAAAAAAAAAAAAAMAAAAAQAAAAAAAAAAAAAAAAAAAB8AAABUAAAARHLEBf///wEAAAAAAAAAAAAAAAAAAAAAAAAAAAAAAAAAAAAAAAAAAAAAAAB/f38A5+bmA8zMzADAwP8Af39/AAAAAAAAAAAAAAAAAAAAAAAAAAAAIQAAABgAAAAUAAAAYAMAACABAACgRwAA0AIAABAAAAAmAAAACAAAAP//////////MAAAABQAAAAAAAAAAAD//wAAAQAAAP//AAABAA=="/>
               </a:ext>
             </a:extLst>
           </p:cNvSpPr>
@@ -6542,7 +6698,7 @@
               <a:buNone/>
             </a:pPr>
             <a:r>
-              <a:rPr lang="en-us" sz="1200" b="1" cap="none" spc="40">
+              <a:rPr lang="en-us" sz="1200" b="1" cap="none" spc="8">
                 <a:solidFill>
                   <a:srgbClr val="E0A038"/>
                 </a:solidFill>
@@ -6559,7 +6715,7 @@
           <p:cNvSpPr>
             <a:extLst>
               <a:ext uri="smNativeData">
-                <pr:smNativeData xmlns:pr="smNativeData" xmlns="smNativeData" val="SMDATA_16_kRU2ahMAAAAlAAAAZAAAAA0AAAAAkAAAAEgAAACQAAAASAAAAAAAAAABAAAAAAAAAAEAAABQAAAAAAAAAAAA4D8AAAAAAADgPwAAAAAAAOA/AAAAAAAA4D8AAAAAAADgPwAAAAAAAOA/AAAAAAAA4D8AAAAAAADgPwAAAAAAAOA/AAAAAAAA4D8CAAAAjAAAAAAAAAAAAAAARHLEDP///wgAAAAAAAAAAAAAAAAAAAAAAAAAAAAAAAAAAAAAZAAAAAEAAABAAAAAAAAAAAAAAAAAAAAAAAAAAAAAAAAAAAAAAAAAAAAAAAAAAAAAAAAAAAAAAAAAAAAAAAAAAAAAAAAAAAAAAAAAAAAAAAAAAAAAAAAAAAAAAAAAAAAAFAAAADwAAAAAAAAAAAAAAAAAAAAPAAAAAQAAACMAAAAjAAAAIwAAAB4AAAAAAAAAZAAAAGQAAAAAAAAAZAAAAGQAAAAVAAAAYAAAAAAAAAAAAAAADwAAACADAAAAAAAAAAAAAAEAAACgMgAAVgcAAKr4//8BAAAAf39/AAEAAABkAAAAAAAAABQAAABAHwAAAAAAACYAAAAAAAAAwOD//wAAAAAmAAAAZAAAABYAAABMAAAAAAAAAAAAAAAEAAAAAAAAAAEAAADn5uYKAAAAACgAAAAoAAAAZAAAAGQAAAAAAAAAzMzMAAAAAABQAAAAUAAAAGQAAABkAAAAAAAAABcAAAAUAAAAAAAAAAAAAAD/fwAA/38AAAAAAAAJAAAABAAAADlcAAAeAAAAaAAAAAAAAAAAAAAAAAAAAAAAAAAAAAAAECcAABAnAAAAAAAAAAAAAAAAAAAAAAAAAAAAAAAAAAAAAAAAAAAAABQAAAAAAAAAwMD/AAAAAABkAAAAMgAAAAAAAABkAAAAAAAAAH9/fwAKAAAAIgAAABgAAAAAAAAAAAAAAAAAAAAAAAAAAAAAAAAAAAAkAAAAJAAAAAAAAAAHAAAAAAAAAAAAAAAAAAAAAAAAAAAAAAAAAAAAf39/ACUAAABYAAAAAAAAAAAAAAAAAAAAAAAAAAAAAAAAAAAAAAAAAAAAAAAAAAAAAAAAAAAAAAA/AAAAAAAAAKCGAQAAAAAAAAAAAAAAAAAMAAAAAQAAAAAAAAAAAAAAAAAAAB8AAABUAAAARHLEBf///wEAAAAAAAAAAAAAAAAAAAAAAAAAAAAAAAAAAAAAAAAAAAAAAAB/f38A5+bmA8zMzADAwP8Af39/AAAAAAAAAAAAAAAAAAAAAAAAAAAAIQAAABgAAAAUAAAAYAMAAF0CAACgRwAA3QYAABAAAAAmAAAACAAAAP//////////MAAAABQAAAAAAAAAAAD//wAAAQAAAP//AAABAA=="/>
+                <pr:smNativeData xmlns:pr="smNativeData" xmlns="smNativeData" val="SMDATA_16_V2g2ahMAAAAlAAAAZAAAAA0AAAAAkAAAAEgAAACQAAAASAAAAAAAAAABAAAAAAAAAAEAAABQAAAAAAAAAAAA4D8AAAAAAADgPwAAAAAAAOA/AAAAAAAA4D8AAAAAAADgPwAAAAAAAOA/AAAAAAAA4D8AAAAAAADgPwAAAAAAAOA/AAAAAAAA4D8CAAAAjAAAAAAAAAAAAAAARHLEDP///wgAAAAAAAAAAAAAAAAAAAAAAAAAAAAAAAAAAAAAZAAAAAEAAABAAAAAAAAAAAAAAAAAAAAAAAAAAAAAAAAAAAAAAAAAAAAAAAAAAAAAAAAAAAAAAAAAAAAAAAAAAAAAAAAAAAAAAAAAAAAAAAAAAAAAAAAAAAAAAAAAAAAAFAAAADwAAAAAAAAAAAAAAAAAAAAPAAAAAQAAACMAAAAjAAAAIwAAAB4AAAAAAAAAZAAAAGQAAAAAAAAAZAAAAGQAAAAVAAAAYAAAAAAAAAAAAAAADwAAACADAAAAAAAAAAAAAAEAAACgMgAAVgcAAKr4//8BAAAAf39/AAEAAABkAAAAAAAAABQAAABAHwAAAAAAACYAAAAAAAAAwOD//wAAAAAmAAAAZAAAABYAAABMAAAAAAAAAAAAAAAEAAAAAAAAAAEAAADn5uYKAAAAACgAAAAoAAAAZAAAAGQAAAAAAAAAzMzMAAAAAABQAAAAUAAAAGQAAABkAAAAAAAAABcAAAAUAAAAAAAAAAAAAAD/fwAA/38AAAAAAAAJAAAABAAAADlcAAAeAAAAaAAAAAAAAAAAAAAAAAAAAAAAAAAAAAAAECcAABAnAAAAAAAAAAAAAAAAAAAAAAAAAAAAAAAAAAAAAAAAAAAAABQAAAAAAAAAwMD/AAAAAABkAAAAMgAAAAAAAABkAAAAAAAAAH9/fwAKAAAAIgAAABgAAAAAAAAAAAAAAAAAAAAAAAAAAAAAAAAAAAAkAAAAJAAAAAAAAAAHAAAAAAAAAAAAAAAAAAAAAAAAAAAAAAAAAAAAf39/ACUAAABYAAAAAAAAAAAAAAAAAAAAAAAAAAAAAAAAAAAAAAAAAAAAAAAAAAAAAAAAAAAAAAA/AAAAAAAAAKCGAQAAAAAAAAAAAAAAAAAMAAAAAQAAAAAAAAAAAAAAAAAAAB8AAABUAAAARHLEBf///wEAAAAAAAAAAAAAAAAAAAAAAAAAAAAAAAAAAAAAAAAAAAAAAAB/f38A5+bmA8zMzADAwP8Af39/AAAAAAAAAAAAAAAAAAAAAAAAAAAAIQAAABgAAAAUAAAAYAMAAF0CAACgRwAA3QYAABAAAAAmAAAACAAAAP//////////MAAAABQAAAAAAAAAAAD//wAAAQAAAP//AAABAA=="/>
               </a:ext>
             </a:extLst>
           </p:cNvSpPr>
@@ -6618,7 +6774,7 @@
           <p:cNvSpPr>
             <a:extLst>
               <a:ext uri="smNativeData">
-                <pr:smNativeData xmlns:pr="smNativeData" xmlns="smNativeData" val="SMDATA_16_kRU2ahMAAAAlAAAAZQAAAA0AAAAAkAAAAEgAAACQAAAASAAAAAAAAAAAAAAAAAAAAAEAAABQAAAADVTGv8+4oD8AAAAAAADwvwAAAAAAAOA/AAAAAAAA4D8AAAAAAADgPwAAAAAAAOA/AAAAAAAA4D8AAAAAAADgPwAAAAAAAOA/AAAAAAAA4D8CAAAAjAAAAAEAAAAAAAAA7/P4AP///wgAAAAAAAAAAAAAAAAAAAAAAAAAAAAAAAAAAAAAeAAAAAEAAABAAAAAAAAAAAAAAABaAAAAAAAAAAAAAAAAAAAAAAAAAAAAAAAAAAAAAAAAAAAAAAAAAAAAAAAAAAAAAAAAAAAAAAAAAAAAAAAAAAAAAAAAAAAAAAAAAAAAFAAAADwAAAABAAAAAAAAANjg6AAUAAAAAQAAACMAAAAjAAAAIwAAAB4AAAAAAAAAZAAAAGQAAAAAAAAAZAAAAGQAAAAVAAAAYAAAAAAAAAAAAAAADwAAACADAAAAAAAAAAAAAAEAAACgMgAAVgcAAKr4//8BAAAAf39/AAEAAABkAAAAAAAAABQAAABAHwAAAAAAACYAAAAAAAAAwOD//wAAAAAmAAAAZAAAABYAAABMAAAAAQAAAAAAAAAGAAAAAAAAAAEAAAC5xNAAPAAAAAAAAAAoAAAAZAAAAGQAAAAAAAAAy8vLADwAAAAAAAAAKAAAAGQAAABkAAAAAAAAABcAAAAUAAAAAAAAAAAAAAD/fwAA/38AAAAAAAAJAAAABAAAAF0oAAAeAAAAaAAAAAAAAAAAAAAAAAAAAAAAAAAAAAAAECcAABAnAAAAAAAAAAAAAAAAAAAAAAAAAAAAAAAAAAAAAAAAAAAAAHgAAAAAAAAAwMD/AAAAAAAAAAAAAAAAAAAAAABkAAAAAAAAAH9/fwAKAAAAIgAAABgAAAAAAAAAAAAAAAAAAAAAAAAAAAAAAAAAAAAkAAAAJAAAAAAAAAAHAAAAAAAAAAAAAAAAAAAAAAAAAAAAAAAAAAAAf39/ACUAAABYAAAAAAAAAAAAAAAAAAAAAAAAAAAAAAAAAAAAAAAAAAAAAAAAAAAAAAAAAAAAAAA/AAAAAAAAAKCGAQAAAAAAAAAAAAAAAAAMAAAAAQAAAAAAAAAAAAAAAAAAAB8AAABUAAAA7/P4AP///wEAAAAAAAAAAAAAAAAAAAAAAAAAAAAAAAAAAAAAAAAAANjg6AB/f38AucTQAMvLywDAwP8Af39/AAAAAAAAAAAAAAAAAAAAAAAAAAAAIQAAABgAAAAUAAAAYAMAAJAJAACQJAAAICUAABAAAAAmAAAACAAAAP//////////MAAAABQAAAAAAAAAAAD//wAAAQAAAP//AAABAA=="/>
+                <pr:smNativeData xmlns:pr="smNativeData" xmlns="smNativeData" val="SMDATA_16_V2g2ahMAAAAlAAAAZQAAAA0AAAAAkAAAAEgAAACQAAAASAAAAAAAAAAAAAAAAAAAAAEAAABQAAAADVTGv8+4oD8AAAAAAAAAAAAAAAAAAOA/AAAAAAAA4D8AAAAAAADgPwAAAAAAAOA/AAAAAAAA4D8AAAAAAADgPwAAAAAAAOA/AAAAAAAA4D8CAAAAjAAAAAEAAAAAAAAA7/P4AP///wgAAAAAAAAAAAAAAAAAAAAAAAAAAAAAAAAAAAAAeAAAAAEAAABAAAAAAAAAAAAAAABaAAAAAAAAAAAAAAAAAAAAAAAAAAAAAAAAAAAAAAAAAAAAAAAAAAAAAAAAAAAAAAAAAAAAAAAAAAAAAAAAAAAAAAAAAAAAAAAAAAAAFAAAADwAAAABAAAAAAAAANjg6AAUAAAAAQAAACMAAAAjAAAAIwAAAB4AAAAAAAAAZAAAAGQAAAAAAAAAZAAAAGQAAAAVAAAAYAAAAAAAAAAAAAAADwAAACADAAAAAAAAAAAAAAEAAACgMgAAVgcAAKr4//8BAAAAf39/AAEAAABkAAAAAAAAABQAAABAHwAAAAAAACYAAAAAAAAAwOD//wAAAAAmAAAAZAAAABYAAABMAAAAAQAAAAAAAAAGAAAAAAAAAAEAAAC5xNAAPAAAAAAAAAAoAAAAZAAAAGQAAAAAAAAAy8vLADwAAAAAAAAAKAAAAGQAAABkAAAAAAAAABcAAAAUAAAAAAAAAAAAAAD/fwAA/38AAAAAAAAJAAAABAAAAF0oAAAeAAAAaAAAAAAAAAAAAAAAAAAAAAAAAAAAAAAAECcAABAnAAAAAAAAAAAAAAAAAAAAAAAAAAAAAAAAAAAAAAAAAAAAAHgAAAAAAAAAwMD/AAAAAAAAAAAAAAAAAAAAAABkAAAAAAAAAH9/fwAKAAAAIgAAABgAAAAAAAAAAAAAAAAAAAAAAAAAAAAAAAAAAAAkAAAAJAAAAAAAAAAHAAAAAAAAAAAAAAAAAAAAAAAAAAAAAAAAAAAAf39/ACUAAABYAAAAAAAAAAAAAAAAAAAAAAAAAAAAAAAAAAAAAAAAAAAAAAAAAAAAAAAAAAAAAAA/AAAAAAAAAKCGAQAAAAAAAAAAAAAAAAAMAAAAAQAAAAAAAAAAAAAAAAAAAB8AAABUAAAA7/P4AP///wEAAAAAAAAAAAAAAAAAAAAAAAAAAAAAAAAAAAAAAAAAANjg6AB/f38AucTQAMvLywDAwP8Af39/AAAAAAAAAAAAAAAAAAAAAAAAAAAAIQAAABgAAAAUAAAAYAMAAJAJAACQJAAAICUAABAAAAAmAAAACAAAAP//////////MAAAABQAAAAAAAAAAAD//wAAAQAAAP//AAABAA=="/>
               </a:ext>
             </a:extLst>
           </p:cNvSpPr>
@@ -6660,7 +6816,7 @@
           <p:cNvSpPr>
             <a:extLst>
               <a:ext uri="smNativeData">
-                <pr:smNativeData xmlns:pr="smNativeData" xmlns="smNativeData" val="SMDATA_16_kRU2ahMAAAAlAAAAZAAAAA0AAAAAkAAAAEgAAACQAAAASAAAAAAAAAABAAAAAAAAAAEAAABQAAAAAAAAAAAA4D8AAAAAAADgPwAAAAAAAOA/AAAAAAAA4D8AAAAAAADgPwAAAAAAAOA/AAAAAAAA4D8AAAAAAADgPwAAAAAAAOA/AAAAAAAA4D8CAAAAjAAAAAAAAAAAAAAARHLEDP///wgAAAAAAAAAAAAAAAAAAAAAAAAAAAAAAAAAAAAAZAAAAAEAAABAAAAAAAAAAAAAAAAAAAAAAAAAAAAAAAAAAAAAAAAAAAAAAAAAAAAAAAAAAAAAAAAAAAAAAAAAAAAAAAAAAAAAAAAAAAAAAAAAAAAAAAAAAAAAAAAAAAAAFAAAADwAAAAAAAAAAAAAAAAAAAAPAAAAAQAAACMAAAAjAAAAIwAAAB4AAAAAAAAAZAAAAGQAAAAAAAAAZAAAAGQAAAAVAAAAYAAAAAAAAAAAAAAADwAAACADAAAAAAAAAAAAAAEAAACgMgAAVgcAAKr4//8BAAAAf39/AAEAAABkAAAAAAAAABQAAABAHwAAAAAAACYAAAAAAAAAwOD//wAAAAAmAAAAZAAAABYAAABMAAAAAAAAAAAAAAAEAAAAAAAAAAEAAADn5uYKAAAAACgAAAAoAAAAZAAAAGQAAAAAAAAAzMzMAAAAAABQAAAAUAAAAGQAAABkAAAAAAAAABcAAAAUAAAAAAAAAAAAAAD/fwAA/38AAAAAAAAJAAAABAAAALwbAAAeAAAAaAAAAAAAAAAAAAAAAAAAAAAAAAAAAAAAECcAABAnAAAAAAAAAAAAAAAAAAAAAAAAAAAAAAAAAAAAAAAAAAAAABQAAAAAAAAAwMD/AAAAAABkAAAAMgAAAAAAAABkAAAAAAAAAH9/fwAKAAAAIgAAABgAAAAAAAAAAAAAAAAAAAAAAAAAAAAAAAAAAAAkAAAAJAAAAAAAAAAHAAAAAAAAAAAAAAAAAAAAAAAAAAAAAAAAAAAAf39/ACUAAABYAAAAAAAAAAAAAAAAAAAAAAAAAAAAAAAAAAAAAAAAAAAAAAAAAAAAAAAAAAAAAAA/AAAAAAAAAKCGAQAAAAAAAAAAAAAAAAAMAAAAAQAAAAAAAAAAAAAAAAAAAB8AAABUAAAARHLEBf///wEAAAAAAAAAAAAAAAAAAAAAAAAAAAAAAAAAAAAAAAAAAAAAAAB/f38A5+bmA8zMzADAwP8Af39/AAAAAAAAAAAAAAAAAAAAAAAAAAAAIQAAABgAAAAUAAAAEAUAALAKAADgIgAAgA0AABAAAAAmAAAACAAAAP//////////MAAAABQAAAAAAAAAAAD//wAAAQAAAP//AAABAA=="/>
+                <pr:smNativeData xmlns:pr="smNativeData" xmlns="smNativeData" val="SMDATA_16_V2g2ahMAAAAlAAAAZAAAAA0AAAAAkAAAAEgAAACQAAAASAAAAAAAAAABAAAAAAAAAAEAAABQAAAAAAAAAAAA4D8AAAAAAADgPwAAAAAAAOA/AAAAAAAA4D8AAAAAAADgPwAAAAAAAOA/AAAAAAAA4D8AAAAAAADgPwAAAAAAAOA/AAAAAAAA4D8CAAAAjAAAAAAAAAAAAAAARHLEDP///wgAAAAAAAAAAAAAAAAAAAAAAAAAAAAAAAAAAAAAZAAAAAEAAABAAAAAAAAAAAAAAAAAAAAAAAAAAAAAAAAAAAAAAAAAAAAAAAAAAAAAAAAAAAAAAAAAAAAAAAAAAAAAAAAAAAAAAAAAAAAAAAAAAAAAAAAAAAAAAAAAAAAAFAAAADwAAAAAAAAAAAAAAAAAAAAPAAAAAQAAACMAAAAjAAAAIwAAAB4AAAAAAAAAZAAAAGQAAAAAAAAAZAAAAGQAAAAVAAAAYAAAAAAAAAAAAAAADwAAACADAAAAAAAAAAAAAAEAAACgMgAAVgcAAKr4//8BAAAAf39/AAEAAABkAAAAAAAAABQAAABAHwAAAAAAACYAAAAAAAAAwOD//wAAAAAmAAAAZAAAABYAAABMAAAAAAAAAAAAAAAEAAAAAAAAAAEAAADn5uYKAAAAACgAAAAoAAAAZAAAAGQAAAAAAAAAzMzMAAAAAABQAAAAUAAAAGQAAABkAAAAAAAAABcAAAAUAAAAAAAAAAAAAAD/fwAA/38AAAAAAAAJAAAABAAAALwbAAAeAAAAaAAAAAAAAAAAAAAAAAAAAAAAAAAAAAAAECcAABAnAAAAAAAAAAAAAAAAAAAAAAAAAAAAAAAAAAAAAAAAAAAAABQAAAAAAAAAwMD/AAAAAABkAAAAMgAAAAAAAABkAAAAAAAAAH9/fwAKAAAAIgAAABgAAAAAAAAAAAAAAAAAAAAAAAAAAAAAAAAAAAAkAAAAJAAAAAAAAAAHAAAAAAAAAAAAAAAAAAAAAAAAAAAAAAAAAAAAf39/ACUAAABYAAAAAAAAAAAAAAAAAAAAAAAAAAAAAAAAAAAAAAAAAAAAAAAAAAAAAAAAAAAAAAA/AAAAAAAAAKCGAQAAAAAAAAAAAAAAAAAMAAAAAQAAAAAAAAAAAAAAAAAAAB8AAABUAAAARHLEBf///wEAAAAAAAAAAAAAAAAAAAAAAAAAAAAAAAAAAAAAAAAAAAAAAAB/f38A5+bmA8zMzADAwP8Af39/AAAAAAAAAAAAAAAAAAAAAAAAAAAAIQAAABgAAAAUAAAAEAUAALAKAADgIgAAgA0AABAAAAAmAAAACAAAAP//////////MAAAABQAAAAAAAAAAAD//wAAAQAAAP//AAABAA=="/>
               </a:ext>
             </a:extLst>
           </p:cNvSpPr>
@@ -6708,7 +6864,7 @@
           <p:cNvSpPr>
             <a:extLst>
               <a:ext uri="smNativeData">
-                <pr:smNativeData xmlns:pr="smNativeData" xmlns="smNativeData" val="SMDATA_16_kRU2ahMAAAAlAAAAZAAAAA0AAAAAkAAAAEgAAACQAAAASAAAAAAAAAAAAAAAAAAAAAEAAABQAAAAAAAAAAAA4D8AAAAAAADgPwAAAAAAAOA/AAAAAAAA4D8AAAAAAADgPwAAAAAAAOA/AAAAAAAA4D8AAAAAAADgPwAAAAAAAOA/AAAAAAAA4D8CAAAAjAAAAAAAAAAAAAAARHLEDP///wgAAAAAAAAAAAAAAAAAAAAAAAAAAAAAAAAAAAAAZAAAAAEAAABAAAAAAAAAAAAAAAAAAAAAAAAAAAAAAAAAAAAAAAAAAAAAAAAAAAAAAAAAAAAAAAAAAAAAAAAAAAAAAAAAAAAAAAAAAAAAAAAAAAAAAAAAAAAAAAAAAAAAFAAAADwAAAAAAAAAAAAAAAAAAAAPAAAAAQAAACMAAAAjAAAAIwAAAB4AAAAAAAAAZAAAAGQAAAAAAAAAZAAAAGQAAAAVAAAAYAAAAAAAAAAAAAAADwAAACADAAAAAAAAAAAAAAEAAACgMgAAVgcAAKr4//8BAAAAf39/AAEAAABkAAAAAAAAABQAAABAHwAAAAAAACYAAAAAAAAAwOD//wAAAAAmAAAAZAAAABYAAABMAAAAAAAAAAAAAAAEAAAAAAAAAAEAAADn5uYKAAAAACgAAAAoAAAAZAAAAGQAAAAAAAAAzMzMAAAAAABQAAAAUAAAAGQAAABkAAAAAAAAABcAAAAUAAAAAAAAAAAAAAD/fwAA/38AAAAAAAAJAAAABAAAAPCtlzseAAAAaAAAAAAAAAAAAAAAAAAAAAAAAAAAAAAAECcAABAnAAAAAAAAAAAAAAAAAAAAAAAAAAAAAAAAAAAAAAAAAAAAABQAAAAAAAAAwMD/AAAAAABkAAAAMgAAAAAAAABkAAAAAAAAAH9/fwAKAAAAIgAAABgAAAAAAAAAAAAAAAAAAAAAAAAAAAAAAAAAAAAkAAAAJAAAAAAAAAAHAAAAAAAAAAAAAAAAAAAAAAAAAAAAAAAAAAAAf39/ACUAAABYAAAAAAAAAAAAAAAAAAAAAAAAAAAAAAAAAAAAAAAAAAAAAAAAAAAAAAAAAAAAAAA/AAAAAAAAAKCGAQAAAAAAAAAAAAAAAAAMAAAAAQAAAAAAAAAAAAAAAAAAAB8AAABUAAAARHLEBf///wEAAAAAAAAAAAAAAAAAAAAAAAAAAAAAAAAAAAAAAAAAAAAAAAB/f38A5+bmA8zMzADAwP8Af39/AAAAAAAAAAAAAAAAAAAAAAAAAAAAIQAAABgAAAAUAAAAEAUAABAOAADgIgAAACQAABAAAAAmAAAACAAAAP//////////MAAAABQAAAAAAAAAAAD//wAAAQAAAP//AAABAA=="/>
+                <pr:smNativeData xmlns:pr="smNativeData" xmlns="smNativeData" val="SMDATA_16_V2g2ahMAAAAlAAAAZAAAAA0AAAAAkAAAAEgAAACQAAAASAAAAAAAAAAAAAAAAAAAAAEAAABQAAAAAAAAAAAA4D8AAAAAAADgPwAAAAAAAOA/AAAAAAAA4D8AAAAAAADgPwAAAAAAAOA/AAAAAAAA4D8AAAAAAADgPwAAAAAAAOA/AAAAAAAA4D8CAAAAjAAAAAAAAAAAAAAARHLEDP///wgAAAAAAAAAAAAAAAAAAAAAAAAAAAAAAAAAAAAAZAAAAAEAAABAAAAAAAAAAAAAAAAAAAAAAAAAAAAAAAAAAAAAAAAAAAAAAAAAAAAAAAAAAAAAAAAAAAAAAAAAAAAAAAAAAAAAAAAAAAAAAAAAAAAAAAAAAAAAAAAAAAAAFAAAADwAAAAAAAAAAAAAAAAAAAAPAAAAAQAAACMAAAAjAAAAIwAAAB4AAAAAAAAAZAAAAGQAAAAAAAAAZAAAAGQAAAAVAAAAYAAAAAAAAAAAAAAADwAAACADAAAAAAAAAAAAAAEAAACgMgAAVgcAAKr4//8BAAAAf39/AAEAAABkAAAAAAAAABQAAABAHwAAAAAAACYAAAAAAAAAwOD//wAAAAAmAAAAZAAAABYAAABMAAAAAAAAAAAAAAAEAAAAAAAAAAEAAADn5uYKAAAAACgAAAAoAAAAZAAAAGQAAAAAAAAAzMzMAAAAAABQAAAAUAAAAGQAAABkAAAAAAAAABcAAAAUAAAAAAAAAAAAAAD/fwAA/38AAAAAAAAJAAAABAAAAPCtlzseAAAAaAAAAAAAAAAAAAAAAAAAAAAAAAAAAAAAECcAABAnAAAAAAAAAAAAAAAAAAAAAAAAAAAAAAAAAAAAAAAAAAAAABQAAAAAAAAAwMD/AAAAAABkAAAAMgAAAAAAAABkAAAAAAAAAH9/fwAKAAAAIgAAABgAAAAAAAAAAAAAAAAAAAAAAAAAAAAAAAAAAAAkAAAAJAAAAAAAAAAHAAAAAAAAAAAAAAAAAAAAAAAAAAAAAAAAAAAAf39/ACUAAABYAAAAAAAAAAAAAAAAAAAAAAAAAAAAAAAAAAAAAAAAAAAAAAAAAAAAAAAAAAAAAAA/AAAAAAAAAKCGAQAAAAAAAAAAAAAAAAAMAAAAAQAAAAAAAAAAAAAAAAAAAB8AAABUAAAARHLEBf///wEAAAAAAAAAAAAAAAAAAAAAAAAAAAAAAAAAAAAAAAAAAAAAAAB/f38A5+bmA8zMzADAwP8Af39/AAAAAAAAAAAAAAAAAAAAAAAAAAAAIQAAABgAAAAUAAAAEAUAABAOAADgIgAAACQAAAAAAAAmAAAACAAAAP//////////MAAAABQAAAAAAAAAAAD//wAAAQAAAP//AAABAA=="/>
               </a:ext>
             </a:extLst>
           </p:cNvSpPr>
@@ -6779,172 +6935,222 @@
               </a:rPr>
               <a:t>baixo).</a:t>
             </a:r>
-            <a:r>
-              <a:rPr lang="en-us" sz="1450" cap="none">
-                <a:solidFill>
-                  <a:srgbClr val="283441"/>
-                </a:solidFill>
-              </a:rPr>
-              <a:t>Mapas </a:t>
-            </a:r>
-            <a:r>
-              <a:rPr lang="en-us" sz="1450" cap="none">
-                <a:solidFill>
-                  <a:srgbClr val="283441"/>
-                </a:solidFill>
-              </a:rPr>
-              <a:t>refletem </a:t>
-            </a:r>
-            <a:r>
-              <a:rPr lang="en-us" sz="1450" cap="none">
-                <a:solidFill>
-                  <a:srgbClr val="283441"/>
-                </a:solidFill>
-              </a:rPr>
-              <a:t>registro e </a:t>
-            </a:r>
-            <a:r>
-              <a:rPr lang="en-us" sz="1450" cap="none">
-                <a:solidFill>
-                  <a:srgbClr val="283441"/>
-                </a:solidFill>
-              </a:rPr>
-              <a:t>circulação, </a:t>
-            </a:r>
-            <a:r>
-              <a:rPr lang="en-us" sz="1450" cap="none">
-                <a:solidFill>
-                  <a:srgbClr val="283441"/>
-                </a:solidFill>
-              </a:rPr>
-              <a:t>não </a:t>
-            </a:r>
-            <a:r>
-              <a:rPr lang="en-us" sz="1450" cap="none">
-                <a:solidFill>
-                  <a:srgbClr val="283441"/>
-                </a:solidFill>
-              </a:rPr>
-              <a:t>risco </a:t>
-            </a:r>
-            <a:r>
-              <a:rPr lang="en-us" sz="1450" cap="none">
-                <a:solidFill>
-                  <a:srgbClr val="283441"/>
-                </a:solidFill>
-              </a:rPr>
-              <a:t>individual.Dados </a:t>
-            </a:r>
-            <a:r>
-              <a:rPr lang="en-us" sz="1450" cap="none">
-                <a:solidFill>
-                  <a:srgbClr val="283441"/>
-                </a:solidFill>
-              </a:rPr>
-              <a:t>históricos </a:t>
-            </a:r>
-            <a:r>
-              <a:rPr lang="en-us" sz="1450" cap="none">
-                <a:solidFill>
-                  <a:srgbClr val="283441"/>
-                </a:solidFill>
-              </a:rPr>
-              <a:t>podem </a:t>
-            </a:r>
-            <a:r>
-              <a:rPr lang="en-us" sz="1450" cap="none">
-                <a:solidFill>
-                  <a:srgbClr val="283441"/>
-                </a:solidFill>
-              </a:rPr>
-              <a:t>carregar </a:t>
-            </a:r>
-            <a:r>
-              <a:rPr lang="en-us" sz="1450" cap="none">
-                <a:solidFill>
-                  <a:srgbClr val="283441"/>
-                </a:solidFill>
-              </a:rPr>
-              <a:t>viés de </a:t>
-            </a:r>
-            <a:r>
-              <a:rPr lang="en-us" sz="1450" cap="none">
-                <a:solidFill>
-                  <a:srgbClr val="283441"/>
-                </a:solidFill>
-              </a:rPr>
-              <a:t>notificação e de </a:t>
-            </a:r>
-            <a:r>
-              <a:rPr lang="en-us" sz="1450" cap="none">
-                <a:solidFill>
-                  <a:srgbClr val="283441"/>
-                </a:solidFill>
-              </a:rPr>
-              <a:t>policiamento.Só </a:t>
-            </a:r>
-            <a:r>
-              <a:rPr lang="en-us" sz="1450" cap="none">
-                <a:solidFill>
-                  <a:srgbClr val="283441"/>
-                </a:solidFill>
-              </a:rPr>
-              <a:t>três </a:t>
-            </a:r>
-            <a:r>
-              <a:rPr lang="en-us" sz="1450" cap="none">
-                <a:solidFill>
-                  <a:srgbClr val="283441"/>
-                </a:solidFill>
-              </a:rPr>
-              <a:t>variáveis de </a:t>
-            </a:r>
-            <a:r>
-              <a:rPr lang="en-us" sz="1450" cap="none">
-                <a:solidFill>
-                  <a:srgbClr val="283441"/>
-                </a:solidFill>
-              </a:rPr>
-              <a:t>entrada — local e hora </a:t>
-            </a:r>
-            <a:r>
-              <a:rPr lang="en-us" sz="1450" cap="none">
-                <a:solidFill>
-                  <a:srgbClr val="283441"/>
-                </a:solidFill>
-              </a:rPr>
-              <a:t>levam </a:t>
-            </a:r>
-            <a:r>
-              <a:rPr lang="en-us" sz="1450" cap="none">
-                <a:solidFill>
-                  <a:srgbClr val="283441"/>
-                </a:solidFill>
-              </a:rPr>
-              <a:t>até </a:t>
-            </a:r>
-            <a:r>
-              <a:rPr lang="en-us" sz="1450" cap="none">
-                <a:solidFill>
-                  <a:srgbClr val="283441"/>
-                </a:solidFill>
-              </a:rPr>
-              <a:t>certo </a:t>
-            </a:r>
-            <a:r>
-              <a:rPr lang="en-us" sz="1450" cap="none">
-                <a:solidFill>
-                  <a:srgbClr val="283441"/>
-                </a:solidFill>
-              </a:rPr>
-              <a:t>ponto.</a:t>
-            </a:r>
             <a:endParaRPr lang="en-us" sz="1450" cap="none">
               <a:solidFill>
                 <a:srgbClr val="283441"/>
               </a:solidFill>
             </a:endParaRPr>
           </a:p>
+          <a:p>
+            <a:pPr marL="177800" indent="-177800" algn="l">
+              <a:spcAft>
+                <a:spcPts val="800"/>
+              </a:spcAft>
+              <a:buSzTx/>
+              <a:buChar char="•"/>
+            </a:pPr>
+            <a:r>
+              <a:rPr lang="en-us" sz="1450" cap="none">
+                <a:solidFill>
+                  <a:srgbClr val="283441"/>
+                </a:solidFill>
+              </a:rPr>
+              <a:t>Mapas </a:t>
+            </a:r>
+            <a:r>
+              <a:rPr lang="en-us" sz="1450" cap="none">
+                <a:solidFill>
+                  <a:srgbClr val="283441"/>
+                </a:solidFill>
+              </a:rPr>
+              <a:t>refletem </a:t>
+            </a:r>
+            <a:r>
+              <a:rPr lang="en-us" sz="1450" cap="none">
+                <a:solidFill>
+                  <a:srgbClr val="283441"/>
+                </a:solidFill>
+              </a:rPr>
+              <a:t>registro e </a:t>
+            </a:r>
+            <a:r>
+              <a:rPr lang="en-us" sz="1450" cap="none">
+                <a:solidFill>
+                  <a:srgbClr val="283441"/>
+                </a:solidFill>
+              </a:rPr>
+              <a:t>circulação, </a:t>
+            </a:r>
+            <a:r>
+              <a:rPr lang="en-us" sz="1450" cap="none">
+                <a:solidFill>
+                  <a:srgbClr val="283441"/>
+                </a:solidFill>
+              </a:rPr>
+              <a:t>não </a:t>
+            </a:r>
+            <a:r>
+              <a:rPr lang="en-us" sz="1450" cap="none">
+                <a:solidFill>
+                  <a:srgbClr val="283441"/>
+                </a:solidFill>
+              </a:rPr>
+              <a:t>risco individual.</a:t>
+            </a:r>
+            <a:endParaRPr lang="en-us" sz="1450" cap="none">
+              <a:solidFill>
+                <a:srgbClr val="283441"/>
+              </a:solidFill>
+            </a:endParaRPr>
+          </a:p>
+          <a:p>
+            <a:pPr marL="177800" indent="-177800" algn="l">
+              <a:spcAft>
+                <a:spcPts val="800"/>
+              </a:spcAft>
+              <a:buSzTx/>
+              <a:buChar char="•"/>
+            </a:pPr>
+            <a:r>
+              <a:rPr lang="en-us" sz="1450" cap="none">
+                <a:solidFill>
+                  <a:srgbClr val="283441"/>
+                </a:solidFill>
+              </a:rPr>
+              <a:t>Dados </a:t>
+            </a:r>
+            <a:r>
+              <a:rPr lang="en-us" sz="1450" cap="none">
+                <a:solidFill>
+                  <a:srgbClr val="283441"/>
+                </a:solidFill>
+              </a:rPr>
+              <a:t>históricos </a:t>
+            </a:r>
+            <a:r>
+              <a:rPr lang="en-us" sz="1450" cap="none">
+                <a:solidFill>
+                  <a:srgbClr val="283441"/>
+                </a:solidFill>
+              </a:rPr>
+              <a:t>podem </a:t>
+            </a:r>
+            <a:r>
+              <a:rPr lang="en-us" sz="1450" cap="none">
+                <a:solidFill>
+                  <a:srgbClr val="283441"/>
+                </a:solidFill>
+              </a:rPr>
+              <a:t>carregar </a:t>
+            </a:r>
+            <a:r>
+              <a:rPr lang="en-us" sz="1450" cap="none">
+                <a:solidFill>
+                  <a:srgbClr val="283441"/>
+                </a:solidFill>
+              </a:rPr>
+              <a:t>viés de </a:t>
+            </a:r>
+            <a:r>
+              <a:rPr lang="en-us" sz="1450" cap="none">
+                <a:solidFill>
+                  <a:srgbClr val="283441"/>
+                </a:solidFill>
+              </a:rPr>
+              <a:t>notificação e de </a:t>
+            </a:r>
+            <a:r>
+              <a:rPr lang="en-us" sz="1450" cap="none">
+                <a:solidFill>
+                  <a:srgbClr val="283441"/>
+                </a:solidFill>
+              </a:rPr>
+              <a:t>policiamento.</a:t>
+            </a:r>
+            <a:endParaRPr lang="en-us" sz="1450" cap="none">
+              <a:solidFill>
+                <a:srgbClr val="283441"/>
+              </a:solidFill>
+            </a:endParaRPr>
+          </a:p>
+          <a:p>
+            <a:pPr marL="177800" indent="-177800" algn="l">
+              <a:spcAft>
+                <a:spcPts val="800"/>
+              </a:spcAft>
+              <a:buSzTx/>
+              <a:buChar char="•"/>
+            </a:pPr>
+            <a:r>
+              <a:rPr lang="en-us" sz="1450" cap="none">
+                <a:solidFill>
+                  <a:srgbClr val="283441"/>
+                </a:solidFill>
+              </a:rPr>
+              <a:t>Só </a:t>
+            </a:r>
+            <a:r>
+              <a:rPr lang="en-us" sz="1450" cap="none">
+                <a:solidFill>
+                  <a:srgbClr val="283441"/>
+                </a:solidFill>
+              </a:rPr>
+              <a:t>três </a:t>
+            </a:r>
+            <a:r>
+              <a:rPr lang="en-us" sz="1450" cap="none">
+                <a:solidFill>
+                  <a:srgbClr val="283441"/>
+                </a:solidFill>
+              </a:rPr>
+              <a:t>variáveis de </a:t>
+            </a:r>
+            <a:r>
+              <a:rPr lang="en-us" sz="1450" cap="none">
+                <a:solidFill>
+                  <a:srgbClr val="283441"/>
+                </a:solidFill>
+              </a:rPr>
+              <a:t>entrada — local e hora </a:t>
+            </a:r>
+            <a:r>
+              <a:rPr lang="en-us" sz="1450" cap="none">
+                <a:solidFill>
+                  <a:srgbClr val="283441"/>
+                </a:solidFill>
+              </a:rPr>
+              <a:t>levam </a:t>
+            </a:r>
+            <a:r>
+              <a:rPr lang="en-us" sz="1450" cap="none">
+                <a:solidFill>
+                  <a:srgbClr val="283441"/>
+                </a:solidFill>
+              </a:rPr>
+              <a:t>até </a:t>
+            </a:r>
+            <a:r>
+              <a:rPr lang="en-us" sz="1450" cap="none">
+                <a:solidFill>
+                  <a:srgbClr val="283441"/>
+                </a:solidFill>
+              </a:rPr>
+              <a:t>certo </a:t>
+            </a:r>
+            <a:r>
+              <a:rPr lang="en-us" sz="1450" cap="none">
+                <a:solidFill>
+                  <a:srgbClr val="283441"/>
+                </a:solidFill>
+              </a:rPr>
+              <a:t>ponto.</a:t>
+            </a:r>
+            <a:endParaRPr lang="en-us" sz="1450" cap="none">
+              <a:solidFill>
+                <a:srgbClr val="283441"/>
+              </a:solidFill>
+            </a:endParaRPr>
+          </a:p>
         </p:txBody>
       </p:sp>
       <p:sp>
@@ -6953,7 +7159,7 @@
           <p:cNvSpPr>
             <a:extLst>
               <a:ext uri="smNativeData">
-                <pr:smNativeData xmlns:pr="smNativeData" xmlns="smNativeData" val="SMDATA_16_kRU2ahMAAAAlAAAAZQAAAA0AAAAAkAAAAEgAAACQAAAASAAAAAAAAAAAAAAAAAAAAAEAAABQAAAADVTGv8+4oD8AAAAAAADwvwAAAAAAAOA/AAAAAAAA4D8AAAAAAADgPwAAAAAAAOA/AAAAAAAA4D8AAAAAAADgPwAAAAAAAOA/AAAAAAAA4D8CAAAAjAAAAAEAAAAAAAAADyRAAP///wgAAAAAAAAAAAAAAAAAAAAAAAAAAAAAAAAAAAAAeAAAAAEAAABAAAAAAAAAAAAAAABaAAAAAAAAAAAAAAAAAAAAAAAAAAAAAAAAAAAAAAAAAAAAAAAAAAAAAAAAAAAAAAAAAAAAAAAAAAAAAAAAAAAAAAAAAAAAAAAAAAAAFAAAADwAAAAAAAAAAAAAAAAAAAAPAAAAAQAAACMAAAAjAAAAIwAAAB4AAAAAAAAAZAAAAGQAAAAAAAAAZAAAAGQAAAAVAAAAYAAAAAAAAAAAAAAADwAAACADAAAAAAAAAAAAAAEAAACgMgAAVgcAAKr4//8BAAAAf39/AAEAAABkAAAAAAAAABQAAABAHwAAAAAAACYAAAAAAAAAwOD//wAAAAAmAAAAZAAAABYAAABMAAAAAQAAAAAAAAAGAAAAAAAAAAEAAAC5xNAAPAAAAAAAAAAoAAAAZAAAAGQAAAAAAAAAy8vLADwAAAAAAAAAKAAAAGQAAABkAAAAAAAAABcAAAAUAAAAAAAAAAAAAAD/fwAA/38AAAAAAAAJAAAABAAAAAIAAAAeAAAAaAAAAAAAAAAAAAAAAAAAAAAAAAAAAAAAECcAABAnAAAAAAAAAAAAAAAAAAAAAAAAAAAAAAAAAAAAAAAAAAAAAHgAAAAAAAAAwMD/AAAAAAAAAAAAAAAAAAAAAABkAAAAAAAAAH9/fwAKAAAAIgAAABgAAAAAAAAAAAAAAAAAAAAAAAAAAAAAAAAAAAAkAAAAJAAAAAAAAAAHAAAAAAAAAAAAAAAAAAAAAAAAAAAAAAAAAAAAf39/ACUAAABYAAAAAAAAAAAAAAAAAAAAAAAAAAAAAAAAAAAAAAAAAAAAAAAAAAAAAAAAAAAAAAA/AAAAAAAAAKCGAQAAAAAAAAAAAAAAAAAMAAAAAQAAAAAAAAAAAAAAAAAAAB8AAABUAAAADyRAAP///wEAAAAAAAAAAAAAAAAAAAAAAAAAAAAAAAAAAAAAAAAAAAAAAAB/f38AucTQAMvLywDAwP8Af39/AAAAAAAAAAAAAAAAAAAAAAAAAAAAIQAAABgAAAAUAAAAiCYAAJAJAABwRwAAICUAABAAAAAmAAAACAAAAP//////////MAAAABQAAAAAAAAAAAD//wAAAQAAAP//AAABAA=="/>
+                <pr:smNativeData xmlns:pr="smNativeData" xmlns="smNativeData" val="SMDATA_16_V2g2ahMAAAAlAAAAZQAAAA0AAAAAkAAAAEgAAACQAAAASAAAAAAAAAAAAAAAAAAAAAEAAABQAAAADVTGv8+4oD8AAAAAAAAAAAAAAAAAAOA/AAAAAAAA4D8AAAAAAADgPwAAAAAAAOA/AAAAAAAA4D8AAAAAAADgPwAAAAAAAOA/AAAAAAAA4D8CAAAAjAAAAAEAAAAAAAAADyRAAP///wgAAAAAAAAAAAAAAAAAAAAAAAAAAAAAAAAAAAAAeAAAAAEAAABAAAAAAAAAAAAAAABaAAAAAAAAAAAAAAAAAAAAAAAAAAAAAAAAAAAAAAAAAAAAAAAAAAAAAAAAAAAAAAAAAAAAAAAAAAAAAAAAAAAAAAAAAAAAAAAAAAAAFAAAADwAAAAAAAAAAAAAAAAAAAAPAAAAAQAAACMAAAAjAAAAIwAAAB4AAAAAAAAAZAAAAGQAAAAAAAAAZAAAAGQAAAAVAAAAYAAAAAAAAAAAAAAADwAAACADAAAAAAAAAAAAAAEAAACgMgAAVgcAAKr4//8BAAAAf39/AAEAAABkAAAAAAAAABQAAABAHwAAAAAAACYAAAAAAAAAwOD//wAAAAAmAAAAZAAAABYAAABMAAAAAQAAAAAAAAAGAAAAAAAAAAEAAAC5xNAAPAAAAAAAAAAoAAAAZAAAAGQAAAAAAAAAy8vLADwAAAAAAAAAKAAAAGQAAABkAAAAAAAAABcAAAAUAAAAAAAAAAAAAAD/fwAA/38AAAAAAAAJAAAABAAAAAIAAAAeAAAAaAAAAAAAAAAAAAAAAAAAAAAAAAAAAAAAECcAABAnAAAAAAAAAAAAAAAAAAAAAAAAAAAAAAAAAAAAAAAAAAAAAHgAAAAAAAAAwMD/AAAAAAAAAAAAAAAAAAAAAABkAAAAAAAAAH9/fwAKAAAAIgAAABgAAAAAAAAAAAAAAAAAAAAAAAAAAAAAAAAAAAAkAAAAJAAAAAAAAAAHAAAAAAAAAAAAAAAAAAAAAAAAAAAAAAAAAAAAf39/ACUAAABYAAAAAAAAAAAAAAAAAAAAAAAAAAAAAAAAAAAAAAAAAAAAAAAAAAAAAAAAAAAAAAA/AAAAAAAAAKCGAQAAAAAAAAAAAAAAAAAMAAAAAQAAAAAAAAAAAAAAAAAAAB8AAABUAAAADyRAAP///wEAAAAAAAAAAAAAAAAAAAAAAAAAAAAAAAAAAAAAAAAAAAAAAAB/f38AucTQAMvLywDAwP8Af39/AAAAAAAAAAAAAAAAAAAAAAAAAAAAIQAAABgAAAAUAAAAiCYAAJAJAABwRwAAICUAABAAAAAmAAAACAAAAP//////////MAAAABQAAAAAAAAAAAD//wAAAQAAAP//AAABAA=="/>
               </a:ext>
             </a:extLst>
           </p:cNvSpPr>
@@ -6990,7 +7196,7 @@
           <p:cNvSpPr>
             <a:extLst>
               <a:ext uri="smNativeData">
-                <pr:smNativeData xmlns:pr="smNativeData" xmlns="smNativeData" val="SMDATA_16_kRU2ahMAAAAlAAAAZAAAAA0AAAAAkAAAAEgAAACQAAAASAAAAAAAAAABAAAAAAAAAAEAAABQAAAAAAAAAAAA4D8AAAAAAADgPwAAAAAAAOA/AAAAAAAA4D8AAAAAAADgPwAAAAAAAOA/AAAAAAAA4D8AAAAAAADgPwAAAAAAAOA/AAAAAAAA4D8CAAAAjAAAAAAAAAAAAAAARHLEDP///wgAAAAAAAAAAAAAAAAAAAAAAAAAAAAAAAAAAAAAZAAAAAEAAABAAAAAAAAAAAAAAAAAAAAAAAAAAAAAAAAAAAAAAAAAAAAAAAAAAAAAAAAAAAAAAAAAAAAAAAAAAAAAAAAAAAAAAAAAAAAAAAAAAAAAAAAAAAAAAAAAAAAAFAAAADwAAAAAAAAAAAAAAAAAAAAPAAAAAQAAACMAAAAjAAAAIwAAAB4AAAAAAAAAZAAAAGQAAAAAAAAAZAAAAGQAAAAVAAAAYAAAAAAAAAAAAAAADwAAACADAAAAAAAAAAAAAAEAAACgMgAAVgcAAKr4//8BAAAAf39/AAEAAABkAAAAAAAAABQAAABAHwAAAAAAACYAAAAAAAAAwOD//wAAAAAmAAAAZAAAABYAAABMAAAAAAAAAAAAAAAEAAAAAAAAAAEAAADn5uYKAAAAACgAAAAoAAAAZAAAAGQAAAAAAAAAzMzMAAAAAABQAAAAUAAAAGQAAABkAAAAAAAAABcAAAAUAAAAAAAAAAAAAAD/fwAA/38AAAAAAAAJAAAABAAAAHA/gUAeAAAAaAAAAAAAAAAAAAAAAAAAAAAAAAAAAAAAECcAABAnAAAAAAAAAAAAAAAAAAAAAAAAAAAAAAAAAAAAAAAAAAAAABQAAAAAAAAAwMD/AAAAAABkAAAAMgAAAAAAAABkAAAAAAAAAH9/fwAKAAAAIgAAABgAAAAAAAAAAAAAAAAAAAAAAAAAAAAAAAAAAAAkAAAAJAAAAAAAAAAHAAAAAAAAAAAAAAAAAAAAAAAAAAAAAAAAAAAAf39/ACUAAABYAAAAAAAAAAAAAAAAAAAAAAAAAAAAAAAAAAAAAAAAAAAAAAAAAAAAAAAAAAAAAAA/AAAAAAAAAKCGAQAAAAAAAAAAAAAAAAAMAAAAAQAAAAAAAAAAAAAAAAAAAB8AAABUAAAARHLEBf///wEAAAAAAAAAAAAAAAAAAAAAAAAAAAAAAAAAAAAAAAAAAAAAAAB/f38A5+bmA8zMzADAwP8Af39/AAAAAAAAAAAAAAAAAAAAAAAAAAAAIQAAABgAAAAUAAAAOCgAALAKAAAIRgAAgA0AABAAAAAmAAAACAAAAP//////////MAAAABQAAAAAAAAAAAD//wAAAQAAAP//AAABAA=="/>
+                <pr:smNativeData xmlns:pr="smNativeData" xmlns="smNativeData" val="SMDATA_16_V2g2ahMAAAAlAAAAZAAAAA0AAAAAkAAAAEgAAACQAAAASAAAAAAAAAABAAAAAAAAAAEAAABQAAAAAAAAAAAA4D8AAAAAAADgPwAAAAAAAOA/AAAAAAAA4D8AAAAAAADgPwAAAAAAAOA/AAAAAAAA4D8AAAAAAADgPwAAAAAAAOA/AAAAAAAA4D8CAAAAjAAAAAAAAAAAAAAARHLEDP///wgAAAAAAAAAAAAAAAAAAAAAAAAAAAAAAAAAAAAAZAAAAAEAAABAAAAAAAAAAAAAAAAAAAAAAAAAAAAAAAAAAAAAAAAAAAAAAAAAAAAAAAAAAAAAAAAAAAAAAAAAAAAAAAAAAAAAAAAAAAAAAAAAAAAAAAAAAAAAAAAAAAAAFAAAADwAAAAAAAAAAAAAAAAAAAAPAAAAAQAAACMAAAAjAAAAIwAAAB4AAAAAAAAAZAAAAGQAAAAAAAAAZAAAAGQAAAAVAAAAYAAAAAAAAAAAAAAADwAAACADAAAAAAAAAAAAAAEAAACgMgAAVgcAAKr4//8BAAAAf39/AAEAAABkAAAAAAAAABQAAABAHwAAAAAAACYAAAAAAAAAwOD//wAAAAAmAAAAZAAAABYAAABMAAAAAAAAAAAAAAAEAAAAAAAAAAEAAADn5uYKAAAAACgAAAAoAAAAZAAAAGQAAAAAAAAAzMzMAAAAAABQAAAAUAAAAGQAAABkAAAAAAAAABcAAAAUAAAAAAAAAAAAAAD/fwAA/38AAAAAAAAJAAAABAAAAHA/gUAeAAAAaAAAAAAAAAAAAAAAAAAAAAAAAAAAAAAAECcAABAnAAAAAAAAAAAAAAAAAAAAAAAAAAAAAAAAAAAAAAAAAAAAABQAAAAAAAAAwMD/AAAAAABkAAAAMgAAAAAAAABkAAAAAAAAAH9/fwAKAAAAIgAAABgAAAAAAAAAAAAAAAAAAAAAAAAAAAAAAAAAAAAkAAAAJAAAAAAAAAAHAAAAAAAAAAAAAAAAAAAAAAAAAAAAAAAAAAAAf39/ACUAAABYAAAAAAAAAAAAAAAAAAAAAAAAAAAAAAAAAAAAAAAAAAAAAAAAAAAAAAAAAAAAAAA/AAAAAAAAAKCGAQAAAAAAAAAAAAAAAAAMAAAAAQAAAAAAAAAAAAAAAAAAAB8AAABUAAAARHLEBf///wEAAAAAAAAAAAAAAAAAAAAAAAAAAAAAAAAAAAAAAAAAAAAAAAB/f38A5+bmA8zMzADAwP8Af39/AAAAAAAAAAAAAAAAAAAAAAAAAAAAIQAAABgAAAAUAAAAOCgAALAKAAAIRgAAgA0AABAAAAAmAAAACAAAAP//////////MAAAABQAAAAAAAAAAAD//wAAAQAAAP//AAABAA=="/>
               </a:ext>
             </a:extLst>
           </p:cNvSpPr>
@@ -7038,7 +7244,7 @@
           <p:cNvSpPr>
             <a:extLst>
               <a:ext uri="smNativeData">
-                <pr:smNativeData xmlns:pr="smNativeData" xmlns="smNativeData" val="SMDATA_16_kRU2ahMAAAAlAAAAZAAAAA0AAAAAkAAAAEgAAACQAAAASAAAAAAAAAAAAAAAAAAAAAEAAABQAAAAAAAAAAAA4D8AAAAAAADgPwAAAAAAAOA/AAAAAAAA4D8AAAAAAADgPwAAAAAAAOA/AAAAAAAA4D8AAAAAAADgPwAAAAAAAOA/AAAAAAAA4D8CAAAAjAAAAAAAAAAAAAAARHLEDP///wgAAAAAAAAAAAAAAAAAAAAAAAAAAAAAAAAAAAAAZAAAAAEAAABAAAAAAAAAAAAAAAAAAAAAAAAAAAAAAAAAAAAAAAAAAAAAAAAAAAAAAAAAAAAAAAAAAAAAAAAAAAAAAAAAAAAAAAAAAAAAAAAAAAAAAAAAAAAAAAAAAAAAFAAAADwAAAAAAAAAAAAAAAAAAAAPAAAAAQAAACMAAAAjAAAAIwAAAB4AAAAAAAAAZAAAAGQAAAAAAAAAZAAAAGQAAAAVAAAAYAAAAAAAAAAAAAAADwAAACADAAAAAAAAAAAAAAEAAACgMgAAVgcAAKr4//8BAAAAf39/AAEAAABkAAAAAAAAABQAAABAHwAAAAAAACYAAAAAAAAAwOD//wAAAAAmAAAAZAAAABYAAABMAAAAAAAAAAAAAAAEAAAAAAAAAAEAAADn5uYKAAAAACgAAAAoAAAAZAAAAGQAAAAAAAAAzMzMAAAAAABQAAAAUAAAAGQAAABkAAAAAAAAABcAAAAUAAAAAAAAAAAAAAD/fwAA/38AAAAAAAAJAAAABAAAAAAAAAAeAAAAaAAAAAAAAAAAAAAAAAAAAAAAAAAAAAAAECcAABAnAAAAAAAAAAAAAAAAAAAAAAAAAAAAAAAAAAAAAAAAAAAAABQAAAAAAAAAwMD/AAAAAABkAAAAMgAAAAAAAABkAAAAAAAAAH9/fwAKAAAAIgAAABgAAAAAAAAAAAAAAAAAAAAAAAAAAAAAAAAAAAAkAAAAJAAAAAAAAAAHAAAAAAAAAAAAAAAAAAAAAAAAAAAAAAAAAAAAf39/ACUAAABYAAAAAAAAAAAAAAAAAAAAAAAAAAAAAAAAAAAAAAAAAAAAAAAAAAAAAAAAAAAAAAA/AAAAAAAAAKCGAQAAAAAAAAAAAAAAAAAMAAAAAQAAAAAAAAAAAAAAAAAAAB8AAABUAAAARHLEBf///wEAAAAAAAAAAAAAAAAAAAAAAAAAAAAAAAAAAAAAAAAAAAAAAAB/f38A5+bmA8zMzADAwP8Af39/AAAAAAAAAAAAAAAAAAAAAAAAAAAAIQAAABgAAAAUAAAAOCgAABAOAAAIRgAAACQAABAAAAAmAAAACAAAAP//////////MAAAABQAAAAAAAAAAAD//wAAAQAAAP//AAABAA=="/>
+                <pr:smNativeData xmlns:pr="smNativeData" xmlns="smNativeData" val="SMDATA_16_V2g2ahMAAAAlAAAAZAAAAA0AAAAAkAAAAEgAAACQAAAASAAAAAAAAAAAAAAAAAAAAAEAAABQAAAAAAAAAAAA4D8AAAAAAADgPwAAAAAAAOA/AAAAAAAA4D8AAAAAAADgPwAAAAAAAOA/AAAAAAAA4D8AAAAAAADgPwAAAAAAAOA/AAAAAAAA4D8CAAAAjAAAAAAAAAAAAAAARHLEDP///wgAAAAAAAAAAAAAAAAAAAAAAAAAAAAAAAAAAAAAZAAAAAEAAABAAAAAAAAAAAAAAAAAAAAAAAAAAAAAAAAAAAAAAAAAAAAAAAAAAAAAAAAAAAAAAAAAAAAAAAAAAAAAAAAAAAAAAAAAAAAAAAAAAAAAAAAAAAAAAAAAAAAAFAAAADwAAAAAAAAAAAAAAAAAAAAPAAAAAQAAACMAAAAjAAAAIwAAAB4AAAAAAAAAZAAAAGQAAAAAAAAAZAAAAGQAAAAVAAAAYAAAAAAAAAAAAAAADwAAACADAAAAAAAAAAAAAAEAAACgMgAAVgcAAKr4//8BAAAAf39/AAEAAABkAAAAAAAAABQAAABAHwAAAAAAACYAAAAAAAAAwOD//wAAAAAmAAAAZAAAABYAAABMAAAAAAAAAAAAAAAEAAAAAAAAAAEAAADn5uYKAAAAACgAAAAoAAAAZAAAAGQAAAAAAAAAzMzMAAAAAABQAAAAUAAAAGQAAABkAAAAAAAAABcAAAAUAAAAAAAAAAAAAAD/fwAA/38AAAAAAAAJAAAABAAAAAAAAAAeAAAAaAAAAAAAAAAAAAAAAAAAAAAAAAAAAAAAECcAABAnAAAAAAAAAAAAAAAAAAAAAAAAAAAAAAAAAAAAAAAAAAAAABQAAAAAAAAAwMD/AAAAAABkAAAAMgAAAAAAAABkAAAAAAAAAH9/fwAKAAAAIgAAABgAAAAAAAAAAAAAAAAAAAAAAAAAAAAAAAAAAAAkAAAAJAAAAAAAAAAHAAAAAAAAAAAAAAAAAAAAAAAAAAAAAAAAAAAAf39/ACUAAABYAAAAAAAAAAAAAAAAAAAAAAAAAAAAAAAAAAAAAAAAAAAAAAAAAAAAAAAAAAAAAAA/AAAAAAAAAKCGAQAAAAAAAAAAAAAAAAAMAAAAAQAAAAAAAAAAAAAAAAAAAB8AAABUAAAARHLEBf///wEAAAAAAAAAAAAAAAAAAAAAAAAAAAAAAAAAAAAAAAAAAAAAAAB/f38A5+bmA8zMzADAwP8Af39/AAAAAAAAAAAAAAAAAAAAAAAAAAAAIQAAABgAAAAUAAAAOCgAABAOAAAIRgAAACQAAAAAAAAmAAAACAAAAP//////////MAAAABQAAAAAAAAAAAD//wAAAQAAAP//AAABAA=="/>
               </a:ext>
             </a:extLst>
           </p:cNvSpPr>
@@ -7107,15 +7313,29 @@
                   <a:srgbClr val="DCE6F0"/>
                 </a:solidFill>
               </a:rPr>
-              <a:t>não </a:t>
-            </a:r>
+              <a:t>não decide.</a:t>
+            </a:r>
+            <a:endParaRPr lang="en-us" sz="1450" cap="none">
+              <a:solidFill>
+                <a:srgbClr val="DCE6F0"/>
+              </a:solidFill>
+            </a:endParaRPr>
+          </a:p>
+          <a:p>
+            <a:pPr marL="177800" indent="-177800" algn="l">
+              <a:spcAft>
+                <a:spcPts val="800"/>
+              </a:spcAft>
+              <a:buSzTx/>
+              <a:buChar char="•"/>
+            </a:pPr>
             <a:r>
               <a:rPr lang="en-us" sz="1450" cap="none">
                 <a:solidFill>
                   <a:srgbClr val="DCE6F0"/>
                 </a:solidFill>
               </a:rPr>
-              <a:t>decide.Sempre </a:t>
+              <a:t>Sempre </a:t>
             </a:r>
             <a:r>
               <a:rPr lang="en-us" sz="1450" cap="none">
@@ -7163,14 +7383,36 @@
                   <a:srgbClr val="DCE6F0"/>
                 </a:solidFill>
               </a:rPr>
-              <a:t>humano.Não </a:t>
-            </a:r>
+              <a:t>humano.</a:t>
+            </a:r>
+            <a:endParaRPr lang="en-us" sz="1450" cap="none">
+              <a:solidFill>
+                <a:srgbClr val="DCE6F0"/>
+              </a:solidFill>
+            </a:endParaRPr>
+          </a:p>
+          <a:p>
+            <a:pPr marL="177800" indent="-177800" algn="l">
+              <a:spcAft>
+                <a:spcPts val="800"/>
+              </a:spcAft>
+              <a:buSzTx/>
+              <a:buChar char="•"/>
+            </a:pPr>
             <a:r>
               <a:rPr lang="en-us" sz="1450" cap="none">
                 <a:solidFill>
                   <a:srgbClr val="DCE6F0"/>
                 </a:solidFill>
               </a:rPr>
+              <a:t>Não </a:t>
+            </a:r>
+            <a:r>
+              <a:rPr lang="en-us" sz="1450" cap="none">
+                <a:solidFill>
+                  <a:srgbClr val="DCE6F0"/>
+                </a:solidFill>
+              </a:rPr>
               <a:t>direciona </a:t>
             </a:r>
             <a:r>
@@ -7195,7 +7437,29 @@
                   <a:srgbClr val="DCE6F0"/>
                 </a:solidFill>
               </a:rPr>
-              <a:t>despacho.Uso real </a:t>
+              <a:t>despacho.</a:t>
+            </a:r>
+            <a:endParaRPr lang="en-us" sz="1450" cap="none">
+              <a:solidFill>
+                <a:srgbClr val="DCE6F0"/>
+              </a:solidFill>
+            </a:endParaRPr>
+          </a:p>
+          <a:p>
+            <a:pPr marL="177800" indent="-177800" algn="l">
+              <a:spcAft>
+                <a:spcPts val="800"/>
+              </a:spcAft>
+              <a:buSzTx/>
+              <a:buChar char="•"/>
+            </a:pPr>
+            <a:r>
+              <a:rPr lang="en-us" sz="1450" cap="none">
+                <a:solidFill>
+                  <a:srgbClr val="DCE6F0"/>
+                </a:solidFill>
+              </a:rPr>
+              <a:t>Uso real </a:t>
             </a:r>
             <a:r>
               <a:rPr lang="en-us" sz="1450" cap="none">
@@ -7275,7 +7539,7 @@
           <p:cNvSpPr>
             <a:extLst>
               <a:ext uri="smNativeData">
-                <pr:smNativeData xmlns:pr="smNativeData" xmlns="smNativeData" val="SMDATA_16_kRU2ahMAAAAlAAAAZgAAAA0AAAAAkAAAAEgAAACQAAAASAAAAAAAAAAAAAAAAAAAAAEAAABQAAAAAAAAAAAA8D8AAAAAAADwPwAAAAAAAOA/AAAAAAAA4D8AAAAAAADgPwAAAAAAAOA/AAAAAAAA4D8AAAAAAADgPwAAAAAAAOA/AAAAAAAA4D8CAAAAjAAAAAEAAAAAAAAAHDpeAP///wgAAAAAAAAAAAAAAAAAAAAAAAAAAAAAAAAAAAAAeAAAAAEAAABAAAAAAAAAAAAAAABaAAAAAAAAAAAAAAAAAAAAAAAAAAAAAAAAAAAAAAAAAAAAAAAAAAAAAAAAAAAAAAAAAAAAAAAAAAAAAAAAAAAAAAAAAAAAAAAAAAAAFAAAADwAAAAAAAAAAAAAAAAAAAAPAAAAAQAAACMAAAAjAAAAIwAAAB4AAAAAAAAAZAAAAGQAAAAAAAAAZAAAAGQAAAAVAAAAYAAAAAAAAAAAAAAADwAAACADAAAAAAAAAAAAAAEAAACgMgAAVgcAAKr4//8BAAAAf39/AAEAAABkAAAAAAAAABQAAABAHwAAAAAAACYAAAAAAAAAwOD//wAAAAAmAAAAZAAAABYAAABMAAAAAAAAAAAAAAAEAAAAAAAAAAEAAADn5uYKAAAAACgAAAAoAAAAZAAAAGQAAAAAAAAAzMzMAAAAAABQAAAAUAAAAGQAAABkAAAAAAAAABcAAAAUAAAAAAAAAAAAAAD/fwAA/38AAAAAAAAJAAAABAAAAPCtlzseAAAAaAAAAAAAAAAAAAAAAAAAAAAAAAAAAAAAECcAABAnAAAAAAAAAAAAAAAAAAAAAAAAAAAAAAAAAAAAAAAAAAAAABQAAAAAAAAAwMD/AAAAAABkAAAAMgAAAAAAAABkAAAAAAAAAH9/fwAKAAAAIgAAABgAAAAAAAAAAAAAAAAAAAAAAAAAAAAAAAAAAAAkAAAAJAAAAAAAAAAHAAAAAAAAAAAAAAAAAAAAAAAAAAAAAAAAAAAAf39/ACUAAABYAAAAAAAAAAAAAAAAAAAAAAAAAAAAAAAAAAAAAAAAAAAAAAAAAAAAAAAAAAAAAAA/AAAAAAAAAKCGAQAAAAAAAAAAAAAAAAAMAAAAAQAAAAAAAAAAAAAAAAAAAB8AAABUAAAAHDpeAP///wEAAAAAAAAAAAAAAAAAAAAAAAAAAAAAAAAAAAAAAAAAAAAAAAB/f38A5+bmA8zMzADAwP8Af39/AAAAAAAAAAAAAAAAAAAAAAAAAAAAIQAAABgAAAAUAAAAQPn//0AdAABACwAAQC8AABAAAAAmAAAACAAAAP//////////MAAAABQAAAAAAAAAAAD//wAAAQAAAP//AAABAA=="/>
+                <pr:smNativeData xmlns:pr="smNativeData" xmlns="smNativeData" val="SMDATA_16_V2g2ahMAAAAlAAAAZgAAAA0AAAAAkAAAAEgAAACQAAAASAAAAAAAAAAAAAAAAAAAAAEAAABQAAAAAAAAAAAA8D8AAAAAAADwPwAAAAAAAOA/AAAAAAAA4D8AAAAAAADgPwAAAAAAAOA/AAAAAAAA4D8AAAAAAADgPwAAAAAAAOA/AAAAAAAA4D8CAAAAjAAAAAEAAAAAAAAAHDpeAP///wgAAAAAAAAAAAAAAAAAAAAAAAAAAAAAAAAAAAAAeAAAAAEAAABAAAAAAAAAAAAAAABaAAAAAAAAAAAAAAAAAAAAAAAAAAAAAAAAAAAAAAAAAAAAAAAAAAAAAAAAAAAAAAAAAAAAAAAAAAAAAAAAAAAAAAAAAAAAAAAAAAAAFAAAADwAAAAAAAAAAAAAAAAAAAAPAAAAAQAAACMAAAAjAAAAIwAAAB4AAAAAAAAAZAAAAGQAAAAAAAAAZAAAAGQAAAAVAAAAYAAAAAAAAAAAAAAADwAAACADAAAAAAAAAAAAAAEAAACgMgAAVgcAAKr4//8BAAAAf39/AAEAAABkAAAAAAAAABQAAABAHwAAAAAAACYAAAAAAAAAwOD//wAAAAAmAAAAZAAAABYAAABMAAAAAAAAAAAAAAAEAAAAAAAAAAEAAADn5uYKAAAAACgAAAAoAAAAZAAAAGQAAAAAAAAAzMzMAAAAAABQAAAAUAAAAGQAAABkAAAAAAAAABcAAAAUAAAAAAAAAAAAAAD/fwAA/38AAAAAAAAJAAAABAAAAPCtlzseAAAAaAAAAAAAAAAAAAAAAAAAAAAAAAAAAAAAECcAABAnAAAAAAAAAAAAAAAAAAAAAAAAAAAAAAAAAAAAAAAAAAAAABQAAAAAAAAAwMD/AAAAAABkAAAAMgAAAAAAAABkAAAAAAAAAH9/fwAKAAAAIgAAABgAAAAAAAAAAAAAAAAAAAAAAAAAAAAAAAAAAAAkAAAAJAAAAAAAAAAHAAAAAAAAAAAAAAAAAAAAAAAAAAAAAAAAAAAAf39/ACUAAABYAAAAAAAAAAAAAAAAAAAAAAAAAAAAAAAAAAAAAAAAAAAAAAAAAAAAAAAAAAAAAAA/AAAAAAAAAKCGAQAAAAAAAAAAAAAAAAAMAAAAAQAAAAAAAAAAAAAAAAAAAB8AAABUAAAAHDpeAP///wEAAAAAAAAAAAAAAAAAAAAAAAAAAAAAAAAAAAAAAAAAAAAAAAB/f38A5+bmA8zMzADAwP8Af39/AAAAAAAAAAAAAAAAAAAAAAAAAAAAIQAAABgAAAAUAAAAQPn//0AdAABACwAAQC8AABAAAAAmAAAACAAAAP//////////MAAAABQAAAAAAAAAAAD//wAAAQAAAP//AAABAA=="/>
               </a:ext>
             </a:extLst>
           </p:cNvSpPr>
@@ -7304,7 +7568,7 @@
           <p:cNvSpPr>
             <a:extLst>
               <a:ext uri="smNativeData">
-                <pr:smNativeData xmlns:pr="smNativeData" xmlns="smNativeData" val="SMDATA_16_kRU2ahMAAAAlAAAAZAAAAA0AAAAAkAAAAEgAAACQAAAASAAAAAAAAAABAAAAAAAAAAEAAABQAAAAAAAAAAAA4D8AAAAAAADgPwAAAAAAAOA/AAAAAAAA4D8AAAAAAADgPwAAAAAAAOA/AAAAAAAA4D8AAAAAAADgPwAAAAAAAOA/AAAAAAAA4D8CAAAAjAAAAAAAAAAAAAAARHLEDP///wgAAAAAAAAAAAAAAAAAAAAAAAAAAAAAAAAAAAAAZAAAAAEAAABAAAAAAAAAAAAAAAAAAAAAAAAAAAAAAAAAAAAAAAAAAAAAAAAAAAAAAAAAAAAAAAAAAAAAAAAAAAAAAAAAAAAAAAAAAAAAAAAAAAAAAAAAAAAAAAAAAAAAFAAAADwAAAAAAAAAAAAAAAAAAAAPAAAAAQAAACMAAAAjAAAAIwAAAB4AAAAAAAAAZAAAAGQAAAAAAAAAZAAAAGQAAAAVAAAAYAAAAAAAAAAAAAAADwAAACADAAAAAAAAAAAAAAEAAACgMgAAVgcAAKr4//8BAAAAf39/AAEAAABkAAAAAAAAABQAAABAHwAAAAAAACYAAAAAAAAAwOD//wAAAAAmAAAAZAAAABYAAABMAAAAAAAAAAAAAAAEAAAAAAAAAAEAAADn5uYKAAAAACgAAAAoAAAAZAAAAGQAAAAAAAAAzMzMAAAAAABQAAAAUAAAAGQAAABkAAAAAAAAABcAAAAUAAAAAAAAAAAAAAD/fwAA/38AAAAAAAAJAAAABAAAAOQZAAAeAAAAaAAAAAAAAAAAAAAAAAAAAAAAAAAAAAAAECcAABAnAAAAAAAAAAAAAAAAAAAAAAAAAAAAAAAAAAAAAAAAAAAAABQAAAAAAAAAwMD/AAAAAABkAAAAMgAAAAAAAABkAAAAAAAAAH9/fwAKAAAAIgAAABgAAAAAAAAAAAAAAAAAAAAAAAAAAAAAAAAAAAAkAAAAJAAAAAAAAAAHAAAAAAAAAAAAAAAAAAAAAAAAAAAAAAAAAAAAf39/ACUAAABYAAAAAAAAAAAAAAAAAAAAAAAAAAAAAAAAAAAAAAAAAAAAAAAAAAAAAAAAAAAAAAA/AAAAAAAAAKCGAQAAAAAAAAAAAAAAAAAMAAAAAQAAAAAAAAAAAAAAAAAAAB8AAABUAAAARHLEBf///wEAAAAAAAAAAAAAAAAAAAAAAAAAAAAAAAAAAAAAAAAAAAAAAAB/f38A5+bmA8zMzADAwP8Af39/AAAAAAAAAAAAAAAAAAAAAAAAAAAAIQAAABgAAAAUAAAAYAMAACABAACgRwAA0AIAABAAAAAmAAAACAAAAP//////////MAAAABQAAAAAAAAAAAD//wAAAQAAAP//AAABAA=="/>
+                <pr:smNativeData xmlns:pr="smNativeData" xmlns="smNativeData" val="SMDATA_16_V2g2ahMAAAAlAAAAZAAAAA0AAAAAkAAAAEgAAACQAAAASAAAAAAAAAABAAAAAAAAAAEAAABQAAAAAAAAAAAA4D8AAAAAAADgPwAAAAAAAOA/AAAAAAAA4D8AAAAAAADgPwAAAAAAAOA/AAAAAAAA4D8AAAAAAADgPwAAAAAAAOA/AAAAAAAA4D8CAAAAjAAAAAAAAAAAAAAARHLEDP///wgAAAAAAAAAAAAAAAAAAAAAAAAAAAAAAAAAAAAAZAAAAAEAAABAAAAAAAAAAAAAAAAAAAAAAAAAAAAAAAAAAAAAAAAAAAAAAAAAAAAAAAAAAAAAAAAAAAAAAAAAAAAAAAAAAAAAAAAAAAAAAAAAAAAAAAAAAAAAAAAAAAAAFAAAADwAAAAAAAAAAAAAAAAAAAAPAAAAAQAAACMAAAAjAAAAIwAAAB4AAAAAAAAAZAAAAGQAAAAAAAAAZAAAAGQAAAAVAAAAYAAAAAAAAAAAAAAADwAAACADAAAAAAAAAAAAAAEAAACgMgAAVgcAAKr4//8BAAAAf39/AAEAAABkAAAAAAAAABQAAABAHwAAAAAAACYAAAAAAAAAwOD//wAAAAAmAAAAZAAAABYAAABMAAAAAAAAAAAAAAAEAAAAAAAAAAEAAADn5uYKAAAAACgAAAAoAAAAZAAAAGQAAAAAAAAAzMzMAAAAAABQAAAAUAAAAGQAAABkAAAAAAAAABcAAAAUAAAAAAAAAAAAAAD/fwAA/38AAAAAAAAJAAAABAAAAOQZAAAeAAAAaAAAAAAAAAAAAAAAAAAAAAAAAAAAAAAAECcAABAnAAAAAAAAAAAAAAAAAAAAAAAAAAAAAAAAAAAAAAAAAAAAABQAAAAAAAAAwMD/AAAAAABkAAAAMgAAAAAAAABkAAAAAAAAAH9/fwAKAAAAIgAAABgAAAAAAAAAAAAAAAAAAAAAAAAAAAAAAAAAAAAkAAAAJAAAAAAAAAAHAAAAAAAAAAAAAAAAAAAAAAAAAAAAAAAAAAAAf39/ACUAAABYAAAAAAAAAAAAAAAAAAAAAAAAAAAAAAAAAAAAAAAAAAAAAAAAAAAAAAAAAAAAAAA/AAAAAAAAAKCGAQAAAAAAAAAAAAAAAAAMAAAAAQAAAAAAAAAAAAAAAAAAAB8AAABUAAAARHLEBf///wEAAAAAAAAAAAAAAAAAAAAAAAAAAAAAAAAAAAAAAAAAAAAAAAB/f38A5+bmA8zMzADAwP8Af39/AAAAAAAAAAAAAAAAAAAAAAAAAAAAIQAAABgAAAAUAAAAYAMAACABAACgRwAA0AIAABAAAAAmAAAACAAAAP//////////MAAAABQAAAAAAAAAAAD//wAAAQAAAP//AAABAA=="/>
               </a:ext>
             </a:extLst>
           </p:cNvSpPr>
@@ -7332,7 +7596,7 @@
               <a:buNone/>
             </a:pPr>
             <a:r>
-              <a:rPr lang="en-us" sz="1200" b="1" cap="none" spc="40">
+              <a:rPr lang="en-us" sz="1200" b="1" cap="none" spc="8">
                 <a:solidFill>
                   <a:srgbClr val="E0A038"/>
                 </a:solidFill>
@@ -7349,7 +7613,7 @@
           <p:cNvSpPr>
             <a:extLst>
               <a:ext uri="smNativeData">
-                <pr:smNativeData xmlns:pr="smNativeData" xmlns="smNativeData" val="SMDATA_16_kRU2ahMAAAAlAAAAZAAAAA0AAAAAkAAAAEgAAACQAAAASAAAAAAAAAABAAAAAAAAAAEAAABQAAAAAAAAAAAA4D8AAAAAAADgPwAAAAAAAOA/AAAAAAAA4D8AAAAAAADgPwAAAAAAAOA/AAAAAAAA4D8AAAAAAADgPwAAAAAAAOA/AAAAAAAA4D8CAAAAjAAAAAAAAAAAAAAARHLEDP///wgAAAAAAAAAAAAAAAAAAAAAAAAAAAAAAAAAAAAAZAAAAAEAAABAAAAAAAAAAAAAAAAAAAAAAAAAAAAAAAAAAAAAAAAAAAAAAAAAAAAAAAAAAAAAAAAAAAAAAAAAAAAAAAAAAAAAAAAAAAAAAAAAAAAAAAAAAAAAAAAAAAAAFAAAADwAAAAAAAAAAAAAAAAAAAAPAAAAAQAAACMAAAAjAAAAIwAAAB4AAAAAAAAAZAAAAGQAAAAAAAAAZAAAAGQAAAAVAAAAYAAAAAAAAAAAAAAADwAAACADAAAAAAAAAAAAAAEAAACgMgAAVgcAAKr4//8BAAAAf39/AAEAAABkAAAAAAAAABQAAABAHwAAAAAAACYAAAAAAAAAwOD//wAAAAAmAAAAZAAAABYAAABMAAAAAAAAAAAAAAAEAAAAAAAAAAEAAADn5uYKAAAAACgAAAAoAAAAZAAAAGQAAAAAAAAAzMzMAAAAAABQAAAAUAAAAGQAAABkAAAAAAAAABcAAAAUAAAAAAAAAAAAAAD/fwAA/38AAAAAAAAJAAAABAAAAGD5//8eAAAAaAAAAAAAAAAAAAAAAAAAAAAAAAAAAAAAECcAABAnAAAAAAAAAAAAAAAAAAAAAAAAAAAAAAAAAAAAAAAAAAAAABQAAAAAAAAAwMD/AAAAAABkAAAAMgAAAAAAAABkAAAAAAAAAH9/fwAKAAAAIgAAABgAAAAAAAAAAAAAAAAAAAAAAAAAAAAAAAAAAAAkAAAAJAAAAAAAAAAHAAAAAAAAAAAAAAAAAAAAAAAAAAAAAAAAAAAAf39/ACUAAABYAAAAAAAAAAAAAAAAAAAAAAAAAAAAAAAAAAAAAAAAAAAAAAAAAAAAAAAAAAAAAAA/AAAAAAAAAKCGAQAAAAAAAAAAAAAAAAAMAAAAAQAAAAAAAAAAAAAAAAAAAB8AAABUAAAARHLEBf///wEAAAAAAAAAAAAAAAAAAAAAAAAAAAAAAAAAAAAAAAAAAAAAAAB/f38A5+bmA8zMzADAwP8Af39/AAAAAAAAAAAAAAAAAAAAAAAAAAAAIQAAABgAAAAUAAAAYAMAABAFAABAQQAAIAoAABAAAAAmAAAACAAAAP//////////MAAAABQAAAAAAAAAAAD//wAAAQAAAP//AAABAA=="/>
+                <pr:smNativeData xmlns:pr="smNativeData" xmlns="smNativeData" val="SMDATA_16_V2g2ahMAAAAlAAAAZAAAAA0AAAAAkAAAAEgAAACQAAAASAAAAAAAAAABAAAAAAAAAAEAAABQAAAAAAAAAAAA4D8AAAAAAADgPwAAAAAAAOA/AAAAAAAA4D8AAAAAAADgPwAAAAAAAOA/AAAAAAAA4D8AAAAAAADgPwAAAAAAAOA/AAAAAAAA4D8CAAAAjAAAAAAAAAAAAAAARHLEDP///wgAAAAAAAAAAAAAAAAAAAAAAAAAAAAAAAAAAAAAZAAAAAEAAABAAAAAAAAAAAAAAAAAAAAAAAAAAAAAAAAAAAAAAAAAAAAAAAAAAAAAAAAAAAAAAAAAAAAAAAAAAAAAAAAAAAAAAAAAAAAAAAAAAAAAAAAAAAAAAAAAAAAAFAAAADwAAAAAAAAAAAAAAAAAAAAPAAAAAQAAACMAAAAjAAAAIwAAAB4AAAAAAAAAZAAAAGQAAAAAAAAAZAAAAGQAAAAVAAAAYAAAAAAAAAAAAAAADwAAACADAAAAAAAAAAAAAAEAAACgMgAAVgcAAKr4//8BAAAAf39/AAEAAABkAAAAAAAAABQAAABAHwAAAAAAACYAAAAAAAAAwOD//wAAAAAmAAAAZAAAABYAAABMAAAAAAAAAAAAAAAEAAAAAAAAAAEAAADn5uYKAAAAACgAAAAoAAAAZAAAAGQAAAAAAAAAzMzMAAAAAABQAAAAUAAAAGQAAABkAAAAAAAAABcAAAAUAAAAAAAAAAAAAAD/fwAA/38AAAAAAAAJAAAABAAAAGD5//8eAAAAaAAAAAAAAAAAAAAAAAAAAAAAAAAAAAAAECcAABAnAAAAAAAAAAAAAAAAAAAAAAAAAAAAAAAAAAAAAAAAAAAAABQAAAAAAAAAwMD/AAAAAABkAAAAMgAAAAAAAABkAAAAAAAAAH9/fwAKAAAAIgAAABgAAAAAAAAAAAAAAAAAAAAAAAAAAAAAAAAAAAAkAAAAJAAAAAAAAAAHAAAAAAAAAAAAAAAAAAAAAAAAAAAAAAAAAAAAf39/ACUAAABYAAAAAAAAAAAAAAAAAAAAAAAAAAAAAAAAAAAAAAAAAAAAAAAAAAAAAAAAAAAAAAA/AAAAAAAAAKCGAQAAAAAAAAAAAAAAAAAMAAAAAQAAAAAAAAAAAAAAAAAAAB8AAABUAAAARHLEBf///wEAAAAAAAAAAAAAAAAAAAAAAAAAAAAAAAAAAAAAAAAAAAAAAAB/f38A5+bmA8zMzADAwP8Af39/AAAAAAAAAAAAAAAAAAAAAAAAAAAAIQAAABgAAAAUAAAAYAMAABAFAABAQQAAIAoAABAAAAAmAAAACAAAAP//////////MAAAABQAAAAAAAAAAAD//wAAAQAAAP//AAABAA=="/>
               </a:ext>
             </a:extLst>
           </p:cNvSpPr>
@@ -7430,7 +7694,7 @@
           <p:cNvSpPr>
             <a:extLst>
               <a:ext uri="smNativeData">
-                <pr:smNativeData xmlns:pr="smNativeData" xmlns="smNativeData" val="SMDATA_16_kRU2ahMAAAAlAAAAZAAAAA0AAAAAkAAAAEgAAACQAAAASAAAAAAAAAAAAAAAAAAAAAEAAABQAAAAAAAAAAAA4D8AAAAAAADgPwAAAAAAAOA/AAAAAAAA4D8AAAAAAADgPwAAAAAAAOA/AAAAAAAA4D8AAAAAAADgPwAAAAAAAOA/AAAAAAAA4D8CAAAAjAAAAAAAAAAAAAAARHLEDP///wgAAAAAAAAAAAAAAAAAAAAAAAAAAAAAAAAAAAAAZAAAAAEAAABAAAAAAAAAAAAAAAAAAAAAAAAAAAAAAAAAAAAAAAAAAAAAAAAAAAAAAAAAAAAAAAAAAAAAAAAAAAAAAAAAAAAAAAAAAAAAAAAAAAAAAAAAAAAAAAAAAAAAFAAAADwAAAAAAAAAAAAAAAAAAAAPAAAAAQAAACMAAAAjAAAAIwAAAB4AAAAAAAAAZAAAAGQAAAAAAAAAZAAAAGQAAAAVAAAAYAAAAAAAAAAAAAAADwAAACADAAAAAAAAAAAAAAEAAACgMgAAVgcAAKr4//8BAAAAf39/AAEAAABkAAAAAAAAABQAAABAHwAAAAAAACYAAAAAAAAAwOD//wAAAAAmAAAAZAAAABYAAABMAAAAAAAAAAAAAAAEAAAAAAAAAAEAAADn5uYKAAAAACgAAAAoAAAAZAAAAGQAAAAAAAAAzMzMAAAAAABQAAAAUAAAAGQAAABkAAAAAAAAABcAAAAUAAAAAAAAAAAAAAD/fwAA/38AAAAAAAAJAAAABAAAAAAAAAAeAAAAaAAAAAAAAAAAAAAAAAAAAAAAAAAAAAAAECcAABAnAAAAAAAAAAAAAAAAAAAAAAAAAAAAAAAAAAAAAAAAAAAAABQAAAAAAAAAwMD/AAAAAABkAAAAMgAAAAAAAABkAAAAAAAAAH9/fwAKAAAAIgAAABgAAAAAAAAAAAAAAAAAAAAAAAAAAAAAAAAAAAAkAAAAJAAAAAAAAAAHAAAAAAAAAAAAAAAAAAAAAAAAAAAAAAAAAAAAf39/ACUAAABYAAAAAAAAAAAAAAAAAAAAAAAAAAAAAAAAAAAAAAAAAAAAAAAAAAAAAAAAAAAAAAA/AAAAAAAAAKCGAQAAAAAAAAAAAAAAAAAMAAAAAQAAAAAAAAAAAAAAAAAAAB8AAABUAAAARHLEBf///wEAAAAAAAAAAAAAAAAAAAAAAAAAAAAAAAAAAAAAAAAAAAAAAAB/f38A5+bmA8zMzADAwP8Af39/AAAAAAAAAAAAAAAAAAAAAAAAAAAAIQAAABgAAAAUAAAAYAMAAGAMAADgRgAAkCQAAAAAAAAmAAAACAAAAP//////////MAAAABQAAAAAAAAAAAD//wAAAQAAAP//AAABAA=="/>
+                <pr:smNativeData xmlns:pr="smNativeData" xmlns="smNativeData" val="SMDATA_16_V2g2ahMAAAAlAAAAZAAAAA0AAAAAkAAAAEgAAACQAAAASAAAAAAAAAAAAAAAAAAAAAEAAABQAAAAAAAAAAAA4D8AAAAAAADgPwAAAAAAAOA/AAAAAAAA4D8AAAAAAADgPwAAAAAAAOA/AAAAAAAA4D8AAAAAAADgPwAAAAAAAOA/AAAAAAAA4D8CAAAAjAAAAAAAAAAAAAAARHLEDP///wgAAAAAAAAAAAAAAAAAAAAAAAAAAAAAAAAAAAAAZAAAAAEAAABAAAAAAAAAAAAAAAAAAAAAAAAAAAAAAAAAAAAAAAAAAAAAAAAAAAAAAAAAAAAAAAAAAAAAAAAAAAAAAAAAAAAAAAAAAAAAAAAAAAAAAAAAAAAAAAAAAAAAFAAAADwAAAAAAAAAAAAAAAAAAAAPAAAAAQAAACMAAAAjAAAAIwAAAB4AAAAAAAAAZAAAAGQAAAAAAAAAZAAAAGQAAAAVAAAAYAAAAAAAAAAAAAAADwAAACADAAAAAAAAAAAAAAEAAACgMgAAVgcAAKr4//8BAAAAf39/AAEAAABkAAAAAAAAABQAAABAHwAAAAAAACYAAAAAAAAAwOD//wAAAAAmAAAAZAAAABYAAABMAAAAAAAAAAAAAAAEAAAAAAAAAAEAAADn5uYKAAAAACgAAAAoAAAAZAAAAGQAAAAAAAAAzMzMAAAAAABQAAAAUAAAAGQAAABkAAAAAAAAABcAAAAUAAAAAAAAAAAAAAD/fwAA/38AAAAAAAAJAAAABAAAAAAAAAAeAAAAaAAAAAAAAAAAAAAAAAAAAAAAAAAAAAAAECcAABAnAAAAAAAAAAAAAAAAAAAAAAAAAAAAAAAAAAAAAAAAAAAAABQAAAAAAAAAwMD/AAAAAABkAAAAMgAAAAAAAABkAAAAAAAAAH9/fwAKAAAAIgAAABgAAAAAAAAAAAAAAAAAAAAAAAAAAAAAAAAAAAAkAAAAJAAAAAAAAAAHAAAAAAAAAAAAAAAAAAAAAAAAAAAAAAAAAAAAf39/ACUAAABYAAAAAAAAAAAAAAAAAAAAAAAAAAAAAAAAAAAAAAAAAAAAAAAAAAAAAAAAAAAAAAA/AAAAAAAAAKCGAQAAAAAAAAAAAAAAAAAMAAAAAQAAAAAAAAAAAAAAAAAAAB8AAABUAAAARHLEBf///wEAAAAAAAAAAAAAAAAAAAAAAAAAAAAAAAAAAAAAAAAAAAAAAAB/f38A5+bmA8zMzADAwP8Af39/AAAAAAAAAAAAAAAAAAAAAAAAAAAAIQAAABgAAAAUAAAAYAMAAGAMAADgRgAAkCQAABAAAAAmAAAACAAAAP//////////MAAAABQAAAAAAAAAAAD//wAAAQAAAP//AAABAA=="/>
               </a:ext>
             </a:extLst>
           </p:cNvSpPr>
@@ -7869,7 +8133,7 @@
           <p:cNvSpPr>
             <a:extLst>
               <a:ext uri="smNativeData">
-                <pr:smNativeData xmlns:pr="smNativeData" xmlns="smNativeData" val="SMDATA_16_kRU2ahMAAAAlAAAAZAAAAA0AAAAAkAAAAEgAAACQAAAASAAAAAAAAAABAAAAAAAAAAEAAABQAAAAAAAAAAAA4D8AAAAAAADgPwAAAAAAAOA/AAAAAAAA4D8AAAAAAADgPwAAAAAAAOA/AAAAAAAA4D8AAAAAAADgPwAAAAAAAOA/AAAAAAAA4D8CAAAAjAAAAAAAAAAAAAAARHLEDP///wgAAAAAAAAAAAAAAAAAAAAAAAAAAAAAAAAAAAAAZAAAAAEAAABAAAAAAAAAAAAAAAAAAAAAAAAAAAAAAAAAAAAAAAAAAAAAAAAAAAAAAAAAAAAAAAAAAAAAAAAAAAAAAAAAAAAAAAAAAAAAAAAAAAAAAAAAAAAAAAAAAAAAFAAAADwAAAAAAAAAAAAAAAAAAAAPAAAAAQAAACMAAAAjAAAAIwAAAB4AAAAAAAAAZAAAAGQAAAAAAAAAZAAAAGQAAAAVAAAAYAAAAAAAAAAAAAAADwAAACADAAAAAAAAAAAAAAEAAACgMgAAVgcAAKr4//8BAAAAf39/AAEAAABkAAAAAAAAABQAAABAHwAAAAAAACYAAAAAAAAAwOD//wAAAAAmAAAAZAAAABYAAABMAAAAAAAAAAAAAAAEAAAAAAAAAAEAAADn5uYKAAAAACgAAAAoAAAAZAAAAGQAAAAAAAAAzMzMAAAAAABQAAAAUAAAAGQAAABkAAAAAAAAABcAAAAUAAAAAAAAAAAAAAD/fwAA/38AAAAAAAAJAAAABAAAAAYLBgweAAAAaAAAAAAAAAAAAAAAAAAAAAAAAAAAAAAAECcAABAnAAAAAAAAAAAAAAAAAAAAAAAAAAAAAAAAAAAAAAAAAAAAABQAAAAAAAAAwMD/AAAAAABkAAAAMgAAAAAAAABkAAAAAAAAAH9/fwAKAAAAIgAAABgAAAAAAAAAAAAAAAAAAAAAAAAAAAAAAAAAAAAkAAAAJAAAAAAAAAAHAAAAAAAAAAAAAAAAAAAAAAAAAAAAAAAAAAAAf39/ACUAAABYAAAAAAAAAAAAAAAAAAAAAAAAAAAAAAAAAAAAAAAAAAAAAAAAAAAAAAAAAAAAAAA/AAAAAAAAAKCGAQAAAAAAAAAAAAAAAAAMAAAAAQAAAAAAAAAAAAAAAAAAAB8AAABUAAAARHLEBf///wEAAAAAAAAAAAAAAAAAAAAAAAAAAAAAAAAAAAAAAAAAAAAAAAB/f38A5+bmA8zMzADAwP8Af39/AAAAAAAAAAAAAAAAAAAAAAAAAAAAIQAAABgAAAAUAAAAYAMAALAlAABAQQAA8CcAABAAAAAmAAAACAAAAP//////////MAAAABQAAAAAAAAAAAD//wAAAQAAAP//AAABAA=="/>
+                <pr:smNativeData xmlns:pr="smNativeData" xmlns="smNativeData" val="SMDATA_16_V2g2ahMAAAAlAAAAZAAAAA0AAAAAkAAAAEgAAACQAAAASAAAAAAAAAABAAAAAAAAAAEAAABQAAAAAAAAAAAA4D8AAAAAAADgPwAAAAAAAOA/AAAAAAAA4D8AAAAAAADgPwAAAAAAAOA/AAAAAAAA4D8AAAAAAADgPwAAAAAAAOA/AAAAAAAA4D8CAAAAjAAAAAAAAAAAAAAARHLEDP///wgAAAAAAAAAAAAAAAAAAAAAAAAAAAAAAAAAAAAAZAAAAAEAAABAAAAAAAAAAAAAAAAAAAAAAAAAAAAAAAAAAAAAAAAAAAAAAAAAAAAAAAAAAAAAAAAAAAAAAAAAAAAAAAAAAAAAAAAAAAAAAAAAAAAAAAAAAAAAAAAAAAAAFAAAADwAAAAAAAAAAAAAAAAAAAAPAAAAAQAAACMAAAAjAAAAIwAAAB4AAAAAAAAAZAAAAGQAAAAAAAAAZAAAAGQAAAAVAAAAYAAAAAAAAAAAAAAADwAAACADAAAAAAAAAAAAAAEAAACgMgAAVgcAAKr4//8BAAAAf39/AAEAAABkAAAAAAAAABQAAABAHwAAAAAAACYAAAAAAAAAwOD//wAAAAAmAAAAZAAAABYAAABMAAAAAAAAAAAAAAAEAAAAAAAAAAEAAADn5uYKAAAAACgAAAAoAAAAZAAAAGQAAAAAAAAAzMzMAAAAAABQAAAAUAAAAGQAAABkAAAAAAAAABcAAAAUAAAAAAAAAAAAAAD/fwAA/38AAAAAAAAJAAAABAAAAAYLBgweAAAAaAAAAAAAAAAAAAAAAAAAAAAAAAAAAAAAECcAABAnAAAAAAAAAAAAAAAAAAAAAAAAAAAAAAAAAAAAAAAAAAAAABQAAAAAAAAAwMD/AAAAAABkAAAAMgAAAAAAAABkAAAAAAAAAH9/fwAKAAAAIgAAABgAAAAAAAAAAAAAAAAAAAAAAAAAAAAAAAAAAAAkAAAAJAAAAAAAAAAHAAAAAAAAAAAAAAAAAAAAAAAAAAAAAAAAAAAAf39/ACUAAABYAAAAAAAAAAAAAAAAAAAAAAAAAAAAAAAAAAAAAAAAAAAAAAAAAAAAAAAAAAAAAAA/AAAAAAAAAKCGAQAAAAAAAAAAAAAAAAAMAAAAAQAAAAAAAAAAAAAAAAAAAB8AAABUAAAARHLEBf///wEAAAAAAAAAAAAAAAAAAAAAAAAAAAAAAAAAAAAAAAAAAAAAAAB/f38A5+bmA8zMzADAwP8Af39/AAAAAAAAAAAAAAAAAAAAAAAAAAAAIQAAABgAAAAUAAAAYAMAALAlAABAQQAA8CcAABAAAAAmAAAACAAAAP//////////MAAAABQAAAAAAAAAAAD//wAAAQAAAP//AAABAA=="/>
               </a:ext>
             </a:extLst>
           </p:cNvSpPr>
@@ -7962,7 +8226,7 @@
           <p:cNvSpPr>
             <a:extLst>
               <a:ext uri="smNativeData">
-                <pr:smNativeData xmlns:pr="smNativeData" xmlns="smNativeData" val="SMDATA_16_kRU2ahMAAAAlAAAAZAAAAA0AAAAAkAAAAEgAAACQAAAASAAAAAAAAAABAAAAAAAAAAEAAABQAAAAAAAAAAAA4D8AAAAAAADgPwAAAAAAAOA/AAAAAAAA4D8AAAAAAADgPwAAAAAAAOA/AAAAAAAA4D8AAAAAAADgPwAAAAAAAOA/AAAAAAAA4D8CAAAAjAAAAAAAAAAAAAAARHLEDP///wgAAAAAAAAAAAAAAAAAAAAAAAAAAAAAAAAAAAAAZAAAAAEAAABAAAAAAAAAAAAAAAAAAAAAAAAAAAAAAAAAAAAAAAAAAAAAAAAAAAAAAAAAAAAAAAAAAAAAAAAAAAAAAAAAAAAAAAAAAAAAAAAAAAAAAAAAAAAAAAAAAAAAFAAAADwAAAAAAAAAAAAAAAAAAAAPAAAAAQAAACMAAAAjAAAAIwAAAB4AAAAAAAAAZAAAAGQAAAAAAAAAZAAAAGQAAAAVAAAAYAAAAAAAAAAAAAAADwAAACADAAAAAAAAAAAAAAEAAACgMgAAVgcAAKr4//8BAAAAf39/AAEAAABkAAAAAAAAABQAAABAHwAAAAAAACYAAAAAAAAAwOD//wAAAAAmAAAAZAAAABYAAABMAAAAAAAAAAAAAAAEAAAAAAAAAAEAAADn5uYKAAAAACgAAAAoAAAAZAAAAGQAAAAAAAAAzMzMAAAAAABQAAAAUAAAAGQAAABkAAAAAAAAABcAAAAUAAAAAAAAAAAAAAD/fwAA/38AAAAAAAAJAAAABAAAAAAAAAAeAAAAaAAAAAAAAAAAAAAAAAAAAAAAAAAAAAAAECcAABAnAAAAAAAAAAAAAAAAAAAAAAAAAAAAAAAAAAAAAAAAAAAAABQAAAAAAAAAwMD/AAAAAABkAAAAMgAAAAAAAABkAAAAAAAAAH9/fwAKAAAAIgAAABgAAAAAAAAAAAAAAAAAAAAAAAAAAAAAAAAAAAAkAAAAJAAAAAAAAAAHAAAAAAAAAAAAAAAAAAAAAAAAAAAAAAAAAAAAf39/ACUAAABYAAAAAAAAAAAAAAAAAAAAAAAAAAAAAAAAAAAAAAAAAAAAAAAAAAAAAAAAAAAAAAA/AAAAAAAAAKCGAQAAAAAAAAAAAAAAAAAMAAAAAQAAAAAAAAAAAAAAAAAAAB8AAABUAAAARHLEBf///wEAAAAAAAAAAAAAAAAAAAAAAAAAAAAAAAAAAAAAAAAAAAAAAAB/f38A5+bmA8zMzADAwP8Af39/AAAAAAAAAAAAAAAAAAAAAAAAAAAAIQAAABgAAAAUAAAAYAMAACABAACgRwAA0AIAABAAAAAmAAAACAAAAP//////////MAAAABQAAAAAAAAAAAD//wAAAQAAAP//AAABAA=="/>
+                <pr:smNativeData xmlns:pr="smNativeData" xmlns="smNativeData" val="SMDATA_16_V2g2ahMAAAAlAAAAZAAAAA0AAAAAkAAAAEgAAACQAAAASAAAAAAAAAABAAAAAAAAAAEAAABQAAAAAAAAAAAA4D8AAAAAAADgPwAAAAAAAOA/AAAAAAAA4D8AAAAAAADgPwAAAAAAAOA/AAAAAAAA4D8AAAAAAADgPwAAAAAAAOA/AAAAAAAA4D8CAAAAjAAAAAAAAAAAAAAARHLEDP///wgAAAAAAAAAAAAAAAAAAAAAAAAAAAAAAAAAAAAAZAAAAAEAAABAAAAAAAAAAAAAAAAAAAAAAAAAAAAAAAAAAAAAAAAAAAAAAAAAAAAAAAAAAAAAAAAAAAAAAAAAAAAAAAAAAAAAAAAAAAAAAAAAAAAAAAAAAAAAAAAAAAAAFAAAADwAAAAAAAAAAAAAAAAAAAAPAAAAAQAAACMAAAAjAAAAIwAAAB4AAAAAAAAAZAAAAGQAAAAAAAAAZAAAAGQAAAAVAAAAYAAAAAAAAAAAAAAADwAAACADAAAAAAAAAAAAAAEAAACgMgAAVgcAAKr4//8BAAAAf39/AAEAAABkAAAAAAAAABQAAABAHwAAAAAAACYAAAAAAAAAwOD//wAAAAAmAAAAZAAAABYAAABMAAAAAAAAAAAAAAAEAAAAAAAAAAEAAADn5uYKAAAAACgAAAAoAAAAZAAAAGQAAAAAAAAAzMzMAAAAAABQAAAAUAAAAGQAAABkAAAAAAAAABcAAAAUAAAAAAAAAAAAAAD/fwAA/38AAAAAAAAJAAAABAAAAAAAAAAeAAAAaAAAAAAAAAAAAAAAAAAAAAAAAAAAAAAAECcAABAnAAAAAAAAAAAAAAAAAAAAAAAAAAAAAAAAAAAAAAAAAAAAABQAAAAAAAAAwMD/AAAAAABkAAAAMgAAAAAAAABkAAAAAAAAAH9/fwAKAAAAIgAAABgAAAAAAAAAAAAAAAAAAAAAAAAAAAAAAAAAAAAkAAAAJAAAAAAAAAAHAAAAAAAAAAAAAAAAAAAAAAAAAAAAAAAAAAAAf39/ACUAAABYAAAAAAAAAAAAAAAAAAAAAAAAAAAAAAAAAAAAAAAAAAAAAAAAAAAAAAAAAAAAAAA/AAAAAAAAAKCGAQAAAAAAAAAAAAAAAAAMAAAAAQAAAAAAAAAAAAAAAAAAAB8AAABUAAAARHLEBf///wEAAAAAAAAAAAAAAAAAAAAAAAAAAAAAAAAAAAAAAAAAAAAAAAB/f38A5+bmA8zMzADAwP8Af39/AAAAAAAAAAAAAAAAAAAAAAAAAAAAIQAAABgAAAAUAAAAYAMAACABAACgRwAA0AIAABAAAAAmAAAACAAAAP//////////MAAAABQAAAAAAAAAAAD//wAAAQAAAP//AAABAA=="/>
               </a:ext>
             </a:extLst>
           </p:cNvSpPr>
@@ -7990,7 +8254,7 @@
               <a:buNone/>
             </a:pPr>
             <a:r>
-              <a:rPr lang="en-us" sz="1200" b="1" cap="none" spc="40">
+              <a:rPr lang="en-us" sz="1200" b="1" cap="none" spc="8">
                 <a:solidFill>
                   <a:srgbClr val="E0A038"/>
                 </a:solidFill>
@@ -7998,7 +8262,7 @@
               <a:t>O </a:t>
             </a:r>
             <a:r>
-              <a:rPr lang="en-us" sz="1200" b="1" cap="none" spc="40">
+              <a:rPr lang="en-us" sz="1200" b="1" cap="none" spc="8">
                 <a:solidFill>
                   <a:srgbClr val="E0A038"/>
                 </a:solidFill>
@@ -8015,7 +8279,7 @@
           <p:cNvSpPr>
             <a:extLst>
               <a:ext uri="smNativeData">
-                <pr:smNativeData xmlns:pr="smNativeData" xmlns="smNativeData" val="SMDATA_16_kRU2ahMAAAAlAAAAZAAAAA0AAAAAkAAAAEgAAACQAAAASAAAAAAAAAABAAAAAAAAAAEAAABQAAAAAAAAAAAA4D8AAAAAAADgPwAAAAAAAOA/AAAAAAAA4D8AAAAAAADgPwAAAAAAAOA/AAAAAAAA4D8AAAAAAADgPwAAAAAAAOA/AAAAAAAA4D8CAAAAjAAAAAAAAAAAAAAARHLEDP///wgAAAAAAAAAAAAAAAAAAAAAAAAAAAAAAAAAAAAAZAAAAAEAAABAAAAAAAAAAAAAAAAAAAAAAAAAAAAAAAAAAAAAAAAAAAAAAAAAAAAAAAAAAAAAAAAAAAAAAAAAAAAAAAAAAAAAAAAAAAAAAAAAAAAAAAAAAAAAAAAAAAAAFAAAADwAAAAAAAAAAAAAAAAAAAAPAAAAAQAAACMAAAAjAAAAIwAAAB4AAAAAAAAAZAAAAGQAAAAAAAAAZAAAAGQAAAAVAAAAYAAAAAAAAAAAAAAADwAAACADAAAAAAAAAAAAAAEAAACgMgAAVgcAAKr4//8BAAAAf39/AAEAAABkAAAAAAAAABQAAABAHwAAAAAAACYAAAAAAAAAwOD//wAAAAAmAAAAZAAAABYAAABMAAAAAAAAAAAAAAAEAAAAAAAAAAEAAADn5uYKAAAAACgAAAAoAAAAZAAAAGQAAAAAAAAAzMzMAAAAAABQAAAAUAAAAGQAAABkAAAAAAAAABcAAAAUAAAAAAAAAAAAAAD/fwAA/38AAAAAAAAJAAAABAAAAAAAAAAeAAAAaAAAAAAAAAAAAAAAAAAAAAAAAAAAAAAAECcAABAnAAAAAAAAAAAAAAAAAAAAAAAAAAAAAAAAAAAAAAAAAAAAABQAAAAAAAAAwMD/AAAAAABkAAAAMgAAAAAAAABkAAAAAAAAAH9/fwAKAAAAIgAAABgAAAAAAAAAAAAAAAAAAAAAAAAAAAAAAAAAAAAkAAAAJAAAAAAAAAAHAAAAAAAAAAAAAAAAAAAAAAAAAAAAAAAAAAAAf39/ACUAAABYAAAAAAAAAAAAAAAAAAAAAAAAAAAAAAAAAAAAAAAAAAAAAAAAAAAAAAAAAAAAAAA/AAAAAAAAAKCGAQAAAAAAAAAAAAAAAAAMAAAAAQAAAAAAAAAAAAAAAAAAAB8AAABUAAAARHLEBf///wEAAAAAAAAAAAAAAAAAAAAAAAAAAAAAAAAAAAAAAAAAAAAAAAB/f38A5+bmA8zMzADAwP8Af39/AAAAAAAAAAAAAAAAAAAAAAAAAAAAIQAAABgAAAAUAAAAYAMAAF0CAACgRwAA3QYAABAAAAAmAAAACAAAAP//////////MAAAABQAAAAAAAAAAAD//wAAAQAAAP//AAABAA=="/>
+                <pr:smNativeData xmlns:pr="smNativeData" xmlns="smNativeData" val="SMDATA_16_V2g2ahMAAAAlAAAAZAAAAA0AAAAAkAAAAEgAAACQAAAASAAAAAAAAAABAAAAAAAAAAEAAABQAAAAAAAAAAAA4D8AAAAAAADgPwAAAAAAAOA/AAAAAAAA4D8AAAAAAADgPwAAAAAAAOA/AAAAAAAA4D8AAAAAAADgPwAAAAAAAOA/AAAAAAAA4D8CAAAAjAAAAAAAAAAAAAAARHLEDP///wgAAAAAAAAAAAAAAAAAAAAAAAAAAAAAAAAAAAAAZAAAAAEAAABAAAAAAAAAAAAAAAAAAAAAAAAAAAAAAAAAAAAAAAAAAAAAAAAAAAAAAAAAAAAAAAAAAAAAAAAAAAAAAAAAAAAAAAAAAAAAAAAAAAAAAAAAAAAAAAAAAAAAFAAAADwAAAAAAAAAAAAAAAAAAAAPAAAAAQAAACMAAAAjAAAAIwAAAB4AAAAAAAAAZAAAAGQAAAAAAAAAZAAAAGQAAAAVAAAAYAAAAAAAAAAAAAAADwAAACADAAAAAAAAAAAAAAEAAACgMgAAVgcAAKr4//8BAAAAf39/AAEAAABkAAAAAAAAABQAAABAHwAAAAAAACYAAAAAAAAAwOD//wAAAAAmAAAAZAAAABYAAABMAAAAAAAAAAAAAAAEAAAAAAAAAAEAAADn5uYKAAAAACgAAAAoAAAAZAAAAGQAAAAAAAAAzMzMAAAAAABQAAAAUAAAAGQAAABkAAAAAAAAABcAAAAUAAAAAAAAAAAAAAD/fwAA/38AAAAAAAAJAAAABAAAAAAAAAAeAAAAaAAAAAAAAAAAAAAAAAAAAAAAAAAAAAAAECcAABAnAAAAAAAAAAAAAAAAAAAAAAAAAAAAAAAAAAAAAAAAAAAAABQAAAAAAAAAwMD/AAAAAABkAAAAMgAAAAAAAABkAAAAAAAAAH9/fwAKAAAAIgAAABgAAAAAAAAAAAAAAAAAAAAAAAAAAAAAAAAAAAAkAAAAJAAAAAAAAAAHAAAAAAAAAAAAAAAAAAAAAAAAAAAAAAAAAAAAf39/ACUAAABYAAAAAAAAAAAAAAAAAAAAAAAAAAAAAAAAAAAAAAAAAAAAAAAAAAAAAAAAAAAAAAA/AAAAAAAAAKCGAQAAAAAAAAAAAAAAAAAMAAAAAQAAAAAAAAAAAAAAAAAAAB8AAABUAAAARHLEBf///wEAAAAAAAAAAAAAAAAAAAAAAAAAAAAAAAAAAAAAAAAAAAAAAAB/f38A5+bmA8zMzADAwP8Af39/AAAAAAAAAAAAAAAAAAAAAAAAAAAAIQAAABgAAAAUAAAAYAMAAF0CAACgRwAA3QYAABAAAAAmAAAACAAAAP//////////MAAAABQAAAAAAAAAAAD//wAAAQAAAP//AAABAA=="/>
               </a:ext>
             </a:extLst>
           </p:cNvSpPr>
@@ -8085,7 +8349,7 @@
           <p:cNvSpPr>
             <a:extLst>
               <a:ext uri="smNativeData">
-                <pr:smNativeData xmlns:pr="smNativeData" xmlns="smNativeData" val="SMDATA_16_kRU2ahMAAAAlAAAAZAAAAA0AAAAAkAAAAEgAAACQAAAASAAAAAAAAAAAAAAAAAAAAAEAAABQAAAAAAAAAAAA4D8AAAAAAADgPwAAAAAAAOA/AAAAAAAA4D8AAAAAAADgPwAAAAAAAOA/AAAAAAAA4D8AAAAAAADgPwAAAAAAAOA/AAAAAAAA4D8CAAAAjAAAAAAAAAAAAAAARHLEDP///wgAAAAAAAAAAAAAAAAAAAAAAAAAAAAAAAAAAAAAZAAAAAEAAABAAAAAAAAAAAAAAAAAAAAAAAAAAAAAAAAAAAAAAAAAAAAAAAAAAAAAAAAAAAAAAAAAAAAAAAAAAAAAAAAAAAAAAAAAAAAAAAAAAAAAAAAAAAAAAAAAAAAAFAAAADwAAAAAAAAAAAAAAAAAAAAPAAAAAQAAACMAAAAjAAAAIwAAAB4AAAAAAAAAZAAAAGQAAAAAAAAAZAAAAGQAAAAVAAAAYAAAAAAAAAAAAAAADwAAACADAAAAAAAAAAAAAAEAAACgMgAAVgcAAKr4//8BAAAAf39/AAEAAABkAAAAAAAAABQAAABAHwAAAAAAACYAAAAAAAAAwOD//wAAAAAmAAAAZAAAABYAAABMAAAAAAAAAAAAAAAEAAAAAAAAAAEAAADn5uYKAAAAACgAAAAoAAAAZAAAAGQAAAAAAAAAzMzMAAAAAABQAAAAUAAAAGQAAABkAAAAAAAAABcAAAAUAAAAAAAAAAAAAAD/fwAA/38AAAAAAAAJAAAABAAAAAAAAAAeAAAAaAAAAAAAAAAAAAAAAAAAAAAAAAAAAAAAECcAABAnAAAAAAAAAAAAAAAAAAAAAAAAAAAAAAAAAAAAAAAAAAAAABQAAAAAAAAAwMD/AAAAAABkAAAAMgAAAAAAAABkAAAAAAAAAH9/fwAKAAAAIgAAABgAAAAAAAAAAAAAAAAAAAAAAAAAAAAAAAAAAAAkAAAAJAAAAAAAAAAHAAAAAAAAAAAAAAAAAAAAAAAAAAAAAAAAAAAAf39/ACUAAABYAAAAAAAAAAAAAAAAAAAAAAAAAAAAAAAAAAAAAAAAAAAAAAAAAAAAAAAAAAAAAAA/AAAAAAAAAKCGAQAAAAAAAAAAAAAAAAAMAAAAAQAAAAAAAAAAAAAAAAAAAB8AAABUAAAARHLEBf///wEAAAAAAAAAAAAAAAAAAAAAAAAAAAAAAAAAAAAAAAAAAAAAAAB/f38A5+bmA8zMzADAwP8Af39/AAAAAAAAAAAAAAAAAAAAAAAAAAAAIQAAABgAAAAUAAAAYAMAAAAJAACAKAAAUCIAABAAAAAmAAAACAAAAP//////////MAAAABQAAAAAAAAAAAD//wAAAQAAAP//AAABAA=="/>
+                <pr:smNativeData xmlns:pr="smNativeData" xmlns="smNativeData" val="SMDATA_16_V2g2ahMAAAAlAAAAZAAAAA0AAAAAkAAAAEgAAACQAAAASAAAAAAAAAAAAAAAAAAAAAEAAABQAAAAAAAAAAAA4D8AAAAAAADgPwAAAAAAAOA/AAAAAAAA4D8AAAAAAADgPwAAAAAAAOA/AAAAAAAA4D8AAAAAAADgPwAAAAAAAOA/AAAAAAAA4D8CAAAAjAAAAAAAAAAAAAAARHLEDP///wgAAAAAAAAAAAAAAAAAAAAAAAAAAAAAAAAAAAAAZAAAAAEAAABAAAAAAAAAAAAAAAAAAAAAAAAAAAAAAAAAAAAAAAAAAAAAAAAAAAAAAAAAAAAAAAAAAAAAAAAAAAAAAAAAAAAAAAAAAAAAAAAAAAAAAAAAAAAAAAAAAAAAFAAAADwAAAAAAAAAAAAAAAAAAAAPAAAAAQAAACMAAAAjAAAAIwAAAB4AAAAAAAAAZAAAAGQAAAAAAAAAZAAAAGQAAAAVAAAAYAAAAAAAAAAAAAAADwAAACADAAAAAAAAAAAAAAEAAACgMgAAVgcAAKr4//8BAAAAf39/AAEAAABkAAAAAAAAABQAAABAHwAAAAAAACYAAAAAAAAAwOD//wAAAAAmAAAAZAAAABYAAABMAAAAAAAAAAAAAAAEAAAAAAAAAAEAAADn5uYKAAAAACgAAAAoAAAAZAAAAGQAAAAAAAAAzMzMAAAAAABQAAAAUAAAAGQAAABkAAAAAAAAABcAAAAUAAAAAAAAAAAAAAD/fwAA/38AAAAAAAAJAAAABAAAAAAAAAAeAAAAaAAAAAAAAAAAAAAAAAAAAAAAAAAAAAAAECcAABAnAAAAAAAAAAAAAAAAAAAAAAAAAAAAAAAAAAAAAAAAAAAAABQAAAAAAAAAwMD/AAAAAABkAAAAMgAAAAAAAABkAAAAAAAAAH9/fwAKAAAAIgAAABgAAAAAAAAAAAAAAAAAAAAAAAAAAAAAAAAAAAAkAAAAJAAAAAAAAAAHAAAAAAAAAAAAAAAAAAAAAAAAAAAAAAAAAAAAf39/ACUAAABYAAAAAAAAAAAAAAAAAAAAAAAAAAAAAAAAAAAAAAAAAAAAAAAAAAAAAAAAAAAAAAA/AAAAAAAAAKCGAQAAAAAAAAAAAAAAAAAMAAAAAQAAAAAAAAAAAAAAAAAAAB8AAABUAAAARHLEBf///wEAAAAAAAAAAAAAAAAAAAAAAAAAAAAAAAAAAAAAAAAAAAAAAAB/f38A5+bmA8zMzADAwP8Af39/AAAAAAAAAAAAAAAAAAAAAAAAAAAAIQAAABgAAAAUAAAAYAMAAAAJAACAKAAAUCIAAAAAAAAmAAAACAAAAP//////////MAAAABQAAAAAAAAAAAD//wAAAQAAAP//AAABAA=="/>
               </a:ext>
             </a:extLst>
           </p:cNvSpPr>
@@ -8242,175 +8506,7 @@
                   <a:srgbClr val="283441"/>
                 </a:solidFill>
               </a:rPr>
-              <a:t>tipo de </a:t>
-            </a:r>
-            <a:r>
-              <a:rPr lang="en-us" sz="1600" cap="none">
-                <a:solidFill>
-                  <a:srgbClr val="283441"/>
-                </a:solidFill>
-              </a:rPr>
-              <a:t>crime.Isso </a:t>
-            </a:r>
-            <a:r>
-              <a:rPr lang="en-us" sz="1600" cap="none">
-                <a:solidFill>
-                  <a:srgbClr val="283441"/>
-                </a:solidFill>
-              </a:rPr>
-              <a:t>mede </a:t>
-            </a:r>
-            <a:r>
-              <a:rPr lang="en-us" sz="1600" cap="none">
-                <a:solidFill>
-                  <a:srgbClr val="283441"/>
-                </a:solidFill>
-              </a:rPr>
-              <a:t>onde </a:t>
-            </a:r>
-            <a:r>
-              <a:rPr lang="en-us" sz="1600" cap="none">
-                <a:solidFill>
-                  <a:srgbClr val="283441"/>
-                </a:solidFill>
-              </a:rPr>
-              <a:t>há </a:t>
-            </a:r>
-            <a:r>
-              <a:rPr lang="en-us" sz="1600" cap="none">
-                <a:solidFill>
-                  <a:srgbClr val="283441"/>
-                </a:solidFill>
-              </a:rPr>
-              <a:t>mais </a:t>
-            </a:r>
-            <a:r>
-              <a:rPr lang="en-us" sz="1600" cap="none">
-                <a:solidFill>
-                  <a:srgbClr val="283441"/>
-                </a:solidFill>
-              </a:rPr>
-              <a:t>registro e </a:t>
-            </a:r>
-            <a:r>
-              <a:rPr lang="en-us" sz="1600" cap="none">
-                <a:solidFill>
-                  <a:srgbClr val="283441"/>
-                </a:solidFill>
-              </a:rPr>
-              <a:t>circulação de </a:t>
-            </a:r>
-            <a:r>
-              <a:rPr lang="en-us" sz="1600" cap="none">
-                <a:solidFill>
-                  <a:srgbClr val="283441"/>
-                </a:solidFill>
-              </a:rPr>
-              <a:t>pessoas — </a:t>
-            </a:r>
-            <a:r>
-              <a:rPr lang="en-us" sz="1600" cap="none">
-                <a:solidFill>
-                  <a:srgbClr val="283441"/>
-                </a:solidFill>
-              </a:rPr>
-              <a:t>não o </a:t>
-            </a:r>
-            <a:r>
-              <a:rPr lang="en-us" sz="1600" cap="none">
-                <a:solidFill>
-                  <a:srgbClr val="283441"/>
-                </a:solidFill>
-              </a:rPr>
-              <a:t>risco de </a:t>
-            </a:r>
-            <a:r>
-              <a:rPr lang="en-us" sz="1600" cap="none">
-                <a:solidFill>
-                  <a:srgbClr val="283441"/>
-                </a:solidFill>
-              </a:rPr>
-              <a:t>quem </a:t>
-            </a:r>
-            <a:r>
-              <a:rPr lang="en-us" sz="1600" cap="none">
-                <a:solidFill>
-                  <a:srgbClr val="283441"/>
-                </a:solidFill>
-              </a:rPr>
-              <a:t>mora </a:t>
-            </a:r>
-            <a:r>
-              <a:rPr lang="en-us" sz="1600" cap="none">
-                <a:solidFill>
-                  <a:srgbClr val="283441"/>
-                </a:solidFill>
-              </a:rPr>
-              <a:t>ali.Pergunta: </a:t>
-            </a:r>
-            <a:r>
-              <a:rPr lang="en-us" sz="1600" cap="none">
-                <a:solidFill>
-                  <a:srgbClr val="283441"/>
-                </a:solidFill>
-              </a:rPr>
-              <a:t>incluir o </a:t>
-            </a:r>
-            <a:r>
-              <a:rPr lang="en-us" sz="1600" cap="none">
-                <a:solidFill>
-                  <a:srgbClr val="283441"/>
-                </a:solidFill>
-              </a:rPr>
-              <a:t>horário </a:t>
-            </a:r>
-            <a:r>
-              <a:rPr lang="en-us" sz="1600" cap="none">
-                <a:solidFill>
-                  <a:srgbClr val="283441"/>
-                </a:solidFill>
-              </a:rPr>
-              <a:t>ajuda a </a:t>
-            </a:r>
-            <a:r>
-              <a:rPr lang="en-us" sz="1600" cap="none">
-                <a:solidFill>
-                  <a:srgbClr val="283441"/>
-                </a:solidFill>
-              </a:rPr>
-              <a:t>separar </a:t>
-            </a:r>
-            <a:r>
-              <a:rPr lang="en-us" sz="1600" cap="none">
-                <a:solidFill>
-                  <a:srgbClr val="283441"/>
-                </a:solidFill>
-              </a:rPr>
-              <a:t>melhor </a:t>
-            </a:r>
-            <a:r>
-              <a:rPr lang="en-us" sz="1600" cap="none">
-                <a:solidFill>
-                  <a:srgbClr val="283441"/>
-                </a:solidFill>
-              </a:rPr>
-              <a:t>os </a:t>
-            </a:r>
-            <a:r>
-              <a:rPr lang="en-us" sz="1600" cap="none">
-                <a:solidFill>
-                  <a:srgbClr val="283441"/>
-                </a:solidFill>
-              </a:rPr>
-              <a:t>tipos de </a:t>
-            </a:r>
-            <a:r>
-              <a:rPr lang="en-us" sz="1600" cap="none">
-                <a:solidFill>
-                  <a:srgbClr val="283441"/>
-                </a:solidFill>
-              </a:rPr>
-              <a:t>ocorrência?</a:t>
+              <a:t>tipo de crime.</a:t>
             </a:r>
             <a:endParaRPr lang="en-us" sz="1600" cap="none">
               <a:solidFill>
@@ -8418,6 +8514,210 @@
               </a:solidFill>
             </a:endParaRPr>
           </a:p>
+          <a:p>
+            <a:pPr marL="177800" indent="-177800" algn="l">
+              <a:spcAft>
+                <a:spcPts val="800"/>
+              </a:spcAft>
+              <a:buSzTx/>
+              <a:buChar char="•"/>
+            </a:pPr>
+            <a:r>
+              <a:rPr lang="en-us" sz="1600" cap="none">
+                <a:solidFill>
+                  <a:srgbClr val="283441"/>
+                </a:solidFill>
+              </a:rPr>
+              <a:t>Isso </a:t>
+            </a:r>
+            <a:r>
+              <a:rPr lang="en-us" sz="1600" cap="none">
+                <a:solidFill>
+                  <a:srgbClr val="283441"/>
+                </a:solidFill>
+              </a:rPr>
+              <a:t>mede </a:t>
+            </a:r>
+            <a:r>
+              <a:rPr lang="en-us" sz="1600" cap="none">
+                <a:solidFill>
+                  <a:srgbClr val="283441"/>
+                </a:solidFill>
+              </a:rPr>
+              <a:t>onde </a:t>
+            </a:r>
+            <a:r>
+              <a:rPr lang="en-us" sz="1600" cap="none">
+                <a:solidFill>
+                  <a:srgbClr val="283441"/>
+                </a:solidFill>
+              </a:rPr>
+              <a:t>há </a:t>
+            </a:r>
+            <a:r>
+              <a:rPr lang="en-us" sz="1600" cap="none">
+                <a:solidFill>
+                  <a:srgbClr val="283441"/>
+                </a:solidFill>
+              </a:rPr>
+              <a:t>mais </a:t>
+            </a:r>
+            <a:r>
+              <a:rPr lang="en-us" sz="1600" cap="none">
+                <a:solidFill>
+                  <a:srgbClr val="283441"/>
+                </a:solidFill>
+              </a:rPr>
+              <a:t>registro e </a:t>
+            </a:r>
+            <a:r>
+              <a:rPr lang="en-us" sz="1600" cap="none">
+                <a:solidFill>
+                  <a:srgbClr val="283441"/>
+                </a:solidFill>
+              </a:rPr>
+              <a:t>circulação de </a:t>
+            </a:r>
+            <a:r>
+              <a:rPr lang="en-us" sz="1600" cap="none">
+                <a:solidFill>
+                  <a:srgbClr val="283441"/>
+                </a:solidFill>
+              </a:rPr>
+              <a:t>pessoas — </a:t>
+            </a:r>
+            <a:r>
+              <a:rPr lang="en-us" sz="1600" cap="none">
+                <a:solidFill>
+                  <a:srgbClr val="283441"/>
+                </a:solidFill>
+              </a:rPr>
+              <a:t>não o </a:t>
+            </a:r>
+            <a:r>
+              <a:rPr lang="en-us" sz="1600" cap="none">
+                <a:solidFill>
+                  <a:srgbClr val="283441"/>
+                </a:solidFill>
+              </a:rPr>
+              <a:t>risco de </a:t>
+            </a:r>
+            <a:r>
+              <a:rPr lang="en-us" sz="1600" cap="none">
+                <a:solidFill>
+                  <a:srgbClr val="283441"/>
+                </a:solidFill>
+              </a:rPr>
+              <a:t>quem </a:t>
+            </a:r>
+            <a:r>
+              <a:rPr lang="en-us" sz="1600" cap="none">
+                <a:solidFill>
+                  <a:srgbClr val="283441"/>
+                </a:solidFill>
+              </a:rPr>
+              <a:t>mora </a:t>
+            </a:r>
+            <a:r>
+              <a:rPr lang="en-us" sz="1600" cap="none">
+                <a:solidFill>
+                  <a:srgbClr val="283441"/>
+                </a:solidFill>
+              </a:rPr>
+              <a:t>ali.</a:t>
+            </a:r>
+            <a:endParaRPr lang="en-us" sz="1600" cap="none">
+              <a:solidFill>
+                <a:srgbClr val="283441"/>
+              </a:solidFill>
+            </a:endParaRPr>
+          </a:p>
+          <a:p>
+            <a:pPr marL="177800" indent="-177800" algn="l">
+              <a:spcAft>
+                <a:spcPts val="800"/>
+              </a:spcAft>
+              <a:buSzTx/>
+              <a:buChar char="•"/>
+            </a:pPr>
+            <a:r>
+              <a:rPr lang="en-us" sz="1600" cap="none">
+                <a:solidFill>
+                  <a:srgbClr val="283441"/>
+                </a:solidFill>
+              </a:rPr>
+              <a:t>Pergunta: </a:t>
+            </a:r>
+            <a:r>
+              <a:rPr lang="en-us" sz="1600" cap="none">
+                <a:solidFill>
+                  <a:srgbClr val="283441"/>
+                </a:solidFill>
+              </a:rPr>
+              <a:t>incluir o </a:t>
+            </a:r>
+            <a:r>
+              <a:rPr lang="en-us" sz="1600" cap="none">
+                <a:solidFill>
+                  <a:srgbClr val="283441"/>
+                </a:solidFill>
+              </a:rPr>
+              <a:t>horário </a:t>
+            </a:r>
+            <a:r>
+              <a:rPr lang="en-us" sz="1600" cap="none">
+                <a:solidFill>
+                  <a:srgbClr val="283441"/>
+                </a:solidFill>
+              </a:rPr>
+              <a:t>ajuda a </a:t>
+            </a:r>
+            <a:r>
+              <a:rPr lang="en-us" sz="1600" cap="none">
+                <a:solidFill>
+                  <a:srgbClr val="283441"/>
+                </a:solidFill>
+              </a:rPr>
+              <a:t>separar </a:t>
+            </a:r>
+            <a:r>
+              <a:rPr lang="en-us" sz="1600" cap="none">
+                <a:solidFill>
+                  <a:srgbClr val="283441"/>
+                </a:solidFill>
+              </a:rPr>
+              <a:t>melhor </a:t>
+            </a:r>
+            <a:r>
+              <a:rPr lang="en-us" sz="1600" cap="none">
+                <a:solidFill>
+                  <a:srgbClr val="283441"/>
+                </a:solidFill>
+              </a:rPr>
+              <a:t>os </a:t>
+            </a:r>
+            <a:r>
+              <a:rPr lang="en-us" sz="1600" cap="none">
+                <a:solidFill>
+                  <a:srgbClr val="283441"/>
+                </a:solidFill>
+              </a:rPr>
+              <a:t>tipos de </a:t>
+            </a:r>
+            <a:r>
+              <a:rPr lang="en-us" sz="1600" cap="none">
+                <a:solidFill>
+                  <a:srgbClr val="283441"/>
+                </a:solidFill>
+              </a:rPr>
+              <a:t>ocorrência?</a:t>
+            </a:r>
+            <a:endParaRPr lang="en-us" sz="1600" cap="none">
+              <a:solidFill>
+                <a:srgbClr val="283441"/>
+              </a:solidFill>
+            </a:endParaRPr>
+          </a:p>
         </p:txBody>
       </p:sp>
       <p:sp>
@@ -8426,7 +8726,7 @@
           <p:cNvSpPr>
             <a:extLst>
               <a:ext uri="smNativeData">
-                <pr:smNativeData xmlns:pr="smNativeData" xmlns="smNativeData" val="SMDATA_16_kRU2ahMAAAAlAAAAZQAAAA0AAAAAkAAAAEgAAACQAAAASAAAAAAAAAAAAAAAAAAAAAEAAABQAAAA8UbmkT8YqD8AAAAAAADwvwAAAAAAAOA/AAAAAAAA4D8AAAAAAADgPwAAAAAAAOA/AAAAAAAA4D8AAAAAAADgPwAAAAAAAOA/AAAAAAAA4D8CAAAAjAAAAAEAAAAAAAAA7/P4AP///wgAAAAAAAAAAAAAAAAAAAAAAAAAAAAAAAAAAAAAeAAAAAEAAABAAAAAAAAAAAAAAABaAAAAAAAAAAAAAAAAAAAAAAAAAAAAAAAAAAAAAAAAAAAAAAAAAAAAAAAAAAAAAAAAAAAAAAAAAAAAAAAAAAAAAAAAAAAAAAAAAAAAFAAAADwAAAAAAAAAAAAAAAAAAAAPAAAAAQAAACMAAAAjAAAAIwAAAB4AAAAAAAAAZAAAAGQAAAAAAAAAZAAAAGQAAAAVAAAAYAAAAAAAAAAAAAAADwAAACADAAAAAAAAAAAAAAEAAACgMgAAVgcAAKr4//8BAAAAf39/AAEAAABkAAAAAAAAABQAAABAHwAAAAAAACYAAAAAAAAAwOD//wAAAAAmAAAAZAAAABYAAABMAAAAAQAAAAAAAAAGAAAAAAAAAAEAAAC5xNAAPAAAAAAAAAAoAAAAZAAAAGQAAAAAAAAAy8vLADwAAAAAAAAAKAAAAGQAAABkAAAAAAAAABcAAAAUAAAAAAAAAAAAAAD/fwAA/38AAAAAAAAJAAAABAAAAP////8eAAAAaAAAAAAAAAAAAAAAAAAAAAAAAAAAAAAAECcAABAnAAAAAAAAAAAAAAAAAAAAAAAAAAAAAAAAAAAAAAAAAAAAAHgAAAAAAAAAwMD/AAAAAAAAAAAAAAAAAAAAAABkAAAAAAAAAH9/fwAKAAAAIgAAABgAAAAAAAAAAAAAAAAAAAAAAAAAAAAAAAAAAAAkAAAAJAAAAAAAAAAHAAAAAAAAAAAAAAAAAAAAAAAAAAAAAAAAAAAAf39/ACUAAABYAAAAAAAAAAAAAAAAAAAAAAAAAAAAAAAAAAAAAAAAAAAAAAAAAAAAAAAAAAAAAAA/AAAAAAAAAKCGAQAAAAAAAAAAAAAAAAAMAAAAAQAAAAAAAAAAAAAAAAAAAB8AAABUAAAA7/P4AP///wEAAAAAAAAAAAAAAAAAAAAAAAAAAAAAAAAAAAAAAAAAAAAAAAB/f38AucTQAMvLywDAwP8Af39/AAAAAAAAAAAAAAAAAAAAAAAAAAAAIQAAABgAAAAUAAAAUCsAALAKAABwRwAA0B0AABAAAAAmAAAACAAAAP//////////MAAAABQAAAAAAAAAAAD//wAAAQAAAP//AAABAA=="/>
+                <pr:smNativeData xmlns:pr="smNativeData" xmlns="smNativeData" val="SMDATA_16_V2g2ahMAAAAlAAAAZQAAAA0AAAAAkAAAAEgAAACQAAAASAAAAAAAAAAAAAAAAAAAAAEAAABQAAAA8UbmkT8YqD8AAAAAAAAAAAAAAAAAAOA/AAAAAAAA4D8AAAAAAADgPwAAAAAAAOA/AAAAAAAA4D8AAAAAAADgPwAAAAAAAOA/AAAAAAAA4D8CAAAAjAAAAAEAAAAAAAAA7/P4AP///wgAAAAAAAAAAAAAAAAAAAAAAAAAAAAAAAAAAAAAeAAAAAEAAABAAAAAAAAAAAAAAABaAAAAAAAAAAAAAAAAAAAAAAAAAAAAAAAAAAAAAAAAAAAAAAAAAAAAAAAAAAAAAAAAAAAAAAAAAAAAAAAAAAAAAAAAAAAAAAAAAAAAFAAAADwAAAAAAAAAAAAAAAAAAAAPAAAAAQAAACMAAAAjAAAAIwAAAB4AAAAAAAAAZAAAAGQAAAAAAAAAZAAAAGQAAAAVAAAAYAAAAAAAAAAAAAAADwAAACADAAAAAAAAAAAAAAEAAACgMgAAVgcAAKr4//8BAAAAf39/AAEAAABkAAAAAAAAABQAAABAHwAAAAAAACYAAAAAAAAAwOD//wAAAAAmAAAAZAAAABYAAABMAAAAAQAAAAAAAAAGAAAAAAAAAAEAAAC5xNAAPAAAAAAAAAAoAAAAZAAAAGQAAAAAAAAAy8vLADwAAAAAAAAAKAAAAGQAAABkAAAAAAAAABcAAAAUAAAAAAAAAAAAAAD/fwAA/38AAAAAAAAJAAAABAAAAP////8eAAAAaAAAAAAAAAAAAAAAAAAAAAAAAAAAAAAAECcAABAnAAAAAAAAAAAAAAAAAAAAAAAAAAAAAAAAAAAAAAAAAAAAAHgAAAAAAAAAwMD/AAAAAAAAAAAAAAAAAAAAAABkAAAAAAAAAH9/fwAKAAAAIgAAABgAAAAAAAAAAAAAAAAAAAAAAAAAAAAAAAAAAAAkAAAAJAAAAAAAAAAHAAAAAAAAAAAAAAAAAAAAAAAAAAAAAAAAAAAAf39/ACUAAABYAAAAAAAAAAAAAAAAAAAAAAAAAAAAAAAAAAAAAAAAAAAAAAAAAAAAAAAAAAAAAAA/AAAAAAAAAKCGAQAAAAAAAAAAAAAAAAAMAAAAAQAAAAAAAAAAAAAAAAAAAB8AAABUAAAA7/P4AP///wEAAAAAAAAAAAAAAAAAAAAAAAAAAAAAAAAAAAAAAAAAAAAAAAB/f38AucTQAMvLywDAwP8Af39/AAAAAAAAAAAAAAAAAAAAAAAAAAAAIQAAABgAAAAUAAAAUCsAALAKAABwRwAA0B0AABAAAAAmAAAACAAAAP//////////MAAAABQAAAAAAAAAAAD//wAAAQAAAP//AAABAA=="/>
               </a:ext>
             </a:extLst>
           </p:cNvSpPr>
@@ -8463,7 +8763,7 @@
           <p:cNvSpPr>
             <a:extLst>
               <a:ext uri="smNativeData">
-                <pr:smNativeData xmlns:pr="smNativeData" xmlns="smNativeData" val="SMDATA_16_kRU2ahMAAAAlAAAAZAAAAA0AAAAAkAAAAEgAAACQAAAASAAAAAAAAAABAAAAAAAAAAEAAABQAAAAAAAAAAAA4D8AAAAAAADgPwAAAAAAAOA/AAAAAAAA4D8AAAAAAADgPwAAAAAAAOA/AAAAAAAA4D8AAAAAAADgPwAAAAAAAOA/AAAAAAAA4D8CAAAAjAAAAAAAAAAAAAAARHLEDP///wgAAAAAAAAAAAAAAAAAAAAAAAAAAAAAAAAAAAAAZAAAAAEAAABAAAAAAAAAAAAAAAAAAAAAAAAAAAAAAAAAAAAAAAAAAAAAAAAAAAAAAAAAAAAAAAAAAAAAAAAAAAAAAAAAAAAAAAAAAAAAAAAAAAAAAAAAAAAAAAAAAAAAFAAAADwAAAAAAAAAAAAAAAAAAAAPAAAAAQAAACMAAAAjAAAAIwAAAB4AAAAAAAAAZAAAAGQAAAAAAAAAZAAAAGQAAAAVAAAAYAAAAAAAAAAAAAAADwAAACADAAAAAAAAAAAAAAEAAACgMgAAVgcAAKr4//8BAAAAf39/AAEAAABkAAAAAAAAABQAAABAHwAAAAAAACYAAAAAAAAAwOD//wAAAAAmAAAAZAAAABYAAABMAAAAAAAAAAAAAAAEAAAAAAAAAAEAAADn5uYKAAAAACgAAAAoAAAAZAAAAGQAAAAAAAAAzMzMAAAAAABQAAAAUAAAAGQAAABkAAAAAAAAABcAAAAUAAAAAAAAAAAAAAD/fwAA/38AAAAAAAAJAAAABAAAAMDAwP8eAAAAaAAAAAAAAAAAAAAAAAAAAAAAAAAAAAAAECcAABAnAAAAAAAAAAAAAAAAAAAAAAAAAAAAAAAAAAAAAAAAAAAAABQAAAAAAAAAwMD/AAAAAABkAAAAMgAAAAAAAABkAAAAAAAAAH9/fwAKAAAAIgAAABgAAAAAAAAAAAAAAAAAAAAAAAAAAAAAAAAAAAAkAAAAJAAAAAAAAAAHAAAAAAAAAAAAAAAAAAAAAAAAAAAAAAAAAAAAf39/ACUAAABYAAAAAAAAAAAAAAAAAAAAAAAAAAAAAAAAAAAAAAAAAAAAAAAAAAAAAAAAAAAAAAA/AAAAAAAAAKCGAQAAAAAAAAAAAAAAAAAMAAAAAQAAAAAAAAAAAAAAAAAAAB8AAABUAAAARHLEBf///wEAAAAAAAAAAAAAAAAAAAAAAAAAAAAAAAAAAAAAAAAAAAAAAAB/f38A5+bmA8zMzADAwP8Af39/AAAAAAAAAAAAAAAAAAAAAAAAAAAAIQAAABgAAAAUAAAA4CsAAJAJAACAMQAAMA8AABAAAAAmAAAACAAAAP//////////MAAAABQAAAAAAAAAAAD//wAAAQAAAP//AAABAA=="/>
+                <pr:smNativeData xmlns:pr="smNativeData" xmlns="smNativeData" val="SMDATA_16_V2g2ahMAAAAlAAAAZAAAAA0AAAAAkAAAAEgAAACQAAAASAAAAAAAAAABAAAAAAAAAAEAAABQAAAAAAAAAAAA4D8AAAAAAADgPwAAAAAAAOA/AAAAAAAA4D8AAAAAAADgPwAAAAAAAOA/AAAAAAAA4D8AAAAAAADgPwAAAAAAAOA/AAAAAAAA4D8CAAAAjAAAAAAAAAAAAAAARHLEDP///wgAAAAAAAAAAAAAAAAAAAAAAAAAAAAAAAAAAAAAZAAAAAEAAABAAAAAAAAAAAAAAAAAAAAAAAAAAAAAAAAAAAAAAAAAAAAAAAAAAAAAAAAAAAAAAAAAAAAAAAAAAAAAAAAAAAAAAAAAAAAAAAAAAAAAAAAAAAAAAAAAAAAAFAAAADwAAAAAAAAAAAAAAAAAAAAPAAAAAQAAACMAAAAjAAAAIwAAAB4AAAAAAAAAZAAAAGQAAAAAAAAAZAAAAGQAAAAVAAAAYAAAAAAAAAAAAAAADwAAACADAAAAAAAAAAAAAAEAAACgMgAAVgcAAKr4//8BAAAAf39/AAEAAABkAAAAAAAAABQAAABAHwAAAAAAACYAAAAAAAAAwOD//wAAAAAmAAAAZAAAABYAAABMAAAAAAAAAAAAAAAEAAAAAAAAAAEAAADn5uYKAAAAACgAAAAoAAAAZAAAAGQAAAAAAAAAzMzMAAAAAABQAAAAUAAAAGQAAABkAAAAAAAAABcAAAAUAAAAAAAAAAAAAAD/fwAA/38AAAAAAAAJAAAABAAAAMDAwP8eAAAAaAAAAAAAAAAAAAAAAAAAAAAAAAAAAAAAECcAABAnAAAAAAAAAAAAAAAAAAAAAAAAAAAAAAAAAAAAAAAAAAAAABQAAAAAAAAAwMD/AAAAAABkAAAAMgAAAAAAAABkAAAAAAAAAH9/fwAKAAAAIgAAABgAAAAAAAAAAAAAAAAAAAAAAAAAAAAAAAAAAAAkAAAAJAAAAAAAAAAHAAAAAAAAAAAAAAAAAAAAAAAAAAAAAAAAAAAAf39/ACUAAABYAAAAAAAAAAAAAAAAAAAAAAAAAAAAAAAAAAAAAAAAAAAAAAAAAAAAAAAAAAAAAAA/AAAAAAAAAKCGAQAAAAAAAAAAAAAAAAAMAAAAAQAAAAAAAAAAAAAAAAAAAB8AAABUAAAARHLEBf///wEAAAAAAAAAAAAAAAAAAAAAAAAAAAAAAAAAAAAAAAAAAAAAAAB/f38A5+bmA8zMzADAwP8Af39/AAAAAAAAAAAAAAAAAAAAAAAAAAAAIQAAABgAAAAUAAAA4CsAAJAJAACAMQAAMA8AABAAAAAmAAAACAAAAP//////////MAAAABQAAAAAAAAAAAD//wAAAQAAAP//AAABAA=="/>
               </a:ext>
             </a:extLst>
           </p:cNvSpPr>
@@ -8511,7 +8811,7 @@
           <p:cNvSpPr>
             <a:extLst>
               <a:ext uri="smNativeData">
-                <pr:smNativeData xmlns:pr="smNativeData" xmlns="smNativeData" val="SMDATA_16_kRU2ahMAAAAlAAAAZAAAAA0AAAAAkAAAAEgAAACQAAAASAAAAAAAAAAAAAAAAAAAAAEAAABQAAAAAAAAAAAA4D8AAAAAAADgPwAAAAAAAOA/AAAAAAAA4D8AAAAAAADgPwAAAAAAAOA/AAAAAAAA4D8AAAAAAADgPwAAAAAAAOA/AAAAAAAA4D8CAAAAjAAAAAAAAAAAAAAARHLEDP///wgAAAAAAAAAAAAAAAAAAAAAAAAAAAAAAAAAAAAAZAAAAAEAAABAAAAAAAAAAAAAAAAAAAAAAAAAAAAAAAAAAAAAAAAAAAAAAAAAAAAAAAAAAAAAAAAAAAAAAAAAAAAAAAAAAAAAAAAAAAAAAAAAAAAAAAAAAAAAAAAAAAAAFAAAADwAAAAAAAAAAAAAAAAAAAAPAAAAAQAAACMAAAAjAAAAIwAAAB4AAAAAAAAAZAAAAGQAAAAAAAAAZAAAAGQAAAAVAAAAYAAAAAAAAAAAAAAADwAAACADAAAAAAAAAAAAAAEAAACgMgAAVgcAAKr4//8BAAAAf39/AAEAAABkAAAAAAAAABQAAABAHwAAAAAAACYAAAAAAAAAwOD//wAAAAAmAAAAZAAAABYAAABMAAAAAAAAAAAAAAAEAAAAAAAAAAEAAADn5uYKAAAAACgAAAAoAAAAZAAAAGQAAAAAAAAAzMzMAAAAAABQAAAAUAAAAGQAAABkAAAAAAAAABcAAAAUAAAAAAAAAAAAAAD/fwAA/38AAAAAAAAJAAAABAAAAP////8eAAAAaAAAAAAAAAAAAAAAAAAAAAAAAAAAAAAAECcAABAnAAAAAAAAAAAAAAAAAAAAAAAAAAAAAAAAAAAAAAAAAAAAABQAAAAAAAAAwMD/AAAAAABkAAAAMgAAAAAAAABkAAAAAAAAAH9/fwAKAAAAIgAAABgAAAAAAAAAAAAAAAAAAAAAAAAAAAAAAAAAAAAkAAAAJAAAAAAAAAAHAAAAAAAAAAAAAAAAAAAAAAAAAAAAAAAAAAAAf39/ACUAAABYAAAAAAAAAAAAAAAAAAAAAAAAAAAAAAAAAAAAAAAAAAAAAAAAAAAAAAAAAAAAAAA/AAAAAAAAAKCGAQAAAAAAAAAAAAAAAAAMAAAAAQAAAAAAAAAAAAAAAAAAAB8AAABUAAAARHLEBf///wEAAAAAAAAAAAAAAAAAAAAAAAAAAAAAAAAAAAAAAAAAAAAAAAB/f38A5+bmA8zMzADAwP8Af39/AAAAAAAAAAAAAAAAAAAAAAAAAAAAIQAAABgAAAAUAAAAAC0AADAPAADARQAAUBkAABAAAAAmAAAACAAAAP//////////MAAAABQAAAAAAAAAAAD//wAAAQAAAP//AAABAA=="/>
+                <pr:smNativeData xmlns:pr="smNativeData" xmlns="smNativeData" val="SMDATA_16_V2g2ahMAAAAlAAAAZAAAAA0AAAAAkAAAAEgAAACQAAAASAAAAAAAAAAAAAAAAAAAAAEAAABQAAAAAAAAAAAA4D8AAAAAAADgPwAAAAAAAOA/AAAAAAAA4D8AAAAAAADgPwAAAAAAAOA/AAAAAAAA4D8AAAAAAADgPwAAAAAAAOA/AAAAAAAA4D8CAAAAjAAAAAAAAAAAAAAARHLEDP///wgAAAAAAAAAAAAAAAAAAAAAAAAAAAAAAAAAAAAAZAAAAAEAAABAAAAAAAAAAAAAAAAAAAAAAAAAAAAAAAAAAAAAAAAAAAAAAAAAAAAAAAAAAAAAAAAAAAAAAAAAAAAAAAAAAAAAAAAAAAAAAAAAAAAAAAAAAAAAAAAAAAAAFAAAADwAAAAAAAAAAAAAAAAAAAAPAAAAAQAAACMAAAAjAAAAIwAAAB4AAAAAAAAAZAAAAGQAAAAAAAAAZAAAAGQAAAAVAAAAYAAAAAAAAAAAAAAADwAAACADAAAAAAAAAAAAAAEAAACgMgAAVgcAAKr4//8BAAAAf39/AAEAAABkAAAAAAAAABQAAABAHwAAAAAAACYAAAAAAAAAwOD//wAAAAAmAAAAZAAAABYAAABMAAAAAAAAAAAAAAAEAAAAAAAAAAEAAADn5uYKAAAAACgAAAAoAAAAZAAAAGQAAAAAAAAAzMzMAAAAAABQAAAAUAAAAGQAAABkAAAAAAAAABcAAAAUAAAAAAAAAAAAAAD/fwAA/38AAAAAAAAJAAAABAAAAP////8eAAAAaAAAAAAAAAAAAAAAAAAAAAAAAAAAAAAAECcAABAnAAAAAAAAAAAAAAAAAAAAAAAAAAAAAAAAAAAAAAAAAAAAABQAAAAAAAAAwMD/AAAAAABkAAAAMgAAAAAAAABkAAAAAAAAAH9/fwAKAAAAIgAAABgAAAAAAAAAAAAAAAAAAAAAAAAAAAAAAAAAAAAkAAAAJAAAAAAAAAAHAAAAAAAAAAAAAAAAAAAAAAAAAAAAAAAAAAAAf39/ACUAAABYAAAAAAAAAAAAAAAAAAAAAAAAAAAAAAAAAAAAAAAAAAAAAAAAAAAAAAAAAAAAAAA/AAAAAAAAAKCGAQAAAAAAAAAAAAAAAAAMAAAAAQAAAAAAAAAAAAAAAAAAAB8AAABUAAAARHLEBf///wEAAAAAAAAAAAAAAAAAAAAAAAAAAAAAAAAAAAAAAAAAAAAAAAB/f38A5+bmA8zMzADAwP8Af39/AAAAAAAAAAAAAAAAAAAAAAAAAAAAIQAAABgAAAAUAAAAAC0AADAPAADARQAAUBkAAAAAAAAmAAAACAAAAP//////////MAAAABQAAAAAAAAAAAD//wAAAQAAAP//AAABAA=="/>
               </a:ext>
             </a:extLst>
           </p:cNvSpPr>
@@ -8569,7 +8869,7 @@
                 <a:ea typeface="Georgia" pitchFamily="0" charset="0"/>
                 <a:cs typeface="Georgia" pitchFamily="0" charset="0"/>
               </a:rPr>
-              <a:t>sozinho </a:t>
+              <a:t>sozinho, </a:t>
             </a:r>
             <a:r>
               <a:rPr lang="en-us" sz="2000" i="1" cap="none">
@@ -8580,7 +8880,7 @@
                 <a:ea typeface="Georgia" pitchFamily="0" charset="0"/>
                 <a:cs typeface="Georgia" pitchFamily="0" charset="0"/>
               </a:rPr>
-              <a:t>mede </a:t>
+              <a:t>sem o </a:t>
             </a:r>
             <a:r>
               <a:rPr lang="en-us" sz="2000" i="1" cap="none">
@@ -8591,7 +8891,7 @@
                 <a:ea typeface="Georgia" pitchFamily="0" charset="0"/>
                 <a:cs typeface="Georgia" pitchFamily="0" charset="0"/>
               </a:rPr>
-              <a:t>circulação e </a:t>
+              <a:t>horário, </a:t>
             </a:r>
             <a:r>
               <a:rPr lang="en-us" sz="2000" i="1" cap="none">
@@ -8602,7 +8902,7 @@
                 <a:ea typeface="Georgia" pitchFamily="0" charset="0"/>
                 <a:cs typeface="Georgia" pitchFamily="0" charset="0"/>
               </a:rPr>
-              <a:t>registro, </a:t>
+              <a:t>mede </a:t>
             </a:r>
             <a:r>
               <a:rPr lang="en-us" sz="2000" i="1" cap="none">
@@ -8613,7 +8913,7 @@
                 <a:ea typeface="Georgia" pitchFamily="0" charset="0"/>
                 <a:cs typeface="Georgia" pitchFamily="0" charset="0"/>
               </a:rPr>
-              <a:t>não </a:t>
+              <a:t>circulação e </a:t>
             </a:r>
             <a:r>
               <a:rPr lang="en-us" sz="2000" i="1" cap="none">
@@ -8624,7 +8924,7 @@
                 <a:ea typeface="Georgia" pitchFamily="0" charset="0"/>
                 <a:cs typeface="Georgia" pitchFamily="0" charset="0"/>
               </a:rPr>
-              <a:t>risco </a:t>
+              <a:t>registro, </a:t>
             </a:r>
             <a:r>
               <a:rPr lang="en-us" sz="2000" i="1" cap="none">
@@ -8635,7 +8935,7 @@
                 <a:ea typeface="Georgia" pitchFamily="0" charset="0"/>
                 <a:cs typeface="Georgia" pitchFamily="0" charset="0"/>
               </a:rPr>
-              <a:t>por </a:t>
+              <a:t>não </a:t>
             </a:r>
             <a:r>
               <a:rPr lang="en-us" sz="2000" i="1" cap="none">
@@ -8646,6 +8946,39 @@
                 <a:ea typeface="Georgia" pitchFamily="0" charset="0"/>
                 <a:cs typeface="Georgia" pitchFamily="0" charset="0"/>
               </a:rPr>
+              <a:t>o </a:t>
+            </a:r>
+            <a:r>
+              <a:rPr lang="en-us" sz="2000" i="1" cap="none">
+                <a:solidFill>
+                  <a:srgbClr val="13314F"/>
+                </a:solidFill>
+                <a:latin typeface="Georgia" pitchFamily="0" charset="0"/>
+                <a:ea typeface="Georgia" pitchFamily="0" charset="0"/>
+                <a:cs typeface="Georgia" pitchFamily="0" charset="0"/>
+              </a:rPr>
+              <a:t>risco </a:t>
+            </a:r>
+            <a:r>
+              <a:rPr lang="en-us" sz="2000" i="1" cap="none">
+                <a:solidFill>
+                  <a:srgbClr val="13314F"/>
+                </a:solidFill>
+                <a:latin typeface="Georgia" pitchFamily="0" charset="0"/>
+                <a:ea typeface="Georgia" pitchFamily="0" charset="0"/>
+                <a:cs typeface="Georgia" pitchFamily="0" charset="0"/>
+              </a:rPr>
+              <a:t>para o </a:t>
+            </a:r>
+            <a:r>
+              <a:rPr lang="en-us" sz="2000" i="1" cap="none">
+                <a:solidFill>
+                  <a:srgbClr val="13314F"/>
+                </a:solidFill>
+                <a:latin typeface="Georgia" pitchFamily="0" charset="0"/>
+                <a:ea typeface="Georgia" pitchFamily="0" charset="0"/>
+                <a:cs typeface="Georgia" pitchFamily="0" charset="0"/>
+              </a:rPr>
               <a:t>morador.</a:t>
             </a:r>
             <a:endParaRPr lang="en-us" sz="2000" cap="none"/>
@@ -8658,7 +8991,7 @@
           <p:cNvSpPr>
             <a:extLst>
               <a:ext uri="smNativeData">
-                <pr:smNativeData xmlns:pr="smNativeData" xmlns="smNativeData" val="SMDATA_16_kRU2ahMAAAAlAAAAZAAAAA0AAAAAkAAAAEgAAACQAAAASAAAAAAAAAABAAAAAAAAAAEAAABQAAAAAAAAAAAA4D8AAAAAAADgPwAAAAAAAOA/AAAAAAAA4D8AAAAAAADgPwAAAAAAAOA/AAAAAAAA4D8AAAAAAADgPwAAAAAAAOA/AAAAAAAA4D8CAAAAjAAAAAAAAAAAAAAARHLEDP///wgAAAAAAAAAAAAAAAAAAAAAAAAAAAAAAAAAAAAAZAAAAAEAAABAAAAAAAAAAAAAAAAAAAAAAAAAAAAAAAAAAAAAAAAAAAAAAAAAAAAAAAAAAAAAAAAAAAAAAAAAAAAAAAAAAAAAAAAAAAAAAAAAAAAAAAAAAAAAAAAAAAAAFAAAADwAAAAAAAAAAAAAAAAAAAAPAAAAAQAAACMAAAAjAAAAIwAAAB4AAAAAAAAAZAAAAGQAAAAAAAAAZAAAAGQAAAAVAAAAYAAAAAAAAAAAAAAADwAAACADAAAAAAAAAAAAAAEAAACgMgAAVgcAAKr4//8BAAAAf39/AAEAAABkAAAAAAAAABQAAABAHwAAAAAAACYAAAAAAAAAwOD//wAAAAAmAAAAZAAAABYAAABMAAAAAAAAAAAAAAAEAAAAAAAAAAEAAADn5uYKAAAAACgAAAAoAAAAZAAAAGQAAAAAAAAAzMzMAAAAAABQAAAAUAAAAGQAAABkAAAAAAAAABcAAAAUAAAAAAAAAAAAAAD/fwAA/38AAAAAAAAJAAAABAAAAAAAAAAeAAAAaAAAAAAAAAAAAAAAAAAAAAAAAAAAAAAAECcAABAnAAAAAAAAAAAAAAAAAAAAAAAAAAAAAAAAAAAAAAAAAAAAABQAAAAAAAAAwMD/AAAAAABkAAAAMgAAAAAAAABkAAAAAAAAAH9/fwAKAAAAIgAAABgAAAAAAAAAAAAAAAAAAAAAAAAAAAAAAAAAAAAkAAAAJAAAAAAAAAAHAAAAAAAAAAAAAAAAAAAAAAAAAAAAAAAAAAAAf39/ACUAAABYAAAAAAAAAAAAAAAAAAAAAAAAAAAAAAAAAAAAAAAAAAAAAAAAAAAAAAAAAAAAAAA/AAAAAAAAAKCGAQAAAAAAAAAAAAAAAAAMAAAAAQAAAAAAAAAAAAAAAAAAAB8AAABUAAAARHLEBf///wEAAAAAAAAAAAAAAAAAAAAAAAAAAAAAAAAAAAAAAAAAAAAAAAB/f38A5+bmA8zMzADAwP8Af39/AAAAAAAAAAAAAAAAAAAAAAAAAAAAIQAAABgAAAAUAAAAAC0AAMAYAADARQAAIBwAABAAAAAmAAAACAAAAP//////////MAAAABQAAAAAAAAAAAD//wAAAQAAAP//AAABAA=="/>
+                <pr:smNativeData xmlns:pr="smNativeData" xmlns="smNativeData" val="SMDATA_16_V2g2ahMAAAAlAAAAZAAAAA0AAAAAkAAAAEgAAACQAAAASAAAAAAAAAABAAAAAAAAAAEAAABQAAAAAAAAAAAA4D8AAAAAAADgPwAAAAAAAOA/AAAAAAAA4D8AAAAAAADgPwAAAAAAAOA/AAAAAAAA4D8AAAAAAADgPwAAAAAAAOA/AAAAAAAA4D8CAAAAjAAAAAAAAAAAAAAARHLEDP///wgAAAAAAAAAAAAAAAAAAAAAAAAAAAAAAAAAAAAAZAAAAAEAAABAAAAAAAAAAAAAAAAAAAAAAAAAAAAAAAAAAAAAAAAAAAAAAAAAAAAAAAAAAAAAAAAAAAAAAAAAAAAAAAAAAAAAAAAAAAAAAAAAAAAAAAAAAAAAAAAAAAAAFAAAADwAAAAAAAAAAAAAAAAAAAAPAAAAAQAAACMAAAAjAAAAIwAAAB4AAAAAAAAAZAAAAGQAAAAAAAAAZAAAAGQAAAAVAAAAYAAAAAAAAAAAAAAADwAAACADAAAAAAAAAAAAAAEAAACgMgAAVgcAAKr4//8BAAAAf39/AAEAAABkAAAAAAAAABQAAABAHwAAAAAAACYAAAAAAAAAwOD//wAAAAAmAAAAZAAAABYAAABMAAAAAAAAAAAAAAAEAAAAAAAAAAEAAADn5uYKAAAAACgAAAAoAAAAZAAAAGQAAAAAAAAAzMzMAAAAAABQAAAAUAAAAGQAAABkAAAAAAAAABcAAAAUAAAAAAAAAAAAAAD/fwAA/38AAAAAAAAJAAAABAAAAAAAAAAeAAAAaAAAAAAAAAAAAAAAAAAAAAAAAAAAAAAAECcAABAnAAAAAAAAAAAAAAAAAAAAAAAAAAAAAAAAAAAAAAAAAAAAABQAAAAAAAAAwMD/AAAAAABkAAAAMgAAAAAAAABkAAAAAAAAAH9/fwAKAAAAIgAAABgAAAAAAAAAAAAAAAAAAAAAAAAAAAAAAAAAAAAkAAAAJAAAAAAAAAAHAAAAAAAAAAAAAAAAAAAAAAAAAAAAAAAAAAAAf39/ACUAAABYAAAAAAAAAAAAAAAAAAAAAAAAAAAAAAAAAAAAAAAAAAAAAAAAAAAAAAAAAAAAAAA/AAAAAAAAAKCGAQAAAAAAAAAAAAAAAAAMAAAAAQAAAAAAAAAAAAAAAAAAAB8AAABUAAAARHLEBf///wEAAAAAAAAAAAAAAAAAAAAAAAAAAAAAAAAAAAAAAAAAAAAAAAB/f38A5+bmA8zMzADAwP8Af39/AAAAAAAAAAAAAAAAAAAAAAAAAAAAIQAAABgAAAAUAAAAAC0AAMAYAADARQAAIBwAABAAAAAmAAAACAAAAP//////////MAAAABQAAAAAAAAAAAD//wAAAQAAAP//AAABAA=="/>
               </a:ext>
             </a:extLst>
           </p:cNvSpPr>
@@ -8783,7 +9116,7 @@
           <p:cNvSpPr>
             <a:extLst>
               <a:ext uri="smNativeData">
-                <pr:smNativeData xmlns:pr="smNativeData" xmlns="smNativeData" val="SMDATA_16_kRU2ahMAAAAlAAAAZAAAAA0AAAAAkAAAAEgAAACQAAAASAAAAAAAAAABAAAAAAAAAAEAAABQAAAAAAAAAAAA4D8AAAAAAADgPwAAAAAAAOA/AAAAAAAA4D8AAAAAAADgPwAAAAAAAOA/AAAAAAAA4D8AAAAAAADgPwAAAAAAAOA/AAAAAAAA4D8CAAAAjAAAAAAAAAAAAAAARHLEDP///wgAAAAAAAAAAAAAAAAAAAAAAAAAAAAAAAAAAAAAZAAAAAEAAABAAAAAAAAAAAAAAAAAAAAAAAAAAAAAAAAAAAAAAAAAAAAAAAAAAAAAAAAAAAAAAAAAAAAAAAAAAAAAAAAAAAAAAAAAAAAAAAAAAAAAAAAAAAAAAAAAAAAAFAAAADwAAAAAAAAAAAAAAAAAAAAPAAAAAQAAACMAAAAjAAAAIwAAAB4AAAAAAAAAZAAAAGQAAAAAAAAAZAAAAGQAAAAVAAAAYAAAAAAAAAAAAAAADwAAACADAAAAAAAAAAAAAAEAAACgMgAAVgcAAKr4//8BAAAAf39/AAEAAABkAAAAAAAAABQAAABAHwAAAAAAACYAAAAAAAAAwOD//wAAAAAmAAAAZAAAABYAAABMAAAAAAAAAAAAAAAEAAAAAAAAAAEAAADn5uYKAAAAACgAAAAoAAAAZAAAAGQAAAAAAAAAzMzMAAAAAABQAAAAUAAAAGQAAABkAAAAAAAAABcAAAAUAAAAAAAAAAAAAAD/fwAA/38AAAAAAAAJAAAABAAAAAAAAAAeAAAAaAAAAAAAAAAAAAAAAAAAAAAAAAAAAAAAECcAABAnAAAAAAAAAAAAAAAAAAAAAAAAAAAAAAAAAAAAAAAAAAAAABQAAAAAAAAAwMD/AAAAAABkAAAAMgAAAAAAAABkAAAAAAAAAH9/fwAKAAAAIgAAABgAAAAAAAAAAAAAAAAAAAAAAAAAAAAAAAAAAAAkAAAAJAAAAAAAAAAHAAAAAAAAAAAAAAAAAAAAAAAAAAAAAAAAAAAAf39/ACUAAABYAAAAAAAAAAAAAAAAAAAAAAAAAAAAAAAAAAAAAAAAAAAAAAAAAAAAAAAAAAAAAAA/AAAAAAAAAKCGAQAAAAAAAAAAAAAAAAAMAAAAAQAAAAAAAAAAAAAAAAAAAB8AAABUAAAARHLEBf///wEAAAAAAAAAAAAAAAAAAAAAAAAAAAAAAAAAAAAAAAAAAAAAAAB/f38A5+bmA8zMzADAwP8Af39/AAAAAAAAAAAAAAAAAAAAAAAAAAAAIQAAABgAAAAUAAAAYAMAACABAACgRwAA0AIAABAAAAAmAAAACAAAAP//////////MAAAABQAAAAAAAAAAAD//wAAAQAAAP//AAABAA=="/>
+                <pr:smNativeData xmlns:pr="smNativeData" xmlns="smNativeData" val="SMDATA_16_V2g2ahMAAAAlAAAAZAAAAA0AAAAAkAAAAEgAAACQAAAASAAAAAAAAAABAAAAAAAAAAEAAABQAAAAAAAAAAAA4D8AAAAAAADgPwAAAAAAAOA/AAAAAAAA4D8AAAAAAADgPwAAAAAAAOA/AAAAAAAA4D8AAAAAAADgPwAAAAAAAOA/AAAAAAAA4D8CAAAAjAAAAAAAAAAAAAAARHLEDP///wgAAAAAAAAAAAAAAAAAAAAAAAAAAAAAAAAAAAAAZAAAAAEAAABAAAAAAAAAAAAAAAAAAAAAAAAAAAAAAAAAAAAAAAAAAAAAAAAAAAAAAAAAAAAAAAAAAAAAAAAAAAAAAAAAAAAAAAAAAAAAAAAAAAAAAAAAAAAAAAAAAAAAFAAAADwAAAAAAAAAAAAAAAAAAAAPAAAAAQAAACMAAAAjAAAAIwAAAB4AAAAAAAAAZAAAAGQAAAAAAAAAZAAAAGQAAAAVAAAAYAAAAAAAAAAAAAAADwAAACADAAAAAAAAAAAAAAEAAACgMgAAVgcAAKr4//8BAAAAf39/AAEAAABkAAAAAAAAABQAAABAHwAAAAAAACYAAAAAAAAAwOD//wAAAAAmAAAAZAAAABYAAABMAAAAAAAAAAAAAAAEAAAAAAAAAAEAAADn5uYKAAAAACgAAAAoAAAAZAAAAGQAAAAAAAAAzMzMAAAAAABQAAAAUAAAAGQAAABkAAAAAAAAABcAAAAUAAAAAAAAAAAAAAD/fwAA/38AAAAAAAAJAAAABAAAAAAAAAAeAAAAaAAAAAAAAAAAAAAAAAAAAAAAAAAAAAAAECcAABAnAAAAAAAAAAAAAAAAAAAAAAAAAAAAAAAAAAAAAAAAAAAAABQAAAAAAAAAwMD/AAAAAABkAAAAMgAAAAAAAABkAAAAAAAAAH9/fwAKAAAAIgAAABgAAAAAAAAAAAAAAAAAAAAAAAAAAAAAAAAAAAAkAAAAJAAAAAAAAAAHAAAAAAAAAAAAAAAAAAAAAAAAAAAAAAAAAAAAf39/ACUAAABYAAAAAAAAAAAAAAAAAAAAAAAAAAAAAAAAAAAAAAAAAAAAAAAAAAAAAAAAAAAAAAA/AAAAAAAAAKCGAQAAAAAAAAAAAAAAAAAMAAAAAQAAAAAAAAAAAAAAAAAAAB8AAABUAAAARHLEBf///wEAAAAAAAAAAAAAAAAAAAAAAAAAAAAAAAAAAAAAAAAAAAAAAAB/f38A5+bmA8zMzADAwP8Af39/AAAAAAAAAAAAAAAAAAAAAAAAAAAAIQAAABgAAAAUAAAAYAMAACABAACgRwAA0AIAABAAAAAmAAAACAAAAP//////////MAAAABQAAAAAAAAAAAD//wAAAQAAAP//AAABAA=="/>
               </a:ext>
             </a:extLst>
           </p:cNvSpPr>
@@ -8811,7 +9144,7 @@
               <a:buNone/>
             </a:pPr>
             <a:r>
-              <a:rPr lang="en-us" sz="1200" b="1" cap="none" spc="40">
+              <a:rPr lang="en-us" sz="1200" b="1" cap="none" spc="8">
                 <a:solidFill>
                   <a:srgbClr val="E0A038"/>
                 </a:solidFill>
@@ -8828,7 +9161,7 @@
           <p:cNvSpPr>
             <a:extLst>
               <a:ext uri="smNativeData">
-                <pr:smNativeData xmlns:pr="smNativeData" xmlns="smNativeData" val="SMDATA_16_kRU2ahMAAAAlAAAAZAAAAA0AAAAAkAAAAEgAAACQAAAASAAAAAAAAAABAAAAAAAAAAEAAABQAAAAAAAAAAAA4D8AAAAAAADgPwAAAAAAAOA/AAAAAAAA4D8AAAAAAADgPwAAAAAAAOA/AAAAAAAA4D8AAAAAAADgPwAAAAAAAOA/AAAAAAAA4D8CAAAAjAAAAAAAAAAAAAAARHLEDP///wgAAAAAAAAAAAAAAAAAAAAAAAAAAAAAAAAAAAAAZAAAAAEAAABAAAAAAAAAAAAAAAAAAAAAAAAAAAAAAAAAAAAAAAAAAAAAAAAAAAAAAAAAAAAAAAAAAAAAAAAAAAAAAAAAAAAAAAAAAAAAAAAAAAAAAAAAAAAAAAAAAAAAFAAAADwAAAAAAAAAAAAAAAAAAAAPAAAAAQAAACMAAAAjAAAAIwAAAB4AAAAAAAAAZAAAAGQAAAAAAAAAZAAAAGQAAAAVAAAAYAAAAAAAAAAAAAAADwAAACADAAAAAAAAAAAAAAEAAACgMgAAVgcAAKr4//8BAAAAf39/AAEAAABkAAAAAAAAABQAAABAHwAAAAAAACYAAAAAAAAAwOD//wAAAAAmAAAAZAAAABYAAABMAAAAAAAAAAAAAAAEAAAAAAAAAAEAAADn5uYKAAAAACgAAAAoAAAAZAAAAGQAAAAAAAAAzMzMAAAAAABQAAAAUAAAAGQAAABkAAAAAAAAABcAAAAUAAAAAAAAAAAAAAD/fwAA/38AAAAAAAAJAAAABAAAAAAAAAAeAAAAaAAAAAAAAAAAAAAAAAAAAAAAAAAAAAAAECcAABAnAAAAAAAAAAAAAAAAAAAAAAAAAAAAAAAAAAAAAAAAAAAAABQAAAAAAAAAwMD/AAAAAABkAAAAMgAAAAAAAABkAAAAAAAAAH9/fwAKAAAAIgAAABgAAAAAAAAAAAAAAAAAAAAAAAAAAAAAAAAAAAAkAAAAJAAAAAAAAAAHAAAAAAAAAAAAAAAAAAAAAAAAAAAAAAAAAAAAf39/ACUAAABYAAAAAAAAAAAAAAAAAAAAAAAAAAAAAAAAAAAAAAAAAAAAAAAAAAAAAAAAAAAAAAA/AAAAAAAAAKCGAQAAAAAAAAAAAAAAAAAMAAAAAQAAAAAAAAAAAAAAAAAAAB8AAABUAAAARHLEBf///wEAAAAAAAAAAAAAAAAAAAAAAAAAAAAAAAAAAAAAAAAAAAAAAAB/f38A5+bmA8zMzADAwP8Af39/AAAAAAAAAAAAAAAAAAAAAAAAAAAAIQAAABgAAAAUAAAAYAMAAF0CAACgRwAA3QYAABAAAAAmAAAACAAAAP//////////MAAAABQAAAAAAAAAAAD//wAAAQAAAP//AAABAA=="/>
+                <pr:smNativeData xmlns:pr="smNativeData" xmlns="smNativeData" val="SMDATA_16_V2g2ahMAAAAlAAAAZAAAAA0AAAAAkAAAAEgAAACQAAAASAAAAAAAAAABAAAAAAAAAAEAAABQAAAAAAAAAAAA4D8AAAAAAADgPwAAAAAAAOA/AAAAAAAA4D8AAAAAAADgPwAAAAAAAOA/AAAAAAAA4D8AAAAAAADgPwAAAAAAAOA/AAAAAAAA4D8CAAAAjAAAAAAAAAAAAAAARHLEDP///wgAAAAAAAAAAAAAAAAAAAAAAAAAAAAAAAAAAAAAZAAAAAEAAABAAAAAAAAAAAAAAAAAAAAAAAAAAAAAAAAAAAAAAAAAAAAAAAAAAAAAAAAAAAAAAAAAAAAAAAAAAAAAAAAAAAAAAAAAAAAAAAAAAAAAAAAAAAAAAAAAAAAAFAAAADwAAAAAAAAAAAAAAAAAAAAPAAAAAQAAACMAAAAjAAAAIwAAAB4AAAAAAAAAZAAAAGQAAAAAAAAAZAAAAGQAAAAVAAAAYAAAAAAAAAAAAAAADwAAACADAAAAAAAAAAAAAAEAAACgMgAAVgcAAKr4//8BAAAAf39/AAEAAABkAAAAAAAAABQAAABAHwAAAAAAACYAAAAAAAAAwOD//wAAAAAmAAAAZAAAABYAAABMAAAAAAAAAAAAAAAEAAAAAAAAAAEAAADn5uYKAAAAACgAAAAoAAAAZAAAAGQAAAAAAAAAzMzMAAAAAABQAAAAUAAAAGQAAABkAAAAAAAAABcAAAAUAAAAAAAAAAAAAAD/fwAA/38AAAAAAAAJAAAABAAAAAAAAAAeAAAAaAAAAAAAAAAAAAAAAAAAAAAAAAAAAAAAECcAABAnAAAAAAAAAAAAAAAAAAAAAAAAAAAAAAAAAAAAAAAAAAAAABQAAAAAAAAAwMD/AAAAAABkAAAAMgAAAAAAAABkAAAAAAAAAH9/fwAKAAAAIgAAABgAAAAAAAAAAAAAAAAAAAAAAAAAAAAAAAAAAAAkAAAAJAAAAAAAAAAHAAAAAAAAAAAAAAAAAAAAAAAAAAAAAAAAAAAAf39/ACUAAABYAAAAAAAAAAAAAAAAAAAAAAAAAAAAAAAAAAAAAAAAAAAAAAAAAAAAAAAAAAAAAAA/AAAAAAAAAKCGAQAAAAAAAAAAAAAAAAAMAAAAAQAAAAAAAAAAAAAAAAAAAB8AAABUAAAARHLEBf///wEAAAAAAAAAAAAAAAAAAAAAAAAAAAAAAAAAAAAAAAAAAAAAAAB/f38A5+bmA8zMzADAwP8Af39/AAAAAAAAAAAAAAAAAAAAAAAAAAAAIQAAABgAAAAUAAAAYAMAAF0CAACgRwAA3QYAABAAAAAmAAAACAAAAP//////////MAAAABQAAAAAAAAAAAD//wAAAQAAAP//AAABAA=="/>
               </a:ext>
             </a:extLst>
           </p:cNvSpPr>
@@ -8887,7 +9220,7 @@
           <p:cNvSpPr>
             <a:extLst>
               <a:ext uri="smNativeData">
-                <pr:smNativeData xmlns:pr="smNativeData" xmlns="smNativeData" val="SMDATA_16_kRU2ahMAAAAlAAAAZQAAAA0AAAAAkAAAAEgAAACQAAAASAAAAAAAAAAAAAAAAAAAAAEAAABQAAAAkpbK2xFOuz8AAAAAAADwvwAAAAAAAOA/AAAAAAAA4D8AAAAAAADgPwAAAAAAAOA/AAAAAAAA4D8AAAAAAADgPwAAAAAAAOA/AAAAAAAA4D8CAAAAjAAAAAEAAAAAAAAA7/P4AP///wgAAAAAAAAAAAAAAAAAAAAAAAAAAAAAAAAAAAAAeAAAAAEAAABAAAAAAAAAAAAAAABaAAAAAAAAAAAAAAAAAAAAAAAAAAAAAAAAAAAAAAAAAAAAAAAAAAAAAAAAAAAAAAAAAAAAAAAAAAAAAAAAAAAAAAAAAAAAAAAAAAAAFAAAADwAAAAAAAAAAAAAAAAAAAAPAAAAAQAAACMAAAAjAAAAIwAAAB4AAAAAAAAAZAAAAGQAAAAAAAAAZAAAAGQAAAAVAAAAYAAAAAAAAAAAAAAADwAAACADAAAAAAAAAAAAAAEAAACgMgAAVgcAAKr4//8BAAAAf39/AAEAAABkAAAAAAAAABQAAABAHwAAAAAAACYAAAAAAAAAwOD//wAAAAAmAAAAZAAAABYAAABMAAAAAQAAAAAAAAAGAAAAAAAAAAEAAAC5xNAAPAAAAAAAAAAoAAAAZAAAAGQAAAAAAAAAy8vLADwAAAAAAAAAKAAAAGQAAABkAAAAAAAAABcAAAAUAAAAAAAAAAAAAAD/fwAA/38AAAAAAAAJAAAABAAAAGBPjjseAAAAaAAAAAAAAAAAAAAAAAAAAAAAAAAAAAAAECcAABAnAAAAAAAAAAAAAAAAAAAAAAAAAAAAAAAAAAAAAAAAAAAAAHgAAAAAAAAAwMD/AAAAAAAAAAAAAAAAAAAAAABkAAAAAAAAAH9/fwAKAAAAIgAAABgAAAAAAAAAAAAAAAAAAAAAAAAAAAAAAAAAAAAkAAAAJAAAAAAAAAAHAAAAAAAAAAAAAAAAAAAAAAAAAAAAAAAAAAAAf39/ACUAAABYAAAAAAAAAAAAAAAAAAAAAAAAAAAAAAAAAAAAAAAAAAAAAAAAAAAAAAAAAAAAAAA/AAAAAAAAAKCGAQAAAAAAAAAAAAAAAAAMAAAAAQAAAAAAAAAAAAAAAAAAAB8AAABUAAAA7/P4AP///wEAAAAAAAAAAAAAAAAAAAAAAAAAAAAAAAAAAAAAAAAAAAAAAAB/f38AucTQAMvLywDAwP8Af39/AAAAAAAAAAAAAAAAAAAAAAAAAAAAIQAAABgAAAAUAAAAYAMAALgIAAAIGQAAKBEAABAAAAAmAAAACAAAAP//////////MAAAABQAAAAAAAAAAAD//wAAAQAAAP//AAABAA=="/>
+                <pr:smNativeData xmlns:pr="smNativeData" xmlns="smNativeData" val="SMDATA_16_V2g2ahMAAAAlAAAAZQAAAA0AAAAAkAAAAEgAAACQAAAASAAAAAAAAAAAAAAAAAAAAAEAAABQAAAAkpbK2xFOuz8AAAAAAAAAAAAAAAAAAOA/AAAAAAAA4D8AAAAAAADgPwAAAAAAAOA/AAAAAAAA4D8AAAAAAADgPwAAAAAAAOA/AAAAAAAA4D8CAAAAjAAAAAEAAAAAAAAA7/P4AP///wgAAAAAAAAAAAAAAAAAAAAAAAAAAAAAAAAAAAAAeAAAAAEAAABAAAAAAAAAAAAAAABaAAAAAAAAAAAAAAAAAAAAAAAAAAAAAAAAAAAAAAAAAAAAAAAAAAAAAAAAAAAAAAAAAAAAAAAAAAAAAAAAAAAAAAAAAAAAAAAAAAAAFAAAADwAAAAAAAAAAAAAAAAAAAAPAAAAAQAAACMAAAAjAAAAIwAAAB4AAAAAAAAAZAAAAGQAAAAAAAAAZAAAAGQAAAAVAAAAYAAAAAAAAAAAAAAADwAAACADAAAAAAAAAAAAAAEAAACgMgAAVgcAAKr4//8BAAAAf39/AAEAAABkAAAAAAAAABQAAABAHwAAAAAAACYAAAAAAAAAwOD//wAAAAAmAAAAZAAAABYAAABMAAAAAQAAAAAAAAAGAAAAAAAAAAEAAAC5xNAAPAAAAAAAAAAoAAAAZAAAAGQAAAAAAAAAy8vLADwAAAAAAAAAKAAAAGQAAABkAAAAAAAAABcAAAAUAAAAAAAAAAAAAAD/fwAA/38AAAAAAAAJAAAABAAAAGBPjjseAAAAaAAAAAAAAAAAAAAAAAAAAAAAAAAAAAAAECcAABAnAAAAAAAAAAAAAAAAAAAAAAAAAAAAAAAAAAAAAAAAAAAAAHgAAAAAAAAAwMD/AAAAAAAAAAAAAAAAAAAAAABkAAAAAAAAAH9/fwAKAAAAIgAAABgAAAAAAAAAAAAAAAAAAAAAAAAAAAAAAAAAAAAkAAAAJAAAAAAAAAAHAAAAAAAAAAAAAAAAAAAAAAAAAAAAAAAAAAAAf39/ACUAAABYAAAAAAAAAAAAAAAAAAAAAAAAAAAAAAAAAAAAAAAAAAAAAAAAAAAAAAAAAAAAAAA/AAAAAAAAAKCGAQAAAAAAAAAAAAAAAAAMAAAAAQAAAAAAAAAAAAAAAAAAAB8AAABUAAAA7/P4AP///wEAAAAAAAAAAAAAAAAAAAAAAAAAAAAAAAAAAAAAAAAAAAAAAAB/f38AucTQAMvLywDAwP8Af39/AAAAAAAAAAAAAAAAAAAAAAAAAAAAIQAAABgAAAAUAAAAYAMAALgIAAAIGQAAKBEAABAAAAAmAAAACAAAAP//////////MAAAABQAAAAAAAAAAAD//wAAAQAAAP//AAABAA=="/>
               </a:ext>
             </a:extLst>
           </p:cNvSpPr>
@@ -8924,7 +9257,7 @@
           <p:cNvSpPr>
             <a:extLst>
               <a:ext uri="smNativeData">
-                <pr:smNativeData xmlns:pr="smNativeData" xmlns="smNativeData" val="SMDATA_16_kRU2ahMAAAAlAAAAZAAAAA0AAAAAAAAAAAAAAAAAAAAAAAAAAAAAAAABAAAAAAAAAAEAAABQAAAAAAAAAAAA4D8AAAAAAADgPwAAAAAAAOA/AAAAAAAA4D8AAAAAAADgPwAAAAAAAOA/AAAAAAAA4D8AAAAAAADgPwAAAAAAAOA/AAAAAAAA4D8CAAAAjAAAAAAAAAAAAAAARHLEDP///wgAAAAAAAAAAAAAAAAAAAAAAAAAAAAAAAAAAAAAZAAAAAEAAABAAAAAAAAAAAAAAAAAAAAAAAAAAAAAAAAAAAAAAAAAAAAAAAAAAAAAAAAAAAAAAAAAAAAAAAAAAAAAAAAAAAAAAAAAAAAAAAAAAAAAAAAAAAAAAAAAAAAAFAAAADwAAAAAAAAAAAAAAAAAAAAPAAAAAQAAACMAAAAjAAAAIwAAAB4AAAAAAAAAZAAAAGQAAAAAAAAAZAAAAGQAAAAVAAAAYAAAAAAAAAAAAAAADwAAACADAAAAAAAAAAAAAAEAAACgMgAAVgcAAKr4//8BAAAAf39/AAEAAABkAAAAAAAAABQAAABAHwAAAAAAACYAAAAAAAAAwOD//wAAAAAmAAAAZAAAABYAAABMAAAAAAAAAAAAAAAEAAAAAAAAAAEAAADn5uYKAAAAACgAAAAoAAAAZAAAAGQAAAAAAAAAzMzMAAAAAABQAAAAUAAAAGQAAABkAAAAAAAAABcAAAAUAAAAAAAAAAAAAAD/fwAA/38AAAAAAAAJAAAABAAAAHJnZXQeAAAAaAAAAAAAAAAAAAAAAAAAAAAAAAAAAAAAECcAABAnAAAAAAAAAAAAAAAAAAAAAAAAAAAAAAAAAAAAAAAAAAAAABQAAAAAAAAAwMD/AAAAAABkAAAAMgAAAAAAAABkAAAAAAAAAH9/fwAKAAAAIgAAABgAAAAAAAAAAAAAAAAAAAAAAAAAAAAAAAAAAAAkAAAAJAAAAAAAAAAHAAAAAAAAAAAAAAAAAAAAAAAAAAAAAAAAAAAAf39/ACUAAABYAAAAAAAAAAAAAAAAAAAAAAAAAAAAAAAAAAAAAAAAAAAAAAAAAAAAAAAAAAAAAAA/AAAAAAAAAKCGAQAAAAAAAAAAAAAAAAAMAAAAAQAAAAAAAAAAAAAAAAAAAB8AAABUAAAARHLEBf///wEAAAAAAAAAAAAAAAAAAAAAAAAAAAAAAAAAAAAAAAAAAAAAAAB/f38A5+bmA8zMzADAwP8Af39/AAAAAAAAAAAAAAAAAAAAAAAAAAAAIQAAABgAAAAUAAAAnQQAADoJAAC9FwAAAg4AABAAAAAmAAAACAAAAP//////////MAAAABQAAAAAAAAAAAD//wAAAQAAAP//AAABAA=="/>
+                <pr:smNativeData xmlns:pr="smNativeData" xmlns="smNativeData" val="SMDATA_16_V2g2ahMAAAAlAAAAZAAAAA0AAAAAAAAAAAAAAAAAAAAAAAAAAAAAAAABAAAAAAAAAAEAAABQAAAAAAAAAAAA4D8AAAAAAADgPwAAAAAAAOA/AAAAAAAA4D8AAAAAAADgPwAAAAAAAOA/AAAAAAAA4D8AAAAAAADgPwAAAAAAAOA/AAAAAAAA4D8CAAAAjAAAAAAAAAAAAAAARHLEDP///wgAAAAAAAAAAAAAAAAAAAAAAAAAAAAAAAAAAAAAZAAAAAEAAABAAAAAAAAAAAAAAAAAAAAAAAAAAAAAAAAAAAAAAAAAAAAAAAAAAAAAAAAAAAAAAAAAAAAAAAAAAAAAAAAAAAAAAAAAAAAAAAAAAAAAAAAAAAAAAAAAAAAAFAAAADwAAAAAAAAAAAAAAAAAAAAPAAAAAQAAACMAAAAjAAAAIwAAAB4AAAAAAAAAZAAAAGQAAAAAAAAAZAAAAGQAAAAVAAAAYAAAAAAAAAAAAAAADwAAACADAAAAAAAAAAAAAAEAAACgMgAAVgcAAKr4//8BAAAAf39/AAEAAABkAAAAAAAAABQAAABAHwAAAAAAACYAAAAAAAAAwOD//wAAAAAmAAAAZAAAABYAAABMAAAAAAAAAAAAAAAEAAAAAAAAAAEAAADn5uYKAAAAACgAAAAoAAAAZAAAAGQAAAAAAAAAzMzMAAAAAABQAAAAUAAAAGQAAABkAAAAAAAAABcAAAAUAAAAAAAAAAAAAAD/fwAA/38AAAAAAAAJAAAABAAAAHJnZXQeAAAAaAAAAAAAAAAAAAAAAAAAAAAAAAAAAAAAECcAABAnAAAAAAAAAAAAAAAAAAAAAAAAAAAAAAAAAAAAAAAAAAAAABQAAAAAAAAAwMD/AAAAAABkAAAAMgAAAAAAAABkAAAAAAAAAH9/fwAKAAAAIgAAABgAAAAAAAAAAAAAAAAAAAAAAAAAAAAAAAAAAAAkAAAAJAAAAAAAAAAHAAAAAAAAAAAAAAAAAAAAAAAAAAAAAAAAAAAAf39/ACUAAABYAAAAAAAAAAAAAAAAAAAAAAAAAAAAAAAAAAAAAAAAAAAAAAAAAAAAAAAAAAAAAAA/AAAAAAAAAKCGAQAAAAAAAAAAAAAAAAAMAAAAAQAAAAAAAAAAAAAAAAAAAB8AAABUAAAARHLEBf///wEAAAAAAAAAAAAAAAAAAAAAAAAAAAAAAAAAAAAAAAAAAAAAAAB/f38A5+bmA8zMzADAwP8Af39/AAAAAAAAAAAAAAAAAAAAAAAAAAAAIQAAABgAAAAUAAAAnQQAADoJAAC9FwAAAg4AABAAAAAmAAAACAAAAP//////////MAAAABQAAAAAAAAAAAD//wAAAQAAAP//AAABAA=="/>
               </a:ext>
             </a:extLst>
           </p:cNvSpPr>
@@ -8969,7 +9302,7 @@
           <p:cNvSpPr>
             <a:extLst>
               <a:ext uri="smNativeData">
-                <pr:smNativeData xmlns:pr="smNativeData" xmlns="smNativeData" val="SMDATA_16_kRU2ahMAAAAlAAAAZAAAAA0AAAAAAAAAAAAAAAAAAAAAAAAAAAAAAAABAAAAAAAAAAEAAABQAAAAAAAAAAAA4D8AAAAAAADgPwAAAAAAAOA/AAAAAAAA4D8AAAAAAADgPwAAAAAAAOA/AAAAAAAA4D8AAAAAAADgPwAAAAAAAOA/AAAAAAAA4D8CAAAAjAAAAAAAAAAAAAAARHLEDP///wgAAAAAAAAAAAAAAAAAAAAAAAAAAAAAAAAAAAAAZAAAAAEAAABAAAAAAAAAAAAAAAAAAAAAAAAAAAAAAAAAAAAAAAAAAAAAAAAAAAAAAAAAAAAAAAAAAAAAAAAAAAAAAAAAAAAAAAAAAAAAAAAAAAAAAAAAAAAAAAAAAAAAFAAAADwAAAAAAAAAAAAAAAAAAAAPAAAAAQAAACMAAAAjAAAAIwAAAB4AAAAAAAAAZAAAAGQAAAAAAAAAZAAAAGQAAAAVAAAAYAAAAAAAAAAAAAAADwAAACADAAAAAAAAAAAAAAEAAACgMgAAVgcAAKr4//8BAAAAf39/AAEAAABkAAAAAAAAABQAAABAHwAAAAAAACYAAAAAAAAAwOD//wAAAAAmAAAAZAAAABYAAABMAAAAAAAAAAAAAAAEAAAAAAAAAAEAAADn5uYKAAAAACgAAAAoAAAAZAAAAGQAAAAAAAAAzMzMAAAAAABQAAAAUAAAAGQAAABkAAAAAAAAABcAAAAUAAAAAAAAAAAAAAD/fwAA/38AAAAAAAAJAAAABAAAAD0iZW4eAAAAaAAAAAAAAAAAAAAAAAAAAAAAAAAAAAAAECcAABAnAAAAAAAAAAAAAAAAAAAAAAAAAAAAAAAAAAAAAAAAAAAAABQAAAAAAAAAwMD/AAAAAABkAAAAMgAAAAAAAABkAAAAAAAAAH9/fwAKAAAAIgAAABgAAAAAAAAAAAAAAAAAAAAAAAAAAAAAAAAAAAAkAAAAJAAAAAAAAAAHAAAAAAAAAAAAAAAAAAAAAAAAAAAAAAAAAAAAf39/ACUAAABYAAAAAAAAAAAAAAAAAAAAAAAAAAAAAAAAAAAAAAAAAAAAAAAAAAAAAAAAAAAAAAA/AAAAAAAAAKCGAQAAAAAAAAAAAAAAAAAMAAAAAQAAAAAAAAAAAAAAAAAAAB8AAABUAAAARHLEBf///wEAAAAAAAAAAAAAAAAAAAAAAAAAAAAAAAAAAAAAAAAAAAAAAAB/f38A5+bmA8zMzADAwP8Af39/AAAAAAAAAAAAAAAAAAAAAAAAAAAAIQAAABgAAAAUAAAAugQAANYNAAAiGAAAphAAABAAAAAmAAAACAAAAP//////////MAAAABQAAAAAAAAAAAD//wAAAQAAAP//AAABAA=="/>
+                <pr:smNativeData xmlns:pr="smNativeData" xmlns="smNativeData" val="SMDATA_16_V2g2ahMAAAAlAAAAZAAAAA0AAAAAAAAAAAAAAAAAAAAAAAAAAAAAAAABAAAAAAAAAAEAAABQAAAAAAAAAAAA4D8AAAAAAADgPwAAAAAAAOA/AAAAAAAA4D8AAAAAAADgPwAAAAAAAOA/AAAAAAAA4D8AAAAAAADgPwAAAAAAAOA/AAAAAAAA4D8CAAAAjAAAAAAAAAAAAAAARHLEDP///wgAAAAAAAAAAAAAAAAAAAAAAAAAAAAAAAAAAAAAZAAAAAEAAABAAAAAAAAAAAAAAAAAAAAAAAAAAAAAAAAAAAAAAAAAAAAAAAAAAAAAAAAAAAAAAAAAAAAAAAAAAAAAAAAAAAAAAAAAAAAAAAAAAAAAAAAAAAAAAAAAAAAAFAAAADwAAAAAAAAAAAAAAAAAAAAPAAAAAQAAACMAAAAjAAAAIwAAAB4AAAAAAAAAZAAAAGQAAAAAAAAAZAAAAGQAAAAVAAAAYAAAAAAAAAAAAAAADwAAACADAAAAAAAAAAAAAAEAAACgMgAAVgcAAKr4//8BAAAAf39/AAEAAABkAAAAAAAAABQAAABAHwAAAAAAACYAAAAAAAAAwOD//wAAAAAmAAAAZAAAABYAAABMAAAAAAAAAAAAAAAEAAAAAAAAAAEAAADn5uYKAAAAACgAAAAoAAAAZAAAAGQAAAAAAAAAzMzMAAAAAABQAAAAUAAAAGQAAABkAAAAAAAAABcAAAAUAAAAAAAAAAAAAAD/fwAA/38AAAAAAAAJAAAABAAAAD0iZW4eAAAAaAAAAAAAAAAAAAAAAAAAAAAAAAAAAAAAECcAABAnAAAAAAAAAAAAAAAAAAAAAAAAAAAAAAAAAAAAAAAAAAAAABQAAAAAAAAAwMD/AAAAAABkAAAAMgAAAAAAAABkAAAAAAAAAH9/fwAKAAAAIgAAABgAAAAAAAAAAAAAAAAAAAAAAAAAAAAAAAAAAAAkAAAAJAAAAAAAAAAHAAAAAAAAAAAAAAAAAAAAAAAAAAAAAAAAAAAAf39/ACUAAABYAAAAAAAAAAAAAAAAAAAAAAAAAAAAAAAAAAAAAAAAAAAAAAAAAAAAAAAAAAAAAAA/AAAAAAAAAKCGAQAAAAAAAAAAAAAAAAAMAAAAAQAAAAAAAAAAAAAAAAAAAB8AAABUAAAARHLEBf///wEAAAAAAAAAAAAAAAAAAAAAAAAAAAAAAAAAAAAAAAAAAAAAAAB/f38A5+bmA8zMzADAwP8Af39/AAAAAAAAAAAAAAAAAAAAAAAAAAAAIQAAABgAAAAUAAAAugQAANYNAAAiGAAAphAAABAAAAAmAAAACAAAAP//////////MAAAABQAAAAAAAAAAAD//wAAAQAAAP//AAABAA=="/>
               </a:ext>
             </a:extLst>
           </p:cNvSpPr>
@@ -9030,7 +9363,7 @@
           <p:cNvSpPr>
             <a:extLst>
               <a:ext uri="smNativeData">
-                <pr:smNativeData xmlns:pr="smNativeData" xmlns="smNativeData" val="SMDATA_16_kRU2ahMAAAAlAAAAZQAAAA0AAAAAkAAAAEgAAACQAAAASAAAAAAAAAAAAAAAAAAAAAEAAABQAAAAkpbK2xFOuz8AAAAAAADwvwAAAAAAAOA/AAAAAAAA4D8AAAAAAADgPwAAAAAAAOA/AAAAAAAA4D8AAAAAAADgPwAAAAAAAOA/AAAAAAAA4D8CAAAAjAAAAAEAAAAAAAAA7/P4AP///wgAAAAAAAAAAAAAAAAAAAAAAAAAAAAAAAAAAAAAeAAAAAEAAABAAAAAAAAAAAAAAABaAAAAAAAAAAAAAAAAAAAAAAAAAAAAAAAAAAAAAAAAAAAAAAAAAAAAAAAAAAAAAAAAAAAAAAAAAAAAAAAAAAAAAAAAAAAAAAAAAAAAFAAAADwAAAAAAAAAAAAAAAAAAAAPAAAAAQAAACMAAAAjAAAAIwAAAB4AAAAAAAAAZAAAAGQAAAAAAAAAZAAAAGQAAAAVAAAAYAAAAAAAAAAAAAAADwAAACADAAAAAAAAAAAAAAEAAACgMgAAVgcAAKr4//8BAAAAf39/AAEAAABkAAAAAAAAABQAAABAHwAAAAAAACYAAAAAAAAAwOD//wAAAAAmAAAAZAAAABYAAABMAAAAAQAAAAAAAAAGAAAAAAAAAAEAAAC5xNAAPAAAAAAAAAAoAAAAZAAAAGQAAAAAAAAAy8vLADwAAAAAAAAAKAAAAGQAAABkAAAAAAAAABcAAAAUAAAAAAAAAAAAAAD/fwAA/38AAAAAAAAJAAAABAAAAG9sPSIeAAAAaAAAAAAAAAAAAAAAAAAAAAAAAAAAAAAAECcAABAnAAAAAAAAAAAAAAAAAAAAAAAAAAAAAAAAAAAAAAAAAAAAAHgAAAAAAAAAwMD/AAAAAAAAAAAAAAAAAAAAAABkAAAAAAAAAH9/fwAKAAAAIgAAABgAAAAAAAAAAAAAAAAAAAAAAAAAAAAAAAAAAAAkAAAAJAAAAAAAAAAHAAAAAAAAAAAAAAAAAAAAAAAAAAAAAAAAAAAAf39/ACUAAABYAAAAAAAAAAAAAAAAAAAAAAAAAAAAAAAAAAAAAAAAAAAAAAAAAAAAAAAAAAAAAAA/AAAAAAAAAKCGAQAAAAAAAAAAAAAAAAAMAAAAAQAAAAAAAAAAAAAAAAAAAB8AAABUAAAA7/P4AP///wEAAAAAAAAAAAAAAAAAAAAAAAAAAAAAAAAAAAAAAAAAAAAAAAB/f38AucTQAMvLywDAwP8Af39/AAAAAAAAAAAAAAAAAAAAAAAAAAAAIQAAABgAAAAUAAAAGhoAALgIAADCLwAAKBEAABAAAAAmAAAACAAAAP//////////MAAAABQAAAAAAAAAAAD//wAAAQAAAP//AAABAA=="/>
+                <pr:smNativeData xmlns:pr="smNativeData" xmlns="smNativeData" val="SMDATA_16_V2g2ahMAAAAlAAAAZQAAAA0AAAAAkAAAAEgAAACQAAAASAAAAAAAAAAAAAAAAAAAAAEAAABQAAAAkpbK2xFOuz8AAAAAAAAAAAAAAAAAAOA/AAAAAAAA4D8AAAAAAADgPwAAAAAAAOA/AAAAAAAA4D8AAAAAAADgPwAAAAAAAOA/AAAAAAAA4D8CAAAAjAAAAAEAAAAAAAAA7/P4AP///wgAAAAAAAAAAAAAAAAAAAAAAAAAAAAAAAAAAAAAeAAAAAEAAABAAAAAAAAAAAAAAABaAAAAAAAAAAAAAAAAAAAAAAAAAAAAAAAAAAAAAAAAAAAAAAAAAAAAAAAAAAAAAAAAAAAAAAAAAAAAAAAAAAAAAAAAAAAAAAAAAAAAFAAAADwAAAAAAAAAAAAAAAAAAAAPAAAAAQAAACMAAAAjAAAAIwAAAB4AAAAAAAAAZAAAAGQAAAAAAAAAZAAAAGQAAAAVAAAAYAAAAAAAAAAAAAAADwAAACADAAAAAAAAAAAAAAEAAACgMgAAVgcAAKr4//8BAAAAf39/AAEAAABkAAAAAAAAABQAAABAHwAAAAAAACYAAAAAAAAAwOD//wAAAAAmAAAAZAAAABYAAABMAAAAAQAAAAAAAAAGAAAAAAAAAAEAAAC5xNAAPAAAAAAAAAAoAAAAZAAAAGQAAAAAAAAAy8vLADwAAAAAAAAAKAAAAGQAAABkAAAAAAAAABcAAAAUAAAAAAAAAAAAAAD/fwAA/38AAAAAAAAJAAAABAAAAG9sPSIeAAAAaAAAAAAAAAAAAAAAAAAAAAAAAAAAAAAAECcAABAnAAAAAAAAAAAAAAAAAAAAAAAAAAAAAAAAAAAAAAAAAAAAAHgAAAAAAAAAwMD/AAAAAAAAAAAAAAAAAAAAAABkAAAAAAAAAH9/fwAKAAAAIgAAABgAAAAAAAAAAAAAAAAAAAAAAAAAAAAAAAAAAAAkAAAAJAAAAAAAAAAHAAAAAAAAAAAAAAAAAAAAAAAAAAAAAAAAAAAAf39/ACUAAABYAAAAAAAAAAAAAAAAAAAAAAAAAAAAAAAAAAAAAAAAAAAAAAAAAAAAAAAAAAAAAAA/AAAAAAAAAKCGAQAAAAAAAAAAAAAAAAAMAAAAAQAAAAAAAAAAAAAAAAAAAB8AAABUAAAA7/P4AP///wEAAAAAAAAAAAAAAAAAAAAAAAAAAAAAAAAAAAAAAAAAAAAAAAB/f38AucTQAMvLywDAwP8Af39/AAAAAAAAAAAAAAAAAAAAAAAAAAAAIQAAABgAAAAUAAAAGhoAALgIAADCLwAAKBEAABAAAAAmAAAACAAAAP//////////MAAAABQAAAAAAAAAAAD//wAAAQAAAP//AAABAA=="/>
               </a:ext>
             </a:extLst>
           </p:cNvSpPr>
@@ -9067,7 +9400,7 @@
           <p:cNvSpPr>
             <a:extLst>
               <a:ext uri="smNativeData">
-                <pr:smNativeData xmlns:pr="smNativeData" xmlns="smNativeData" val="SMDATA_16_kRU2ahMAAAAlAAAAZAAAAA0AAAAAAAAAAAAAAAAAAAAAAAAAAAAAAAABAAAAAAAAAAEAAABQAAAAAAAAAAAA4D8AAAAAAADgPwAAAAAAAOA/AAAAAAAA4D8AAAAAAADgPwAAAAAAAOA/AAAAAAAA4D8AAAAAAADgPwAAAAAAAOA/AAAAAAAA4D8CAAAAjAAAAAAAAAAAAAAARHLEDP///wgAAAAAAAAAAAAAAAAAAAAAAAAAAAAAAAAAAAAAZAAAAAEAAABAAAAAAAAAAAAAAAAAAAAAAAAAAAAAAAAAAAAAAAAAAAAAAAAAAAAAAAAAAAAAAAAAAAAAAAAAAAAAAAAAAAAAAAAAAAAAAAAAAAAAAAAAAAAAAAAAAAAAFAAAADwAAAAAAAAAAAAAAAAAAAAPAAAAAQAAACMAAAAjAAAAIwAAAB4AAAAAAAAAZAAAAGQAAAAAAAAAZAAAAGQAAAAVAAAAYAAAAAAAAAAAAAAADwAAACADAAAAAAAAAAAAAAEAAACgMgAAVgcAAKr4//8BAAAAf39/AAEAAABkAAAAAAAAABQAAABAHwAAAAAAACYAAAAAAAAAwOD//wAAAAAmAAAAZAAAABYAAABMAAAAAAAAAAAAAAAEAAAAAAAAAAEAAADn5uYKAAAAACgAAAAoAAAAZAAAAGQAAAAAAAAAzMzMAAAAAABQAAAAUAAAAGQAAABkAAAAAAAAABcAAAAUAAAAAAAAAAAAAAD/fwAA/38AAAAAAAAJAAAABAAAAHNvYXMeAAAAaAAAAAAAAAAAAAAAAAAAAAAAAAAAAAAAECcAABAnAAAAAAAAAAAAAAAAAAAAAAAAAAAAAAAAAAAAAAAAAAAAABQAAAAAAAAAwMD/AAAAAABkAAAAMgAAAAAAAABkAAAAAAAAAH9/fwAKAAAAIgAAABgAAAAAAAAAAAAAAAAAAAAAAAAAAAAAAAAAAAAkAAAAJAAAAAAAAAAHAAAAAAAAAAAAAAAAAAAAAAAAAAAAAAAAAAAAf39/ACUAAABYAAAAAAAAAAAAAAAAAAAAAAAAAAAAAAAAAAAAAAAAAAAAAAAAAAAAAAAAAAAAAAA/AAAAAAAAAKCGAQAAAAAAAAAAAAAAAAAMAAAAAQAAAAAAAAAAAAAAAAAAAB8AAABUAAAARHLEBf///wEAAAAAAAAAAAAAAAAAAAAAAAAAAAAAAAAAAAAAAAAAAAAAAAB/f38A5+bmA8zMzADAwP8Af39/AAAAAAAAAAAAAAAAAAAAAAAAAAAAIQAAABgAAAAUAAAAVhsAADoJAAB2LgAAAg4AABAAAAAmAAAACAAAAP//////////MAAAABQAAAAAAAAAAAD//wAAAQAAAP//AAABAA=="/>
+                <pr:smNativeData xmlns:pr="smNativeData" xmlns="smNativeData" val="SMDATA_16_V2g2ahMAAAAlAAAAZAAAAA0AAAAAAAAAAAAAAAAAAAAAAAAAAAAAAAABAAAAAAAAAAEAAABQAAAAAAAAAAAA4D8AAAAAAADgPwAAAAAAAOA/AAAAAAAA4D8AAAAAAADgPwAAAAAAAOA/AAAAAAAA4D8AAAAAAADgPwAAAAAAAOA/AAAAAAAA4D8CAAAAjAAAAAAAAAAAAAAARHLEDP///wgAAAAAAAAAAAAAAAAAAAAAAAAAAAAAAAAAAAAAZAAAAAEAAABAAAAAAAAAAAAAAAAAAAAAAAAAAAAAAAAAAAAAAAAAAAAAAAAAAAAAAAAAAAAAAAAAAAAAAAAAAAAAAAAAAAAAAAAAAAAAAAAAAAAAAAAAAAAAAAAAAAAAFAAAADwAAAAAAAAAAAAAAAAAAAAPAAAAAQAAACMAAAAjAAAAIwAAAB4AAAAAAAAAZAAAAGQAAAAAAAAAZAAAAGQAAAAVAAAAYAAAAAAAAAAAAAAADwAAACADAAAAAAAAAAAAAAEAAACgMgAAVgcAAKr4//8BAAAAf39/AAEAAABkAAAAAAAAABQAAABAHwAAAAAAACYAAAAAAAAAwOD//wAAAAAmAAAAZAAAABYAAABMAAAAAAAAAAAAAAAEAAAAAAAAAAEAAADn5uYKAAAAACgAAAAoAAAAZAAAAGQAAAAAAAAAzMzMAAAAAABQAAAAUAAAAGQAAABkAAAAAAAAABcAAAAUAAAAAAAAAAAAAAD/fwAA/38AAAAAAAAJAAAABAAAAHNvYXMeAAAAaAAAAAAAAAAAAAAAAAAAAAAAAAAAAAAAECcAABAnAAAAAAAAAAAAAAAAAAAAAAAAAAAAAAAAAAAAAAAAAAAAABQAAAAAAAAAwMD/AAAAAABkAAAAMgAAAAAAAABkAAAAAAAAAH9/fwAKAAAAIgAAABgAAAAAAAAAAAAAAAAAAAAAAAAAAAAAAAAAAAAkAAAAJAAAAAAAAAAHAAAAAAAAAAAAAAAAAAAAAAAAAAAAAAAAAAAAf39/ACUAAABYAAAAAAAAAAAAAAAAAAAAAAAAAAAAAAAAAAAAAAAAAAAAAAAAAAAAAAAAAAAAAAA/AAAAAAAAAKCGAQAAAAAAAAAAAAAAAAAMAAAAAQAAAAAAAAAAAAAAAAAAAB8AAABUAAAARHLEBf///wEAAAAAAAAAAAAAAAAAAAAAAAAAAAAAAAAAAAAAAAAAAAAAAAB/f38A5+bmA8zMzADAwP8Af39/AAAAAAAAAAAAAAAAAAAAAAAAAAAAIQAAABgAAAAUAAAAVhsAADoJAAB2LgAAAg4AABAAAAAmAAAACAAAAP//////////MAAAABQAAAAAAAAAAAD//wAAAQAAAP//AAABAA=="/>
               </a:ext>
             </a:extLst>
           </p:cNvSpPr>
@@ -9112,7 +9445,7 @@
           <p:cNvSpPr>
             <a:extLst>
               <a:ext uri="smNativeData">
-                <pr:smNativeData xmlns:pr="smNativeData" xmlns="smNativeData" val="SMDATA_16_kRU2ahMAAAAlAAAAZAAAAA0AAAAAAAAAAAAAAAAAAAAAAAAAAAAAAAABAAAAAAAAAAEAAABQAAAAAAAAAAAA4D8AAAAAAADgPwAAAAAAAOA/AAAAAAAA4D8AAAAAAADgPwAAAAAAAOA/AAAAAAAA4D8AAAAAAADgPwAAAAAAAOA/AAAAAAAA4D8CAAAAjAAAAAAAAAAAAAAARHLEDP///wgAAAAAAAAAAAAAAAAAAAAAAAAAAAAAAAAAAAAAZAAAAAEAAABAAAAAAAAAAAAAAAAAAAAAAAAAAAAAAAAAAAAAAAAAAAAAAAAAAAAAAAAAAAAAAAAAAAAAAAAAAAAAAAAAAAAAAAAAAAAAAAAAAAAAAAAAAAAAAAAAAAAAFAAAADwAAAAAAAAAAAAAAAAAAAAPAAAAAQAAACMAAAAjAAAAIwAAAB4AAAAAAAAAZAAAAGQAAAAAAAAAZAAAAGQAAAAVAAAAYAAAAAAAAAAAAAAADwAAACADAAAAAAAAAAAAAAEAAACgMgAAVgcAAKr4//8BAAAAf39/AAEAAABkAAAAAAAAABQAAABAHwAAAAAAACYAAAAAAAAAwOD//wAAAAAmAAAAZAAAABYAAABMAAAAAAAAAAAAAAAEAAAAAAAAAAEAAADn5uYKAAAAACgAAAAoAAAAZAAAAGQAAAAAAAAAzMzMAAAAAABQAAAAUAAAAGQAAABkAAAAAAAAABcAAAAUAAAAAAAAAAAAAAD/fwAA/38AAAAAAAAJAAAABAAAAGxyIHYeAAAAaAAAAAAAAAAAAAAAAAAAAAAAAAAAAAAAECcAABAnAAAAAAAAAAAAAAAAAAAAAAAAAAAAAAAAAAAAAAAAAAAAABQAAAAAAAAAwMD/AAAAAABkAAAAMgAAAAAAAABkAAAAAAAAAH9/fwAKAAAAIgAAABgAAAAAAAAAAAAAAAAAAAAAAAAAAAAAAAAAAAAkAAAAJAAAAAAAAAAHAAAAAAAAAAAAAAAAAAAAAAAAAAAAAAAAAAAAf39/ACUAAABYAAAAAAAAAAAAAAAAAAAAAAAAAAAAAAAAAAAAAAAAAAAAAAAAAAAAAAAAAAAAAAA/AAAAAAAAAKCGAQAAAAAAAAAAAAAAAAAMAAAAAQAAAAAAAAAAAAAAAAAAAB8AAABUAAAARHLEBf///wEAAAAAAAAAAAAAAAAAAAAAAAAAAAAAAAAAAAAAAAAAAAAAAAB/f38A5+bmA8zMzADAwP8Af39/AAAAAAAAAAAAAAAAAAAAAAAAAAAAIQAAABgAAAAUAAAAcxsAANYNAADbLgAAphAAABAAAAAmAAAACAAAAP//////////MAAAABQAAAAAAAAAAAD//wAAAQAAAP//AAABAA=="/>
+                <pr:smNativeData xmlns:pr="smNativeData" xmlns="smNativeData" val="SMDATA_16_V2g2ahMAAAAlAAAAZAAAAA0AAAAAAAAAAAAAAAAAAAAAAAAAAAAAAAABAAAAAAAAAAEAAABQAAAAAAAAAAAA4D8AAAAAAADgPwAAAAAAAOA/AAAAAAAA4D8AAAAAAADgPwAAAAAAAOA/AAAAAAAA4D8AAAAAAADgPwAAAAAAAOA/AAAAAAAA4D8CAAAAjAAAAAAAAAAAAAAARHLEDP///wgAAAAAAAAAAAAAAAAAAAAAAAAAAAAAAAAAAAAAZAAAAAEAAABAAAAAAAAAAAAAAAAAAAAAAAAAAAAAAAAAAAAAAAAAAAAAAAAAAAAAAAAAAAAAAAAAAAAAAAAAAAAAAAAAAAAAAAAAAAAAAAAAAAAAAAAAAAAAAAAAAAAAFAAAADwAAAAAAAAAAAAAAAAAAAAPAAAAAQAAACMAAAAjAAAAIwAAAB4AAAAAAAAAZAAAAGQAAAAAAAAAZAAAAGQAAAAVAAAAYAAAAAAAAAAAAAAADwAAACADAAAAAAAAAAAAAAEAAACgMgAAVgcAAKr4//8BAAAAf39/AAEAAABkAAAAAAAAABQAAABAHwAAAAAAACYAAAAAAAAAwOD//wAAAAAmAAAAZAAAABYAAABMAAAAAAAAAAAAAAAEAAAAAAAAAAEAAADn5uYKAAAAACgAAAAoAAAAZAAAAGQAAAAAAAAAzMzMAAAAAABQAAAAUAAAAGQAAABkAAAAAAAAABcAAAAUAAAAAAAAAAAAAAD/fwAA/38AAAAAAAAJAAAABAAAAGxyIHYeAAAAaAAAAAAAAAAAAAAAAAAAAAAAAAAAAAAAECcAABAnAAAAAAAAAAAAAAAAAAAAAAAAAAAAAAAAAAAAAAAAAAAAABQAAAAAAAAAwMD/AAAAAABkAAAAMgAAAAAAAABkAAAAAAAAAH9/fwAKAAAAIgAAABgAAAAAAAAAAAAAAAAAAAAAAAAAAAAAAAAAAAAkAAAAJAAAAAAAAAAHAAAAAAAAAAAAAAAAAAAAAAAAAAAAAAAAAAAAf39/ACUAAABYAAAAAAAAAAAAAAAAAAAAAAAAAAAAAAAAAAAAAAAAAAAAAAAAAAAAAAAAAAAAAAA/AAAAAAAAAKCGAQAAAAAAAAAAAAAAAAAMAAAAAQAAAAAAAAAAAAAAAAAAAB8AAABUAAAARHLEBf///wEAAAAAAAAAAAAAAAAAAAAAAAAAAAAAAAAAAAAAAAAAAAAAAAB/f38A5+bmA8zMzADAwP8Af39/AAAAAAAAAAAAAAAAAAAAAAAAAAAAIQAAABgAAAAUAAAAcxsAANYNAADbLgAAphAAABAAAAAmAAAACAAAAP//////////MAAAABQAAAAAAAAAAAD//wAAAQAAAP//AAABAA=="/>
               </a:ext>
             </a:extLst>
           </p:cNvSpPr>
@@ -9173,7 +9506,7 @@
           <p:cNvSpPr>
             <a:extLst>
               <a:ext uri="smNativeData">
-                <pr:smNativeData xmlns:pr="smNativeData" xmlns="smNativeData" val="SMDATA_16_kRU2ahMAAAAlAAAAZQAAAA0AAAAAkAAAAEgAAACQAAAASAAAAAAAAAAAAAAAAAAAAAEAAABQAAAAkpbK2xFOuz8AAAAAAADwvwAAAAAAAOA/AAAAAAAA4D8AAAAAAADgPwAAAAAAAOA/AAAAAAAA4D8AAAAAAADgPwAAAAAAAOA/AAAAAAAA4D8CAAAAjAAAAAEAAAAAAAAA7/P4AP///wgAAAAAAAAAAAAAAAAAAAAAAAAAAAAAAAAAAAAAeAAAAAEAAABAAAAAAAAAAAAAAABaAAAAAAAAAAAAAAAAAAAAAAAAAAAAAAAAAAAAAAAAAAAAAAAAAAAAAAAAAAAAAAAAAAAAAAAAAAAAAAAAAAAAAAAAAAAAAAAAAAAAFAAAADwAAAAAAAAAAAAAAAAAAAAPAAAAAQAAACMAAAAjAAAAIwAAAB4AAAAAAAAAZAAAAGQAAAAAAAAAZAAAAGQAAAAVAAAAYAAAAAAAAAAAAAAADwAAACADAAAAAAAAAAAAAAEAAACgMgAAVgcAAKr4//8BAAAAf39/AAEAAABkAAAAAAAAABQAAABAHwAAAAAAACYAAAAAAAAAwOD//wAAAAAmAAAAZAAAABYAAABMAAAAAQAAAAAAAAAGAAAAAAAAAAEAAAC5xNAAPAAAAAAAAAAoAAAAZAAAAGQAAAAAAAAAy8vLADwAAAAAAAAAKAAAAGQAAABkAAAAAAAAABcAAAAUAAAAAAAAAAAAAAD/fwAA/38AAAAAAAAJAAAABAAAADpsbj4eAAAAaAAAAAAAAAAAAAAAAAAAAAAAAAAAAAAAECcAABAnAAAAAAAAAAAAAAAAAAAAAAAAAAAAAAAAAAAAAAAAAAAAAHgAAAAAAAAAwMD/AAAAAAAAAAAAAAAAAAAAAABkAAAAAAAAAH9/fwAKAAAAIgAAABgAAAAAAAAAAAAAAAAAAAAAAAAAAAAAAAAAAAAkAAAAJAAAAAAAAAAHAAAAAAAAAAAAAAAAAAAAAAAAAAAAAAAAAAAAf39/ACUAAABYAAAAAAAAAAAAAAAAAAAAAAAAAAAAAAAAAAAAAAAAAAAAAAAAAAAAAAAAAAAAAAA/AAAAAAAAAKCGAQAAAAAAAAAAAAAAAAAMAAAAAQAAAAAAAAAAAAAAAAAAAB8AAABUAAAA7/P4AP///wEAAAAAAAAAAAAAAAAAAAAAAAAAAAAAAAAAAAAAAAAAAAAAAAB/f38AucTQAMvLywDAwP8Af39/AAAAAAAAAAAAAAAAAAAAAAAAAAAAIQAAABgAAAAUAAAA0zAAALgIAAB7RgAAKBEAABAAAAAmAAAACAAAAP//////////MAAAABQAAAAAAAAAAAD//wAAAQAAAP//AAABAA=="/>
+                <pr:smNativeData xmlns:pr="smNativeData" xmlns="smNativeData" val="SMDATA_16_V2g2ahMAAAAlAAAAZQAAAA0AAAAAkAAAAEgAAACQAAAASAAAAAAAAAAAAAAAAAAAAAEAAABQAAAAkpbK2xFOuz8AAAAAAAAAAAAAAAAAAOA/AAAAAAAA4D8AAAAAAADgPwAAAAAAAOA/AAAAAAAA4D8AAAAAAADgPwAAAAAAAOA/AAAAAAAA4D8CAAAAjAAAAAEAAAAAAAAA7/P4AP///wgAAAAAAAAAAAAAAAAAAAAAAAAAAAAAAAAAAAAAeAAAAAEAAABAAAAAAAAAAAAAAABaAAAAAAAAAAAAAAAAAAAAAAAAAAAAAAAAAAAAAAAAAAAAAAAAAAAAAAAAAAAAAAAAAAAAAAAAAAAAAAAAAAAAAAAAAAAAAAAAAAAAFAAAADwAAAAAAAAAAAAAAAAAAAAPAAAAAQAAACMAAAAjAAAAIwAAAB4AAAAAAAAAZAAAAGQAAAAAAAAAZAAAAGQAAAAVAAAAYAAAAAAAAAAAAAAADwAAACADAAAAAAAAAAAAAAEAAACgMgAAVgcAAKr4//8BAAAAf39/AAEAAABkAAAAAAAAABQAAABAHwAAAAAAACYAAAAAAAAAwOD//wAAAAAmAAAAZAAAABYAAABMAAAAAQAAAAAAAAAGAAAAAAAAAAEAAAC5xNAAPAAAAAAAAAAoAAAAZAAAAGQAAAAAAAAAy8vLADwAAAAAAAAAKAAAAGQAAABkAAAAAAAAABcAAAAUAAAAAAAAAAAAAAD/fwAA/38AAAAAAAAJAAAABAAAADpsbj4eAAAAaAAAAAAAAAAAAAAAAAAAAAAAAAAAAAAAECcAABAnAAAAAAAAAAAAAAAAAAAAAAAAAAAAAAAAAAAAAAAAAAAAAHgAAAAAAAAAwMD/AAAAAAAAAAAAAAAAAAAAAABkAAAAAAAAAH9/fwAKAAAAIgAAABgAAAAAAAAAAAAAAAAAAAAAAAAAAAAAAAAAAAAkAAAAJAAAAAAAAAAHAAAAAAAAAAAAAAAAAAAAAAAAAAAAAAAAAAAAf39/ACUAAABYAAAAAAAAAAAAAAAAAAAAAAAAAAAAAAAAAAAAAAAAAAAAAAAAAAAAAAAAAAAAAAA/AAAAAAAAAKCGAQAAAAAAAAAAAAAAAAAMAAAAAQAAAAAAAAAAAAAAAAAAAB8AAABUAAAA7/P4AP///wEAAAAAAAAAAAAAAAAAAAAAAAAAAAAAAAAAAAAAAAAAAAAAAAB/f38AucTQAMvLywDAwP8Af39/AAAAAAAAAAAAAAAAAAAAAAAAAAAAIQAAABgAAAAUAAAA0zAAALgIAAB7RgAAKBEAABAAAAAmAAAACAAAAP//////////MAAAABQAAAAAAAAAAAD//wAAAQAAAP//AAABAA=="/>
               </a:ext>
             </a:extLst>
           </p:cNvSpPr>
@@ -9210,7 +9543,7 @@
           <p:cNvSpPr>
             <a:extLst>
               <a:ext uri="smNativeData">
-                <pr:smNativeData xmlns:pr="smNativeData" xmlns="smNativeData" val="SMDATA_16_kRU2ahMAAAAlAAAAZAAAAA0AAAAAAAAAAAAAAAAAAAAAAAAAAAAAAAABAAAAAAAAAAEAAABQAAAAAAAAAAAA4D8AAAAAAADgPwAAAAAAAOA/AAAAAAAA4D8AAAAAAADgPwAAAAAAAOA/AAAAAAAA4D8AAAAAAADgPwAAAAAAAOA/AAAAAAAA4D8CAAAAjAAAAAAAAAAAAAAARHLEDP///wgAAAAAAAAAAAAAAAAAAAAAAAAAAAAAAAAAAAAAZAAAAAEAAABAAAAAAAAAAAAAAAAAAAAAAAAAAAAAAAAAAAAAAAAAAAAAAAAAAAAAAAAAAAAAAAAAAAAAAAAAAAAAAAAAAAAAAAAAAAAAAAAAAAAAAAAAAAAAAAAAAAAAFAAAADwAAAAAAAAAAAAAAAAAAAAPAAAAAQAAACMAAAAjAAAAIwAAAB4AAAAAAAAAZAAAAGQAAAAAAAAAZAAAAGQAAAAVAAAAYAAAAAAAAAAAAAAADwAAACADAAAAAAAAAAAAAAEAAACgMgAAVgcAAKr4//8BAAAAf39/AAEAAABkAAAAAAAAABQAAABAHwAAAAAAACYAAAAAAAAAwOD//wAAAAAmAAAAZAAAABYAAABMAAAAAAAAAAAAAAAEAAAAAAAAAAEAAADn5uYKAAAAACgAAAAoAAAAZAAAAGQAAAAAAAAAzMzMAAAAAABQAAAAUAAAAGQAAABkAAAAAAAAABcAAAAUAAAAAAAAAAAAAAD/fwAA/38AAAAAAAAJAAAABAAAAHk9IjMeAAAAaAAAAAAAAAAAAAAAAAAAAAAAAAAAAAAAECcAABAnAAAAAAAAAAAAAAAAAAAAAAAAAAAAAAAAAAAAAAAAAAAAABQAAAAAAAAAwMD/AAAAAABkAAAAMgAAAAAAAABkAAAAAAAAAH9/fwAKAAAAIgAAABgAAAAAAAAAAAAAAAAAAAAAAAAAAAAAAAAAAAAkAAAAJAAAAAAAAAAHAAAAAAAAAAAAAAAAAAAAAAAAAAAAAAAAAAAAf39/ACUAAABYAAAAAAAAAAAAAAAAAAAAAAAAAAAAAAAAAAAAAAAAAAAAAAAAAAAAAAAAAAAAAAA/AAAAAAAAAKCGAQAAAAAAAAAAAAAAAAAMAAAAAQAAAAAAAAAAAAAAAAAAAB8AAABUAAAARHLEBf///wEAAAAAAAAAAAAAAAAAAAAAAAAAAAAAAAAAAAAAAAAAAAAAAAB/f38A5+bmA8zMzADAwP8Af39/AAAAAAAAAAAAAAAAAAAAAAAAAAAAIQAAABgAAAAUAAAAEDIAADoJAAAwRQAAAg4AABAAAAAmAAAACAAAAP//////////MAAAABQAAAAAAAAAAAD//wAAAQAAAP//AAABAA=="/>
+                <pr:smNativeData xmlns:pr="smNativeData" xmlns="smNativeData" val="SMDATA_16_V2g2ahMAAAAlAAAAZAAAAA0AAAAAAAAAAAAAAAAAAAAAAAAAAAAAAAABAAAAAAAAAAEAAABQAAAAAAAAAAAA4D8AAAAAAADgPwAAAAAAAOA/AAAAAAAA4D8AAAAAAADgPwAAAAAAAOA/AAAAAAAA4D8AAAAAAADgPwAAAAAAAOA/AAAAAAAA4D8CAAAAjAAAAAAAAAAAAAAARHLEDP///wgAAAAAAAAAAAAAAAAAAAAAAAAAAAAAAAAAAAAAZAAAAAEAAABAAAAAAAAAAAAAAAAAAAAAAAAAAAAAAAAAAAAAAAAAAAAAAAAAAAAAAAAAAAAAAAAAAAAAAAAAAAAAAAAAAAAAAAAAAAAAAAAAAAAAAAAAAAAAAAAAAAAAFAAAADwAAAAAAAAAAAAAAAAAAAAPAAAAAQAAACMAAAAjAAAAIwAAAB4AAAAAAAAAZAAAAGQAAAAAAAAAZAAAAGQAAAAVAAAAYAAAAAAAAAAAAAAADwAAACADAAAAAAAAAAAAAAEAAACgMgAAVgcAAKr4//8BAAAAf39/AAEAAABkAAAAAAAAABQAAABAHwAAAAAAACYAAAAAAAAAwOD//wAAAAAmAAAAZAAAABYAAABMAAAAAAAAAAAAAAAEAAAAAAAAAAEAAADn5uYKAAAAACgAAAAoAAAAZAAAAGQAAAAAAAAAzMzMAAAAAABQAAAAUAAAAGQAAABkAAAAAAAAABcAAAAUAAAAAAAAAAAAAAD/fwAA/38AAAAAAAAJAAAABAAAAHk9IjMeAAAAaAAAAAAAAAAAAAAAAAAAAAAAAAAAAAAAECcAABAnAAAAAAAAAAAAAAAAAAAAAAAAAAAAAAAAAAAAAAAAAAAAABQAAAAAAAAAwMD/AAAAAABkAAAAMgAAAAAAAABkAAAAAAAAAH9/fwAKAAAAIgAAABgAAAAAAAAAAAAAAAAAAAAAAAAAAAAAAAAAAAAkAAAAJAAAAAAAAAAHAAAAAAAAAAAAAAAAAAAAAAAAAAAAAAAAAAAAf39/ACUAAABYAAAAAAAAAAAAAAAAAAAAAAAAAAAAAAAAAAAAAAAAAAAAAAAAAAAAAAAAAAAAAAA/AAAAAAAAAKCGAQAAAAAAAAAAAAAAAAAMAAAAAQAAAAAAAAAAAAAAAAAAAB8AAABUAAAARHLEBf///wEAAAAAAAAAAAAAAAAAAAAAAAAAAAAAAAAAAAAAAAAAAAAAAAB/f38A5+bmA8zMzADAwP8Af39/AAAAAAAAAAAAAAAAAAAAAAAAAAAAIQAAABgAAAAUAAAAEDIAADoJAAAwRQAAAg4AABAAAAAmAAAACAAAAP//////////MAAAABQAAAAAAAAAAAD//wAAAQAAAP//AAABAA=="/>
               </a:ext>
             </a:extLst>
           </p:cNvSpPr>
@@ -9255,7 +9588,7 @@
           <p:cNvSpPr>
             <a:extLst>
               <a:ext uri="smNativeData">
-                <pr:smNativeData xmlns:pr="smNativeData" xmlns="smNativeData" val="SMDATA_16_kRU2ahMAAAAlAAAAZAAAAA0AAAAAAAAAAAAAAAAAAAAAAAAAAAAAAAABAAAAAAAAAAEAAABQAAAAAAAAAAAA4D8AAAAAAADgPwAAAAAAAOA/AAAAAAAA4D8AAAAAAADgPwAAAAAAAOA/AAAAAAAA4D8AAAAAAADgPwAAAAAAAOA/AAAAAAAA4D8CAAAAjAAAAAAAAAAAAAAARHLEDP///wgAAAAAAAAAAAAAAAAAAAAAAAAAAAAAAAAAAAAAZAAAAAEAAABAAAAAAAAAAAAAAAAAAAAAAAAAAAAAAAAAAAAAAAAAAAAAAAAAAAAAAAAAAAAAAAAAAAAAAAAAAAAAAAAAAAAAAAAAAAAAAAAAAAAAAAAAAAAAAAAAAAAAFAAAADwAAAAAAAAAAAAAAAAAAAAPAAAAAQAAACMAAAAjAAAAIwAAAB4AAAAAAAAAZAAAAGQAAAAAAAAAZAAAAGQAAAAVAAAAYAAAAAAAAAAAAAAADwAAACADAAAAAAAAAAAAAAEAAACgMgAAVgcAAKr4//8BAAAAf39/AAEAAABkAAAAAAAAABQAAABAHwAAAAAAACYAAAAAAAAAwOD//wAAAAAmAAAAZAAAABYAAABMAAAAAAAAAAAAAAAEAAAAAAAAAAEAAADn5uYKAAAAACgAAAAoAAAAZAAAAGQAAAAAAAAAzMzMAAAAAABQAAAAUAAAAGQAAABkAAAAAAAAABcAAAAUAAAAAAAAAAAAAAD/fwAA/38AAAAAAAAJAAAABAAAADU9ImgeAAAAaAAAAAAAAAAAAAAAAAAAAAAAAAAAAAAAECcAABAnAAAAAAAAAAAAAAAAAAAAAAAAAAAAAAAAAAAAAAAAAAAAABQAAAAAAAAAwMD/AAAAAABkAAAAMgAAAAAAAABkAAAAAAAAAH9/fwAKAAAAIgAAABgAAAAAAAAAAAAAAAAAAAAAAAAAAAAAAAAAAAAkAAAAJAAAAAAAAAAHAAAAAAAAAAAAAAAAAAAAAAAAAAAAAAAAAAAAf39/ACUAAABYAAAAAAAAAAAAAAAAAAAAAAAAAAAAAAAAAAAAAAAAAAAAAAAAAAAAAAAAAAAAAAA/AAAAAAAAAKCGAQAAAAAAAAAAAAAAAAAMAAAAAQAAAAAAAAAAAAAAAAAAAB8AAABUAAAARHLEBf///wEAAAAAAAAAAAAAAAAAAAAAAAAAAAAAAAAAAAAAAAAAAAAAAAB/f38A5+bmA8zMzADAwP8Af39/AAAAAAAAAAAAAAAAAAAAAAAAAAAAIQAAABgAAAAUAAAALTIAANYNAACVRQAAphAAABAAAAAmAAAACAAAAP//////////MAAAABQAAAAAAAAAAAD//wAAAQAAAP//AAABAA=="/>
+                <pr:smNativeData xmlns:pr="smNativeData" xmlns="smNativeData" val="SMDATA_16_V2g2ahMAAAAlAAAAZAAAAA0AAAAAAAAAAAAAAAAAAAAAAAAAAAAAAAABAAAAAAAAAAEAAABQAAAAAAAAAAAA4D8AAAAAAADgPwAAAAAAAOA/AAAAAAAA4D8AAAAAAADgPwAAAAAAAOA/AAAAAAAA4D8AAAAAAADgPwAAAAAAAOA/AAAAAAAA4D8CAAAAjAAAAAAAAAAAAAAARHLEDP///wgAAAAAAAAAAAAAAAAAAAAAAAAAAAAAAAAAAAAAZAAAAAEAAABAAAAAAAAAAAAAAAAAAAAAAAAAAAAAAAAAAAAAAAAAAAAAAAAAAAAAAAAAAAAAAAAAAAAAAAAAAAAAAAAAAAAAAAAAAAAAAAAAAAAAAAAAAAAAAAAAAAAAFAAAADwAAAAAAAAAAAAAAAAAAAAPAAAAAQAAACMAAAAjAAAAIwAAAB4AAAAAAAAAZAAAAGQAAAAAAAAAZAAAAGQAAAAVAAAAYAAAAAAAAAAAAAAADwAAACADAAAAAAAAAAAAAAEAAACgMgAAVgcAAKr4//8BAAAAf39/AAEAAABkAAAAAAAAABQAAABAHwAAAAAAACYAAAAAAAAAwOD//wAAAAAmAAAAZAAAABYAAABMAAAAAAAAAAAAAAAEAAAAAAAAAAEAAADn5uYKAAAAACgAAAAoAAAAZAAAAGQAAAAAAAAAzMzMAAAAAABQAAAAUAAAAGQAAABkAAAAAAAAABcAAAAUAAAAAAAAAAAAAAD/fwAA/38AAAAAAAAJAAAABAAAADU9ImgeAAAAaAAAAAAAAAAAAAAAAAAAAAAAAAAAAAAAECcAABAnAAAAAAAAAAAAAAAAAAAAAAAAAAAAAAAAAAAAAAAAAAAAABQAAAAAAAAAwMD/AAAAAABkAAAAMgAAAAAAAABkAAAAAAAAAH9/fwAKAAAAIgAAABgAAAAAAAAAAAAAAAAAAAAAAAAAAAAAAAAAAAAkAAAAJAAAAAAAAAAHAAAAAAAAAAAAAAAAAAAAAAAAAAAAAAAAAAAAf39/ACUAAABYAAAAAAAAAAAAAAAAAAAAAAAAAAAAAAAAAAAAAAAAAAAAAAAAAAAAAAAAAAAAAAA/AAAAAAAAAKCGAQAAAAAAAAAAAAAAAAAMAAAAAQAAAAAAAAAAAAAAAAAAAB8AAABUAAAARHLEBf///wEAAAAAAAAAAAAAAAAAAAAAAAAAAAAAAAAAAAAAAAAAAAAAAAB/f38A5+bmA8zMzADAwP8Af39/AAAAAAAAAAAAAAAAAAAAAAAAAAAAIQAAABgAAAAUAAAALTIAANYNAACVRQAAphAAABAAAAAmAAAACAAAAP//////////MAAAABQAAAAAAAAAAAD//wAAAQAAAP//AAABAA=="/>
               </a:ext>
             </a:extLst>
           </p:cNvSpPr>
@@ -9324,7 +9657,7 @@
           <p:cNvSpPr>
             <a:extLst>
               <a:ext uri="smNativeData">
-                <pr:smNativeData xmlns:pr="smNativeData" xmlns="smNativeData" val="SMDATA_16_kRU2ahMAAAAlAAAAZAAAAA0AAAAAkAAAAEgAAACQAAAASAAAAAAAAAAAAAAAAAAAAAEAAABQAAAAAAAAAAAA4D8AAAAAAADgPwAAAAAAAOA/AAAAAAAA4D8AAAAAAADgPwAAAAAAAOA/AAAAAAAA4D8AAAAAAADgPwAAAAAAAOA/AAAAAAAA4D8CAAAAjAAAAAAAAAAAAAAARHLEDP///wgAAAAAAAAAAAAAAAAAAAAAAAAAAAAAAAAAAAAAZAAAAAEAAABAAAAAAAAAAAAAAAAAAAAAAAAAAAAAAAAAAAAAAAAAAAAAAAAAAAAAAAAAAAAAAAAAAAAAAAAAAAAAAAAAAAAAAAAAAAAAAAAAAAAAAAAAAAAAAAAAAAAAFAAAADwAAAAAAAAAAAAAAAAAAAAPAAAAAQAAACMAAAAjAAAAIwAAAB4AAAAAAAAAZAAAAGQAAAAAAAAAZAAAAGQAAAAVAAAAYAAAAAAAAAAAAAAADwAAACADAAAAAAAAAAAAAAEAAACgMgAAVgcAAKr4//8BAAAAf39/AAEAAABkAAAAAAAAABQAAABAHwAAAAAAACYAAAAAAAAAwOD//wAAAAAmAAAAZAAAABYAAABMAAAAAAAAAAAAAAAEAAAAAAAAAAEAAADn5uYKAAAAACgAAAAoAAAAZAAAAGQAAAAAAAAAzMzMAAAAAABQAAAAUAAAAGQAAABkAAAAAAAAABcAAAAUAAAAAAAAAAAAAAD/fwAA/38AAAAAAAAJAAAABAAAAAAAAAAeAAAAaAAAAAAAAAAAAAAAAAAAAAAAAAAAAAAAECcAABAnAAAAAAAAAAAAAAAAAAAAAAAAAAAAAAAAAAAAAAAAAAAAABQAAAAAAAAAwMD/AAAAAABkAAAAMgAAAAAAAABkAAAAAAAAAH9/fwAKAAAAIgAAABgAAAAAAAAAAAAAAAAAAAAAAAAAAAAAAAAAAAAkAAAAJAAAAAAAAAAHAAAAAAAAAAAAAAAAAAAAAAAAAAAAAAAAAAAAf39/ACUAAABYAAAAAAAAAAAAAAAAAAAAAAAAAAAAAAAAAAAAAAAAAAAAAAAAAAAAAAAAAAAAAAA/AAAAAAAAAKCGAQAAAAAAAAAAAAAAAAAMAAAAAQAAAAAAAAAAAAAAAAAAAB8AAABUAAAARHLEBf///wEAAAAAAAAAAAAAAAAAAAAAAAAAAAAAAAAAAAAAAAAAAAAAAAB/f38A5+bmA8zMzADAwP8Af39/AAAAAAAAAAAAAAAAAAAAAAAAAAAAIQAAABgAAAAUAAAAYAMAAGgTAABgJwAA+CUAAAAAAAAmAAAACAAAAP//////////MAAAABQAAAAAAAAAAAD//wAAAQAAAP//AAABAA=="/>
+                <pr:smNativeData xmlns:pr="smNativeData" xmlns="smNativeData" val="SMDATA_16_V2g2ahMAAAAlAAAAZAAAAA0AAAAAkAAAAEgAAACQAAAASAAAAAAAAAAAAAAAAAAAAAEAAABQAAAAAAAAAAAA4D8AAAAAAADgPwAAAAAAAOA/AAAAAAAA4D8AAAAAAADgPwAAAAAAAOA/AAAAAAAA4D8AAAAAAADgPwAAAAAAAOA/AAAAAAAA4D8CAAAAjAAAAAAAAAAAAAAARHLEDP///wgAAAAAAAAAAAAAAAAAAAAAAAAAAAAAAAAAAAAAZAAAAAEAAABAAAAAAAAAAAAAAAAAAAAAAAAAAAAAAAAAAAAAAAAAAAAAAAAAAAAAAAAAAAAAAAAAAAAAAAAAAAAAAAAAAAAAAAAAAAAAAAAAAAAAAAAAAAAAAAAAAAAAFAAAADwAAAAAAAAAAAAAAAAAAAAPAAAAAQAAACMAAAAjAAAAIwAAAB4AAAAAAAAAZAAAAGQAAAAAAAAAZAAAAGQAAAAVAAAAYAAAAAAAAAAAAAAADwAAACADAAAAAAAAAAAAAAEAAACgMgAAVgcAAKr4//8BAAAAf39/AAEAAABkAAAAAAAAABQAAABAHwAAAAAAACYAAAAAAAAAwOD//wAAAAAmAAAAZAAAABYAAABMAAAAAAAAAAAAAAAEAAAAAAAAAAEAAADn5uYKAAAAACgAAAAoAAAAZAAAAGQAAAAAAAAAzMzMAAAAAABQAAAAUAAAAGQAAABkAAAAAAAAABcAAAAUAAAAAAAAAAAAAAD/fwAA/38AAAAAAAAJAAAABAAAAAAAAAAeAAAAaAAAAAAAAAAAAAAAAAAAAAAAAAAAAAAAECcAABAnAAAAAAAAAAAAAAAAAAAAAAAAAAAAAAAAAAAAAAAAAAAAABQAAAAAAAAAwMD/AAAAAABkAAAAMgAAAAAAAABkAAAAAAAAAH9/fwAKAAAAIgAAABgAAAAAAAAAAAAAAAAAAAAAAAAAAAAAAAAAAAAkAAAAJAAAAAAAAAAHAAAAAAAAAAAAAAAAAAAAAAAAAAAAAAAAAAAAf39/ACUAAABYAAAAAAAAAAAAAAAAAAAAAAAAAAAAAAAAAAAAAAAAAAAAAAAAAAAAAAAAAAAAAAA/AAAAAAAAAKCGAQAAAAAAAAAAAAAAAAAMAAAAAQAAAAAAAAAAAAAAAAAAAB8AAABUAAAARHLEBf///wEAAAAAAAAAAAAAAAAAAAAAAAAAAAAAAAAAAAAAAAAAAAAAAAB/f38A5+bmA8zMzADAwP8Af39/AAAAAAAAAAAAAAAAAAAAAAAAAAAAIQAAABgAAAAUAAAAYAMAAGgTAABgJwAA+CUAABAAAAAmAAAACAAAAP//////////MAAAABQAAAAAAAAAAAD//wAAAQAAAP//AAABAA=="/>
               </a:ext>
             </a:extLst>
           </p:cNvSpPr>
@@ -9591,7 +9924,7 @@
           <p:cNvSpPr>
             <a:extLst>
               <a:ext uri="smNativeData">
-                <pr:smNativeData xmlns:pr="smNativeData" xmlns="smNativeData" val="SMDATA_16_kRU2ahMAAAAlAAAAZQAAAA0AAAAAkAAAAEgAAACQAAAASAAAAAAAAAAAAAAAAAAAAAEAAABQAAAAc4Bgjh6/pz8AAAAAAADwvwAAAAAAAOA/AAAAAAAA4D8AAAAAAADgPwAAAAAAAOA/AAAAAAAA4D8AAAAAAADgPwAAAAAAAOA/AAAAAAAA4D8CAAAAjAAAAAEAAAAAAAAA7/P4AP///wgAAAAAAAAAAAAAAAAAAAAAAAAAAAAAAAAAAAAAeAAAAAEAAABAAAAAAAAAAAAAAABaAAAAAAAAAAAAAAAAAAAAAAAAAAAAAAAAAAAAAAAAAAAAAAAAAAAAAAAAAAAAAAAAAAAAAAAAAAAAAAAAAAAAAAAAAAAAAAAAAAAAFAAAADwAAAAAAAAAAAAAAAAAAAAPAAAAAQAAACMAAAAjAAAAIwAAAB4AAAAAAAAAZAAAAGQAAAAAAAAAZAAAAGQAAAAVAAAAYAAAAAAAAAAAAAAADwAAACADAAAAAAAAAAAAAAEAAACgMgAAVgcAAKr4//8BAAAAf39/AAEAAABkAAAAAAAAABQAAABAHwAAAAAAACYAAAAAAAAAwOD//wAAAAAmAAAAZAAAABYAAABMAAAAAQAAAAAAAAAGAAAAAAAAAAEAAAC5xNAAPAAAAAAAAAAoAAAAZAAAAGQAAAAAAAAAy8vLADwAAAAAAAAAKAAAAGQAAABkAAAAAAAAABcAAAAUAAAAAAAAAAAAAAD/fwAA/38AAAAAAAAJAAAABAAAAAAAAAAeAAAAaAAAAAAAAAAAAAAAAAAAAAAAAAAAAAAAECcAABAnAAAAAAAAAAAAAAAAAAAAAAAAAAAAAAAAAAAAAAAAAAAAAHgAAAAAAAAAwMD/AAAAAAAAAAAAAAAAAAAAAABkAAAAAAAAAH9/fwAKAAAAIgAAABgAAAAAAAAAAAAAAAAAAAAAAAAAAAAAAAAAAAAkAAAAJAAAAAAAAAAHAAAAAAAAAAAAAAAAAAAAAAAAAAAAAAAAAAAAf39/ACUAAABYAAAAAAAAAAAAAAAAAAAAAAAAAAAAAAAAAAAAAAAAAAAAAAAAAAAAAAAAAAAAAAA/AAAAAAAAAKCGAQAAAAAAAAAAAAAAAAAMAAAAAQAAAAAAAAAAAAAAAAAAAB8AAABUAAAA7/P4AP///wEAAAAAAAAAAAAAAAAAAAAAAAAAAAAAAAAAAAAAAAAAAAAAAAB/f38AucTQAMvLywDAwP8Af39/AAAAAAAAAAAAAAAAAAAAAAAAAAAAIQAAABgAAAAUAAAAECkAACATAABwRwAAiCYAABAAAAAmAAAACAAAAP//////////MAAAABQAAAAAAAAAAAD//wAAAQAAAP//AAABAA=="/>
+                <pr:smNativeData xmlns:pr="smNativeData" xmlns="smNativeData" val="SMDATA_16_V2g2ahMAAAAlAAAAZQAAAA0AAAAAkAAAAEgAAACQAAAASAAAAAAAAAAAAAAAAAAAAAEAAABQAAAAc4Bgjh6/pz8AAAAAAAAAAAAAAAAAAOA/AAAAAAAA4D8AAAAAAADgPwAAAAAAAOA/AAAAAAAA4D8AAAAAAADgPwAAAAAAAOA/AAAAAAAA4D8CAAAAjAAAAAEAAAAAAAAA7/P4AP///wgAAAAAAAAAAAAAAAAAAAAAAAAAAAAAAAAAAAAAeAAAAAEAAABAAAAAAAAAAAAAAABaAAAAAAAAAAAAAAAAAAAAAAAAAAAAAAAAAAAAAAAAAAAAAAAAAAAAAAAAAAAAAAAAAAAAAAAAAAAAAAAAAAAAAAAAAAAAAAAAAAAAFAAAADwAAAAAAAAAAAAAAAAAAAAPAAAAAQAAACMAAAAjAAAAIwAAAB4AAAAAAAAAZAAAAGQAAAAAAAAAZAAAAGQAAAAVAAAAYAAAAAAAAAAAAAAADwAAACADAAAAAAAAAAAAAAEAAACgMgAAVgcAAKr4//8BAAAAf39/AAEAAABkAAAAAAAAABQAAABAHwAAAAAAACYAAAAAAAAAwOD//wAAAAAmAAAAZAAAABYAAABMAAAAAQAAAAAAAAAGAAAAAAAAAAEAAAC5xNAAPAAAAAAAAAAoAAAAZAAAAGQAAAAAAAAAy8vLADwAAAAAAAAAKAAAAGQAAABkAAAAAAAAABcAAAAUAAAAAAAAAAAAAAD/fwAA/38AAAAAAAAJAAAABAAAAAAAAAAeAAAAaAAAAAAAAAAAAAAAAAAAAAAAAAAAAAAAECcAABAnAAAAAAAAAAAAAAAAAAAAAAAAAAAAAAAAAAAAAAAAAAAAAHgAAAAAAAAAwMD/AAAAAAAAAAAAAAAAAAAAAABkAAAAAAAAAH9/fwAKAAAAIgAAABgAAAAAAAAAAAAAAAAAAAAAAAAAAAAAAAAAAAAkAAAAJAAAAAAAAAAHAAAAAAAAAAAAAAAAAAAAAAAAAAAAAAAAAAAAf39/ACUAAABYAAAAAAAAAAAAAAAAAAAAAAAAAAAAAAAAAAAAAAAAAAAAAAAAAAAAAAAAAAAAAAA/AAAAAAAAAKCGAQAAAAAAAAAAAAAAAAAMAAAAAQAAAAAAAAAAAAAAAAAAAB8AAABUAAAA7/P4AP///wEAAAAAAAAAAAAAAAAAAAAAAAAAAAAAAAAAAAAAAAAAAAAAAAB/f38AucTQAMvLywDAwP8Af39/AAAAAAAAAAAAAAAAAAAAAAAAAAAAIQAAABgAAAAUAAAAECkAACATAABwRwAAiCYAABAAAAAmAAAACAAAAP//////////MAAAABQAAAAAAAAAAAD//wAAAQAAAP//AAABAA=="/>
               </a:ext>
             </a:extLst>
           </p:cNvSpPr>
@@ -9629,7 +9962,7 @@
             <a:picLocks noChangeAspect="1"/>
             <a:extLst>
               <a:ext uri="smNativeData">
-                <pr:smNativeData xmlns:pr="smNativeData" xmlns="smNativeData" val="SMDATA_18_kRU2ahMAAAAlAAAAEQAAAC0AAAAAkAAAAEgAAACQAAAASAAAAAAAAAAAAAAAAAAAAAEAAABQAAAAAAAAAAAA4D8AAAAAAADgPwAAAAAAAOA/AAAAAAAA4D8AAAAAAADgPwAAAAAAAOA/AAAAAAAA4D8AAAAAAADgPwAAAAAAAOA/AAAAAAAA4D8CAAAAjAAAAAAAAAAAAAAARHLEDP///wgAAAAAAAAAAAAAAAAAAAAAAAAAAAAAAAAAAAAAZAAAAAEAAABAAAAAAAAAAAAAAAAAAAAAAAAAAAAAAAAAAAAAAAAAAAAAAAAAAAAAAAAAAAAAAAAAAAAAAAAAAAAAAAAAAAAAAAAAAAAAAAAAAAAAAAAAAAAAAAAAAAAAFAAAADwAAAAAAAAAAAAAAAAAAAkUAAAAAQAAABQAAAAUAAAAFAAAAAEAAAAAAAAAZAAAAGQAAAAAAAAAZAAAAGQAAAAVAAAAYAAAAAAAAAAAAAAADwAAACADAAAAAAAAAAAAAAEAAACgMgAAVgcAAKr4//8BAAAAf39/AAEAAABkAAAAAAAAABQAAABAHwAAAAAAACYAAAAAAAAAwOD//wAAAAAmAAAAZAAAABYAAABMAAAAAAAAAAAAAAAEAAAAAAAAAAEAAADn5uYKAAAAACgAAAAoAAAAZAAAAGQAAAAAAAAAzMzMAAAAAABQAAAAUAAAAGQAAABkAAAAAAAAAAcAAAA4AAAAAAAAAAAAAAAAAAAA////AAAAAAAAAAAAAAAAAAAAAAAAAAAAAAAAAAAAAABkAAAAZAAAAAAAAAAjAAAABAAAAGQAAAAXAAAAFAAAAAAAAAAAAAAA/38AAP9/AAAAAAAACQAAAAQAAABct27dHgAAAGgAAAAAAAAAAAAAAAAAAAAAAAAAAAAAABAnAAAQJwAAAAAAAAAAAAAAAAAAAAAAAAAAAAAAAAAAAAAAAAAAAAAUAAAAAAAAAMDA/wAAAAAAZAAAADIAAAAAAAAAZAAAAAAAAAB/f38ACgAAACIAAAAYAAAAAAAAAAAAAAAAAAAAAAAAAAAAAAAAAAAAJAAAACQAAAAAAAAABwAAAAAAAAAAAAAAAAAAAAAAAAAAAAAAAAAAAH9/fwAlAAAAWAAAAAAAAAAAAAAAAAAAAAAAAAAAAAAAAAAAAAAAAAAAAAAAAAAAAAAAAAAAAAAAPwAAAAAAAACghgEAAAAAAAAAAAAAAAAADAAAAAEAAAAAAAAAAAAAAAAAAAAfAAAAVAAAAERyxAX///8BAAAAAAAAAAAAAAAAAAAAAAAAAAAAAAAAAAAAAAAAAAAAAAACf39/AOfm5gPMzMwAwMD/AH9/fwAAAAAAAAAAAAAAAAD///8AAAAAACEAAAAYAAAAFAAAAOgpAAD4EwAAmEYAALAlAAAQAAAAJgAAAAgAAAD//////////zAAAAAUAAAAAAAAAAAA//8AAAEAAAD//wAAAQA="/>
+                <pr:smNativeData xmlns:pr="smNativeData" xmlns="smNativeData" val="SMDATA_18_V2g2ahMAAAAlAAAAEQAAAC0AAAAAkAAAAEgAAACQAAAASAAAAAAAAAAAAAAAAAAAAAEAAABQAAAAAAAAAAAA4D8AAAAAAADgPwAAAAAAAOA/AAAAAAAA4D8AAAAAAADgPwAAAAAAAOA/AAAAAAAA4D8AAAAAAADgPwAAAAAAAOA/AAAAAAAA4D8CAAAAjAAAAAAAAAAAAAAARHLEDP///wgAAAAAAAAAAAAAAAAAAAAAAAAAAAAAAAAAAAAAZAAAAAEAAABAAAAAAAAAAAAAAAAAAAAAAAAAAAAAAAAAAAAAAAAAAAAAAAAAAAAAAAAAAAAAAAAAAAAAAAAAAAAAAAAAAAAAAAAAAAAAAAAAAAAAAAAAAAAAAAAAAAAAFAAAADwAAAAAAAAAAAAAAAAAAAkUAAAAAQAAABQAAAAUAAAAFAAAAAEAAAAAAAAAZAAAAGQAAAAAAAAAZAAAAGQAAAAVAAAAYAAAAAAAAAAAAAAADwAAACADAAAAAAAAAAAAAAEAAACgMgAAVgcAAKr4//8BAAAAf39/AAEAAABkAAAAAAAAABQAAABAHwAAAAAAACYAAAAAAAAAwOD//wAAAAAmAAAAZAAAABYAAABMAAAAAAAAAAAAAAAEAAAAAAAAAAEAAADn5uYKAAAAACgAAAAoAAAAZAAAAGQAAAAAAAAAzMzMAAAAAABQAAAAUAAAAGQAAABkAAAAAAAAAAcAAAA4AAAAAAAAAAAAAAAAAAAA////AAAAAAAAAAAAAAAAAAAAAAAAAAAAAAAAAAAAAABkAAAAZAAAAAAAAAAjAAAABAAAAGQAAAAXAAAAFAAAAAAAAAAAAAAA/38AAP9/AAAAAAAACQAAAAQAAABct27dHgAAAGgAAAAAAAAAAAAAAAAAAAAAAAAAAAAAABAnAAAQJwAAAAAAAAAAAAAAAAAAAAAAAAAAAAAAAAAAAAAAAAAAAAAUAAAAAAAAAMDA/wAAAAAAZAAAADIAAAAAAAAAZAAAAAAAAAB/f38ACgAAACIAAAAYAAAAAAAAAAAAAAAAAAAAAAAAAAAAAAAAAAAAJAAAACQAAAAAAAAABwAAAAAAAAAAAAAAAAAAAAAAAAAAAAAAAAAAAH9/fwAlAAAAWAAAAAAAAAAAAAAAAAAAAAAAAAAAAAAAAAAAAAAAAAAAAAAAAAAAAAAAAAAAAAAAPwAAAAAAAACghgEAAAAAAAAAAAAAAAAADAAAAAEAAAAAAAAAAAAAAAAAAAAfAAAAVAAAAERyxAX///8BAAAAAAAAAAAAAAAAAAAAAAAAAAAAAAAAAAAAAAAAAAAAAAACf39/AOfm5gPMzMwAwMD/AH9/fwAAAAAAAAAAAAAAAAD///8AAAAAACEAAAAYAAAAFAAAAOgpAAD4EwAAmEYAALAlAAAQAAAAJgAAAAgAAAD//////////zAAAAAUAAAAAAAAAAAA//8AAAEAAAD//wAAAQA="/>
               </a:ext>
             </a:extLst>
           </p:cNvPicPr>
@@ -9702,7 +10035,7 @@
           <p:cNvSpPr>
             <a:extLst>
               <a:ext uri="smNativeData">
-                <pr:smNativeData xmlns:pr="smNativeData" xmlns="smNativeData" val="SMDATA_16_kRU2ahMAAAAlAAAAZAAAAA0AAAAAkAAAAEgAAACQAAAASAAAAAAAAAABAAAAAAAAAAEAAABQAAAAAAAAAAAA4D8AAAAAAADgPwAAAAAAAOA/AAAAAAAA4D8AAAAAAADgPwAAAAAAAOA/AAAAAAAA4D8AAAAAAADgPwAAAAAAAOA/AAAAAAAA4D8CAAAAjAAAAAAAAAAAAAAARHLEDP///wgAAAAAAAAAAAAAAAAAAAAAAAAAAAAAAAAAAAAAZAAAAAEAAABAAAAAAAAAAAAAAAAAAAAAAAAAAAAAAAAAAAAAAAAAAAAAAAAAAAAAAAAAAAAAAAAAAAAAAAAAAAAAAAAAAAAAAAAAAAAAAAAAAAAAAAAAAAAAAAAAAAAAFAAAADwAAAAAAAAAAAAAAAAAAAAPAAAAAQAAACMAAAAjAAAAIwAAAB4AAAAAAAAAZAAAAGQAAAAAAAAAZAAAAGQAAAAVAAAAYAAAAAAAAAAAAAAADwAAACADAAAAAAAAAAAAAAEAAACgMgAAVgcAAKr4//8BAAAAf39/AAEAAABkAAAAAAAAABQAAABAHwAAAAAAACYAAAAAAAAAwOD//wAAAAAmAAAAZAAAABYAAABMAAAAAAAAAAAAAAAEAAAAAAAAAAEAAADn5uYKAAAAACgAAAAoAAAAZAAAAGQAAAAAAAAAzMzMAAAAAABQAAAAUAAAAGQAAABkAAAAAAAAABcAAAAUAAAAAAAAAAAAAAD/fwAA/38AAAAAAAAJAAAABAAAAAAAAAAeAAAAaAAAAAAAAAAAAAAAAAAAAAAAAAAAAAAAECcAABAnAAAAAAAAAAAAAAAAAAAAAAAAAAAAAAAAAAAAAAAAAAAAABQAAAAAAAAAwMD/AAAAAABkAAAAMgAAAAAAAABkAAAAAAAAAH9/fwAKAAAAIgAAABgAAAAAAAAAAAAAAAAAAAAAAAAAAAAAAAAAAAAkAAAAJAAAAAAAAAAHAAAAAAAAAAAAAAAAAAAAAAAAAAAAAAAAAAAAf39/ACUAAABYAAAAAAAAAAAAAAAAAAAAAAAAAAAAAAAAAAAAAAAAAAAAAAAAAAAAAAAAAAAAAAA/AAAAAAAAAKCGAQAAAAAAAAAAAAAAAAAMAAAAAQAAAAAAAAAAAAAAAAAAAB8AAABUAAAARHLEBf///wEAAAAAAAAAAAAAAAAAAAAAAAAAAAAAAAAAAAAAAAAAAAAAAAB/f38A5+bmA8zMzADAwP8Af39/AAAAAAAAAAAAAAAAAAAAAAAAAAAAIQAAABgAAAAUAAAAYAMAACABAACgRwAA0AIAABAAAAAmAAAACAAAAP//////////MAAAABQAAAAAAAAAAAD//wAAAQAAAP//AAABAA=="/>
+                <pr:smNativeData xmlns:pr="smNativeData" xmlns="smNativeData" val="SMDATA_16_V2g2ahMAAAAlAAAAZAAAAA0AAAAAkAAAAEgAAACQAAAASAAAAAAAAAABAAAAAAAAAAEAAABQAAAAAAAAAAAA4D8AAAAAAADgPwAAAAAAAOA/AAAAAAAA4D8AAAAAAADgPwAAAAAAAOA/AAAAAAAA4D8AAAAAAADgPwAAAAAAAOA/AAAAAAAA4D8CAAAAjAAAAAAAAAAAAAAARHLEDP///wgAAAAAAAAAAAAAAAAAAAAAAAAAAAAAAAAAAAAAZAAAAAEAAABAAAAAAAAAAAAAAAAAAAAAAAAAAAAAAAAAAAAAAAAAAAAAAAAAAAAAAAAAAAAAAAAAAAAAAAAAAAAAAAAAAAAAAAAAAAAAAAAAAAAAAAAAAAAAAAAAAAAAFAAAADwAAAAAAAAAAAAAAAAAAAAPAAAAAQAAACMAAAAjAAAAIwAAAB4AAAAAAAAAZAAAAGQAAAAAAAAAZAAAAGQAAAAVAAAAYAAAAAAAAAAAAAAADwAAACADAAAAAAAAAAAAAAEAAACgMgAAVgcAAKr4//8BAAAAf39/AAEAAABkAAAAAAAAABQAAABAHwAAAAAAACYAAAAAAAAAwOD//wAAAAAmAAAAZAAAABYAAABMAAAAAAAAAAAAAAAEAAAAAAAAAAEAAADn5uYKAAAAACgAAAAoAAAAZAAAAGQAAAAAAAAAzMzMAAAAAABQAAAAUAAAAGQAAABkAAAAAAAAABcAAAAUAAAAAAAAAAAAAAD/fwAA/38AAAAAAAAJAAAABAAAAAAAAAAeAAAAaAAAAAAAAAAAAAAAAAAAAAAAAAAAAAAAECcAABAnAAAAAAAAAAAAAAAAAAAAAAAAAAAAAAAAAAAAAAAAAAAAABQAAAAAAAAAwMD/AAAAAABkAAAAMgAAAAAAAABkAAAAAAAAAH9/fwAKAAAAIgAAABgAAAAAAAAAAAAAAAAAAAAAAAAAAAAAAAAAAAAkAAAAJAAAAAAAAAAHAAAAAAAAAAAAAAAAAAAAAAAAAAAAAAAAAAAAf39/ACUAAABYAAAAAAAAAAAAAAAAAAAAAAAAAAAAAAAAAAAAAAAAAAAAAAAAAAAAAAAAAAAAAAA/AAAAAAAAAKCGAQAAAAAAAAAAAAAAAAAMAAAAAQAAAAAAAAAAAAAAAAAAAB8AAABUAAAARHLEBf///wEAAAAAAAAAAAAAAAAAAAAAAAAAAAAAAAAAAAAAAAAAAAAAAAB/f38A5+bmA8zMzADAwP8Af39/AAAAAAAAAAAAAAAAAAAAAAAAAAAAIQAAABgAAAAUAAAAYAMAACABAACgRwAA0AIAABAAAAAmAAAACAAAAP//////////MAAAABQAAAAAAAAAAAD//wAAAQAAAP//AAABAA=="/>
               </a:ext>
             </a:extLst>
           </p:cNvSpPr>
@@ -9730,7 +10063,7 @@
               <a:buNone/>
             </a:pPr>
             <a:r>
-              <a:rPr lang="en-us" sz="1200" b="1" cap="none" spc="40">
+              <a:rPr lang="en-us" sz="1200" b="1" cap="none" spc="8">
                 <a:solidFill>
                   <a:srgbClr val="E0A038"/>
                 </a:solidFill>
@@ -9747,7 +10080,7 @@
           <p:cNvSpPr>
             <a:extLst>
               <a:ext uri="smNativeData">
-                <pr:smNativeData xmlns:pr="smNativeData" xmlns="smNativeData" val="SMDATA_16_kRU2ahMAAAAlAAAAZAAAAA0AAAAAkAAAAEgAAACQAAAASAAAAAAAAAABAAAAAAAAAAEAAABQAAAAAAAAAAAA4D8AAAAAAADgPwAAAAAAAOA/AAAAAAAA4D8AAAAAAADgPwAAAAAAAOA/AAAAAAAA4D8AAAAAAADgPwAAAAAAAOA/AAAAAAAA4D8CAAAAjAAAAAAAAAAAAAAARHLEDP///wgAAAAAAAAAAAAAAAAAAAAAAAAAAAAAAAAAAAAAZAAAAAEAAABAAAAAAAAAAAAAAAAAAAAAAAAAAAAAAAAAAAAAAAAAAAAAAAAAAAAAAAAAAAAAAAAAAAAAAAAAAAAAAAAAAAAAAAAAAAAAAAAAAAAAAAAAAAAAAAAAAAAAFAAAADwAAAAAAAAAAAAAAAAAAAAPAAAAAQAAACMAAAAjAAAAIwAAAB4AAAAAAAAAZAAAAGQAAAAAAAAAZAAAAGQAAAAVAAAAYAAAAAAAAAAAAAAADwAAACADAAAAAAAAAAAAAAEAAACgMgAAVgcAAKr4//8BAAAAf39/AAEAAABkAAAAAAAAABQAAABAHwAAAAAAACYAAAAAAAAAwOD//wAAAAAmAAAAZAAAABYAAABMAAAAAAAAAAAAAAAEAAAAAAAAAAEAAADn5uYKAAAAACgAAAAoAAAAZAAAAGQAAAAAAAAAzMzMAAAAAABQAAAAUAAAAGQAAABkAAAAAAAAABcAAAAUAAAAAAAAAAAAAAD/fwAA/38AAAAAAAAJAAAABAAAAAAAAAAeAAAAaAAAAAAAAAAAAAAAAAAAAAAAAAAAAAAAECcAABAnAAAAAAAAAAAAAAAAAAAAAAAAAAAAAAAAAAAAAAAAAAAAABQAAAAAAAAAwMD/AAAAAABkAAAAMgAAAAAAAABkAAAAAAAAAH9/fwAKAAAAIgAAABgAAAAAAAAAAAAAAAAAAAAAAAAAAAAAAAAAAAAkAAAAJAAAAAAAAAAHAAAAAAAAAAAAAAAAAAAAAAAAAAAAAAAAAAAAf39/ACUAAABYAAAAAAAAAAAAAAAAAAAAAAAAAAAAAAAAAAAAAAAAAAAAAAAAAAAAAAAAAAAAAAA/AAAAAAAAAKCGAQAAAAAAAAAAAAAAAAAMAAAAAQAAAAAAAAAAAAAAAAAAAB8AAABUAAAARHLEBf///wEAAAAAAAAAAAAAAAAAAAAAAAAAAAAAAAAAAAAAAAAAAAAAAAB/f38A5+bmA8zMzADAwP8Af39/AAAAAAAAAAAAAAAAAAAAAAAAAAAAIQAAABgAAAAUAAAAYAMAAF0CAACgRwAA3QYAABAAAAAmAAAACAAAAP//////////MAAAABQAAAAAAAAAAAD//wAAAQAAAP//AAABAA=="/>
+                <pr:smNativeData xmlns:pr="smNativeData" xmlns="smNativeData" val="SMDATA_16_V2g2ahMAAAAlAAAAZAAAAA0AAAAAkAAAAEgAAACQAAAASAAAAAAAAAABAAAAAAAAAAEAAABQAAAAAAAAAAAA4D8AAAAAAADgPwAAAAAAAOA/AAAAAAAA4D8AAAAAAADgPwAAAAAAAOA/AAAAAAAA4D8AAAAAAADgPwAAAAAAAOA/AAAAAAAA4D8CAAAAjAAAAAAAAAAAAAAARHLEDP///wgAAAAAAAAAAAAAAAAAAAAAAAAAAAAAAAAAAAAAZAAAAAEAAABAAAAAAAAAAAAAAAAAAAAAAAAAAAAAAAAAAAAAAAAAAAAAAAAAAAAAAAAAAAAAAAAAAAAAAAAAAAAAAAAAAAAAAAAAAAAAAAAAAAAAAAAAAAAAAAAAAAAAFAAAADwAAAAAAAAAAAAAAAAAAAAPAAAAAQAAACMAAAAjAAAAIwAAAB4AAAAAAAAAZAAAAGQAAAAAAAAAZAAAAGQAAAAVAAAAYAAAAAAAAAAAAAAADwAAACADAAAAAAAAAAAAAAEAAACgMgAAVgcAAKr4//8BAAAAf39/AAEAAABkAAAAAAAAABQAAABAHwAAAAAAACYAAAAAAAAAwOD//wAAAAAmAAAAZAAAABYAAABMAAAAAAAAAAAAAAAEAAAAAAAAAAEAAADn5uYKAAAAACgAAAAoAAAAZAAAAGQAAAAAAAAAzMzMAAAAAABQAAAAUAAAAGQAAABkAAAAAAAAABcAAAAUAAAAAAAAAAAAAAD/fwAA/38AAAAAAAAJAAAABAAAAAAAAAAeAAAAaAAAAAAAAAAAAAAAAAAAAAAAAAAAAAAAECcAABAnAAAAAAAAAAAAAAAAAAAAAAAAAAAAAAAAAAAAAAAAAAAAABQAAAAAAAAAwMD/AAAAAABkAAAAMgAAAAAAAABkAAAAAAAAAH9/fwAKAAAAIgAAABgAAAAAAAAAAAAAAAAAAAAAAAAAAAAAAAAAAAAkAAAAJAAAAAAAAAAHAAAAAAAAAAAAAAAAAAAAAAAAAAAAAAAAAAAAf39/ACUAAABYAAAAAAAAAAAAAAAAAAAAAAAAAAAAAAAAAAAAAAAAAAAAAAAAAAAAAAAAAAAAAAA/AAAAAAAAAKCGAQAAAAAAAAAAAAAAAAAMAAAAAQAAAAAAAAAAAAAAAAAAAB8AAABUAAAARHLEBf///wEAAAAAAAAAAAAAAAAAAAAAAAAAAAAAAAAAAAAAAAAAAAAAAAB/f38A5+bmA8zMzADAwP8Af39/AAAAAAAAAAAAAAAAAAAAAAAAAAAAIQAAABgAAAAUAAAAYAMAAF0CAACgRwAA3QYAABAAAAAmAAAACAAAAP//////////MAAAABQAAAAAAAAAAAD//wAAAQAAAP//AAABAA=="/>
               </a:ext>
             </a:extLst>
           </p:cNvSpPr>
@@ -9817,7 +10150,7 @@
           <p:cNvSpPr>
             <a:extLst>
               <a:ext uri="smNativeData">
-                <pr:smNativeData xmlns:pr="smNativeData" xmlns="smNativeData" val="SMDATA_16_kRU2ahMAAAAlAAAAZQAAAA0AAAAAkAAAAEgAAACQAAAASAAAAAAAAAAAAAAAAAAAAAEAAABQAAAAexSuR+F6xD8AAAAAAADwvwAAAAAAAOA/AAAAAAAA4D8AAAAAAADgPwAAAAAAAOA/AAAAAAAA4D8AAAAAAADgPwAAAAAAAOA/AAAAAAAA4D8CAAAAjAAAAAEAAAAAAAAA7/P4AP///wgAAAAAAAAAAAAAAAAAAAAAAAAAAAAAAAAAAAAAeAAAAAEAAABAAAAAAAAAAAAAAABaAAAAAAAAAAAAAAAAAAAAAAAAAAAAAAAAAAAAAAAAAAAAAAAAAAAAAAAAAAAAAAAAAAAAAAAAAAAAAAAAAAAAAAAAAAAAAAAAAAAAFAAAADwAAAAAAAAAAAAAAAAAAAAPAAAAAQAAACMAAAAjAAAAIwAAAB4AAAAAAAAAZAAAAGQAAAAAAAAAZAAAAGQAAAAVAAAAYAAAAAAAAAAAAAAADwAAACADAAAAAAAAAAAAAAEAAACgMgAAVgcAAKr4//8BAAAAf39/AAEAAABkAAAAAAAAABQAAABAHwAAAAAAACYAAAAAAAAAwOD//wAAAAAmAAAAZAAAABYAAABMAAAAAQAAAAAAAAAGAAAAAAAAAAEAAAC5xNAAPAAAAAAAAAAoAAAAZAAAAGQAAAAAAAAAy8vLADwAAAAAAAAAKAAAAGQAAABkAAAAAAAAABcAAAAUAAAAAAAAAAAAAAD/fwAA/38AAAAAAAAJAAAABAAAAAAAAAAeAAAAaAAAAAAAAAAAAAAAAAAAAAAAAAAAAAAAECcAABAnAAAAAAAAAAAAAAAAAAAAAAAAAAAAAAAAAAAAAAAAAAAAAHgAAAAAAAAAwMD/AAAAAAAAAAAAAAAAAAAAAABkAAAAAAAAAH9/fwAKAAAAIgAAABgAAAAAAAAAAAAAAAAAAAAAAAAAAAAAAAAAAAAkAAAAJAAAAAAAAAAHAAAAAAAAAAAAAAAAAAAAAAAAAAAAAAAAAAAAf39/ACUAAABYAAAAAAAAAAAAAAAAAAAAAAAAAAAAAAAAAAAAAAAAAAAAAAAAAAAAAAAAAAAAAAA/AAAAAAAAAKCGAQAAAAAAAAAAAAAAAAAMAAAAAQAAAAAAAAAAAAAAAAAAAB8AAABUAAAA7/P4AP///wEAAAAAAAAAAAAAAAAAAAAAAAAAAAAAAAAAAAAAAAAAAAAAAAB/f38AucTQAMvLywDAwP8Af39/AAAAAAAAAAAAAAAAAAAAAAAAAAAAIQAAABgAAAAUAAAAYAMAAJAJAADAKgAAMA8AABAAAAAmAAAACAAAAP//////////MAAAABQAAAAAAAAAAAD//wAAAQAAAP//AAABAA=="/>
+                <pr:smNativeData xmlns:pr="smNativeData" xmlns="smNativeData" val="SMDATA_16_V2g2ahMAAAAlAAAAZQAAAA0AAAAAkAAAAEgAAACQAAAASAAAAAAAAAAAAAAAAAAAAAEAAABQAAAAexSuR+F6xD8AAAAAAAAAAAAAAAAAAOA/AAAAAAAA4D8AAAAAAADgPwAAAAAAAOA/AAAAAAAA4D8AAAAAAADgPwAAAAAAAOA/AAAAAAAA4D8CAAAAjAAAAAEAAAAAAAAA7/P4AP///wgAAAAAAAAAAAAAAAAAAAAAAAAAAAAAAAAAAAAAeAAAAAEAAABAAAAAAAAAAAAAAABaAAAAAAAAAAAAAAAAAAAAAAAAAAAAAAAAAAAAAAAAAAAAAAAAAAAAAAAAAAAAAAAAAAAAAAAAAAAAAAAAAAAAAAAAAAAAAAAAAAAAFAAAADwAAAAAAAAAAAAAAAAAAAAPAAAAAQAAACMAAAAjAAAAIwAAAB4AAAAAAAAAZAAAAGQAAAAAAAAAZAAAAGQAAAAVAAAAYAAAAAAAAAAAAAAADwAAACADAAAAAAAAAAAAAAEAAACgMgAAVgcAAKr4//8BAAAAf39/AAEAAABkAAAAAAAAABQAAABAHwAAAAAAACYAAAAAAAAAwOD//wAAAAAmAAAAZAAAABYAAABMAAAAAQAAAAAAAAAGAAAAAAAAAAEAAAC5xNAAPAAAAAAAAAAoAAAAZAAAAGQAAAAAAAAAy8vLADwAAAAAAAAAKAAAAGQAAABkAAAAAAAAABcAAAAUAAAAAAAAAAAAAAD/fwAA/38AAAAAAAAJAAAABAAAAAAAAAAeAAAAaAAAAAAAAAAAAAAAAAAAAAAAAAAAAAAAECcAABAnAAAAAAAAAAAAAAAAAAAAAAAAAAAAAAAAAAAAAAAAAAAAAHgAAAAAAAAAwMD/AAAAAAAAAAAAAAAAAAAAAABkAAAAAAAAAH9/fwAKAAAAIgAAABgAAAAAAAAAAAAAAAAAAAAAAAAAAAAAAAAAAAAkAAAAJAAAAAAAAAAHAAAAAAAAAAAAAAAAAAAAAAAAAAAAAAAAAAAAf39/ACUAAABYAAAAAAAAAAAAAAAAAAAAAAAAAAAAAAAAAAAAAAAAAAAAAAAAAAAAAAAAAAAAAAA/AAAAAAAAAKCGAQAAAAAAAAAAAAAAAAAMAAAAAQAAAAAAAAAAAAAAAAAAAB8AAABUAAAA7/P4AP///wEAAAAAAAAAAAAAAAAAAAAAAAAAAAAAAAAAAAAAAAAAAAAAAAB/f38AucTQAMvLywDAwP8Af39/AAAAAAAAAAAAAAAAAAAAAAAAAAAAIQAAABgAAAAUAAAAYAMAAJAJAADAKgAAMA8AABAAAAAmAAAACAAAAP//////////MAAAABQAAAAAAAAAAAD//wAAAQAAAP//AAABAA=="/>
               </a:ext>
             </a:extLst>
           </p:cNvSpPr>
@@ -9854,7 +10187,7 @@
           <p:cNvSpPr>
             <a:extLst>
               <a:ext uri="smNativeData">
-                <pr:smNativeData xmlns:pr="smNativeData" xmlns="smNativeData" val="SMDATA_16_kRU2ahMAAAAlAAAAZgAAAA0AAAAAkAAAAEgAAACQAAAASAAAAAAAAAAAAAAAAAAAAAEAAABQAAAAAAAAAAAA8D8AAAAAAADwPwAAAAAAAOA/AAAAAAAA4D8AAAAAAADgPwAAAAAAAOA/AAAAAAAA4D8AAAAAAADgPwAAAAAAAOA/AAAAAAAA4D8CAAAAjAAAAAEAAAAAAAAA4KA4AP///wgAAAAAAAAAAAAAAAAAAAAAAAAAAAAAAAAAAAAAeAAAAAEAAABAAAAAAAAAAAAAAABaAAAAAAAAAAAAAAAAAAAAAAAAAAAAAAAAAAAAAAAAAAAAAAAAAAAAAAAAAAAAAAAAAAAAAAAAAAAAAAAAAAAAAAAAAAAAAAAAAAAAFAAAADwAAAAAAAAAAAAAAAAAAAAPAAAAAQAAACMAAAAjAAAAIwAAAB4AAAAAAAAAZAAAAGQAAAAAAAAAZAAAAGQAAAAVAAAAYAAAAAAAAAAAAAAADwAAACADAAAAAAAAAAAAAAEAAACgMgAAVgcAAKr4//8BAAAAf39/AAEAAABkAAAAAAAAABQAAABAHwAAAAAAACYAAAAAAAAAwOD//wAAAAAmAAAAZAAAABYAAABMAAAAAAAAAAAAAAAEAAAAAAAAAAEAAADn5uYKAAAAACgAAAAoAAAAZAAAAGQAAAAAAAAAzMzMAAAAAABQAAAAUAAAAGQAAABkAAAAAAAAABcAAAAUAAAAAAAAAAAAAAD/fwAA/38AAAAAAAAJAAAABAAAAAAAAAAeAAAAaAAAAAAAAAAAAAAAAAAAAAAAAAAAAAAAECcAABAnAAAAAAAAAAAAAAAAAAAAAAAAAAAAAAAAAAAAAAAAAAAAABQAAAAAAAAAwMD/AAAAAABkAAAAMgAAAAAAAABkAAAAAAAAAH9/fwAKAAAAIgAAABgAAAAAAAAAAAAAAAAAAAAAAAAAAAAAAAAAAAAkAAAAJAAAAAAAAAAHAAAAAAAAAAAAAAAAAAAAAAAAAAAAAAAAAAAAf39/ACUAAABYAAAAAAAAAAAAAAAAAAAAAAAAAAAAAAAAAAAAAAAAAAAAAAAAAAAAAAAAAAAAAAA/AAAAAAAAAKCGAQAAAAAAAAAAAAAAAAAMAAAAAQAAAAAAAAAAAAAAAAAAAB8AAABUAAAA4KA4AP///wEAAAAAAAAAAAAAAAAAAAAAAAAAAAAAAAAAAAAAAAAAAAAAAAB/f38A5+bmA8zMzADAwP8Af39/AAAAAAAAAAAAAAAAAAAAAAAAAAAAIQAAABgAAAAUAAAAgAQAACMLAAD6BgAAnQ0AABAAAAAmAAAACAAAAP//////////MAAAABQAAAAAAAAAAAD//wAAAQAAAP//AAABAA=="/>
+                <pr:smNativeData xmlns:pr="smNativeData" xmlns="smNativeData" val="SMDATA_16_V2g2ahMAAAAlAAAAZgAAAA0AAAAAkAAAAEgAAACQAAAASAAAAAAAAAAAAAAAAAAAAAEAAABQAAAAAAAAAAAA8D8AAAAAAADwPwAAAAAAAOA/AAAAAAAA4D8AAAAAAADgPwAAAAAAAOA/AAAAAAAA4D8AAAAAAADgPwAAAAAAAOA/AAAAAAAA4D8CAAAAjAAAAAEAAAAAAAAA4KA4AP///wgAAAAAAAAAAAAAAAAAAAAAAAAAAAAAAAAAAAAAeAAAAAEAAABAAAAAAAAAAAAAAABaAAAAAAAAAAAAAAAAAAAAAAAAAAAAAAAAAAAAAAAAAAAAAAAAAAAAAAAAAAAAAAAAAAAAAAAAAAAAAAAAAAAAAAAAAAAAAAAAAAAAFAAAADwAAAAAAAAAAAAAAAAAAAAPAAAAAQAAACMAAAAjAAAAIwAAAB4AAAAAAAAAZAAAAGQAAAAAAAAAZAAAAGQAAAAVAAAAYAAAAAAAAAAAAAAADwAAACADAAAAAAAAAAAAAAEAAACgMgAAVgcAAKr4//8BAAAAf39/AAEAAABkAAAAAAAAABQAAABAHwAAAAAAACYAAAAAAAAAwOD//wAAAAAmAAAAZAAAABYAAABMAAAAAAAAAAAAAAAEAAAAAAAAAAEAAADn5uYKAAAAACgAAAAoAAAAZAAAAGQAAAAAAAAAzMzMAAAAAABQAAAAUAAAAGQAAABkAAAAAAAAABcAAAAUAAAAAAAAAAAAAAD/fwAA/38AAAAAAAAJAAAABAAAAAAAAAAeAAAAaAAAAAAAAAAAAAAAAAAAAAAAAAAAAAAAECcAABAnAAAAAAAAAAAAAAAAAAAAAAAAAAAAAAAAAAAAAAAAAAAAABQAAAAAAAAAwMD/AAAAAABkAAAAMgAAAAAAAABkAAAAAAAAAH9/fwAKAAAAIgAAABgAAAAAAAAAAAAAAAAAAAAAAAAAAAAAAAAAAAAkAAAAJAAAAAAAAAAHAAAAAAAAAAAAAAAAAAAAAAAAAAAAAAAAAAAAf39/ACUAAABYAAAAAAAAAAAAAAAAAAAAAAAAAAAAAAAAAAAAAAAAAAAAAAAAAAAAAAAAAAAAAAA/AAAAAAAAAKCGAQAAAAAAAAAAAAAAAAAMAAAAAQAAAAAAAAAAAAAAAAAAAB8AAABUAAAA4KA4AP///wEAAAAAAAAAAAAAAAAAAAAAAAAAAAAAAAAAAAAAAAAAAAAAAAB/f38A5+bmA8zMzADAwP8Af39/AAAAAAAAAAAAAAAAAAAAAAAAAAAAIQAAABgAAAAUAAAAgAQAACMLAAD6BgAAnQ0AABAAAAAmAAAACAAAAP//////////MAAAABQAAAAAAAAAAAD//wAAAQAAAP//AAABAA=="/>
               </a:ext>
             </a:extLst>
           </p:cNvSpPr>
@@ -9883,7 +10216,7 @@
           <p:cNvSpPr>
             <a:extLst>
               <a:ext uri="smNativeData">
-                <pr:smNativeData xmlns:pr="smNativeData" xmlns="smNativeData" val="SMDATA_16_kRU2ahMAAAAlAAAAZAAAAA0AAAAAAAAAAAAAAAAAAAAAAAAAAAAAAAABAAAAAAAAAAEAAABQAAAAAAAAAAAA4D8AAAAAAADgPwAAAAAAAOA/AAAAAAAA4D8AAAAAAADgPwAAAAAAAOA/AAAAAAAA4D8AAAAAAADgPwAAAAAAAOA/AAAAAAAA4D8CAAAAjAAAAAAAAAAAAAAARHLEDP///wgAAAAAAAAAAAAAAAAAAAAAAAAAAAAAAAAAAAAAZAAAAAEAAABAAAAAAAAAAAAAAAAAAAAAAAAAAAAAAAAAAAAAAAAAAAAAAAAAAAAAAAAAAAAAAAAAAAAAAAAAAAAAAAAAAAAAAAAAAAAAAAAAAAAAAAAAAAAAAAAAAAAAFAAAADwAAAAAAAAAAAAAAAAAAAAPAAAAAQAAACMAAAAjAAAAIwAAAB4AAAAAAAAAZAAAAGQAAAAAAAAAZAAAAGQAAAAVAAAAYAAAAAAAAAAAAAAADwAAACADAAAAAAAAAAAAAAEAAACgMgAAVgcAAKr4//8BAAAAf39/AAEAAABkAAAAAAAAABQAAABAHwAAAAAAACYAAAAAAAAAwOD//wAAAAAmAAAAZAAAABYAAABMAAAAAAAAAAAAAAAEAAAAAAAAAAEAAADn5uYKAAAAACgAAAAoAAAAZAAAAGQAAAAAAAAAzMzMAAAAAABQAAAAUAAAAGQAAABkAAAAAAAAABcAAAAUAAAAAAAAAAAAAAD/fwAA/38AAAAAAAAJAAAABAAAADgOAAAeAAAAaAAAAAAAAAAAAAAAAAAAAAAAAAAAAAAAECcAABAnAAAAAAAAAAAAAAAAAAAAAAAAAAAAAAAAAAAAAAAAAAAAABQAAAAAAAAAwMD/AAAAAABkAAAAMgAAAAAAAABkAAAAAAAAAH9/fwAKAAAAIgAAABgAAAAAAAAAAAAAAAAAAAAAAAAAAAAAAAAAAAAkAAAAJAAAAAAAAAAHAAAAAAAAAAAAAAAAAAAAAAAAAAAAAAAAAAAAf39/ACUAAABYAAAAAAAAAAAAAAAAAAAAAAAAAAAAAAAAAAAAAAAAAAAAAAAAAAAAAAAAAAAAAAA/AAAAAAAAAKCGAQAAAAAAAAAAAAAAAAAMAAAAAQAAAAAAAAAAAAAAAAAAAB8AAABUAAAARHLEBf///wEAAAAAAAAAAAAAAAAAAAAAAAAAAAAAAAAAAAAAAAAAAAAAAAB/f38A5+bmA8zMzADAwP8Af39/AAAAAAAAAAAAAAAAAAAAAAAAAAAAIQAAABgAAAAUAAAAgAQAACMLAAD6BgAAnQ0AABAAAAAmAAAACAAAAP//////////MAAAABQAAAAAAAAAAAD//wAAAQAAAP//AAABAA=="/>
+                <pr:smNativeData xmlns:pr="smNativeData" xmlns="smNativeData" val="SMDATA_16_V2g2ahMAAAAlAAAAZAAAAA0AAAAAAAAAAAAAAAAAAAAAAAAAAAAAAAABAAAAAAAAAAEAAABQAAAAAAAAAAAA4D8AAAAAAADgPwAAAAAAAOA/AAAAAAAA4D8AAAAAAADgPwAAAAAAAOA/AAAAAAAA4D8AAAAAAADgPwAAAAAAAOA/AAAAAAAA4D8CAAAAjAAAAAAAAAAAAAAARHLEDP///wgAAAAAAAAAAAAAAAAAAAAAAAAAAAAAAAAAAAAAZAAAAAEAAABAAAAAAAAAAAAAAAAAAAAAAAAAAAAAAAAAAAAAAAAAAAAAAAAAAAAAAAAAAAAAAAAAAAAAAAAAAAAAAAAAAAAAAAAAAAAAAAAAAAAAAAAAAAAAAAAAAAAAFAAAADwAAAAAAAAAAAAAAAAAAAAPAAAAAQAAACMAAAAjAAAAIwAAAB4AAAAAAAAAZAAAAGQAAAAAAAAAZAAAAGQAAAAVAAAAYAAAAAAAAAAAAAAADwAAACADAAAAAAAAAAAAAAEAAACgMgAAVgcAAKr4//8BAAAAf39/AAEAAABkAAAAAAAAABQAAABAHwAAAAAAACYAAAAAAAAAwOD//wAAAAAmAAAAZAAAABYAAABMAAAAAAAAAAAAAAAEAAAAAAAAAAEAAADn5uYKAAAAACgAAAAoAAAAZAAAAGQAAAAAAAAAzMzMAAAAAABQAAAAUAAAAGQAAABkAAAAAAAAABcAAAAUAAAAAAAAAAAAAAD/fwAA/38AAAAAAAAJAAAABAAAADgOAAAeAAAAaAAAAAAAAAAAAAAAAAAAAAAAAAAAAAAAECcAABAnAAAAAAAAAAAAAAAAAAAAAAAAAAAAAAAAAAAAAAAAAAAAABQAAAAAAAAAwMD/AAAAAABkAAAAMgAAAAAAAABkAAAAAAAAAH9/fwAKAAAAIgAAABgAAAAAAAAAAAAAAAAAAAAAAAAAAAAAAAAAAAAkAAAAJAAAAAAAAAAHAAAAAAAAAAAAAAAAAAAAAAAAAAAAAAAAAAAAf39/ACUAAABYAAAAAAAAAAAAAAAAAAAAAAAAAAAAAAAAAAAAAAAAAAAAAAAAAAAAAAAAAAAAAAA/AAAAAAAAAKCGAQAAAAAAAAAAAAAAAAAMAAAAAQAAAAAAAAAAAAAAAAAAAB8AAABUAAAARHLEBf///wEAAAAAAAAAAAAAAAAAAAAAAAAAAAAAAAAAAAAAAAAAAAAAAAB/f38A5+bmA8zMzADAwP8Af39/AAAAAAAAAAAAAAAAAAAAAAAAAAAAIQAAABgAAAAUAAAAgAQAACMLAAD6BgAAnQ0AABAAAAAmAAAACAAAAP//////////MAAAABQAAAAAAAAAAAD//wAAAQAAAP//AAABAA=="/>
               </a:ext>
             </a:extLst>
           </p:cNvSpPr>
@@ -9928,7 +10261,7 @@
           <p:cNvSpPr>
             <a:extLst>
               <a:ext uri="smNativeData">
-                <pr:smNativeData xmlns:pr="smNativeData" xmlns="smNativeData" val="SMDATA_16_kRU2ahMAAAAlAAAAZAAAAA0AAAAAkAAAAEgAAACQAAAASAAAAAAAAAABAAAAAAAAAAEAAABQAAAAAAAAAAAA4D8AAAAAAADgPwAAAAAAAOA/AAAAAAAA4D8AAAAAAADgPwAAAAAAAOA/AAAAAAAA4D8AAAAAAADgPwAAAAAAAOA/AAAAAAAA4D8CAAAAjAAAAAAAAAAAAAAARHLEDP///wgAAAAAAAAAAAAAAAAAAAAAAAAAAAAAAAAAAAAAZAAAAAEAAABAAAAAAAAAAAAAAAAAAAAAAAAAAAAAAAAAAAAAAAAAAAAAAAAAAAAAAAAAAAAAAAAAAAAAAAAAAAAAAAAAAAAAAAAAAAAAAAAAAAAAAAAAAAAAAAAAAAAAFAAAADwAAAAAAAAAAAAAAAAAAAAPAAAAAQAAACMAAAAjAAAAIwAAAB4AAAAAAAAAZAAAAGQAAAAAAAAAZAAAAGQAAAAVAAAAYAAAAAAAAAAAAAAADwAAACADAAAAAAAAAAAAAAEAAACgMgAAVgcAAKr4//8BAAAAf39/AAEAAABkAAAAAAAAABQAAABAHwAAAAAAACYAAAAAAAAAwOD//wAAAAAmAAAAZAAAABYAAABMAAAAAAAAAAAAAAAEAAAAAAAAAAEAAADn5uYKAAAAACgAAAAoAAAAZAAAAGQAAAAAAAAAzMzMAAAAAABQAAAAUAAAAGQAAABkAAAAAAAAABcAAAAUAAAAAAAAAAAAAAD/fwAA/38AAAAAAAAJAAAABAAAACQAAAAeAAAAaAAAAAAAAAAAAAAAAAAAAAAAAAAAAAAAECcAABAnAAAAAAAAAAAAAAAAAAAAAAAAAAAAAAAAAAAAAAAAAAAAABQAAAAAAAAAwMD/AAAAAABkAAAAMgAAAAAAAABkAAAAAAAAAH9/fwAKAAAAIgAAABgAAAAAAAAAAAAAAAAAAAAAAAAAAAAAAAAAAAAkAAAAJAAAAAAAAAAHAAAAAAAAAAAAAAAAAAAAAAAAAAAAAAAAAAAAf39/ACUAAABYAAAAAAAAAAAAAAAAAAAAAAAAAAAAAAAAAAAAAAAAAAAAAAAAAAAAAAAAAAAAAAA/AAAAAAAAAKCGAQAAAAAAAAAAAAAAAAAMAAAAAQAAAAAAAAAAAAAAAAAAAB8AAABUAAAARHLEBf///wEAAAAAAAAAAAAAAAAAAAAAAAAAAAAAAAAAAAAAAAAAAAAAAAB/f38A5+bmA8zMzADAwP8Af39/AAAAAAAAAAAAAAAAAAAAAAAAAAAAIQAAABgAAAAUAAAAKAgAAJAJAADoKQAAMA8AABAAAAAmAAAACAAAAP//////////MAAAABQAAAAAAAAAAAD//wAAAQAAAP//AAABAA=="/>
+                <pr:smNativeData xmlns:pr="smNativeData" xmlns="smNativeData" val="SMDATA_16_V2g2ahMAAAAlAAAAZAAAAA0AAAAAkAAAAEgAAACQAAAASAAAAAAAAAABAAAAAAAAAAEAAABQAAAAAAAAAAAA4D8AAAAAAADgPwAAAAAAAOA/AAAAAAAA4D8AAAAAAADgPwAAAAAAAOA/AAAAAAAA4D8AAAAAAADgPwAAAAAAAOA/AAAAAAAA4D8CAAAAjAAAAAAAAAAAAAAARHLEDP///wgAAAAAAAAAAAAAAAAAAAAAAAAAAAAAAAAAAAAAZAAAAAEAAABAAAAAAAAAAAAAAAAAAAAAAAAAAAAAAAAAAAAAAAAAAAAAAAAAAAAAAAAAAAAAAAAAAAAAAAAAAAAAAAAAAAAAAAAAAAAAAAAAAAAAAAAAAAAAAAAAAAAAFAAAADwAAAAAAAAAAAAAAAAAAAAPAAAAAQAAACMAAAAjAAAAIwAAAB4AAAAAAAAAZAAAAGQAAAAAAAAAZAAAAGQAAAAVAAAAYAAAAAAAAAAAAAAADwAAACADAAAAAAAAAAAAAAEAAACgMgAAVgcAAKr4//8BAAAAf39/AAEAAABkAAAAAAAAABQAAABAHwAAAAAAACYAAAAAAAAAwOD//wAAAAAmAAAAZAAAABYAAABMAAAAAAAAAAAAAAAEAAAAAAAAAAEAAADn5uYKAAAAACgAAAAoAAAAZAAAAGQAAAAAAAAAzMzMAAAAAABQAAAAUAAAAGQAAABkAAAAAAAAABcAAAAUAAAAAAAAAAAAAAD/fwAA/38AAAAAAAAJAAAABAAAACQAAAAeAAAAaAAAAAAAAAAAAAAAAAAAAAAAAAAAAAAAECcAABAnAAAAAAAAAAAAAAAAAAAAAAAAAAAAAAAAAAAAAAAAAAAAABQAAAAAAAAAwMD/AAAAAABkAAAAMgAAAAAAAABkAAAAAAAAAH9/fwAKAAAAIgAAABgAAAAAAAAAAAAAAAAAAAAAAAAAAAAAAAAAAAAkAAAAJAAAAAAAAAAHAAAAAAAAAAAAAAAAAAAAAAAAAAAAAAAAAAAAf39/ACUAAABYAAAAAAAAAAAAAAAAAAAAAAAAAAAAAAAAAAAAAAAAAAAAAAAAAAAAAAAAAAAAAAA/AAAAAAAAAKCGAQAAAAAAAAAAAAAAAAAMAAAAAQAAAAAAAAAAAAAAAAAAAB8AAABUAAAARHLEBf///wEAAAAAAAAAAAAAAAAAAAAAAAAAAAAAAAAAAAAAAAAAAAAAAAB/f38A5+bmA8zMzADAwP8Af39/AAAAAAAAAAAAAAAAAAAAAAAAAAAAIQAAABgAAAAUAAAAKAgAAJAJAADoKQAAMA8AAAAAAAAmAAAACAAAAP//////////MAAAABQAAAAAAAAAAAD//wAAAQAAAP//AAABAA=="/>
               </a:ext>
             </a:extLst>
           </p:cNvSpPr>
@@ -9969,7 +10302,7 @@
                   <a:srgbClr val="13314F"/>
                 </a:solidFill>
               </a:rPr>
-              <a:t>modelo.  </a:t>
+              <a:t>modelo:  </a:t>
             </a:r>
             <a:r>
               <a:rPr lang="en-us" sz="1450" b="1" cap="none">
@@ -9989,7 +10322,7 @@
           <p:cNvSpPr>
             <a:extLst>
               <a:ext uri="smNativeData">
-                <pr:smNativeData xmlns:pr="smNativeData" xmlns="smNativeData" val="SMDATA_16_kRU2ahMAAAAlAAAAZQAAAA0AAAAAkAAAAEgAAACQAAAASAAAAAAAAAAAAAAAAAAAAAEAAABQAAAAexSuR+F6xD8AAAAAAADwvwAAAAAAAOA/AAAAAAAA4D8AAAAAAADgPwAAAAAAAOA/AAAAAAAA4D8AAAAAAADgPwAAAAAAAOA/AAAAAAAA4D8CAAAAjAAAAAEAAAAAAAAA7/P4AP///wgAAAAAAAAAAAAAAAAAAAAAAAAAAAAAAAAAAAAAeAAAAAEAAABAAAAAAAAAAAAAAABaAAAAAAAAAAAAAAAAAAAAAAAAAAAAAAAAAAAAAAAAAAAAAAAAAAAAAAAAAAAAAAAAAAAAAAAAAAAAAAAAAAAAAAAAAAAAAAAAAAAAFAAAADwAAAAAAAAAAAAAAAAAAAAPAAAAAQAAACMAAAAjAAAAIwAAAB4AAAAAAAAAZAAAAGQAAAAAAAAAZAAAAGQAAAAVAAAAYAAAAAAAAAAAAAAADwAAACADAAAAAAAAAAAAAAEAAACgMgAAVgcAAKr4//8BAAAAf39/AAEAAABkAAAAAAAAABQAAABAHwAAAAAAACYAAAAAAAAAwOD//wAAAAAmAAAAZAAAABYAAABMAAAAAQAAAAAAAAAGAAAAAAAAAAEAAAC5xNAAPAAAAAAAAAAoAAAAZAAAAGQAAAAAAAAAy8vLADwAAAAAAAAAKAAAAGQAAABkAAAAAAAAABcAAAAUAAAAAAAAAAAAAAD/fwAA/38AAAAAAAAJAAAABAAAAHwEAAAeAAAAaAAAAAAAAAAAAAAAAAAAAAAAAAAAAAAAECcAABAnAAAAAAAAAAAAAAAAAAAAAAAAAAAAAAAAAAAAAAAAAAAAAHgAAAAAAAAAwMD/AAAAAAAAAAAAAAAAAAAAAABkAAAAAAAAAH9/fwAKAAAAIgAAABgAAAAAAAAAAAAAAAAAAAAAAAAAAAAAAAAAAAAkAAAAJAAAAAAAAAAHAAAAAAAAAAAAAAAAAAAAAAAAAAAAAAAAAAAAf39/ACUAAABYAAAAAAAAAAAAAAAAAAAAAAAAAAAAAAAAAAAAAAAAAAAAAAAAAAAAAAAAAAAAAAA/AAAAAAAAAKCGAQAAAAAAAAAAAAAAAAAMAAAAAQAAAAAAAAAAAAAAAAAAAB8AAABUAAAA7/P4AP///wEAAAAAAAAAAAAAAAAAAAAAAAAAAAAAAAAAAAAAAAAAAAAAAAB/f38AucTQAMvLywDAwP8Af39/AAAAAAAAAAAAAAAAAAAAAAAAAAAAIQAAABgAAAAUAAAAYAMAADMQAADAKgAA0xUAABAAAAAmAAAACAAAAP//////////MAAAABQAAAAAAAAAAAD//wAAAQAAAP//AAABAA=="/>
+                <pr:smNativeData xmlns:pr="smNativeData" xmlns="smNativeData" val="SMDATA_16_V2g2ahMAAAAlAAAAZQAAAA0AAAAAkAAAAEgAAACQAAAASAAAAAAAAAAAAAAAAAAAAAEAAABQAAAAexSuR+F6xD8AAAAAAAAAAAAAAAAAAOA/AAAAAAAA4D8AAAAAAADgPwAAAAAAAOA/AAAAAAAA4D8AAAAAAADgPwAAAAAAAOA/AAAAAAAA4D8CAAAAjAAAAAEAAAAAAAAA7/P4AP///wgAAAAAAAAAAAAAAAAAAAAAAAAAAAAAAAAAAAAAeAAAAAEAAABAAAAAAAAAAAAAAABaAAAAAAAAAAAAAAAAAAAAAAAAAAAAAAAAAAAAAAAAAAAAAAAAAAAAAAAAAAAAAAAAAAAAAAAAAAAAAAAAAAAAAAAAAAAAAAAAAAAAFAAAADwAAAAAAAAAAAAAAAAAAAAPAAAAAQAAACMAAAAjAAAAIwAAAB4AAAAAAAAAZAAAAGQAAAAAAAAAZAAAAGQAAAAVAAAAYAAAAAAAAAAAAAAADwAAACADAAAAAAAAAAAAAAEAAACgMgAAVgcAAKr4//8BAAAAf39/AAEAAABkAAAAAAAAABQAAABAHwAAAAAAACYAAAAAAAAAwOD//wAAAAAmAAAAZAAAABYAAABMAAAAAQAAAAAAAAAGAAAAAAAAAAEAAAC5xNAAPAAAAAAAAAAoAAAAZAAAAGQAAAAAAAAAy8vLADwAAAAAAAAAKAAAAGQAAABkAAAAAAAAABcAAAAUAAAAAAAAAAAAAAD/fwAA/38AAAAAAAAJAAAABAAAAHwEAAAeAAAAaAAAAAAAAAAAAAAAAAAAAAAAAAAAAAAAECcAABAnAAAAAAAAAAAAAAAAAAAAAAAAAAAAAAAAAAAAAAAAAAAAAHgAAAAAAAAAwMD/AAAAAAAAAAAAAAAAAAAAAABkAAAAAAAAAH9/fwAKAAAAIgAAABgAAAAAAAAAAAAAAAAAAAAAAAAAAAAAAAAAAAAkAAAAJAAAAAAAAAAHAAAAAAAAAAAAAAAAAAAAAAAAAAAAAAAAAAAAf39/ACUAAABYAAAAAAAAAAAAAAAAAAAAAAAAAAAAAAAAAAAAAAAAAAAAAAAAAAAAAAAAAAAAAAA/AAAAAAAAAKCGAQAAAAAAAAAAAAAAAAAMAAAAAQAAAAAAAAAAAAAAAAAAAB8AAABUAAAA7/P4AP///wEAAAAAAAAAAAAAAAAAAAAAAAAAAAAAAAAAAAAAAAAAAAAAAAB/f38AucTQAMvLywDAwP8Af39/AAAAAAAAAAAAAAAAAAAAAAAAAAAAIQAAABgAAAAUAAAAYAMAADMQAADAKgAA0xUAABAAAAAmAAAACAAAAP//////////MAAAABQAAAAAAAAAAAD//wAAAQAAAP//AAABAA=="/>
               </a:ext>
             </a:extLst>
           </p:cNvSpPr>
@@ -10026,7 +10359,7 @@
           <p:cNvSpPr>
             <a:extLst>
               <a:ext uri="smNativeData">
-                <pr:smNativeData xmlns:pr="smNativeData" xmlns="smNativeData" val="SMDATA_16_kRU2ahMAAAAlAAAAZgAAAA0AAAAAkAAAAEgAAACQAAAASAAAAAAAAAAAAAAAAAAAAAEAAABQAAAAAAAAAAAA8D8AAAAAAADwPwAAAAAAAOA/AAAAAAAA4D8AAAAAAADgPwAAAAAAAOA/AAAAAAAA4D8AAAAAAADgPwAAAAAAAOA/AAAAAAAA4D8CAAAAjAAAAAEAAAAAAAAA4KA4AP///wgAAAAAAAAAAAAAAAAAAAAAAAAAAAAAAAAAAAAAeAAAAAEAAABAAAAAAAAAAAAAAABaAAAAAAAAAAAAAAAAAAAAAAAAAAAAAAAAAAAAAAAAAAAAAAAAAAAAAAAAAAAAAAAAAAAAAAAAAAAAAAAAAAAAAAAAAAAAAAAAAAAAFAAAADwAAAAAAAAAAAAAAAAAAAAPAAAAAQAAACMAAAAjAAAAIwAAAB4AAAAAAAAAZAAAAGQAAAAAAAAAZAAAAGQAAAAVAAAAYAAAAAAAAAAAAAAADwAAACADAAAAAAAAAAAAAAEAAACgMgAAVgcAAKr4//8BAAAAf39/AAEAAABkAAAAAAAAABQAAABAHwAAAAAAACYAAAAAAAAAwOD//wAAAAAmAAAAZAAAABYAAABMAAAAAAAAAAAAAAAEAAAAAAAAAAEAAADn5uYKAAAAACgAAAAoAAAAZAAAAGQAAAAAAAAAzMzMAAAAAABQAAAAUAAAAGQAAABkAAAAAAAAABcAAAAUAAAAAAAAAAAAAAD/fwAA/38AAAAAAAAJAAAABAAAAAAAAAAeAAAAaAAAAAAAAAAAAAAAAAAAAAAAAAAAAAAAECcAABAnAAAAAAAAAAAAAAAAAAAAAAAAAAAAAAAAAAAAAAAAAAAAABQAAAAAAAAAwMD/AAAAAABkAAAAMgAAAAAAAABkAAAAAAAAAH9/fwAKAAAAIgAAABgAAAAAAAAAAAAAAAAAAAAAAAAAAAAAAAAAAAAkAAAAJAAAAAAAAAAHAAAAAAAAAAAAAAAAAAAAAAAAAAAAAAAAAAAAf39/ACUAAABYAAAAAAAAAAAAAAAAAAAAAAAAAAAAAAAAAAAAAAAAAAAAAAAAAAAAAAAAAAAAAAA/AAAAAAAAAKCGAQAAAAAAAAAAAAAAAAAMAAAAAQAAAAAAAAAAAAAAAAAAAB8AAABUAAAA4KA4AP///wEAAAAAAAAAAAAAAAAAAAAAAAAAAAAAAAAAAAAAAAAAAAAAAAB/f38A5+bmA8zMzADAwP8Af39/AAAAAAAAAAAAAAAAAAAAAAAAAAAAIQAAABgAAAAUAAAAgAQAAMYRAAD6BgAAQBQAABAAAAAmAAAACAAAAP//////////MAAAABQAAAAAAAAAAAD//wAAAQAAAP//AAABAA=="/>
+                <pr:smNativeData xmlns:pr="smNativeData" xmlns="smNativeData" val="SMDATA_16_V2g2ahMAAAAlAAAAZgAAAA0AAAAAkAAAAEgAAACQAAAASAAAAAAAAAAAAAAAAAAAAAEAAABQAAAAAAAAAAAA8D8AAAAAAADwPwAAAAAAAOA/AAAAAAAA4D8AAAAAAADgPwAAAAAAAOA/AAAAAAAA4D8AAAAAAADgPwAAAAAAAOA/AAAAAAAA4D8CAAAAjAAAAAEAAAAAAAAA4KA4AP///wgAAAAAAAAAAAAAAAAAAAAAAAAAAAAAAAAAAAAAeAAAAAEAAABAAAAAAAAAAAAAAABaAAAAAAAAAAAAAAAAAAAAAAAAAAAAAAAAAAAAAAAAAAAAAAAAAAAAAAAAAAAAAAAAAAAAAAAAAAAAAAAAAAAAAAAAAAAAAAAAAAAAFAAAADwAAAAAAAAAAAAAAAAAAAAPAAAAAQAAACMAAAAjAAAAIwAAAB4AAAAAAAAAZAAAAGQAAAAAAAAAZAAAAGQAAAAVAAAAYAAAAAAAAAAAAAAADwAAACADAAAAAAAAAAAAAAEAAACgMgAAVgcAAKr4//8BAAAAf39/AAEAAABkAAAAAAAAABQAAABAHwAAAAAAACYAAAAAAAAAwOD//wAAAAAmAAAAZAAAABYAAABMAAAAAAAAAAAAAAAEAAAAAAAAAAEAAADn5uYKAAAAACgAAAAoAAAAZAAAAGQAAAAAAAAAzMzMAAAAAABQAAAAUAAAAGQAAABkAAAAAAAAABcAAAAUAAAAAAAAAAAAAAD/fwAA/38AAAAAAAAJAAAABAAAAAAAAAAeAAAAaAAAAAAAAAAAAAAAAAAAAAAAAAAAAAAAECcAABAnAAAAAAAAAAAAAAAAAAAAAAAAAAAAAAAAAAAAAAAAAAAAABQAAAAAAAAAwMD/AAAAAABkAAAAMgAAAAAAAABkAAAAAAAAAH9/fwAKAAAAIgAAABgAAAAAAAAAAAAAAAAAAAAAAAAAAAAAAAAAAAAkAAAAJAAAAAAAAAAHAAAAAAAAAAAAAAAAAAAAAAAAAAAAAAAAAAAAf39/ACUAAABYAAAAAAAAAAAAAAAAAAAAAAAAAAAAAAAAAAAAAAAAAAAAAAAAAAAAAAAAAAAAAAA/AAAAAAAAAKCGAQAAAAAAAAAAAAAAAAAMAAAAAQAAAAAAAAAAAAAAAAAAAB8AAABUAAAA4KA4AP///wEAAAAAAAAAAAAAAAAAAAAAAAAAAAAAAAAAAAAAAAAAAAAAAAB/f38A5+bmA8zMzADAwP8Af39/AAAAAAAAAAAAAAAAAAAAAAAAAAAAIQAAABgAAAAUAAAAgAQAAMYRAAD6BgAAQBQAABAAAAAmAAAACAAAAP//////////MAAAABQAAAAAAAAAAAD//wAAAQAAAP//AAABAA=="/>
               </a:ext>
             </a:extLst>
           </p:cNvSpPr>
@@ -10055,7 +10388,7 @@
           <p:cNvSpPr>
             <a:extLst>
               <a:ext uri="smNativeData">
-                <pr:smNativeData xmlns:pr="smNativeData" xmlns="smNativeData" val="SMDATA_16_kRU2ahMAAAAlAAAAZAAAAA0AAAAAAAAAAAAAAAAAAAAAAAAAAAAAAAABAAAAAAAAAAEAAABQAAAAAAAAAAAA4D8AAAAAAADgPwAAAAAAAOA/AAAAAAAA4D8AAAAAAADgPwAAAAAAAOA/AAAAAAAA4D8AAAAAAADgPwAAAAAAAOA/AAAAAAAA4D8CAAAAjAAAAAAAAAAAAAAARHLEDP///wgAAAAAAAAAAAAAAAAAAAAAAAAAAAAAAAAAAAAAZAAAAAEAAABAAAAAAAAAAAAAAAAAAAAAAAAAAAAAAAAAAAAAAAAAAAAAAAAAAAAAAAAAAAAAAAAAAAAAAAAAAAAAAAAAAAAAAAAAAAAAAAAAAAAAAAAAAAAAAAAAAAAAFAAAADwAAAAAAAAAAAAAAAAAAAAPAAAAAQAAACMAAAAjAAAAIwAAAB4AAAAAAAAAZAAAAGQAAAAAAAAAZAAAAGQAAAAVAAAAYAAAAAAAAAAAAAAADwAAACADAAAAAAAAAAAAAAEAAACgMgAAVgcAAKr4//8BAAAAf39/AAEAAABkAAAAAAAAABQAAABAHwAAAAAAACYAAAAAAAAAwOD//wAAAAAmAAAAZAAAABYAAABMAAAAAAAAAAAAAAAEAAAAAAAAAAEAAADn5uYKAAAAACgAAAAoAAAAZAAAAGQAAAAAAAAAzMzMAAAAAABQAAAAUAAAAGQAAABkAAAAAAAAABcAAAAUAAAAAAAAAAAAAAD/fwAA/38AAAAAAAAJAAAABAAAAP////8eAAAAaAAAAAAAAAAAAAAAAAAAAAAAAAAAAAAAECcAABAnAAAAAAAAAAAAAAAAAAAAAAAAAAAAAAAAAAAAAAAAAAAAABQAAAAAAAAAwMD/AAAAAABkAAAAMgAAAAAAAABkAAAAAAAAAH9/fwAKAAAAIgAAABgAAAAAAAAAAAAAAAAAAAAAAAAAAAAAAAAAAAAkAAAAJAAAAAAAAAAHAAAAAAAAAAAAAAAAAAAAAAAAAAAAAAAAAAAAf39/ACUAAABYAAAAAAAAAAAAAAAAAAAAAAAAAAAAAAAAAAAAAAAAAAAAAAAAAAAAAAAAAAAAAAA/AAAAAAAAAKCGAQAAAAAAAAAAAAAAAAAMAAAAAQAAAAAAAAAAAAAAAAAAAB8AAABUAAAARHLEBf///wEAAAAAAAAAAAAAAAAAAAAAAAAAAAAAAAAAAAAAAAAAAAAAAAB/f38A5+bmA8zMzADAwP8Af39/AAAAAAAAAAAAAAAAAAAAAAAAAAAAIQAAABgAAAAUAAAAgAQAAMYRAAD6BgAAQBQAABAAAAAmAAAACAAAAP//////////MAAAABQAAAAAAAAAAAD//wAAAQAAAP//AAABAA=="/>
+                <pr:smNativeData xmlns:pr="smNativeData" xmlns="smNativeData" val="SMDATA_16_V2g2ahMAAAAlAAAAZAAAAA0AAAAAAAAAAAAAAAAAAAAAAAAAAAAAAAABAAAAAAAAAAEAAABQAAAAAAAAAAAA4D8AAAAAAADgPwAAAAAAAOA/AAAAAAAA4D8AAAAAAADgPwAAAAAAAOA/AAAAAAAA4D8AAAAAAADgPwAAAAAAAOA/AAAAAAAA4D8CAAAAjAAAAAAAAAAAAAAARHLEDP///wgAAAAAAAAAAAAAAAAAAAAAAAAAAAAAAAAAAAAAZAAAAAEAAABAAAAAAAAAAAAAAAAAAAAAAAAAAAAAAAAAAAAAAAAAAAAAAAAAAAAAAAAAAAAAAAAAAAAAAAAAAAAAAAAAAAAAAAAAAAAAAAAAAAAAAAAAAAAAAAAAAAAAFAAAADwAAAAAAAAAAAAAAAAAAAAPAAAAAQAAACMAAAAjAAAAIwAAAB4AAAAAAAAAZAAAAGQAAAAAAAAAZAAAAGQAAAAVAAAAYAAAAAAAAAAAAAAADwAAACADAAAAAAAAAAAAAAEAAACgMgAAVgcAAKr4//8BAAAAf39/AAEAAABkAAAAAAAAABQAAABAHwAAAAAAACYAAAAAAAAAwOD//wAAAAAmAAAAZAAAABYAAABMAAAAAAAAAAAAAAAEAAAAAAAAAAEAAADn5uYKAAAAACgAAAAoAAAAZAAAAGQAAAAAAAAAzMzMAAAAAABQAAAAUAAAAGQAAABkAAAAAAAAABcAAAAUAAAAAAAAAAAAAAD/fwAA/38AAAAAAAAJAAAABAAAAP////8eAAAAaAAAAAAAAAAAAAAAAAAAAAAAAAAAAAAAECcAABAnAAAAAAAAAAAAAAAAAAAAAAAAAAAAAAAAAAAAAAAAAAAAABQAAAAAAAAAwMD/AAAAAABkAAAAMgAAAAAAAABkAAAAAAAAAH9/fwAKAAAAIgAAABgAAAAAAAAAAAAAAAAAAAAAAAAAAAAAAAAAAAAkAAAAJAAAAAAAAAAHAAAAAAAAAAAAAAAAAAAAAAAAAAAAAAAAAAAAf39/ACUAAABYAAAAAAAAAAAAAAAAAAAAAAAAAAAAAAAAAAAAAAAAAAAAAAAAAAAAAAAAAAAAAAA/AAAAAAAAAKCGAQAAAAAAAAAAAAAAAAAMAAAAAQAAAAAAAAAAAAAAAAAAAB8AAABUAAAARHLEBf///wEAAAAAAAAAAAAAAAAAAAAAAAAAAAAAAAAAAAAAAAAAAAAAAAB/f38A5+bmA8zMzADAwP8Af39/AAAAAAAAAAAAAAAAAAAAAAAAAAAAIQAAABgAAAAUAAAAgAQAAMYRAAD6BgAAQBQAABAAAAAmAAAACAAAAP//////////MAAAABQAAAAAAAAAAAD//wAAAQAAAP//AAABAA=="/>
               </a:ext>
             </a:extLst>
           </p:cNvSpPr>
@@ -10100,7 +10433,7 @@
           <p:cNvSpPr>
             <a:extLst>
               <a:ext uri="smNativeData">
-                <pr:smNativeData xmlns:pr="smNativeData" xmlns="smNativeData" val="SMDATA_16_kRU2ahMAAAAlAAAAZAAAAA0AAAAAkAAAAEgAAACQAAAASAAAAAAAAAABAAAAAAAAAAEAAABQAAAAAAAAAAAA4D8AAAAAAADgPwAAAAAAAOA/AAAAAAAA4D8AAAAAAADgPwAAAAAAAOA/AAAAAAAA4D8AAAAAAADgPwAAAAAAAOA/AAAAAAAA4D8CAAAAjAAAAAAAAAAAAAAARHLEDP///wgAAAAAAAAAAAAAAAAAAAAAAAAAAAAAAAAAAAAAZAAAAAEAAABAAAAAAAAAAAAAAAAAAAAAAAAAAAAAAAAAAAAAAAAAAAAAAAAAAAAAAAAAAAAAAAAAAAAAAAAAAAAAAAAAAAAAAAAAAAAAAAAAAAAAAAAAAAAAAAAAAAAAFAAAADwAAAAAAAAAAAAAAAAAAAAPAAAAAQAAACMAAAAjAAAAIwAAAB4AAAAAAAAAZAAAAGQAAAAAAAAAZAAAAGQAAAAVAAAAYAAAAAAAAAAAAAAADwAAACADAAAAAAAAAAAAAAEAAACgMgAAVgcAAKr4//8BAAAAf39/AAEAAABkAAAAAAAAABQAAABAHwAAAAAAACYAAAAAAAAAwOD//wAAAAAmAAAAZAAAABYAAABMAAAAAAAAAAAAAAAEAAAAAAAAAAEAAADn5uYKAAAAACgAAAAoAAAAZAAAAGQAAAAAAAAAzMzMAAAAAABQAAAAUAAAAGQAAABkAAAAAAAAABcAAAAUAAAAAAAAAAAAAAD/fwAA/38AAAAAAAAJAAAABAAAAP////8eAAAAaAAAAAAAAAAAAAAAAAAAAAAAAAAAAAAAECcAABAnAAAAAAAAAAAAAAAAAAAAAAAAAAAAAAAAAAAAAAAAAAAAABQAAAAAAAAAwMD/AAAAAABkAAAAMgAAAAAAAABkAAAAAAAAAH9/fwAKAAAAIgAAABgAAAAAAAAAAAAAAAAAAAAAAAAAAAAAAAAAAAAkAAAAJAAAAAAAAAAHAAAAAAAAAAAAAAAAAAAAAAAAAAAAAAAAAAAAf39/ACUAAABYAAAAAAAAAAAAAAAAAAAAAAAAAAAAAAAAAAAAAAAAAAAAAAAAAAAAAAAAAAAAAAA/AAAAAAAAAKCGAQAAAAAAAAAAAAAAAAAMAAAAAQAAAAAAAAAAAAAAAAAAAB8AAABUAAAARHLEBf///wEAAAAAAAAAAAAAAAAAAAAAAAAAAAAAAAAAAAAAAAAAAAAAAAB/f38A5+bmA8zMzADAwP8Af39/AAAAAAAAAAAAAAAAAAAAAAAAAAAAIQAAABgAAAAUAAAAKAgAADMQAADoKQAA0xUAABAAAAAmAAAACAAAAP//////////MAAAABQAAAAAAAAAAAD//wAAAQAAAP//AAABAA=="/>
+                <pr:smNativeData xmlns:pr="smNativeData" xmlns="smNativeData" val="SMDATA_16_V2g2ahMAAAAlAAAAZAAAAA0AAAAAkAAAAEgAAACQAAAASAAAAAAAAAABAAAAAAAAAAEAAABQAAAAAAAAAAAA4D8AAAAAAADgPwAAAAAAAOA/AAAAAAAA4D8AAAAAAADgPwAAAAAAAOA/AAAAAAAA4D8AAAAAAADgPwAAAAAAAOA/AAAAAAAA4D8CAAAAjAAAAAAAAAAAAAAARHLEDP///wgAAAAAAAAAAAAAAAAAAAAAAAAAAAAAAAAAAAAAZAAAAAEAAABAAAAAAAAAAAAAAAAAAAAAAAAAAAAAAAAAAAAAAAAAAAAAAAAAAAAAAAAAAAAAAAAAAAAAAAAAAAAAAAAAAAAAAAAAAAAAAAAAAAAAAAAAAAAAAAAAAAAAFAAAADwAAAAAAAAAAAAAAAAAAAAPAAAAAQAAACMAAAAjAAAAIwAAAB4AAAAAAAAAZAAAAGQAAAAAAAAAZAAAAGQAAAAVAAAAYAAAAAAAAAAAAAAADwAAACADAAAAAAAAAAAAAAEAAACgMgAAVgcAAKr4//8BAAAAf39/AAEAAABkAAAAAAAAABQAAABAHwAAAAAAACYAAAAAAAAAwOD//wAAAAAmAAAAZAAAABYAAABMAAAAAAAAAAAAAAAEAAAAAAAAAAEAAADn5uYKAAAAACgAAAAoAAAAZAAAAGQAAAAAAAAAzMzMAAAAAABQAAAAUAAAAGQAAABkAAAAAAAAABcAAAAUAAAAAAAAAAAAAAD/fwAA/38AAAAAAAAJAAAABAAAAP////8eAAAAaAAAAAAAAAAAAAAAAAAAAAAAAAAAAAAAECcAABAnAAAAAAAAAAAAAAAAAAAAAAAAAAAAAAAAAAAAAAAAAAAAABQAAAAAAAAAwMD/AAAAAABkAAAAMgAAAAAAAABkAAAAAAAAAH9/fwAKAAAAIgAAABgAAAAAAAAAAAAAAAAAAAAAAAAAAAAAAAAAAAAkAAAAJAAAAAAAAAAHAAAAAAAAAAAAAAAAAAAAAAAAAAAAAAAAAAAAf39/ACUAAABYAAAAAAAAAAAAAAAAAAAAAAAAAAAAAAAAAAAAAAAAAAAAAAAAAAAAAAAAAAAAAAA/AAAAAAAAAKCGAQAAAAAAAAAAAAAAAAAMAAAAAQAAAAAAAAAAAAAAAAAAAB8AAABUAAAARHLEBf///wEAAAAAAAAAAAAAAAAAAAAAAAAAAAAAAAAAAAAAAAAAAAAAAAB/f38A5+bmA8zMzADAwP8Af39/AAAAAAAAAAAAAAAAAAAAAAAAAAAAIQAAABgAAAAUAAAAKAgAADMQAADoKQAA0xUAAAAAAAAmAAAACAAAAP//////////MAAAABQAAAAAAAAAAAD//wAAAQAAAP//AAABAA=="/>
               </a:ext>
             </a:extLst>
           </p:cNvSpPr>
@@ -10141,7 +10474,7 @@
                   <a:srgbClr val="13314F"/>
                 </a:solidFill>
               </a:rPr>
-              <a:t>cíclica.  </a:t>
+              <a:t>cíclica,  </a:t>
             </a:r>
             <a:r>
               <a:rPr lang="en-us" sz="1450" b="1" cap="none">
@@ -10209,7 +10542,7 @@
           <p:cNvSpPr>
             <a:extLst>
               <a:ext uri="smNativeData">
-                <pr:smNativeData xmlns:pr="smNativeData" xmlns="smNativeData" val="SMDATA_16_kRU2ahMAAAAlAAAAZQAAAA0AAAAAkAAAAEgAAACQAAAASAAAAAAAAAAAAAAAAAAAAAEAAABQAAAAexSuR+F6xD8AAAAAAADwvwAAAAAAAOA/AAAAAAAA4D8AAAAAAADgPwAAAAAAAOA/AAAAAAAA4D8AAAAAAADgPwAAAAAAAOA/AAAAAAAA4D8CAAAAjAAAAAEAAAAAAAAA7/P4AP///wgAAAAAAAAAAAAAAAAAAAAAAAAAAAAAAAAAAAAAeAAAAAEAAABAAAAAAAAAAAAAAABaAAAAAAAAAAAAAAAAAAAAAAAAAAAAAAAAAAAAAAAAAAAAAAAAAAAAAAAAAAAAAAAAAAAAAAAAAAAAAAAAAAAAAAAAAAAAAAAAAAAAFAAAADwAAAAAAAAAAAAAAAAAAAAPAAAAAQAAACMAAAAjAAAAIwAAAB4AAAAAAAAAZAAAAGQAAAAAAAAAZAAAAGQAAAAVAAAAYAAAAAAAAAAAAAAADwAAACADAAAAAAAAAAAAAAEAAACgMgAAVgcAAKr4//8BAAAAf39/AAEAAABkAAAAAAAAABQAAABAHwAAAAAAACYAAAAAAAAAwOD//wAAAAAmAAAAZAAAABYAAABMAAAAAQAAAAAAAAAGAAAAAAAAAAEAAAC5xNAAPAAAAAAAAAAoAAAAZAAAAGQAAAAAAAAAy8vLADwAAAAAAAAAKAAAAGQAAABkAAAAAAAAABcAAAAUAAAAAAAAAAAAAAD/fwAA/38AAAAAAAAJAAAABAAAACsAAAAeAAAAaAAAAAAAAAAAAAAAAAAAAAAAAAAAAAAAECcAABAnAAAAAAAAAAAAAAAAAAAAAAAAAAAAAAAAAAAAAAAAAAAAAHgAAAAAAAAAwMD/AAAAAAAAAAAAAAAAAAAAAABkAAAAAAAAAH9/fwAKAAAAIgAAABgAAAAAAAAAAAAAAAAAAAAAAAAAAAAAAAAAAAAkAAAAJAAAAAAAAAAHAAAAAAAAAAAAAAAAAAAAAAAAAAAAAAAAAAAAf39/ACUAAABYAAAAAAAAAAAAAAAAAAAAAAAAAAAAAAAAAAAAAAAAAAAAAAAAAAAAAAAAAAAAAAA/AAAAAAAAAKCGAQAAAAAAAAAAAAAAAAAMAAAAAQAAAAAAAAAAAAAAAAAAAB8AAABUAAAA7/P4AP///wEAAAAAAAAAAAAAAAAAAAAAAAAAAAAAAAAAAAAAAAAAAAAAAAB/f38AucTQAMvLywDAwP8Af39/AAAAAAAAAAAAAAAAAAAAAAAAAAAAIQAAABgAAAAUAAAAYAMAANYWAADAKgAAdhwAABAAAAAmAAAACAAAAP//////////MAAAABQAAAAAAAAAAAD//wAAAQAAAP//AAABAA=="/>
+                <pr:smNativeData xmlns:pr="smNativeData" xmlns="smNativeData" val="SMDATA_16_V2g2ahMAAAAlAAAAZQAAAA0AAAAAkAAAAEgAAACQAAAASAAAAAAAAAAAAAAAAAAAAAEAAABQAAAAexSuR+F6xD8AAAAAAAAAAAAAAAAAAOA/AAAAAAAA4D8AAAAAAADgPwAAAAAAAOA/AAAAAAAA4D8AAAAAAADgPwAAAAAAAOA/AAAAAAAA4D8CAAAAjAAAAAEAAAAAAAAA7/P4AP///wgAAAAAAAAAAAAAAAAAAAAAAAAAAAAAAAAAAAAAeAAAAAEAAABAAAAAAAAAAAAAAABaAAAAAAAAAAAAAAAAAAAAAAAAAAAAAAAAAAAAAAAAAAAAAAAAAAAAAAAAAAAAAAAAAAAAAAAAAAAAAAAAAAAAAAAAAAAAAAAAAAAAFAAAADwAAAAAAAAAAAAAAAAAAAAPAAAAAQAAACMAAAAjAAAAIwAAAB4AAAAAAAAAZAAAAGQAAAAAAAAAZAAAAGQAAAAVAAAAYAAAAAAAAAAAAAAADwAAACADAAAAAAAAAAAAAAEAAACgMgAAVgcAAKr4//8BAAAAf39/AAEAAABkAAAAAAAAABQAAABAHwAAAAAAACYAAAAAAAAAwOD//wAAAAAmAAAAZAAAABYAAABMAAAAAQAAAAAAAAAGAAAAAAAAAAEAAAC5xNAAPAAAAAAAAAAoAAAAZAAAAGQAAAAAAAAAy8vLADwAAAAAAAAAKAAAAGQAAABkAAAAAAAAABcAAAAUAAAAAAAAAAAAAAD/fwAA/38AAAAAAAAJAAAABAAAACsAAAAeAAAAaAAAAAAAAAAAAAAAAAAAAAAAAAAAAAAAECcAABAnAAAAAAAAAAAAAAAAAAAAAAAAAAAAAAAAAAAAAAAAAAAAAHgAAAAAAAAAwMD/AAAAAAAAAAAAAAAAAAAAAABkAAAAAAAAAH9/fwAKAAAAIgAAABgAAAAAAAAAAAAAAAAAAAAAAAAAAAAAAAAAAAAkAAAAJAAAAAAAAAAHAAAAAAAAAAAAAAAAAAAAAAAAAAAAAAAAAAAAf39/ACUAAABYAAAAAAAAAAAAAAAAAAAAAAAAAAAAAAAAAAAAAAAAAAAAAAAAAAAAAAAAAAAAAAA/AAAAAAAAAKCGAQAAAAAAAAAAAAAAAAAMAAAAAQAAAAAAAAAAAAAAAAAAAB8AAABUAAAA7/P4AP///wEAAAAAAAAAAAAAAAAAAAAAAAAAAAAAAAAAAAAAAAAAAAAAAAB/f38AucTQAMvLywDAwP8Af39/AAAAAAAAAAAAAAAAAAAAAAAAAAAAIQAAABgAAAAUAAAAYAMAANYWAADAKgAAdhwAABAAAAAmAAAACAAAAP//////////MAAAABQAAAAAAAAAAAD//wAAAQAAAP//AAABAA=="/>
               </a:ext>
             </a:extLst>
           </p:cNvSpPr>
@@ -10246,7 +10579,7 @@
           <p:cNvSpPr>
             <a:extLst>
               <a:ext uri="smNativeData">
-                <pr:smNativeData xmlns:pr="smNativeData" xmlns="smNativeData" val="SMDATA_16_kRU2ahMAAAAlAAAAZgAAAA0AAAAAkAAAAEgAAACQAAAASAAAAAAAAAAAAAAAAAAAAAEAAABQAAAAAAAAAAAA8D8AAAAAAADwPwAAAAAAAOA/AAAAAAAA4D8AAAAAAADgPwAAAAAAAOA/AAAAAAAA4D8AAAAAAADgPwAAAAAAAOA/AAAAAAAA4D8CAAAAjAAAAAEAAAAAAAAA4KA4AP///wgAAAAAAAAAAAAAAAAAAAAAAAAAAAAAAAAAAAAAeAAAAAEAAABAAAAAAAAAAAAAAABaAAAAAAAAAAAAAAAAAAAAAAAAAAAAAAAAAAAAAAAAAAAAAAAAAAAAAAAAAAAAAAAAAAAAAAAAAAAAAAAAAAAAAAAAAAAAAAAAAAAAFAAAADwAAAAAAAAAAAAAAAAAAAAPAAAAAQAAACMAAAAjAAAAIwAAAB4AAAAAAAAAZAAAAGQAAAAAAAAAZAAAAGQAAAAVAAAAYAAAAAAAAAAAAAAADwAAACADAAAAAAAAAAAAAAEAAACgMgAAVgcAAKr4//8BAAAAf39/AAEAAABkAAAAAAAAABQAAABAHwAAAAAAACYAAAAAAAAAwOD//wAAAAAmAAAAZAAAABYAAABMAAAAAAAAAAAAAAAEAAAAAAAAAAEAAADn5uYKAAAAACgAAAAoAAAAZAAAAGQAAAAAAAAAzMzMAAAAAABQAAAAUAAAAGQAAABkAAAAAAAAABcAAAAUAAAAAAAAAAAAAAD/fwAA/38AAAAAAAAJAAAABAAAADoJAAAeAAAAaAAAAAAAAAAAAAAAAAAAAAAAAAAAAAAAECcAABAnAAAAAAAAAAAAAAAAAAAAAAAAAAAAAAAAAAAAAAAAAAAAABQAAAAAAAAAwMD/AAAAAABkAAAAMgAAAAAAAABkAAAAAAAAAH9/fwAKAAAAIgAAABgAAAAAAAAAAAAAAAAAAAAAAAAAAAAAAAAAAAAkAAAAJAAAAAAAAAAHAAAAAAAAAAAAAAAAAAAAAAAAAAAAAAAAAAAAf39/ACUAAABYAAAAAAAAAAAAAAAAAAAAAAAAAAAAAAAAAAAAAAAAAAAAAAAAAAAAAAAAAAAAAAA/AAAAAAAAAKCGAQAAAAAAAAAAAAAAAAAMAAAAAQAAAAAAAAAAAAAAAAAAAB8AAABUAAAA4KA4AP///wEAAAAAAAAAAAAAAAAAAAAAAAAAAAAAAAAAAAAAAAAAAAAAAAB/f38A5+bmA8zMzADAwP8Af39/AAAAAAAAAAAAAAAAAAAAAAAAAAAAIQAAABgAAAAUAAAAgAQAAGoYAAD6BgAA4xoAABAAAAAmAAAACAAAAP//////////MAAAABQAAAAAAAAAAAD//wAAAQAAAP//AAABAA=="/>
+                <pr:smNativeData xmlns:pr="smNativeData" xmlns="smNativeData" val="SMDATA_16_V2g2ahMAAAAlAAAAZgAAAA0AAAAAkAAAAEgAAACQAAAASAAAAAAAAAAAAAAAAAAAAAEAAABQAAAAAAAAAAAA8D8AAAAAAADwPwAAAAAAAOA/AAAAAAAA4D8AAAAAAADgPwAAAAAAAOA/AAAAAAAA4D8AAAAAAADgPwAAAAAAAOA/AAAAAAAA4D8CAAAAjAAAAAEAAAAAAAAA4KA4AP///wgAAAAAAAAAAAAAAAAAAAAAAAAAAAAAAAAAAAAAeAAAAAEAAABAAAAAAAAAAAAAAABaAAAAAAAAAAAAAAAAAAAAAAAAAAAAAAAAAAAAAAAAAAAAAAAAAAAAAAAAAAAAAAAAAAAAAAAAAAAAAAAAAAAAAAAAAAAAAAAAAAAAFAAAADwAAAAAAAAAAAAAAAAAAAAPAAAAAQAAACMAAAAjAAAAIwAAAB4AAAAAAAAAZAAAAGQAAAAAAAAAZAAAAGQAAAAVAAAAYAAAAAAAAAAAAAAADwAAACADAAAAAAAAAAAAAAEAAACgMgAAVgcAAKr4//8BAAAAf39/AAEAAABkAAAAAAAAABQAAABAHwAAAAAAACYAAAAAAAAAwOD//wAAAAAmAAAAZAAAABYAAABMAAAAAAAAAAAAAAAEAAAAAAAAAAEAAADn5uYKAAAAACgAAAAoAAAAZAAAAGQAAAAAAAAAzMzMAAAAAABQAAAAUAAAAGQAAABkAAAAAAAAABcAAAAUAAAAAAAAAAAAAAD/fwAA/38AAAAAAAAJAAAABAAAADoJAAAeAAAAaAAAAAAAAAAAAAAAAAAAAAAAAAAAAAAAECcAABAnAAAAAAAAAAAAAAAAAAAAAAAAAAAAAAAAAAAAAAAAAAAAABQAAAAAAAAAwMD/AAAAAABkAAAAMgAAAAAAAABkAAAAAAAAAH9/fwAKAAAAIgAAABgAAAAAAAAAAAAAAAAAAAAAAAAAAAAAAAAAAAAkAAAAJAAAAAAAAAAHAAAAAAAAAAAAAAAAAAAAAAAAAAAAAAAAAAAAf39/ACUAAABYAAAAAAAAAAAAAAAAAAAAAAAAAAAAAAAAAAAAAAAAAAAAAAAAAAAAAAAAAAAAAAA/AAAAAAAAAKCGAQAAAAAAAAAAAAAAAAAMAAAAAQAAAAAAAAAAAAAAAAAAAB8AAABUAAAA4KA4AP///wEAAAAAAAAAAAAAAAAAAAAAAAAAAAAAAAAAAAAAAAAAAAAAAAB/f38A5+bmA8zMzADAwP8Af39/AAAAAAAAAAAAAAAAAAAAAAAAAAAAIQAAABgAAAAUAAAAgAQAAGoYAAD6BgAA4xoAABAAAAAmAAAACAAAAP//////////MAAAABQAAAAAAAAAAAD//wAAAQAAAP//AAABAA=="/>
               </a:ext>
             </a:extLst>
           </p:cNvSpPr>
@@ -10275,7 +10608,7 @@
           <p:cNvSpPr>
             <a:extLst>
               <a:ext uri="smNativeData">
-                <pr:smNativeData xmlns:pr="smNativeData" xmlns="smNativeData" val="SMDATA_16_kRU2ahMAAAAlAAAAZAAAAA0AAAAAAAAAAAAAAAAAAAAAAAAAAAAAAAABAAAAAAAAAAEAAABQAAAAAAAAAAAA4D8AAAAAAADgPwAAAAAAAOA/AAAAAAAA4D8AAAAAAADgPwAAAAAAAOA/AAAAAAAA4D8AAAAAAADgPwAAAAAAAOA/AAAAAAAA4D8CAAAAjAAAAAAAAAAAAAAARHLEDP///wgAAAAAAAAAAAAAAAAAAAAAAAAAAAAAAAAAAAAAZAAAAAEAAABAAAAAAAAAAAAAAAAAAAAAAAAAAAAAAAAAAAAAAAAAAAAAAAAAAAAAAAAAAAAAAAAAAAAAAAAAAAAAAAAAAAAAAAAAAAAAAAAAAAAAAAAAAAAAAAAAAAAAFAAAADwAAAAAAAAAAAAAAAAAAAAPAAAAAQAAACMAAAAjAAAAIwAAAB4AAAAAAAAAZAAAAGQAAAAAAAAAZAAAAGQAAAAVAAAAYAAAAAAAAAAAAAAADwAAACADAAAAAAAAAAAAAAEAAACgMgAAVgcAAKr4//8BAAAAf39/AAEAAABkAAAAAAAAABQAAABAHwAAAAAAACYAAAAAAAAAwOD//wAAAAAmAAAAZAAAABYAAABMAAAAAAAAAAAAAAAEAAAAAAAAAAEAAADn5uYKAAAAACgAAAAoAAAAZAAAAGQAAAAAAAAAzMzMAAAAAABQAAAAUAAAAGQAAABkAAAAAAAAABcAAAAUAAAAAAAAAAAAAAD/fwAA/38AAAAAAAAJAAAABAAAAAAAAAAeAAAAaAAAAAAAAAAAAAAAAAAAAAAAAAAAAAAAECcAABAnAAAAAAAAAAAAAAAAAAAAAAAAAAAAAAAAAAAAAAAAAAAAABQAAAAAAAAAwMD/AAAAAABkAAAAMgAAAAAAAABkAAAAAAAAAH9/fwAKAAAAIgAAABgAAAAAAAAAAAAAAAAAAAAAAAAAAAAAAAAAAAAkAAAAJAAAAAAAAAAHAAAAAAAAAAAAAAAAAAAAAAAAAAAAAAAAAAAAf39/ACUAAABYAAAAAAAAAAAAAAAAAAAAAAAAAAAAAAAAAAAAAAAAAAAAAAAAAAAAAAAAAAAAAAA/AAAAAAAAAKCGAQAAAAAAAAAAAAAAAAAMAAAAAQAAAAAAAAAAAAAAAAAAAB8AAABUAAAARHLEBf///wEAAAAAAAAAAAAAAAAAAAAAAAAAAAAAAAAAAAAAAAAAAAAAAAB/f38A5+bmA8zMzADAwP8Af39/AAAAAAAAAAAAAAAAAAAAAAAAAAAAIQAAABgAAAAUAAAAgAQAAGoYAAD6BgAA4xoAABAAAAAmAAAACAAAAP//////////MAAAABQAAAAAAAAAAAD//wAAAQAAAP//AAABAA=="/>
+                <pr:smNativeData xmlns:pr="smNativeData" xmlns="smNativeData" val="SMDATA_16_V2g2ahMAAAAlAAAAZAAAAA0AAAAAAAAAAAAAAAAAAAAAAAAAAAAAAAABAAAAAAAAAAEAAABQAAAAAAAAAAAA4D8AAAAAAADgPwAAAAAAAOA/AAAAAAAA4D8AAAAAAADgPwAAAAAAAOA/AAAAAAAA4D8AAAAAAADgPwAAAAAAAOA/AAAAAAAA4D8CAAAAjAAAAAAAAAAAAAAARHLEDP///wgAAAAAAAAAAAAAAAAAAAAAAAAAAAAAAAAAAAAAZAAAAAEAAABAAAAAAAAAAAAAAAAAAAAAAAAAAAAAAAAAAAAAAAAAAAAAAAAAAAAAAAAAAAAAAAAAAAAAAAAAAAAAAAAAAAAAAAAAAAAAAAAAAAAAAAAAAAAAAAAAAAAAFAAAADwAAAAAAAAAAAAAAAAAAAAPAAAAAQAAACMAAAAjAAAAIwAAAB4AAAAAAAAAZAAAAGQAAAAAAAAAZAAAAGQAAAAVAAAAYAAAAAAAAAAAAAAADwAAACADAAAAAAAAAAAAAAEAAACgMgAAVgcAAKr4//8BAAAAf39/AAEAAABkAAAAAAAAABQAAABAHwAAAAAAACYAAAAAAAAAwOD//wAAAAAmAAAAZAAAABYAAABMAAAAAAAAAAAAAAAEAAAAAAAAAAEAAADn5uYKAAAAACgAAAAoAAAAZAAAAGQAAAAAAAAAzMzMAAAAAABQAAAAUAAAAGQAAABkAAAAAAAAABcAAAAUAAAAAAAAAAAAAAD/fwAA/38AAAAAAAAJAAAABAAAAAAAAAAeAAAAaAAAAAAAAAAAAAAAAAAAAAAAAAAAAAAAECcAABAnAAAAAAAAAAAAAAAAAAAAAAAAAAAAAAAAAAAAAAAAAAAAABQAAAAAAAAAwMD/AAAAAABkAAAAMgAAAAAAAABkAAAAAAAAAH9/fwAKAAAAIgAAABgAAAAAAAAAAAAAAAAAAAAAAAAAAAAAAAAAAAAkAAAAJAAAAAAAAAAHAAAAAAAAAAAAAAAAAAAAAAAAAAAAAAAAAAAAf39/ACUAAABYAAAAAAAAAAAAAAAAAAAAAAAAAAAAAAAAAAAAAAAAAAAAAAAAAAAAAAAAAAAAAAA/AAAAAAAAAKCGAQAAAAAAAAAAAAAAAAAMAAAAAQAAAAAAAAAAAAAAAAAAAB8AAABUAAAARHLEBf///wEAAAAAAAAAAAAAAAAAAAAAAAAAAAAAAAAAAAAAAAAAAAAAAAB/f38A5+bmA8zMzADAwP8Af39/AAAAAAAAAAAAAAAAAAAAAAAAAAAAIQAAABgAAAAUAAAAgAQAAGoYAAD6BgAA4xoAABAAAAAmAAAACAAAAP//////////MAAAABQAAAAAAAAAAAD//wAAAQAAAP//AAABAA=="/>
               </a:ext>
             </a:extLst>
           </p:cNvSpPr>
@@ -10320,7 +10653,7 @@
           <p:cNvSpPr>
             <a:extLst>
               <a:ext uri="smNativeData">
-                <pr:smNativeData xmlns:pr="smNativeData" xmlns="smNativeData" val="SMDATA_16_kRU2ahMAAAAlAAAAZAAAAA0AAAAAkAAAAEgAAACQAAAASAAAAAAAAAABAAAAAAAAAAEAAABQAAAAAAAAAAAA4D8AAAAAAADgPwAAAAAAAOA/AAAAAAAA4D8AAAAAAADgPwAAAAAAAOA/AAAAAAAA4D8AAAAAAADgPwAAAAAAAOA/AAAAAAAA4D8CAAAAjAAAAAAAAAAAAAAARHLEDP///wgAAAAAAAAAAAAAAAAAAAAAAAAAAAAAAAAAAAAAZAAAAAEAAABAAAAAAAAAAAAAAAAAAAAAAAAAAAAAAAAAAAAAAAAAAAAAAAAAAAAAAAAAAAAAAAAAAAAAAAAAAAAAAAAAAAAAAAAAAAAAAAAAAAAAAAAAAAAAAAAAAAAAFAAAADwAAAAAAAAAAAAAAAAAAAAPAAAAAQAAACMAAAAjAAAAIwAAAB4AAAAAAAAAZAAAAGQAAAAAAAAAZAAAAGQAAAAVAAAAYAAAAAAAAAAAAAAADwAAACADAAAAAAAAAAAAAAEAAACgMgAAVgcAAKr4//8BAAAAf39/AAEAAABkAAAAAAAAABQAAABAHwAAAAAAACYAAAAAAAAAwOD//wAAAAAmAAAAZAAAABYAAABMAAAAAAAAAAAAAAAEAAAAAAAAAAEAAADn5uYKAAAAACgAAAAoAAAAZAAAAGQAAAAAAAAAzMzMAAAAAABQAAAAUAAAAGQAAABkAAAAAAAAABcAAAAUAAAAAAAAAAAAAAD/fwAA/38AAAAAAAAJAAAABAAAAAAAAAAeAAAAaAAAAAAAAAAAAAAAAAAAAAAAAAAAAAAAECcAABAnAAAAAAAAAAAAAAAAAAAAAAAAAAAAAAAAAAAAAAAAAAAAABQAAAAAAAAAwMD/AAAAAABkAAAAMgAAAAAAAABkAAAAAAAAAH9/fwAKAAAAIgAAABgAAAAAAAAAAAAAAAAAAAAAAAAAAAAAAAAAAAAkAAAAJAAAAAAAAAAHAAAAAAAAAAAAAAAAAAAAAAAAAAAAAAAAAAAAf39/ACUAAABYAAAAAAAAAAAAAAAAAAAAAAAAAAAAAAAAAAAAAAAAAAAAAAAAAAAAAAAAAAAAAAA/AAAAAAAAAKCGAQAAAAAAAAAAAAAAAAAMAAAAAQAAAAAAAAAAAAAAAAAAAB8AAABUAAAARHLEBf///wEAAAAAAAAAAAAAAAAAAAAAAAAAAAAAAAAAAAAAAAAAAAAAAAB/f38A5+bmA8zMzADAwP8Af39/AAAAAAAAAAAAAAAAAAAAAAAAAAAAIQAAABgAAAAUAAAAKAgAANYWAADoKQAAdhwAABAAAAAmAAAACAAAAP//////////MAAAABQAAAAAAAAAAAD//wAAAQAAAP//AAABAA=="/>
+                <pr:smNativeData xmlns:pr="smNativeData" xmlns="smNativeData" val="SMDATA_16_V2g2ahMAAAAlAAAAZAAAAA0AAAAAkAAAAEgAAACQAAAASAAAAAAAAAABAAAAAAAAAAEAAABQAAAAAAAAAAAA4D8AAAAAAADgPwAAAAAAAOA/AAAAAAAA4D8AAAAAAADgPwAAAAAAAOA/AAAAAAAA4D8AAAAAAADgPwAAAAAAAOA/AAAAAAAA4D8CAAAAjAAAAAAAAAAAAAAARHLEDP///wgAAAAAAAAAAAAAAAAAAAAAAAAAAAAAAAAAAAAAZAAAAAEAAABAAAAAAAAAAAAAAAAAAAAAAAAAAAAAAAAAAAAAAAAAAAAAAAAAAAAAAAAAAAAAAAAAAAAAAAAAAAAAAAAAAAAAAAAAAAAAAAAAAAAAAAAAAAAAAAAAAAAAFAAAADwAAAAAAAAAAAAAAAAAAAAPAAAAAQAAACMAAAAjAAAAIwAAAB4AAAAAAAAAZAAAAGQAAAAAAAAAZAAAAGQAAAAVAAAAYAAAAAAAAAAAAAAADwAAACADAAAAAAAAAAAAAAEAAACgMgAAVgcAAKr4//8BAAAAf39/AAEAAABkAAAAAAAAABQAAABAHwAAAAAAACYAAAAAAAAAwOD//wAAAAAmAAAAZAAAABYAAABMAAAAAAAAAAAAAAAEAAAAAAAAAAEAAADn5uYKAAAAACgAAAAoAAAAZAAAAGQAAAAAAAAAzMzMAAAAAABQAAAAUAAAAGQAAABkAAAAAAAAABcAAAAUAAAAAAAAAAAAAAD/fwAA/38AAAAAAAAJAAAABAAAAAAAAAAeAAAAaAAAAAAAAAAAAAAAAAAAAAAAAAAAAAAAECcAABAnAAAAAAAAAAAAAAAAAAAAAAAAAAAAAAAAAAAAAAAAAAAAABQAAAAAAAAAwMD/AAAAAABkAAAAMgAAAAAAAABkAAAAAAAAAH9/fwAKAAAAIgAAABgAAAAAAAAAAAAAAAAAAAAAAAAAAAAAAAAAAAAkAAAAJAAAAAAAAAAHAAAAAAAAAAAAAAAAAAAAAAAAAAAAAAAAAAAAf39/ACUAAABYAAAAAAAAAAAAAAAAAAAAAAAAAAAAAAAAAAAAAAAAAAAAAAAAAAAAAAAAAAAAAAA/AAAAAAAAAKCGAQAAAAAAAAAAAAAAAAAMAAAAAQAAAAAAAAAAAAAAAAAAAB8AAABUAAAARHLEBf///wEAAAAAAAAAAAAAAAAAAAAAAAAAAAAAAAAAAAAAAAAAAAAAAAB/f38A5+bmA8zMzADAwP8Af39/AAAAAAAAAAAAAAAAAAAAAAAAAAAAIQAAABgAAAAUAAAAKAgAANYWAADoKQAAdhwAAAAAAAAmAAAACAAAAP//////////MAAAABQAAAAAAAAAAAD//wAAAQAAAP//AAABAA=="/>
               </a:ext>
             </a:extLst>
           </p:cNvSpPr>
@@ -10361,7 +10694,7 @@
                   <a:srgbClr val="13314F"/>
                 </a:solidFill>
               </a:rPr>
-              <a:t>ALVO.  </a:t>
+              <a:t>ALVO,  </a:t>
             </a:r>
             <a:r>
               <a:rPr lang="en-us" sz="1450" b="1" cap="none">
@@ -10421,7 +10754,7 @@
           <p:cNvSpPr>
             <a:extLst>
               <a:ext uri="smNativeData">
-                <pr:smNativeData xmlns:pr="smNativeData" xmlns="smNativeData" val="SMDATA_16_kRU2ahMAAAAlAAAAZQAAAA0AAAAAkAAAAEgAAACQAAAASAAAAAAAAAAAAAAAAAAAAAEAAABQAAAAexSuR+F6xD8AAAAAAADwvwAAAAAAAOA/AAAAAAAA4D8AAAAAAADgPwAAAAAAAOA/AAAAAAAA4D8AAAAAAADgPwAAAAAAAOA/AAAAAAAA4D8CAAAAjAAAAAEAAAAAAAAA7/P4AP///wgAAAAAAAAAAAAAAAAAAAAAAAAAAAAAAAAAAAAAeAAAAAEAAABAAAAAAAAAAAAAAABaAAAAAAAAAAAAAAAAAAAAAAAAAAAAAAAAAAAAAAAAAAAAAAAAAAAAAAAAAAAAAAAAAAAAAAAAAAAAAAAAAAAAAAAAAAAAAAAAAAAAFAAAADwAAAAAAAAAAAAAAAAAAAAPAAAAAQAAACMAAAAjAAAAIwAAAB4AAAAAAAAAZAAAAGQAAAAAAAAAZAAAAGQAAAAVAAAAYAAAAAAAAAAAAAAADwAAACADAAAAAAAAAAAAAAEAAACgMgAAVgcAAKr4//8BAAAAf39/AAEAAABkAAAAAAAAABQAAABAHwAAAAAAACYAAAAAAAAAwOD//wAAAAAmAAAAZAAAABYAAABMAAAAAQAAAAAAAAAGAAAAAAAAAAEAAAC5xNAAPAAAAAAAAAAoAAAAZAAAAGQAAAAAAAAAy8vLADwAAAAAAAAAKAAAAGQAAABkAAAAAAAAABcAAAAUAAAAAAAAAAAAAAD/fwAA/38AAAAAAAAJAAAABAAAADoJAAAeAAAAaAAAAAAAAAAAAAAAAAAAAAAAAAAAAAAAECcAABAnAAAAAAAAAAAAAAAAAAAAAAAAAAAAAAAAAAAAAAAAAAAAAHgAAAAAAAAAwMD/AAAAAAAAAAAAAAAAAAAAAABkAAAAAAAAAH9/fwAKAAAAIgAAABgAAAAAAAAAAAAAAAAAAAAAAAAAAAAAAAAAAAAkAAAAJAAAAAAAAAAHAAAAAAAAAAAAAAAAAAAAAAAAAAAAAAAAAAAAf39/ACUAAABYAAAAAAAAAAAAAAAAAAAAAAAAAAAAAAAAAAAAAAAAAAAAAAAAAAAAAAAAAAAAAAA/AAAAAAAAAKCGAQAAAAAAAAAAAAAAAAAMAAAAAQAAAAAAAAAAAAAAAAAAAB8AAABUAAAA7/P4AP///wEAAAAAAAAAAAAAAAAAAAAAAAAAAAAAAAAAAAAAAAAAAAAAAAB/f38AucTQAMvLywDAwP8Af39/AAAAAAAAAAAAAAAAAAAAAAAAAAAAIQAAABgAAAAUAAAAYAMAAHodAADAKgAAGiMAABAAAAAmAAAACAAAAP//////////MAAAABQAAAAAAAAAAAD//wAAAQAAAP//AAABAA=="/>
+                <pr:smNativeData xmlns:pr="smNativeData" xmlns="smNativeData" val="SMDATA_16_V2g2ahMAAAAlAAAAZQAAAA0AAAAAkAAAAEgAAACQAAAASAAAAAAAAAAAAAAAAAAAAAEAAABQAAAAexSuR+F6xD8AAAAAAAAAAAAAAAAAAOA/AAAAAAAA4D8AAAAAAADgPwAAAAAAAOA/AAAAAAAA4D8AAAAAAADgPwAAAAAAAOA/AAAAAAAA4D8CAAAAjAAAAAEAAAAAAAAA7/P4AP///wgAAAAAAAAAAAAAAAAAAAAAAAAAAAAAAAAAAAAAeAAAAAEAAABAAAAAAAAAAAAAAABaAAAAAAAAAAAAAAAAAAAAAAAAAAAAAAAAAAAAAAAAAAAAAAAAAAAAAAAAAAAAAAAAAAAAAAAAAAAAAAAAAAAAAAAAAAAAAAAAAAAAFAAAADwAAAAAAAAAAAAAAAAAAAAPAAAAAQAAACMAAAAjAAAAIwAAAB4AAAAAAAAAZAAAAGQAAAAAAAAAZAAAAGQAAAAVAAAAYAAAAAAAAAAAAAAADwAAACADAAAAAAAAAAAAAAEAAACgMgAAVgcAAKr4//8BAAAAf39/AAEAAABkAAAAAAAAABQAAABAHwAAAAAAACYAAAAAAAAAwOD//wAAAAAmAAAAZAAAABYAAABMAAAAAQAAAAAAAAAGAAAAAAAAAAEAAAC5xNAAPAAAAAAAAAAoAAAAZAAAAGQAAAAAAAAAy8vLADwAAAAAAAAAKAAAAGQAAABkAAAAAAAAABcAAAAUAAAAAAAAAAAAAAD/fwAA/38AAAAAAAAJAAAABAAAADoJAAAeAAAAaAAAAAAAAAAAAAAAAAAAAAAAAAAAAAAAECcAABAnAAAAAAAAAAAAAAAAAAAAAAAAAAAAAAAAAAAAAAAAAAAAAHgAAAAAAAAAwMD/AAAAAAAAAAAAAAAAAAAAAABkAAAAAAAAAH9/fwAKAAAAIgAAABgAAAAAAAAAAAAAAAAAAAAAAAAAAAAAAAAAAAAkAAAAJAAAAAAAAAAHAAAAAAAAAAAAAAAAAAAAAAAAAAAAAAAAAAAAf39/ACUAAABYAAAAAAAAAAAAAAAAAAAAAAAAAAAAAAAAAAAAAAAAAAAAAAAAAAAAAAAAAAAAAAA/AAAAAAAAAKCGAQAAAAAAAAAAAAAAAAAMAAAAAQAAAAAAAAAAAAAAAAAAAB8AAABUAAAA7/P4AP///wEAAAAAAAAAAAAAAAAAAAAAAAAAAAAAAAAAAAAAAAAAAAAAAAB/f38AucTQAMvLywDAwP8Af39/AAAAAAAAAAAAAAAAAAAAAAAAAAAAIQAAABgAAAAUAAAAYAMAAHodAADAKgAAGiMAABAAAAAmAAAACAAAAP//////////MAAAABQAAAAAAAAAAAD//wAAAQAAAP//AAABAA=="/>
               </a:ext>
             </a:extLst>
           </p:cNvSpPr>
@@ -10458,7 +10791,7 @@
           <p:cNvSpPr>
             <a:extLst>
               <a:ext uri="smNativeData">
-                <pr:smNativeData xmlns:pr="smNativeData" xmlns="smNativeData" val="SMDATA_16_kRU2ahMAAAAlAAAAZgAAAA0AAAAAkAAAAEgAAACQAAAASAAAAAAAAAAAAAAAAAAAAAEAAABQAAAAAAAAAAAA8D8AAAAAAADwPwAAAAAAAOA/AAAAAAAA4D8AAAAAAADgPwAAAAAAAOA/AAAAAAAA4D8AAAAAAADgPwAAAAAAAOA/AAAAAAAA4D8CAAAAjAAAAAEAAAAAAAAA4KA4AP///wgAAAAAAAAAAAAAAAAAAAAAAAAAAAAAAAAAAAAAeAAAAAEAAABAAAAAAAAAAAAAAABaAAAAAAAAAAAAAAAAAAAAAAAAAAAAAAAAAAAAAAAAAAAAAAAAAAAAAAAAAAAAAAAAAAAAAAAAAAAAAAAAAAAAAAAAAAAAAAAAAAAAFAAAADwAAAAAAAAAAAAAAAAAAAAPAAAAAQAAACMAAAAjAAAAIwAAAB4AAAAAAAAAZAAAAGQAAAAAAAAAZAAAAGQAAAAVAAAAYAAAAAAAAAAAAAAADwAAACADAAAAAAAAAAAAAAEAAACgMgAAVgcAAKr4//8BAAAAf39/AAEAAABkAAAAAAAAABQAAABAHwAAAAAAACYAAAAAAAAAwOD//wAAAAAmAAAAZAAAABYAAABMAAAAAAAAAAAAAAAEAAAAAAAAAAEAAADn5uYKAAAAACgAAAAoAAAAZAAAAGQAAAAAAAAAzMzMAAAAAABQAAAAUAAAAGQAAABkAAAAAAAAABcAAAAUAAAAAAAAAAAAAAD/fwAA/38AAAAAAAAJAAAABAAAAAAAAAAeAAAAaAAAAAAAAAAAAAAAAAAAAAAAAAAAAAAAECcAABAnAAAAAAAAAAAAAAAAAAAAAAAAAAAAAAAAAAAAAAAAAAAAABQAAAAAAAAAwMD/AAAAAABkAAAAMgAAAAAAAABkAAAAAAAAAH9/fwAKAAAAIgAAABgAAAAAAAAAAAAAAAAAAAAAAAAAAAAAAAAAAAAkAAAAJAAAAAAAAAAHAAAAAAAAAAAAAAAAAAAAAAAAAAAAAAAAAAAAf39/ACUAAABYAAAAAAAAAAAAAAAAAAAAAAAAAAAAAAAAAAAAAAAAAAAAAAAAAAAAAAAAAAAAAAA/AAAAAAAAAKCGAQAAAAAAAAAAAAAAAAAMAAAAAQAAAAAAAAAAAAAAAAAAAB8AAABUAAAA4KA4AP///wEAAAAAAAAAAAAAAAAAAAAAAAAAAAAAAAAAAAAAAAAAAAAAAAB/f38A5+bmA8zMzADAwP8Af39/AAAAAAAAAAAAAAAAAAAAAAAAAAAAIQAAABgAAAAUAAAAgAQAAA0fAAD6BgAAhiEAABAAAAAmAAAACAAAAP//////////MAAAABQAAAAAAAAAAAD//wAAAQAAAP//AAABAA=="/>
+                <pr:smNativeData xmlns:pr="smNativeData" xmlns="smNativeData" val="SMDATA_16_V2g2ahMAAAAlAAAAZgAAAA0AAAAAkAAAAEgAAACQAAAASAAAAAAAAAAAAAAAAAAAAAEAAABQAAAAAAAAAAAA8D8AAAAAAADwPwAAAAAAAOA/AAAAAAAA4D8AAAAAAADgPwAAAAAAAOA/AAAAAAAA4D8AAAAAAADgPwAAAAAAAOA/AAAAAAAA4D8CAAAAjAAAAAEAAAAAAAAA4KA4AP///wgAAAAAAAAAAAAAAAAAAAAAAAAAAAAAAAAAAAAAeAAAAAEAAABAAAAAAAAAAAAAAABaAAAAAAAAAAAAAAAAAAAAAAAAAAAAAAAAAAAAAAAAAAAAAAAAAAAAAAAAAAAAAAAAAAAAAAAAAAAAAAAAAAAAAAAAAAAAAAAAAAAAFAAAADwAAAAAAAAAAAAAAAAAAAAPAAAAAQAAACMAAAAjAAAAIwAAAB4AAAAAAAAAZAAAAGQAAAAAAAAAZAAAAGQAAAAVAAAAYAAAAAAAAAAAAAAADwAAACADAAAAAAAAAAAAAAEAAACgMgAAVgcAAKr4//8BAAAAf39/AAEAAABkAAAAAAAAABQAAABAHwAAAAAAACYAAAAAAAAAwOD//wAAAAAmAAAAZAAAABYAAABMAAAAAAAAAAAAAAAEAAAAAAAAAAEAAADn5uYKAAAAACgAAAAoAAAAZAAAAGQAAAAAAAAAzMzMAAAAAABQAAAAUAAAAGQAAABkAAAAAAAAABcAAAAUAAAAAAAAAAAAAAD/fwAA/38AAAAAAAAJAAAABAAAAAAAAAAeAAAAaAAAAAAAAAAAAAAAAAAAAAAAAAAAAAAAECcAABAnAAAAAAAAAAAAAAAAAAAAAAAAAAAAAAAAAAAAAAAAAAAAABQAAAAAAAAAwMD/AAAAAABkAAAAMgAAAAAAAABkAAAAAAAAAH9/fwAKAAAAIgAAABgAAAAAAAAAAAAAAAAAAAAAAAAAAAAAAAAAAAAkAAAAJAAAAAAAAAAHAAAAAAAAAAAAAAAAAAAAAAAAAAAAAAAAAAAAf39/ACUAAABYAAAAAAAAAAAAAAAAAAAAAAAAAAAAAAAAAAAAAAAAAAAAAAAAAAAAAAAAAAAAAAA/AAAAAAAAAKCGAQAAAAAAAAAAAAAAAAAMAAAAAQAAAAAAAAAAAAAAAAAAAB8AAABUAAAA4KA4AP///wEAAAAAAAAAAAAAAAAAAAAAAAAAAAAAAAAAAAAAAAAAAAAAAAB/f38A5+bmA8zMzADAwP8Af39/AAAAAAAAAAAAAAAAAAAAAAAAAAAAIQAAABgAAAAUAAAAgAQAAA0fAAD6BgAAhiEAABAAAAAmAAAACAAAAP//////////MAAAABQAAAAAAAAAAAD//wAAAQAAAP//AAABAA=="/>
               </a:ext>
             </a:extLst>
           </p:cNvSpPr>
@@ -10487,7 +10820,7 @@
           <p:cNvSpPr>
             <a:extLst>
               <a:ext uri="smNativeData">
-                <pr:smNativeData xmlns:pr="smNativeData" xmlns="smNativeData" val="SMDATA_16_kRU2ahMAAAAlAAAAZAAAAA0AAAAAAAAAAAAAAAAAAAAAAAAAAAAAAAABAAAAAAAAAAEAAABQAAAAAAAAAAAA4D8AAAAAAADgPwAAAAAAAOA/AAAAAAAA4D8AAAAAAADgPwAAAAAAAOA/AAAAAAAA4D8AAAAAAADgPwAAAAAAAOA/AAAAAAAA4D8CAAAAjAAAAAAAAAAAAAAARHLEDP///wgAAAAAAAAAAAAAAAAAAAAAAAAAAAAAAAAAAAAAZAAAAAEAAABAAAAAAAAAAAAAAAAAAAAAAAAAAAAAAAAAAAAAAAAAAAAAAAAAAAAAAAAAAAAAAAAAAAAAAAAAAAAAAAAAAAAAAAAAAAAAAAAAAAAAAAAAAAAAAAAAAAAAFAAAADwAAAAAAAAAAAAAAAAAAAAPAAAAAQAAACMAAAAjAAAAIwAAAB4AAAAAAAAAZAAAAGQAAAAAAAAAZAAAAGQAAAAVAAAAYAAAAAAAAAAAAAAADwAAACADAAAAAAAAAAAAAAEAAACgMgAAVgcAAKr4//8BAAAAf39/AAEAAABkAAAAAAAAABQAAABAHwAAAAAAACYAAAAAAAAAwOD//wAAAAAmAAAAZAAAABYAAABMAAAAAAAAAAAAAAAEAAAAAAAAAAEAAADn5uYKAAAAACgAAAAoAAAAZAAAAGQAAAAAAAAAzMzMAAAAAABQAAAAUAAAAGQAAABkAAAAAAAAABcAAAAUAAAAAAAAAAAAAAD/fwAA/38AAAAAAAAJAAAABAAAAAAjQmEeAAAAaAAAAAAAAAAAAAAAAAAAAAAAAAAAAAAAECcAABAnAAAAAAAAAAAAAAAAAAAAAAAAAAAAAAAAAAAAAAAAAAAAABQAAAAAAAAAwMD/AAAAAABkAAAAMgAAAAAAAABkAAAAAAAAAH9/fwAKAAAAIgAAABgAAAAAAAAAAAAAAAAAAAAAAAAAAAAAAAAAAAAkAAAAJAAAAAAAAAAHAAAAAAAAAAAAAAAAAAAAAAAAAAAAAAAAAAAAf39/ACUAAABYAAAAAAAAAAAAAAAAAAAAAAAAAAAAAAAAAAAAAAAAAAAAAAAAAAAAAAAAAAAAAAA/AAAAAAAAAKCGAQAAAAAAAAAAAAAAAAAMAAAAAQAAAAAAAAAAAAAAAAAAAB8AAABUAAAARHLEBf///wEAAAAAAAAAAAAAAAAAAAAAAAAAAAAAAAAAAAAAAAAAAAAAAAB/f38A5+bmA8zMzADAwP8Af39/AAAAAAAAAAAAAAAAAAAAAAAAAAAAIQAAABgAAAAUAAAAgAQAAA0fAAD6BgAAhiEAABAAAAAmAAAACAAAAP//////////MAAAABQAAAAAAAAAAAD//wAAAQAAAP//AAABAA=="/>
+                <pr:smNativeData xmlns:pr="smNativeData" xmlns="smNativeData" val="SMDATA_16_V2g2ahMAAAAlAAAAZAAAAA0AAAAAAAAAAAAAAAAAAAAAAAAAAAAAAAABAAAAAAAAAAEAAABQAAAAAAAAAAAA4D8AAAAAAADgPwAAAAAAAOA/AAAAAAAA4D8AAAAAAADgPwAAAAAAAOA/AAAAAAAA4D8AAAAAAADgPwAAAAAAAOA/AAAAAAAA4D8CAAAAjAAAAAAAAAAAAAAARHLEDP///wgAAAAAAAAAAAAAAAAAAAAAAAAAAAAAAAAAAAAAZAAAAAEAAABAAAAAAAAAAAAAAAAAAAAAAAAAAAAAAAAAAAAAAAAAAAAAAAAAAAAAAAAAAAAAAAAAAAAAAAAAAAAAAAAAAAAAAAAAAAAAAAAAAAAAAAAAAAAAAAAAAAAAFAAAADwAAAAAAAAAAAAAAAAAAAAPAAAAAQAAACMAAAAjAAAAIwAAAB4AAAAAAAAAZAAAAGQAAAAAAAAAZAAAAGQAAAAVAAAAYAAAAAAAAAAAAAAADwAAACADAAAAAAAAAAAAAAEAAACgMgAAVgcAAKr4//8BAAAAf39/AAEAAABkAAAAAAAAABQAAABAHwAAAAAAACYAAAAAAAAAwOD//wAAAAAmAAAAZAAAABYAAABMAAAAAAAAAAAAAAAEAAAAAAAAAAEAAADn5uYKAAAAACgAAAAoAAAAZAAAAGQAAAAAAAAAzMzMAAAAAABQAAAAUAAAAGQAAABkAAAAAAAAABcAAAAUAAAAAAAAAAAAAAD/fwAA/38AAAAAAAAJAAAABAAAAAAjQmEeAAAAaAAAAAAAAAAAAAAAAAAAAAAAAAAAAAAAECcAABAnAAAAAAAAAAAAAAAAAAAAAAAAAAAAAAAAAAAAAAAAAAAAABQAAAAAAAAAwMD/AAAAAABkAAAAMgAAAAAAAABkAAAAAAAAAH9/fwAKAAAAIgAAABgAAAAAAAAAAAAAAAAAAAAAAAAAAAAAAAAAAAAkAAAAJAAAAAAAAAAHAAAAAAAAAAAAAAAAAAAAAAAAAAAAAAAAAAAAf39/ACUAAABYAAAAAAAAAAAAAAAAAAAAAAAAAAAAAAAAAAAAAAAAAAAAAAAAAAAAAAAAAAAAAAA/AAAAAAAAAKCGAQAAAAAAAAAAAAAAAAAMAAAAAQAAAAAAAAAAAAAAAAAAAB8AAABUAAAARHLEBf///wEAAAAAAAAAAAAAAAAAAAAAAAAAAAAAAAAAAAAAAAAAAAAAAAB/f38A5+bmA8zMzADAwP8Af39/AAAAAAAAAAAAAAAAAAAAAAAAAAAAIQAAABgAAAAUAAAAgAQAAA0fAAD6BgAAhiEAABAAAAAmAAAACAAAAP//////////MAAAABQAAAAAAAAAAAD//wAAAQAAAP//AAABAA=="/>
               </a:ext>
             </a:extLst>
           </p:cNvSpPr>
@@ -10532,7 +10865,7 @@
           <p:cNvSpPr>
             <a:extLst>
               <a:ext uri="smNativeData">
-                <pr:smNativeData xmlns:pr="smNativeData" xmlns="smNativeData" val="SMDATA_16_kRU2ahMAAAAlAAAAZAAAAA0AAAAAkAAAAEgAAACQAAAASAAAAAAAAAABAAAAAAAAAAEAAABQAAAAAAAAAAAA4D8AAAAAAADgPwAAAAAAAOA/AAAAAAAA4D8AAAAAAADgPwAAAAAAAOA/AAAAAAAA4D8AAAAAAADgPwAAAAAAAOA/AAAAAAAA4D8CAAAAjAAAAAAAAAAAAAAARHLEDP///wgAAAAAAAAAAAAAAAAAAAAAAAAAAAAAAAAAAAAAZAAAAAEAAABAAAAAAAAAAAAAAAAAAAAAAAAAAAAAAAAAAAAAAAAAAAAAAAAAAAAAAAAAAAAAAAAAAAAAAAAAAAAAAAAAAAAAAAAAAAAAAAAAAAAAAAAAAAAAAAAAAAAAFAAAADwAAAAAAAAAAAAAAAAAAAAPAAAAAQAAACMAAAAjAAAAIwAAAB4AAAAAAAAAZAAAAGQAAAAAAAAAZAAAAGQAAAAVAAAAYAAAAAAAAAAAAAAADwAAACADAAAAAAAAAAAAAAEAAACgMgAAVgcAAKr4//8BAAAAf39/AAEAAABkAAAAAAAAABQAAABAHwAAAAAAACYAAAAAAAAAwOD//wAAAAAmAAAAZAAAABYAAABMAAAAAAAAAAAAAAAEAAAAAAAAAAEAAADn5uYKAAAAACgAAAAoAAAAZAAAAGQAAAAAAAAAzMzMAAAAAABQAAAAUAAAAGQAAABkAAAAAAAAABcAAAAUAAAAAAAAAAAAAAD/fwAA/38AAAAAAAAJAAAABAAAAGBZZrAeAAAAaAAAAAAAAAAAAAAAAAAAAAAAAAAAAAAAECcAABAnAAAAAAAAAAAAAAAAAAAAAAAAAAAAAAAAAAAAAAAAAAAAABQAAAAAAAAAwMD/AAAAAABkAAAAMgAAAAAAAABkAAAAAAAAAH9/fwAKAAAAIgAAABgAAAAAAAAAAAAAAAAAAAAAAAAAAAAAAAAAAAAkAAAAJAAAAAAAAAAHAAAAAAAAAAAAAAAAAAAAAAAAAAAAAAAAAAAAf39/ACUAAABYAAAAAAAAAAAAAAAAAAAAAAAAAAAAAAAAAAAAAAAAAAAAAAAAAAAAAAAAAAAAAAA/AAAAAAAAAKCGAQAAAAAAAAAAAAAAAAAMAAAAAQAAAAAAAAAAAAAAAAAAAB8AAABUAAAARHLEBf///wEAAAAAAAAAAAAAAAAAAAAAAAAAAAAAAAAAAAAAAAAAAAAAAAB/f38A5+bmA8zMzADAwP8Af39/AAAAAAAAAAAAAAAAAAAAAAAAAAAAIQAAABgAAAAUAAAAKAgAAHodAADoKQAAGiMAABAAAAAmAAAACAAAAP//////////MAAAABQAAAAAAAAAAAD//wAAAQAAAP//AAABAA=="/>
+                <pr:smNativeData xmlns:pr="smNativeData" xmlns="smNativeData" val="SMDATA_16_V2g2ahMAAAAlAAAAZAAAAA0AAAAAkAAAAEgAAACQAAAASAAAAAAAAAABAAAAAAAAAAEAAABQAAAAAAAAAAAA4D8AAAAAAADgPwAAAAAAAOA/AAAAAAAA4D8AAAAAAADgPwAAAAAAAOA/AAAAAAAA4D8AAAAAAADgPwAAAAAAAOA/AAAAAAAA4D8CAAAAjAAAAAAAAAAAAAAARHLEDP///wgAAAAAAAAAAAAAAAAAAAAAAAAAAAAAAAAAAAAAZAAAAAEAAABAAAAAAAAAAAAAAAAAAAAAAAAAAAAAAAAAAAAAAAAAAAAAAAAAAAAAAAAAAAAAAAAAAAAAAAAAAAAAAAAAAAAAAAAAAAAAAAAAAAAAAAAAAAAAAAAAAAAAFAAAADwAAAAAAAAAAAAAAAAAAAAPAAAAAQAAACMAAAAjAAAAIwAAAB4AAAAAAAAAZAAAAGQAAAAAAAAAZAAAAGQAAAAVAAAAYAAAAAAAAAAAAAAADwAAACADAAAAAAAAAAAAAAEAAACgMgAAVgcAAKr4//8BAAAAf39/AAEAAABkAAAAAAAAABQAAABAHwAAAAAAACYAAAAAAAAAwOD//wAAAAAmAAAAZAAAABYAAABMAAAAAAAAAAAAAAAEAAAAAAAAAAEAAADn5uYKAAAAACgAAAAoAAAAZAAAAGQAAAAAAAAAzMzMAAAAAABQAAAAUAAAAGQAAABkAAAAAAAAABcAAAAUAAAAAAAAAAAAAAD/fwAA/38AAAAAAAAJAAAABAAAAGBZZrAeAAAAaAAAAAAAAAAAAAAAAAAAAAAAAAAAAAAAECcAABAnAAAAAAAAAAAAAAAAAAAAAAAAAAAAAAAAAAAAAAAAAAAAABQAAAAAAAAAwMD/AAAAAABkAAAAMgAAAAAAAABkAAAAAAAAAH9/fwAKAAAAIgAAABgAAAAAAAAAAAAAAAAAAAAAAAAAAAAAAAAAAAAkAAAAJAAAAAAAAAAHAAAAAAAAAAAAAAAAAAAAAAAAAAAAAAAAAAAAf39/ACUAAABYAAAAAAAAAAAAAAAAAAAAAAAAAAAAAAAAAAAAAAAAAAAAAAAAAAAAAAAAAAAAAAA/AAAAAAAAAKCGAQAAAAAAAAAAAAAAAAAMAAAAAQAAAAAAAAAAAAAAAAAAAB8AAABUAAAARHLEBf///wEAAAAAAAAAAAAAAAAAAAAAAAAAAAAAAAAAAAAAAAAAAAAAAAB/f38A5+bmA8zMzADAwP8Af39/AAAAAAAAAAAAAAAAAAAAAAAAAAAAIQAAABgAAAAUAAAAKAgAAHodAADoKQAAGiMAAAAAAAAmAAAACAAAAP//////////MAAAABQAAAAAAAAAAAD//wAAAQAAAP//AAABAA=="/>
               </a:ext>
             </a:extLst>
           </p:cNvSpPr>
@@ -10573,7 +10906,7 @@
                   <a:srgbClr val="13314F"/>
                 </a:solidFill>
               </a:rPr>
-              <a:t>texto.  </a:t>
+              <a:t>texto </a:t>
             </a:r>
             <a:r>
               <a:rPr lang="en-us" sz="1450" b="1" cap="none">
@@ -10633,7 +10966,7 @@
           <p:cNvSpPr>
             <a:extLst>
               <a:ext uri="smNativeData">
-                <pr:smNativeData xmlns:pr="smNativeData" xmlns="smNativeData" val="SMDATA_16_kRU2ahMAAAAlAAAAZQAAAA0AAAAAkAAAAEgAAACQAAAASAAAAAAAAAAAAAAAAAAAAAEAAABQAAAAexSuR+F6pD8AAAAAAADwvwAAAAAAAOA/AAAAAAAA4D8AAAAAAADgPwAAAAAAAOA/AAAAAAAA4D8AAAAAAADgPwAAAAAAAOA/AAAAAAAA4D8CAAAAjAAAAAEAAAAAAAAADyRAAP///wgAAAAAAAAAAAAAAAAAAAAAAAAAAAAAAAAAAAAAeAAAAAEAAABAAAAAAAAAAAAAAABaAAAAAAAAAAAAAAAAAAAAAAAAAAAAAAAAAAAAAAAAAAAAAAAAAAAAAAAAAAAAAAAAAAAAAAAAAAAAAAAAAAAAAAAAAAAAAAAAAAAAFAAAADwAAAAAAAAAAAAAAAAAAAAPAAAAAQAAACMAAAAjAAAAIwAAAB4AAAAAAAAAZAAAAGQAAAAAAAAAZAAAAGQAAAAVAAAAYAAAAAAAAAAAAAAADwAAACADAAAAAAAAAAAAAAEAAACgMgAAVgcAAKr4//8BAAAAf39/AAEAAABkAAAAAAAAABQAAABAHwAAAAAAACYAAAAAAAAAwOD//wAAAAAmAAAAZAAAABYAAABMAAAAAQAAAAAAAAAGAAAAAAAAAAEAAAC5xNAAPAAAAAAAAAAoAAAAZAAAAGQAAAAAAAAAy8vLADwAAAAAAAAAKAAAAGQAAABkAAAAAAAAABcAAAAUAAAAAAAAAAAAAAD/fwAA/38AAAAAAAAJAAAABAAAAAAAAAAeAAAAaAAAAAAAAAAAAAAAAAAAAAAAAAAAAAAAECcAABAnAAAAAAAAAAAAAAAAAAAAAAAAAAAAAAAAAAAAAAAAAAAAAHgAAAAAAAAAwMD/AAAAAAAAAAAAAAAAAAAAAABkAAAAAAAAAH9/fwAKAAAAIgAAABgAAAAAAAAAAAAAAAAAAAAAAAAAAAAAAAAAAAAkAAAAJAAAAAAAAAAHAAAAAAAAAAAAAAAAAAAAAAAAAAAAAAAAAAAAf39/ACUAAABYAAAAAAAAAAAAAAAAAAAAAAAAAAAAAAAAAAAAAAAAAAAAAAAAAAAAAAAAAAAAAAA/AAAAAAAAAKCGAQAAAAAAAAAAAAAAAAAMAAAAAQAAAAAAAAAAAAAAAAAAAB8AAABUAAAADyRAAP///wEAAAAAAAAAAAAAAAAAAAAAAAAAAAAAAAAAAAAAAAAAAAAAAAB/f38AucTQAMvLywDAwP8Af39/AAAAAAAAAAAAAAAAAAAAAAAAAAAAIQAAABgAAAAUAAAAkC0AALAKAABwRwAAMCEAABAAAAAmAAAACAAAAP//////////MAAAABQAAAAAAAAAAAD//wAAAQAAAP//AAABAA=="/>
+                <pr:smNativeData xmlns:pr="smNativeData" xmlns="smNativeData" val="SMDATA_16_V2g2ahMAAAAlAAAAZQAAAA0AAAAAkAAAAEgAAACQAAAASAAAAAAAAAAAAAAAAAAAAAEAAABQAAAAexSuR+F6pD8AAAAAAAAAAAAAAAAAAOA/AAAAAAAA4D8AAAAAAADgPwAAAAAAAOA/AAAAAAAA4D8AAAAAAADgPwAAAAAAAOA/AAAAAAAA4D8CAAAAjAAAAAEAAAAAAAAADyRAAP///wgAAAAAAAAAAAAAAAAAAAAAAAAAAAAAAAAAAAAAeAAAAAEAAABAAAAAAAAAAAAAAABaAAAAAAAAAAAAAAAAAAAAAAAAAAAAAAAAAAAAAAAAAAAAAAAAAAAAAAAAAAAAAAAAAAAAAAAAAAAAAAAAAAAAAAAAAAAAAAAAAAAAFAAAADwAAAAAAAAAAAAAAAAAAAAPAAAAAQAAACMAAAAjAAAAIwAAAB4AAAAAAAAAZAAAAGQAAAAAAAAAZAAAAGQAAAAVAAAAYAAAAAAAAAAAAAAADwAAACADAAAAAAAAAAAAAAEAAACgMgAAVgcAAKr4//8BAAAAf39/AAEAAABkAAAAAAAAABQAAABAHwAAAAAAACYAAAAAAAAAwOD//wAAAAAmAAAAZAAAABYAAABMAAAAAQAAAAAAAAAGAAAAAAAAAAEAAAC5xNAAPAAAAAAAAAAoAAAAZAAAAGQAAAAAAAAAy8vLADwAAAAAAAAAKAAAAGQAAABkAAAAAAAAABcAAAAUAAAAAAAAAAAAAAD/fwAA/38AAAAAAAAJAAAABAAAAAAAAAAeAAAAaAAAAAAAAAAAAAAAAAAAAAAAAAAAAAAAECcAABAnAAAAAAAAAAAAAAAAAAAAAAAAAAAAAAAAAAAAAAAAAAAAAHgAAAAAAAAAwMD/AAAAAAAAAAAAAAAAAAAAAABkAAAAAAAAAH9/fwAKAAAAIgAAABgAAAAAAAAAAAAAAAAAAAAAAAAAAAAAAAAAAAAkAAAAJAAAAAAAAAAHAAAAAAAAAAAAAAAAAAAAAAAAAAAAAAAAAAAAf39/ACUAAABYAAAAAAAAAAAAAAAAAAAAAAAAAAAAAAAAAAAAAAAAAAAAAAAAAAAAAAAAAAAAAAA/AAAAAAAAAKCGAQAAAAAAAAAAAAAAAAAMAAAAAQAAAAAAAAAAAAAAAAAAAB8AAABUAAAADyRAAP///wEAAAAAAAAAAAAAAAAAAAAAAAAAAAAAAAAAAAAAAAAAAAAAAAB/f38AucTQAMvLywDAwP8Af39/AAAAAAAAAAAAAAAAAAAAAAAAAAAAIQAAABgAAAAUAAAAkC0AALAKAABwRwAAMCEAABAAAAAmAAAACAAAAP//////////MAAAABQAAAAAAAAAAAD//wAAAQAAAP//AAABAA=="/>
               </a:ext>
             </a:extLst>
           </p:cNvSpPr>
@@ -10670,7 +11003,7 @@
           <p:cNvSpPr>
             <a:extLst>
               <a:ext uri="smNativeData">
-                <pr:smNativeData xmlns:pr="smNativeData" xmlns="smNativeData" val="SMDATA_16_kRU2ahMAAAAlAAAAZAAAAA0AAAAAkAAAAEgAAACQAAAASAAAAAAAAAABAAAAAAAAAAEAAABQAAAAAAAAAAAA4D8AAAAAAADgPwAAAAAAAOA/AAAAAAAA4D8AAAAAAADgPwAAAAAAAOA/AAAAAAAA4D8AAAAAAADgPwAAAAAAAOA/AAAAAAAA4D8CAAAAjAAAAAAAAAAAAAAARHLEDP///wgAAAAAAAAAAAAAAAAAAAAAAAAAAAAAAAAAAAAAZAAAAAEAAABAAAAAAAAAAAAAAAAAAAAAAAAAAAAAAAAAAAAAAAAAAAAAAAAAAAAAAAAAAAAAAAAAAAAAAAAAAAAAAAAAAAAAAAAAAAAAAAAAAAAAAAAAAAAAAAAAAAAAFAAAADwAAAAAAAAAAAAAAAAAAAAPAAAAAQAAACMAAAAjAAAAIwAAAB4AAAAAAAAAZAAAAGQAAAAAAAAAZAAAAGQAAAAVAAAAYAAAAAAAAAAAAAAADwAAACADAAAAAAAAAAAAAAEAAACgMgAAVgcAAKr4//8BAAAAf39/AAEAAABkAAAAAAAAABQAAABAHwAAAAAAACYAAAAAAAAAwOD//wAAAAAmAAAAZAAAABYAAABMAAAAAAAAAAAAAAAEAAAAAAAAAAEAAADn5uYKAAAAACgAAAAoAAAAZAAAAGQAAAAAAAAAzMzMAAAAAABQAAAAUAAAAGQAAABkAAAAAAAAABcAAAAUAAAAAAAAAAAAAAD/fwAA/38AAAAAAAAJAAAABAAAACABAAAeAAAAaAAAAAAAAAAAAAAAAAAAAAAAAAAAAAAAECcAABAnAAAAAAAAAAAAAAAAAAAAAAAAAAAAAAAAAAAAAAAAAAAAABQAAAAAAAAAwMD/AAAAAABkAAAAMgAAAAAAAABkAAAAAAAAAH9/fwAKAAAAIgAAABgAAAAAAAAAAAAAAAAAAAAAAAAAAAAAAAAAAAAkAAAAJAAAAAAAAAAHAAAAAAAAAAAAAAAAAAAAAAAAAAAAAAAAAAAAf39/ACUAAABYAAAAAAAAAAAAAAAAAAAAAAAAAAAAAAAAAAAAAAAAAAAAAAAAAAAAAAAAAAAAAAA/AAAAAAAAAKCGAQAAAAAAAAAAAAAAAAAMAAAAAQAAAAAAAAAAAAAAAAAAAB8AAABUAAAARHLEBf///wEAAAAAAAAAAAAAAAAAAAAAAAAAAAAAAAAAAAAAAAAAAAAAAAB/f38A5+bmA8zMzADAwP8Af39/AAAAAAAAAAAAAAAAAAAAAAAAAAAAIQAAABgAAAAUAAAAkC0AAIgLAABwRwAAyA0AABAAAAAmAAAACAAAAP//////////MAAAABQAAAAAAAAAAAD//wAAAQAAAP//AAABAA=="/>
+                <pr:smNativeData xmlns:pr="smNativeData" xmlns="smNativeData" val="SMDATA_16_V2g2ahMAAAAlAAAAZAAAAA0AAAAAkAAAAEgAAACQAAAASAAAAAAAAAABAAAAAAAAAAEAAABQAAAAAAAAAAAA4D8AAAAAAADgPwAAAAAAAOA/AAAAAAAA4D8AAAAAAADgPwAAAAAAAOA/AAAAAAAA4D8AAAAAAADgPwAAAAAAAOA/AAAAAAAA4D8CAAAAjAAAAAAAAAAAAAAARHLEDP///wgAAAAAAAAAAAAAAAAAAAAAAAAAAAAAAAAAAAAAZAAAAAEAAABAAAAAAAAAAAAAAAAAAAAAAAAAAAAAAAAAAAAAAAAAAAAAAAAAAAAAAAAAAAAAAAAAAAAAAAAAAAAAAAAAAAAAAAAAAAAAAAAAAAAAAAAAAAAAAAAAAAAAFAAAADwAAAAAAAAAAAAAAAAAAAAPAAAAAQAAACMAAAAjAAAAIwAAAB4AAAAAAAAAZAAAAGQAAAAAAAAAZAAAAGQAAAAVAAAAYAAAAAAAAAAAAAAADwAAACADAAAAAAAAAAAAAAEAAACgMgAAVgcAAKr4//8BAAAAf39/AAEAAABkAAAAAAAAABQAAABAHwAAAAAAACYAAAAAAAAAwOD//wAAAAAmAAAAZAAAABYAAABMAAAAAAAAAAAAAAAEAAAAAAAAAAEAAADn5uYKAAAAACgAAAAoAAAAZAAAAGQAAAAAAAAAzMzMAAAAAABQAAAAUAAAAGQAAABkAAAAAAAAABcAAAAUAAAAAAAAAAAAAAD/fwAA/38AAAAAAAAJAAAABAAAACABAAAeAAAAaAAAAAAAAAAAAAAAAAAAAAAAAAAAAAAAECcAABAnAAAAAAAAAAAAAAAAAAAAAAAAAAAAAAAAAAAAAAAAAAAAABQAAAAAAAAAwMD/AAAAAABkAAAAMgAAAAAAAABkAAAAAAAAAH9/fwAKAAAAIgAAABgAAAAAAAAAAAAAAAAAAAAAAAAAAAAAAAAAAAAkAAAAJAAAAAAAAAAHAAAAAAAAAAAAAAAAAAAAAAAAAAAAAAAAAAAAf39/ACUAAABYAAAAAAAAAAAAAAAAAAAAAAAAAAAAAAAAAAAAAAAAAAAAAAAAAAAAAAAAAAAAAAA/AAAAAAAAAKCGAQAAAAAAAAAAAAAAAAAMAAAAAQAAAAAAAAAAAAAAAAAAAB8AAABUAAAARHLEBf///wEAAAAAAAAAAAAAAAAAAAAAAAAAAAAAAAAAAAAAAAAAAAAAAAB/f38A5+bmA8zMzADAwP8Af39/AAAAAAAAAAAAAAAAAAAAAAAAAAAAIQAAABgAAAAUAAAAkC0AAIgLAABwRwAAyA0AABAAAAAmAAAACAAAAP//////////MAAAABQAAAAAAAAAAAD//wAAAQAAAP//AAABAA=="/>
               </a:ext>
             </a:extLst>
           </p:cNvSpPr>
@@ -10729,7 +11062,7 @@
           <p:cNvSpPr>
             <a:extLst>
               <a:ext uri="smNativeData">
-                <pr:smNativeData xmlns:pr="smNativeData" xmlns="smNativeData" val="SMDATA_16_kRU2ahMAAAAlAAAAZgAAAA0AAAAAkAAAAEgAAACQAAAASAAAAAAAAAAAAAAAAAAAAAEAAABQAAAAAAAAAAAA8D8AAAAAAADwPwAAAAAAAOA/AAAAAAAA4D8AAAAAAADgPwAAAAAAAOA/AAAAAAAA4D8AAAAAAADgPwAAAAAAAOA/AAAAAAAA4D8CAAAAjAAAAAAAAAAAAAAA////AP///wgAAAAAAAAAAAAAAAAAAAAAAAAAAAAAAAAAAAAAeAAAAAEAAABAAAAAAAAAAAAAAABaAAAAAAAAAAAAAAAAAAAAAAAAAAAAAAAAAAAAAAAAAAAAAAAAAAAAAAAAAAAAAAAAAAAAAAAAAAAAAAAAAAAAAAAAAAAAAAAAAAAAFAAAADwAAAABAAAAAAAAAOCgOAA8AAAAAQAAACMAAAAjAAAAIwAAAB4AAAAAAAAAZAAAAGQAAAAAAAAAZAAAAGQAAAAVAAAAYAAAAAAAAAAAAAAADwAAACADAAAAAAAAAAAAAAEAAACgMgAAVgcAAKr4//8BAAAAf39/AAEAAABkAAAAAAAAABQAAABAHwAAAAAAACYAAAAAAAAAwOD//wAAAAAmAAAAZAAAABYAAABMAAAAAAAAAAAAAAAEAAAAAAAAAAEAAADn5uYKAAAAACgAAAAoAAAAZAAAAGQAAAAAAAAAzMzMAAAAAABQAAAAUAAAAGQAAABkAAAAAAAAABcAAAAUAAAAAAAAAAAAAAD/fwAA/38AAAAAAAAJAAAABAAAAAAAAAAeAAAAaAAAAAAAAAAAAAAAAAAAAAAAAAAAAAAAECcAABAnAAAAAAAAAAAAAAAAAAAAAAAAAAAAAAAAAAAAAAAAAAAAABQAAAAAAAAAwMD/AAAAAABkAAAAMgAAAAAAAABkAAAAAAAAAH9/fwAKAAAAIgAAABgAAAAAAAAAAAAAAAAAAAAAAAAAAAAAAAAAAAAkAAAAJAAAAAAAAAAHAAAAAAAAAAAAAAAAAAAAAAAAAAAAAAAAAAAAf39/ACUAAABYAAAAAAAAAAAAAAAAAAAAAAAAAAAAAAAAAAAAAAAAAAAAAAAAAAAAAAAAAAAAAAA/AAAAAAAAAKCGAQAAAAAAAAAAAAAAAAAMAAAAAQAAAAAAAAAAAAAAAAAAAB8AAABUAAAA////AP///wEAAAAAAAAAAAAAAAAAAAAAAAAAAAAAAAAAAAAAAAAAAOCgOAB/f38A5+bmA8zMzADAwP8Af39/AAAAAAAAAAAAAAAAAAAAAAAAAAAAIQAAABgAAAAUAAAAcDUAAOgOAACQPwAACBkAABAAAAAmAAAACAAAAP//////////MAAAABQAAAAAAAAAAAD//wAAAQAAAP//AAABAA=="/>
+                <pr:smNativeData xmlns:pr="smNativeData" xmlns="smNativeData" val="SMDATA_16_V2g2ahMAAAAlAAAAZgAAAA0AAAAAkAAAAEgAAACQAAAASAAAAAAAAAAAAAAAAAAAAAEAAABQAAAAAAAAAAAA8D8AAAAAAADwPwAAAAAAAOA/AAAAAAAA4D8AAAAAAADgPwAAAAAAAOA/AAAAAAAA4D8AAAAAAADgPwAAAAAAAOA/AAAAAAAA4D8CAAAAjAAAAAAAAAAAAAAA////AP///wgAAAAAAAAAAAAAAAAAAAAAAAAAAAAAAAAAAAAAeAAAAAEAAABAAAAAAAAAAAAAAABaAAAAAAAAAAAAAAAAAAAAAAAAAAAAAAAAAAAAAAAAAAAAAAAAAAAAAAAAAAAAAAAAAAAAAAAAAAAAAAAAAAAAAAAAAAAAAAAAAAAAFAAAADwAAAABAAAAAAAAAOCgOAA8AAAAAQAAACMAAAAjAAAAIwAAAB4AAAAAAAAAZAAAAGQAAAAAAAAAZAAAAGQAAAAVAAAAYAAAAAAAAAAAAAAADwAAACADAAAAAAAAAAAAAAEAAACgMgAAVgcAAKr4//8BAAAAf39/AAEAAABkAAAAAAAAABQAAABAHwAAAAAAACYAAAAAAAAAwOD//wAAAAAmAAAAZAAAABYAAABMAAAAAAAAAAAAAAAEAAAAAAAAAAEAAADn5uYKAAAAACgAAAAoAAAAZAAAAGQAAAAAAAAAzMzMAAAAAABQAAAAUAAAAGQAAABkAAAAAAAAABcAAAAUAAAAAAAAAAAAAAD/fwAA/38AAAAAAAAJAAAABAAAAAAAAAAeAAAAaAAAAAAAAAAAAAAAAAAAAAAAAAAAAAAAECcAABAnAAAAAAAAAAAAAAAAAAAAAAAAAAAAAAAAAAAAAAAAAAAAABQAAAAAAAAAwMD/AAAAAABkAAAAMgAAAAAAAABkAAAAAAAAAH9/fwAKAAAAIgAAABgAAAAAAAAAAAAAAAAAAAAAAAAAAAAAAAAAAAAkAAAAJAAAAAAAAAAHAAAAAAAAAAAAAAAAAAAAAAAAAAAAAAAAAAAAf39/ACUAAABYAAAAAAAAAAAAAAAAAAAAAAAAAAAAAAAAAAAAAAAAAAAAAAAAAAAAAAAAAAAAAAA/AAAAAAAAAKCGAQAAAAAAAAAAAAAAAAAMAAAAAQAAAAAAAAAAAAAAAAAAAB8AAABUAAAA////AP///wEAAAAAAAAAAAAAAAAAAAAAAAAAAAAAAAAAAAAAAAAAAOCgOAB/f38A5+bmA8zMzADAwP8Af39/AAAAAAAAAAAAAAAAAAAAAAAAAAAAIQAAABgAAAAUAAAAcDUAAOgOAACQPwAACBkAABAAAAAmAAAACAAAAP//////////MAAAABQAAAAAAAAAAAD//wAAAQAAAP//AAABAA=="/>
               </a:ext>
             </a:extLst>
           </p:cNvSpPr>
@@ -10761,7 +11094,7 @@
           <p:cNvSpPr>
             <a:extLst>
               <a:ext uri="smNativeData">
-                <pr:smNativeData xmlns:pr="smNativeData" xmlns="smNativeData" val="SMDATA_16_kRU2ahMAAAAlAAAAZgAAAA0AAAAAkAAAAEgAAACQAAAASAAAAAAAAAAAAAAAAAAAAAEAAABQAAAAAAAAAAAA8D8AAAAAAADwPwAAAAAAAOA/AAAAAAAA4D8AAAAAAADgPwAAAAAAAOA/AAAAAAAA4D8AAAAAAADgPwAAAAAAAOA/AAAAAAAA4D8CAAAAjAAAAAEAAAAAAAAA4KA4AP///wgAAAAAAAAAAAAAAAAAAAAAAAAAAAAAAAAAAAAAeAAAAAEAAABAAAAAAAAAAAAAAABaAAAAAAAAAAAAAAAAAAAAAAAAAAAAAAAAAAAAAAAAAAAAAAAAAAAAAAAAAAAAAAAAAAAAAAAAAAAAAAAAAAAAAAAAAAAAAAAAAAAAFAAAADwAAAAAAAAAAAAAAAAAAAAPAAAAAQAAACMAAAAjAAAAIwAAAB4AAAAAAAAAZAAAAGQAAAAAAAAAZAAAAGQAAAAVAAAAYAAAAAAAAAAAAAAADwAAACADAAAAAAAAAAAAAAEAAACgMgAAVgcAAKr4//8BAAAAf39/AAEAAABkAAAAAAAAABQAAABAHwAAAAAAACYAAAAAAAAAwOD//wAAAAAmAAAAZAAAABYAAABMAAAAAAAAAAAAAAAEAAAAAAAAAAEAAADn5uYKAAAAACgAAAAoAAAAZAAAAGQAAAAAAAAAzMzMAAAAAABQAAAAUAAAAGQAAABkAAAAAAAAABcAAAAUAAAAAAAAAAAAAAD/fwAA/38AAAAAAAAJAAAABAAAAAsbAAAeAAAAaAAAAAAAAAAAAAAAAAAAAAAAAAAAAAAAECcAABAnAAAAAAAAAAAAAAAAAAAAAAAAAAAAAAAAAAAAAAAAAAAAABQAAAAAAAAAwMD/AAAAAABkAAAAMgAAAAAAAABkAAAAAAAAAH9/fwAKAAAAIgAAABgAAAAAAAAAAAAAAAAAAAAAAAAAAAAAAAAAAAAkAAAAJAAAAAAAAAAHAAAAAAAAAAAAAAAAAAAAAAAAAAAAAAAAAAAAf39/ACUAAABYAAAAAAAAAAAAAAAAAAAAAAAAAAAAAAAAAAAAAAAAAAAAAAAAAAAAAAAAAAAAAAA/AAAAAAAAAKCGAQAAAAAAAAAAAAAAAAAMAAAAAQAAAAAAAAAAAAAAAAAAAB8AAABUAAAA4KA4AP///wEAAAAAAAAAAAAAAAAAAAAAAAAAAAAAAAAAAAAAAAAAAAAAAAB/f38A5+bmA8zMzADAwP8Af39/AAAAAAAAAAAAAAAAAAAAAAAAAAAAIQAAABgAAAAUAAAADToAAIMOAADzOgAAag8AABAAAAAmAAAACAAAAP//////////MAAAABQAAAAAAAAAAAD//wAAAQAAAP//AAABAA=="/>
+                <pr:smNativeData xmlns:pr="smNativeData" xmlns="smNativeData" val="SMDATA_16_V2g2ahMAAAAlAAAAZgAAAA0AAAAAkAAAAEgAAACQAAAASAAAAAAAAAAAAAAAAAAAAAEAAABQAAAAAAAAAAAA8D8AAAAAAADwPwAAAAAAAOA/AAAAAAAA4D8AAAAAAADgPwAAAAAAAOA/AAAAAAAA4D8AAAAAAADgPwAAAAAAAOA/AAAAAAAA4D8CAAAAjAAAAAEAAAAAAAAA4KA4AP///wgAAAAAAAAAAAAAAAAAAAAAAAAAAAAAAAAAAAAAeAAAAAEAAABAAAAAAAAAAAAAAABaAAAAAAAAAAAAAAAAAAAAAAAAAAAAAAAAAAAAAAAAAAAAAAAAAAAAAAAAAAAAAAAAAAAAAAAAAAAAAAAAAAAAAAAAAAAAAAAAAAAAFAAAADwAAAAAAAAAAAAAAAAAAAAPAAAAAQAAACMAAAAjAAAAIwAAAB4AAAAAAAAAZAAAAGQAAAAAAAAAZAAAAGQAAAAVAAAAYAAAAAAAAAAAAAAADwAAACADAAAAAAAAAAAAAAEAAACgMgAAVgcAAKr4//8BAAAAf39/AAEAAABkAAAAAAAAABQAAABAHwAAAAAAACYAAAAAAAAAwOD//wAAAAAmAAAAZAAAABYAAABMAAAAAAAAAAAAAAAEAAAAAAAAAAEAAADn5uYKAAAAACgAAAAoAAAAZAAAAGQAAAAAAAAAzMzMAAAAAABQAAAAUAAAAGQAAABkAAAAAAAAABcAAAAUAAAAAAAAAAAAAAD/fwAA/38AAAAAAAAJAAAABAAAAAsbAAAeAAAAaAAAAAAAAAAAAAAAAAAAAAAAAAAAAAAAECcAABAnAAAAAAAAAAAAAAAAAAAAAAAAAAAAAAAAAAAAAAAAAAAAABQAAAAAAAAAwMD/AAAAAABkAAAAMgAAAAAAAABkAAAAAAAAAH9/fwAKAAAAIgAAABgAAAAAAAAAAAAAAAAAAAAAAAAAAAAAAAAAAAAkAAAAJAAAAAAAAAAHAAAAAAAAAAAAAAAAAAAAAAAAAAAAAAAAAAAAf39/ACUAAABYAAAAAAAAAAAAAAAAAAAAAAAAAAAAAAAAAAAAAAAAAAAAAAAAAAAAAAAAAAAAAAA/AAAAAAAAAKCGAQAAAAAAAAAAAAAAAAAMAAAAAQAAAAAAAAAAAAAAAAAAAB8AAABUAAAA4KA4AP///wEAAAAAAAAAAAAAAAAAAAAAAAAAAAAAAAAAAAAAAAAAAAAAAAB/f38A5+bmA8zMzADAwP8Af39/AAAAAAAAAAAAAAAAAAAAAAAAAAAAIQAAABgAAAAUAAAADToAAIMOAADzOgAAag8AABAAAAAmAAAACAAAAP//////////MAAAABQAAAAAAAAAAAD//wAAAQAAAP//AAABAA=="/>
               </a:ext>
             </a:extLst>
           </p:cNvSpPr>
@@ -10790,7 +11123,7 @@
           <p:cNvSpPr>
             <a:extLst>
               <a:ext uri="smNativeData">
-                <pr:smNativeData xmlns:pr="smNativeData" xmlns="smNativeData" val="SMDATA_16_kRU2ahMAAAAlAAAAZAAAAA0AAAAAkAAAAEgAAACQAAAASAAAAAAAAAABAAAAAAAAAAEAAABQAAAAAAAAAAAA4D8AAAAAAADgPwAAAAAAAOA/AAAAAAAA4D8AAAAAAADgPwAAAAAAAOA/AAAAAAAA4D8AAAAAAADgPwAAAAAAAOA/AAAAAAAA4D8CAAAAjAAAAAAAAAAAAAAARHLEDP///wgAAAAAAAAAAAAAAAAAAAAAAAAAAAAAAAAAAAAAZAAAAAEAAABAAAAAAAAAAAAAAAAAAAAAAAAAAAAAAAAAAAAAAAAAAAAAAAAAAAAAAAAAAAAAAAAAAAAAAAAAAAAAAAAAAAAAAAAAAAAAAAAAAAAAAAAAAAAAAAAAAAAAFAAAADwAAAAAAAAAAAAAAAAAAAAPAAAAAQAAACMAAAAjAAAAIwAAAB4AAAAAAAAAZAAAAGQAAAAAAAAAZAAAAGQAAAAVAAAAYAAAAAAAAAAAAAAADwAAACADAAAAAAAAAAAAAAEAAACgMgAAVgcAAKr4//8BAAAAf39/AAEAAABkAAAAAAAAABQAAABAHwAAAAAAACYAAAAAAAAAwOD//wAAAAAmAAAAZAAAABYAAABMAAAAAAAAAAAAAAAEAAAAAAAAAAEAAADn5uYKAAAAACgAAAAoAAAAZAAAAGQAAAAAAAAAzMzMAAAAAABQAAAAUAAAAGQAAABkAAAAAAAAABcAAAAUAAAAAAAAAAAAAAD/fwAA/38AAAAAAAAJAAAABAAAABAWAAAeAAAAaAAAAAAAAAAAAAAAAAAAAAAAAAAAAAAAECcAABAnAAAAAAAAAAAAAAAAAAAAAAAAAAAAAAAAAAAAAAAAAAAAABQAAAAAAAAAwMD/AAAAAABkAAAAMgAAAAAAAABkAAAAAAAAAH9/fwAKAAAAIgAAABgAAAAAAAAAAAAAAAAAAAAAAAAAAAAAAAAAAAAkAAAAJAAAAAAAAAAHAAAAAAAAAAAAAAAAAAAAAAAAAAAAAAAAAAAAf39/ACUAAABYAAAAAAAAAAAAAAAAAAAAAAAAAAAAAAAAAAAAAAAAAAAAAAAAAAAAAAAAAAAAAAA/AAAAAAAAAKCGAQAAAAAAAAAAAAAAAAAMAAAAAQAAAAAAAAAAAAAAAAAAAB8AAABUAAAARHLEBf///wEAAAAAAAAAAAAAAAAAAAAAAAAAAAAAAAAAAAAAAAAAAAAAAAB/f38A5+bmA8zMzADAwP8Af39/AAAAAAAAAAAAAAAAAAAAAAAAAAAAIQAAABgAAAAUAAAAcDUAAGAMAACQPwAAEA4AABAAAAAmAAAACAAAAP//////////MAAAABQAAAAAAAAAAAD//wAAAQAAAP//AAABAA=="/>
+                <pr:smNativeData xmlns:pr="smNativeData" xmlns="smNativeData" val="SMDATA_16_V2g2ahMAAAAlAAAAZAAAAA0AAAAAkAAAAEgAAACQAAAASAAAAAAAAAABAAAAAAAAAAEAAABQAAAAAAAAAAAA4D8AAAAAAADgPwAAAAAAAOA/AAAAAAAA4D8AAAAAAADgPwAAAAAAAOA/AAAAAAAA4D8AAAAAAADgPwAAAAAAAOA/AAAAAAAA4D8CAAAAjAAAAAAAAAAAAAAARHLEDP///wgAAAAAAAAAAAAAAAAAAAAAAAAAAAAAAAAAAAAAZAAAAAEAAABAAAAAAAAAAAAAAAAAAAAAAAAAAAAAAAAAAAAAAAAAAAAAAAAAAAAAAAAAAAAAAAAAAAAAAAAAAAAAAAAAAAAAAAAAAAAAAAAAAAAAAAAAAAAAAAAAAAAAFAAAADwAAAAAAAAAAAAAAAAAAAAPAAAAAQAAACMAAAAjAAAAIwAAAB4AAAAAAAAAZAAAAGQAAAAAAAAAZAAAAGQAAAAVAAAAYAAAAAAAAAAAAAAADwAAACADAAAAAAAAAAAAAAEAAACgMgAAVgcAAKr4//8BAAAAf39/AAEAAABkAAAAAAAAABQAAABAHwAAAAAAACYAAAAAAAAAwOD//wAAAAAmAAAAZAAAABYAAABMAAAAAAAAAAAAAAAEAAAAAAAAAAEAAADn5uYKAAAAACgAAAAoAAAAZAAAAGQAAAAAAAAAzMzMAAAAAABQAAAAUAAAAGQAAABkAAAAAAAAABcAAAAUAAAAAAAAAAAAAAD/fwAA/38AAAAAAAAJAAAABAAAABAWAAAeAAAAaAAAAAAAAAAAAAAAAAAAAAAAAAAAAAAAECcAABAnAAAAAAAAAAAAAAAAAAAAAAAAAAAAAAAAAAAAAAAAAAAAABQAAAAAAAAAwMD/AAAAAABkAAAAMgAAAAAAAABkAAAAAAAAAH9/fwAKAAAAIgAAABgAAAAAAAAAAAAAAAAAAAAAAAAAAAAAAAAAAAAkAAAAJAAAAAAAAAAHAAAAAAAAAAAAAAAAAAAAAAAAAAAAAAAAAAAAf39/ACUAAABYAAAAAAAAAAAAAAAAAAAAAAAAAAAAAAAAAAAAAAAAAAAAAAAAAAAAAAAAAAAAAAA/AAAAAAAAAKCGAQAAAAAAAAAAAAAAAAAMAAAAAQAAAAAAAAAAAAAAAAAAAB8AAABUAAAARHLEBf///wEAAAAAAAAAAAAAAAAAAAAAAAAAAAAAAAAAAAAAAAAAAAAAAAB/f38A5+bmA8zMzADAwP8Af39/AAAAAAAAAAAAAAAAAAAAAAAAAAAAIQAAABgAAAAUAAAAcDUAAGAMAACQPwAAEA4AABAAAAAmAAAACAAAAP//////////MAAAABQAAAAAAAAAAAD//wAAAQAAAP//AAABAA=="/>
               </a:ext>
             </a:extLst>
           </p:cNvSpPr>
@@ -10843,7 +11176,7 @@
           <p:cNvSpPr>
             <a:extLst>
               <a:ext uri="smNativeData">
-                <pr:smNativeData xmlns:pr="smNativeData" xmlns="smNativeData" val="SMDATA_16_kRU2ahMAAAAlAAAAZAAAAA0AAAAAkAAAAEgAAACQAAAASAAAAAAAAAABAAAAAAAAAAEAAABQAAAAAAAAAAAA4D8AAAAAAADgPwAAAAAAAOA/AAAAAAAA4D8AAAAAAADgPwAAAAAAAOA/AAAAAAAA4D8AAAAAAADgPwAAAAAAAOA/AAAAAAAA4D8CAAAAjAAAAAAAAAAAAAAARHLEDP///wgAAAAAAAAAAAAAAAAAAAAAAAAAAAAAAAAAAAAAZAAAAAEAAABAAAAAAAAAAAAAAAAAAAAAAAAAAAAAAAAAAAAAAAAAAAAAAAAAAAAAAAAAAAAAAAAAAAAAAAAAAAAAAAAAAAAAAAAAAAAAAAAAAAAAAAAAAAAAAAAAAAAAFAAAADwAAAAAAAAAAAAAAAAAAAAPAAAAAQAAACMAAAAjAAAAIwAAAB4AAAAAAAAAZAAAAGQAAAAAAAAAZAAAAGQAAAAVAAAAYAAAAAAAAAAAAAAADwAAACADAAAAAAAAAAAAAAEAAACgMgAAVgcAAKr4//8BAAAAf39/AAEAAABkAAAAAAAAABQAAABAHwAAAAAAACYAAAAAAAAAwOD//wAAAAAmAAAAZAAAABYAAABMAAAAAAAAAAAAAAAEAAAAAAAAAAEAAADn5uYKAAAAACgAAAAoAAAAZAAAAGQAAAAAAAAAzMzMAAAAAABQAAAAUAAAAGQAAABkAAAAAAAAABcAAAAUAAAAAAAAAAAAAAD/fwAA/38AAAAAAAAJAAAABAAAAAoAAAAeAAAAaAAAAAAAAAAAAAAAAAAAAAAAAAAAAAAAECcAABAnAAAAAAAAAAAAAAAAAAAAAAAAAAAAAAAAAAAAAAAAAAAAABQAAAAAAAAAwMD/AAAAAABkAAAAMgAAAAAAAABkAAAAAAAAAH9/fwAKAAAAIgAAABgAAAAAAAAAAAAAAAAAAAAAAAAAAAAAAAAAAAAkAAAAJAAAAAAAAAAHAAAAAAAAAAAAAAAAAAAAAAAAAAAAAAAAAAAAf39/ACUAAABYAAAAAAAAAAAAAAAAAAAAAAAAAAAAAAAAAAAAAAAAAAAAAAAAAAAAAAAAAAAAAAA/AAAAAAAAAKCGAQAAAAAAAAAAAAAAAAAMAAAAAQAAAAAAAAAAAAAAAAAAAB8AAABUAAAARHLEBf///wEAAAAAAAAAAAAAAAAAAAAAAAAAAAAAAAAAAAAAAAAAAAAAAAB/f38A5+bmA8zMzADAwP8Af39/AAAAAAAAAAAAAAAAAAAAAAAAAAAAIQAAABgAAAAUAAAAkC0AAHAaAABwRwAAsBwAABAAAAAmAAAACAAAAP//////////MAAAABQAAAAAAAAAAAD//wAAAQAAAP//AAABAA=="/>
+                <pr:smNativeData xmlns:pr="smNativeData" xmlns="smNativeData" val="SMDATA_16_V2g2ahMAAAAlAAAAZAAAAA0AAAAAkAAAAEgAAACQAAAASAAAAAAAAAABAAAAAAAAAAEAAABQAAAAAAAAAAAA4D8AAAAAAADgPwAAAAAAAOA/AAAAAAAA4D8AAAAAAADgPwAAAAAAAOA/AAAAAAAA4D8AAAAAAADgPwAAAAAAAOA/AAAAAAAA4D8CAAAAjAAAAAAAAAAAAAAARHLEDP///wgAAAAAAAAAAAAAAAAAAAAAAAAAAAAAAAAAAAAAZAAAAAEAAABAAAAAAAAAAAAAAAAAAAAAAAAAAAAAAAAAAAAAAAAAAAAAAAAAAAAAAAAAAAAAAAAAAAAAAAAAAAAAAAAAAAAAAAAAAAAAAAAAAAAAAAAAAAAAAAAAAAAAFAAAADwAAAAAAAAAAAAAAAAAAAAPAAAAAQAAACMAAAAjAAAAIwAAAB4AAAAAAAAAZAAAAGQAAAAAAAAAZAAAAGQAAAAVAAAAYAAAAAAAAAAAAAAADwAAACADAAAAAAAAAAAAAAEAAACgMgAAVgcAAKr4//8BAAAAf39/AAEAAABkAAAAAAAAABQAAABAHwAAAAAAACYAAAAAAAAAwOD//wAAAAAmAAAAZAAAABYAAABMAAAAAAAAAAAAAAAEAAAAAAAAAAEAAADn5uYKAAAAACgAAAAoAAAAZAAAAGQAAAAAAAAAzMzMAAAAAABQAAAAUAAAAGQAAABkAAAAAAAAABcAAAAUAAAAAAAAAAAAAAD/fwAA/38AAAAAAAAJAAAABAAAAAoAAAAeAAAAaAAAAAAAAAAAAAAAAAAAAAAAAAAAAAAAECcAABAnAAAAAAAAAAAAAAAAAAAAAAAAAAAAAAAAAAAAAAAAAAAAABQAAAAAAAAAwMD/AAAAAABkAAAAMgAAAAAAAABkAAAAAAAAAH9/fwAKAAAAIgAAABgAAAAAAAAAAAAAAAAAAAAAAAAAAAAAAAAAAAAkAAAAJAAAAAAAAAAHAAAAAAAAAAAAAAAAAAAAAAAAAAAAAAAAAAAAf39/ACUAAABYAAAAAAAAAAAAAAAAAAAAAAAAAAAAAAAAAAAAAAAAAAAAAAAAAAAAAAAAAAAAAAA/AAAAAAAAAKCGAQAAAAAAAAAAAAAAAAAMAAAAAQAAAAAAAAAAAAAAAAAAAB8AAABUAAAARHLEBf///wEAAAAAAAAAAAAAAAAAAAAAAAAAAAAAAAAAAAAAAAAAAAAAAAB/f38A5+bmA8zMzADAwP8Af39/AAAAAAAAAAAAAAAAAAAAAAAAAAAAIQAAABgAAAAUAAAAkC0AAHAaAABwRwAAsBwAABAAAAAmAAAACAAAAP//////////MAAAABQAAAAAAAAAAAD//wAAAQAAAP//AAABAA=="/>
               </a:ext>
             </a:extLst>
           </p:cNvSpPr>
@@ -10924,7 +11257,7 @@
           <p:cNvSpPr>
             <a:extLst>
               <a:ext uri="smNativeData">
-                <pr:smNativeData xmlns:pr="smNativeData" xmlns="smNativeData" val="SMDATA_16_kRU2ahMAAAAlAAAAZAAAAA0AAAAAkAAAAEgAAACQAAAASAAAAAAAAAABAAAAAAAAAAEAAABQAAAAAAAAAAAA4D8AAAAAAADgPwAAAAAAAOA/AAAAAAAA4D8AAAAAAADgPwAAAAAAAOA/AAAAAAAA4D8AAAAAAADgPwAAAAAAAOA/AAAAAAAA4D8CAAAAjAAAAAAAAAAAAAAARHLEDP///wgAAAAAAAAAAAAAAAAAAAAAAAAAAAAAAAAAAAAAZAAAAAEAAABAAAAAAAAAAAAAAAAAAAAAAAAAAAAAAAAAAAAAAAAAAAAAAAAAAAAAAAAAAAAAAAAAAAAAAAAAAAAAAAAAAAAAAAAAAAAAAAAAAAAAAAAAAAAAAAAAAAAAFAAAADwAAAAAAAAAAAAAAAAAAAAPAAAAAQAAACMAAAAjAAAAIwAAAB4AAAAAAAAAZAAAAGQAAAAAAAAAZAAAAGQAAAAVAAAAYAAAAAAAAAAAAAAADwAAACADAAAAAAAAAAAAAAEAAACgMgAAVgcAAKr4//8BAAAAf39/AAEAAABkAAAAAAAAABQAAABAHwAAAAAAACYAAAAAAAAAwOD//wAAAAAmAAAAZAAAABYAAABMAAAAAAAAAAAAAAAEAAAAAAAAAAEAAADn5uYKAAAAACgAAAAoAAAAZAAAAGQAAAAAAAAAzMzMAAAAAABQAAAAUAAAAGQAAABkAAAAAAAAABcAAAAUAAAAAAAAAAAAAAD/fwAA/38AAAAAAAAJAAAABAAAALYEAAAeAAAAaAAAAAAAAAAAAAAAAAAAAAAAAAAAAAAAECcAABAnAAAAAAAAAAAAAAAAAAAAAAAAAAAAAAAAAAAAAAAAAAAAABQAAAAAAAAAwMD/AAAAAABkAAAAMgAAAAAAAABkAAAAAAAAAH9/fwAKAAAAIgAAABgAAAAAAAAAAAAAAAAAAAAAAAAAAAAAAAAAAAAkAAAAJAAAAAAAAAAHAAAAAAAAAAAAAAAAAAAAAAAAAAAAAAAAAAAAf39/ACUAAABYAAAAAAAAAAAAAAAAAAAAAAAAAAAAAAAAAAAAAAAAAAAAAAAAAAAAAAAAAAAAAAA/AAAAAAAAAKCGAQAAAAAAAAAAAAAAAAAMAAAAAQAAAAAAAAAAAAAAAAAAAB8AAABUAAAARHLEBf///wEAAAAAAAAAAAAAAAAAAAAAAAAAAAAAAAAAAAAAAAAAAAAAAAB/f38A5+bmA8zMzADAwP8Af39/AAAAAAAAAAAAAAAAAAAAAAAAAAAAIQAAABgAAAAUAAAAkC0AAPgcAABwRwAAWCAAABAAAAAmAAAACAAAAP//////////MAAAABQAAAAAAAAAAAD//wAAAQAAAP//AAABAA=="/>
+                <pr:smNativeData xmlns:pr="smNativeData" xmlns="smNativeData" val="SMDATA_16_V2g2ahMAAAAlAAAAZAAAAA0AAAAAkAAAAEgAAACQAAAASAAAAAAAAAABAAAAAAAAAAEAAABQAAAAAAAAAAAA4D8AAAAAAADgPwAAAAAAAOA/AAAAAAAA4D8AAAAAAADgPwAAAAAAAOA/AAAAAAAA4D8AAAAAAADgPwAAAAAAAOA/AAAAAAAA4D8CAAAAjAAAAAAAAAAAAAAARHLEDP///wgAAAAAAAAAAAAAAAAAAAAAAAAAAAAAAAAAAAAAZAAAAAEAAABAAAAAAAAAAAAAAAAAAAAAAAAAAAAAAAAAAAAAAAAAAAAAAAAAAAAAAAAAAAAAAAAAAAAAAAAAAAAAAAAAAAAAAAAAAAAAAAAAAAAAAAAAAAAAAAAAAAAAFAAAADwAAAAAAAAAAAAAAAAAAAAPAAAAAQAAACMAAAAjAAAAIwAAAB4AAAAAAAAAZAAAAGQAAAAAAAAAZAAAAGQAAAAVAAAAYAAAAAAAAAAAAAAADwAAACADAAAAAAAAAAAAAAEAAACgMgAAVgcAAKr4//8BAAAAf39/AAEAAABkAAAAAAAAABQAAABAHwAAAAAAACYAAAAAAAAAwOD//wAAAAAmAAAAZAAAABYAAABMAAAAAAAAAAAAAAAEAAAAAAAAAAEAAADn5uYKAAAAACgAAAAoAAAAZAAAAGQAAAAAAAAAzMzMAAAAAABQAAAAUAAAAGQAAABkAAAAAAAAABcAAAAUAAAAAAAAAAAAAAD/fwAA/38AAAAAAAAJAAAABAAAALYEAAAeAAAAaAAAAAAAAAAAAAAAAAAAAAAAAAAAAAAAECcAABAnAAAAAAAAAAAAAAAAAAAAAAAAAAAAAAAAAAAAAAAAAAAAABQAAAAAAAAAwMD/AAAAAABkAAAAMgAAAAAAAABkAAAAAAAAAH9/fwAKAAAAIgAAABgAAAAAAAAAAAAAAAAAAAAAAAAAAAAAAAAAAAAkAAAAJAAAAAAAAAAHAAAAAAAAAAAAAAAAAAAAAAAAAAAAAAAAAAAAf39/ACUAAABYAAAAAAAAAAAAAAAAAAAAAAAAAAAAAAAAAAAAAAAAAAAAAAAAAAAAAAAAAAAAAAA/AAAAAAAAAKCGAQAAAAAAAAAAAAAAAAAMAAAAAQAAAAAAAAAAAAAAAAAAAB8AAABUAAAARHLEBf///wEAAAAAAAAAAAAAAAAAAAAAAAAAAAAAAAAAAAAAAAAAAAAAAAB/f38A5+bmA8zMzADAwP8Af39/AAAAAAAAAAAAAAAAAAAAAAAAAAAAIQAAABgAAAAUAAAAkC0AAPgcAABwRwAAWCAAABAAAAAmAAAACAAAAP//////////MAAAABQAAAAAAAAAAAD//wAAAQAAAP//AAABAA=="/>
               </a:ext>
             </a:extLst>
           </p:cNvSpPr>
@@ -11057,7 +11390,7 @@
           <p:cNvSpPr>
             <a:extLst>
               <a:ext uri="smNativeData">
-                <pr:smNativeData xmlns:pr="smNativeData" xmlns="smNativeData" val="SMDATA_16_kRU2ahMAAAAlAAAAZAAAAA0AAAAAkAAAAEgAAACQAAAASAAAAAAAAAABAAAAAAAAAAEAAABQAAAAAAAAAAAA4D8AAAAAAADgPwAAAAAAAOA/AAAAAAAA4D8AAAAAAADgPwAAAAAAAOA/AAAAAAAA4D8AAAAAAADgPwAAAAAAAOA/AAAAAAAA4D8CAAAAjAAAAAAAAAAAAAAARHLEDP///wgAAAAAAAAAAAAAAAAAAAAAAAAAAAAAAAAAAAAAZAAAAAEAAABAAAAAAAAAAAAAAAAAAAAAAAAAAAAAAAAAAAAAAAAAAAAAAAAAAAAAAAAAAAAAAAAAAAAAAAAAAAAAAAAAAAAAAAAAAAAAAAAAAAAAAAAAAAAAAAAAAAAAFAAAADwAAAAAAAAAAAAAAAAAAAAPAAAAAQAAACMAAAAjAAAAIwAAAB4AAAAAAAAAZAAAAGQAAAAAAAAAZAAAAGQAAAAVAAAAYAAAAAAAAAAAAAAADwAAACADAAAAAAAAAAAAAAEAAACgMgAAVgcAAKr4//8BAAAAf39/AAEAAABkAAAAAAAAABQAAABAHwAAAAAAACYAAAAAAAAAwOD//wAAAAAmAAAAZAAAABYAAABMAAAAAAAAAAAAAAAEAAAAAAAAAAEAAADn5uYKAAAAACgAAAAoAAAAZAAAAGQAAAAAAAAAzMzMAAAAAABQAAAAUAAAAGQAAABkAAAAAAAAABcAAAAUAAAAAAAAAAAAAAD/fwAA/38AAAAAAAAJAAAABAAAAAAAAAAeAAAAaAAAAAAAAAAAAAAAAAAAAAAAAAAAAAAAECcAABAnAAAAAAAAAAAAAAAAAAAAAAAAAAAAAAAAAAAAAAAAAAAAABQAAAAAAAAAwMD/AAAAAABkAAAAMgAAAAAAAABkAAAAAAAAAH9/fwAKAAAAIgAAABgAAAAAAAAAAAAAAAAAAAAAAAAAAAAAAAAAAAAkAAAAJAAAAAAAAAAHAAAAAAAAAAAAAAAAAAAAAAAAAAAAAAAAAAAAf39/ACUAAABYAAAAAAAAAAAAAAAAAAAAAAAAAAAAAAAAAAAAAAAAAAAAAAAAAAAAAAAAAAAAAAA/AAAAAAAAAKCGAQAAAAAAAAAAAAAAAAAMAAAAAQAAAAAAAAAAAAAAAAAAAB8AAABUAAAARHLEBf///wEAAAAAAAAAAAAAAAAAAAAAAAAAAAAAAAAAAAAAAAAAAAAAAAB/f38A5+bmA8zMzADAwP8Af39/AAAAAAAAAAAAAAAAAAAAAAAAAAAAIQAAABgAAAAUAAAAYAMAACABAACgRwAA0AIAABAAAAAmAAAACAAAAP//////////MAAAABQAAAAAAAAAAAD//wAAAQAAAP//AAABAA=="/>
+                <pr:smNativeData xmlns:pr="smNativeData" xmlns="smNativeData" val="SMDATA_16_V2g2ahMAAAAlAAAAZAAAAA0AAAAAkAAAAEgAAACQAAAASAAAAAAAAAABAAAAAAAAAAEAAABQAAAAAAAAAAAA4D8AAAAAAADgPwAAAAAAAOA/AAAAAAAA4D8AAAAAAADgPwAAAAAAAOA/AAAAAAAA4D8AAAAAAADgPwAAAAAAAOA/AAAAAAAA4D8CAAAAjAAAAAAAAAAAAAAARHLEDP///wgAAAAAAAAAAAAAAAAAAAAAAAAAAAAAAAAAAAAAZAAAAAEAAABAAAAAAAAAAAAAAAAAAAAAAAAAAAAAAAAAAAAAAAAAAAAAAAAAAAAAAAAAAAAAAAAAAAAAAAAAAAAAAAAAAAAAAAAAAAAAAAAAAAAAAAAAAAAAAAAAAAAAFAAAADwAAAAAAAAAAAAAAAAAAAAPAAAAAQAAACMAAAAjAAAAIwAAAB4AAAAAAAAAZAAAAGQAAAAAAAAAZAAAAGQAAAAVAAAAYAAAAAAAAAAAAAAADwAAACADAAAAAAAAAAAAAAEAAACgMgAAVgcAAKr4//8BAAAAf39/AAEAAABkAAAAAAAAABQAAABAHwAAAAAAACYAAAAAAAAAwOD//wAAAAAmAAAAZAAAABYAAABMAAAAAAAAAAAAAAAEAAAAAAAAAAEAAADn5uYKAAAAACgAAAAoAAAAZAAAAGQAAAAAAAAAzMzMAAAAAABQAAAAUAAAAGQAAABkAAAAAAAAABcAAAAUAAAAAAAAAAAAAAD/fwAA/38AAAAAAAAJAAAABAAAAAAAAAAeAAAAaAAAAAAAAAAAAAAAAAAAAAAAAAAAAAAAECcAABAnAAAAAAAAAAAAAAAAAAAAAAAAAAAAAAAAAAAAAAAAAAAAABQAAAAAAAAAwMD/AAAAAABkAAAAMgAAAAAAAABkAAAAAAAAAH9/fwAKAAAAIgAAABgAAAAAAAAAAAAAAAAAAAAAAAAAAAAAAAAAAAAkAAAAJAAAAAAAAAAHAAAAAAAAAAAAAAAAAAAAAAAAAAAAAAAAAAAAf39/ACUAAABYAAAAAAAAAAAAAAAAAAAAAAAAAAAAAAAAAAAAAAAAAAAAAAAAAAAAAAAAAAAAAAA/AAAAAAAAAKCGAQAAAAAAAAAAAAAAAAAMAAAAAQAAAAAAAAAAAAAAAAAAAB8AAABUAAAARHLEBf///wEAAAAAAAAAAAAAAAAAAAAAAAAAAAAAAAAAAAAAAAAAAAAAAAB/f38A5+bmA8zMzADAwP8Af39/AAAAAAAAAAAAAAAAAAAAAAAAAAAAIQAAABgAAAAUAAAAYAMAACABAACgRwAA0AIAABAAAAAmAAAACAAAAP//////////MAAAABQAAAAAAAAAAAD//wAAAQAAAP//AAABAA=="/>
               </a:ext>
             </a:extLst>
           </p:cNvSpPr>
@@ -11085,7 +11418,7 @@
               <a:buNone/>
             </a:pPr>
             <a:r>
-              <a:rPr lang="en-us" sz="1200" b="1" cap="none" spc="40">
+              <a:rPr lang="en-us" sz="1200" b="1" cap="none" spc="8">
                 <a:solidFill>
                   <a:srgbClr val="E0A038"/>
                 </a:solidFill>
@@ -11093,7 +11426,7 @@
               <a:t>MAPAS · </a:t>
             </a:r>
             <a:r>
-              <a:rPr lang="en-us" sz="1200" b="1" cap="none" spc="40">
+              <a:rPr lang="en-us" sz="1200" b="1" cap="none" spc="8">
                 <a:solidFill>
                   <a:srgbClr val="E0A038"/>
                 </a:solidFill>
@@ -11110,7 +11443,7 @@
           <p:cNvSpPr>
             <a:extLst>
               <a:ext uri="smNativeData">
-                <pr:smNativeData xmlns:pr="smNativeData" xmlns="smNativeData" val="SMDATA_16_kRU2ahMAAAAlAAAAZAAAAA0AAAAAkAAAAEgAAACQAAAASAAAAAAAAAABAAAAAAAAAAEAAABQAAAAAAAAAAAA4D8AAAAAAADgPwAAAAAAAOA/AAAAAAAA4D8AAAAAAADgPwAAAAAAAOA/AAAAAAAA4D8AAAAAAADgPwAAAAAAAOA/AAAAAAAA4D8CAAAAjAAAAAAAAAAAAAAARHLEDP///wgAAAAAAAAAAAAAAAAAAAAAAAAAAAAAAAAAAAAAZAAAAAEAAABAAAAAAAAAAAAAAAAAAAAAAAAAAAAAAAAAAAAAAAAAAAAAAAAAAAAAAAAAAAAAAAAAAAAAAAAAAAAAAAAAAAAAAAAAAAAAAAAAAAAAAAAAAAAAAAAAAAAAFAAAADwAAAAAAAAAAAAAAAAAAAAPAAAAAQAAACMAAAAjAAAAIwAAAB4AAAAAAAAAZAAAAGQAAAAAAAAAZAAAAGQAAAAVAAAAYAAAAAAAAAAAAAAADwAAACADAAAAAAAAAAAAAAEAAACgMgAAVgcAAKr4//8BAAAAf39/AAEAAABkAAAAAAAAABQAAABAHwAAAAAAACYAAAAAAAAAwOD//wAAAAAmAAAAZAAAABYAAABMAAAAAAAAAAAAAAAEAAAAAAAAAAEAAADn5uYKAAAAACgAAAAoAAAAZAAAAGQAAAAAAAAAzMzMAAAAAABQAAAAUAAAAGQAAABkAAAAAAAAABcAAAAUAAAAAAAAAAAAAAD/fwAA/38AAAAAAAAJAAAABAAAAAAAAAAeAAAAaAAAAAAAAAAAAAAAAAAAAAAAAAAAAAAAECcAABAnAAAAAAAAAAAAAAAAAAAAAAAAAAAAAAAAAAAAAAAAAAAAABQAAAAAAAAAwMD/AAAAAABkAAAAMgAAAAAAAABkAAAAAAAAAH9/fwAKAAAAIgAAABgAAAAAAAAAAAAAAAAAAAAAAAAAAAAAAAAAAAAkAAAAJAAAAAAAAAAHAAAAAAAAAAAAAAAAAAAAAAAAAAAAAAAAAAAAf39/ACUAAABYAAAAAAAAAAAAAAAAAAAAAAAAAAAAAAAAAAAAAAAAAAAAAAAAAAAAAAAAAAAAAAA/AAAAAAAAAKCGAQAAAAAAAAAAAAAAAAAMAAAAAQAAAAAAAAAAAAAAAAAAAB8AAABUAAAARHLEBf///wEAAAAAAAAAAAAAAAAAAAAAAAAAAAAAAAAAAAAAAAAAAAAAAAB/f38A5+bmA8zMzADAwP8Af39/AAAAAAAAAAAAAAAAAAAAAAAAAAAAIQAAABgAAAAUAAAAYAMAAF0CAACgRwAA3QYAABAAAAAmAAAACAAAAP//////////MAAAABQAAAAAAAAAAAD//wAAAQAAAP//AAABAA=="/>
+                <pr:smNativeData xmlns:pr="smNativeData" xmlns="smNativeData" val="SMDATA_16_V2g2ahMAAAAlAAAAZAAAAA0AAAAAkAAAAEgAAACQAAAASAAAAAAAAAABAAAAAAAAAAEAAABQAAAAAAAAAAAA4D8AAAAAAADgPwAAAAAAAOA/AAAAAAAA4D8AAAAAAADgPwAAAAAAAOA/AAAAAAAA4D8AAAAAAADgPwAAAAAAAOA/AAAAAAAA4D8CAAAAjAAAAAAAAAAAAAAARHLEDP///wgAAAAAAAAAAAAAAAAAAAAAAAAAAAAAAAAAAAAAZAAAAAEAAABAAAAAAAAAAAAAAAAAAAAAAAAAAAAAAAAAAAAAAAAAAAAAAAAAAAAAAAAAAAAAAAAAAAAAAAAAAAAAAAAAAAAAAAAAAAAAAAAAAAAAAAAAAAAAAAAAAAAAFAAAADwAAAAAAAAAAAAAAAAAAAAPAAAAAQAAACMAAAAjAAAAIwAAAB4AAAAAAAAAZAAAAGQAAAAAAAAAZAAAAGQAAAAVAAAAYAAAAAAAAAAAAAAADwAAACADAAAAAAAAAAAAAAEAAACgMgAAVgcAAKr4//8BAAAAf39/AAEAAABkAAAAAAAAABQAAABAHwAAAAAAACYAAAAAAAAAwOD//wAAAAAmAAAAZAAAABYAAABMAAAAAAAAAAAAAAAEAAAAAAAAAAEAAADn5uYKAAAAACgAAAAoAAAAZAAAAGQAAAAAAAAAzMzMAAAAAABQAAAAUAAAAGQAAABkAAAAAAAAABcAAAAUAAAAAAAAAAAAAAD/fwAA/38AAAAAAAAJAAAABAAAAAAAAAAeAAAAaAAAAAAAAAAAAAAAAAAAAAAAAAAAAAAAECcAABAnAAAAAAAAAAAAAAAAAAAAAAAAAAAAAAAAAAAAAAAAAAAAABQAAAAAAAAAwMD/AAAAAABkAAAAMgAAAAAAAABkAAAAAAAAAH9/fwAKAAAAIgAAABgAAAAAAAAAAAAAAAAAAAAAAAAAAAAAAAAAAAAkAAAAJAAAAAAAAAAHAAAAAAAAAAAAAAAAAAAAAAAAAAAAAAAAAAAAf39/ACUAAABYAAAAAAAAAAAAAAAAAAAAAAAAAAAAAAAAAAAAAAAAAAAAAAAAAAAAAAAAAAAAAAA/AAAAAAAAAKCGAQAAAAAAAAAAAAAAAAAMAAAAAQAAAAAAAAAAAAAAAAAAAB8AAABUAAAARHLEBf///wEAAAAAAAAAAAAAAAAAAAAAAAAAAAAAAAAAAAAAAAAAAAAAAAB/f38A5+bmA8zMzADAwP8Af39/AAAAAAAAAAAAAAAAAAAAAAAAAAAAIQAAABgAAAAUAAAAYAMAAF0CAACgRwAA3QYAABAAAAAmAAAACAAAAP//////////MAAAABQAAAAAAAAAAAD//wAAAQAAAP//AAABAA=="/>
               </a:ext>
             </a:extLst>
           </p:cNvSpPr>
@@ -11180,7 +11513,7 @@
           <p:cNvSpPr>
             <a:extLst>
               <a:ext uri="smNativeData">
-                <pr:smNativeData xmlns:pr="smNativeData" xmlns="smNativeData" val="SMDATA_16_kRU2ahMAAAAlAAAAZQAAAA0AAAAAkAAAAEgAAACQAAAASAAAAAAAAAAAAAAAAAAAAAEAAABQAAAA/Knx0k1ioD8AAAAAAADwvwAAAAAAAOA/AAAAAAAA4D8AAAAAAADgPwAAAAAAAOA/AAAAAAAA4D8AAAAAAADgPwAAAAAAAOA/AAAAAAAA4D8CAAAAjAAAAAEAAAAAAAAA7/P4AP///wgAAAAAAAAAAAAAAAAAAAAAAAAAAAAAAAAAAAAAeAAAAAEAAABAAAAAAAAAAAAAAABaAAAAAAAAAAAAAAAAAAAAAAAAAAAAAAAAAAAAAAAAAAAAAAAAAAAAAAAAAAAAAAAAAAAAAAAAAAAAAAAAAAAAAAAAAAAAAAAAAAAAFAAAADwAAAAAAAAAAAAAAAAAAAAPAAAAAQAAACMAAAAjAAAAIwAAAB4AAAAAAAAAZAAAAGQAAAAAAAAAZAAAAGQAAAAVAAAAYAAAAAAAAAAAAAAADwAAACADAAAAAAAAAAAAAAEAAACgMgAAVgcAAKr4//8BAAAAf39/AAEAAABkAAAAAAAAABQAAABAHwAAAAAAACYAAAAAAAAAwOD//wAAAAAmAAAAZAAAABYAAABMAAAAAQAAAAAAAAAGAAAAAAAAAAEAAAC5xNAAPAAAAAAAAAAoAAAAZAAAAGQAAAAAAAAAy8vLADwAAAAAAAAAKAAAAGQAAABkAAAAAAAAABcAAAAUAAAAAAAAAAAAAAD/fwAA/38AAAAAAAAJAAAABAAAAAAAAAAeAAAAaAAAAAAAAAAAAAAAAAAAAAAAAAAAAAAAECcAABAnAAAAAAAAAAAAAAAAAAAAAAAAAAAAAAAAAAAAAAAAAAAAAHgAAAAAAAAAwMD/AAAAAAAAAAAAAAAAAAAAAABkAAAAAAAAAH9/fwAKAAAAIgAAABgAAAAAAAAAAAAAAAAAAAAAAAAAAAAAAAAAAAAkAAAAJAAAAAAAAAAHAAAAAAAAAAAAAAAAAAAAAAAAAAAAAAAAAAAAf39/ACUAAABYAAAAAAAAAAAAAAAAAAAAAAAAAAAAAAAAAAAAAAAAAAAAAAAAAAAAAAAAAAAAAAA/AAAAAAAAAKCGAQAAAAAAAAAAAAAAAAAMAAAAAQAAAAAAAAAAAAAAAAAAAB8AAABUAAAA7/P4AP///wEAAAAAAAAAAAAAAAAAAAAAAAAAAAAAAAAAAAAAAAAAAAAAAAB/f38AucTQAMvLywDAwP8Af39/AAAAAAAAAAAAAAAAAAAAAAAAAAAAIQAAABgAAAAUAAAAYAMAALgIAACAHwAA+CUAABAAAAAmAAAACAAAAP//////////MAAAABQAAAAAAAAAAAD//wAAAQAAAP//AAABAA=="/>
+                <pr:smNativeData xmlns:pr="smNativeData" xmlns="smNativeData" val="SMDATA_16_V2g2ahMAAAAlAAAAZQAAAA0AAAAAkAAAAEgAAACQAAAASAAAAAAAAAAAAAAAAAAAAAEAAABQAAAA/Knx0k1ioD8AAAAAAAAAAAAAAAAAAOA/AAAAAAAA4D8AAAAAAADgPwAAAAAAAOA/AAAAAAAA4D8AAAAAAADgPwAAAAAAAOA/AAAAAAAA4D8CAAAAjAAAAAEAAAAAAAAA7/P4AP///wgAAAAAAAAAAAAAAAAAAAAAAAAAAAAAAAAAAAAAeAAAAAEAAABAAAAAAAAAAAAAAABaAAAAAAAAAAAAAAAAAAAAAAAAAAAAAAAAAAAAAAAAAAAAAAAAAAAAAAAAAAAAAAAAAAAAAAAAAAAAAAAAAAAAAAAAAAAAAAAAAAAAFAAAADwAAAAAAAAAAAAAAAAAAAAPAAAAAQAAACMAAAAjAAAAIwAAAB4AAAAAAAAAZAAAAGQAAAAAAAAAZAAAAGQAAAAVAAAAYAAAAAAAAAAAAAAADwAAACADAAAAAAAAAAAAAAEAAACgMgAAVgcAAKr4//8BAAAAf39/AAEAAABkAAAAAAAAABQAAABAHwAAAAAAACYAAAAAAAAAwOD//wAAAAAmAAAAZAAAABYAAABMAAAAAQAAAAAAAAAGAAAAAAAAAAEAAAC5xNAAPAAAAAAAAAAoAAAAZAAAAGQAAAAAAAAAy8vLADwAAAAAAAAAKAAAAGQAAABkAAAAAAAAABcAAAAUAAAAAAAAAAAAAAD/fwAA/38AAAAAAAAJAAAABAAAAAAAAAAeAAAAaAAAAAAAAAAAAAAAAAAAAAAAAAAAAAAAECcAABAnAAAAAAAAAAAAAAAAAAAAAAAAAAAAAAAAAAAAAAAAAAAAAHgAAAAAAAAAwMD/AAAAAAAAAAAAAAAAAAAAAABkAAAAAAAAAH9/fwAKAAAAIgAAABgAAAAAAAAAAAAAAAAAAAAAAAAAAAAAAAAAAAAkAAAAJAAAAAAAAAAHAAAAAAAAAAAAAAAAAAAAAAAAAAAAAAAAAAAAf39/ACUAAABYAAAAAAAAAAAAAAAAAAAAAAAAAAAAAAAAAAAAAAAAAAAAAAAAAAAAAAAAAAAAAAA/AAAAAAAAAKCGAQAAAAAAAAAAAAAAAAAMAAAAAQAAAAAAAAAAAAAAAAAAAB8AAABUAAAA7/P4AP///wEAAAAAAAAAAAAAAAAAAAAAAAAAAAAAAAAAAAAAAAAAAAAAAAB/f38AucTQAMvLywDAwP8Af39/AAAAAAAAAAAAAAAAAAAAAAAAAAAAIQAAABgAAAAUAAAAYAMAALgIAACAHwAA+CUAABAAAAAmAAAACAAAAP//////////MAAAABQAAAAAAAAAAAD//wAAAQAAAP//AAABAA=="/>
               </a:ext>
             </a:extLst>
           </p:cNvSpPr>
@@ -11218,7 +11551,7 @@
             <a:picLocks noChangeAspect="1"/>
             <a:extLst>
               <a:ext uri="smNativeData">
-                <pr:smNativeData xmlns:pr="smNativeData" xmlns="smNativeData" val="SMDATA_18_kRU2ahMAAAAlAAAAEQAAAC0AAAAAkAAAAEgAAACQAAAASAAAAAAAAAAAAAAAAAAAAAEAAABQAAAAAAAAAAAA4D8AAAAAAADgPwAAAAAAAOA/AAAAAAAA4D8AAAAAAADgPwAAAAAAAOA/AAAAAAAA4D8AAAAAAADgPwAAAAAAAOA/AAAAAAAA4D8CAAAAjAAAAAAAAAAAAAAARHLEDP///wgAAAAAAAAAAAAAAAAAAAAAAAAAAAAAAAAAAAAAZAAAAAEAAABAAAAAAAAAAAAAAAAAAAAAAAAAAAAAAAAAAAAAAAAAAAAAAAAAAAAAAAAAAAAAAAAAAAAAAAAAAAAAAAAAAAAAAAAAAAAAAAAAAAAAAAAAAAAAAAAAAAAAFAAAADwAAAAAAAAAAAAAAAAAAAkUAAAAAQAAABQAAAAUAAAAFAAAAAEAAAAAAAAAZAAAAGQAAAAAAAAAZAAAAGQAAAAVAAAAYAAAAAAAAAAAAAAADwAAACADAAAAAAAAAAAAAAEAAACgMgAAVgcAAKr4//8BAAAAf39/AAEAAABkAAAAAAAAABQAAABAHwAAAAAAACYAAAAAAAAAwOD//wAAAAAmAAAAZAAAABYAAABMAAAAAAAAAAAAAAAEAAAAAAAAAAEAAADn5uYKAAAAACgAAAAoAAAAZAAAAGQAAAAAAAAAzMzMAAAAAABQAAAAUAAAAGQAAABkAAAAAAAAAAcAAAA4AAAAAAAAAAAAAAAAAAAA////AAAAAAAAAAAAAAAAAAAAAAAAAAAAAAAAAAAAAABkAAAAZAAAAAAAAAAjAAAABAAAAGQAAAAXAAAAFAAAAAAAAAAAAAAA/38AAP9/AAAAAAAACQAAAAQAAAAAAAAAHgAAAGgAAAAAAAAAAAAAAAAAAAAAAAAAAAAAABAnAAAQJwAAAAAAAAAAAAAAAAAAAAAAAAAAAAAAAAAAAAAAAAAAAAAUAAAAAAAAAMDA/wAAAAAAZAAAADIAAAAAAAAAZAAAAAAAAAB/f38ACgAAACIAAAAYAAAAAAAAAAAAAAAAAAAAAAAAAAAAAAAAAAAAJAAAACQAAAAAAAAABwAAAAAAAAAAAAAAAAAAAAAAAAAAAAAAAAAAAH9/fwAlAAAAWAAAAAAAAAAAAAAAAAAAAAAAAAAAAAAAAAAAAAAAAAAAAAAAAAAAAAAAAAAAAAAAPwAAAAAAAACghgEAAAAAAAAAAAAAAAAADAAAAAEAAAAAAAAAAAAAAAAAAAAfAAAAVAAAAERyxAX///8BAAAAAAAAAAAAAAAAAAAAAAAAAAAAAAAAAAAAAAAAAAAAAAACf39/AOfm5gPMzMwAwMD/AH9/fwAAAAAAAAAAAAAAAAD///8AAAAAACEAAAAYAAAAFAAAADgEAACQCQAAqB4AACAlAAAQAAAAJgAAAAgAAAD//////////zAAAAAUAAAAAAAAAAAA//8AAAEAAAD//wAAAQA="/>
+                <pr:smNativeData xmlns:pr="smNativeData" xmlns="smNativeData" val="SMDATA_18_V2g2ahMAAAAlAAAAEQAAAC0AAAAAkAAAAEgAAACQAAAASAAAAAAAAAAAAAAAAAAAAAEAAABQAAAAAAAAAAAA4D8AAAAAAADgPwAAAAAAAOA/AAAAAAAA4D8AAAAAAADgPwAAAAAAAOA/AAAAAAAA4D8AAAAAAADgPwAAAAAAAOA/AAAAAAAA4D8CAAAAjAAAAAAAAAAAAAAARHLEDP///wgAAAAAAAAAAAAAAAAAAAAAAAAAAAAAAAAAAAAAZAAAAAEAAABAAAAAAAAAAAAAAAAAAAAAAAAAAAAAAAAAAAAAAAAAAAAAAAAAAAAAAAAAAAAAAAAAAAAAAAAAAAAAAAAAAAAAAAAAAAAAAAAAAAAAAAAAAAAAAAAAAAAAFAAAADwAAAAAAAAAAAAAAAAAAAkUAAAAAQAAABQAAAAUAAAAFAAAAAEAAAAAAAAAZAAAAGQAAAAAAAAAZAAAAGQAAAAVAAAAYAAAAAAAAAAAAAAADwAAACADAAAAAAAAAAAAAAEAAACgMgAAVgcAAKr4//8BAAAAf39/AAEAAABkAAAAAAAAABQAAABAHwAAAAAAACYAAAAAAAAAwOD//wAAAAAmAAAAZAAAABYAAABMAAAAAAAAAAAAAAAEAAAAAAAAAAEAAADn5uYKAAAAACgAAAAoAAAAZAAAAGQAAAAAAAAAzMzMAAAAAABQAAAAUAAAAGQAAABkAAAAAAAAAAcAAAA4AAAAAAAAAAAAAAAAAAAA////AAAAAAAAAAAAAAAAAAAAAAAAAAAAAAAAAAAAAABkAAAAZAAAAAAAAAAjAAAABAAAAGQAAAAXAAAAFAAAAAAAAAAAAAAA/38AAP9/AAAAAAAACQAAAAQAAAAAAAAAHgAAAGgAAAAAAAAAAAAAAAAAAAAAAAAAAAAAABAnAAAQJwAAAAAAAAAAAAAAAAAAAAAAAAAAAAAAAAAAAAAAAAAAAAAUAAAAAAAAAMDA/wAAAAAAZAAAADIAAAAAAAAAZAAAAAAAAAB/f38ACgAAACIAAAAYAAAAAAAAAAAAAAAAAAAAAAAAAAAAAAAAAAAAJAAAACQAAAAAAAAABwAAAAAAAAAAAAAAAAAAAAAAAAAAAAAAAAAAAH9/fwAlAAAAWAAAAAAAAAAAAAAAAAAAAAAAAAAAAAAAAAAAAAAAAAAAAAAAAAAAAAAAAAAAAAAAPwAAAAAAAACghgEAAAAAAAAAAAAAAAAADAAAAAEAAAAAAAAAAAAAAAAAAAAfAAAAVAAAAERyxAX///8BAAAAAAAAAAAAAAAAAAAAAAAAAAAAAAAAAAAAAAAAAAAAAAACf39/AOfm5gPMzMwAwMD/AH9/fwAAAAAAAAAAAAAAAAD///8AAAAAACEAAAAYAAAAFAAAADgEAACQCQAAqB4AACAlAAAQAAAAJgAAAAgAAAD//////////zAAAAAUAAAAAAAAAAAA//8AAAEAAAD//wAAAQA="/>
               </a:ext>
             </a:extLst>
           </p:cNvPicPr>
@@ -11251,7 +11584,7 @@
           <p:cNvSpPr>
             <a:extLst>
               <a:ext uri="smNativeData">
-                <pr:smNativeData xmlns:pr="smNativeData" xmlns="smNativeData" val="SMDATA_16_kRU2ahMAAAAlAAAAZAAAAA0AAAAAkAAAAEgAAACQAAAASAAAAAAAAAAAAAAAAAAAAAEAAABQAAAAAAAAAAAA4D8AAAAAAADgPwAAAAAAAOA/AAAAAAAA4D8AAAAAAADgPwAAAAAAAOA/AAAAAAAA4D8AAAAAAADgPwAAAAAAAOA/AAAAAAAA4D8CAAAAjAAAAAAAAAAAAAAARHLEDP///wgAAAAAAAAAAAAAAAAAAAAAAAAAAAAAAAAAAAAAZAAAAAEAAABAAAAAAAAAAAAAAAAAAAAAAAAAAAAAAAAAAAAAAAAAAAAAAAAAAAAAAAAAAAAAAAAAAAAAAAAAAAAAAAAAAAAAAAAAAAAAAAAAAAAAAAAAAAAAAAAAAAAAFAAAADwAAAAAAAAAAAAAAAAAAAAPAAAAAQAAACMAAAAjAAAAIwAAAB4AAAAAAAAAZAAAAGQAAAAAAAAAZAAAAGQAAAAVAAAAYAAAAAAAAAAAAAAADwAAACADAAAAAAAAAAAAAAEAAACgMgAAVgcAAKr4//8BAAAAf39/AAEAAABkAAAAAAAAABQAAABAHwAAAAAAACYAAAAAAAAAwOD//wAAAAAmAAAAZAAAABYAAABMAAAAAAAAAAAAAAAEAAAAAAAAAAEAAADn5uYKAAAAACgAAAAoAAAAZAAAAGQAAAAAAAAAzMzMAAAAAABQAAAAUAAAAGQAAABkAAAAAAAAABcAAAAUAAAAAAAAAAAAAAD/fwAA/38AAAAAAAAJAAAABAAAAP////8eAAAAaAAAAAAAAAAAAAAAAAAAAAAAAAAAAAAAECcAABAnAAAAAAAAAAAAAAAAAAAAAAAAAAAAAAAAAAAAAAAAAAAAABQAAAAAAAAAwMD/AAAAAABkAAAAMgAAAAAAAABkAAAAAAAAAH9/fwAKAAAAIgAAABgAAAAAAAAAAAAAAAAAAAAAAAAAAAAAAAAAAAAkAAAAJAAAAAAAAAAHAAAAAAAAAAAAAAAAAAAAAAAAAAAAAAAAAAAAf39/ACUAAABYAAAAAAAAAAAAAAAAAAAAAAAAAAAAAAAAAAAAAAAAAAAAAAAAAAAAAAAAAAAAAAA/AAAAAAAAAKCGAQAAAAAAAAAAAAAAAAAMAAAAAQAAAAAAAAAAAAAAAAAAAB8AAABUAAAARHLEBf///wEAAAAAAAAAAAAAAAAAAAAAAAAAAAAAAAAAAAAAAAAAAAAAAAB/f38A5+bmA8zMzADAwP8Af39/AAAAAAAAAAAAAAAAAAAAAAAAAAAAIQAAABgAAAAUAAAAUCIAANALAABwRwAAICUAABAAAAAmAAAACAAAAP//////////MAAAABQAAAAAAAAAAAD//wAAAQAAAP//AAABAA=="/>
+                <pr:smNativeData xmlns:pr="smNativeData" xmlns="smNativeData" val="SMDATA_16_V2g2ahMAAAAlAAAAZAAAAA0AAAAAkAAAAEgAAACQAAAASAAAAAAAAAAAAAAAAAAAAAEAAABQAAAAAAAAAAAA4D8AAAAAAADgPwAAAAAAAOA/AAAAAAAA4D8AAAAAAADgPwAAAAAAAOA/AAAAAAAA4D8AAAAAAADgPwAAAAAAAOA/AAAAAAAA4D8CAAAAjAAAAAAAAAAAAAAARHLEDP///wgAAAAAAAAAAAAAAAAAAAAAAAAAAAAAAAAAAAAAZAAAAAEAAABAAAAAAAAAAAAAAAAAAAAAAAAAAAAAAAAAAAAAAAAAAAAAAAAAAAAAAAAAAAAAAAAAAAAAAAAAAAAAAAAAAAAAAAAAAAAAAAAAAAAAAAAAAAAAAAAAAAAAFAAAADwAAAAAAAAAAAAAAAAAAAAPAAAAAQAAACMAAAAjAAAAIwAAAB4AAAAAAAAAZAAAAGQAAAAAAAAAZAAAAGQAAAAVAAAAYAAAAAAAAAAAAAAADwAAACADAAAAAAAAAAAAAAEAAACgMgAAVgcAAKr4//8BAAAAf39/AAEAAABkAAAAAAAAABQAAABAHwAAAAAAACYAAAAAAAAAwOD//wAAAAAmAAAAZAAAABYAAABMAAAAAAAAAAAAAAAEAAAAAAAAAAEAAADn5uYKAAAAACgAAAAoAAAAZAAAAGQAAAAAAAAAzMzMAAAAAABQAAAAUAAAAGQAAABkAAAAAAAAABcAAAAUAAAAAAAAAAAAAAD/fwAA/38AAAAAAAAJAAAABAAAAP////8eAAAAaAAAAAAAAAAAAAAAAAAAAAAAAAAAAAAAECcAABAnAAAAAAAAAAAAAAAAAAAAAAAAAAAAAAAAAAAAAAAAAAAAABQAAAAAAAAAwMD/AAAAAABkAAAAMgAAAAAAAABkAAAAAAAAAH9/fwAKAAAAIgAAABgAAAAAAAAAAAAAAAAAAAAAAAAAAAAAAAAAAAAkAAAAJAAAAAAAAAAHAAAAAAAAAAAAAAAAAAAAAAAAAAAAAAAAAAAAf39/ACUAAABYAAAAAAAAAAAAAAAAAAAAAAAAAAAAAAAAAAAAAAAAAAAAAAAAAAAAAAAAAAAAAAA/AAAAAAAAAKCGAQAAAAAAAAAAAAAAAAAMAAAAAQAAAAAAAAAAAAAAAAAAAB8AAABUAAAARHLEBf///wEAAAAAAAAAAAAAAAAAAAAAAAAAAAAAAAAAAAAAAAAAAAAAAAB/f38A5+bmA8zMzADAwP8Af39/AAAAAAAAAAAAAAAAAAAAAAAAAAAAIQAAABgAAAAUAAAAUCIAANALAABwRwAAICUAAAAAAAAmAAAACAAAAP//////////MAAAABQAAAAAAAAAAAD//wAAAQAAAP//AAABAA=="/>
               </a:ext>
             </a:extLst>
           </p:cNvSpPr>
@@ -11410,6 +11743,20 @@
               </a:rPr>
               <a:t>movimentadas.</a:t>
             </a:r>
+            <a:endParaRPr lang="en-us" sz="1600" cap="none">
+              <a:solidFill>
+                <a:srgbClr val="283441"/>
+              </a:solidFill>
+            </a:endParaRPr>
+          </a:p>
+          <a:p>
+            <a:pPr marL="177800" indent="-177800" algn="l">
+              <a:spcAft>
+                <a:spcPts val="800"/>
+              </a:spcAft>
+              <a:buSzTx/>
+              <a:buChar char="•"/>
+            </a:pPr>
             <a:r>
               <a:rPr lang="en-us" sz="1600" b="1" cap="none">
                 <a:solidFill>
@@ -11528,7 +11875,7 @@
           <p:cNvSpPr>
             <a:extLst>
               <a:ext uri="smNativeData">
-                <pr:smNativeData xmlns:pr="smNativeData" xmlns="smNativeData" val="SMDATA_16_kRU2ahMAAAAlAAAAZAAAAA0AAAAAkAAAAEgAAACQAAAASAAAAAAAAAABAAAAAAAAAAEAAABQAAAAAAAAAAAA4D8AAAAAAADgPwAAAAAAAOA/AAAAAAAA4D8AAAAAAADgPwAAAAAAAOA/AAAAAAAA4D8AAAAAAADgPwAAAAAAAOA/AAAAAAAA4D8CAAAAjAAAAAAAAAAAAAAARHLEDP///wgAAAAAAAAAAAAAAAAAAAAAAAAAAAAAAAAAAAAAZAAAAAEAAABAAAAAAAAAAAAAAAAAAAAAAAAAAAAAAAAAAAAAAAAAAAAAAAAAAAAAAAAAAAAAAAAAAAAAAAAAAAAAAAAAAAAAAAAAAAAAAAAAAAAAAAAAAAAAAAAAAAAAFAAAADwAAAAAAAAAAAAAAAAAAAAPAAAAAQAAACMAAAAjAAAAIwAAAB4AAAAAAAAAZAAAAGQAAAAAAAAAZAAAAGQAAAAVAAAAYAAAAAAAAAAAAAAADwAAACADAAAAAAAAAAAAAAEAAACgMgAAVgcAAKr4//8BAAAAf39/AAEAAABkAAAAAAAAABQAAABAHwAAAAAAACYAAAAAAAAAwOD//wAAAAAmAAAAZAAAABYAAABMAAAAAAAAAAAAAAAEAAAAAAAAAAEAAADn5uYKAAAAACgAAAAoAAAAZAAAAGQAAAAAAAAAzMzMAAAAAABQAAAAUAAAAGQAAABkAAAAAAAAABcAAAAUAAAAAAAAAAAAAAD/fwAA/38AAAAAAAAJAAAABAAAAAAAAAAeAAAAaAAAAAAAAAAAAAAAAAAAAAAAAAAAAAAAECcAABAnAAAAAAAAAAAAAAAAAAAAAAAAAAAAAAAAAAAAAAAAAAAAABQAAAAAAAAAwMD/AAAAAABkAAAAMgAAAAAAAABkAAAAAAAAAH9/fwAKAAAAIgAAABgAAAAAAAAAAAAAAAAAAAAAAAAAAAAAAAAAAAAkAAAAJAAAAAAAAAAHAAAAAAAAAAAAAAAAAAAAAAAAAAAAAAAAAAAAf39/ACUAAABYAAAAAAAAAAAAAAAAAAAAAAAAAAAAAAAAAAAAAAAAAAAAAAAAAAAAAAAAAAAAAAA/AAAAAAAAAKCGAQAAAAAAAAAAAAAAAAAMAAAAAQAAAAAAAAAAAAAAAAAAAB8AAABUAAAARHLEBf///wEAAAAAAAAAAAAAAAAAAAAAAAAAAAAAAAAAAAAAAAAAAAAAAAB/f38A5+bmA8zMzADAwP8Af39/AAAAAAAAAAAAAAAAAAAAAAAAAAAAIQAAABgAAAAUAAAAYAMAACABAACgRwAA0AIAABAAAAAmAAAACAAAAP//////////MAAAABQAAAAAAAAAAAD//wAAAQAAAP//AAABAA=="/>
+                <pr:smNativeData xmlns:pr="smNativeData" xmlns="smNativeData" val="SMDATA_16_V2g2ahMAAAAlAAAAZAAAAA0AAAAAkAAAAEgAAACQAAAASAAAAAAAAAABAAAAAAAAAAEAAABQAAAAAAAAAAAA4D8AAAAAAADgPwAAAAAAAOA/AAAAAAAA4D8AAAAAAADgPwAAAAAAAOA/AAAAAAAA4D8AAAAAAADgPwAAAAAAAOA/AAAAAAAA4D8CAAAAjAAAAAAAAAAAAAAARHLEDP///wgAAAAAAAAAAAAAAAAAAAAAAAAAAAAAAAAAAAAAZAAAAAEAAABAAAAAAAAAAAAAAAAAAAAAAAAAAAAAAAAAAAAAAAAAAAAAAAAAAAAAAAAAAAAAAAAAAAAAAAAAAAAAAAAAAAAAAAAAAAAAAAAAAAAAAAAAAAAAAAAAAAAAFAAAADwAAAAAAAAAAAAAAAAAAAAPAAAAAQAAACMAAAAjAAAAIwAAAB4AAAAAAAAAZAAAAGQAAAAAAAAAZAAAAGQAAAAVAAAAYAAAAAAAAAAAAAAADwAAACADAAAAAAAAAAAAAAEAAACgMgAAVgcAAKr4//8BAAAAf39/AAEAAABkAAAAAAAAABQAAABAHwAAAAAAACYAAAAAAAAAwOD//wAAAAAmAAAAZAAAABYAAABMAAAAAAAAAAAAAAAEAAAAAAAAAAEAAADn5uYKAAAAACgAAAAoAAAAZAAAAGQAAAAAAAAAzMzMAAAAAABQAAAAUAAAAGQAAABkAAAAAAAAABcAAAAUAAAAAAAAAAAAAAD/fwAA/38AAAAAAAAJAAAABAAAAAAAAAAeAAAAaAAAAAAAAAAAAAAAAAAAAAAAAAAAAAAAECcAABAnAAAAAAAAAAAAAAAAAAAAAAAAAAAAAAAAAAAAAAAAAAAAABQAAAAAAAAAwMD/AAAAAABkAAAAMgAAAAAAAABkAAAAAAAAAH9/fwAKAAAAIgAAABgAAAAAAAAAAAAAAAAAAAAAAAAAAAAAAAAAAAAkAAAAJAAAAAAAAAAHAAAAAAAAAAAAAAAAAAAAAAAAAAAAAAAAAAAAf39/ACUAAABYAAAAAAAAAAAAAAAAAAAAAAAAAAAAAAAAAAAAAAAAAAAAAAAAAAAAAAAAAAAAAAA/AAAAAAAAAKCGAQAAAAAAAAAAAAAAAAAMAAAAAQAAAAAAAAAAAAAAAAAAAB8AAABUAAAARHLEBf///wEAAAAAAAAAAAAAAAAAAAAAAAAAAAAAAAAAAAAAAAAAAAAAAAB/f38A5+bmA8zMzADAwP8Af39/AAAAAAAAAAAAAAAAAAAAAAAAAAAAIQAAABgAAAAUAAAAYAMAACABAACgRwAA0AIAABAAAAAmAAAACAAAAP//////////MAAAABQAAAAAAAAAAAD//wAAAQAAAP//AAABAA=="/>
               </a:ext>
             </a:extLst>
           </p:cNvSpPr>
@@ -11556,7 +11903,7 @@
               <a:buNone/>
             </a:pPr>
             <a:r>
-              <a:rPr lang="en-us" sz="1200" b="1" cap="none" spc="40">
+              <a:rPr lang="en-us" sz="1200" b="1" cap="none" spc="8">
                 <a:solidFill>
                   <a:srgbClr val="E0A038"/>
                 </a:solidFill>
@@ -11564,7 +11911,7 @@
               <a:t>MAPAS · </a:t>
             </a:r>
             <a:r>
-              <a:rPr lang="en-us" sz="1200" b="1" cap="none" spc="40">
+              <a:rPr lang="en-us" sz="1200" b="1" cap="none" spc="8">
                 <a:solidFill>
                   <a:srgbClr val="E0A038"/>
                 </a:solidFill>
@@ -11581,7 +11928,7 @@
           <p:cNvSpPr>
             <a:extLst>
               <a:ext uri="smNativeData">
-                <pr:smNativeData xmlns:pr="smNativeData" xmlns="smNativeData" val="SMDATA_16_kRU2ahMAAAAlAAAAZAAAAA0AAAAAkAAAAEgAAACQAAAASAAAAAAAAAABAAAAAAAAAAEAAABQAAAAAAAAAAAA4D8AAAAAAADgPwAAAAAAAOA/AAAAAAAA4D8AAAAAAADgPwAAAAAAAOA/AAAAAAAA4D8AAAAAAADgPwAAAAAAAOA/AAAAAAAA4D8CAAAAjAAAAAAAAAAAAAAARHLEDP///wgAAAAAAAAAAAAAAAAAAAAAAAAAAAAAAAAAAAAAZAAAAAEAAABAAAAAAAAAAAAAAAAAAAAAAAAAAAAAAAAAAAAAAAAAAAAAAAAAAAAAAAAAAAAAAAAAAAAAAAAAAAAAAAAAAAAAAAAAAAAAAAAAAAAAAAAAAAAAAAAAAAAAFAAAADwAAAAAAAAAAAAAAAAAAAAPAAAAAQAAACMAAAAjAAAAIwAAAB4AAAAAAAAAZAAAAGQAAAAAAAAAZAAAAGQAAAAVAAAAYAAAAAAAAAAAAAAADwAAACADAAAAAAAAAAAAAAEAAACgMgAAVgcAAKr4//8BAAAAf39/AAEAAABkAAAAAAAAABQAAABAHwAAAAAAACYAAAAAAAAAwOD//wAAAAAmAAAAZAAAABYAAABMAAAAAAAAAAAAAAAEAAAAAAAAAAEAAADn5uYKAAAAACgAAAAoAAAAZAAAAGQAAAAAAAAAzMzMAAAAAABQAAAAUAAAAGQAAABkAAAAAAAAABcAAAAUAAAAAAAAAAAAAAD/fwAA/38AAAAAAAAJAAAABAAAAAIAAAAeAAAAaAAAAAAAAAAAAAAAAAAAAAAAAAAAAAAAECcAABAnAAAAAAAAAAAAAAAAAAAAAAAAAAAAAAAAAAAAAAAAAAAAABQAAAAAAAAAwMD/AAAAAABkAAAAMgAAAAAAAABkAAAAAAAAAH9/fwAKAAAAIgAAABgAAAAAAAAAAAAAAAAAAAAAAAAAAAAAAAAAAAAkAAAAJAAAAAAAAAAHAAAAAAAAAAAAAAAAAAAAAAAAAAAAAAAAAAAAf39/ACUAAABYAAAAAAAAAAAAAAAAAAAAAAAAAAAAAAAAAAAAAAAAAAAAAAAAAAAAAAAAAAAAAAA/AAAAAAAAAKCGAQAAAAAAAAAAAAAAAAAMAAAAAQAAAAAAAAAAAAAAAAAAAB8AAABUAAAARHLEBf///wEAAAAAAAAAAAAAAAAAAAAAAAAAAAAAAAAAAAAAAAAAAAAAAAB/f38A5+bmA8zMzADAwP8Af39/AAAAAAAAAAAAAAAAAAAAAAAAAAAAIQAAABgAAAAUAAAAYAMAAF0CAACgRwAA3QYAABAAAAAmAAAACAAAAP//////////MAAAABQAAAAAAAAAAAD//wAAAQAAAP//AAABAA=="/>
+                <pr:smNativeData xmlns:pr="smNativeData" xmlns="smNativeData" val="SMDATA_16_V2g2ahMAAAAlAAAAZAAAAA0AAAAAkAAAAEgAAACQAAAASAAAAAAAAAABAAAAAAAAAAEAAABQAAAAAAAAAAAA4D8AAAAAAADgPwAAAAAAAOA/AAAAAAAA4D8AAAAAAADgPwAAAAAAAOA/AAAAAAAA4D8AAAAAAADgPwAAAAAAAOA/AAAAAAAA4D8CAAAAjAAAAAAAAAAAAAAARHLEDP///wgAAAAAAAAAAAAAAAAAAAAAAAAAAAAAAAAAAAAAZAAAAAEAAABAAAAAAAAAAAAAAAAAAAAAAAAAAAAAAAAAAAAAAAAAAAAAAAAAAAAAAAAAAAAAAAAAAAAAAAAAAAAAAAAAAAAAAAAAAAAAAAAAAAAAAAAAAAAAAAAAAAAAFAAAADwAAAAAAAAAAAAAAAAAAAAPAAAAAQAAACMAAAAjAAAAIwAAAB4AAAAAAAAAZAAAAGQAAAAAAAAAZAAAAGQAAAAVAAAAYAAAAAAAAAAAAAAADwAAACADAAAAAAAAAAAAAAEAAACgMgAAVgcAAKr4//8BAAAAf39/AAEAAABkAAAAAAAAABQAAABAHwAAAAAAACYAAAAAAAAAwOD//wAAAAAmAAAAZAAAABYAAABMAAAAAAAAAAAAAAAEAAAAAAAAAAEAAADn5uYKAAAAACgAAAAoAAAAZAAAAGQAAAAAAAAAzMzMAAAAAABQAAAAUAAAAGQAAABkAAAAAAAAABcAAAAUAAAAAAAAAAAAAAD/fwAA/38AAAAAAAAJAAAABAAAAAIAAAAeAAAAaAAAAAAAAAAAAAAAAAAAAAAAAAAAAAAAECcAABAnAAAAAAAAAAAAAAAAAAAAAAAAAAAAAAAAAAAAAAAAAAAAABQAAAAAAAAAwMD/AAAAAABkAAAAMgAAAAAAAABkAAAAAAAAAH9/fwAKAAAAIgAAABgAAAAAAAAAAAAAAAAAAAAAAAAAAAAAAAAAAAAkAAAAJAAAAAAAAAAHAAAAAAAAAAAAAAAAAAAAAAAAAAAAAAAAAAAAf39/ACUAAABYAAAAAAAAAAAAAAAAAAAAAAAAAAAAAAAAAAAAAAAAAAAAAAAAAAAAAAAAAAAAAAA/AAAAAAAAAKCGAQAAAAAAAAAAAAAAAAAMAAAAAQAAAAAAAAAAAAAAAAAAAB8AAABUAAAARHLEBf///wEAAAAAAAAAAAAAAAAAAAAAAAAAAAAAAAAAAAAAAAAAAAAAAAB/f38A5+bmA8zMzADAwP8Af39/AAAAAAAAAAAAAAAAAAAAAAAAAAAAIQAAABgAAAAUAAAAYAMAAF0CAACgRwAA3QYAABAAAAAmAAAACAAAAP//////////MAAAABQAAAAAAAAAAAD//wAAAQAAAP//AAABAA=="/>
               </a:ext>
             </a:extLst>
           </p:cNvSpPr>
@@ -11651,7 +11998,7 @@
           <p:cNvSpPr>
             <a:extLst>
               <a:ext uri="smNativeData">
-                <pr:smNativeData xmlns:pr="smNativeData" xmlns="smNativeData" val="SMDATA_16_kRU2ahMAAAAlAAAAZQAAAA0AAAAAkAAAAEgAAACQAAAASAAAAAAAAAAAAAAAAAAAAAEAAABQAAAA220Xmus0oj8AAAAAAADwvwAAAAAAAOA/AAAAAAAA4D8AAAAAAADgPwAAAAAAAOA/AAAAAAAA4D8AAAAAAADgPwAAAAAAAOA/AAAAAAAA4D8CAAAAjAAAAAEAAAAAAAAA7/P4AP///wgAAAAAAAAAAAAAAAAAAAAAAAAAAAAAAAAAAAAAeAAAAAEAAABAAAAAAAAAAAAAAABaAAAAAAAAAAAAAAAAAAAAAAAAAAAAAAAAAAAAAAAAAAAAAAAAAAAAAAAAAAAAAAAAAAAAAAAAAAAAAAAAAAAAAAAAAAAAAAAAAAAAFAAAADwAAAAAAAAAAAAAAAAAAAAPAAAAAQAAACMAAAAjAAAAIwAAAB4AAAAAAAAAZAAAAGQAAAAAAAAAZAAAAGQAAAAVAAAAYAAAAAAAAAAAAAAADwAAACADAAAAAAAAAAAAAAEAAACgMgAAVgcAAKr4//8BAAAAf39/AAEAAABkAAAAAAAAABQAAABAHwAAAAAAACYAAAAAAAAAwOD//wAAAAAmAAAAZAAAABYAAABMAAAAAQAAAAAAAAAGAAAAAAAAAAEAAAC5xNAAPAAAAAAAAAAoAAAAZAAAAGQAAAAAAAAAy8vLADwAAAAAAAAAKAAAAGQAAABkAAAAAAAAABcAAAAUAAAAAAAAAAAAAAD/fwAA/38AAAAAAAAJAAAABAAAAIAwBToeAAAAaAAAAAAAAAAAAAAAAAAAAAAAAAAAAAAAECcAABAnAAAAAAAAAAAAAAAAAAAAAAAAAAAAAAAAAAAAAAAAAAAAAHgAAAAAAAAAwMD/AAAAAAAAAAAAAAAAAAAAAABkAAAAAAAAAH9/fwAKAAAAIgAAABgAAAAAAAAAAAAAAAAAAAAAAAAAAAAAAAAAAAAkAAAAJAAAAAAAAAAHAAAAAAAAAAAAAAAAAAAAAAAAAAAAAAAAAAAAf39/ACUAAABYAAAAAAAAAAAAAAAAAAAAAAAAAAAAAAAAAAAAAAAAAAAAAAAAAAAAAAAAAAAAAAA/AAAAAAAAAKCGAQAAAAAAAAAAAAAAAAAMAAAAAQAAAAAAAAAAAAAAAAAAAB8AAABUAAAA7/P4AP///wEAAAAAAAAAAAAAAAAAAAAAAAAAAAAAAAAAAAAAAAAAAAAAAAB/f38AucTQAMvLywDAwP8Af39/AAAAAAAAAAAAAAAAAAAAAAAAAAAAIQAAABgAAAAUAAAAYAMAALgIAABQNAAACCIAABAAAAAmAAAACAAAAP//////////MAAAABQAAAAAAAAAAAD//wAAAQAAAP//AAABAA=="/>
+                <pr:smNativeData xmlns:pr="smNativeData" xmlns="smNativeData" val="SMDATA_16_V2g2ahMAAAAlAAAAZQAAAA0AAAAAkAAAAEgAAACQAAAASAAAAAAAAAAAAAAAAAAAAAEAAABQAAAA220Xmus0oj8AAAAAAAAAAAAAAAAAAOA/AAAAAAAA4D8AAAAAAADgPwAAAAAAAOA/AAAAAAAA4D8AAAAAAADgPwAAAAAAAOA/AAAAAAAA4D8CAAAAjAAAAAEAAAAAAAAA7/P4AP///wgAAAAAAAAAAAAAAAAAAAAAAAAAAAAAAAAAAAAAeAAAAAEAAABAAAAAAAAAAAAAAABaAAAAAAAAAAAAAAAAAAAAAAAAAAAAAAAAAAAAAAAAAAAAAAAAAAAAAAAAAAAAAAAAAAAAAAAAAAAAAAAAAAAAAAAAAAAAAAAAAAAAFAAAADwAAAAAAAAAAAAAAAAAAAAPAAAAAQAAACMAAAAjAAAAIwAAAB4AAAAAAAAAZAAAAGQAAAAAAAAAZAAAAGQAAAAVAAAAYAAAAAAAAAAAAAAADwAAACADAAAAAAAAAAAAAAEAAACgMgAAVgcAAKr4//8BAAAAf39/AAEAAABkAAAAAAAAABQAAABAHwAAAAAAACYAAAAAAAAAwOD//wAAAAAmAAAAZAAAABYAAABMAAAAAQAAAAAAAAAGAAAAAAAAAAEAAAC5xNAAPAAAAAAAAAAoAAAAZAAAAGQAAAAAAAAAy8vLADwAAAAAAAAAKAAAAGQAAABkAAAAAAAAABcAAAAUAAAAAAAAAAAAAAD/fwAA/38AAAAAAAAJAAAABAAAAIAwBToeAAAAaAAAAAAAAAAAAAAAAAAAAAAAAAAAAAAAECcAABAnAAAAAAAAAAAAAAAAAAAAAAAAAAAAAAAAAAAAAAAAAAAAAHgAAAAAAAAAwMD/AAAAAAAAAAAAAAAAAAAAAABkAAAAAAAAAH9/fwAKAAAAIgAAABgAAAAAAAAAAAAAAAAAAAAAAAAAAAAAAAAAAAAkAAAAJAAAAAAAAAAHAAAAAAAAAAAAAAAAAAAAAAAAAAAAAAAAAAAAf39/ACUAAABYAAAAAAAAAAAAAAAAAAAAAAAAAAAAAAAAAAAAAAAAAAAAAAAAAAAAAAAAAAAAAAA/AAAAAAAAAKCGAQAAAAAAAAAAAAAAAAAMAAAAAQAAAAAAAAAAAAAAAAAAAB8AAABUAAAA7/P4AP///wEAAAAAAAAAAAAAAAAAAAAAAAAAAAAAAAAAAAAAAAAAAAAAAAB/f38AucTQAMvLywDAwP8Af39/AAAAAAAAAAAAAAAAAAAAAAAAAAAAIQAAABgAAAAUAAAAYAMAALgIAABQNAAACCIAABAAAAAmAAAACAAAAP//////////MAAAABQAAAAAAAAAAAD//wAAAQAAAP//AAABAA=="/>
               </a:ext>
             </a:extLst>
           </p:cNvSpPr>
@@ -11689,7 +12036,7 @@
             <a:picLocks noChangeAspect="1"/>
             <a:extLst>
               <a:ext uri="smNativeData">
-                <pr:smNativeData xmlns:pr="smNativeData" xmlns="smNativeData" val="SMDATA_18_kRU2ahMAAAAlAAAAEQAAAC0AAAAAkAAAAEgAAACQAAAASAAAAAAAAAAAAAAAAAAAAAEAAABQAAAAAAAAAAAA4D8AAAAAAADgPwAAAAAAAOA/AAAAAAAA4D8AAAAAAADgPwAAAAAAAOA/AAAAAAAA4D8AAAAAAADgPwAAAAAAAOA/AAAAAAAA4D8CAAAAjAAAAAAAAAAAAAAARHLEDP///wgAAAAAAAAAAAAAAAAAAAAAAAAAAAAAAAAAAAAAZAAAAAEAAABAAAAAAAAAAAAAAAAAAAAAAAAAAAAAAAAAAAAAAAAAAAAAAAAAAAAAAAAAAAAAAAAAAAAAAAAAAAAAAAAAAAAAAAAAAAAAAAAAAAAAAAAAAAAAAAAAAAAAFAAAADwAAAAAAAAAAAAAAAAAAAkUAAAAAQAAABQAAAAUAAAAFAAAAAEAAAAAAAAAZAAAAGQAAAAAAAAAZAAAAGQAAAAVAAAAYAAAAAAAAAAAAAAADwAAACADAAAAAAAAAAAAAAEAAACgMgAAVgcAAKr4//8BAAAAf39/AAEAAABkAAAAAAAAABQAAABAHwAAAAAAACYAAAAAAAAAwOD//wAAAAAmAAAAZAAAABYAAABMAAAAAAAAAAAAAAAEAAAAAAAAAAEAAADn5uYKAAAAACgAAAAoAAAAZAAAAGQAAAAAAAAAzMzMAAAAAABQAAAAUAAAAGQAAABkAAAAAAAAAAcAAAA4AAAAAAAAAAAAAAAAAAAA////AAAAAAAAAAAAAAAAAAAAAAAAAAAAAAAAAAAAAABkAAAAZAAAAAAAAAAjAAAABAAAAGQAAAAXAAAAFAAAAAAAAAAAAAAA/38AAP9/AAAAAAAACQAAAAQAAAAAAAAAHgAAAGgAAAAAAAAAAAAAAAAAAAAAAAAAAAAAABAnAAAQJwAAAAAAAAAAAAAAAAAAAAAAAAAAAAAAAAAAAAAAAAAAAAAUAAAAAAAAAMDA/wAAAAAAZAAAADIAAAAAAAAAZAAAAAAAAAB/f38ACgAAACIAAAAYAAAAAAAAAAAAAAAAAAAAAAAAAAAAAAAAAAAAJAAAACQAAAAAAAAABwAAAAAAAAAAAAAAAAAAAAAAAAAAAAAAAAAAAH9/fwAlAAAAWAAAAAAAAAAAAAAAAAAAAAAAAAAAAAAAAAAAAAAAAAAAAAAAAAAAAAAAAAAAAAAAPwAAAAAAAACghgEAAAAAAAAAAAAAAAAADAAAAAEAAAAAAAAAAAAAAAAAAAAfAAAAVAAAAERyxAX///8BAAAAAAAAAAAAAAAAAAAAAAAAAAAAAAAAAAAAAAAAAAAAAAACf39/AOfm5gPMzMwAwMD/AH9/fwAAAAAAAAAAAAAAAAD///8AAAAAACEAAAAYAAAAFAAAADgEAACQCQAAeDMAADAhAAAQAAAAJgAAAAgAAAD//////////zAAAAAUAAAAAAAAAAAA//8AAAEAAAD//wAAAQA="/>
+                <pr:smNativeData xmlns:pr="smNativeData" xmlns="smNativeData" val="SMDATA_18_V2g2ahMAAAAlAAAAEQAAAC0AAAAAkAAAAEgAAACQAAAASAAAAAAAAAAAAAAAAAAAAAEAAABQAAAAAAAAAAAA4D8AAAAAAADgPwAAAAAAAOA/AAAAAAAA4D8AAAAAAADgPwAAAAAAAOA/AAAAAAAA4D8AAAAAAADgPwAAAAAAAOA/AAAAAAAA4D8CAAAAjAAAAAAAAAAAAAAARHLEDP///wgAAAAAAAAAAAAAAAAAAAAAAAAAAAAAAAAAAAAAZAAAAAEAAABAAAAAAAAAAAAAAAAAAAAAAAAAAAAAAAAAAAAAAAAAAAAAAAAAAAAAAAAAAAAAAAAAAAAAAAAAAAAAAAAAAAAAAAAAAAAAAAAAAAAAAAAAAAAAAAAAAAAAFAAAADwAAAAAAAAAAAAAAAAAAAkUAAAAAQAAABQAAAAUAAAAFAAAAAEAAAAAAAAAZAAAAGQAAAAAAAAAZAAAAGQAAAAVAAAAYAAAAAAAAAAAAAAADwAAACADAAAAAAAAAAAAAAEAAACgMgAAVgcAAKr4//8BAAAAf39/AAEAAABkAAAAAAAAABQAAABAHwAAAAAAACYAAAAAAAAAwOD//wAAAAAmAAAAZAAAABYAAABMAAAAAAAAAAAAAAAEAAAAAAAAAAEAAADn5uYKAAAAACgAAAAoAAAAZAAAAGQAAAAAAAAAzMzMAAAAAABQAAAAUAAAAGQAAABkAAAAAAAAAAcAAAA4AAAAAAAAAAAAAAAAAAAA////AAAAAAAAAAAAAAAAAAAAAAAAAAAAAAAAAAAAAABkAAAAZAAAAAAAAAAjAAAABAAAAGQAAAAXAAAAFAAAAAAAAAAAAAAA/38AAP9/AAAAAAAACQAAAAQAAAAAAAAAHgAAAGgAAAAAAAAAAAAAAAAAAAAAAAAAAAAAABAnAAAQJwAAAAAAAAAAAAAAAAAAAAAAAAAAAAAAAAAAAAAAAAAAAAAUAAAAAAAAAMDA/wAAAAAAZAAAADIAAAAAAAAAZAAAAAAAAAB/f38ACgAAACIAAAAYAAAAAAAAAAAAAAAAAAAAAAAAAAAAAAAAAAAAJAAAACQAAAAAAAAABwAAAAAAAAAAAAAAAAAAAAAAAAAAAAAAAAAAAH9/fwAlAAAAWAAAAAAAAAAAAAAAAAAAAAAAAAAAAAAAAAAAAAAAAAAAAAAAAAAAAAAAAAAAAAAAPwAAAAAAAACghgEAAAAAAAAAAAAAAAAADAAAAAEAAAAAAAAAAAAAAAAAAAAfAAAAVAAAAERyxAX///8BAAAAAAAAAAAAAAAAAAAAAAAAAAAAAAAAAAAAAAAAAAAAAAACf39/AOfm5gPMzMwAwMD/AH9/fwAAAAAAAAAAAAAAAAD///8AAAAAACEAAAAYAAAAFAAAADgEAACQCQAAeDMAADAhAAAQAAAAJgAAAAgAAAD//////////zAAAAAUAAAAAAAAAAAA//8AAAEAAAD//wAAAQA="/>
               </a:ext>
             </a:extLst>
           </p:cNvPicPr>
@@ -11722,7 +12069,7 @@
           <p:cNvSpPr>
             <a:extLst>
               <a:ext uri="smNativeData">
-                <pr:smNativeData xmlns:pr="smNativeData" xmlns="smNativeData" val="SMDATA_16_kRU2ahMAAAAlAAAAZAAAAA0AAAAAkAAAAEgAAACQAAAASAAAAAAAAAAAAAAAAAAAAAEAAABQAAAAAAAAAAAA4D8AAAAAAADgPwAAAAAAAOA/AAAAAAAA4D8AAAAAAADgPwAAAAAAAOA/AAAAAAAA4D8AAAAAAADgPwAAAAAAAOA/AAAAAAAA4D8CAAAAjAAAAAAAAAAAAAAARHLEDP///wgAAAAAAAAAAAAAAAAAAAAAAAAAAAAAAAAAAAAAZAAAAAEAAABAAAAAAAAAAAAAAAAAAAAAAAAAAAAAAAAAAAAAAAAAAAAAAAAAAAAAAAAAAAAAAAAAAAAAAAAAAAAAAAAAAAAAAAAAAAAAAAAAAAAAAAAAAAAAAAAAAAAAFAAAADwAAAAAAAAAAAAAAAAAAAAPAAAAAQAAACMAAAAjAAAAIwAAAB4AAAAAAAAAZAAAAGQAAAAAAAAAZAAAAGQAAAAVAAAAYAAAAAAAAAAAAAAADwAAACADAAAAAAAAAAAAAAEAAACgMgAAVgcAAKr4//8BAAAAf39/AAEAAABkAAAAAAAAABQAAABAHwAAAAAAACYAAAAAAAAAwOD//wAAAAAmAAAAZAAAABYAAABMAAAAAAAAAAAAAAAEAAAAAAAAAAEAAADn5uYKAAAAACgAAAAoAAAAZAAAAGQAAAAAAAAAzMzMAAAAAABQAAAAUAAAAGQAAABkAAAAAAAAABcAAAAUAAAAAAAAAAAAAAD/fwAA/38AAAAAAAAJAAAABAAAADgAAAAeAAAAaAAAAAAAAAAAAAAAAAAAAAAAAAAAAAAAECcAABAnAAAAAAAAAAAAAAAAAAAAAAAAAAAAAAAAAAAAAAAAAAAAABQAAAAAAAAAwMD/AAAAAABkAAAAMgAAAAAAAABkAAAAAAAAAH9/fwAKAAAAIgAAABgAAAAAAAAAAAAAAAAAAAAAAAAAAAAAAAAAAAAkAAAAJAAAAAAAAAAHAAAAAAAAAAAAAAAAAAAAAAAAAAAAAAAAAAAAf39/ACUAAABYAAAAAAAAAAAAAAAAAAAAAAAAAAAAAAAAAAAAAAAAAAAAAAAAAAAAAAAAAAAAAAA/AAAAAAAAAKCGAQAAAAAAAAAAAAAAAAAMAAAAAQAAAAAAAAAAAAAAAAAAAB8AAABUAAAARHLEBf///wEAAAAAAAAAAAAAAAAAAAAAAAAAAAAAAAAAAAAAAAAAAAAAAAB/f38A5+bmA8zMzADAwP8Af39/AAAAAAAAAAAAAAAAAAAAAAAAAAAAIQAAABgAAAAUAAAAcDUAAEALAAAASAAAkCQAAAAAAAAmAAAACAAAAP//////////MAAAABQAAAAAAAAAAAD//wAAAQAAAP//AAABAA=="/>
+                <pr:smNativeData xmlns:pr="smNativeData" xmlns="smNativeData" val="SMDATA_16_V2g2ahMAAAAlAAAAZAAAAA0AAAAAkAAAAEgAAACQAAAASAAAAAAAAAAAAAAAAAAAAAEAAABQAAAAAAAAAAAA4D8AAAAAAADgPwAAAAAAAOA/AAAAAAAA4D8AAAAAAADgPwAAAAAAAOA/AAAAAAAA4D8AAAAAAADgPwAAAAAAAOA/AAAAAAAA4D8CAAAAjAAAAAAAAAAAAAAARHLEDP///wgAAAAAAAAAAAAAAAAAAAAAAAAAAAAAAAAAAAAAZAAAAAEAAABAAAAAAAAAAAAAAAAAAAAAAAAAAAAAAAAAAAAAAAAAAAAAAAAAAAAAAAAAAAAAAAAAAAAAAAAAAAAAAAAAAAAAAAAAAAAAAAAAAAAAAAAAAAAAAAAAAAAAFAAAADwAAAAAAAAAAAAAAAAAAAAPAAAAAQAAACMAAAAjAAAAIwAAAB4AAAAAAAAAZAAAAGQAAAAAAAAAZAAAAGQAAAAVAAAAYAAAAAAAAAAAAAAADwAAACADAAAAAAAAAAAAAAEAAACgMgAAVgcAAKr4//8BAAAAf39/AAEAAABkAAAAAAAAABQAAABAHwAAAAAAACYAAAAAAAAAwOD//wAAAAAmAAAAZAAAABYAAABMAAAAAAAAAAAAAAAEAAAAAAAAAAEAAADn5uYKAAAAACgAAAAoAAAAZAAAAGQAAAAAAAAAzMzMAAAAAABQAAAAUAAAAGQAAABkAAAAAAAAABcAAAAUAAAAAAAAAAAAAAD/fwAA/38AAAAAAAAJAAAABAAAADgAAAAeAAAAaAAAAAAAAAAAAAAAAAAAAAAAAAAAAAAAECcAABAnAAAAAAAAAAAAAAAAAAAAAAAAAAAAAAAAAAAAAAAAAAAAABQAAAAAAAAAwMD/AAAAAABkAAAAMgAAAAAAAABkAAAAAAAAAH9/fwAKAAAAIgAAABgAAAAAAAAAAAAAAAAAAAAAAAAAAAAAAAAAAAAkAAAAJAAAAAAAAAAHAAAAAAAAAAAAAAAAAAAAAAAAAAAAAAAAAAAAf39/ACUAAABYAAAAAAAAAAAAAAAAAAAAAAAAAAAAAAAAAAAAAAAAAAAAAAAAAAAAAAAAAAAAAAA/AAAAAAAAAKCGAQAAAAAAAAAAAAAAAAAMAAAAAQAAAAAAAAAAAAAAAAAAAB8AAABUAAAARHLEBf///wEAAAAAAAAAAAAAAAAAAAAAAAAAAAAAAAAAAAAAAAAAAAAAAAB/f38A5+bmA8zMzADAwP8Af39/AAAAAAAAAAAAAAAAAAAAAAAAAAAAIQAAABgAAAAUAAAAcDUAAEALAAAASAAAkCQAAAAAAAAmAAAACAAAAP//////////MAAAABQAAAAAAAAAAAD//wAAAQAAAP//AAABAA=="/>
               </a:ext>
             </a:extLst>
           </p:cNvSpPr>
@@ -11937,76 +12284,6 @@
               <a:t>às 11 e 16 horas</a:t>
             </a:r>
           </a:p>
-          <a:p>
-            <a:pPr marL="177800" indent="-177800" algn="l">
-              <a:spcAft>
-                <a:spcPts val="800"/>
-              </a:spcAft>
-              <a:buSzTx/>
-              <a:buChar char="•"/>
-            </a:pPr>
-            <a:r>
-              <a:rPr lang="en-us" sz="1400" b="1" cap="none">
-                <a:solidFill>
-                  <a:srgbClr val="283441"/>
-                </a:solidFill>
-              </a:rPr>
-              <a:t>Observado </a:t>
-            </a:r>
-            <a:r>
-              <a:rPr lang="en-us" sz="1400" b="1" cap="none">
-                <a:solidFill>
-                  <a:srgbClr val="283441"/>
-                </a:solidFill>
-              </a:rPr>
-              <a:t>nos dados — </a:t>
-            </a:r>
-            <a:r>
-              <a:rPr lang="en-us" sz="1400" b="1" cap="none">
-                <a:solidFill>
-                  <a:srgbClr val="283441"/>
-                </a:solidFill>
-              </a:rPr>
-              <a:t>descreve o </a:t>
-            </a:r>
-            <a:r>
-              <a:rPr lang="en-us" sz="1400" b="1" cap="none">
-                <a:solidFill>
-                  <a:srgbClr val="283441"/>
-                </a:solidFill>
-              </a:rPr>
-              <a:t>padrão, </a:t>
-            </a:r>
-            <a:r>
-              <a:rPr lang="en-us" sz="1400" b="1" cap="none">
-                <a:solidFill>
-                  <a:srgbClr val="283441"/>
-                </a:solidFill>
-              </a:rPr>
-              <a:t>não </a:t>
-            </a:r>
-            <a:r>
-              <a:rPr lang="en-us" sz="1400" b="1" cap="none">
-                <a:solidFill>
-                  <a:srgbClr val="283441"/>
-                </a:solidFill>
-              </a:rPr>
-              <a:t>afirma </a:t>
-            </a:r>
-            <a:r>
-              <a:rPr lang="en-us" sz="1400" b="1" cap="none">
-                <a:solidFill>
-                  <a:srgbClr val="283441"/>
-                </a:solidFill>
-              </a:rPr>
-              <a:t>causa.</a:t>
-            </a:r>
-            <a:endParaRPr lang="en-us" sz="1400" cap="none">
-              <a:solidFill>
-                <a:srgbClr val="283441"/>
-              </a:solidFill>
-            </a:endParaRPr>
-          </a:p>
         </p:txBody>
       </p:sp>
       <p:sp>
@@ -12015,7 +12292,7 @@
           <p:cNvSpPr>
             <a:extLst>
               <a:ext uri="smNativeData">
-                <pr:smNativeData xmlns:pr="smNativeData" xmlns="smNativeData" val="SMDATA_16_kRU2ahMAAAAlAAAAZAAAAA0AAAAAkAAAAEgAAACQAAAASAAAAAAAAAABAAAAAAAAAAEAAABQAAAAAAAAAAAA4D8AAAAAAADgPwAAAAAAAOA/AAAAAAAA4D8AAAAAAADgPwAAAAAAAOA/AAAAAAAA4D8AAAAAAADgPwAAAAAAAOA/AAAAAAAA4D8CAAAAjAAAAAAAAAAAAAAARHLEDP///wgAAAAAAAAAAAAAAAAAAAAAAAAAAAAAAAAAAAAAZAAAAAEAAABAAAAAAAAAAAAAAAAAAAAAAAAAAAAAAAAAAAAAAAAAAAAAAAAAAAAAAAAAAAAAAAAAAAAAAAAAAAAAAAAAAAAAAAAAAAAAAAAAAAAAAAAAAAAAAAAAAAAAFAAAADwAAAAAAAAAAAAAAAAAAAAPAAAAAQAAACMAAAAjAAAAIwAAAB4AAAAAAAAAZAAAAGQAAAAAAAAAZAAAAGQAAAAVAAAAYAAAAAAAAAAAAAAADwAAACADAAAAAAAAAAAAAAEAAACgMgAAVgcAAKr4//8BAAAAf39/AAEAAABkAAAAAAAAABQAAABAHwAAAAAAACYAAAAAAAAAwOD//wAAAAAmAAAAZAAAABYAAABMAAAAAAAAAAAAAAAEAAAAAAAAAAEAAADn5uYKAAAAACgAAAAoAAAAZAAAAGQAAAAAAAAAzMzMAAAAAABQAAAAUAAAAGQAAABkAAAAAAAAABcAAAAUAAAAAAAAAAAAAAD/fwAA/38AAAAAAAAJAAAABAAAACM7AAAeAAAAaAAAAAAAAAAAAAAAAAAAAAAAAAAAAAAAECcAABAnAAAAAAAAAAAAAAAAAAAAAAAAAAAAAAAAAAAAAAAAAAAAABQAAAAAAAAAwMD/AAAAAABkAAAAMgAAAAAAAABkAAAAAAAAAH9/fwAKAAAAIgAAABgAAAAAAAAAAAAAAAAAAAAAAAAAAAAAAAAAAAAkAAAAJAAAAAAAAAAHAAAAAAAAAAAAAAAAAAAAAAAAAAAAAAAAAAAAf39/ACUAAABYAAAAAAAAAAAAAAAAAAAAAAAAAAAAAAAAAAAAAAAAAAAAAAAAAAAAAAAAAAAAAAA/AAAAAAAAAKCGAQAAAAAAAAAAAAAAAAAMAAAAAQAAAAAAAAAAAAAAAAAAAB8AAABUAAAARHLEBf///wEAAAAAAAAAAAAAAAAAAAAAAAAAAAAAAAAAAAAAAAAAAAAAAAB/f38A5+bmA8zMzADAwP8Af39/AAAAAAAAAAAAAAAAAAAAAAAAAAAAIQAAABgAAAAUAAAAYAMAAJgiAABQNAAASCQAABAAAAAmAAAACAAAAP//////////MAAAABQAAAAAAAAAAAD//wAAAQAAAP//AAABAA=="/>
+                <pr:smNativeData xmlns:pr="smNativeData" xmlns="smNativeData" val="SMDATA_16_V2g2ahMAAAAlAAAAZAAAAA0AAAAAkAAAAEgAAACQAAAASAAAAAAAAAABAAAAAAAAAAEAAABQAAAAAAAAAAAA4D8AAAAAAADgPwAAAAAAAOA/AAAAAAAA4D8AAAAAAADgPwAAAAAAAOA/AAAAAAAA4D8AAAAAAADgPwAAAAAAAOA/AAAAAAAA4D8CAAAAjAAAAAAAAAAAAAAARHLEDP///wgAAAAAAAAAAAAAAAAAAAAAAAAAAAAAAAAAAAAAZAAAAAEAAABAAAAAAAAAAAAAAAAAAAAAAAAAAAAAAAAAAAAAAAAAAAAAAAAAAAAAAAAAAAAAAAAAAAAAAAAAAAAAAAAAAAAAAAAAAAAAAAAAAAAAAAAAAAAAAAAAAAAAFAAAADwAAAAAAAAAAAAAAAAAAAAPAAAAAQAAACMAAAAjAAAAIwAAAB4AAAAAAAAAZAAAAGQAAAAAAAAAZAAAAGQAAAAVAAAAYAAAAAAAAAAAAAAADwAAACADAAAAAAAAAAAAAAEAAACgMgAAVgcAAKr4//8BAAAAf39/AAEAAABkAAAAAAAAABQAAABAHwAAAAAAACYAAAAAAAAAwOD//wAAAAAmAAAAZAAAABYAAABMAAAAAAAAAAAAAAAEAAAAAAAAAAEAAADn5uYKAAAAACgAAAAoAAAAZAAAAGQAAAAAAAAAzMzMAAAAAABQAAAAUAAAAGQAAABkAAAAAAAAABcAAAAUAAAAAAAAAAAAAAD/fwAA/38AAAAAAAAJAAAABAAAACM7AAAeAAAAaAAAAAAAAAAAAAAAAAAAAAAAAAAAAAAAECcAABAnAAAAAAAAAAAAAAAAAAAAAAAAAAAAAAAAAAAAAAAAAAAAABQAAAAAAAAAwMD/AAAAAABkAAAAMgAAAAAAAABkAAAAAAAAAH9/fwAKAAAAIgAAABgAAAAAAAAAAAAAAAAAAAAAAAAAAAAAAAAAAAAkAAAAJAAAAAAAAAAHAAAAAAAAAAAAAAAAAAAAAAAAAAAAAAAAAAAAf39/ACUAAABYAAAAAAAAAAAAAAAAAAAAAAAAAAAAAAAAAAAAAAAAAAAAAAAAAAAAAAAAAAAAAAA/AAAAAAAAAKCGAQAAAAAAAAAAAAAAAAAMAAAAAQAAAAAAAAAAAAAAAAAAAB8AAABUAAAARHLEBf///wEAAAAAAAAAAAAAAAAAAAAAAAAAAAAAAAAAAAAAAAAAAAAAAAB/f38A5+bmA8zMzADAwP8Af39/AAAAAAAAAAAAAAAAAAAAAAAAAAAAIQAAABgAAAAUAAAAYAMAAJgiAABQNAAASCQAABAAAAAmAAAACAAAAP//////////MAAAABQAAAAAAAAAAAD//wAAAQAAAP//AAABAA=="/>
               </a:ext>
             </a:extLst>
           </p:cNvSpPr>
@@ -12164,7 +12441,7 @@
           <p:cNvSpPr>
             <a:extLst>
               <a:ext uri="smNativeData">
-                <pr:smNativeData xmlns:pr="smNativeData" xmlns="smNativeData" val="SMDATA_16_kRU2ahMAAAAlAAAAZAAAAA0AAAAAkAAAAEgAAACQAAAASAAAAAAAAAABAAAAAAAAAAEAAABQAAAAAAAAAAAA4D8AAAAAAADgPwAAAAAAAOA/AAAAAAAA4D8AAAAAAADgPwAAAAAAAOA/AAAAAAAA4D8AAAAAAADgPwAAAAAAAOA/AAAAAAAA4D8CAAAAjAAAAAAAAAAAAAAARHLEDP///wgAAAAAAAAAAAAAAAAAAAAAAAAAAAAAAAAAAAAAZAAAAAEAAABAAAAAAAAAAAAAAAAAAAAAAAAAAAAAAAAAAAAAAAAAAAAAAAAAAAAAAAAAAAAAAAAAAAAAAAAAAAAAAAAAAAAAAAAAAAAAAAAAAAAAAAAAAAAAAAAAAAAAFAAAADwAAAAAAAAAAAAAAAAAAAAPAAAAAQAAACMAAAAjAAAAIwAAAB4AAAAAAAAAZAAAAGQAAAAAAAAAZAAAAGQAAAAVAAAAYAAAAAAAAAAAAAAADwAAACADAAAAAAAAAAAAAAEAAACgMgAAVgcAAKr4//8BAAAAf39/AAEAAABkAAAAAAAAABQAAABAHwAAAAAAACYAAAAAAAAAwOD//wAAAAAmAAAAZAAAABYAAABMAAAAAAAAAAAAAAAEAAAAAAAAAAEAAADn5uYKAAAAACgAAAAoAAAAZAAAAGQAAAAAAAAAzMzMAAAAAABQAAAAUAAAAGQAAABkAAAAAAAAABcAAAAUAAAAAAAAAAAAAAD/fwAA/38AAAAAAAAJAAAABAAAAAAHaZweAAAAaAAAAAAAAAAAAAAAAAAAAAAAAAAAAAAAECcAABAnAAAAAAAAAAAAAAAAAAAAAAAAAAAAAAAAAAAAAAAAAAAAABQAAAAAAAAAwMD/AAAAAABkAAAAMgAAAAAAAABkAAAAAAAAAH9/fwAKAAAAIgAAABgAAAAAAAAAAAAAAAAAAAAAAAAAAAAAAAAAAAAkAAAAJAAAAAAAAAAHAAAAAAAAAAAAAAAAAAAAAAAAAAAAAAAAAAAAf39/ACUAAABYAAAAAAAAAAAAAAAAAAAAAAAAAAAAAAAAAAAAAAAAAAAAAAAAAAAAAAAAAAAAAAA/AAAAAAAAAKCGAQAAAAAAAAAAAAAAAAAMAAAAAQAAAAAAAAAAAAAAAAAAAB8AAABUAAAARHLEBf///wEAAAAAAAAAAAAAAAAAAAAAAAAAAAAAAAAAAAAAAAAAAAAAAAB/f38A5+bmA8zMzADAwP8Af39/AAAAAAAAAAAAAAAAAAAAAAAAAAAAIQAAABgAAAAUAAAAYAMAACABAACgRwAA0AIAABAAAAAmAAAACAAAAP//////////MAAAABQAAAAAAAAAAAD//wAAAQAAAP//AAABAA=="/>
+                <pr:smNativeData xmlns:pr="smNativeData" xmlns="smNativeData" val="SMDATA_16_V2g2ahMAAAAlAAAAZAAAAA0AAAAAkAAAAEgAAACQAAAASAAAAAAAAAABAAAAAAAAAAEAAABQAAAAAAAAAAAA4D8AAAAAAADgPwAAAAAAAOA/AAAAAAAA4D8AAAAAAADgPwAAAAAAAOA/AAAAAAAA4D8AAAAAAADgPwAAAAAAAOA/AAAAAAAA4D8CAAAAjAAAAAAAAAAAAAAARHLEDP///wgAAAAAAAAAAAAAAAAAAAAAAAAAAAAAAAAAAAAAZAAAAAEAAABAAAAAAAAAAAAAAAAAAAAAAAAAAAAAAAAAAAAAAAAAAAAAAAAAAAAAAAAAAAAAAAAAAAAAAAAAAAAAAAAAAAAAAAAAAAAAAAAAAAAAAAAAAAAAAAAAAAAAFAAAADwAAAAAAAAAAAAAAAAAAAAPAAAAAQAAACMAAAAjAAAAIwAAAB4AAAAAAAAAZAAAAGQAAAAAAAAAZAAAAGQAAAAVAAAAYAAAAAAAAAAAAAAADwAAACADAAAAAAAAAAAAAAEAAACgMgAAVgcAAKr4//8BAAAAf39/AAEAAABkAAAAAAAAABQAAABAHwAAAAAAACYAAAAAAAAAwOD//wAAAAAmAAAAZAAAABYAAABMAAAAAAAAAAAAAAAEAAAAAAAAAAEAAADn5uYKAAAAACgAAAAoAAAAZAAAAGQAAAAAAAAAzMzMAAAAAABQAAAAUAAAAGQAAABkAAAAAAAAABcAAAAUAAAAAAAAAAAAAAD/fwAA/38AAAAAAAAJAAAABAAAAAAHaZweAAAAaAAAAAAAAAAAAAAAAAAAAAAAAAAAAAAAECcAABAnAAAAAAAAAAAAAAAAAAAAAAAAAAAAAAAAAAAAAAAAAAAAABQAAAAAAAAAwMD/AAAAAABkAAAAMgAAAAAAAABkAAAAAAAAAH9/fwAKAAAAIgAAABgAAAAAAAAAAAAAAAAAAAAAAAAAAAAAAAAAAAAkAAAAJAAAAAAAAAAHAAAAAAAAAAAAAAAAAAAAAAAAAAAAAAAAAAAAf39/ACUAAABYAAAAAAAAAAAAAAAAAAAAAAAAAAAAAAAAAAAAAAAAAAAAAAAAAAAAAAAAAAAAAAA/AAAAAAAAAKCGAQAAAAAAAAAAAAAAAAAMAAAAAQAAAAAAAAAAAAAAAAAAAB8AAABUAAAARHLEBf///wEAAAAAAAAAAAAAAAAAAAAAAAAAAAAAAAAAAAAAAAAAAAAAAAB/f38A5+bmA8zMzADAwP8Af39/AAAAAAAAAAAAAAAAAAAAAAAAAAAAIQAAABgAAAAUAAAAYAMAACABAACgRwAA0AIAABAAAAAmAAAACAAAAP//////////MAAAABQAAAAAAAAAAAD//wAAAQAAAP//AAABAA=="/>
               </a:ext>
             </a:extLst>
           </p:cNvSpPr>
@@ -12192,7 +12469,7 @@
               <a:buNone/>
             </a:pPr>
             <a:r>
-              <a:rPr lang="en-us" sz="1200" b="1" cap="none" spc="40">
+              <a:rPr lang="en-us" sz="1200" b="1" cap="none" spc="8">
                 <a:solidFill>
                   <a:srgbClr val="E0A038"/>
                 </a:solidFill>
@@ -12209,7 +12486,7 @@
           <p:cNvSpPr>
             <a:extLst>
               <a:ext uri="smNativeData">
-                <pr:smNativeData xmlns:pr="smNativeData" xmlns="smNativeData" val="SMDATA_16_kRU2ahMAAAAlAAAAZAAAAA0AAAAAkAAAAEgAAACQAAAASAAAAAAAAAABAAAAAAAAAAEAAABQAAAAAAAAAAAA4D8AAAAAAADgPwAAAAAAAOA/AAAAAAAA4D8AAAAAAADgPwAAAAAAAOA/AAAAAAAA4D8AAAAAAADgPwAAAAAAAOA/AAAAAAAA4D8CAAAAjAAAAAAAAAAAAAAARHLEDP///wgAAAAAAAAAAAAAAAAAAAAAAAAAAAAAAAAAAAAAZAAAAAEAAABAAAAAAAAAAAAAAAAAAAAAAAAAAAAAAAAAAAAAAAAAAAAAAAAAAAAAAAAAAAAAAAAAAAAAAAAAAAAAAAAAAAAAAAAAAAAAAAAAAAAAAAAAAAAAAAAAAAAAFAAAADwAAAAAAAAAAAAAAAAAAAAPAAAAAQAAACMAAAAjAAAAIwAAAB4AAAAAAAAAZAAAAGQAAAAAAAAAZAAAAGQAAAAVAAAAYAAAAAAAAAAAAAAADwAAACADAAAAAAAAAAAAAAEAAACgMgAAVgcAAKr4//8BAAAAf39/AAEAAABkAAAAAAAAABQAAABAHwAAAAAAACYAAAAAAAAAwOD//wAAAAAmAAAAZAAAABYAAABMAAAAAAAAAAAAAAAEAAAAAAAAAAEAAADn5uYKAAAAACgAAAAoAAAAZAAAAGQAAAAAAAAAzMzMAAAAAABQAAAAUAAAAGQAAABkAAAAAAAAABcAAAAUAAAAAAAAAAAAAAD/fwAA/38AAAAAAAAJAAAABAAAADsEAAAeAAAAaAAAAAAAAAAAAAAAAAAAAAAAAAAAAAAAECcAABAnAAAAAAAAAAAAAAAAAAAAAAAAAAAAAAAAAAAAAAAAAAAAABQAAAAAAAAAwMD/AAAAAABkAAAAMgAAAAAAAABkAAAAAAAAAH9/fwAKAAAAIgAAABgAAAAAAAAAAAAAAAAAAAAAAAAAAAAAAAAAAAAkAAAAJAAAAAAAAAAHAAAAAAAAAAAAAAAAAAAAAAAAAAAAAAAAAAAAf39/ACUAAABYAAAAAAAAAAAAAAAAAAAAAAAAAAAAAAAAAAAAAAAAAAAAAAAAAAAAAAAAAAAAAAA/AAAAAAAAAKCGAQAAAAAAAAAAAAAAAAAMAAAAAQAAAAAAAAAAAAAAAAAAAB8AAABUAAAARHLEBf///wEAAAAAAAAAAAAAAAAAAAAAAAAAAAAAAAAAAAAAAAAAAAAAAAB/f38A5+bmA8zMzADAwP8Af39/AAAAAAAAAAAAAAAAAAAAAAAAAAAAIQAAABgAAAAUAAAAYAMAAF0CAACgRwAA3QYAABAAAAAmAAAACAAAAP//////////MAAAABQAAAAAAAAAAAD//wAAAQAAAP//AAABAA=="/>
+                <pr:smNativeData xmlns:pr="smNativeData" xmlns="smNativeData" val="SMDATA_16_V2g2ahMAAAAlAAAAZAAAAA0AAAAAkAAAAEgAAACQAAAASAAAAAAAAAABAAAAAAAAAAEAAABQAAAAAAAAAAAA4D8AAAAAAADgPwAAAAAAAOA/AAAAAAAA4D8AAAAAAADgPwAAAAAAAOA/AAAAAAAA4D8AAAAAAADgPwAAAAAAAOA/AAAAAAAA4D8CAAAAjAAAAAAAAAAAAAAARHLEDP///wgAAAAAAAAAAAAAAAAAAAAAAAAAAAAAAAAAAAAAZAAAAAEAAABAAAAAAAAAAAAAAAAAAAAAAAAAAAAAAAAAAAAAAAAAAAAAAAAAAAAAAAAAAAAAAAAAAAAAAAAAAAAAAAAAAAAAAAAAAAAAAAAAAAAAAAAAAAAAAAAAAAAAFAAAADwAAAAAAAAAAAAAAAAAAAAPAAAAAQAAACMAAAAjAAAAIwAAAB4AAAAAAAAAZAAAAGQAAAAAAAAAZAAAAGQAAAAVAAAAYAAAAAAAAAAAAAAADwAAACADAAAAAAAAAAAAAAEAAACgMgAAVgcAAKr4//8BAAAAf39/AAEAAABkAAAAAAAAABQAAABAHwAAAAAAACYAAAAAAAAAwOD//wAAAAAmAAAAZAAAABYAAABMAAAAAAAAAAAAAAAEAAAAAAAAAAEAAADn5uYKAAAAACgAAAAoAAAAZAAAAGQAAAAAAAAAzMzMAAAAAABQAAAAUAAAAGQAAABkAAAAAAAAABcAAAAUAAAAAAAAAAAAAAD/fwAA/38AAAAAAAAJAAAABAAAADsEAAAeAAAAaAAAAAAAAAAAAAAAAAAAAAAAAAAAAAAAECcAABAnAAAAAAAAAAAAAAAAAAAAAAAAAAAAAAAAAAAAAAAAAAAAABQAAAAAAAAAwMD/AAAAAABkAAAAMgAAAAAAAABkAAAAAAAAAH9/fwAKAAAAIgAAABgAAAAAAAAAAAAAAAAAAAAAAAAAAAAAAAAAAAAkAAAAJAAAAAAAAAAHAAAAAAAAAAAAAAAAAAAAAAAAAAAAAAAAAAAAf39/ACUAAABYAAAAAAAAAAAAAAAAAAAAAAAAAAAAAAAAAAAAAAAAAAAAAAAAAAAAAAAAAAAAAAA/AAAAAAAAAKCGAQAAAAAAAAAAAAAAAAAMAAAAAQAAAAAAAAAAAAAAAAAAAB8AAABUAAAARHLEBf///wEAAAAAAAAAAAAAAAAAAAAAAAAAAAAAAAAAAAAAAAAAAAAAAAB/f38A5+bmA8zMzADAwP8Af39/AAAAAAAAAAAAAAAAAAAAAAAAAAAAIQAAABgAAAAUAAAAYAMAAF0CAACgRwAA3QYAABAAAAAmAAAACAAAAP//////////MAAAABQAAAAAAAAAAAD//wAAAQAAAP//AAABAA=="/>
               </a:ext>
             </a:extLst>
           </p:cNvSpPr>
@@ -12268,7 +12545,7 @@
           <p:cNvSpPr>
             <a:extLst>
               <a:ext uri="smNativeData">
-                <pr:smNativeData xmlns:pr="smNativeData" xmlns="smNativeData" val="SMDATA_16_kRU2ahMAAAAlAAAAZQAAAA0AAAAAkAAAAEgAAACQAAAASAAAAAAAAAAAAAAAAAAAAAEAAABQAAAAkpbK2xFOuz8AAAAAAADwvwAAAAAAAOA/AAAAAAAA4D8AAAAAAADgPwAAAAAAAOA/AAAAAAAA4D8AAAAAAADgPwAAAAAAAOA/AAAAAAAA4D8CAAAAjAAAAAEAAAAAAAAADyRAAP///wgAAAAAAAAAAAAAAAAAAAAAAAAAAAAAAAAAAAAAeAAAAAEAAABAAAAAAAAAAAAAAABaAAAAAAAAAAAAAAAAAAAAAAAAAAAAAAAAAAAAAAAAAAAAAAAAAAAAAAAAAAAAAAAAAAAAAAAAAAAAAAAAAAAAAAAAAAAAAAAAAAAAFAAAADwAAAAAAAAAAAAAAAAAAAAPAAAAAQAAACMAAAAjAAAAIwAAAB4AAAAAAAAAZAAAAGQAAAAAAAAAZAAAAGQAAAAVAAAAYAAAAAAAAAAAAAAADwAAACADAAAAAAAAAAAAAAEAAACgMgAAVgcAAKr4//8BAAAAf39/AAEAAABkAAAAAAAAABQAAABAHwAAAAAAACYAAAAAAAAAwOD//wAAAAAmAAAAZAAAABYAAABMAAAAAQAAAAAAAAAGAAAAAAAAAAEAAAC5xNAAPAAAAAAAAAAoAAAAZAAAAGQAAAAAAAAAy8vLADwAAAAAAAAAKAAAAGQAAABkAAAAAAAAABcAAAAUAAAAAAAAAAAAAAD/fwAA/38AAAAAAAAJAAAABAAAAE0AAAAeAAAAaAAAAAAAAAAAAAAAAAAAAAAAAAAAAAAAECcAABAnAAAAAAAAAAAAAAAAAAAAAAAAAAAAAAAAAAAAAAAAAAAAAHgAAAAAAAAAwMD/AAAAAAAAAAAAAAAAAAAAAABkAAAAAAAAAH9/fwAKAAAAIgAAABgAAAAAAAAAAAAAAAAAAAAAAAAAAAAAAAAAAAAkAAAAJAAAAAAAAAAHAAAAAAAAAAAAAAAAAAAAAAAAAAAAAAAAAAAAf39/ACUAAABYAAAAAAAAAAAAAAAAAAAAAAAAAAAAAAAAAAAAAAAAAAAAAAAAAAAAAAAAAAAAAAA/AAAAAAAAAKCGAQAAAAAAAAAAAAAAAAAMAAAAAQAAAAAAAAAAAAAAAAAAAB8AAABUAAAADyRAAP///wEAAAAAAAAAAAAAAAAAAAAAAAAAAAAAAAAAAAAAAAAAAAAAAAB/f38AucTQAMvLywDAwP8Af39/AAAAAAAAAAAAAAAAAAAAAAAAAAAAIQAAABgAAAAUAAAAYAMAALAKAAAgEwAAIBMAABAAAAAmAAAACAAAAP//////////MAAAABQAAAAAAAAAAAD//wAAAQAAAP//AAABAA=="/>
+                <pr:smNativeData xmlns:pr="smNativeData" xmlns="smNativeData" val="SMDATA_16_V2g2ahMAAAAlAAAAZQAAAA0AAAAAkAAAAEgAAACQAAAASAAAAAAAAAAAAAAAAAAAAAEAAABQAAAAkpbK2xFOuz8AAAAAAAAAAAAAAAAAAOA/AAAAAAAA4D8AAAAAAADgPwAAAAAAAOA/AAAAAAAA4D8AAAAAAADgPwAAAAAAAOA/AAAAAAAA4D8CAAAAjAAAAAEAAAAAAAAADyRAAP///wgAAAAAAAAAAAAAAAAAAAAAAAAAAAAAAAAAAAAAeAAAAAEAAABAAAAAAAAAAAAAAABaAAAAAAAAAAAAAAAAAAAAAAAAAAAAAAAAAAAAAAAAAAAAAAAAAAAAAAAAAAAAAAAAAAAAAAAAAAAAAAAAAAAAAAAAAAAAAAAAAAAAFAAAADwAAAAAAAAAAAAAAAAAAAAPAAAAAQAAACMAAAAjAAAAIwAAAB4AAAAAAAAAZAAAAGQAAAAAAAAAZAAAAGQAAAAVAAAAYAAAAAAAAAAAAAAADwAAACADAAAAAAAAAAAAAAEAAACgMgAAVgcAAKr4//8BAAAAf39/AAEAAABkAAAAAAAAABQAAABAHwAAAAAAACYAAAAAAAAAwOD//wAAAAAmAAAAZAAAABYAAABMAAAAAQAAAAAAAAAGAAAAAAAAAAEAAAC5xNAAPAAAAAAAAAAoAAAAZAAAAGQAAAAAAAAAy8vLADwAAAAAAAAAKAAAAGQAAABkAAAAAAAAABcAAAAUAAAAAAAAAAAAAAD/fwAA/38AAAAAAAAJAAAABAAAAE0AAAAeAAAAaAAAAAAAAAAAAAAAAAAAAAAAAAAAAAAAECcAABAnAAAAAAAAAAAAAAAAAAAAAAAAAAAAAAAAAAAAAAAAAAAAAHgAAAAAAAAAwMD/AAAAAAAAAAAAAAAAAAAAAABkAAAAAAAAAH9/fwAKAAAAIgAAABgAAAAAAAAAAAAAAAAAAAAAAAAAAAAAAAAAAAAkAAAAJAAAAAAAAAAHAAAAAAAAAAAAAAAAAAAAAAAAAAAAAAAAAAAAf39/ACUAAABYAAAAAAAAAAAAAAAAAAAAAAAAAAAAAAAAAAAAAAAAAAAAAAAAAAAAAAAAAAAAAAA/AAAAAAAAAKCGAQAAAAAAAAAAAAAAAAAMAAAAAQAAAAAAAAAAAAAAAAAAAB8AAABUAAAADyRAAP///wEAAAAAAAAAAAAAAAAAAAAAAAAAAAAAAAAAAAAAAAAAAAAAAAB/f38AucTQAMvLywDAwP8Af39/AAAAAAAAAAAAAAAAAAAAAAAAAAAAIQAAABgAAAAUAAAAYAMAALAKAAAgEwAAIBMAABAAAAAmAAAACAAAAP//////////MAAAABQAAAAAAAAAAAD//wAAAQAAAP//AAABAA=="/>
               </a:ext>
             </a:extLst>
           </p:cNvSpPr>
@@ -12305,7 +12582,7 @@
           <p:cNvSpPr>
             <a:extLst>
               <a:ext uri="smNativeData">
-                <pr:smNativeData xmlns:pr="smNativeData" xmlns="smNativeData" val="SMDATA_16_kRU2ahMAAAAlAAAAZAAAAA0AAAAAkAAAAEgAAACQAAAASAAAAAAAAAABAAAAAAAAAAEAAABQAAAAAAAAAAAA4D8AAAAAAADgPwAAAAAAAOA/AAAAAAAA4D8AAAAAAADgPwAAAAAAAOA/AAAAAAAA4D8AAAAAAADgPwAAAAAAAOA/AAAAAAAA4D8CAAAAjAAAAAAAAAAAAAAARHLEDP///wgAAAAAAAAAAAAAAAAAAAAAAAAAAAAAAAAAAAAAZAAAAAEAAABAAAAAAAAAAAAAAAAAAAAAAAAAAAAAAAAAAAAAAAAAAAAAAAAAAAAAAAAAAAAAAAAAAAAAAAAAAAAAAAAAAAAAAAAAAAAAAAAAAAAAAAAAAAAAAAAAAAAAFAAAADwAAAAAAAAAAAAAAAAAAAAPAAAAAQAAACMAAAAjAAAAIwAAAB4AAAAAAAAAZAAAAGQAAAAAAAAAZAAAAGQAAAAVAAAAYAAAAAAAAAAAAAAADwAAACADAAAAAAAAAAAAAAEAAACgMgAAVgcAAKr4//8BAAAAf39/AAEAAABkAAAAAAAAABQAAABAHwAAAAAAACYAAAAAAAAAwOD//wAAAAAmAAAAZAAAABYAAABMAAAAAAAAAAAAAAAEAAAAAAAAAAEAAADn5uYKAAAAACgAAAAoAAAAZAAAAGQAAAAAAAAAzMzMAAAAAABQAAAAUAAAAGQAAABkAAAAAAAAABcAAAAUAAAAAAAAAAAAAAD/fwAA/38AAAAAAAAJAAAABAAAAAAAAAAeAAAAaAAAAAAAAAAAAAAAAAAAAAAAAAAAAAAAECcAABAnAAAAAAAAAAAAAAAAAAAAAAAAAAAAAAAAAAAAAAAAAAAAABQAAAAAAAAAwMD/AAAAAABkAAAAMgAAAAAAAABkAAAAAAAAAH9/fwAKAAAAIgAAABgAAAAAAAAAAAAAAAAAAAAAAAAAAAAAAAAAAAAkAAAAJAAAAAAAAAAHAAAAAAAAAAAAAAAAAAAAAAAAAAAAAAAAAAAAf39/ACUAAABYAAAAAAAAAAAAAAAAAAAAAAAAAAAAAAAAAAAAAAAAAAAAAAAAAAAAAAAAAAAAAAA/AAAAAAAAAKCGAQAAAAAAAAAAAAAAAAAMAAAAAQAAAAAAAAAAAAAAAAAAAB8AAABUAAAARHLEBf///wEAAAAAAAAAAAAAAAAAAAAAAAAAAAAAAAAAAAAAAAAAAAAAAAB/f38A5+bmA8zMzADAwP8Af39/AAAAAAAAAAAAAAAAAAAAAAAAAAAAIQAAABgAAAAUAAAAYAMAABgMAAAgEwAAeA8AABAAAAAmAAAACAAAAP//////////MAAAABQAAAAAAAAAAAD//wAAAQAAAP//AAABAA=="/>
+                <pr:smNativeData xmlns:pr="smNativeData" xmlns="smNativeData" val="SMDATA_16_V2g2ahMAAAAlAAAAZAAAAA0AAAAAkAAAAEgAAACQAAAASAAAAAAAAAABAAAAAAAAAAEAAABQAAAAAAAAAAAA4D8AAAAAAADgPwAAAAAAAOA/AAAAAAAA4D8AAAAAAADgPwAAAAAAAOA/AAAAAAAA4D8AAAAAAADgPwAAAAAAAOA/AAAAAAAA4D8CAAAAjAAAAAAAAAAAAAAARHLEDP///wgAAAAAAAAAAAAAAAAAAAAAAAAAAAAAAAAAAAAAZAAAAAEAAABAAAAAAAAAAAAAAAAAAAAAAAAAAAAAAAAAAAAAAAAAAAAAAAAAAAAAAAAAAAAAAAAAAAAAAAAAAAAAAAAAAAAAAAAAAAAAAAAAAAAAAAAAAAAAAAAAAAAAFAAAADwAAAAAAAAAAAAAAAAAAAAPAAAAAQAAACMAAAAjAAAAIwAAAB4AAAAAAAAAZAAAAGQAAAAAAAAAZAAAAGQAAAAVAAAAYAAAAAAAAAAAAAAADwAAACADAAAAAAAAAAAAAAEAAACgMgAAVgcAAKr4//8BAAAAf39/AAEAAABkAAAAAAAAABQAAABAHwAAAAAAACYAAAAAAAAAwOD//wAAAAAmAAAAZAAAABYAAABMAAAAAAAAAAAAAAAEAAAAAAAAAAEAAADn5uYKAAAAACgAAAAoAAAAZAAAAGQAAAAAAAAAzMzMAAAAAABQAAAAUAAAAGQAAABkAAAAAAAAABcAAAAUAAAAAAAAAAAAAAD/fwAA/38AAAAAAAAJAAAABAAAAAAAAAAeAAAAaAAAAAAAAAAAAAAAAAAAAAAAAAAAAAAAECcAABAnAAAAAAAAAAAAAAAAAAAAAAAAAAAAAAAAAAAAAAAAAAAAABQAAAAAAAAAwMD/AAAAAABkAAAAMgAAAAAAAABkAAAAAAAAAH9/fwAKAAAAIgAAABgAAAAAAAAAAAAAAAAAAAAAAAAAAAAAAAAAAAAkAAAAJAAAAAAAAAAHAAAAAAAAAAAAAAAAAAAAAAAAAAAAAAAAAAAAf39/ACUAAABYAAAAAAAAAAAAAAAAAAAAAAAAAAAAAAAAAAAAAAAAAAAAAAAAAAAAAAAAAAAAAAA/AAAAAAAAAKCGAQAAAAAAAAAAAAAAAAAMAAAAAQAAAAAAAAAAAAAAAAAAAB8AAABUAAAARHLEBf///wEAAAAAAAAAAAAAAAAAAAAAAAAAAAAAAAAAAAAAAAAAAAAAAAB/f38A5+bmA8zMzADAwP8Af39/AAAAAAAAAAAAAAAAAAAAAAAAAAAAIQAAABgAAAAUAAAAYAMAABgMAAAgEwAAeA8AABAAAAAmAAAACAAAAP//////////MAAAABQAAAAAAAAAAAD//wAAAQAAAP//AAABAA=="/>
               </a:ext>
             </a:extLst>
           </p:cNvSpPr>
@@ -12353,7 +12630,7 @@
           <p:cNvSpPr>
             <a:extLst>
               <a:ext uri="smNativeData">
-                <pr:smNativeData xmlns:pr="smNativeData" xmlns="smNativeData" val="SMDATA_16_kRU2ahMAAAAlAAAAZAAAAA0AAAAAkAAAAEgAAACQAAAASAAAAAAAAAABAAAAAAAAAAEAAABQAAAAAAAAAAAA4D8AAAAAAADgPwAAAAAAAOA/AAAAAAAA4D8AAAAAAADgPwAAAAAAAOA/AAAAAAAA4D8AAAAAAADgPwAAAAAAAOA/AAAAAAAA4D8CAAAAjAAAAAAAAAAAAAAARHLEDP///wgAAAAAAAAAAAAAAAAAAAAAAAAAAAAAAAAAAAAAZAAAAAEAAABAAAAAAAAAAAAAAAAAAAAAAAAAAAAAAAAAAAAAAAAAAAAAAAAAAAAAAAAAAAAAAAAAAAAAAAAAAAAAAAAAAAAAAAAAAAAAAAAAAAAAAAAAAAAAAAAAAAAAFAAAADwAAAAAAAAAAAAAAAAAAAAPAAAAAQAAACMAAAAjAAAAIwAAAB4AAAAAAAAAZAAAAGQAAAAAAAAAZAAAAGQAAAAVAAAAYAAAAAAAAAAAAAAADwAAACADAAAAAAAAAAAAAAEAAACgMgAAVgcAAKr4//8BAAAAf39/AAEAAABkAAAAAAAAABQAAABAHwAAAAAAACYAAAAAAAAAwOD//wAAAAAmAAAAZAAAABYAAABMAAAAAAAAAAAAAAAEAAAAAAAAAAEAAADn5uYKAAAAACgAAAAoAAAAZAAAAGQAAAAAAAAAzMzMAAAAAABQAAAAUAAAAGQAAABkAAAAAAAAABcAAAAUAAAAAAAAAAAAAAD/fwAA/38AAAAAAAAJAAAABAAAAAAAAAAeAAAAaAAAAAAAAAAAAAAAAAAAAAAAAAAAAAAAECcAABAnAAAAAAAAAAAAAAAAAAAAAAAAAAAAAAAAAAAAAAAAAAAAABQAAAAAAAAAwMD/AAAAAABkAAAAMgAAAAAAAABkAAAAAAAAAH9/fwAKAAAAIgAAABgAAAAAAAAAAAAAAAAAAAAAAAAAAAAAAAAAAAAkAAAAJAAAAAAAAAAHAAAAAAAAAAAAAAAAAAAAAAAAAAAAAAAAAAAAf39/ACUAAABYAAAAAAAAAAAAAAAAAAAAAAAAAAAAAAAAAAAAAAAAAAAAAAAAAAAAAAAAAAAAAAA/AAAAAAAAAKCGAQAAAAAAAAAAAAAAAAAMAAAAAQAAAAAAAAAAAAAAAAAAAB8AAABUAAAARHLEBf///wEAAAAAAAAAAAAAAAAAAAAAAAAAAAAAAAAAAAAAAAAAAAAAAAB/f38A5+bmA8zMzADAwP8Af39/AAAAAAAAAAAAAAAAAAAAAAAAAAAAIQAAABgAAAAUAAAAYAMAAMAPAAAgEwAAABIAABAAAAAmAAAACAAAAP//////////MAAAABQAAAAAAAAAAAD//wAAAQAAAP//AAABAA=="/>
+                <pr:smNativeData xmlns:pr="smNativeData" xmlns="smNativeData" val="SMDATA_16_V2g2ahMAAAAlAAAAZAAAAA0AAAAAkAAAAEgAAACQAAAASAAAAAAAAAABAAAAAAAAAAEAAABQAAAAAAAAAAAA4D8AAAAAAADgPwAAAAAAAOA/AAAAAAAA4D8AAAAAAADgPwAAAAAAAOA/AAAAAAAA4D8AAAAAAADgPwAAAAAAAOA/AAAAAAAA4D8CAAAAjAAAAAAAAAAAAAAARHLEDP///wgAAAAAAAAAAAAAAAAAAAAAAAAAAAAAAAAAAAAAZAAAAAEAAABAAAAAAAAAAAAAAAAAAAAAAAAAAAAAAAAAAAAAAAAAAAAAAAAAAAAAAAAAAAAAAAAAAAAAAAAAAAAAAAAAAAAAAAAAAAAAAAAAAAAAAAAAAAAAAAAAAAAAFAAAADwAAAAAAAAAAAAAAAAAAAAPAAAAAQAAACMAAAAjAAAAIwAAAB4AAAAAAAAAZAAAAGQAAAAAAAAAZAAAAGQAAAAVAAAAYAAAAAAAAAAAAAAADwAAACADAAAAAAAAAAAAAAEAAACgMgAAVgcAAKr4//8BAAAAf39/AAEAAABkAAAAAAAAABQAAABAHwAAAAAAACYAAAAAAAAAwOD//wAAAAAmAAAAZAAAABYAAABMAAAAAAAAAAAAAAAEAAAAAAAAAAEAAADn5uYKAAAAACgAAAAoAAAAZAAAAGQAAAAAAAAAzMzMAAAAAABQAAAAUAAAAGQAAABkAAAAAAAAABcAAAAUAAAAAAAAAAAAAAD/fwAA/38AAAAAAAAJAAAABAAAAAAAAAAeAAAAaAAAAAAAAAAAAAAAAAAAAAAAAAAAAAAAECcAABAnAAAAAAAAAAAAAAAAAAAAAAAAAAAAAAAAAAAAAAAAAAAAABQAAAAAAAAAwMD/AAAAAABkAAAAMgAAAAAAAABkAAAAAAAAAH9/fwAKAAAAIgAAABgAAAAAAAAAAAAAAAAAAAAAAAAAAAAAAAAAAAAkAAAAJAAAAAAAAAAHAAAAAAAAAAAAAAAAAAAAAAAAAAAAAAAAAAAAf39/ACUAAABYAAAAAAAAAAAAAAAAAAAAAAAAAAAAAAAAAAAAAAAAAAAAAAAAAAAAAAAAAAAAAAA/AAAAAAAAAKCGAQAAAAAAAAAAAAAAAAAMAAAAAQAAAAAAAAAAAAAAAAAAAB8AAABUAAAARHLEBf///wEAAAAAAAAAAAAAAAAAAAAAAAAAAAAAAAAAAAAAAAAAAAAAAAB/f38A5+bmA8zMzADAwP8Af39/AAAAAAAAAAAAAAAAAAAAAAAAAAAAIQAAABgAAAAUAAAAYAMAAMAPAAAgEwAAABIAABAAAAAmAAAACAAAAP//////////MAAAABQAAAAAAAAAAAD//wAAAQAAAP//AAABAA=="/>
               </a:ext>
             </a:extLst>
           </p:cNvSpPr>
@@ -12398,7 +12675,7 @@
           <p:cNvSpPr>
             <a:extLst>
               <a:ext uri="smNativeData">
-                <pr:smNativeData xmlns:pr="smNativeData" xmlns="smNativeData" val="SMDATA_16_kRU2ahMAAAAlAAAAZQAAAA0AAAAAkAAAAEgAAACQAAAASAAAAAAAAAAAAAAAAAAAAAEAAABQAAAAkpbK2xFOuz8AAAAAAADwvwAAAAAAAOA/AAAAAAAA4D8AAAAAAADgPwAAAAAAAOA/AAAAAAAA4D8AAAAAAADgPwAAAAAAAOA/AAAAAAAA4D8CAAAAjAAAAAEAAAAAAAAAHDpeAP///wgAAAAAAAAAAAAAAAAAAAAAAAAAAAAAAAAAAAAAeAAAAAEAAABAAAAAAAAAAAAAAABaAAAAAAAAAAAAAAAAAAAAAAAAAAAAAAAAAAAAAAAAAAAAAAAAAAAAAAAAAAAAAAAAAAAAAAAAAAAAAAAAAAAAAAAAAAAAAAAAAAAAFAAAADwAAAAAAAAAAAAAAAAAAAAPAAAAAQAAACMAAAAjAAAAIwAAAB4AAAAAAAAAZAAAAGQAAAAAAAAAZAAAAGQAAAAVAAAAYAAAAAAAAAAAAAAADwAAACADAAAAAAAAAAAAAAEAAACgMgAAVgcAAKr4//8BAAAAf39/AAEAAABkAAAAAAAAABQAAABAHwAAAAAAACYAAAAAAAAAwOD//wAAAAAmAAAAZAAAABYAAABMAAAAAQAAAAAAAAAGAAAAAAAAAAEAAAC5xNAAPAAAAAAAAAAoAAAAZAAAAGQAAAAAAAAAy8vLADwAAAAAAAAAKAAAAGQAAABkAAAAAAAAABcAAAAUAAAAAAAAAAAAAAD/fwAA/38AAAAAAAAJAAAABAAAAAAAAAAeAAAAaAAAAAAAAAAAAAAAAAAAAAAAAAAAAAAAECcAABAnAAAAAAAAAAAAAAAAAAAAAAAAAAAAAAAAAAAAAAAAAAAAAHgAAAAAAAAAwMD/AAAAAAAAAAAAAAAAAAAAAABkAAAAAAAAAH9/fwAKAAAAIgAAABgAAAAAAAAAAAAAAAAAAAAAAAAAAAAAAAAAAAAkAAAAJAAAAAAAAAAHAAAAAAAAAAAAAAAAAAAAAAAAAAAAAAAAAAAAf39/ACUAAABYAAAAAAAAAAAAAAAAAAAAAAAAAAAAAAAAAAAAAAAAAAAAAAAAAAAAAAAAAAAAAAA/AAAAAAAAAKCGAQAAAAAAAAAAAAAAAAAMAAAAAQAAAAAAAAAAAAAAAAAAAB8AAABUAAAAHDpeAP///wEAAAAAAAAAAAAAAAAAAAAAAAAAAAAAAAAAAAAAAAAAAAAAAAB/f38AucTQAMvLywDAwP8Af39/AAAAAAAAAAAAAAAAAAAAAAAAAAAAIQAAABgAAAAUAAAAiBQAALAKAABIJAAAIBMAABAAAAAmAAAACAAAAP//////////MAAAABQAAAAAAAAAAAD//wAAAQAAAP//AAABAA=="/>
+                <pr:smNativeData xmlns:pr="smNativeData" xmlns="smNativeData" val="SMDATA_16_V2g2ahMAAAAlAAAAZQAAAA0AAAAAkAAAAEgAAACQAAAASAAAAAAAAAAAAAAAAAAAAAEAAABQAAAAkpbK2xFOuz8AAAAAAAAAAAAAAAAAAOA/AAAAAAAA4D8AAAAAAADgPwAAAAAAAOA/AAAAAAAA4D8AAAAAAADgPwAAAAAAAOA/AAAAAAAA4D8CAAAAjAAAAAEAAAAAAAAAHDpeAP///wgAAAAAAAAAAAAAAAAAAAAAAAAAAAAAAAAAAAAAeAAAAAEAAABAAAAAAAAAAAAAAABaAAAAAAAAAAAAAAAAAAAAAAAAAAAAAAAAAAAAAAAAAAAAAAAAAAAAAAAAAAAAAAAAAAAAAAAAAAAAAAAAAAAAAAAAAAAAAAAAAAAAFAAAADwAAAAAAAAAAAAAAAAAAAAPAAAAAQAAACMAAAAjAAAAIwAAAB4AAAAAAAAAZAAAAGQAAAAAAAAAZAAAAGQAAAAVAAAAYAAAAAAAAAAAAAAADwAAACADAAAAAAAAAAAAAAEAAACgMgAAVgcAAKr4//8BAAAAf39/AAEAAABkAAAAAAAAABQAAABAHwAAAAAAACYAAAAAAAAAwOD//wAAAAAmAAAAZAAAABYAAABMAAAAAQAAAAAAAAAGAAAAAAAAAAEAAAC5xNAAPAAAAAAAAAAoAAAAZAAAAGQAAAAAAAAAy8vLADwAAAAAAAAAKAAAAGQAAABkAAAAAAAAABcAAAAUAAAAAAAAAAAAAAD/fwAA/38AAAAAAAAJAAAABAAAAAAAAAAeAAAAaAAAAAAAAAAAAAAAAAAAAAAAAAAAAAAAECcAABAnAAAAAAAAAAAAAAAAAAAAAAAAAAAAAAAAAAAAAAAAAAAAAHgAAAAAAAAAwMD/AAAAAAAAAAAAAAAAAAAAAABkAAAAAAAAAH9/fwAKAAAAIgAAABgAAAAAAAAAAAAAAAAAAAAAAAAAAAAAAAAAAAAkAAAAJAAAAAAAAAAHAAAAAAAAAAAAAAAAAAAAAAAAAAAAAAAAAAAAf39/ACUAAABYAAAAAAAAAAAAAAAAAAAAAAAAAAAAAAAAAAAAAAAAAAAAAAAAAAAAAAAAAAAAAAA/AAAAAAAAAKCGAQAAAAAAAAAAAAAAAAAMAAAAAQAAAAAAAAAAAAAAAAAAAB8AAABUAAAAHDpeAP///wEAAAAAAAAAAAAAAAAAAAAAAAAAAAAAAAAAAAAAAAAAAAAAAAB/f38AucTQAMvLywDAwP8Af39/AAAAAAAAAAAAAAAAAAAAAAAAAAAAIQAAABgAAAAUAAAAiBQAALAKAABIJAAAIBMAABAAAAAmAAAACAAAAP//////////MAAAABQAAAAAAAAAAAD//wAAAQAAAP//AAABAA=="/>
               </a:ext>
             </a:extLst>
           </p:cNvSpPr>
@@ -12435,7 +12712,7 @@
           <p:cNvSpPr>
             <a:extLst>
               <a:ext uri="smNativeData">
-                <pr:smNativeData xmlns:pr="smNativeData" xmlns="smNativeData" val="SMDATA_16_kRU2ahMAAAAlAAAAZAAAAA0AAAAAkAAAAEgAAACQAAAASAAAAAAAAAABAAAAAAAAAAEAAABQAAAAAAAAAAAA4D8AAAAAAADgPwAAAAAAAOA/AAAAAAAA4D8AAAAAAADgPwAAAAAAAOA/AAAAAAAA4D8AAAAAAADgPwAAAAAAAOA/AAAAAAAA4D8CAAAAjAAAAAAAAAAAAAAARHLEDP///wgAAAAAAAAAAAAAAAAAAAAAAAAAAAAAAAAAAAAAZAAAAAEAAABAAAAAAAAAAAAAAAAAAAAAAAAAAAAAAAAAAAAAAAAAAAAAAAAAAAAAAAAAAAAAAAAAAAAAAAAAAAAAAAAAAAAAAAAAAAAAAAAAAAAAAAAAAAAAAAAAAAAAFAAAADwAAAAAAAAAAAAAAAAAAAAPAAAAAQAAACMAAAAjAAAAIwAAAB4AAAAAAAAAZAAAAGQAAAAAAAAAZAAAAGQAAAAVAAAAYAAAAAAAAAAAAAAADwAAACADAAAAAAAAAAAAAAEAAACgMgAAVgcAAKr4//8BAAAAf39/AAEAAABkAAAAAAAAABQAAABAHwAAAAAAACYAAAAAAAAAwOD//wAAAAAmAAAAZAAAABYAAABMAAAAAAAAAAAAAAAEAAAAAAAAAAEAAADn5uYKAAAAACgAAAAoAAAAZAAAAGQAAAAAAAAAzMzMAAAAAABQAAAAUAAAAGQAAABkAAAAAAAAABcAAAAUAAAAAAAAAAAAAAD/fwAA/38AAAAAAAAJAAAABAAAAACAJfIeAAAAaAAAAAAAAAAAAAAAAAAAAAAAAAAAAAAAECcAABAnAAAAAAAAAAAAAAAAAAAAAAAAAAAAAAAAAAAAAAAAAAAAABQAAAAAAAAAwMD/AAAAAABkAAAAMgAAAAAAAABkAAAAAAAAAH9/fwAKAAAAIgAAABgAAAAAAAAAAAAAAAAAAAAAAAAAAAAAAAAAAAAkAAAAJAAAAAAAAAAHAAAAAAAAAAAAAAAAAAAAAAAAAAAAAAAAAAAAf39/ACUAAABYAAAAAAAAAAAAAAAAAAAAAAAAAAAAAAAAAAAAAAAAAAAAAAAAAAAAAAAAAAAAAAA/AAAAAAAAAKCGAQAAAAAAAAAAAAAAAAAMAAAAAQAAAAAAAAAAAAAAAAAAAB8AAABUAAAARHLEBf///wEAAAAAAAAAAAAAAAAAAAAAAAAAAAAAAAAAAAAAAAAAAAAAAAB/f38A5+bmA8zMzADAwP8Af39/AAAAAAAAAAAAAAAAAAAAAAAAAAAAIQAAABgAAAAUAAAAiBQAABgMAABIJAAAeA8AABAAAAAmAAAACAAAAP//////////MAAAABQAAAAAAAAAAAD//wAAAQAAAP//AAABAA=="/>
+                <pr:smNativeData xmlns:pr="smNativeData" xmlns="smNativeData" val="SMDATA_16_V2g2ahMAAAAlAAAAZAAAAA0AAAAAkAAAAEgAAACQAAAASAAAAAAAAAABAAAAAAAAAAEAAABQAAAAAAAAAAAA4D8AAAAAAADgPwAAAAAAAOA/AAAAAAAA4D8AAAAAAADgPwAAAAAAAOA/AAAAAAAA4D8AAAAAAADgPwAAAAAAAOA/AAAAAAAA4D8CAAAAjAAAAAAAAAAAAAAARHLEDP///wgAAAAAAAAAAAAAAAAAAAAAAAAAAAAAAAAAAAAAZAAAAAEAAABAAAAAAAAAAAAAAAAAAAAAAAAAAAAAAAAAAAAAAAAAAAAAAAAAAAAAAAAAAAAAAAAAAAAAAAAAAAAAAAAAAAAAAAAAAAAAAAAAAAAAAAAAAAAAAAAAAAAAFAAAADwAAAAAAAAAAAAAAAAAAAAPAAAAAQAAACMAAAAjAAAAIwAAAB4AAAAAAAAAZAAAAGQAAAAAAAAAZAAAAGQAAAAVAAAAYAAAAAAAAAAAAAAADwAAACADAAAAAAAAAAAAAAEAAACgMgAAVgcAAKr4//8BAAAAf39/AAEAAABkAAAAAAAAABQAAABAHwAAAAAAACYAAAAAAAAAwOD//wAAAAAmAAAAZAAAABYAAABMAAAAAAAAAAAAAAAEAAAAAAAAAAEAAADn5uYKAAAAACgAAAAoAAAAZAAAAGQAAAAAAAAAzMzMAAAAAABQAAAAUAAAAGQAAABkAAAAAAAAABcAAAAUAAAAAAAAAAAAAAD/fwAA/38AAAAAAAAJAAAABAAAAACAJfIeAAAAaAAAAAAAAAAAAAAAAAAAAAAAAAAAAAAAECcAABAnAAAAAAAAAAAAAAAAAAAAAAAAAAAAAAAAAAAAAAAAAAAAABQAAAAAAAAAwMD/AAAAAABkAAAAMgAAAAAAAABkAAAAAAAAAH9/fwAKAAAAIgAAABgAAAAAAAAAAAAAAAAAAAAAAAAAAAAAAAAAAAAkAAAAJAAAAAAAAAAHAAAAAAAAAAAAAAAAAAAAAAAAAAAAAAAAAAAAf39/ACUAAABYAAAAAAAAAAAAAAAAAAAAAAAAAAAAAAAAAAAAAAAAAAAAAAAAAAAAAAAAAAAAAAA/AAAAAAAAAKCGAQAAAAAAAAAAAAAAAAAMAAAAAQAAAAAAAAAAAAAAAAAAAB8AAABUAAAARHLEBf///wEAAAAAAAAAAAAAAAAAAAAAAAAAAAAAAAAAAAAAAAAAAAAAAAB/f38A5+bmA8zMzADAwP8Af39/AAAAAAAAAAAAAAAAAAAAAAAAAAAAIQAAABgAAAAUAAAAiBQAABgMAABIJAAAeA8AABAAAAAmAAAACAAAAP//////////MAAAABQAAAAAAAAAAAD//wAAAQAAAP//AAABAA=="/>
               </a:ext>
             </a:extLst>
           </p:cNvSpPr>
@@ -12483,7 +12760,7 @@
           <p:cNvSpPr>
             <a:extLst>
               <a:ext uri="smNativeData">
-                <pr:smNativeData xmlns:pr="smNativeData" xmlns="smNativeData" val="SMDATA_16_kRU2ahMAAAAlAAAAZAAAAA0AAAAAkAAAAEgAAACQAAAASAAAAAAAAAABAAAAAAAAAAEAAABQAAAAAAAAAAAA4D8AAAAAAADgPwAAAAAAAOA/AAAAAAAA4D8AAAAAAADgPwAAAAAAAOA/AAAAAAAA4D8AAAAAAADgPwAAAAAAAOA/AAAAAAAA4D8CAAAAjAAAAAAAAAAAAAAARHLEDP///wgAAAAAAAAAAAAAAAAAAAAAAAAAAAAAAAAAAAAAZAAAAAEAAABAAAAAAAAAAAAAAAAAAAAAAAAAAAAAAAAAAAAAAAAAAAAAAAAAAAAAAAAAAAAAAAAAAAAAAAAAAAAAAAAAAAAAAAAAAAAAAAAAAAAAAAAAAAAAAAAAAAAAFAAAADwAAAAAAAAAAAAAAAAAAAAPAAAAAQAAACMAAAAjAAAAIwAAAB4AAAAAAAAAZAAAAGQAAAAAAAAAZAAAAGQAAAAVAAAAYAAAAAAAAAAAAAAADwAAACADAAAAAAAAAAAAAAEAAACgMgAAVgcAAKr4//8BAAAAf39/AAEAAABkAAAAAAAAABQAAABAHwAAAAAAACYAAAAAAAAAwOD//wAAAAAmAAAAZAAAABYAAABMAAAAAAAAAAAAAAAEAAAAAAAAAAEAAADn5uYKAAAAACgAAAAoAAAAZAAAAGQAAAAAAAAAzMzMAAAAAABQAAAAUAAAAGQAAABkAAAAAAAAABcAAAAUAAAAAAAAAAAAAAD/fwAA/38AAAAAAAAJAAAABAAAABD+gD0eAAAAaAAAAAAAAAAAAAAAAAAAAAAAAAAAAAAAECcAABAnAAAAAAAAAAAAAAAAAAAAAAAAAAAAAAAAAAAAAAAAAAAAABQAAAAAAAAAwMD/AAAAAABkAAAAMgAAAAAAAABkAAAAAAAAAH9/fwAKAAAAIgAAABgAAAAAAAAAAAAAAAAAAAAAAAAAAAAAAAAAAAAkAAAAJAAAAAAAAAAHAAAAAAAAAAAAAAAAAAAAAAAAAAAAAAAAAAAAf39/ACUAAABYAAAAAAAAAAAAAAAAAAAAAAAAAAAAAAAAAAAAAAAAAAAAAAAAAAAAAAAAAAAAAAA/AAAAAAAAAKCGAQAAAAAAAAAAAAAAAAAMAAAAAQAAAAAAAAAAAAAAAAAAAB8AAABUAAAARHLEBf///wEAAAAAAAAAAAAAAAAAAAAAAAAAAAAAAAAAAAAAAAAAAAAAAAB/f38A5+bmA8zMzADAwP8Af39/AAAAAAAAAAAAAAAAAAAAAAAAAAAAIQAAABgAAAAUAAAAiBQAAMAPAABIJAAAABIAABAAAAAmAAAACAAAAP//////////MAAAABQAAAAAAAAAAAD//wAAAQAAAP//AAABAA=="/>
+                <pr:smNativeData xmlns:pr="smNativeData" xmlns="smNativeData" val="SMDATA_16_V2g2ahMAAAAlAAAAZAAAAA0AAAAAkAAAAEgAAACQAAAASAAAAAAAAAABAAAAAAAAAAEAAABQAAAAAAAAAAAA4D8AAAAAAADgPwAAAAAAAOA/AAAAAAAA4D8AAAAAAADgPwAAAAAAAOA/AAAAAAAA4D8AAAAAAADgPwAAAAAAAOA/AAAAAAAA4D8CAAAAjAAAAAAAAAAAAAAARHLEDP///wgAAAAAAAAAAAAAAAAAAAAAAAAAAAAAAAAAAAAAZAAAAAEAAABAAAAAAAAAAAAAAAAAAAAAAAAAAAAAAAAAAAAAAAAAAAAAAAAAAAAAAAAAAAAAAAAAAAAAAAAAAAAAAAAAAAAAAAAAAAAAAAAAAAAAAAAAAAAAAAAAAAAAFAAAADwAAAAAAAAAAAAAAAAAAAAPAAAAAQAAACMAAAAjAAAAIwAAAB4AAAAAAAAAZAAAAGQAAAAAAAAAZAAAAGQAAAAVAAAAYAAAAAAAAAAAAAAADwAAACADAAAAAAAAAAAAAAEAAACgMgAAVgcAAKr4//8BAAAAf39/AAEAAABkAAAAAAAAABQAAABAHwAAAAAAACYAAAAAAAAAwOD//wAAAAAmAAAAZAAAABYAAABMAAAAAAAAAAAAAAAEAAAAAAAAAAEAAADn5uYKAAAAACgAAAAoAAAAZAAAAGQAAAAAAAAAzMzMAAAAAABQAAAAUAAAAGQAAABkAAAAAAAAABcAAAAUAAAAAAAAAAAAAAD/fwAA/38AAAAAAAAJAAAABAAAABD+gD0eAAAAaAAAAAAAAAAAAAAAAAAAAAAAAAAAAAAAECcAABAnAAAAAAAAAAAAAAAAAAAAAAAAAAAAAAAAAAAAAAAAAAAAABQAAAAAAAAAwMD/AAAAAABkAAAAMgAAAAAAAABkAAAAAAAAAH9/fwAKAAAAIgAAABgAAAAAAAAAAAAAAAAAAAAAAAAAAAAAAAAAAAAkAAAAJAAAAAAAAAAHAAAAAAAAAAAAAAAAAAAAAAAAAAAAAAAAAAAAf39/ACUAAABYAAAAAAAAAAAAAAAAAAAAAAAAAAAAAAAAAAAAAAAAAAAAAAAAAAAAAAAAAAAAAAA/AAAAAAAAAKCGAQAAAAAAAAAAAAAAAAAMAAAAAQAAAAAAAAAAAAAAAAAAAB8AAABUAAAARHLEBf///wEAAAAAAAAAAAAAAAAAAAAAAAAAAAAAAAAAAAAAAAAAAAAAAAB/f38A5+bmA8zMzADAwP8Af39/AAAAAAAAAAAAAAAAAAAAAAAAAAAAIQAAABgAAAAUAAAAiBQAAMAPAABIJAAAABIAABAAAAAmAAAACAAAAP//////////MAAAABQAAAAAAAAAAAD//wAAAQAAAP//AAABAA=="/>
               </a:ext>
             </a:extLst>
           </p:cNvSpPr>
@@ -12528,7 +12805,7 @@
           <p:cNvSpPr>
             <a:extLst>
               <a:ext uri="smNativeData">
-                <pr:smNativeData xmlns:pr="smNativeData" xmlns="smNativeData" val="SMDATA_16_kRU2ahMAAAAlAAAAZQAAAA0AAAAAkAAAAEgAAACQAAAASAAAAAAAAAAAAAAAAAAAAAEAAABQAAAAkpbK2xFOuz8AAAAAAADwvwAAAAAAAOA/AAAAAAAA4D8AAAAAAADgPwAAAAAAAOA/AAAAAAAA4D8AAAAAAADgPwAAAAAAAOA/AAAAAAAA4D8CAAAAjAAAAAEAAAAAAAAA4KA4AP///wgAAAAAAAAAAAAAAAAAAAAAAAAAAAAAAAAAAAAAeAAAAAEAAABAAAAAAAAAAAAAAABaAAAAAAAAAAAAAAAAAAAAAAAAAAAAAAAAAAAAAAAAAAAAAAAAAAAAAAAAAAAAAAAAAAAAAAAAAAAAAAAAAAAAAAAAAAAAAAAAAAAAFAAAADwAAAAAAAAAAAAAAAAAAAAPAAAAAQAAACMAAAAjAAAAIwAAAB4AAAAAAAAAZAAAAGQAAAAAAAAAZAAAAGQAAAAVAAAAYAAAAAAAAAAAAAAADwAAACADAAAAAAAAAAAAAAEAAACgMgAAVgcAAKr4//8BAAAAf39/AAEAAABkAAAAAAAAABQAAABAHwAAAAAAACYAAAAAAAAAwOD//wAAAAAmAAAAZAAAABYAAABMAAAAAQAAAAAAAAAGAAAAAAAAAAEAAAC5xNAAPAAAAAAAAAAoAAAAZAAAAGQAAAAAAAAAy8vLADwAAAAAAAAAKAAAAGQAAABkAAAAAAAAABcAAAAUAAAAAAAAAAAAAAD/fwAA/38AAAAAAAAJAAAABAAAAP////8eAAAAaAAAAAAAAAAAAAAAAAAAAAAAAAAAAAAAECcAABAnAAAAAAAAAAAAAAAAAAAAAAAAAAAAAAAAAAAAAAAAAAAAAHgAAAAAAAAAwMD/AAAAAAAAAAAAAAAAAAAAAABkAAAAAAAAAH9/fwAKAAAAIgAAABgAAAAAAAAAAAAAAAAAAAAAAAAAAAAAAAAAAAAkAAAAJAAAAAAAAAAHAAAAAAAAAAAAAAAAAAAAAAAAAAAAAAAAAAAAf39/ACUAAABYAAAAAAAAAAAAAAAAAAAAAAAAAAAAAAAAAAAAAAAAAAAAAAAAAAAAAAAAAAAAAAA/AAAAAAAAAKCGAQAAAAAAAAAAAAAAAAAMAAAAAQAAAAAAAAAAAAAAAAAAAB8AAABUAAAA4KA4AP///wEAAAAAAAAAAAAAAAAAAAAAAAAAAAAAAAAAAAAAAAAAAAAAAAB/f38AucTQAMvLywDAwP8Af39/AAAAAAAAAAAAAAAAAAAAAAAAAAAAIQAAABgAAAAUAAAAsCUAALAKAABwNQAAIBMAABAAAAAmAAAACAAAAP//////////MAAAABQAAAAAAAAAAAD//wAAAQAAAP//AAABAA=="/>
+                <pr:smNativeData xmlns:pr="smNativeData" xmlns="smNativeData" val="SMDATA_16_V2g2ahMAAAAlAAAAZQAAAA0AAAAAkAAAAEgAAACQAAAASAAAAAAAAAAAAAAAAAAAAAEAAABQAAAAkpbK2xFOuz8AAAAAAAAAAAAAAAAAAOA/AAAAAAAA4D8AAAAAAADgPwAAAAAAAOA/AAAAAAAA4D8AAAAAAADgPwAAAAAAAOA/AAAAAAAA4D8CAAAAjAAAAAEAAAAAAAAA4KA4AP///wgAAAAAAAAAAAAAAAAAAAAAAAAAAAAAAAAAAAAAeAAAAAEAAABAAAAAAAAAAAAAAABaAAAAAAAAAAAAAAAAAAAAAAAAAAAAAAAAAAAAAAAAAAAAAAAAAAAAAAAAAAAAAAAAAAAAAAAAAAAAAAAAAAAAAAAAAAAAAAAAAAAAFAAAADwAAAAAAAAAAAAAAAAAAAAPAAAAAQAAACMAAAAjAAAAIwAAAB4AAAAAAAAAZAAAAGQAAAAAAAAAZAAAAGQAAAAVAAAAYAAAAAAAAAAAAAAADwAAACADAAAAAAAAAAAAAAEAAACgMgAAVgcAAKr4//8BAAAAf39/AAEAAABkAAAAAAAAABQAAABAHwAAAAAAACYAAAAAAAAAwOD//wAAAAAmAAAAZAAAABYAAABMAAAAAQAAAAAAAAAGAAAAAAAAAAEAAAC5xNAAPAAAAAAAAAAoAAAAZAAAAGQAAAAAAAAAy8vLADwAAAAAAAAAKAAAAGQAAABkAAAAAAAAABcAAAAUAAAAAAAAAAAAAAD/fwAA/38AAAAAAAAJAAAABAAAAP////8eAAAAaAAAAAAAAAAAAAAAAAAAAAAAAAAAAAAAECcAABAnAAAAAAAAAAAAAAAAAAAAAAAAAAAAAAAAAAAAAAAAAAAAAHgAAAAAAAAAwMD/AAAAAAAAAAAAAAAAAAAAAABkAAAAAAAAAH9/fwAKAAAAIgAAABgAAAAAAAAAAAAAAAAAAAAAAAAAAAAAAAAAAAAkAAAAJAAAAAAAAAAHAAAAAAAAAAAAAAAAAAAAAAAAAAAAAAAAAAAAf39/ACUAAABYAAAAAAAAAAAAAAAAAAAAAAAAAAAAAAAAAAAAAAAAAAAAAAAAAAAAAAAAAAAAAAA/AAAAAAAAAKCGAQAAAAAAAAAAAAAAAAAMAAAAAQAAAAAAAAAAAAAAAAAAAB8AAABUAAAA4KA4AP///wEAAAAAAAAAAAAAAAAAAAAAAAAAAAAAAAAAAAAAAAAAAAAAAAB/f38AucTQAMvLywDAwP8Af39/AAAAAAAAAAAAAAAAAAAAAAAAAAAAIQAAABgAAAAUAAAAsCUAALAKAABwNQAAIBMAABAAAAAmAAAACAAAAP//////////MAAAABQAAAAAAAAAAAD//wAAAQAAAP//AAABAA=="/>
               </a:ext>
             </a:extLst>
           </p:cNvSpPr>
@@ -12565,7 +12842,7 @@
           <p:cNvSpPr>
             <a:extLst>
               <a:ext uri="smNativeData">
-                <pr:smNativeData xmlns:pr="smNativeData" xmlns="smNativeData" val="SMDATA_16_kRU2ahMAAAAlAAAAZAAAAA0AAAAAkAAAAEgAAACQAAAASAAAAAAAAAABAAAAAAAAAAEAAABQAAAAAAAAAAAA4D8AAAAAAADgPwAAAAAAAOA/AAAAAAAA4D8AAAAAAADgPwAAAAAAAOA/AAAAAAAA4D8AAAAAAADgPwAAAAAAAOA/AAAAAAAA4D8CAAAAjAAAAAAAAAAAAAAARHLEDP///wgAAAAAAAAAAAAAAAAAAAAAAAAAAAAAAAAAAAAAZAAAAAEAAABAAAAAAAAAAAAAAAAAAAAAAAAAAAAAAAAAAAAAAAAAAAAAAAAAAAAAAAAAAAAAAAAAAAAAAAAAAAAAAAAAAAAAAAAAAAAAAAAAAAAAAAAAAAAAAAAAAAAAFAAAADwAAAAAAAAAAAAAAAAAAAAPAAAAAQAAACMAAAAjAAAAIwAAAB4AAAAAAAAAZAAAAGQAAAAAAAAAZAAAAGQAAAAVAAAAYAAAAAAAAAAAAAAADwAAACADAAAAAAAAAAAAAAEAAACgMgAAVgcAAKr4//8BAAAAf39/AAEAAABkAAAAAAAAABQAAABAHwAAAAAAACYAAAAAAAAAwOD//wAAAAAmAAAAZAAAABYAAABMAAAAAAAAAAAAAAAEAAAAAAAAAAEAAADn5uYKAAAAACgAAAAoAAAAZAAAAGQAAAAAAAAAzMzMAAAAAABQAAAAUAAAAGQAAABkAAAAAAAAABcAAAAUAAAAAAAAAAAAAAD/fwAA/38AAAAAAAAJAAAABAAAAP////8eAAAAaAAAAAAAAAAAAAAAAAAAAAAAAAAAAAAAECcAABAnAAAAAAAAAAAAAAAAAAAAAAAAAAAAAAAAAAAAAAAAAAAAABQAAAAAAAAAwMD/AAAAAABkAAAAMgAAAAAAAABkAAAAAAAAAH9/fwAKAAAAIgAAABgAAAAAAAAAAAAAAAAAAAAAAAAAAAAAAAAAAAAkAAAAJAAAAAAAAAAHAAAAAAAAAAAAAAAAAAAAAAAAAAAAAAAAAAAAf39/ACUAAABYAAAAAAAAAAAAAAAAAAAAAAAAAAAAAAAAAAAAAAAAAAAAAAAAAAAAAAAAAAAAAAA/AAAAAAAAAKCGAQAAAAAAAAAAAAAAAAAMAAAAAQAAAAAAAAAAAAAAAAAAAB8AAABUAAAARHLEBf///wEAAAAAAAAAAAAAAAAAAAAAAAAAAAAAAAAAAAAAAAAAAAAAAAB/f38A5+bmA8zMzADAwP8Af39/AAAAAAAAAAAAAAAAAAAAAAAAAAAAIQAAABgAAAAUAAAAsCUAABgMAABwNQAAeA8AABAAAAAmAAAACAAAAP//////////MAAAABQAAAAAAAAAAAD//wAAAQAAAP//AAABAA=="/>
+                <pr:smNativeData xmlns:pr="smNativeData" xmlns="smNativeData" val="SMDATA_16_V2g2ahMAAAAlAAAAZAAAAA0AAAAAkAAAAEgAAACQAAAASAAAAAAAAAABAAAAAAAAAAEAAABQAAAAAAAAAAAA4D8AAAAAAADgPwAAAAAAAOA/AAAAAAAA4D8AAAAAAADgPwAAAAAAAOA/AAAAAAAA4D8AAAAAAADgPwAAAAAAAOA/AAAAAAAA4D8CAAAAjAAAAAAAAAAAAAAARHLEDP///wgAAAAAAAAAAAAAAAAAAAAAAAAAAAAAAAAAAAAAZAAAAAEAAABAAAAAAAAAAAAAAAAAAAAAAAAAAAAAAAAAAAAAAAAAAAAAAAAAAAAAAAAAAAAAAAAAAAAAAAAAAAAAAAAAAAAAAAAAAAAAAAAAAAAAAAAAAAAAAAAAAAAAFAAAADwAAAAAAAAAAAAAAAAAAAAPAAAAAQAAACMAAAAjAAAAIwAAAB4AAAAAAAAAZAAAAGQAAAAAAAAAZAAAAGQAAAAVAAAAYAAAAAAAAAAAAAAADwAAACADAAAAAAAAAAAAAAEAAACgMgAAVgcAAKr4//8BAAAAf39/AAEAAABkAAAAAAAAABQAAABAHwAAAAAAACYAAAAAAAAAwOD//wAAAAAmAAAAZAAAABYAAABMAAAAAAAAAAAAAAAEAAAAAAAAAAEAAADn5uYKAAAAACgAAAAoAAAAZAAAAGQAAAAAAAAAzMzMAAAAAABQAAAAUAAAAGQAAABkAAAAAAAAABcAAAAUAAAAAAAAAAAAAAD/fwAA/38AAAAAAAAJAAAABAAAAP////8eAAAAaAAAAAAAAAAAAAAAAAAAAAAAAAAAAAAAECcAABAnAAAAAAAAAAAAAAAAAAAAAAAAAAAAAAAAAAAAAAAAAAAAABQAAAAAAAAAwMD/AAAAAABkAAAAMgAAAAAAAABkAAAAAAAAAH9/fwAKAAAAIgAAABgAAAAAAAAAAAAAAAAAAAAAAAAAAAAAAAAAAAAkAAAAJAAAAAAAAAAHAAAAAAAAAAAAAAAAAAAAAAAAAAAAAAAAAAAAf39/ACUAAABYAAAAAAAAAAAAAAAAAAAAAAAAAAAAAAAAAAAAAAAAAAAAAAAAAAAAAAAAAAAAAAA/AAAAAAAAAKCGAQAAAAAAAAAAAAAAAAAMAAAAAQAAAAAAAAAAAAAAAAAAAB8AAABUAAAARHLEBf///wEAAAAAAAAAAAAAAAAAAAAAAAAAAAAAAAAAAAAAAAAAAAAAAAB/f38A5+bmA8zMzADAwP8Af39/AAAAAAAAAAAAAAAAAAAAAAAAAAAAIQAAABgAAAAUAAAAsCUAABgMAABwNQAAeA8AABAAAAAmAAAACAAAAP//////////MAAAABQAAAAAAAAAAAD//wAAAQAAAP//AAABAA=="/>
               </a:ext>
             </a:extLst>
           </p:cNvSpPr>
@@ -12613,7 +12890,7 @@
           <p:cNvSpPr>
             <a:extLst>
               <a:ext uri="smNativeData">
-                <pr:smNativeData xmlns:pr="smNativeData" xmlns="smNativeData" val="SMDATA_16_kRU2ahMAAAAlAAAAZAAAAA0AAAAAkAAAAEgAAACQAAAASAAAAAAAAAABAAAAAAAAAAEAAABQAAAAAAAAAAAA4D8AAAAAAADgPwAAAAAAAOA/AAAAAAAA4D8AAAAAAADgPwAAAAAAAOA/AAAAAAAA4D8AAAAAAADgPwAAAAAAAOA/AAAAAAAA4D8CAAAAjAAAAAAAAAAAAAAARHLEDP///wgAAAAAAAAAAAAAAAAAAAAAAAAAAAAAAAAAAAAAZAAAAAEAAABAAAAAAAAAAAAAAAAAAAAAAAAAAAAAAAAAAAAAAAAAAAAAAAAAAAAAAAAAAAAAAAAAAAAAAAAAAAAAAAAAAAAAAAAAAAAAAAAAAAAAAAAAAAAAAAAAAAAAFAAAADwAAAAAAAAAAAAAAAAAAAAPAAAAAQAAACMAAAAjAAAAIwAAAB4AAAAAAAAAZAAAAGQAAAAAAAAAZAAAAGQAAAAVAAAAYAAAAAAAAAAAAAAADwAAACADAAAAAAAAAAAAAAEAAACgMgAAVgcAAKr4//8BAAAAf39/AAEAAABkAAAAAAAAABQAAABAHwAAAAAAACYAAAAAAAAAwOD//wAAAAAmAAAAZAAAABYAAABMAAAAAAAAAAAAAAAEAAAAAAAAAAEAAADn5uYKAAAAACgAAAAoAAAAZAAAAGQAAAAAAAAAzMzMAAAAAABQAAAAUAAAAGQAAABkAAAAAAAAABcAAAAUAAAAAAAAAAAAAAD/fwAA/38AAAAAAAAJAAAABAAAAP////8eAAAAaAAAAAAAAAAAAAAAAAAAAAAAAAAAAAAAECcAABAnAAAAAAAAAAAAAAAAAAAAAAAAAAAAAAAAAAAAAAAAAAAAABQAAAAAAAAAwMD/AAAAAABkAAAAMgAAAAAAAABkAAAAAAAAAH9/fwAKAAAAIgAAABgAAAAAAAAAAAAAAAAAAAAAAAAAAAAAAAAAAAAkAAAAJAAAAAAAAAAHAAAAAAAAAAAAAAAAAAAAAAAAAAAAAAAAAAAAf39/ACUAAABYAAAAAAAAAAAAAAAAAAAAAAAAAAAAAAAAAAAAAAAAAAAAAAAAAAAAAAAAAAAAAAA/AAAAAAAAAKCGAQAAAAAAAAAAAAAAAAAMAAAAAQAAAAAAAAAAAAAAAAAAAB8AAABUAAAARHLEBf///wEAAAAAAAAAAAAAAAAAAAAAAAAAAAAAAAAAAAAAAAAAAAAAAAB/f38A5+bmA8zMzADAwP8Af39/AAAAAAAAAAAAAAAAAAAAAAAAAAAAIQAAABgAAAAUAAAAsCUAAMAPAABwNQAAABIAABAAAAAmAAAACAAAAP//////////MAAAABQAAAAAAAAAAAD//wAAAQAAAP//AAABAA=="/>
+                <pr:smNativeData xmlns:pr="smNativeData" xmlns="smNativeData" val="SMDATA_16_V2g2ahMAAAAlAAAAZAAAAA0AAAAAkAAAAEgAAACQAAAASAAAAAAAAAABAAAAAAAAAAEAAABQAAAAAAAAAAAA4D8AAAAAAADgPwAAAAAAAOA/AAAAAAAA4D8AAAAAAADgPwAAAAAAAOA/AAAAAAAA4D8AAAAAAADgPwAAAAAAAOA/AAAAAAAA4D8CAAAAjAAAAAAAAAAAAAAARHLEDP///wgAAAAAAAAAAAAAAAAAAAAAAAAAAAAAAAAAAAAAZAAAAAEAAABAAAAAAAAAAAAAAAAAAAAAAAAAAAAAAAAAAAAAAAAAAAAAAAAAAAAAAAAAAAAAAAAAAAAAAAAAAAAAAAAAAAAAAAAAAAAAAAAAAAAAAAAAAAAAAAAAAAAAFAAAADwAAAAAAAAAAAAAAAAAAAAPAAAAAQAAACMAAAAjAAAAIwAAAB4AAAAAAAAAZAAAAGQAAAAAAAAAZAAAAGQAAAAVAAAAYAAAAAAAAAAAAAAADwAAACADAAAAAAAAAAAAAAEAAACgMgAAVgcAAKr4//8BAAAAf39/AAEAAABkAAAAAAAAABQAAABAHwAAAAAAACYAAAAAAAAAwOD//wAAAAAmAAAAZAAAABYAAABMAAAAAAAAAAAAAAAEAAAAAAAAAAEAAADn5uYKAAAAACgAAAAoAAAAZAAAAGQAAAAAAAAAzMzMAAAAAABQAAAAUAAAAGQAAABkAAAAAAAAABcAAAAUAAAAAAAAAAAAAAD/fwAA/38AAAAAAAAJAAAABAAAAP////8eAAAAaAAAAAAAAAAAAAAAAAAAAAAAAAAAAAAAECcAABAnAAAAAAAAAAAAAAAAAAAAAAAAAAAAAAAAAAAAAAAAAAAAABQAAAAAAAAAwMD/AAAAAABkAAAAMgAAAAAAAABkAAAAAAAAAH9/fwAKAAAAIgAAABgAAAAAAAAAAAAAAAAAAAAAAAAAAAAAAAAAAAAkAAAAJAAAAAAAAAAHAAAAAAAAAAAAAAAAAAAAAAAAAAAAAAAAAAAAf39/ACUAAABYAAAAAAAAAAAAAAAAAAAAAAAAAAAAAAAAAAAAAAAAAAAAAAAAAAAAAAAAAAAAAAA/AAAAAAAAAKCGAQAAAAAAAAAAAAAAAAAMAAAAAQAAAAAAAAAAAAAAAAAAAB8AAABUAAAARHLEBf///wEAAAAAAAAAAAAAAAAAAAAAAAAAAAAAAAAAAAAAAAAAAAAAAAB/f38A5+bmA8zMzADAwP8Af39/AAAAAAAAAAAAAAAAAAAAAAAAAAAAIQAAABgAAAAUAAAAsCUAAMAPAABwNQAAABIAABAAAAAmAAAACAAAAP//////////MAAAABQAAAAAAAAAAAD//wAAAQAAAP//AAABAA=="/>
               </a:ext>
             </a:extLst>
           </p:cNvSpPr>
@@ -12658,7 +12935,7 @@
           <p:cNvSpPr>
             <a:extLst>
               <a:ext uri="smNativeData">
-                <pr:smNativeData xmlns:pr="smNativeData" xmlns="smNativeData" val="SMDATA_16_kRU2ahMAAAAlAAAAZQAAAA0AAAAAkAAAAEgAAACQAAAASAAAAAAAAAAAAAAAAAAAAAEAAABQAAAAkpbK2xFOuz8AAAAAAADwvwAAAAAAAOA/AAAAAAAA4D8AAAAAAADgPwAAAAAAAOA/AAAAAAAA4D8AAAAAAADgPwAAAAAAAOA/AAAAAAAA4D8CAAAAjAAAAAEAAAAAAAAA7/P4AP///wgAAAAAAAAAAAAAAAAAAAAAAAAAAAAAAAAAAAAAeAAAAAEAAABAAAAAAAAAAAAAAABaAAAAAAAAAAAAAAAAAAAAAAAAAAAAAAAAAAAAAAAAAAAAAAAAAAAAAAAAAAAAAAAAAAAAAAAAAAAAAAAAAAAAAAAAAAAAAAAAAAAAFAAAADwAAAABAAAAAAAAANjg6AAUAAAAAQAAACMAAAAjAAAAIwAAAB4AAAAAAAAAZAAAAGQAAAAAAAAAZAAAAGQAAAAVAAAAYAAAAAAAAAAAAAAADwAAACADAAAAAAAAAAAAAAEAAACgMgAAVgcAAKr4//8BAAAAf39/AAEAAABkAAAAAAAAABQAAABAHwAAAAAAACYAAAAAAAAAwOD//wAAAAAmAAAAZAAAABYAAABMAAAAAQAAAAAAAAAGAAAAAAAAAAEAAAC5xNAAPAAAAAAAAAAoAAAAZAAAAGQAAAAAAAAAy8vLADwAAAAAAAAAKAAAAGQAAABkAAAAAAAAABcAAAAUAAAAAAAAAAAAAAD/fwAA/38AAAAAAAAJAAAABAAAAP////8eAAAAaAAAAAAAAAAAAAAAAAAAAAAAAAAAAAAAECcAABAnAAAAAAAAAAAAAAAAAAAAAAAAAAAAAAAAAAAAAAAAAAAAAHgAAAAAAAAAwMD/AAAAAAAAAAAAAAAAAAAAAABkAAAAAAAAAH9/fwAKAAAAIgAAABgAAAAAAAAAAAAAAAAAAAAAAAAAAAAAAAAAAAAkAAAAJAAAAAAAAAAHAAAAAAAAAAAAAAAAAAAAAAAAAAAAAAAAAAAAf39/ACUAAABYAAAAAAAAAAAAAAAAAAAAAAAAAAAAAAAAAAAAAAAAAAAAAAAAAAAAAAAAAAAAAAA/AAAAAAAAAKCGAQAAAAAAAAAAAAAAAAAMAAAAAQAAAAAAAAAAAAAAAAAAAB8AAABUAAAA7/P4AP///wEAAAAAAAAAAAAAAAAAAAAAAAAAAAAAAAAAAAAAAAAAANjg6AB/f38AucTQAMvLywDAwP8Af39/AAAAAAAAAAAAAAAAAAAAAAAAAAAAIQAAABgAAAAUAAAA2DYAALAKAAAoRwAAIBMAABAAAAAmAAAACAAAAP//////////MAAAABQAAAAAAAAAAAD//wAAAQAAAP//AAABAA=="/>
+                <pr:smNativeData xmlns:pr="smNativeData" xmlns="smNativeData" val="SMDATA_16_V2g2ahMAAAAlAAAAZQAAAA0AAAAAkAAAAEgAAACQAAAASAAAAAAAAAAAAAAAAAAAAAEAAABQAAAAkpbK2xFOuz8AAAAAAAAAAAAAAAAAAOA/AAAAAAAA4D8AAAAAAADgPwAAAAAAAOA/AAAAAAAA4D8AAAAAAADgPwAAAAAAAOA/AAAAAAAA4D8CAAAAjAAAAAEAAAAAAAAA7/P4AP///wgAAAAAAAAAAAAAAAAAAAAAAAAAAAAAAAAAAAAAeAAAAAEAAABAAAAAAAAAAAAAAABaAAAAAAAAAAAAAAAAAAAAAAAAAAAAAAAAAAAAAAAAAAAAAAAAAAAAAAAAAAAAAAAAAAAAAAAAAAAAAAAAAAAAAAAAAAAAAAAAAAAAFAAAADwAAAABAAAAAAAAANjg6AAUAAAAAQAAACMAAAAjAAAAIwAAAB4AAAAAAAAAZAAAAGQAAAAAAAAAZAAAAGQAAAAVAAAAYAAAAAAAAAAAAAAADwAAACADAAAAAAAAAAAAAAEAAACgMgAAVgcAAKr4//8BAAAAf39/AAEAAABkAAAAAAAAABQAAABAHwAAAAAAACYAAAAAAAAAwOD//wAAAAAmAAAAZAAAABYAAABMAAAAAQAAAAAAAAAGAAAAAAAAAAEAAAC5xNAAPAAAAAAAAAAoAAAAZAAAAGQAAAAAAAAAy8vLADwAAAAAAAAAKAAAAGQAAABkAAAAAAAAABcAAAAUAAAAAAAAAAAAAAD/fwAA/38AAAAAAAAJAAAABAAAAP////8eAAAAaAAAAAAAAAAAAAAAAAAAAAAAAAAAAAAAECcAABAnAAAAAAAAAAAAAAAAAAAAAAAAAAAAAAAAAAAAAAAAAAAAAHgAAAAAAAAAwMD/AAAAAAAAAAAAAAAAAAAAAABkAAAAAAAAAH9/fwAKAAAAIgAAABgAAAAAAAAAAAAAAAAAAAAAAAAAAAAAAAAAAAAkAAAAJAAAAAAAAAAHAAAAAAAAAAAAAAAAAAAAAAAAAAAAAAAAAAAAf39/ACUAAABYAAAAAAAAAAAAAAAAAAAAAAAAAAAAAAAAAAAAAAAAAAAAAAAAAAAAAAAAAAAAAAA/AAAAAAAAAKCGAQAAAAAAAAAAAAAAAAAMAAAAAQAAAAAAAAAAAAAAAAAAAB8AAABUAAAA7/P4AP///wEAAAAAAAAAAAAAAAAAAAAAAAAAAAAAAAAAAAAAAAAAANjg6AB/f38AucTQAMvLywDAwP8Af39/AAAAAAAAAAAAAAAAAAAAAAAAAAAAIQAAABgAAAAUAAAA2DYAALAKAAAoRwAAIBMAABAAAAAmAAAACAAAAP//////////MAAAABQAAAAAAAAAAAD//wAAAQAAAP//AAABAA=="/>
               </a:ext>
             </a:extLst>
           </p:cNvSpPr>
@@ -12700,7 +12977,7 @@
           <p:cNvSpPr>
             <a:extLst>
               <a:ext uri="smNativeData">
-                <pr:smNativeData xmlns:pr="smNativeData" xmlns="smNativeData" val="SMDATA_16_kRU2ahMAAAAlAAAAZAAAAA0AAAAAkAAAAEgAAACQAAAASAAAAAAAAAABAAAAAAAAAAEAAABQAAAAAAAAAAAA4D8AAAAAAADgPwAAAAAAAOA/AAAAAAAA4D8AAAAAAADgPwAAAAAAAOA/AAAAAAAA4D8AAAAAAADgPwAAAAAAAOA/AAAAAAAA4D8CAAAAjAAAAAAAAAAAAAAARHLEDP///wgAAAAAAAAAAAAAAAAAAAAAAAAAAAAAAAAAAAAAZAAAAAEAAABAAAAAAAAAAAAAAAAAAAAAAAAAAAAAAAAAAAAAAAAAAAAAAAAAAAAAAAAAAAAAAAAAAAAAAAAAAAAAAAAAAAAAAAAAAAAAAAAAAAAAAAAAAAAAAAAAAAAAFAAAADwAAAAAAAAAAAAAAAAAAAAPAAAAAQAAACMAAAAjAAAAIwAAAB4AAAAAAAAAZAAAAGQAAAAAAAAAZAAAAGQAAAAVAAAAYAAAAAAAAAAAAAAADwAAACADAAAAAAAAAAAAAAEAAACgMgAAVgcAAKr4//8BAAAAf39/AAEAAABkAAAAAAAAABQAAABAHwAAAAAAACYAAAAAAAAAwOD//wAAAAAmAAAAZAAAABYAAABMAAAAAAAAAAAAAAAEAAAAAAAAAAEAAADn5uYKAAAAACgAAAAoAAAAZAAAAGQAAAAAAAAAzMzMAAAAAABQAAAAUAAAAGQAAABkAAAAAAAAABcAAAAUAAAAAAAAAAAAAAD/fwAA/38AAAAAAAAJAAAABAAAAAoACgAeAAAAaAAAAAAAAAAAAAAAAAAAAAAAAAAAAAAAECcAABAnAAAAAAAAAAAAAAAAAAAAAAAAAAAAAAAAAAAAAAAAAAAAABQAAAAAAAAAwMD/AAAAAABkAAAAMgAAAAAAAABkAAAAAAAAAH9/fwAKAAAAIgAAABgAAAAAAAAAAAAAAAAAAAAAAAAAAAAAAAAAAAAkAAAAJAAAAAAAAAAHAAAAAAAAAAAAAAAAAAAAAAAAAAAAAAAAAAAAf39/ACUAAABYAAAAAAAAAAAAAAAAAAAAAAAAAAAAAAAAAAAAAAAAAAAAAAAAAAAAAAAAAAAAAAA/AAAAAAAAAKCGAQAAAAAAAAAAAAAAAAAMAAAAAQAAAAAAAAAAAAAAAAAAAB8AAABUAAAARHLEBf///wEAAAAAAAAAAAAAAAAAAAAAAAAAAAAAAAAAAAAAAAAAAAAAAAB/f38A5+bmA8zMzADAwP8Af39/AAAAAAAAAAAAAAAAAAAAAAAAAAAAIQAAABgAAAAUAAAA2DYAAIANAAAoRwAA4BAAABAAAAAmAAAACAAAAP//////////MAAAABQAAAAAAAAAAAD//wAAAQAAAP//AAABAA=="/>
+                <pr:smNativeData xmlns:pr="smNativeData" xmlns="smNativeData" val="SMDATA_16_V2g2ahMAAAAlAAAAZAAAAA0AAAAAkAAAAEgAAACQAAAASAAAAAAAAAABAAAAAAAAAAEAAABQAAAAAAAAAAAA4D8AAAAAAADgPwAAAAAAAOA/AAAAAAAA4D8AAAAAAADgPwAAAAAAAOA/AAAAAAAA4D8AAAAAAADgPwAAAAAAAOA/AAAAAAAA4D8CAAAAjAAAAAAAAAAAAAAARHLEDP///wgAAAAAAAAAAAAAAAAAAAAAAAAAAAAAAAAAAAAAZAAAAAEAAABAAAAAAAAAAAAAAAAAAAAAAAAAAAAAAAAAAAAAAAAAAAAAAAAAAAAAAAAAAAAAAAAAAAAAAAAAAAAAAAAAAAAAAAAAAAAAAAAAAAAAAAAAAAAAAAAAAAAAFAAAADwAAAAAAAAAAAAAAAAAAAAPAAAAAQAAACMAAAAjAAAAIwAAAB4AAAAAAAAAZAAAAGQAAAAAAAAAZAAAAGQAAAAVAAAAYAAAAAAAAAAAAAAADwAAACADAAAAAAAAAAAAAAEAAACgMgAAVgcAAKr4//8BAAAAf39/AAEAAABkAAAAAAAAABQAAABAHwAAAAAAACYAAAAAAAAAwOD//wAAAAAmAAAAZAAAABYAAABMAAAAAAAAAAAAAAAEAAAAAAAAAAEAAADn5uYKAAAAACgAAAAoAAAAZAAAAGQAAAAAAAAAzMzMAAAAAABQAAAAUAAAAGQAAABkAAAAAAAAABcAAAAUAAAAAAAAAAAAAAD/fwAA/38AAAAAAAAJAAAABAAAAAoACgAeAAAAaAAAAAAAAAAAAAAAAAAAAAAAAAAAAAAAECcAABAnAAAAAAAAAAAAAAAAAAAAAAAAAAAAAAAAAAAAAAAAAAAAABQAAAAAAAAAwMD/AAAAAABkAAAAMgAAAAAAAABkAAAAAAAAAH9/fwAKAAAAIgAAABgAAAAAAAAAAAAAAAAAAAAAAAAAAAAAAAAAAAAkAAAAJAAAAAAAAAAHAAAAAAAAAAAAAAAAAAAAAAAAAAAAAAAAAAAAf39/ACUAAABYAAAAAAAAAAAAAAAAAAAAAAAAAAAAAAAAAAAAAAAAAAAAAAAAAAAAAAAAAAAAAAA/AAAAAAAAAKCGAQAAAAAAAAAAAAAAAAAMAAAAAQAAAAAAAAAAAAAAAAAAAB8AAABUAAAARHLEBf///wEAAAAAAAAAAAAAAAAAAAAAAAAAAAAAAAAAAAAAAAAAAAAAAAB/f38A5+bmA8zMzADAwP8Af39/AAAAAAAAAAAAAAAAAAAAAAAAAAAAIQAAABgAAAAUAAAA2DYAAIANAAAoRwAA4BAAABAAAAAmAAAACAAAAP//////////MAAAABQAAAAAAAAAAAD//wAAAQAAAP//AAABAA=="/>
               </a:ext>
             </a:extLst>
           </p:cNvSpPr>
@@ -12753,7 +13030,7 @@
           <p:cNvSpPr>
             <a:extLst>
               <a:ext uri="smNativeData">
-                <pr:smNativeData xmlns:pr="smNativeData" xmlns="smNativeData" val="SMDATA_16_kRU2ahMAAAAlAAAAZAAAAA0AAAAAkAAAAEgAAACQAAAASAAAAAAAAAAAAAAAAAAAAAEAAABQAAAAAAAAAAAA4D8AAAAAAADgPwAAAAAAAOA/AAAAAAAA4D8AAAAAAADgPwAAAAAAAOA/AAAAAAAA4D8AAAAAAADgPwAAAAAAAOA/AAAAAAAA4D8CAAAAjAAAAAAAAAAAAAAARHLEDP///wgAAAAAAAAAAAAAAAAAAAAAAAAAAAAAAAAAAAAAZAAAAAEAAABAAAAAAAAAAAAAAAAAAAAAAAAAAAAAAAAAAAAAAAAAAAAAAAAAAAAAAAAAAAAAAAAAAAAAAAAAAAAAAAAAAAAAAAAAAAAAAAAAAAAAAAAAAAAAAAAAAAAAFAAAADwAAAAAAAAAAAAAAAAAAAAPAAAAAQAAACMAAAAjAAAAIwAAAB4AAAAAAAAAZAAAAGQAAAAAAAAAZAAAAGQAAAAVAAAAYAAAAAAAAAAAAAAADwAAACADAAAAAAAAAAAAAAEAAACgMgAAVgcAAKr4//8BAAAAf39/AAEAAABkAAAAAAAAABQAAABAHwAAAAAAACYAAAAAAAAAwOD//wAAAAAmAAAAZAAAABYAAABMAAAAAAAAAAAAAAAEAAAAAAAAAAEAAADn5uYKAAAAACgAAAAoAAAAZAAAAGQAAAAAAAAAzMzMAAAAAABQAAAAUAAAAGQAAABkAAAAAAAAABcAAAAUAAAAAAAAAAAAAAD/fwAA/38AAAAAAAAJAAAABAAAABACAgEeAAAAaAAAAAAAAAAAAAAAAAAAAAAAAAAAAAAAECcAABAnAAAAAAAAAAAAAAAAAAAAAAAAAAAAAAAAAAAAAAAAAAAAABQAAAAAAAAAwMD/AAAAAABkAAAAMgAAAAAAAABkAAAAAAAAAH9/fwAKAAAAIgAAABgAAAAAAAAAAAAAAAAAAAAAAAAAAAAAAAAAAAAkAAAAJAAAAAAAAAAHAAAAAAAAAAAAAAAAAAAAAAAAAAAAAAAAAAAAf39/ACUAAABYAAAAAAAAAAAAAAAAAAAAAAAAAAAAAAAAAAAAAAAAAAAAAAAAAAAAAAAAAAAAAAA/AAAAAAAAAKCGAQAAAAAAAAAAAAAAAAAMAAAAAQAAAAAAAAAAAAAAAAAAAB8AAABUAAAARHLEBf///wEAAAAAAAAAAAAAAAAAAAAAAAAAAAAAAAAAAAAAAAAAAAAAAAB/f38A5+bmA8zMzADAwP8Af39/AAAAAAAAAAAAAAAAAAAAAAAAAAAAIQAAABgAAAAUAAAAYAMAAIAWAADgRgAAICUAABAAAAAmAAAACAAAAP//////////MAAAABQAAAAAAAAAAAD//wAAAQAAAP//AAABAA=="/>
+                <pr:smNativeData xmlns:pr="smNativeData" xmlns="smNativeData" val="SMDATA_16_V2g2ahMAAAAlAAAAZAAAAA0AAAAAkAAAAEgAAACQAAAASAAAAAAAAAAAAAAAAAAAAAEAAABQAAAAAAAAAAAA4D8AAAAAAADgPwAAAAAAAOA/AAAAAAAA4D8AAAAAAADgPwAAAAAAAOA/AAAAAAAA4D8AAAAAAADgPwAAAAAAAOA/AAAAAAAA4D8CAAAAjAAAAAAAAAAAAAAARHLEDP///wgAAAAAAAAAAAAAAAAAAAAAAAAAAAAAAAAAAAAAZAAAAAEAAABAAAAAAAAAAAAAAAAAAAAAAAAAAAAAAAAAAAAAAAAAAAAAAAAAAAAAAAAAAAAAAAAAAAAAAAAAAAAAAAAAAAAAAAAAAAAAAAAAAAAAAAAAAAAAAAAAAAAAFAAAADwAAAAAAAAAAAAAAAAAAAAPAAAAAQAAACMAAAAjAAAAIwAAAB4AAAAAAAAAZAAAAGQAAAAAAAAAZAAAAGQAAAAVAAAAYAAAAAAAAAAAAAAADwAAACADAAAAAAAAAAAAAAEAAACgMgAAVgcAAKr4//8BAAAAf39/AAEAAABkAAAAAAAAABQAAABAHwAAAAAAACYAAAAAAAAAwOD//wAAAAAmAAAAZAAAABYAAABMAAAAAAAAAAAAAAAEAAAAAAAAAAEAAADn5uYKAAAAACgAAAAoAAAAZAAAAGQAAAAAAAAAzMzMAAAAAABQAAAAUAAAAGQAAABkAAAAAAAAABcAAAAUAAAAAAAAAAAAAAD/fwAA/38AAAAAAAAJAAAABAAAABACAgEeAAAAaAAAAAAAAAAAAAAAAAAAAAAAAAAAAAAAECcAABAnAAAAAAAAAAAAAAAAAAAAAAAAAAAAAAAAAAAAAAAAAAAAABQAAAAAAAAAwMD/AAAAAABkAAAAMgAAAAAAAABkAAAAAAAAAH9/fwAKAAAAIgAAABgAAAAAAAAAAAAAAAAAAAAAAAAAAAAAAAAAAAAkAAAAJAAAAAAAAAAHAAAAAAAAAAAAAAAAAAAAAAAAAAAAAAAAAAAAf39/ACUAAABYAAAAAAAAAAAAAAAAAAAAAAAAAAAAAAAAAAAAAAAAAAAAAAAAAAAAAAAAAAAAAAA/AAAAAAAAAKCGAQAAAAAAAAAAAAAAAAAMAAAAAQAAAAAAAAAAAAAAAAAAAB8AAABUAAAARHLEBf///wEAAAAAAAAAAAAAAAAAAAAAAAAAAAAAAAAAAAAAAAAAAAAAAAB/f38A5+bmA8zMzADAwP8Af39/AAAAAAAAAAAAAAAAAAAAAAAAAAAAIQAAABgAAAAUAAAAYAMAAIAWAADgRgAAICUAAAAAAAAmAAAACAAAAP//////////MAAAABQAAAAAAAAAAAD//wAAAQAAAP//AAABAA=="/>
               </a:ext>
             </a:extLst>
           </p:cNvSpPr>
@@ -12846,14 +13123,36 @@
                   <a:srgbClr val="283441"/>
                 </a:solidFill>
               </a:rPr>
-              <a:t>cor.Serve </a:t>
-            </a:r>
+              <a:t>cor</a:t>
+            </a:r>
+            <a:endParaRPr lang="en-us" sz="1600" cap="none">
+              <a:solidFill>
+                <a:srgbClr val="283441"/>
+              </a:solidFill>
+            </a:endParaRPr>
+          </a:p>
+          <a:p>
+            <a:pPr marL="177800" indent="-177800" algn="l">
+              <a:spcAft>
+                <a:spcPts val="800"/>
+              </a:spcAft>
+              <a:buSzTx/>
+              <a:buChar char="•"/>
+            </a:pPr>
             <a:r>
               <a:rPr lang="en-us" sz="1600" cap="none">
                 <a:solidFill>
                   <a:srgbClr val="283441"/>
                 </a:solidFill>
               </a:rPr>
+              <a:t>Serve </a:t>
+            </a:r>
+            <a:r>
+              <a:rPr lang="en-us" sz="1600" cap="none">
+                <a:solidFill>
+                  <a:srgbClr val="283441"/>
+                </a:solidFill>
+              </a:rPr>
               <a:t>para </a:t>
             </a:r>
             <a:r>
@@ -12918,7 +13217,29 @@
                   <a:srgbClr val="283441"/>
                 </a:solidFill>
               </a:rPr>
-              <a:t>métrica.Arquivo </a:t>
+              <a:t>métrica.</a:t>
+            </a:r>
+            <a:endParaRPr lang="en-us" sz="1600" cap="none">
+              <a:solidFill>
+                <a:srgbClr val="283441"/>
+              </a:solidFill>
+            </a:endParaRPr>
+          </a:p>
+          <a:p>
+            <a:pPr marL="177800" indent="-177800" algn="l">
+              <a:spcAft>
+                <a:spcPts val="800"/>
+              </a:spcAft>
+              <a:buSzTx/>
+              <a:buChar char="•"/>
+            </a:pPr>
+            <a:r>
+              <a:rPr lang="en-us" sz="1600" cap="none">
+                <a:solidFill>
+                  <a:srgbClr val="283441"/>
+                </a:solidFill>
+              </a:rPr>
+              <a:t>Arquivo </a:t>
             </a:r>
             <a:r>
               <a:rPr lang="en-us" sz="1600" cap="none">
@@ -13006,7 +13327,7 @@
           <p:cNvSpPr>
             <a:extLst>
               <a:ext uri="smNativeData">
-                <pr:smNativeData xmlns:pr="smNativeData" xmlns="smNativeData" val="SMDATA_16_kRU2ahMAAAAlAAAAZAAAAA0AAAAAkAAAAEgAAACQAAAASAAAAAAAAAABAAAAAAAAAAEAAABQAAAAAAAAAAAA4D8AAAAAAADgPwAAAAAAAOA/AAAAAAAA4D8AAAAAAADgPwAAAAAAAOA/AAAAAAAA4D8AAAAAAADgPwAAAAAAAOA/AAAAAAAA4D8CAAAAjAAAAAAAAAAAAAAARHLEDP///wgAAAAAAAAAAAAAAAAAAAAAAAAAAAAAAAAAAAAAZAAAAAEAAABAAAAAAAAAAAAAAAAAAAAAAAAAAAAAAAAAAAAAAAAAAAAAAAAAAAAAAAAAAAAAAAAAAAAAAAAAAAAAAAAAAAAAAAAAAAAAAAAAAAAAAAAAAAAAAAAAAAAAFAAAADwAAAAAAAAAAAAAAAAAAAAPAAAAAQAAACMAAAAjAAAAIwAAAB4AAAAAAAAAZAAAAGQAAAAAAAAAZAAAAGQAAAAVAAAAYAAAAAAAAAAAAAAADwAAACADAAAAAAAAAAAAAAEAAACgMgAAVgcAAKr4//8BAAAAf39/AAEAAABkAAAAAAAAABQAAABAHwAAAAAAACYAAAAAAAAAwOD//wAAAAAmAAAAZAAAABYAAABMAAAAAAAAAAAAAAAEAAAAAAAAAAEAAADn5uYKAAAAACgAAAAoAAAAZAAAAGQAAAAAAAAAzMzMAAAAAABQAAAAUAAAAGQAAABkAAAAAAAAABcAAAAUAAAAAAAAAAAAAAD/fwAA/38AAAAAAAAJAAAABAAAANADAAAeAAAAaAAAAAAAAAAAAAAAAAAAAAAAAAAAAAAAECcAABAnAAAAAAAAAAAAAAAAAAAAAAAAAAAAAAAAAAAAAAAAAAAAABQAAAAAAAAAwMD/AAAAAABkAAAAMgAAAAAAAABkAAAAAAAAAH9/fwAKAAAAIgAAABgAAAAAAAAAAAAAAAAAAAAAAAAAAAAAAAAAAAAkAAAAJAAAAAAAAAAHAAAAAAAAAAAAAAAAAAAAAAAAAAAAAAAAAAAAf39/ACUAAABYAAAAAAAAAAAAAAAAAAAAAAAAAAAAAAAAAAAAAAAAAAAAAAAAAAAAAAAAAAAAAAA/AAAAAAAAAKCGAQAAAAAAAAAAAAAAAAAMAAAAAQAAAAAAAAAAAAAAAAAAAB8AAABUAAAARHLEBf///wEAAAAAAAAAAAAAAAAAAAAAAAAAAAAAAAAAAAAAAAAAAAAAAAB/f38A5+bmA8zMzADAwP8Af39/AAAAAAAAAAAAAAAAAAAAAAAAAAAAIQAAABgAAAAUAAAAYAMAACABAACgRwAA0AIAABAAAAAmAAAACAAAAP//////////MAAAABQAAAAAAAAAAAD//wAAAQAAAP//AAABAA=="/>
+                <pr:smNativeData xmlns:pr="smNativeData" xmlns="smNativeData" val="SMDATA_16_V2g2ahMAAAAlAAAAZAAAAA0AAAAAkAAAAEgAAACQAAAASAAAAAAAAAABAAAAAAAAAAEAAABQAAAAAAAAAAAA4D8AAAAAAADgPwAAAAAAAOA/AAAAAAAA4D8AAAAAAADgPwAAAAAAAOA/AAAAAAAA4D8AAAAAAADgPwAAAAAAAOA/AAAAAAAA4D8CAAAAjAAAAAAAAAAAAAAARHLEDP///wgAAAAAAAAAAAAAAAAAAAAAAAAAAAAAAAAAAAAAZAAAAAEAAABAAAAAAAAAAAAAAAAAAAAAAAAAAAAAAAAAAAAAAAAAAAAAAAAAAAAAAAAAAAAAAAAAAAAAAAAAAAAAAAAAAAAAAAAAAAAAAAAAAAAAAAAAAAAAAAAAAAAAFAAAADwAAAAAAAAAAAAAAAAAAAAPAAAAAQAAACMAAAAjAAAAIwAAAB4AAAAAAAAAZAAAAGQAAAAAAAAAZAAAAGQAAAAVAAAAYAAAAAAAAAAAAAAADwAAACADAAAAAAAAAAAAAAEAAACgMgAAVgcAAKr4//8BAAAAf39/AAEAAABkAAAAAAAAABQAAABAHwAAAAAAACYAAAAAAAAAwOD//wAAAAAmAAAAZAAAABYAAABMAAAAAAAAAAAAAAAEAAAAAAAAAAEAAADn5uYKAAAAACgAAAAoAAAAZAAAAGQAAAAAAAAAzMzMAAAAAABQAAAAUAAAAGQAAABkAAAAAAAAABcAAAAUAAAAAAAAAAAAAAD/fwAA/38AAAAAAAAJAAAABAAAANADAAAeAAAAaAAAAAAAAAAAAAAAAAAAAAAAAAAAAAAAECcAABAnAAAAAAAAAAAAAAAAAAAAAAAAAAAAAAAAAAAAAAAAAAAAABQAAAAAAAAAwMD/AAAAAABkAAAAMgAAAAAAAABkAAAAAAAAAH9/fwAKAAAAIgAAABgAAAAAAAAAAAAAAAAAAAAAAAAAAAAAAAAAAAAkAAAAJAAAAAAAAAAHAAAAAAAAAAAAAAAAAAAAAAAAAAAAAAAAAAAAf39/ACUAAABYAAAAAAAAAAAAAAAAAAAAAAAAAAAAAAAAAAAAAAAAAAAAAAAAAAAAAAAAAAAAAAA/AAAAAAAAAKCGAQAAAAAAAAAAAAAAAAAMAAAAAQAAAAAAAAAAAAAAAAAAAB8AAABUAAAARHLEBf///wEAAAAAAAAAAAAAAAAAAAAAAAAAAAAAAAAAAAAAAAAAAAAAAAB/f38A5+bmA8zMzADAwP8Af39/AAAAAAAAAAAAAAAAAAAAAAAAAAAAIQAAABgAAAAUAAAAYAMAACABAACgRwAA0AIAABAAAAAmAAAACAAAAP//////////MAAAABQAAAAAAAAAAAD//wAAAQAAAP//AAABAA=="/>
               </a:ext>
             </a:extLst>
           </p:cNvSpPr>
@@ -13034,7 +13355,7 @@
               <a:buNone/>
             </a:pPr>
             <a:r>
-              <a:rPr lang="en-us" sz="1200" b="1" cap="none" spc="40">
+              <a:rPr lang="en-us" sz="1200" b="1" cap="none" spc="8">
                 <a:solidFill>
                   <a:srgbClr val="E0A038"/>
                 </a:solidFill>
@@ -13042,7 +13363,7 @@
               <a:t>NÃO </a:t>
             </a:r>
             <a:r>
-              <a:rPr lang="en-us" sz="1200" b="1" cap="none" spc="40">
+              <a:rPr lang="en-us" sz="1200" b="1" cap="none" spc="8">
                 <a:solidFill>
                   <a:srgbClr val="E0A038"/>
                 </a:solidFill>
@@ -13059,7 +13380,7 @@
           <p:cNvSpPr>
             <a:extLst>
               <a:ext uri="smNativeData">
-                <pr:smNativeData xmlns:pr="smNativeData" xmlns="smNativeData" val="SMDATA_16_kRU2ahMAAAAlAAAAZAAAAA0AAAAAkAAAAEgAAACQAAAASAAAAAAAAAABAAAAAAAAAAEAAABQAAAAAAAAAAAA4D8AAAAAAADgPwAAAAAAAOA/AAAAAAAA4D8AAAAAAADgPwAAAAAAAOA/AAAAAAAA4D8AAAAAAADgPwAAAAAAAOA/AAAAAAAA4D8CAAAAjAAAAAAAAAAAAAAARHLEDP///wgAAAAAAAAAAAAAAAAAAAAAAAAAAAAAAAAAAAAAZAAAAAEAAABAAAAAAAAAAAAAAAAAAAAAAAAAAAAAAAAAAAAAAAAAAAAAAAAAAAAAAAAAAAAAAAAAAAAAAAAAAAAAAAAAAAAAAAAAAAAAAAAAAAAAAAAAAAAAAAAAAAAAFAAAADwAAAAAAAAAAAAAAAAAAAAPAAAAAQAAACMAAAAjAAAAIwAAAB4AAAAAAAAAZAAAAGQAAAAAAAAAZAAAAGQAAAAVAAAAYAAAAAAAAAAAAAAADwAAACADAAAAAAAAAAAAAAEAAACgMgAAVgcAAKr4//8BAAAAf39/AAEAAABkAAAAAAAAABQAAABAHwAAAAAAACYAAAAAAAAAwOD//wAAAAAmAAAAZAAAABYAAABMAAAAAAAAAAAAAAAEAAAAAAAAAAEAAADn5uYKAAAAACgAAAAoAAAAZAAAAGQAAAAAAAAAzMzMAAAAAABQAAAAUAAAAGQAAABkAAAAAAAAABcAAAAUAAAAAAAAAAAAAAD/fwAA/38AAAAAAAAJAAAABAAAAPAocT0eAAAAaAAAAAAAAAAAAAAAAAAAAAAAAAAAAAAAECcAABAnAAAAAAAAAAAAAAAAAAAAAAAAAAAAAAAAAAAAAAAAAAAAABQAAAAAAAAAwMD/AAAAAABkAAAAMgAAAAAAAABkAAAAAAAAAH9/fwAKAAAAIgAAABgAAAAAAAAAAAAAAAAAAAAAAAAAAAAAAAAAAAAkAAAAJAAAAAAAAAAHAAAAAAAAAAAAAAAAAAAAAAAAAAAAAAAAAAAAf39/ACUAAABYAAAAAAAAAAAAAAAAAAAAAAAAAAAAAAAAAAAAAAAAAAAAAAAAAAAAAAAAAAAAAAA/AAAAAAAAAKCGAQAAAAAAAAAAAAAAAAAMAAAAAQAAAAAAAAAAAAAAAAAAAB8AAABUAAAARHLEBf///wEAAAAAAAAAAAAAAAAAAAAAAAAAAAAAAAAAAAAAAAAAAAAAAAB/f38A5+bmA8zMzADAwP8Af39/AAAAAAAAAAAAAAAAAAAAAAAAAAAAIQAAABgAAAAUAAAAYAMAAF0CAACgRwAA3QYAABAAAAAmAAAACAAAAP//////////MAAAABQAAAAAAAAAAAD//wAAAQAAAP//AAABAA=="/>
+                <pr:smNativeData xmlns:pr="smNativeData" xmlns="smNativeData" val="SMDATA_16_V2g2ahMAAAAlAAAAZAAAAA0AAAAAkAAAAEgAAACQAAAASAAAAAAAAAABAAAAAAAAAAEAAABQAAAAAAAAAAAA4D8AAAAAAADgPwAAAAAAAOA/AAAAAAAA4D8AAAAAAADgPwAAAAAAAOA/AAAAAAAA4D8AAAAAAADgPwAAAAAAAOA/AAAAAAAA4D8CAAAAjAAAAAAAAAAAAAAARHLEDP///wgAAAAAAAAAAAAAAAAAAAAAAAAAAAAAAAAAAAAAZAAAAAEAAABAAAAAAAAAAAAAAAAAAAAAAAAAAAAAAAAAAAAAAAAAAAAAAAAAAAAAAAAAAAAAAAAAAAAAAAAAAAAAAAAAAAAAAAAAAAAAAAAAAAAAAAAAAAAAAAAAAAAAFAAAADwAAAAAAAAAAAAAAAAAAAAPAAAAAQAAACMAAAAjAAAAIwAAAB4AAAAAAAAAZAAAAGQAAAAAAAAAZAAAAGQAAAAVAAAAYAAAAAAAAAAAAAAADwAAACADAAAAAAAAAAAAAAEAAACgMgAAVgcAAKr4//8BAAAAf39/AAEAAABkAAAAAAAAABQAAABAHwAAAAAAACYAAAAAAAAAwOD//wAAAAAmAAAAZAAAABYAAABMAAAAAAAAAAAAAAAEAAAAAAAAAAEAAADn5uYKAAAAACgAAAAoAAAAZAAAAGQAAAAAAAAAzMzMAAAAAABQAAAAUAAAAGQAAABkAAAAAAAAABcAAAAUAAAAAAAAAAAAAAD/fwAA/38AAAAAAAAJAAAABAAAAPAocT0eAAAAaAAAAAAAAAAAAAAAAAAAAAAAAAAAAAAAECcAABAnAAAAAAAAAAAAAAAAAAAAAAAAAAAAAAAAAAAAAAAAAAAAABQAAAAAAAAAwMD/AAAAAABkAAAAMgAAAAAAAABkAAAAAAAAAH9/fwAKAAAAIgAAABgAAAAAAAAAAAAAAAAAAAAAAAAAAAAAAAAAAAAkAAAAJAAAAAAAAAAHAAAAAAAAAAAAAAAAAAAAAAAAAAAAAAAAAAAAf39/ACUAAABYAAAAAAAAAAAAAAAAAAAAAAAAAAAAAAAAAAAAAAAAAAAAAAAAAAAAAAAAAAAAAAA/AAAAAAAAAKCGAQAAAAAAAAAAAAAAAAAMAAAAAQAAAAAAAAAAAAAAAAAAAB8AAABUAAAARHLEBf///wEAAAAAAAAAAAAAAAAAAAAAAAAAAAAAAAAAAAAAAAAAAAAAAAB/f38A5+bmA8zMzADAwP8Af39/AAAAAAAAAAAAAAAAAAAAAAAAAAAAIQAAABgAAAAUAAAAYAMAAF0CAACgRwAA3QYAABAAAAAmAAAACAAAAP//////////MAAAABQAAAAAAAAAAAD//wAAAQAAAP//AAABAA=="/>
               </a:ext>
             </a:extLst>
           </p:cNvSpPr>
@@ -13107,7 +13428,7 @@
           <p:cNvSpPr>
             <a:extLst>
               <a:ext uri="smNativeData">
-                <pr:smNativeData xmlns:pr="smNativeData" xmlns="smNativeData" val="SMDATA_16_kRU2ahMAAAAlAAAAZQAAAA0AAAAAkAAAAEgAAACQAAAASAAAAAAAAAAAAAAAAAAAAAEAAABQAAAAyCQjZ2FPqz8AAAAAAADwvwAAAAAAAOA/AAAAAAAA4D8AAAAAAADgPwAAAAAAAOA/AAAAAAAA4D8AAAAAAADgPwAAAAAAAOA/AAAAAAAA4D8CAAAAjAAAAAEAAAAAAAAA7/P4AP///wgAAAAAAAAAAAAAAAAAAAAAAAAAAAAAAAAAAAAAeAAAAAEAAABAAAAAAAAAAAAAAABaAAAAAAAAAAAAAAAAAAAAAAAAAAAAAAAAAAAAAAAAAAAAAAAAAAAAAAAAAAAAAAAAAAAAAAAAAAAAAAAAAAAAAAAAAAAAAAAAAAAAFAAAADwAAAAAAAAAAAAAAAAAAAAPAAAAAQAAACMAAAAjAAAAIwAAAB4AAAAAAAAAZAAAAGQAAAAAAAAAZAAAAGQAAAAVAAAAYAAAAAAAAAAAAAAADwAAACADAAAAAAAAAAAAAAEAAACgMgAAVgcAAKr4//8BAAAAf39/AAEAAABkAAAAAAAAABQAAABAHwAAAAAAACYAAAAAAAAAwOD//wAAAAAmAAAAZAAAABYAAABMAAAAAQAAAAAAAAAGAAAAAAAAAAEAAAC5xNAAPAAAAAAAAAAoAAAAZAAAAGQAAAAAAAAAy8vLADwAAAAAAAAAKAAAAGQAAABkAAAAAAAAABcAAAAUAAAAAAAAAAAAAAD/fwAA/38AAAAAAAAJAAAABAAAAPEEAAAeAAAAaAAAAAAAAAAAAAAAAAAAAAAAAAAAAAAAECcAABAnAAAAAAAAAAAAAAAAAAAAAAAAAAAAAAAAAAAAAAAAAAAAAHgAAAAAAAAAwMD/AAAAAAAAAAAAAAAAAAAAAABkAAAAAAAAAH9/fwAKAAAAIgAAABgAAAAAAAAAAAAAAAAAAAAAAAAAAAAAAAAAAAAkAAAAJAAAAAAAAAAHAAAAAAAAAAAAAAAAAAAAAAAAAAAAAAAAAAAAf39/ACUAAABYAAAAAAAAAAAAAAAAAAAAAAAAAAAAAAAAAAAAAAAAAAAAAAAAAAAAAAAAAAAAAAA/AAAAAAAAAKCGAQAAAAAAAAAAAAAAAAAMAAAAAQAAAAAAAAAAAAAAAAAAAB8AAABUAAAA7/P4AP///wEAAAAAAAAAAAAAAAAAAAAAAAAAAAAAAAAAAAAAAAAAAAAAAAB/f38AucTQAMvLywDAwP8Af39/AAAAAAAAAAAAAAAAAAAAAAAAAAAAIQAAABgAAAAUAAAAYAMAALgIAABAQQAAmBkAABAAAAAmAAAACAAAAP//////////MAAAABQAAAAAAAAAAAD//wAAAQAAAP//AAABAA=="/>
+                <pr:smNativeData xmlns:pr="smNativeData" xmlns="smNativeData" val="SMDATA_16_V2g2ahMAAAAlAAAAZQAAAA0AAAAAkAAAAEgAAACQAAAASAAAAAAAAAAAAAAAAAAAAAEAAABQAAAAyCQjZ2FPqz8AAAAAAAAAAAAAAAAAAOA/AAAAAAAA4D8AAAAAAADgPwAAAAAAAOA/AAAAAAAA4D8AAAAAAADgPwAAAAAAAOA/AAAAAAAA4D8CAAAAjAAAAAEAAAAAAAAA7/P4AP///wgAAAAAAAAAAAAAAAAAAAAAAAAAAAAAAAAAAAAAeAAAAAEAAABAAAAAAAAAAAAAAABaAAAAAAAAAAAAAAAAAAAAAAAAAAAAAAAAAAAAAAAAAAAAAAAAAAAAAAAAAAAAAAAAAAAAAAAAAAAAAAAAAAAAAAAAAAAAAAAAAAAAFAAAADwAAAAAAAAAAAAAAAAAAAAPAAAAAQAAACMAAAAjAAAAIwAAAB4AAAAAAAAAZAAAAGQAAAAAAAAAZAAAAGQAAAAVAAAAYAAAAAAAAAAAAAAADwAAACADAAAAAAAAAAAAAAEAAACgMgAAVgcAAKr4//8BAAAAf39/AAEAAABkAAAAAAAAABQAAABAHwAAAAAAACYAAAAAAAAAwOD//wAAAAAmAAAAZAAAABYAAABMAAAAAQAAAAAAAAAGAAAAAAAAAAEAAAC5xNAAPAAAAAAAAAAoAAAAZAAAAGQAAAAAAAAAy8vLADwAAAAAAAAAKAAAAGQAAABkAAAAAAAAABcAAAAUAAAAAAAAAAAAAAD/fwAA/38AAAAAAAAJAAAABAAAAPEEAAAeAAAAaAAAAAAAAAAAAAAAAAAAAAAAAAAAAAAAECcAABAnAAAAAAAAAAAAAAAAAAAAAAAAAAAAAAAAAAAAAAAAAAAAAHgAAAAAAAAAwMD/AAAAAAAAAAAAAAAAAAAAAABkAAAAAAAAAH9/fwAKAAAAIgAAABgAAAAAAAAAAAAAAAAAAAAAAAAAAAAAAAAAAAAkAAAAJAAAAAAAAAAHAAAAAAAAAAAAAAAAAAAAAAAAAAAAAAAAAAAAf39/ACUAAABYAAAAAAAAAAAAAAAAAAAAAAAAAAAAAAAAAAAAAAAAAAAAAAAAAAAAAAAAAAAAAAA/AAAAAAAAAKCGAQAAAAAAAAAAAAAAAAAMAAAAAQAAAAAAAAAAAAAAAAAAAB8AAABUAAAA7/P4AP///wEAAAAAAAAAAAAAAAAAAAAAAAAAAAAAAAAAAAAAAAAAAAAAAAB/f38AucTQAMvLywDAwP8Af39/AAAAAAAAAAAAAAAAAAAAAAAAAAAAIQAAABgAAAAUAAAAYAMAALgIAABAQQAAmBkAABAAAAAmAAAACAAAAP//////////MAAAABQAAAAAAAAAAAD//wAAAQAAAP//AAABAA=="/>
               </a:ext>
             </a:extLst>
           </p:cNvSpPr>
@@ -13145,7 +13466,7 @@
             <a:picLocks noChangeAspect="1"/>
             <a:extLst>
               <a:ext uri="smNativeData">
-                <pr:smNativeData xmlns:pr="smNativeData" xmlns="smNativeData" val="SMDATA_18_kRU2ahMAAAAlAAAAEQAAAC0AAAAAkAAAAEgAAACQAAAASAAAAAAAAAAAAAAAAAAAAAEAAABQAAAAAAAAAAAA4D8AAAAAAADgPwAAAAAAAOA/AAAAAAAA4D8AAAAAAADgPwAAAAAAAOA/AAAAAAAA4D8AAAAAAADgPwAAAAAAAOA/AAAAAAAA4D8CAAAAjAAAAAAAAAAAAAAARHLEDP///wgAAAAAAAAAAAAAAAAAAAAAAAAAAAAAAAAAAAAAZAAAAAEAAABAAAAAAAAAAAAAAAAAAAAAAAAAAAAAAAAAAAAAAAAAAAAAAAAAAAAAAAAAAAAAAAAAAAAAAAAAAAAAAAAAAAAAAAAAAAAAAAAAAAAAAAAAAAAAAAAAAAAAFAAAADwAAAAAAAAAAAAAAAAAAAkUAAAAAQAAABQAAAAUAAAAFAAAAAEAAAAAAAAAZAAAAGQAAAAAAAAAZAAAAGQAAAAVAAAAYAAAAAAAAAAAAAAADwAAACADAAAAAAAAAAAAAAEAAACgMgAAVgcAAKr4//8BAAAAf39/AAEAAABkAAAAAAAAABQAAABAHwAAAAAAACYAAAAAAAAAwOD//wAAAAAmAAAAZAAAABYAAABMAAAAAAAAAAAAAAAEAAAAAAAAAAEAAADn5uYKAAAAACgAAAAoAAAAZAAAAGQAAAAAAAAAzMzMAAAAAABQAAAAUAAAAGQAAABkAAAAAAAAAAcAAAA4AAAAAAAAAAAAAAAAAAAA////AAAAAAAAAAAAAAAAAAAAAAAAAAAAAAAAAAAAAABkAAAAZAAAAAAAAAAjAAAABAAAAGQAAAAXAAAAFAAAAAAAAAAAAAAA/38AAP9/AAAAAAAACQAAAAQAAAAAAAAAHgAAAGgAAAAAAAAAAAAAAAAAAAAAAAAAAAAAABAnAAAQJwAAAAAAAAAAAAAAAAAAAAAAAAAAAAAAAAAAAAAAAAAAAAAUAAAAAAAAAMDA/wAAAAAAZAAAADIAAAAAAAAAZAAAAAAAAAB/f38ACgAAACIAAAAYAAAAAAAAAAAAAAAAAAAAAAAAAAAAAAAAAAAAJAAAACQAAAAAAAAABwAAAAAAAAAAAAAAAAAAAAAAAAAAAAAAAAAAAH9/fwAlAAAAWAAAAAAAAAAAAAAAAAAAAAAAAAAAAAAAAAAAAAAAAAAAAAAAAAAAAAAAAAAAAAAAPwAAAAAAAACghgEAAAAAAAAAAAAAAAAADAAAAAEAAAAAAAAAAAAAAAAAAAAfAAAAVAAAAERyxAX///8BAAAAAAAAAAAAAAAAAAAAAAAAAAAAAAAAAAAAAAAAAAAAAAACf39/AOfm5gPMzMwAwMD/AH9/fwAAAAAAAAAAAAAAAAD///8AAAAAACEAAAAYAAAAFAAAAIAEAACQCQAAIEAAAMAYAAAQAAAAJgAAAAgAAAD//////////zAAAAAUAAAAAAAAAAAA//8AAAEAAAD//wAAAQA="/>
+                <pr:smNativeData xmlns:pr="smNativeData" xmlns="smNativeData" val="SMDATA_18_V2g2ahMAAAAlAAAAEQAAAC0AAAAAkAAAAEgAAACQAAAASAAAAAAAAAAAAAAAAAAAAAEAAABQAAAAAAAAAAAA4D8AAAAAAADgPwAAAAAAAOA/AAAAAAAA4D8AAAAAAADgPwAAAAAAAOA/AAAAAAAA4D8AAAAAAADgPwAAAAAAAOA/AAAAAAAA4D8CAAAAjAAAAAAAAAAAAAAARHLEDP///wgAAAAAAAAAAAAAAAAAAAAAAAAAAAAAAAAAAAAAZAAAAAEAAABAAAAAAAAAAAAAAAAAAAAAAAAAAAAAAAAAAAAAAAAAAAAAAAAAAAAAAAAAAAAAAAAAAAAAAAAAAAAAAAAAAAAAAAAAAAAAAAAAAAAAAAAAAAAAAAAAAAAAFAAAADwAAAAAAAAAAAAAAAAAAAkUAAAAAQAAABQAAAAUAAAAFAAAAAEAAAAAAAAAZAAAAGQAAAAAAAAAZAAAAGQAAAAVAAAAYAAAAAAAAAAAAAAADwAAACADAAAAAAAAAAAAAAEAAACgMgAAVgcAAKr4//8BAAAAf39/AAEAAABkAAAAAAAAABQAAABAHwAAAAAAACYAAAAAAAAAwOD//wAAAAAmAAAAZAAAABYAAABMAAAAAAAAAAAAAAAEAAAAAAAAAAEAAADn5uYKAAAAACgAAAAoAAAAZAAAAGQAAAAAAAAAzMzMAAAAAABQAAAAUAAAAGQAAABkAAAAAAAAAAcAAAA4AAAAAAAAAAAAAAAAAAAA////AAAAAAAAAAAAAAAAAAAAAAAAAAAAAAAAAAAAAABkAAAAZAAAAAAAAAAjAAAABAAAAGQAAAAXAAAAFAAAAAAAAAAAAAAA/38AAP9/AAAAAAAACQAAAAQAAAAAAAAAHgAAAGgAAAAAAAAAAAAAAAAAAAAAAAAAAAAAABAnAAAQJwAAAAAAAAAAAAAAAAAAAAAAAAAAAAAAAAAAAAAAAAAAAAAUAAAAAAAAAMDA/wAAAAAAZAAAADIAAAAAAAAAZAAAAAAAAAB/f38ACgAAACIAAAAYAAAAAAAAAAAAAAAAAAAAAAAAAAAAAAAAAAAAJAAAACQAAAAAAAAABwAAAAAAAAAAAAAAAAAAAAAAAAAAAAAAAAAAAH9/fwAlAAAAWAAAAAAAAAAAAAAAAAAAAAAAAAAAAAAAAAAAAAAAAAAAAAAAAAAAAAAAAAAAAAAAPwAAAAAAAACghgEAAAAAAAAAAAAAAAAADAAAAAEAAAAAAAAAAAAAAAAAAAAfAAAAVAAAAERyxAX///8BAAAAAAAAAAAAAAAAAAAAAAAAAAAAAAAAAAAAAAAAAAAAAAACf39/AOfm5gPMzMwAwMD/AH9/fwAAAAAAAAAAAAAAAAD///8AAAAAACEAAAAYAAAAFAAAAIAEAACQCQAAIEAAAMAYAAAQAAAAJgAAAAgAAAD//////////zAAAAAUAAAAAAAAAAAA//8AAAEAAAD//wAAAQA="/>
               </a:ext>
             </a:extLst>
           </p:cNvPicPr>
@@ -13178,7 +13499,7 @@
           <p:cNvSpPr>
             <a:extLst>
               <a:ext uri="smNativeData">
-                <pr:smNativeData xmlns:pr="smNativeData" xmlns="smNativeData" val="SMDATA_16_kRU2ahMAAAAlAAAAZAAAAA0AAAAAkAAAAEgAAACQAAAASAAAAAAAAAAAAAAAAAAAAAEAAABQAAAAAAAAAAAA4D8AAAAAAADgPwAAAAAAAOA/AAAAAAAA4D8AAAAAAADgPwAAAAAAAOA/AAAAAAAA4D8AAAAAAADgPwAAAAAAAOA/AAAAAAAA4D8CAAAAjAAAAAAAAAAAAAAARHLEDP///wgAAAAAAAAAAAAAAAAAAAAAAAAAAAAAAAAAAAAAZAAAAAEAAABAAAAAAAAAAAAAAAAAAAAAAAAAAAAAAAAAAAAAAAAAAAAAAAAAAAAAAAAAAAAAAAAAAAAAAAAAAAAAAAAAAAAAAAAAAAAAAAAAAAAAAAAAAAAAAAAAAAAAFAAAADwAAAAAAAAAAAAAAAAAAAAPAAAAAQAAACMAAAAjAAAAIwAAAB4AAAAAAAAAZAAAAGQAAAAAAAAAZAAAAGQAAAAVAAAAYAAAAAAAAAAAAAAADwAAACADAAAAAAAAAAAAAAEAAACgMgAAVgcAAKr4//8BAAAAf39/AAEAAABkAAAAAAAAABQAAABAHwAAAAAAACYAAAAAAAAAwOD//wAAAAAmAAAAZAAAABYAAABMAAAAAAAAAAAAAAAEAAAAAAAAAAEAAADn5uYKAAAAACgAAAAoAAAAZAAAAGQAAAAAAAAAzMzMAAAAAABQAAAAUAAAAGQAAABkAAAAAAAAABcAAAAUAAAAAAAAAAAAAAD/fwAA/38AAAAAAAAJAAAABAAAAAAAAAAeAAAAaAAAAAAAAAAAAAAAAAAAAAAAAAAAAAAAECcAABAnAAAAAAAAAAAAAAAAAAAAAAAAAAAAAAAAAAAAAAAAAAAAABQAAAAAAAAAwMD/AAAAAABkAAAAMgAAAAAAAABkAAAAAAAAAH9/fwAKAAAAIgAAABgAAAAAAAAAAAAAAAAAAAAAAAAAAAAAAAAAAAAkAAAAJAAAAAAAAAAHAAAAAAAAAAAAAAAAAAAAAAAAAAAAAAAAAAAAf39/ACUAAABYAAAAAAAAAAAAAAAAAAAAAAAAAAAAAAAAAAAAAAAAAAAAAAAAAAAAAAAAAAAAAAA/AAAAAAAAAKCGAQAAAAAAAAAAAAAAAAAMAAAAAQAAAAAAAAAAAAAAAAAAAB8AAABUAAAARHLEBf///wEAAAAAAAAAAAAAAAAAAAAAAAAAAAAAAAAAAAAAAAAAAAAAAAB/f38A5+bmA8zMzADAwP8Af39/AAAAAAAAAAAAAAAAAAAAAAAAAAAAIQAAABgAAAAUAAAAYAMAAAAbAADgRgAA0CYAABAAAAAmAAAACAAAAP//////////MAAAABQAAAAAAAAAAAD//wAAAQAAAP//AAABAA=="/>
+                <pr:smNativeData xmlns:pr="smNativeData" xmlns="smNativeData" val="SMDATA_16_V2g2ahMAAAAlAAAAZAAAAA0AAAAAkAAAAEgAAACQAAAASAAAAAAAAAAAAAAAAAAAAAEAAABQAAAAAAAAAAAA4D8AAAAAAADgPwAAAAAAAOA/AAAAAAAA4D8AAAAAAADgPwAAAAAAAOA/AAAAAAAA4D8AAAAAAADgPwAAAAAAAOA/AAAAAAAA4D8CAAAAjAAAAAAAAAAAAAAARHLEDP///wgAAAAAAAAAAAAAAAAAAAAAAAAAAAAAAAAAAAAAZAAAAAEAAABAAAAAAAAAAAAAAAAAAAAAAAAAAAAAAAAAAAAAAAAAAAAAAAAAAAAAAAAAAAAAAAAAAAAAAAAAAAAAAAAAAAAAAAAAAAAAAAAAAAAAAAAAAAAAAAAAAAAAFAAAADwAAAAAAAAAAAAAAAAAAAAPAAAAAQAAACMAAAAjAAAAIwAAAB4AAAAAAAAAZAAAAGQAAAAAAAAAZAAAAGQAAAAVAAAAYAAAAAAAAAAAAAAADwAAACADAAAAAAAAAAAAAAEAAACgMgAAVgcAAKr4//8BAAAAf39/AAEAAABkAAAAAAAAABQAAABAHwAAAAAAACYAAAAAAAAAwOD//wAAAAAmAAAAZAAAABYAAABMAAAAAAAAAAAAAAAEAAAAAAAAAAEAAADn5uYKAAAAACgAAAAoAAAAZAAAAGQAAAAAAAAAzMzMAAAAAABQAAAAUAAAAGQAAABkAAAAAAAAABcAAAAUAAAAAAAAAAAAAAD/fwAA/38AAAAAAAAJAAAABAAAAAAAAAAeAAAAaAAAAAAAAAAAAAAAAAAAAAAAAAAAAAAAECcAABAnAAAAAAAAAAAAAAAAAAAAAAAAAAAAAAAAAAAAAAAAAAAAABQAAAAAAAAAwMD/AAAAAABkAAAAMgAAAAAAAABkAAAAAAAAAH9/fwAKAAAAIgAAABgAAAAAAAAAAAAAAAAAAAAAAAAAAAAAAAAAAAAkAAAAJAAAAAAAAAAHAAAAAAAAAAAAAAAAAAAAAAAAAAAAAAAAAAAAf39/ACUAAABYAAAAAAAAAAAAAAAAAAAAAAAAAAAAAAAAAAAAAAAAAAAAAAAAAAAAAAAAAAAAAAA/AAAAAAAAAKCGAQAAAAAAAAAAAAAAAAAMAAAAAQAAAAAAAAAAAAAAAAAAAB8AAABUAAAARHLEBf///wEAAAAAAAAAAAAAAAAAAAAAAAAAAAAAAAAAAAAAAAAAAAAAAAB/f38A5+bmA8zMzADAwP8Af39/AAAAAAAAAAAAAAAAAAAAAAAAAAAAIQAAABgAAAAUAAAAYAMAAAAbAADgRgAA0CYAAAAAAAAmAAAACAAAAP//////////MAAAABQAAAAAAAAAAAD//wAAAQAAAP//AAABAA=="/>
               </a:ext>
             </a:extLst>
           </p:cNvSpPr>
@@ -13239,26 +13560,32 @@
                   <a:srgbClr val="283441"/>
                 </a:solidFill>
               </a:rPr>
-              <a:t>cosseno); k = </a:t>
-            </a:r>
+              <a:t>cosseno) k = 9:</a:t>
+            </a:r>
+            <a:endParaRPr lang="en-us" sz="1550" cap="none">
+              <a:solidFill>
+                <a:srgbClr val="283441"/>
+              </a:solidFill>
+            </a:endParaRPr>
+          </a:p>
+          <a:p>
+            <a:pPr marL="177800" indent="-177800" algn="l">
+              <a:spcAft>
+                <a:spcPts val="800"/>
+              </a:spcAft>
+              <a:buSzTx/>
+              <a:buChar char="•"/>
+            </a:pPr>
             <a:r>
               <a:rPr lang="en-us" sz="1550" cap="none">
                 <a:solidFill>
                   <a:srgbClr val="283441"/>
                 </a:solidFill>
               </a:rPr>
-              <a:t>9.</a:t>
-            </a:r>
-            <a:r>
-              <a:rPr lang="en-us" sz="1550" b="1" cap="none">
-                <a:solidFill>
-                  <a:srgbClr val="283441"/>
-                </a:solidFill>
-              </a:rPr>
               <a:t>Silhouette ≈ 0,32 — </a:t>
             </a:r>
             <a:r>
-              <a:rPr lang="en-us" sz="1550" b="1" cap="none">
+              <a:rPr lang="en-us" sz="1550" cap="none">
                 <a:solidFill>
                   <a:srgbClr val="283441"/>
                 </a:solidFill>
@@ -13266,7 +13593,7 @@
               <a:t>grupos </a:t>
             </a:r>
             <a:r>
-              <a:rPr lang="en-us" sz="1550" b="1" cap="none">
+              <a:rPr lang="en-us" sz="1550" cap="none">
                 <a:solidFill>
                   <a:srgbClr val="283441"/>
                 </a:solidFill>
@@ -13274,7 +13601,7 @@
               <a:t>pouco </a:t>
             </a:r>
             <a:r>
-              <a:rPr lang="en-us" sz="1550" b="1" cap="none">
+              <a:rPr lang="en-us" sz="1550" cap="none">
                 <a:solidFill>
                   <a:srgbClr val="283441"/>
                 </a:solidFill>
@@ -13282,7 +13609,7 @@
               <a:t>separados, </a:t>
             </a:r>
             <a:r>
-              <a:rPr lang="en-us" sz="1550" b="1" cap="none">
+              <a:rPr lang="en-us" sz="1550" cap="none">
                 <a:solidFill>
                   <a:srgbClr val="283441"/>
                 </a:solidFill>
@@ -13290,15 +13617,37 @@
               <a:t>muita </a:t>
             </a:r>
             <a:r>
-              <a:rPr lang="en-us" sz="1550" b="1" cap="none">
-                <a:solidFill>
-                  <a:srgbClr val="283441"/>
-                </a:solidFill>
-              </a:rPr>
-              <a:t>sobreposição.DBSCAN e </a:t>
-            </a:r>
-            <a:r>
-              <a:rPr lang="en-us" sz="1550" b="1" cap="none">
+              <a:rPr lang="en-us" sz="1550" cap="none">
+                <a:solidFill>
+                  <a:srgbClr val="283441"/>
+                </a:solidFill>
+              </a:rPr>
+              <a:t>sobreposição.</a:t>
+            </a:r>
+            <a:endParaRPr lang="en-us" sz="1550" cap="none">
+              <a:solidFill>
+                <a:srgbClr val="283441"/>
+              </a:solidFill>
+            </a:endParaRPr>
+          </a:p>
+          <a:p>
+            <a:pPr marL="177800" indent="-177800" algn="l">
+              <a:spcAft>
+                <a:spcPts val="800"/>
+              </a:spcAft>
+              <a:buSzTx/>
+              <a:buChar char="•"/>
+            </a:pPr>
+            <a:r>
+              <a:rPr lang="en-us" sz="1550" cap="none">
+                <a:solidFill>
+                  <a:srgbClr val="283441"/>
+                </a:solidFill>
+              </a:rPr>
+              <a:t>DBSCAN e </a:t>
+            </a:r>
+            <a:r>
+              <a:rPr lang="en-us" sz="1550" cap="none">
                 <a:solidFill>
                   <a:srgbClr val="283441"/>
                 </a:solidFill>
@@ -13306,7 +13655,7 @@
               <a:t>HDBSCAN </a:t>
             </a:r>
             <a:r>
-              <a:rPr lang="en-us" sz="1550" b="1" cap="none">
+              <a:rPr lang="en-us" sz="1550" cap="none">
                 <a:solidFill>
                   <a:srgbClr val="283441"/>
                 </a:solidFill>
@@ -13314,7 +13663,7 @@
               <a:t>foram </a:t>
             </a:r>
             <a:r>
-              <a:rPr lang="en-us" sz="1550" b="1" cap="none">
+              <a:rPr lang="en-us" sz="1550" cap="none">
                 <a:solidFill>
                   <a:srgbClr val="283441"/>
                 </a:solidFill>
@@ -13322,7 +13671,7 @@
               <a:t>instáveis (de 1 cluster a </a:t>
             </a:r>
             <a:r>
-              <a:rPr lang="en-us" sz="1550" b="1" cap="none">
+              <a:rPr lang="en-us" sz="1550" cap="none">
                 <a:solidFill>
                   <a:srgbClr val="283441"/>
                 </a:solidFill>
@@ -13330,7 +13679,7 @@
               <a:t>dezenas, </a:t>
             </a:r>
             <a:r>
-              <a:rPr lang="en-us" sz="1550" b="1" cap="none">
+              <a:rPr lang="en-us" sz="1550" cap="none">
                 <a:solidFill>
                   <a:srgbClr val="283441"/>
                 </a:solidFill>
@@ -13338,14 +13687,14 @@
               <a:t>ou 56–80% de </a:t>
             </a:r>
             <a:r>
-              <a:rPr lang="en-us" sz="1550" b="1" cap="none">
+              <a:rPr lang="en-us" sz="1550" cap="none">
                 <a:solidFill>
                   <a:srgbClr val="283441"/>
                 </a:solidFill>
               </a:rPr>
               <a:t>ruído).</a:t>
             </a:r>
-            <a:endParaRPr lang="en-us" sz="1550" b="1" cap="none">
+            <a:endParaRPr lang="en-us" sz="1550" cap="none">
               <a:solidFill>
                 <a:srgbClr val="283441"/>
               </a:solidFill>
@@ -13399,7 +13748,7 @@
           <p:cNvSpPr>
             <a:extLst>
               <a:ext uri="smNativeData">
-                <pr:smNativeData xmlns:pr="smNativeData" xmlns="smNativeData" val="SMDATA_16_kRU2ahMAAAAlAAAAZAAAAA0AAAAAkAAAAEgAAACQAAAASAAAAAAAAAABAAAAAAAAAAEAAABQAAAAAAAAAAAA4D8AAAAAAADgPwAAAAAAAOA/AAAAAAAA4D8AAAAAAADgPwAAAAAAAOA/AAAAAAAA4D8AAAAAAADgPwAAAAAAAOA/AAAAAAAA4D8CAAAAjAAAAAAAAAAAAAAARHLEDP///wgAAAAAAAAAAAAAAAAAAAAAAAAAAAAAAAAAAAAAZAAAAAEAAABAAAAAAAAAAAAAAAAAAAAAAAAAAAAAAAAAAAAAAAAAAAAAAAAAAAAAAAAAAAAAAAAAAAAAAAAAAAAAAAAAAAAAAAAAAAAAAAAAAAAAAAAAAAAAAAAAAAAAFAAAADwAAAAAAAAAAAAAAAAAAAAPAAAAAQAAACMAAAAjAAAAIwAAAB4AAAAAAAAAZAAAAGQAAAAAAAAAZAAAAGQAAAAVAAAAYAAAAAAAAAAAAAAADwAAACADAAAAAAAAAAAAAAEAAACgMgAAVgcAAKr4//8BAAAAf39/AAEAAABkAAAAAAAAABQAAABAHwAAAAAAACYAAAAAAAAAwOD//wAAAAAmAAAAZAAAABYAAABMAAAAAAAAAAAAAAAEAAAAAAAAAAEAAADn5uYKAAAAACgAAAAoAAAAZAAAAGQAAAAAAAAAzMzMAAAAAABQAAAAUAAAAGQAAABkAAAAAAAAABcAAAAUAAAAAAAAAAAAAAD/fwAA/38AAAAAAAAJAAAABAAAAKB5BIUeAAAAaAAAAAAAAAAAAAAAAAAAAAAAAAAAAAAAECcAABAnAAAAAAAAAAAAAAAAAAAAAAAAAAAAAAAAAAAAAAAAAAAAABQAAAAAAAAAwMD/AAAAAABkAAAAMgAAAAAAAABkAAAAAAAAAH9/fwAKAAAAIgAAABgAAAAAAAAAAAAAAAAAAAAAAAAAAAAAAAAAAAAkAAAAJAAAAAAAAAAHAAAAAAAAAAAAAAAAAAAAAAAAAAAAAAAAAAAAf39/ACUAAABYAAAAAAAAAAAAAAAAAAAAAAAAAAAAAAAAAAAAAAAAAAAAAAAAAAAAAAAAAAAAAAA/AAAAAAAAAKCGAQAAAAAAAAAAAAAAAAAMAAAAAQAAAAAAAAAAAAAAAAAAAB8AAABUAAAARHLEBf///wEAAAAAAAAAAAAAAAAAAAAAAAAAAAAAAAAAAAAAAAAAAAAAAAB/f38A5+bmA8zMzADAwP8Af39/AAAAAAAAAAAAAAAAAAAAAAAAAAAAIQAAABgAAAAUAAAAYAMAACABAACgRwAA0AIAABAAAAAmAAAACAAAAP//////////MAAAABQAAAAAAAAAAAD//wAAAQAAAP//AAABAA=="/>
+                <pr:smNativeData xmlns:pr="smNativeData" xmlns="smNativeData" val="SMDATA_16_V2g2ahMAAAAlAAAAZAAAAA0AAAAAkAAAAEgAAACQAAAASAAAAAAAAAABAAAAAAAAAAEAAABQAAAAAAAAAAAA4D8AAAAAAADgPwAAAAAAAOA/AAAAAAAA4D8AAAAAAADgPwAAAAAAAOA/AAAAAAAA4D8AAAAAAADgPwAAAAAAAOA/AAAAAAAA4D8CAAAAjAAAAAAAAAAAAAAARHLEDP///wgAAAAAAAAAAAAAAAAAAAAAAAAAAAAAAAAAAAAAZAAAAAEAAABAAAAAAAAAAAAAAAAAAAAAAAAAAAAAAAAAAAAAAAAAAAAAAAAAAAAAAAAAAAAAAAAAAAAAAAAAAAAAAAAAAAAAAAAAAAAAAAAAAAAAAAAAAAAAAAAAAAAAFAAAADwAAAAAAAAAAAAAAAAAAAAPAAAAAQAAACMAAAAjAAAAIwAAAB4AAAAAAAAAZAAAAGQAAAAAAAAAZAAAAGQAAAAVAAAAYAAAAAAAAAAAAAAADwAAACADAAAAAAAAAAAAAAEAAACgMgAAVgcAAKr4//8BAAAAf39/AAEAAABkAAAAAAAAABQAAABAHwAAAAAAACYAAAAAAAAAwOD//wAAAAAmAAAAZAAAABYAAABMAAAAAAAAAAAAAAAEAAAAAAAAAAEAAADn5uYKAAAAACgAAAAoAAAAZAAAAGQAAAAAAAAAzMzMAAAAAABQAAAAUAAAAGQAAABkAAAAAAAAABcAAAAUAAAAAAAAAAAAAAD/fwAA/38AAAAAAAAJAAAABAAAAKB5BIUeAAAAaAAAAAAAAAAAAAAAAAAAAAAAAAAAAAAAECcAABAnAAAAAAAAAAAAAAAAAAAAAAAAAAAAAAAAAAAAAAAAAAAAABQAAAAAAAAAwMD/AAAAAABkAAAAMgAAAAAAAABkAAAAAAAAAH9/fwAKAAAAIgAAABgAAAAAAAAAAAAAAAAAAAAAAAAAAAAAAAAAAAAkAAAAJAAAAAAAAAAHAAAAAAAAAAAAAAAAAAAAAAAAAAAAAAAAAAAAf39/ACUAAABYAAAAAAAAAAAAAAAAAAAAAAAAAAAAAAAAAAAAAAAAAAAAAAAAAAAAAAAAAAAAAAA/AAAAAAAAAKCGAQAAAAAAAAAAAAAAAAAMAAAAAQAAAAAAAAAAAAAAAAAAAB8AAABUAAAARHLEBf///wEAAAAAAAAAAAAAAAAAAAAAAAAAAAAAAAAAAAAAAAAAAAAAAAB/f38A5+bmA8zMzADAwP8Af39/AAAAAAAAAAAAAAAAAAAAAAAAAAAAIQAAABgAAAAUAAAAYAMAACABAACgRwAA0AIAABAAAAAmAAAACAAAAP//////////MAAAABQAAAAAAAAAAAD//wAAAQAAAP//AAABAA=="/>
               </a:ext>
             </a:extLst>
           </p:cNvSpPr>
@@ -13427,7 +13776,7 @@
               <a:buNone/>
             </a:pPr>
             <a:r>
-              <a:rPr lang="en-us" sz="1200" b="1" cap="none" spc="40">
+              <a:rPr lang="en-us" sz="1200" b="1" cap="none" spc="8">
                 <a:solidFill>
                   <a:srgbClr val="E0A038"/>
                 </a:solidFill>
@@ -13435,7 +13784,7 @@
               <a:t>HIPÓTESE, </a:t>
             </a:r>
             <a:r>
-              <a:rPr lang="en-us" sz="1200" b="1" cap="none" spc="40">
+              <a:rPr lang="en-us" sz="1200" b="1" cap="none" spc="8">
                 <a:solidFill>
                   <a:srgbClr val="E0A038"/>
                 </a:solidFill>
@@ -13443,7 +13792,7 @@
               <a:t>NÃO </a:t>
             </a:r>
             <a:r>
-              <a:rPr lang="en-us" sz="1200" b="1" cap="none" spc="40">
+              <a:rPr lang="en-us" sz="1200" b="1" cap="none" spc="8">
                 <a:solidFill>
                   <a:srgbClr val="E0A038"/>
                 </a:solidFill>
@@ -13460,7 +13809,7 @@
           <p:cNvSpPr>
             <a:extLst>
               <a:ext uri="smNativeData">
-                <pr:smNativeData xmlns:pr="smNativeData" xmlns="smNativeData" val="SMDATA_16_kRU2ahMAAAAlAAAAZAAAAA0AAAAAkAAAAEgAAACQAAAASAAAAAAAAAABAAAAAAAAAAEAAABQAAAAAAAAAAAA4D8AAAAAAADgPwAAAAAAAOA/AAAAAAAA4D8AAAAAAADgPwAAAAAAAOA/AAAAAAAA4D8AAAAAAADgPwAAAAAAAOA/AAAAAAAA4D8CAAAAjAAAAAAAAAAAAAAARHLEDP///wgAAAAAAAAAAAAAAAAAAAAAAAAAAAAAAAAAAAAAZAAAAAEAAABAAAAAAAAAAAAAAAAAAAAAAAAAAAAAAAAAAAAAAAAAAAAAAAAAAAAAAAAAAAAAAAAAAAAAAAAAAAAAAAAAAAAAAAAAAAAAAAAAAAAAAAAAAAAAAAAAAAAAFAAAADwAAAAAAAAAAAAAAAAAAAAPAAAAAQAAACMAAAAjAAAAIwAAAB4AAAAAAAAAZAAAAGQAAAAAAAAAZAAAAGQAAAAVAAAAYAAAAAAAAAAAAAAADwAAACADAAAAAAAAAAAAAAEAAACgMgAAVgcAAKr4//8BAAAAf39/AAEAAABkAAAAAAAAABQAAABAHwAAAAAAACYAAAAAAAAAwOD//wAAAAAmAAAAZAAAABYAAABMAAAAAAAAAAAAAAAEAAAAAAAAAAEAAADn5uYKAAAAACgAAAAoAAAAZAAAAGQAAAAAAAAAzMzMAAAAAABQAAAAUAAAAGQAAABkAAAAAAAAABcAAAAUAAAAAAAAAAAAAAD/fwAA/38AAAAAAAAJAAAABAAAACDpVDweAAAAaAAAAAAAAAAAAAAAAAAAAAAAAAAAAAAAECcAABAnAAAAAAAAAAAAAAAAAAAAAAAAAAAAAAAAAAAAAAAAAAAAABQAAAAAAAAAwMD/AAAAAABkAAAAMgAAAAAAAABkAAAAAAAAAH9/fwAKAAAAIgAAABgAAAAAAAAAAAAAAAAAAAAAAAAAAAAAAAAAAAAkAAAAJAAAAAAAAAAHAAAAAAAAAAAAAAAAAAAAAAAAAAAAAAAAAAAAf39/ACUAAABYAAAAAAAAAAAAAAAAAAAAAAAAAAAAAAAAAAAAAAAAAAAAAAAAAAAAAAAAAAAAAAA/AAAAAAAAAKCGAQAAAAAAAAAAAAAAAAAMAAAAAQAAAAAAAAAAAAAAAAAAAB8AAABUAAAARHLEBf///wEAAAAAAAAAAAAAAAAAAAAAAAAAAAAAAAAAAAAAAAAAAAAAAAB/f38A5+bmA8zMzADAwP8Af39/AAAAAAAAAAAAAAAAAAAAAAAAAAAAIQAAABgAAAAUAAAAYAMAAF0CAACgRwAA3QYAABAAAAAmAAAACAAAAP//////////MAAAABQAAAAAAAAAAAD//wAAAQAAAP//AAABAA=="/>
+                <pr:smNativeData xmlns:pr="smNativeData" xmlns="smNativeData" val="SMDATA_16_V2g2ahMAAAAlAAAAZAAAAA0AAAAAkAAAAEgAAACQAAAASAAAAAAAAAABAAAAAAAAAAEAAABQAAAAAAAAAAAA4D8AAAAAAADgPwAAAAAAAOA/AAAAAAAA4D8AAAAAAADgPwAAAAAAAOA/AAAAAAAA4D8AAAAAAADgPwAAAAAAAOA/AAAAAAAA4D8CAAAAjAAAAAAAAAAAAAAARHLEDP///wgAAAAAAAAAAAAAAAAAAAAAAAAAAAAAAAAAAAAAZAAAAAEAAABAAAAAAAAAAAAAAAAAAAAAAAAAAAAAAAAAAAAAAAAAAAAAAAAAAAAAAAAAAAAAAAAAAAAAAAAAAAAAAAAAAAAAAAAAAAAAAAAAAAAAAAAAAAAAAAAAAAAAFAAAADwAAAAAAAAAAAAAAAAAAAAPAAAAAQAAACMAAAAjAAAAIwAAAB4AAAAAAAAAZAAAAGQAAAAAAAAAZAAAAGQAAAAVAAAAYAAAAAAAAAAAAAAADwAAACADAAAAAAAAAAAAAAEAAACgMgAAVgcAAKr4//8BAAAAf39/AAEAAABkAAAAAAAAABQAAABAHwAAAAAAACYAAAAAAAAAwOD//wAAAAAmAAAAZAAAABYAAABMAAAAAAAAAAAAAAAEAAAAAAAAAAEAAADn5uYKAAAAACgAAAAoAAAAZAAAAGQAAAAAAAAAzMzMAAAAAABQAAAAUAAAAGQAAABkAAAAAAAAABcAAAAUAAAAAAAAAAAAAAD/fwAA/38AAAAAAAAJAAAABAAAACDpVDweAAAAaAAAAAAAAAAAAAAAAAAAAAAAAAAAAAAAECcAABAnAAAAAAAAAAAAAAAAAAAAAAAAAAAAAAAAAAAAAAAAAAAAABQAAAAAAAAAwMD/AAAAAABkAAAAMgAAAAAAAABkAAAAAAAAAH9/fwAKAAAAIgAAABgAAAAAAAAAAAAAAAAAAAAAAAAAAAAAAAAAAAAkAAAAJAAAAAAAAAAHAAAAAAAAAAAAAAAAAAAAAAAAAAAAAAAAAAAAf39/ACUAAABYAAAAAAAAAAAAAAAAAAAAAAAAAAAAAAAAAAAAAAAAAAAAAAAAAAAAAAAAAAAAAAA/AAAAAAAAAKCGAQAAAAAAAAAAAAAAAAAMAAAAAQAAAAAAAAAAAAAAAAAAAB8AAABUAAAARHLEBf///wEAAAAAAAAAAAAAAAAAAAAAAAAAAAAAAAAAAAAAAAAAAAAAAAB/f38A5+bmA8zMzADAwP8Af39/AAAAAAAAAAAAAAAAAAAAAAAAAAAAIQAAABgAAAAUAAAAYAMAAF0CAACgRwAA3QYAABAAAAAmAAAACAAAAP//////////MAAAABQAAAAAAAAAAAD//wAAAQAAAP//AAABAA=="/>
               </a:ext>
             </a:extLst>
           </p:cNvSpPr>
@@ -13541,7 +13890,7 @@
           <p:cNvSpPr>
             <a:extLst>
               <a:ext uri="smNativeData">
-                <pr:smNativeData xmlns:pr="smNativeData" xmlns="smNativeData" val="SMDATA_16_kRU2ahMAAAAlAAAAZAAAAA0AAAAAkAAAAEgAAACQAAAASAAAAAAAAAABAAAAAAAAAAEAAABQAAAAAAAAAAAA4D8AAAAAAADgPwAAAAAAAOA/AAAAAAAA4D8AAAAAAADgPwAAAAAAAOA/AAAAAAAA4D8AAAAAAADgPwAAAAAAAOA/AAAAAAAA4D8CAAAAjAAAAAAAAAAAAAAARHLEDP///wgAAAAAAAAAAAAAAAAAAAAAAAAAAAAAAAAAAAAAZAAAAAEAAABAAAAAAAAAAAAAAAAAAAAAAAAAAAAAAAAAAAAAAAAAAAAAAAAAAAAAAAAAAAAAAAAAAAAAAAAAAAAAAAAAAAAAAAAAAAAAAAAAAAAAAAAAAAAAAAAAAAAAFAAAADwAAAAAAAAAAAAAAAAAAAAPAAAAAQAAACMAAAAjAAAAIwAAAB4AAAAAAAAAZAAAAGQAAAAAAAAAZAAAAGQAAAAVAAAAYAAAAAAAAAAAAAAADwAAACADAAAAAAAAAAAAAAEAAACgMgAAVgcAAKr4//8BAAAAf39/AAEAAABkAAAAAAAAABQAAABAHwAAAAAAACYAAAAAAAAAwOD//wAAAAAmAAAAZAAAABYAAABMAAAAAAAAAAAAAAAEAAAAAAAAAAEAAADn5uYKAAAAACgAAAAoAAAAZAAAAGQAAAAAAAAAzMzMAAAAAABQAAAAUAAAAGQAAABkAAAAAAAAABcAAAAUAAAAAAAAAAAAAAD/fwAA/38AAAAAAAAJAAAABAAAAAAAAAAeAAAAaAAAAAAAAAAAAAAAAAAAAAAAAAAAAAAAECcAABAnAAAAAAAAAAAAAAAAAAAAAAAAAAAAAAAAAAAAAAAAAAAAABQAAAAAAAAAwMD/AAAAAABkAAAAMgAAAAAAAABkAAAAAAAAAH9/fwAKAAAAIgAAABgAAAAAAAAAAAAAAAAAAAAAAAAAAAAAAAAAAAAkAAAAJAAAAAAAAAAHAAAAAAAAAAAAAAAAAAAAAAAAAAAAAAAAAAAAf39/ACUAAABYAAAAAAAAAAAAAAAAAAAAAAAAAAAAAAAAAAAAAAAAAAAAAAAAAAAAAAAAAAAAAAA/AAAAAAAAAKCGAQAAAAAAAAAAAAAAAAAMAAAAAQAAAAAAAAAAAAAAAAAAAB8AAABUAAAARHLEBf///wEAAAAAAAAAAAAAAAAAAAAAAAAAAAAAAAAAAAAAAAAAAAAAAAB/f38A5+bmA8zMzADAwP8Af39/AAAAAAAAAAAAAAAAAAAAAAAAAAAAIQAAABgAAAAUAAAAYAMAALgIAABwRwAAiAsAABAAAAAmAAAACAAAAP//////////MAAAABQAAAAAAAAAAAD//wAAAQAAAP//AAABAA=="/>
+                <pr:smNativeData xmlns:pr="smNativeData" xmlns="smNativeData" val="SMDATA_16_V2g2ahMAAAAlAAAAZAAAAA0AAAAAkAAAAEgAAACQAAAASAAAAAAAAAABAAAAAAAAAAEAAABQAAAAAAAAAAAA4D8AAAAAAADgPwAAAAAAAOA/AAAAAAAA4D8AAAAAAADgPwAAAAAAAOA/AAAAAAAA4D8AAAAAAADgPwAAAAAAAOA/AAAAAAAA4D8CAAAAjAAAAAAAAAAAAAAARHLEDP///wgAAAAAAAAAAAAAAAAAAAAAAAAAAAAAAAAAAAAAZAAAAAEAAABAAAAAAAAAAAAAAAAAAAAAAAAAAAAAAAAAAAAAAAAAAAAAAAAAAAAAAAAAAAAAAAAAAAAAAAAAAAAAAAAAAAAAAAAAAAAAAAAAAAAAAAAAAAAAAAAAAAAAFAAAADwAAAAAAAAAAAAAAAAAAAAPAAAAAQAAACMAAAAjAAAAIwAAAB4AAAAAAAAAZAAAAGQAAAAAAAAAZAAAAGQAAAAVAAAAYAAAAAAAAAAAAAAADwAAACADAAAAAAAAAAAAAAEAAACgMgAAVgcAAKr4//8BAAAAf39/AAEAAABkAAAAAAAAABQAAABAHwAAAAAAACYAAAAAAAAAwOD//wAAAAAmAAAAZAAAABYAAABMAAAAAAAAAAAAAAAEAAAAAAAAAAEAAADn5uYKAAAAACgAAAAoAAAAZAAAAGQAAAAAAAAAzMzMAAAAAABQAAAAUAAAAGQAAABkAAAAAAAAABcAAAAUAAAAAAAAAAAAAAD/fwAA/38AAAAAAAAJAAAABAAAAAAAAAAeAAAAaAAAAAAAAAAAAAAAAAAAAAAAAAAAAAAAECcAABAnAAAAAAAAAAAAAAAAAAAAAAAAAAAAAAAAAAAAAAAAAAAAABQAAAAAAAAAwMD/AAAAAABkAAAAMgAAAAAAAABkAAAAAAAAAH9/fwAKAAAAIgAAABgAAAAAAAAAAAAAAAAAAAAAAAAAAAAAAAAAAAAkAAAAJAAAAAAAAAAHAAAAAAAAAAAAAAAAAAAAAAAAAAAAAAAAAAAAf39/ACUAAABYAAAAAAAAAAAAAAAAAAAAAAAAAAAAAAAAAAAAAAAAAAAAAAAAAAAAAAAAAAAAAAA/AAAAAAAAAKCGAQAAAAAAAAAAAAAAAAAMAAAAAQAAAAAAAAAAAAAAAAAAAB8AAABUAAAARHLEBf///wEAAAAAAAAAAAAAAAAAAAAAAAAAAAAAAAAAAAAAAAAAAAAAAAB/f38A5+bmA8zMzADAwP8Af39/AAAAAAAAAAAAAAAAAAAAAAAAAAAAIQAAABgAAAAUAAAAYAMAALgIAABwRwAAiAsAABAAAAAmAAAACAAAAP//////////MAAAABQAAAAAAAAAAAD//wAAAQAAAP//AAABAA=="/>
               </a:ext>
             </a:extLst>
           </p:cNvSpPr>
@@ -13674,7 +14023,7 @@
           <p:cNvSpPr>
             <a:extLst>
               <a:ext uri="smNativeData">
-                <pr:smNativeData xmlns:pr="smNativeData" xmlns="smNativeData" val="SMDATA_16_kRU2ahMAAAAlAAAAZQAAAA0AAAAAkAAAAEgAAACQAAAASAAAAAAAAAAAAAAAAAAAAAEAAABQAAAA8UbmkT8YuD8AAAAAAADwvwAAAAAAAOA/AAAAAAAA4D8AAAAAAADgPwAAAAAAAOA/AAAAAAAA4D8AAAAAAADgPwAAAAAAAOA/AAAAAAAA4D8CAAAAjAAAAAEAAAAAAAAA7/P4AP///wgAAAAAAAAAAAAAAAAAAAAAAAAAAAAAAAAAAAAAeAAAAAEAAABAAAAAAAAAAAAAAABaAAAAAAAAAAAAAAAAAAAAAAAAAAAAAAAAAAAAAAAAAAAAAAAAAAAAAAAAAAAAAAAAAAAAAAAAAAAAAAAAAAAAAAAAAAAAAAAAAAAAFAAAADwAAAABAAAAAAAAANjg6AAUAAAAAQAAACMAAAAjAAAAIwAAAB4AAAAAAAAAZAAAAGQAAAAAAAAAZAAAAGQAAAAVAAAAYAAAAAAAAAAAAAAADwAAACADAAAAAAAAAAAAAAEAAACgMgAAVgcAAKr4//8BAAAAf39/AAEAAABkAAAAAAAAABQAAABAHwAAAAAAACYAAAAAAAAAwOD//wAAAAAmAAAAZAAAABYAAABMAAAAAQAAAAAAAAAGAAAAAAAAAAEAAAC5xNAAPAAAAAAAAAAoAAAAZAAAAGQAAAAAAAAAy8vLADwAAAAAAAAAKAAAAGQAAABkAAAAAAAAABcAAAAUAAAAAAAAAAAAAAD/fwAA/38AAAAAAAAJAAAABAAAAAAAAAAeAAAAaAAAAAAAAAAAAAAAAAAAAAAAAAAAAAAAECcAABAnAAAAAAAAAAAAAAAAAAAAAAAAAAAAAAAAAAAAAAAAAAAAAHgAAAAAAAAAwMD/AAAAAAAAAAAAAAAAAAAAAABkAAAAAAAAAH9/fwAKAAAAIgAAABgAAAAAAAAAAAAAAAAAAAAAAAAAAAAAAAAAAAAkAAAAJAAAAAAAAAAHAAAAAAAAAAAAAAAAAAAAAAAAAAAAAAAAAAAAf39/ACUAAABYAAAAAAAAAAAAAAAAAAAAAAAAAAAAAAAAAAAAAAAAAAAAAAAAAAAAAAAAAAAAAAA/AAAAAAAAAKCGAQAAAAAAAAAAAAAAAAAMAAAAAQAAAAAAAAAAAAAAAAAAAB8AAABUAAAA7/P4AP///wEAAAAAAAAAAAAAAAAAAAAAAAAAAAAAAAAAAAAAAAAAANjg6AB/f38AucTQAMvLywDAwP8Af39/AAAAAAAAAAAAAAAAAAAAAAAAAAAAIQAAABgAAAAUAAAAYAMAAGAMAABoEwAA8BUAABAAAAAmAAAACAAAAP//////////MAAAABQAAAAAAAAAAAD//wAAAQAAAP//AAABAA=="/>
+                <pr:smNativeData xmlns:pr="smNativeData" xmlns="smNativeData" val="SMDATA_16_V2g2ahMAAAAlAAAAZQAAAA0AAAAAkAAAAEgAAACQAAAASAAAAAAAAAAAAAAAAAAAAAEAAABQAAAA8UbmkT8YuD8AAAAAAAAAAAAAAAAAAOA/AAAAAAAA4D8AAAAAAADgPwAAAAAAAOA/AAAAAAAA4D8AAAAAAADgPwAAAAAAAOA/AAAAAAAA4D8CAAAAjAAAAAEAAAAAAAAA7/P4AP///wgAAAAAAAAAAAAAAAAAAAAAAAAAAAAAAAAAAAAAeAAAAAEAAABAAAAAAAAAAAAAAABaAAAAAAAAAAAAAAAAAAAAAAAAAAAAAAAAAAAAAAAAAAAAAAAAAAAAAAAAAAAAAAAAAAAAAAAAAAAAAAAAAAAAAAAAAAAAAAAAAAAAFAAAADwAAAABAAAAAAAAANjg6AAUAAAAAQAAACMAAAAjAAAAIwAAAB4AAAAAAAAAZAAAAGQAAAAAAAAAZAAAAGQAAAAVAAAAYAAAAAAAAAAAAAAADwAAACADAAAAAAAAAAAAAAEAAACgMgAAVgcAAKr4//8BAAAAf39/AAEAAABkAAAAAAAAABQAAABAHwAAAAAAACYAAAAAAAAAwOD//wAAAAAmAAAAZAAAABYAAABMAAAAAQAAAAAAAAAGAAAAAAAAAAEAAAC5xNAAPAAAAAAAAAAoAAAAZAAAAGQAAAAAAAAAy8vLADwAAAAAAAAAKAAAAGQAAABkAAAAAAAAABcAAAAUAAAAAAAAAAAAAAD/fwAA/38AAAAAAAAJAAAABAAAAAAAAAAeAAAAaAAAAAAAAAAAAAAAAAAAAAAAAAAAAAAAECcAABAnAAAAAAAAAAAAAAAAAAAAAAAAAAAAAAAAAAAAAAAAAAAAAHgAAAAAAAAAwMD/AAAAAAAAAAAAAAAAAAAAAABkAAAAAAAAAH9/fwAKAAAAIgAAABgAAAAAAAAAAAAAAAAAAAAAAAAAAAAAAAAAAAAkAAAAJAAAAAAAAAAHAAAAAAAAAAAAAAAAAAAAAAAAAAAAAAAAAAAAf39/ACUAAABYAAAAAAAAAAAAAAAAAAAAAAAAAAAAAAAAAAAAAAAAAAAAAAAAAAAAAAAAAAAAAAA/AAAAAAAAAKCGAQAAAAAAAAAAAAAAAAAMAAAAAQAAAAAAAAAAAAAAAAAAAB8AAABUAAAA7/P4AP///wEAAAAAAAAAAAAAAAAAAAAAAAAAAAAAAAAAAAAAAAAAANjg6AB/f38AucTQAMvLywDAwP8Af39/AAAAAAAAAAAAAAAAAAAAAAAAAAAAIQAAABgAAAAUAAAAYAMAAGAMAABoEwAA8BUAABAAAAAmAAAACAAAAP//////////MAAAABQAAAAAAAAAAAD//wAAAQAAAP//AAABAA=="/>
               </a:ext>
             </a:extLst>
           </p:cNvSpPr>
@@ -13716,7 +14065,7 @@
           <p:cNvSpPr>
             <a:extLst>
               <a:ext uri="smNativeData">
-                <pr:smNativeData xmlns:pr="smNativeData" xmlns="smNativeData" val="SMDATA_16_kRU2ahMAAAAlAAAAZAAAAA0AAAAAAAAAAAAAAAAAAAAAAAAAAAAAAAABAAAAAAAAAAEAAABQAAAAAAAAAAAA4D8AAAAAAADgPwAAAAAAAOA/AAAAAAAA4D8AAAAAAADgPwAAAAAAAOA/AAAAAAAA4D8AAAAAAADgPwAAAAAAAOA/AAAAAAAA4D8CAAAAjAAAAAAAAAAAAAAARHLEDP///wgAAAAAAAAAAAAAAAAAAAAAAAAAAAAAAAAAAAAAZAAAAAEAAABAAAAAAAAAAAAAAAAAAAAAAAAAAAAAAAAAAAAAAAAAAAAAAAAAAAAAAAAAAAAAAAAAAAAAAAAAAAAAAAAAAAAAAAAAAAAAAAAAAAAAAAAAAAAAAAAAAAAAFAAAADwAAAAAAAAAAAAAAAAAAAAPAAAAAQAAACMAAAAjAAAAIwAAAB4AAAAAAAAAZAAAAGQAAAAAAAAAZAAAAGQAAAAVAAAAYAAAAAAAAAAAAAAADwAAACADAAAAAAAAAAAAAAEAAACgMgAAVgcAAKr4//8BAAAAf39/AAEAAABkAAAAAAAAABQAAABAHwAAAAAAACYAAAAAAAAAwOD//wAAAAAmAAAAZAAAABYAAABMAAAAAAAAAAAAAAAEAAAAAAAAAAEAAADn5uYKAAAAACgAAAAoAAAAZAAAAGQAAAAAAAAAzMzMAAAAAABQAAAAUAAAAGQAAABkAAAAAAAAABcAAAAUAAAAAAAAAAAAAAD/fwAA/38AAAAAAAAJAAAABAAAAMAXAAAeAAAAaAAAAAAAAAAAAAAAAAAAAAAAAAAAAAAAECcAABAnAAAAAAAAAAAAAAAAAAAAAAAAAAAAAAAAAAAAAAAAAAAAABQAAAAAAAAAwMD/AAAAAABkAAAAMgAAAAAAAABkAAAAAAAAAH9/fwAKAAAAIgAAABgAAAAAAAAAAAAAAAAAAAAAAAAAAAAAAAAAAAAkAAAAJAAAAAAAAAAHAAAAAAAAAAAAAAAAAAAAAAAAAAAAAAAAAAAAf39/ACUAAABYAAAAAAAAAAAAAAAAAAAAAAAAAAAAAAAAAAAAAAAAAAAAAAAAAAAAAAAAAAAAAAA/AAAAAAAAAKCGAQAAAAAAAAAAAAAAAAAMAAAAAQAAAAAAAAAAAAAAAAAAAB8AAABUAAAARHLEBf///wEAAAAAAAAAAAAAAAAAAAAAAAAAAAAAAAAAAAAAAAAAAAAAAAB/f38A5+bmA8zMzADAwP8Af39/AAAAAAAAAAAAAAAAAAAAAAAAAAAAIQAAABgAAAAUAAAAYAMAAIANAABoEwAAcBEAABAAAAAmAAAACAAAAP//////////MAAAABQAAAAAAAAAAAD//wAAAQAAAP//AAABAA=="/>
+                <pr:smNativeData xmlns:pr="smNativeData" xmlns="smNativeData" val="SMDATA_16_V2g2ahMAAAAlAAAAZAAAAA0AAAAAAAAAAAAAAAAAAAAAAAAAAAAAAAABAAAAAAAAAAEAAABQAAAAAAAAAAAA4D8AAAAAAADgPwAAAAAAAOA/AAAAAAAA4D8AAAAAAADgPwAAAAAAAOA/AAAAAAAA4D8AAAAAAADgPwAAAAAAAOA/AAAAAAAA4D8CAAAAjAAAAAAAAAAAAAAARHLEDP///wgAAAAAAAAAAAAAAAAAAAAAAAAAAAAAAAAAAAAAZAAAAAEAAABAAAAAAAAAAAAAAAAAAAAAAAAAAAAAAAAAAAAAAAAAAAAAAAAAAAAAAAAAAAAAAAAAAAAAAAAAAAAAAAAAAAAAAAAAAAAAAAAAAAAAAAAAAAAAAAAAAAAAFAAAADwAAAAAAAAAAAAAAAAAAAAPAAAAAQAAACMAAAAjAAAAIwAAAB4AAAAAAAAAZAAAAGQAAAAAAAAAZAAAAGQAAAAVAAAAYAAAAAAAAAAAAAAADwAAACADAAAAAAAAAAAAAAEAAACgMgAAVgcAAKr4//8BAAAAf39/AAEAAABkAAAAAAAAABQAAABAHwAAAAAAACYAAAAAAAAAwOD//wAAAAAmAAAAZAAAABYAAABMAAAAAAAAAAAAAAAEAAAAAAAAAAEAAADn5uYKAAAAACgAAAAoAAAAZAAAAGQAAAAAAAAAzMzMAAAAAABQAAAAUAAAAGQAAABkAAAAAAAAABcAAAAUAAAAAAAAAAAAAAD/fwAA/38AAAAAAAAJAAAABAAAAMAXAAAeAAAAaAAAAAAAAAAAAAAAAAAAAAAAAAAAAAAAECcAABAnAAAAAAAAAAAAAAAAAAAAAAAAAAAAAAAAAAAAAAAAAAAAABQAAAAAAAAAwMD/AAAAAABkAAAAMgAAAAAAAABkAAAAAAAAAH9/fwAKAAAAIgAAABgAAAAAAAAAAAAAAAAAAAAAAAAAAAAAAAAAAAAkAAAAJAAAAAAAAAAHAAAAAAAAAAAAAAAAAAAAAAAAAAAAAAAAAAAAf39/ACUAAABYAAAAAAAAAAAAAAAAAAAAAAAAAAAAAAAAAAAAAAAAAAAAAAAAAAAAAAAAAAAAAAA/AAAAAAAAAKCGAQAAAAAAAAAAAAAAAAAMAAAAAQAAAAAAAAAAAAAAAAAAAB8AAABUAAAARHLEBf///wEAAAAAAAAAAAAAAAAAAAAAAAAAAAAAAAAAAAAAAAAAAAAAAAB/f38A5+bmA8zMzADAwP8Af39/AAAAAAAAAAAAAAAAAAAAAAAAAAAAIQAAABgAAAAUAAAAYAMAAIANAABoEwAAcBEAABAAAAAmAAAACAAAAP//////////MAAAABQAAAAAAAAAAAD//wAAAQAAAP//AAABAA=="/>
               </a:ext>
             </a:extLst>
           </p:cNvSpPr>
@@ -13769,7 +14118,7 @@
           <p:cNvSpPr>
             <a:extLst>
               <a:ext uri="smNativeData">
-                <pr:smNativeData xmlns:pr="smNativeData" xmlns="smNativeData" val="SMDATA_16_kRU2ahMAAAAlAAAAZAAAAA0AAAAAkAAAAEgAAACQAAAASAAAAAAAAAABAAAAAAAAAAEAAABQAAAAAAAAAAAA4D8AAAAAAADgPwAAAAAAAOA/AAAAAAAA4D8AAAAAAADgPwAAAAAAAOA/AAAAAAAA4D8AAAAAAADgPwAAAAAAAOA/AAAAAAAA4D8CAAAAjAAAAAAAAAAAAAAARHLEDP///wgAAAAAAAAAAAAAAAAAAAAAAAAAAAAAAAAAAAAAZAAAAAEAAABAAAAAAAAAAAAAAAAAAAAAAAAAAAAAAAAAAAAAAAAAAAAAAAAAAAAAAAAAAAAAAAAAAAAAAAAAAAAAAAAAAAAAAAAAAAAAAAAAAAAAAAAAAAAAAAAAAAAAFAAAADwAAAAAAAAAAAAAAAAAAAAPAAAAAQAAACMAAAAjAAAAIwAAAB4AAAAAAAAAZAAAAGQAAAAAAAAAZAAAAGQAAAAVAAAAYAAAAAAAAAAAAAAADwAAACADAAAAAAAAAAAAAAEAAACgMgAAVgcAAKr4//8BAAAAf39/AAEAAABkAAAAAAAAABQAAABAHwAAAAAAACYAAAAAAAAAwOD//wAAAAAmAAAAZAAAABYAAABMAAAAAAAAAAAAAAAEAAAAAAAAAAEAAADn5uYKAAAAACgAAAAoAAAAZAAAAGQAAAAAAAAAzMzMAAAAAABQAAAAUAAAAGQAAABkAAAAAAAAABcAAAAUAAAAAAAAAAAAAAD/fwAA/38AAAAAAAAJAAAABAAAAGgQAAAeAAAAaAAAAAAAAAAAAAAAAAAAAAAAAAAAAAAAECcAABAnAAAAAAAAAAAAAAAAAAAAAAAAAAAAAAAAAAAAAAAAAAAAABQAAAAAAAAAwMD/AAAAAABkAAAAMgAAAAAAAABkAAAAAAAAAH9/fwAKAAAAIgAAABgAAAAAAAAAAAAAAAAAAAAAAAAAAAAAAAAAAAAkAAAAJAAAAAAAAAAHAAAAAAAAAAAAAAAAAAAAAAAAAAAAAAAAAAAAf39/ACUAAABYAAAAAAAAAAAAAAAAAAAAAAAAAAAAAAAAAAAAAAAAAAAAAAAAAAAAAAAAAAAAAAA/AAAAAAAAAKCGAQAAAAAAAAAAAAAAAAAMAAAAAQAAAAAAAAAAAAAAAAAAAB8AAABUAAAARHLEBf///wEAAAAAAAAAAAAAAAAAAAAAAAAAAAAAAAAAAAAAAAAAAAAAAAB/f38A5+bmA8zMzADAwP8Af39/AAAAAAAAAAAAAAAAAAAAAAAAAAAAIQAAABgAAAAUAAAAYAMAALgRAABoEwAAiBQAABAAAAAmAAAACAAAAP//////////MAAAABQAAAAAAAAAAAD//wAAAQAAAP//AAABAA=="/>
+                <pr:smNativeData xmlns:pr="smNativeData" xmlns="smNativeData" val="SMDATA_16_V2g2ahMAAAAlAAAAZAAAAA0AAAAAkAAAAEgAAACQAAAASAAAAAAAAAABAAAAAAAAAAEAAABQAAAAAAAAAAAA4D8AAAAAAADgPwAAAAAAAOA/AAAAAAAA4D8AAAAAAADgPwAAAAAAAOA/AAAAAAAA4D8AAAAAAADgPwAAAAAAAOA/AAAAAAAA4D8CAAAAjAAAAAAAAAAAAAAARHLEDP///wgAAAAAAAAAAAAAAAAAAAAAAAAAAAAAAAAAAAAAZAAAAAEAAABAAAAAAAAAAAAAAAAAAAAAAAAAAAAAAAAAAAAAAAAAAAAAAAAAAAAAAAAAAAAAAAAAAAAAAAAAAAAAAAAAAAAAAAAAAAAAAAAAAAAAAAAAAAAAAAAAAAAAFAAAADwAAAAAAAAAAAAAAAAAAAAPAAAAAQAAACMAAAAjAAAAIwAAAB4AAAAAAAAAZAAAAGQAAAAAAAAAZAAAAGQAAAAVAAAAYAAAAAAAAAAAAAAADwAAACADAAAAAAAAAAAAAAEAAACgMgAAVgcAAKr4//8BAAAAf39/AAEAAABkAAAAAAAAABQAAABAHwAAAAAAACYAAAAAAAAAwOD//wAAAAAmAAAAZAAAABYAAABMAAAAAAAAAAAAAAAEAAAAAAAAAAEAAADn5uYKAAAAACgAAAAoAAAAZAAAAGQAAAAAAAAAzMzMAAAAAABQAAAAUAAAAGQAAABkAAAAAAAAABcAAAAUAAAAAAAAAAAAAAD/fwAA/38AAAAAAAAJAAAABAAAAGgQAAAeAAAAaAAAAAAAAAAAAAAAAAAAAAAAAAAAAAAAECcAABAnAAAAAAAAAAAAAAAAAAAAAAAAAAAAAAAAAAAAAAAAAAAAABQAAAAAAAAAwMD/AAAAAABkAAAAMgAAAAAAAABkAAAAAAAAAH9/fwAKAAAAIgAAABgAAAAAAAAAAAAAAAAAAAAAAAAAAAAAAAAAAAAkAAAAJAAAAAAAAAAHAAAAAAAAAAAAAAAAAAAAAAAAAAAAAAAAAAAAf39/ACUAAABYAAAAAAAAAAAAAAAAAAAAAAAAAAAAAAAAAAAAAAAAAAAAAAAAAAAAAAAAAAAAAAA/AAAAAAAAAKCGAQAAAAAAAAAAAAAAAAAMAAAAAQAAAAAAAAAAAAAAAAAAAB8AAABUAAAARHLEBf///wEAAAAAAAAAAAAAAAAAAAAAAAAAAAAAAAAAAAAAAAAAAAAAAAB/f38A5+bmA8zMzADAwP8Af39/AAAAAAAAAAAAAAAAAAAAAAAAAAAAIQAAABgAAAAUAAAAYAMAALgRAABoEwAAiBQAABAAAAAmAAAACAAAAP//////////MAAAABQAAAAAAAAAAAD//wAAAQAAAP//AAABAA=="/>
               </a:ext>
             </a:extLst>
           </p:cNvSpPr>
@@ -13814,7 +14163,7 @@
           <p:cNvSpPr>
             <a:extLst>
               <a:ext uri="smNativeData">
-                <pr:smNativeData xmlns:pr="smNativeData" xmlns="smNativeData" val="SMDATA_16_kRU2ahMAAAAlAAAAZQAAAA0AAAAAkAAAAEgAAACQAAAASAAAAAAAAAAAAAAAAAAAAAEAAABQAAAA8UbmkT8YuD8AAAAAAADwvwAAAAAAAOA/AAAAAAAA4D8AAAAAAADgPwAAAAAAAOA/AAAAAAAA4D8AAAAAAADgPwAAAAAAAOA/AAAAAAAA4D8CAAAAjAAAAAEAAAAAAAAA7/P4AP///wgAAAAAAAAAAAAAAAAAAAAAAAAAAAAAAAAAAAAAeAAAAAEAAABAAAAAAAAAAAAAAABaAAAAAAAAAAAAAAAAAAAAAAAAAAAAAAAAAAAAAAAAAAAAAAAAAAAAAAAAAAAAAAAAAAAAAAAAAAAAAAAAAAAAAAAAAAAAAAAAAAAAFAAAADwAAAABAAAAAAAAANjg6AAUAAAAAQAAACMAAAAjAAAAIwAAAB4AAAAAAAAAZAAAAGQAAAAAAAAAZAAAAGQAAAAVAAAAYAAAAAAAAAAAAAAADwAAACADAAAAAAAAAAAAAAEAAACgMgAAVgcAAKr4//8BAAAAf39/AAEAAABkAAAAAAAAABQAAABAHwAAAAAAACYAAAAAAAAAwOD//wAAAAAmAAAAZAAAABYAAABMAAAAAQAAAAAAAAAGAAAAAAAAAAEAAAC5xNAAPAAAAAAAAAAoAAAAZAAAAGQAAAAAAAAAy8vLADwAAAAAAAAAKAAAAGQAAABkAAAAAAAAABcAAAAUAAAAAAAAAAAAAAD/fwAA/38AAAAAAAAJAAAABAAAAAAAAAAeAAAAaAAAAAAAAAAAAAAAAAAAAAAAAAAAAAAAECcAABAnAAAAAAAAAAAAAAAAAAAAAAAAAAAAAAAAAAAAAAAAAAAAAHgAAAAAAAAAwMD/AAAAAAAAAAAAAAAAAAAAAABkAAAAAAAAAH9/fwAKAAAAIgAAABgAAAAAAAAAAAAAAAAAAAAAAAAAAAAAAAAAAAAkAAAAJAAAAAAAAAAHAAAAAAAAAAAAAAAAAAAAAAAAAAAAAAAAAAAAf39/ACUAAABYAAAAAAAAAAAAAAAAAAAAAAAAAAAAAAAAAAAAAAAAAAAAAAAAAAAAAAAAAAAAAAA/AAAAAAAAAKCGAQAAAAAAAAAAAAAAAAAMAAAAAQAAAAAAAAAAAAAAAAAAAB8AAABUAAAA7/P4AP///wEAAAAAAAAAAAAAAAAAAAAAAAAAAAAAAAAAAAAAAAAAANjg6AB/f38AucTQAMvLywDAwP8Af39/AAAAAAAAAAAAAAAAAAAAAAAAAAAAIQAAABgAAAAUAAAAsxQAAGAMAAC7JAAA8BUAABAAAAAmAAAACAAAAP//////////MAAAABQAAAAAAAAAAAD//wAAAQAAAP//AAABAA=="/>
+                <pr:smNativeData xmlns:pr="smNativeData" xmlns="smNativeData" val="SMDATA_16_V2g2ahMAAAAlAAAAZQAAAA0AAAAAkAAAAEgAAACQAAAASAAAAAAAAAAAAAAAAAAAAAEAAABQAAAA8UbmkT8YuD8AAAAAAAAAAAAAAAAAAOA/AAAAAAAA4D8AAAAAAADgPwAAAAAAAOA/AAAAAAAA4D8AAAAAAADgPwAAAAAAAOA/AAAAAAAA4D8CAAAAjAAAAAEAAAAAAAAA7/P4AP///wgAAAAAAAAAAAAAAAAAAAAAAAAAAAAAAAAAAAAAeAAAAAEAAABAAAAAAAAAAAAAAABaAAAAAAAAAAAAAAAAAAAAAAAAAAAAAAAAAAAAAAAAAAAAAAAAAAAAAAAAAAAAAAAAAAAAAAAAAAAAAAAAAAAAAAAAAAAAAAAAAAAAFAAAADwAAAABAAAAAAAAANjg6AAUAAAAAQAAACMAAAAjAAAAIwAAAB4AAAAAAAAAZAAAAGQAAAAAAAAAZAAAAGQAAAAVAAAAYAAAAAAAAAAAAAAADwAAACADAAAAAAAAAAAAAAEAAACgMgAAVgcAAKr4//8BAAAAf39/AAEAAABkAAAAAAAAABQAAABAHwAAAAAAACYAAAAAAAAAwOD//wAAAAAmAAAAZAAAABYAAABMAAAAAQAAAAAAAAAGAAAAAAAAAAEAAAC5xNAAPAAAAAAAAAAoAAAAZAAAAGQAAAAAAAAAy8vLADwAAAAAAAAAKAAAAGQAAABkAAAAAAAAABcAAAAUAAAAAAAAAAAAAAD/fwAA/38AAAAAAAAJAAAABAAAAAAAAAAeAAAAaAAAAAAAAAAAAAAAAAAAAAAAAAAAAAAAECcAABAnAAAAAAAAAAAAAAAAAAAAAAAAAAAAAAAAAAAAAAAAAAAAAHgAAAAAAAAAwMD/AAAAAAAAAAAAAAAAAAAAAABkAAAAAAAAAH9/fwAKAAAAIgAAABgAAAAAAAAAAAAAAAAAAAAAAAAAAAAAAAAAAAAkAAAAJAAAAAAAAAAHAAAAAAAAAAAAAAAAAAAAAAAAAAAAAAAAAAAAf39/ACUAAABYAAAAAAAAAAAAAAAAAAAAAAAAAAAAAAAAAAAAAAAAAAAAAAAAAAAAAAAAAAAAAAA/AAAAAAAAAKCGAQAAAAAAAAAAAAAAAAAMAAAAAQAAAAAAAAAAAAAAAAAAAB8AAABUAAAA7/P4AP///wEAAAAAAAAAAAAAAAAAAAAAAAAAAAAAAAAAAAAAAAAAANjg6AB/f38AucTQAMvLywDAwP8Af39/AAAAAAAAAAAAAAAAAAAAAAAAAAAAIQAAABgAAAAUAAAAsxQAAGAMAAC7JAAA8BUAABAAAAAmAAAACAAAAP//////////MAAAABQAAAAAAAAAAAD//wAAAQAAAP//AAABAA=="/>
               </a:ext>
             </a:extLst>
           </p:cNvSpPr>
@@ -13856,7 +14205,7 @@
           <p:cNvSpPr>
             <a:extLst>
               <a:ext uri="smNativeData">
-                <pr:smNativeData xmlns:pr="smNativeData" xmlns="smNativeData" val="SMDATA_16_kRU2ahMAAAAlAAAAZAAAAA0AAAAAAAAAAAAAAAAAAAAAAAAAAAAAAAABAAAAAAAAAAEAAABQAAAAAAAAAAAA4D8AAAAAAADgPwAAAAAAAOA/AAAAAAAA4D8AAAAAAADgPwAAAAAAAOA/AAAAAAAA4D8AAAAAAADgPwAAAAAAAOA/AAAAAAAA4D8CAAAAjAAAAAAAAAAAAAAARHLEDP///wgAAAAAAAAAAAAAAAAAAAAAAAAAAAAAAAAAAAAAZAAAAAEAAABAAAAAAAAAAAAAAAAAAAAAAAAAAAAAAAAAAAAAAAAAAAAAAAAAAAAAAAAAAAAAAAAAAAAAAAAAAAAAAAAAAAAAAAAAAAAAAAAAAAAAAAAAAAAAAAAAAAAAFAAAADwAAAAAAAAAAAAAAAAAAAAPAAAAAQAAACMAAAAjAAAAIwAAAB4AAAAAAAAAZAAAAGQAAAAAAAAAZAAAAGQAAAAVAAAAYAAAAAAAAAAAAAAADwAAACADAAAAAAAAAAAAAAEAAACgMgAAVgcAAKr4//8BAAAAf39/AAEAAABkAAAAAAAAABQAAABAHwAAAAAAACYAAAAAAAAAwOD//wAAAAAmAAAAZAAAABYAAABMAAAAAAAAAAAAAAAEAAAAAAAAAAEAAADn5uYKAAAAACgAAAAoAAAAZAAAAGQAAAAAAAAAzMzMAAAAAABQAAAAUAAAAGQAAABkAAAAAAAAABcAAAAUAAAAAAAAAAAAAAD/fwAA/38AAAAAAAAJAAAABAAAAEYCAAAeAAAAaAAAAAAAAAAAAAAAAAAAAAAAAAAAAAAAECcAABAnAAAAAAAAAAAAAAAAAAAAAAAAAAAAAAAAAAAAAAAAAAAAABQAAAAAAAAAwMD/AAAAAABkAAAAMgAAAAAAAABkAAAAAAAAAH9/fwAKAAAAIgAAABgAAAAAAAAAAAAAAAAAAAAAAAAAAAAAAAAAAAAkAAAAJAAAAAAAAAAHAAAAAAAAAAAAAAAAAAAAAAAAAAAAAAAAAAAAf39/ACUAAABYAAAAAAAAAAAAAAAAAAAAAAAAAAAAAAAAAAAAAAAAAAAAAAAAAAAAAAAAAAAAAAA/AAAAAAAAAKCGAQAAAAAAAAAAAAAAAAAMAAAAAQAAAAAAAAAAAAAAAAAAAB8AAABUAAAARHLEBf///wEAAAAAAAAAAAAAAAAAAAAAAAAAAAAAAAAAAAAAAAAAAAAAAAB/f38A5+bmA8zMzADAwP8Af39/AAAAAAAAAAAAAAAAAAAAAAAAAAAAIQAAABgAAAAUAAAAsxQAAIANAAC7JAAAcBEAABAAAAAmAAAACAAAAP//////////MAAAABQAAAAAAAAAAAD//wAAAQAAAP//AAABAA=="/>
+                <pr:smNativeData xmlns:pr="smNativeData" xmlns="smNativeData" val="SMDATA_16_V2g2ahMAAAAlAAAAZAAAAA0AAAAAAAAAAAAAAAAAAAAAAAAAAAAAAAABAAAAAAAAAAEAAABQAAAAAAAAAAAA4D8AAAAAAADgPwAAAAAAAOA/AAAAAAAA4D8AAAAAAADgPwAAAAAAAOA/AAAAAAAA4D8AAAAAAADgPwAAAAAAAOA/AAAAAAAA4D8CAAAAjAAAAAAAAAAAAAAARHLEDP///wgAAAAAAAAAAAAAAAAAAAAAAAAAAAAAAAAAAAAAZAAAAAEAAABAAAAAAAAAAAAAAAAAAAAAAAAAAAAAAAAAAAAAAAAAAAAAAAAAAAAAAAAAAAAAAAAAAAAAAAAAAAAAAAAAAAAAAAAAAAAAAAAAAAAAAAAAAAAAAAAAAAAAFAAAADwAAAAAAAAAAAAAAAAAAAAPAAAAAQAAACMAAAAjAAAAIwAAAB4AAAAAAAAAZAAAAGQAAAAAAAAAZAAAAGQAAAAVAAAAYAAAAAAAAAAAAAAADwAAACADAAAAAAAAAAAAAAEAAACgMgAAVgcAAKr4//8BAAAAf39/AAEAAABkAAAAAAAAABQAAABAHwAAAAAAACYAAAAAAAAAwOD//wAAAAAmAAAAZAAAABYAAABMAAAAAAAAAAAAAAAEAAAAAAAAAAEAAADn5uYKAAAAACgAAAAoAAAAZAAAAGQAAAAAAAAAzMzMAAAAAABQAAAAUAAAAGQAAABkAAAAAAAAABcAAAAUAAAAAAAAAAAAAAD/fwAA/38AAAAAAAAJAAAABAAAAEYCAAAeAAAAaAAAAAAAAAAAAAAAAAAAAAAAAAAAAAAAECcAABAnAAAAAAAAAAAAAAAAAAAAAAAAAAAAAAAAAAAAAAAAAAAAABQAAAAAAAAAwMD/AAAAAABkAAAAMgAAAAAAAABkAAAAAAAAAH9/fwAKAAAAIgAAABgAAAAAAAAAAAAAAAAAAAAAAAAAAAAAAAAAAAAkAAAAJAAAAAAAAAAHAAAAAAAAAAAAAAAAAAAAAAAAAAAAAAAAAAAAf39/ACUAAABYAAAAAAAAAAAAAAAAAAAAAAAAAAAAAAAAAAAAAAAAAAAAAAAAAAAAAAAAAAAAAAA/AAAAAAAAAKCGAQAAAAAAAAAAAAAAAAAMAAAAAQAAAAAAAAAAAAAAAAAAAB8AAABUAAAARHLEBf///wEAAAAAAAAAAAAAAAAAAAAAAAAAAAAAAAAAAAAAAAAAAAAAAAB/f38A5+bmA8zMzADAwP8Af39/AAAAAAAAAAAAAAAAAAAAAAAAAAAAIQAAABgAAAAUAAAAsxQAAIANAAC7JAAAcBEAABAAAAAmAAAACAAAAP//////////MAAAABQAAAAAAAAAAAD//wAAAQAAAP//AAABAA=="/>
               </a:ext>
             </a:extLst>
           </p:cNvSpPr>
@@ -13909,7 +14258,7 @@
           <p:cNvSpPr>
             <a:extLst>
               <a:ext uri="smNativeData">
-                <pr:smNativeData xmlns:pr="smNativeData" xmlns="smNativeData" val="SMDATA_16_kRU2ahMAAAAlAAAAZAAAAA0AAAAAkAAAAEgAAACQAAAASAAAAAAAAAABAAAAAAAAAAEAAABQAAAAAAAAAAAA4D8AAAAAAADgPwAAAAAAAOA/AAAAAAAA4D8AAAAAAADgPwAAAAAAAOA/AAAAAAAA4D8AAAAAAADgPwAAAAAAAOA/AAAAAAAA4D8CAAAAjAAAAAAAAAAAAAAARHLEDP///wgAAAAAAAAAAAAAAAAAAAAAAAAAAAAAAAAAAAAAZAAAAAEAAABAAAAAAAAAAAAAAAAAAAAAAAAAAAAAAAAAAAAAAAAAAAAAAAAAAAAAAAAAAAAAAAAAAAAAAAAAAAAAAAAAAAAAAAAAAAAAAAAAAAAAAAAAAAAAAAAAAAAAFAAAADwAAAAAAAAAAAAAAAAAAAAPAAAAAQAAACMAAAAjAAAAIwAAAB4AAAAAAAAAZAAAAGQAAAAAAAAAZAAAAGQAAAAVAAAAYAAAAAAAAAAAAAAADwAAACADAAAAAAAAAAAAAAEAAACgMgAAVgcAAKr4//8BAAAAf39/AAEAAABkAAAAAAAAABQAAABAHwAAAAAAACYAAAAAAAAAwOD//wAAAAAmAAAAZAAAABYAAABMAAAAAAAAAAAAAAAEAAAAAAAAAAEAAADn5uYKAAAAACgAAAAoAAAAZAAAAGQAAAAAAAAAzMzMAAAAAABQAAAAUAAAAGQAAABkAAAAAAAAABcAAAAUAAAAAAAAAAAAAAD/fwAA/38AAAAAAAAJAAAABAAAAP////8eAAAAaAAAAAAAAAAAAAAAAAAAAAAAAAAAAAAAECcAABAnAAAAAAAAAAAAAAAAAAAAAAAAAAAAAAAAAAAAAAAAAAAAABQAAAAAAAAAwMD/AAAAAABkAAAAMgAAAAAAAABkAAAAAAAAAH9/fwAKAAAAIgAAABgAAAAAAAAAAAAAAAAAAAAAAAAAAAAAAAAAAAAkAAAAJAAAAAAAAAAHAAAAAAAAAAAAAAAAAAAAAAAAAAAAAAAAAAAAf39/ACUAAABYAAAAAAAAAAAAAAAAAAAAAAAAAAAAAAAAAAAAAAAAAAAAAAAAAAAAAAAAAAAAAAA/AAAAAAAAAKCGAQAAAAAAAAAAAAAAAAAMAAAAAQAAAAAAAAAAAAAAAAAAAB8AAABUAAAARHLEBf///wEAAAAAAAAAAAAAAAAAAAAAAAAAAAAAAAAAAAAAAAAAAAAAAAB/f38A5+bmA8zMzADAwP8Af39/AAAAAAAAAAAAAAAAAAAAAAAAAAAAIQAAABgAAAAUAAAAsxQAALgRAAC7JAAAiBQAABAAAAAmAAAACAAAAP//////////MAAAABQAAAAAAAAAAAD//wAAAQAAAP//AAABAA=="/>
+                <pr:smNativeData xmlns:pr="smNativeData" xmlns="smNativeData" val="SMDATA_16_V2g2ahMAAAAlAAAAZAAAAA0AAAAAkAAAAEgAAACQAAAASAAAAAAAAAABAAAAAAAAAAEAAABQAAAAAAAAAAAA4D8AAAAAAADgPwAAAAAAAOA/AAAAAAAA4D8AAAAAAADgPwAAAAAAAOA/AAAAAAAA4D8AAAAAAADgPwAAAAAAAOA/AAAAAAAA4D8CAAAAjAAAAAAAAAAAAAAARHLEDP///wgAAAAAAAAAAAAAAAAAAAAAAAAAAAAAAAAAAAAAZAAAAAEAAABAAAAAAAAAAAAAAAAAAAAAAAAAAAAAAAAAAAAAAAAAAAAAAAAAAAAAAAAAAAAAAAAAAAAAAAAAAAAAAAAAAAAAAAAAAAAAAAAAAAAAAAAAAAAAAAAAAAAAFAAAADwAAAAAAAAAAAAAAAAAAAAPAAAAAQAAACMAAAAjAAAAIwAAAB4AAAAAAAAAZAAAAGQAAAAAAAAAZAAAAGQAAAAVAAAAYAAAAAAAAAAAAAAADwAAACADAAAAAAAAAAAAAAEAAACgMgAAVgcAAKr4//8BAAAAf39/AAEAAABkAAAAAAAAABQAAABAHwAAAAAAACYAAAAAAAAAwOD//wAAAAAmAAAAZAAAABYAAABMAAAAAAAAAAAAAAAEAAAAAAAAAAEAAADn5uYKAAAAACgAAAAoAAAAZAAAAGQAAAAAAAAAzMzMAAAAAABQAAAAUAAAAGQAAABkAAAAAAAAABcAAAAUAAAAAAAAAAAAAAD/fwAA/38AAAAAAAAJAAAABAAAAP////8eAAAAaAAAAAAAAAAAAAAAAAAAAAAAAAAAAAAAECcAABAnAAAAAAAAAAAAAAAAAAAAAAAAAAAAAAAAAAAAAAAAAAAAABQAAAAAAAAAwMD/AAAAAABkAAAAMgAAAAAAAABkAAAAAAAAAH9/fwAKAAAAIgAAABgAAAAAAAAAAAAAAAAAAAAAAAAAAAAAAAAAAAAkAAAAJAAAAAAAAAAHAAAAAAAAAAAAAAAAAAAAAAAAAAAAAAAAAAAAf39/ACUAAABYAAAAAAAAAAAAAAAAAAAAAAAAAAAAAAAAAAAAAAAAAAAAAAAAAAAAAAAAAAAAAAA/AAAAAAAAAKCGAQAAAAAAAAAAAAAAAAAMAAAAAQAAAAAAAAAAAAAAAAAAAB8AAABUAAAARHLEBf///wEAAAAAAAAAAAAAAAAAAAAAAAAAAAAAAAAAAAAAAAAAAAAAAAB/f38A5+bmA8zMzADAwP8Af39/AAAAAAAAAAAAAAAAAAAAAAAAAAAAIQAAABgAAAAUAAAAsxQAALgRAAC7JAAAiBQAABAAAAAmAAAACAAAAP//////////MAAAABQAAAAAAAAAAAD//wAAAQAAAP//AAABAA=="/>
               </a:ext>
             </a:extLst>
           </p:cNvSpPr>
@@ -13954,7 +14303,7 @@
           <p:cNvSpPr>
             <a:extLst>
               <a:ext uri="smNativeData">
-                <pr:smNativeData xmlns:pr="smNativeData" xmlns="smNativeData" val="SMDATA_16_kRU2ahMAAAAlAAAAZQAAAA0AAAAAkAAAAEgAAACQAAAASAAAAAAAAAAAAAAAAAAAAAEAAABQAAAA8UbmkT8YuD8AAAAAAADwvwAAAAAAAOA/AAAAAAAA4D8AAAAAAADgPwAAAAAAAOA/AAAAAAAA4D8AAAAAAADgPwAAAAAAAOA/AAAAAAAA4D8CAAAAjAAAAAEAAAAAAAAA7/P4AP///wgAAAAAAAAAAAAAAAAAAAAAAAAAAAAAAAAAAAAAeAAAAAEAAABAAAAAAAAAAAAAAABaAAAAAAAAAAAAAAAAAAAAAAAAAAAAAAAAAAAAAAAAAAAAAAAAAAAAAAAAAAAAAAAAAAAAAAAAAAAAAAAAAAAAAAAAAAAAAAAAAAAAFAAAADwAAAABAAAAAAAAANjg6AAUAAAAAQAAACMAAAAjAAAAIwAAAB4AAAAAAAAAZAAAAGQAAAAAAAAAZAAAAGQAAAAVAAAAYAAAAAAAAAAAAAAADwAAACADAAAAAAAAAAAAAAEAAACgMgAAVgcAAKr4//8BAAAAf39/AAEAAABkAAAAAAAAABQAAABAHwAAAAAAACYAAAAAAAAAwOD//wAAAAAmAAAAZAAAABYAAABMAAAAAQAAAAAAAAAGAAAAAAAAAAEAAAC5xNAAPAAAAAAAAAAoAAAAZAAAAGQAAAAAAAAAy8vLADwAAAAAAAAAKAAAAGQAAABkAAAAAAAAABcAAAAUAAAAAAAAAAAAAAD/fwAA/38AAAAAAAAJAAAABAAAAP////8eAAAAaAAAAAAAAAAAAAAAAAAAAAAAAAAAAAAAECcAABAnAAAAAAAAAAAAAAAAAAAAAAAAAAAAAAAAAAAAAAAAAAAAAHgAAAAAAAAAwMD/AAAAAAAAAAAAAAAAAAAAAABkAAAAAAAAAH9/fwAKAAAAIgAAABgAAAAAAAAAAAAAAAAAAAAAAAAAAAAAAAAAAAAkAAAAJAAAAAAAAAAHAAAAAAAAAAAAAAAAAAAAAAAAAAAAAAAAAAAAf39/ACUAAABYAAAAAAAAAAAAAAAAAAAAAAAAAAAAAAAAAAAAAAAAAAAAAAAAAAAAAAAAAAAAAAA/AAAAAAAAAKCGAQAAAAAAAAAAAAAAAAAMAAAAAQAAAAAAAAAAAAAAAAAAAB8AAABUAAAA7/P4AP///wEAAAAAAAAAAAAAAAAAAAAAAAAAAAAAAAAAAAAAAAAAANjg6AB/f38AucTQAMvLywDAwP8Af39/AAAAAAAAAAAAAAAAAAAAAAAAAAAAIQAAABgAAAAUAAAABiYAAGAMAAAONgAA8BUAABAAAAAmAAAACAAAAP//////////MAAAABQAAAAAAAAAAAD//wAAAQAAAP//AAABAA=="/>
+                <pr:smNativeData xmlns:pr="smNativeData" xmlns="smNativeData" val="SMDATA_16_V2g2ahMAAAAlAAAAZQAAAA0AAAAAkAAAAEgAAACQAAAASAAAAAAAAAAAAAAAAAAAAAEAAABQAAAA8UbmkT8YuD8AAAAAAAAAAAAAAAAAAOA/AAAAAAAA4D8AAAAAAADgPwAAAAAAAOA/AAAAAAAA4D8AAAAAAADgPwAAAAAAAOA/AAAAAAAA4D8CAAAAjAAAAAEAAAAAAAAA7/P4AP///wgAAAAAAAAAAAAAAAAAAAAAAAAAAAAAAAAAAAAAeAAAAAEAAABAAAAAAAAAAAAAAABaAAAAAAAAAAAAAAAAAAAAAAAAAAAAAAAAAAAAAAAAAAAAAAAAAAAAAAAAAAAAAAAAAAAAAAAAAAAAAAAAAAAAAAAAAAAAAAAAAAAAFAAAADwAAAABAAAAAAAAANjg6AAUAAAAAQAAACMAAAAjAAAAIwAAAB4AAAAAAAAAZAAAAGQAAAAAAAAAZAAAAGQAAAAVAAAAYAAAAAAAAAAAAAAADwAAACADAAAAAAAAAAAAAAEAAACgMgAAVgcAAKr4//8BAAAAf39/AAEAAABkAAAAAAAAABQAAABAHwAAAAAAACYAAAAAAAAAwOD//wAAAAAmAAAAZAAAABYAAABMAAAAAQAAAAAAAAAGAAAAAAAAAAEAAAC5xNAAPAAAAAAAAAAoAAAAZAAAAGQAAAAAAAAAy8vLADwAAAAAAAAAKAAAAGQAAABkAAAAAAAAABcAAAAUAAAAAAAAAAAAAAD/fwAA/38AAAAAAAAJAAAABAAAAP////8eAAAAaAAAAAAAAAAAAAAAAAAAAAAAAAAAAAAAECcAABAnAAAAAAAAAAAAAAAAAAAAAAAAAAAAAAAAAAAAAAAAAAAAAHgAAAAAAAAAwMD/AAAAAAAAAAAAAAAAAAAAAABkAAAAAAAAAH9/fwAKAAAAIgAAABgAAAAAAAAAAAAAAAAAAAAAAAAAAAAAAAAAAAAkAAAAJAAAAAAAAAAHAAAAAAAAAAAAAAAAAAAAAAAAAAAAAAAAAAAAf39/ACUAAABYAAAAAAAAAAAAAAAAAAAAAAAAAAAAAAAAAAAAAAAAAAAAAAAAAAAAAAAAAAAAAAA/AAAAAAAAAKCGAQAAAAAAAAAAAAAAAAAMAAAAAQAAAAAAAAAAAAAAAAAAAB8AAABUAAAA7/P4AP///wEAAAAAAAAAAAAAAAAAAAAAAAAAAAAAAAAAAAAAAAAAANjg6AB/f38AucTQAMvLywDAwP8Af39/AAAAAAAAAAAAAAAAAAAAAAAAAAAAIQAAABgAAAAUAAAABiYAAGAMAAAONgAA8BUAABAAAAAmAAAACAAAAP//////////MAAAABQAAAAAAAAAAAD//wAAAQAAAP//AAABAA=="/>
               </a:ext>
             </a:extLst>
           </p:cNvSpPr>
@@ -13996,7 +14345,7 @@
           <p:cNvSpPr>
             <a:extLst>
               <a:ext uri="smNativeData">
-                <pr:smNativeData xmlns:pr="smNativeData" xmlns="smNativeData" val="SMDATA_16_kRU2ahMAAAAlAAAAZAAAAA0AAAAAAAAAAAAAAAAAAAAAAAAAAAAAAAABAAAAAAAAAAEAAABQAAAAAAAAAAAA4D8AAAAAAADgPwAAAAAAAOA/AAAAAAAA4D8AAAAAAADgPwAAAAAAAOA/AAAAAAAA4D8AAAAAAADgPwAAAAAAAOA/AAAAAAAA4D8CAAAAjAAAAAAAAAAAAAAARHLEDP///wgAAAAAAAAAAAAAAAAAAAAAAAAAAAAAAAAAAAAAZAAAAAEAAABAAAAAAAAAAAAAAAAAAAAAAAAAAAAAAAAAAAAAAAAAAAAAAAAAAAAAAAAAAAAAAAAAAAAAAAAAAAAAAAAAAAAAAAAAAAAAAAAAAAAAAAAAAAAAAAAAAAAAFAAAADwAAAAAAAAAAAAAAAAAAAAPAAAAAQAAACMAAAAjAAAAIwAAAB4AAAAAAAAAZAAAAGQAAAAAAAAAZAAAAGQAAAAVAAAAYAAAAAAAAAAAAAAADwAAACADAAAAAAAAAAAAAAEAAACgMgAAVgcAAKr4//8BAAAAf39/AAEAAABkAAAAAAAAABQAAABAHwAAAAAAACYAAAAAAAAAwOD//wAAAAAmAAAAZAAAABYAAABMAAAAAAAAAAAAAAAEAAAAAAAAAAEAAADn5uYKAAAAACgAAAAoAAAAZAAAAGQAAAAAAAAAzMzMAAAAAABQAAAAUAAAAGQAAABkAAAAAAAAABcAAAAUAAAAAAAAAAAAAAD/fwAA/38AAAAAAAAJAAAABAAAAAAAAAAeAAAAaAAAAAAAAAAAAAAAAAAAAAAAAAAAAAAAECcAABAnAAAAAAAAAAAAAAAAAAAAAAAAAAAAAAAAAAAAAAAAAAAAABQAAAAAAAAAwMD/AAAAAABkAAAAMgAAAAAAAABkAAAAAAAAAH9/fwAKAAAAIgAAABgAAAAAAAAAAAAAAAAAAAAAAAAAAAAAAAAAAAAkAAAAJAAAAAAAAAAHAAAAAAAAAAAAAAAAAAAAAAAAAAAAAAAAAAAAf39/ACUAAABYAAAAAAAAAAAAAAAAAAAAAAAAAAAAAAAAAAAAAAAAAAAAAAAAAAAAAAAAAAAAAAA/AAAAAAAAAKCGAQAAAAAAAAAAAAAAAAAMAAAAAQAAAAAAAAAAAAAAAAAAAB8AAABUAAAARHLEBf///wEAAAAAAAAAAAAAAAAAAAAAAAAAAAAAAAAAAAAAAAAAAAAAAAB/f38A5+bmA8zMzADAwP8Af39/AAAAAAAAAAAAAAAAAAAAAAAAAAAAIQAAABgAAAAUAAAABiYAAIANAAAONgAAcBEAABAAAAAmAAAACAAAAP//////////MAAAABQAAAAAAAAAAAD//wAAAQAAAP//AAABAA=="/>
+                <pr:smNativeData xmlns:pr="smNativeData" xmlns="smNativeData" val="SMDATA_16_V2g2ahMAAAAlAAAAZAAAAA0AAAAAAAAAAAAAAAAAAAAAAAAAAAAAAAABAAAAAAAAAAEAAABQAAAAAAAAAAAA4D8AAAAAAADgPwAAAAAAAOA/AAAAAAAA4D8AAAAAAADgPwAAAAAAAOA/AAAAAAAA4D8AAAAAAADgPwAAAAAAAOA/AAAAAAAA4D8CAAAAjAAAAAAAAAAAAAAARHLEDP///wgAAAAAAAAAAAAAAAAAAAAAAAAAAAAAAAAAAAAAZAAAAAEAAABAAAAAAAAAAAAAAAAAAAAAAAAAAAAAAAAAAAAAAAAAAAAAAAAAAAAAAAAAAAAAAAAAAAAAAAAAAAAAAAAAAAAAAAAAAAAAAAAAAAAAAAAAAAAAAAAAAAAAFAAAADwAAAAAAAAAAAAAAAAAAAAPAAAAAQAAACMAAAAjAAAAIwAAAB4AAAAAAAAAZAAAAGQAAAAAAAAAZAAAAGQAAAAVAAAAYAAAAAAAAAAAAAAADwAAACADAAAAAAAAAAAAAAEAAACgMgAAVgcAAKr4//8BAAAAf39/AAEAAABkAAAAAAAAABQAAABAHwAAAAAAACYAAAAAAAAAwOD//wAAAAAmAAAAZAAAABYAAABMAAAAAAAAAAAAAAAEAAAAAAAAAAEAAADn5uYKAAAAACgAAAAoAAAAZAAAAGQAAAAAAAAAzMzMAAAAAABQAAAAUAAAAGQAAABkAAAAAAAAABcAAAAUAAAAAAAAAAAAAAD/fwAA/38AAAAAAAAJAAAABAAAAAAAAAAeAAAAaAAAAAAAAAAAAAAAAAAAAAAAAAAAAAAAECcAABAnAAAAAAAAAAAAAAAAAAAAAAAAAAAAAAAAAAAAAAAAAAAAABQAAAAAAAAAwMD/AAAAAABkAAAAMgAAAAAAAABkAAAAAAAAAH9/fwAKAAAAIgAAABgAAAAAAAAAAAAAAAAAAAAAAAAAAAAAAAAAAAAkAAAAJAAAAAAAAAAHAAAAAAAAAAAAAAAAAAAAAAAAAAAAAAAAAAAAf39/ACUAAABYAAAAAAAAAAAAAAAAAAAAAAAAAAAAAAAAAAAAAAAAAAAAAAAAAAAAAAAAAAAAAAA/AAAAAAAAAKCGAQAAAAAAAAAAAAAAAAAMAAAAAQAAAAAAAAAAAAAAAAAAAB8AAABUAAAARHLEBf///wEAAAAAAAAAAAAAAAAAAAAAAAAAAAAAAAAAAAAAAAAAAAAAAAB/f38A5+bmA8zMzADAwP8Af39/AAAAAAAAAAAAAAAAAAAAAAAAAAAAIQAAABgAAAAUAAAABiYAAIANAAAONgAAcBEAABAAAAAmAAAACAAAAP//////////MAAAABQAAAAAAAAAAAD//wAAAQAAAP//AAABAA=="/>
               </a:ext>
             </a:extLst>
           </p:cNvSpPr>
@@ -14049,7 +14398,7 @@
           <p:cNvSpPr>
             <a:extLst>
               <a:ext uri="smNativeData">
-                <pr:smNativeData xmlns:pr="smNativeData" xmlns="smNativeData" val="SMDATA_16_kRU2ahMAAAAlAAAAZAAAAA0AAAAAkAAAAEgAAACQAAAASAAAAAAAAAABAAAAAAAAAAEAAABQAAAAAAAAAAAA4D8AAAAAAADgPwAAAAAAAOA/AAAAAAAA4D8AAAAAAADgPwAAAAAAAOA/AAAAAAAA4D8AAAAAAADgPwAAAAAAAOA/AAAAAAAA4D8CAAAAjAAAAAAAAAAAAAAARHLEDP///wgAAAAAAAAAAAAAAAAAAAAAAAAAAAAAAAAAAAAAZAAAAAEAAABAAAAAAAAAAAAAAAAAAAAAAAAAAAAAAAAAAAAAAAAAAAAAAAAAAAAAAAAAAAAAAAAAAAAAAAAAAAAAAAAAAAAAAAAAAAAAAAAAAAAAAAAAAAAAAAAAAAAAFAAAADwAAAAAAAAAAAAAAAAAAAAPAAAAAQAAACMAAAAjAAAAIwAAAB4AAAAAAAAAZAAAAGQAAAAAAAAAZAAAAGQAAAAVAAAAYAAAAAAAAAAAAAAADwAAACADAAAAAAAAAAAAAAEAAACgMgAAVgcAAKr4//8BAAAAf39/AAEAAABkAAAAAAAAABQAAABAHwAAAAAAACYAAAAAAAAAwOD//wAAAAAmAAAAZAAAABYAAABMAAAAAAAAAAAAAAAEAAAAAAAAAAEAAADn5uYKAAAAACgAAAAoAAAAZAAAAGQAAAAAAAAAzMzMAAAAAABQAAAAUAAAAGQAAABkAAAAAAAAABcAAAAUAAAAAAAAAAAAAAD/fwAA/38AAAAAAAAJAAAABAAAAHwBAAAeAAAAaAAAAAAAAAAAAAAAAAAAAAAAAAAAAAAAECcAABAnAAAAAAAAAAAAAAAAAAAAAAAAAAAAAAAAAAAAAAAAAAAAABQAAAAAAAAAwMD/AAAAAABkAAAAMgAAAAAAAABkAAAAAAAAAH9/fwAKAAAAIgAAABgAAAAAAAAAAAAAAAAAAAAAAAAAAAAAAAAAAAAkAAAAJAAAAAAAAAAHAAAAAAAAAAAAAAAAAAAAAAAAAAAAAAAAAAAAf39/ACUAAABYAAAAAAAAAAAAAAAAAAAAAAAAAAAAAAAAAAAAAAAAAAAAAAAAAAAAAAAAAAAAAAA/AAAAAAAAAKCGAQAAAAAAAAAAAAAAAAAMAAAAAQAAAAAAAAAAAAAAAAAAAB8AAABUAAAARHLEBf///wEAAAAAAAAAAAAAAAAAAAAAAAAAAAAAAAAAAAAAAAAAAAAAAAB/f38A5+bmA8zMzADAwP8Af39/AAAAAAAAAAAAAAAAAAAAAAAAAAAAIQAAABgAAAAUAAAABiYAALgRAAAONgAAiBQAABAAAAAmAAAACAAAAP//////////MAAAABQAAAAAAAAAAAD//wAAAQAAAP//AAABAA=="/>
+                <pr:smNativeData xmlns:pr="smNativeData" xmlns="smNativeData" val="SMDATA_16_V2g2ahMAAAAlAAAAZAAAAA0AAAAAkAAAAEgAAACQAAAASAAAAAAAAAABAAAAAAAAAAEAAABQAAAAAAAAAAAA4D8AAAAAAADgPwAAAAAAAOA/AAAAAAAA4D8AAAAAAADgPwAAAAAAAOA/AAAAAAAA4D8AAAAAAADgPwAAAAAAAOA/AAAAAAAA4D8CAAAAjAAAAAAAAAAAAAAARHLEDP///wgAAAAAAAAAAAAAAAAAAAAAAAAAAAAAAAAAAAAAZAAAAAEAAABAAAAAAAAAAAAAAAAAAAAAAAAAAAAAAAAAAAAAAAAAAAAAAAAAAAAAAAAAAAAAAAAAAAAAAAAAAAAAAAAAAAAAAAAAAAAAAAAAAAAAAAAAAAAAAAAAAAAAFAAAADwAAAAAAAAAAAAAAAAAAAAPAAAAAQAAACMAAAAjAAAAIwAAAB4AAAAAAAAAZAAAAGQAAAAAAAAAZAAAAGQAAAAVAAAAYAAAAAAAAAAAAAAADwAAACADAAAAAAAAAAAAAAEAAACgMgAAVgcAAKr4//8BAAAAf39/AAEAAABkAAAAAAAAABQAAABAHwAAAAAAACYAAAAAAAAAwOD//wAAAAAmAAAAZAAAABYAAABMAAAAAAAAAAAAAAAEAAAAAAAAAAEAAADn5uYKAAAAACgAAAAoAAAAZAAAAGQAAAAAAAAAzMzMAAAAAABQAAAAUAAAAGQAAABkAAAAAAAAABcAAAAUAAAAAAAAAAAAAAD/fwAA/38AAAAAAAAJAAAABAAAAHwBAAAeAAAAaAAAAAAAAAAAAAAAAAAAAAAAAAAAAAAAECcAABAnAAAAAAAAAAAAAAAAAAAAAAAAAAAAAAAAAAAAAAAAAAAAABQAAAAAAAAAwMD/AAAAAABkAAAAMgAAAAAAAABkAAAAAAAAAH9/fwAKAAAAIgAAABgAAAAAAAAAAAAAAAAAAAAAAAAAAAAAAAAAAAAkAAAAJAAAAAAAAAAHAAAAAAAAAAAAAAAAAAAAAAAAAAAAAAAAAAAAf39/ACUAAABYAAAAAAAAAAAAAAAAAAAAAAAAAAAAAAAAAAAAAAAAAAAAAAAAAAAAAAAAAAAAAAA/AAAAAAAAAKCGAQAAAAAAAAAAAAAAAAAMAAAAAQAAAAAAAAAAAAAAAAAAAB8AAABUAAAARHLEBf///wEAAAAAAAAAAAAAAAAAAAAAAAAAAAAAAAAAAAAAAAAAAAAAAAB/f38A5+bmA8zMzADAwP8Af39/AAAAAAAAAAAAAAAAAAAAAAAAAAAAIQAAABgAAAAUAAAABiYAALgRAAAONgAAiBQAABAAAAAmAAAACAAAAP//////////MAAAABQAAAAAAAAAAAD//wAAAQAAAP//AAABAA=="/>
               </a:ext>
             </a:extLst>
           </p:cNvSpPr>
@@ -14094,7 +14443,7 @@
           <p:cNvSpPr>
             <a:extLst>
               <a:ext uri="smNativeData">
-                <pr:smNativeData xmlns:pr="smNativeData" xmlns="smNativeData" val="SMDATA_16_kRU2ahMAAAAlAAAAZQAAAA0AAAAAkAAAAEgAAACQAAAASAAAAAAAAAAAAAAAAAAAAAEAAABQAAAA8UbmkT8YuD8AAAAAAADwvwAAAAAAAOA/AAAAAAAA4D8AAAAAAADgPwAAAAAAAOA/AAAAAAAA4D8AAAAAAADgPwAAAAAAAOA/AAAAAAAA4D8CAAAAjAAAAAEAAAAAAAAADyRAAP///wgAAAAAAAAAAAAAAAAAAAAAAAAAAAAAAAAAAAAAeAAAAAEAAABAAAAAAAAAAAAAAABaAAAAAAAAAAAAAAAAAAAAAAAAAAAAAAAAAAAAAAAAAAAAAAAAAAAAAAAAAAAAAAAAAAAAAAAAAAAAAAAAAAAAAAAAAAAAAAAAAAAAFAAAADwAAAAAAAAAAAAAAAAAAAAPAAAAAQAAACMAAAAjAAAAIwAAAB4AAAAAAAAAZAAAAGQAAAAAAAAAZAAAAGQAAAAVAAAAYAAAAAAAAAAAAAAADwAAACADAAAAAAAAAAAAAAEAAACgMgAAVgcAAKr4//8BAAAAf39/AAEAAABkAAAAAAAAABQAAABAHwAAAAAAACYAAAAAAAAAwOD//wAAAAAmAAAAZAAAABYAAABMAAAAAQAAAAAAAAAGAAAAAAAAAAEAAAC5xNAAPAAAAAAAAAAoAAAAZAAAAGQAAAAAAAAAy8vLADwAAAAAAAAAKAAAAGQAAABkAAAAAAAAABcAAAAUAAAAAAAAAAAAAAD/fwAA/38AAAAAAAAJAAAABAAAACsAAAAeAAAAaAAAAAAAAAAAAAAAAAAAAAAAAAAAAAAAECcAABAnAAAAAAAAAAAAAAAAAAAAAAAAAAAAAAAAAAAAAAAAAAAAAHgAAAAAAAAAwMD/AAAAAAAAAAAAAAAAAAAAAABkAAAAAAAAAH9/fwAKAAAAIgAAABgAAAAAAAAAAAAAAAAAAAAAAAAAAAAAAAAAAAAkAAAAJAAAAAAAAAAHAAAAAAAAAAAAAAAAAAAAAAAAAAAAAAAAAAAAf39/ACUAAABYAAAAAAAAAAAAAAAAAAAAAAAAAAAAAAAAAAAAAAAAAAAAAAAAAAAAAAAAAAAAAAA/AAAAAAAAAKCGAQAAAAAAAAAAAAAAAAAMAAAAAQAAAAAAAAAAAAAAAAAAAB8AAABUAAAADyRAAP///wEAAAAAAAAAAAAAAAAAAAAAAAAAAAAAAAAAAAAAAAAAAAAAAAB/f38AucTQAMvLywDAwP8Af39/AAAAAAAAAAAAAAAAAAAAAAAAAAAAIQAAABgAAAAUAAAAWjcAAGAMAABiRwAA8BUAABAAAAAmAAAACAAAAP//////////MAAAABQAAAAAAAAAAAD//wAAAQAAAP//AAABAA=="/>
+                <pr:smNativeData xmlns:pr="smNativeData" xmlns="smNativeData" val="SMDATA_16_V2g2ahMAAAAlAAAAZQAAAA0AAAAAkAAAAEgAAACQAAAASAAAAAAAAAAAAAAAAAAAAAEAAABQAAAA8UbmkT8YuD8AAAAAAAAAAAAAAAAAAOA/AAAAAAAA4D8AAAAAAADgPwAAAAAAAOA/AAAAAAAA4D8AAAAAAADgPwAAAAAAAOA/AAAAAAAA4D8CAAAAjAAAAAEAAAAAAAAADyRAAP///wgAAAAAAAAAAAAAAAAAAAAAAAAAAAAAAAAAAAAAeAAAAAEAAABAAAAAAAAAAAAAAABaAAAAAAAAAAAAAAAAAAAAAAAAAAAAAAAAAAAAAAAAAAAAAAAAAAAAAAAAAAAAAAAAAAAAAAAAAAAAAAAAAAAAAAAAAAAAAAAAAAAAFAAAADwAAAAAAAAAAAAAAAAAAAAPAAAAAQAAACMAAAAjAAAAIwAAAB4AAAAAAAAAZAAAAGQAAAAAAAAAZAAAAGQAAAAVAAAAYAAAAAAAAAAAAAAADwAAACADAAAAAAAAAAAAAAEAAACgMgAAVgcAAKr4//8BAAAAf39/AAEAAABkAAAAAAAAABQAAABAHwAAAAAAACYAAAAAAAAAwOD//wAAAAAmAAAAZAAAABYAAABMAAAAAQAAAAAAAAAGAAAAAAAAAAEAAAC5xNAAPAAAAAAAAAAoAAAAZAAAAGQAAAAAAAAAy8vLADwAAAAAAAAAKAAAAGQAAABkAAAAAAAAABcAAAAUAAAAAAAAAAAAAAD/fwAA/38AAAAAAAAJAAAABAAAACsAAAAeAAAAaAAAAAAAAAAAAAAAAAAAAAAAAAAAAAAAECcAABAnAAAAAAAAAAAAAAAAAAAAAAAAAAAAAAAAAAAAAAAAAAAAAHgAAAAAAAAAwMD/AAAAAAAAAAAAAAAAAAAAAABkAAAAAAAAAH9/fwAKAAAAIgAAABgAAAAAAAAAAAAAAAAAAAAAAAAAAAAAAAAAAAAkAAAAJAAAAAAAAAAHAAAAAAAAAAAAAAAAAAAAAAAAAAAAAAAAAAAAf39/ACUAAABYAAAAAAAAAAAAAAAAAAAAAAAAAAAAAAAAAAAAAAAAAAAAAAAAAAAAAAAAAAAAAAA/AAAAAAAAAKCGAQAAAAAAAAAAAAAAAAAMAAAAAQAAAAAAAAAAAAAAAAAAAB8AAABUAAAADyRAAP///wEAAAAAAAAAAAAAAAAAAAAAAAAAAAAAAAAAAAAAAAAAAAAAAAB/f38AucTQAMvLywDAwP8Af39/AAAAAAAAAAAAAAAAAAAAAAAAAAAAIQAAABgAAAAUAAAAWjcAAGAMAABiRwAA8BUAABAAAAAmAAAACAAAAP//////////MAAAABQAAAAAAAAAAAD//wAAAQAAAP//AAABAA=="/>
               </a:ext>
             </a:extLst>
           </p:cNvSpPr>
@@ -14131,7 +14480,7 @@
           <p:cNvSpPr>
             <a:extLst>
               <a:ext uri="smNativeData">
-                <pr:smNativeData xmlns:pr="smNativeData" xmlns="smNativeData" val="SMDATA_16_kRU2ahMAAAAlAAAAZAAAAA0AAAAAAAAAAAAAAAAAAAAAAAAAAAAAAAABAAAAAAAAAAEAAABQAAAAAAAAAAAA4D8AAAAAAADgPwAAAAAAAOA/AAAAAAAA4D8AAAAAAADgPwAAAAAAAOA/AAAAAAAA4D8AAAAAAADgPwAAAAAAAOA/AAAAAAAA4D8CAAAAjAAAAAAAAAAAAAAARHLEDP///wgAAAAAAAAAAAAAAAAAAAAAAAAAAAAAAAAAAAAAZAAAAAEAAABAAAAAAAAAAAAAAAAAAAAAAAAAAAAAAAAAAAAAAAAAAAAAAAAAAAAAAAAAAAAAAAAAAAAAAAAAAAAAAAAAAAAAAAAAAAAAAAAAAAAAAAAAAAAAAAAAAAAAFAAAADwAAAAAAAAAAAAAAAAAAAAPAAAAAQAAACMAAAAjAAAAIwAAAB4AAAAAAAAAZAAAAGQAAAAAAAAAZAAAAGQAAAAVAAAAYAAAAAAAAAAAAAAADwAAACADAAAAAAAAAAAAAAEAAACgMgAAVgcAAKr4//8BAAAAf39/AAEAAABkAAAAAAAAABQAAABAHwAAAAAAACYAAAAAAAAAwOD//wAAAAAmAAAAZAAAABYAAABMAAAAAAAAAAAAAAAEAAAAAAAAAAEAAADn5uYKAAAAACgAAAAoAAAAZAAAAGQAAAAAAAAAzMzMAAAAAABQAAAAUAAAAGQAAABkAAAAAAAAABcAAAAUAAAAAAAAAAAAAAD/fwAA/38AAAAAAAAJAAAABAAAADoJAAAeAAAAaAAAAAAAAAAAAAAAAAAAAAAAAAAAAAAAECcAABAnAAAAAAAAAAAAAAAAAAAAAAAAAAAAAAAAAAAAAAAAAAAAABQAAAAAAAAAwMD/AAAAAABkAAAAMgAAAAAAAABkAAAAAAAAAH9/fwAKAAAAIgAAABgAAAAAAAAAAAAAAAAAAAAAAAAAAAAAAAAAAAAkAAAAJAAAAAAAAAAHAAAAAAAAAAAAAAAAAAAAAAAAAAAAAAAAAAAAf39/ACUAAABYAAAAAAAAAAAAAAAAAAAAAAAAAAAAAAAAAAAAAAAAAAAAAAAAAAAAAAAAAAAAAAA/AAAAAAAAAKCGAQAAAAAAAAAAAAAAAAAMAAAAAQAAAAAAAAAAAAAAAAAAAB8AAABUAAAARHLEBf///wEAAAAAAAAAAAAAAAAAAAAAAAAAAAAAAAAAAAAAAAAAAAAAAAB/f38A5+bmA8zMzADAwP8Af39/AAAAAAAAAAAAAAAAAAAAAAAAAAAAIQAAABgAAAAUAAAAWjcAAIANAABiRwAAcBEAABAAAAAmAAAACAAAAP//////////MAAAABQAAAAAAAAAAAD//wAAAQAAAP//AAABAA=="/>
+                <pr:smNativeData xmlns:pr="smNativeData" xmlns="smNativeData" val="SMDATA_16_V2g2ahMAAAAlAAAAZAAAAA0AAAAAAAAAAAAAAAAAAAAAAAAAAAAAAAABAAAAAAAAAAEAAABQAAAAAAAAAAAA4D8AAAAAAADgPwAAAAAAAOA/AAAAAAAA4D8AAAAAAADgPwAAAAAAAOA/AAAAAAAA4D8AAAAAAADgPwAAAAAAAOA/AAAAAAAA4D8CAAAAjAAAAAAAAAAAAAAARHLEDP///wgAAAAAAAAAAAAAAAAAAAAAAAAAAAAAAAAAAAAAZAAAAAEAAABAAAAAAAAAAAAAAAAAAAAAAAAAAAAAAAAAAAAAAAAAAAAAAAAAAAAAAAAAAAAAAAAAAAAAAAAAAAAAAAAAAAAAAAAAAAAAAAAAAAAAAAAAAAAAAAAAAAAAFAAAADwAAAAAAAAAAAAAAAAAAAAPAAAAAQAAACMAAAAjAAAAIwAAAB4AAAAAAAAAZAAAAGQAAAAAAAAAZAAAAGQAAAAVAAAAYAAAAAAAAAAAAAAADwAAACADAAAAAAAAAAAAAAEAAACgMgAAVgcAAKr4//8BAAAAf39/AAEAAABkAAAAAAAAABQAAABAHwAAAAAAACYAAAAAAAAAwOD//wAAAAAmAAAAZAAAABYAAABMAAAAAAAAAAAAAAAEAAAAAAAAAAEAAADn5uYKAAAAACgAAAAoAAAAZAAAAGQAAAAAAAAAzMzMAAAAAABQAAAAUAAAAGQAAABkAAAAAAAAABcAAAAUAAAAAAAAAAAAAAD/fwAA/38AAAAAAAAJAAAABAAAADoJAAAeAAAAaAAAAAAAAAAAAAAAAAAAAAAAAAAAAAAAECcAABAnAAAAAAAAAAAAAAAAAAAAAAAAAAAAAAAAAAAAAAAAAAAAABQAAAAAAAAAwMD/AAAAAABkAAAAMgAAAAAAAABkAAAAAAAAAH9/fwAKAAAAIgAAABgAAAAAAAAAAAAAAAAAAAAAAAAAAAAAAAAAAAAkAAAAJAAAAAAAAAAHAAAAAAAAAAAAAAAAAAAAAAAAAAAAAAAAAAAAf39/ACUAAABYAAAAAAAAAAAAAAAAAAAAAAAAAAAAAAAAAAAAAAAAAAAAAAAAAAAAAAAAAAAAAAA/AAAAAAAAAKCGAQAAAAAAAAAAAAAAAAAMAAAAAQAAAAAAAAAAAAAAAAAAAB8AAABUAAAARHLEBf///wEAAAAAAAAAAAAAAAAAAAAAAAAAAAAAAAAAAAAAAAAAAAAAAAB/f38A5+bmA8zMzADAwP8Af39/AAAAAAAAAAAAAAAAAAAAAAAAAAAAIQAAABgAAAAUAAAAWjcAAIANAABiRwAAcBEAABAAAAAmAAAACAAAAP//////////MAAAABQAAAAAAAAAAAD//wAAAQAAAP//AAABAA=="/>
               </a:ext>
             </a:extLst>
           </p:cNvSpPr>
@@ -14184,7 +14533,7 @@
           <p:cNvSpPr>
             <a:extLst>
               <a:ext uri="smNativeData">
-                <pr:smNativeData xmlns:pr="smNativeData" xmlns="smNativeData" val="SMDATA_16_kRU2ahMAAAAlAAAAZAAAAA0AAAAAkAAAAEgAAACQAAAASAAAAAAAAAABAAAAAAAAAAEAAABQAAAAAAAAAAAA4D8AAAAAAADgPwAAAAAAAOA/AAAAAAAA4D8AAAAAAADgPwAAAAAAAOA/AAAAAAAA4D8AAAAAAADgPwAAAAAAAOA/AAAAAAAA4D8CAAAAjAAAAAAAAAAAAAAARHLEDP///wgAAAAAAAAAAAAAAAAAAAAAAAAAAAAAAAAAAAAAZAAAAAEAAABAAAAAAAAAAAAAAAAAAAAAAAAAAAAAAAAAAAAAAAAAAAAAAAAAAAAAAAAAAAAAAAAAAAAAAAAAAAAAAAAAAAAAAAAAAAAAAAAAAAAAAAAAAAAAAAAAAAAAFAAAADwAAAAAAAAAAAAAAAAAAAAPAAAAAQAAACMAAAAjAAAAIwAAAB4AAAAAAAAAZAAAAGQAAAAAAAAAZAAAAGQAAAAVAAAAYAAAAAAAAAAAAAAADwAAACADAAAAAAAAAAAAAAEAAACgMgAAVgcAAKr4//8BAAAAf39/AAEAAABkAAAAAAAAABQAAABAHwAAAAAAACYAAAAAAAAAwOD//wAAAAAmAAAAZAAAABYAAABMAAAAAAAAAAAAAAAEAAAAAAAAAAEAAADn5uYKAAAAACgAAAAoAAAAZAAAAGQAAAAAAAAAzMzMAAAAAABQAAAAUAAAAGQAAABkAAAAAAAAABcAAAAUAAAAAAAAAAAAAAD/fwAA/38AAAAAAAAJAAAABAAAAAAAAAAeAAAAaAAAAAAAAAAAAAAAAAAAAAAAAAAAAAAAECcAABAnAAAAAAAAAAAAAAAAAAAAAAAAAAAAAAAAAAAAAAAAAAAAABQAAAAAAAAAwMD/AAAAAABkAAAAMgAAAAAAAABkAAAAAAAAAH9/fwAKAAAAIgAAABgAAAAAAAAAAAAAAAAAAAAAAAAAAAAAAAAAAAAkAAAAJAAAAAAAAAAHAAAAAAAAAAAAAAAAAAAAAAAAAAAAAAAAAAAAf39/ACUAAABYAAAAAAAAAAAAAAAAAAAAAAAAAAAAAAAAAAAAAAAAAAAAAAAAAAAAAAAAAAAAAAA/AAAAAAAAAKCGAQAAAAAAAAAAAAAAAAAMAAAAAQAAAAAAAAAAAAAAAAAAAB8AAABUAAAARHLEBf///wEAAAAAAAAAAAAAAAAAAAAAAAAAAAAAAAAAAAAAAAAAAAAAAAB/f38A5+bmA8zMzADAwP8Af39/AAAAAAAAAAAAAAAAAAAAAAAAAAAAIQAAABgAAAAUAAAAWjcAALgRAABiRwAAiBQAABAAAAAmAAAACAAAAP//////////MAAAABQAAAAAAAAAAAD//wAAAQAAAP//AAABAA=="/>
+                <pr:smNativeData xmlns:pr="smNativeData" xmlns="smNativeData" val="SMDATA_16_V2g2ahMAAAAlAAAAZAAAAA0AAAAAkAAAAEgAAACQAAAASAAAAAAAAAABAAAAAAAAAAEAAABQAAAAAAAAAAAA4D8AAAAAAADgPwAAAAAAAOA/AAAAAAAA4D8AAAAAAADgPwAAAAAAAOA/AAAAAAAA4D8AAAAAAADgPwAAAAAAAOA/AAAAAAAA4D8CAAAAjAAAAAAAAAAAAAAARHLEDP///wgAAAAAAAAAAAAAAAAAAAAAAAAAAAAAAAAAAAAAZAAAAAEAAABAAAAAAAAAAAAAAAAAAAAAAAAAAAAAAAAAAAAAAAAAAAAAAAAAAAAAAAAAAAAAAAAAAAAAAAAAAAAAAAAAAAAAAAAAAAAAAAAAAAAAAAAAAAAAAAAAAAAAFAAAADwAAAAAAAAAAAAAAAAAAAAPAAAAAQAAACMAAAAjAAAAIwAAAB4AAAAAAAAAZAAAAGQAAAAAAAAAZAAAAGQAAAAVAAAAYAAAAAAAAAAAAAAADwAAACADAAAAAAAAAAAAAAEAAACgMgAAVgcAAKr4//8BAAAAf39/AAEAAABkAAAAAAAAABQAAABAHwAAAAAAACYAAAAAAAAAwOD//wAAAAAmAAAAZAAAABYAAABMAAAAAAAAAAAAAAAEAAAAAAAAAAEAAADn5uYKAAAAACgAAAAoAAAAZAAAAGQAAAAAAAAAzMzMAAAAAABQAAAAUAAAAGQAAABkAAAAAAAAABcAAAAUAAAAAAAAAAAAAAD/fwAA/38AAAAAAAAJAAAABAAAAAAAAAAeAAAAaAAAAAAAAAAAAAAAAAAAAAAAAAAAAAAAECcAABAnAAAAAAAAAAAAAAAAAAAAAAAAAAAAAAAAAAAAAAAAAAAAABQAAAAAAAAAwMD/AAAAAABkAAAAMgAAAAAAAABkAAAAAAAAAH9/fwAKAAAAIgAAABgAAAAAAAAAAAAAAAAAAAAAAAAAAAAAAAAAAAAkAAAAJAAAAAAAAAAHAAAAAAAAAAAAAAAAAAAAAAAAAAAAAAAAAAAAf39/ACUAAABYAAAAAAAAAAAAAAAAAAAAAAAAAAAAAAAAAAAAAAAAAAAAAAAAAAAAAAAAAAAAAAA/AAAAAAAAAKCGAQAAAAAAAAAAAAAAAAAMAAAAAQAAAAAAAAAAAAAAAAAAAB8AAABUAAAARHLEBf///wEAAAAAAAAAAAAAAAAAAAAAAAAAAAAAAAAAAAAAAAAAAAAAAAB/f38A5+bmA8zMzADAwP8Af39/AAAAAAAAAAAAAAAAAAAAAAAAAAAAIQAAABgAAAAUAAAAWjcAALgRAABiRwAAiBQAABAAAAAmAAAACAAAAP//////////MAAAABQAAAAAAAAAAAD//wAAAQAAAP//AAABAA=="/>
               </a:ext>
             </a:extLst>
           </p:cNvSpPr>
@@ -14229,7 +14578,7 @@
           <p:cNvSpPr>
             <a:extLst>
               <a:ext uri="smNativeData">
-                <pr:smNativeData xmlns:pr="smNativeData" xmlns="smNativeData" val="SMDATA_16_kRU2ahMAAAAlAAAAZAAAAA0AAAAAkAAAAEgAAACQAAAASAAAAAAAAAAAAAAAAAAAAAEAAABQAAAAAAAAAAAA4D8AAAAAAADgPwAAAAAAAOA/AAAAAAAA4D8AAAAAAADgPwAAAAAAAOA/AAAAAAAA4D8AAAAAAADgPwAAAAAAAOA/AAAAAAAA4D8CAAAAjAAAAAAAAAAAAAAARHLEDP///wgAAAAAAAAAAAAAAAAAAAAAAAAAAAAAAAAAAAAAZAAAAAEAAABAAAAAAAAAAAAAAAAAAAAAAAAAAAAAAAAAAAAAAAAAAAAAAAAAAAAAAAAAAAAAAAAAAAAAAAAAAAAAAAAAAAAAAAAAAAAAAAAAAAAAAAAAAAAAAAAAAAAAFAAAADwAAAAAAAAAAAAAAAAAAAAPAAAAAQAAACMAAAAjAAAAIwAAAB4AAAAAAAAAZAAAAGQAAAAAAAAAZAAAAGQAAAAVAAAAYAAAAAAAAAAAAAAADwAAACADAAAAAAAAAAAAAAEAAACgMgAAVgcAAKr4//8BAAAAf39/AAEAAABkAAAAAAAAABQAAABAHwAAAAAAACYAAAAAAAAAwOD//wAAAAAmAAAAZAAAABYAAABMAAAAAAAAAAAAAAAEAAAAAAAAAAEAAADn5uYKAAAAACgAAAAoAAAAZAAAAGQAAAAAAAAAzMzMAAAAAABQAAAAUAAAAGQAAABkAAAAAAAAABcAAAAUAAAAAAAAAAAAAAD/fwAA/38AAAAAAAAJAAAABAAAAIQdAAAeAAAAaAAAAAAAAAAAAAAAAAAAAAAAAAAAAAAAECcAABAnAAAAAAAAAAAAAAAAAAAAAAAAAAAAAAAAAAAAAAAAAAAAABQAAAAAAAAAwMD/AAAAAABkAAAAMgAAAAAAAABkAAAAAAAAAH9/fwAKAAAAIgAAABgAAAAAAAAAAAAAAAAAAAAAAAAAAAAAAAAAAAAkAAAAJAAAAAAAAAAHAAAAAAAAAAAAAAAAAAAAAAAAAAAAAAAAAAAAf39/ACUAAABYAAAAAAAAAAAAAAAAAAAAAAAAAAAAAAAAAAAAAAAAAAAAAAAAAAAAAAAAAAAAAAA/AAAAAAAAAKCGAQAAAAAAAAAAAAAAAAAMAAAAAQAAAAAAAAAAAAAAAAAAAB8AAABUAAAARHLEBf///wEAAAAAAAAAAAAAAAAAAAAAAAAAAAAAAAAAAAAAAAAAAAAAAAB/f38A5+bmA8zMzADAwP8Af39/AAAAAAAAAAAAAAAAAAAAAAAAAAAAIQAAABgAAAAUAAAAYAMAAOgXAADgRgAAaCUAABAAAAAmAAAACAAAAP//////////MAAAABQAAAAAAAAAAAD//wAAAQAAAP//AAABAA=="/>
+                <pr:smNativeData xmlns:pr="smNativeData" xmlns="smNativeData" val="SMDATA_16_V2g2ahMAAAAlAAAAZAAAAA0AAAAAkAAAAEgAAACQAAAASAAAAAAAAAAAAAAAAAAAAAEAAABQAAAAAAAAAAAA4D8AAAAAAADgPwAAAAAAAOA/AAAAAAAA4D8AAAAAAADgPwAAAAAAAOA/AAAAAAAA4D8AAAAAAADgPwAAAAAAAOA/AAAAAAAA4D8CAAAAjAAAAAAAAAAAAAAARHLEDP///wgAAAAAAAAAAAAAAAAAAAAAAAAAAAAAAAAAAAAAZAAAAAEAAABAAAAAAAAAAAAAAAAAAAAAAAAAAAAAAAAAAAAAAAAAAAAAAAAAAAAAAAAAAAAAAAAAAAAAAAAAAAAAAAAAAAAAAAAAAAAAAAAAAAAAAAAAAAAAAAAAAAAAFAAAADwAAAAAAAAAAAAAAAAAAAAPAAAAAQAAACMAAAAjAAAAIwAAAB4AAAAAAAAAZAAAAGQAAAAAAAAAZAAAAGQAAAAVAAAAYAAAAAAAAAAAAAAADwAAACADAAAAAAAAAAAAAAEAAACgMgAAVgcAAKr4//8BAAAAf39/AAEAAABkAAAAAAAAABQAAABAHwAAAAAAACYAAAAAAAAAwOD//wAAAAAmAAAAZAAAABYAAABMAAAAAAAAAAAAAAAEAAAAAAAAAAEAAADn5uYKAAAAACgAAAAoAAAAZAAAAGQAAAAAAAAAzMzMAAAAAABQAAAAUAAAAGQAAABkAAAAAAAAABcAAAAUAAAAAAAAAAAAAAD/fwAA/38AAAAAAAAJAAAABAAAAIQdAAAeAAAAaAAAAAAAAAAAAAAAAAAAAAAAAAAAAAAAECcAABAnAAAAAAAAAAAAAAAAAAAAAAAAAAAAAAAAAAAAAAAAAAAAABQAAAAAAAAAwMD/AAAAAABkAAAAMgAAAAAAAABkAAAAAAAAAH9/fwAKAAAAIgAAABgAAAAAAAAAAAAAAAAAAAAAAAAAAAAAAAAAAAAkAAAAJAAAAAAAAAAHAAAAAAAAAAAAAAAAAAAAAAAAAAAAAAAAAAAAf39/ACUAAABYAAAAAAAAAAAAAAAAAAAAAAAAAAAAAAAAAAAAAAAAAAAAAAAAAAAAAAAAAAAAAAA/AAAAAAAAAKCGAQAAAAAAAAAAAAAAAAAMAAAAAQAAAAAAAAAAAAAAAAAAAB8AAABUAAAARHLEBf///wEAAAAAAAAAAAAAAAAAAAAAAAAAAAAAAAAAAAAAAAAAAAAAAAB/f38A5+bmA8zMzADAwP8Af39/AAAAAAAAAAAAAAAAAAAAAAAAAAAAIQAAABgAAAAUAAAAYAMAAOgXAADgRgAAaCUAAAAAAAAmAAAACAAAAP//////////MAAAABQAAAAAAAAAAAD//wAAAQAAAP//AAABAA=="/>
               </a:ext>
             </a:extLst>
           </p:cNvSpPr>
@@ -14261,7 +14610,7 @@
               <a:buChar char="•"/>
             </a:pPr>
             <a:r>
-              <a:rPr lang="en-us" sz="1500" b="1" cap="none">
+              <a:rPr lang="en-us" sz="1500" cap="none">
                 <a:solidFill>
                   <a:srgbClr val="283441"/>
                 </a:solidFill>
@@ -14269,7 +14618,7 @@
               <a:t>O </a:t>
             </a:r>
             <a:r>
-              <a:rPr lang="en-us" sz="1500" b="1" cap="none">
+              <a:rPr lang="en-us" sz="1500" cap="none">
                 <a:solidFill>
                   <a:srgbClr val="283441"/>
                 </a:solidFill>
@@ -14277,7 +14626,7 @@
               <a:t>que a </a:t>
             </a:r>
             <a:r>
-              <a:rPr lang="en-us" sz="1500" b="1" cap="none">
+              <a:rPr lang="en-us" sz="1500" cap="none">
                 <a:solidFill>
                   <a:srgbClr val="283441"/>
                 </a:solidFill>
@@ -14285,7 +14634,7 @@
               <a:t>localização junta, o </a:t>
             </a:r>
             <a:r>
-              <a:rPr lang="en-us" sz="1500" b="1" cap="none">
+              <a:rPr lang="en-us" sz="1500" cap="none">
                 <a:solidFill>
                   <a:srgbClr val="283441"/>
                 </a:solidFill>
@@ -14293,7 +14642,7 @@
               <a:t>horário </a:t>
             </a:r>
             <a:r>
-              <a:rPr lang="en-us" sz="1500" b="1" cap="none">
+              <a:rPr lang="en-us" sz="1500" cap="none">
                 <a:solidFill>
                   <a:srgbClr val="283441"/>
                 </a:solidFill>
@@ -14301,7 +14650,7 @@
               <a:t>separa — conversa </a:t>
             </a:r>
             <a:r>
-              <a:rPr lang="en-us" sz="1500" b="1" cap="none">
+              <a:rPr lang="en-us" sz="1500" cap="none">
                 <a:solidFill>
                   <a:srgbClr val="283441"/>
                 </a:solidFill>
@@ -14309,7 +14658,7 @@
               <a:t>com a </a:t>
             </a:r>
             <a:r>
-              <a:rPr lang="en-us" sz="1500" b="1" cap="none">
+              <a:rPr lang="en-us" sz="1500" cap="none">
                 <a:solidFill>
                   <a:srgbClr val="283441"/>
                 </a:solidFill>
@@ -14317,15 +14666,37 @@
               <a:t>pergunta do </a:t>
             </a:r>
             <a:r>
-              <a:rPr lang="en-us" sz="1500" b="1" cap="none">
-                <a:solidFill>
-                  <a:srgbClr val="283441"/>
-                </a:solidFill>
-              </a:rPr>
-              <a:t>trabalho.Furto e </a:t>
-            </a:r>
-            <a:r>
-              <a:rPr lang="en-us" sz="1500" b="1" cap="none">
+              <a:rPr lang="en-us" sz="1500" cap="none">
+                <a:solidFill>
+                  <a:srgbClr val="283441"/>
+                </a:solidFill>
+              </a:rPr>
+              <a:t>trabalho.</a:t>
+            </a:r>
+            <a:endParaRPr lang="en-us" sz="1500" cap="none">
+              <a:solidFill>
+                <a:srgbClr val="283441"/>
+              </a:solidFill>
+            </a:endParaRPr>
+          </a:p>
+          <a:p>
+            <a:pPr marL="177800" indent="-177800" algn="l">
+              <a:spcAft>
+                <a:spcPts val="800"/>
+              </a:spcAft>
+              <a:buSzTx/>
+              <a:buChar char="•"/>
+            </a:pPr>
+            <a:r>
+              <a:rPr lang="en-us" sz="1500" cap="none">
+                <a:solidFill>
+                  <a:srgbClr val="283441"/>
+                </a:solidFill>
+              </a:rPr>
+              <a:t>Furto e </a:t>
+            </a:r>
+            <a:r>
+              <a:rPr lang="en-us" sz="1500" cap="none">
                 <a:solidFill>
                   <a:srgbClr val="283441"/>
                 </a:solidFill>
@@ -14333,7 +14704,7 @@
               <a:t>Roubo </a:t>
             </a:r>
             <a:r>
-              <a:rPr lang="en-us" sz="1500" b="1" cap="none">
+              <a:rPr lang="en-us" sz="1500" cap="none">
                 <a:solidFill>
                   <a:srgbClr val="283441"/>
                 </a:solidFill>
@@ -14341,7 +14712,7 @@
               <a:t>aparecem no topo de </a:t>
             </a:r>
             <a:r>
-              <a:rPr lang="en-us" sz="1500" b="1" cap="none">
+              <a:rPr lang="en-us" sz="1500" cap="none">
                 <a:solidFill>
                   <a:srgbClr val="283441"/>
                 </a:solidFill>
@@ -14349,7 +14720,7 @@
               <a:t>todos </a:t>
             </a:r>
             <a:r>
-              <a:rPr lang="en-us" sz="1500" b="1" cap="none">
+              <a:rPr lang="en-us" sz="1500" cap="none">
                 <a:solidFill>
                   <a:srgbClr val="283441"/>
                 </a:solidFill>
@@ -14357,7 +14728,7 @@
               <a:t>os </a:t>
             </a:r>
             <a:r>
-              <a:rPr lang="en-us" sz="1500" b="1" cap="none">
+              <a:rPr lang="en-us" sz="1500" cap="none">
                 <a:solidFill>
                   <a:srgbClr val="283441"/>
                 </a:solidFill>
@@ -14365,7 +14736,7 @@
               <a:t>grupos: o </a:t>
             </a:r>
             <a:r>
-              <a:rPr lang="en-us" sz="1500" b="1" cap="none">
+              <a:rPr lang="en-us" sz="1500" cap="none">
                 <a:solidFill>
                   <a:srgbClr val="283441"/>
                 </a:solidFill>
@@ -14373,7 +14744,7 @@
               <a:t>desbalanceamento </a:t>
             </a:r>
             <a:r>
-              <a:rPr lang="en-us" sz="1500" b="1" cap="none">
+              <a:rPr lang="en-us" sz="1500" cap="none">
                 <a:solidFill>
                   <a:srgbClr val="283441"/>
                 </a:solidFill>
@@ -14381,15 +14752,37 @@
               <a:t>domina o </a:t>
             </a:r>
             <a:r>
-              <a:rPr lang="en-us" sz="1500" b="1" cap="none">
-                <a:solidFill>
-                  <a:srgbClr val="283441"/>
-                </a:solidFill>
-              </a:rPr>
-              <a:t>agrupamento.Tratamos </a:t>
-            </a:r>
-            <a:r>
-              <a:rPr lang="en-us" sz="1500" b="1" cap="none">
+              <a:rPr lang="en-us" sz="1500" cap="none">
+                <a:solidFill>
+                  <a:srgbClr val="283441"/>
+                </a:solidFill>
+              </a:rPr>
+              <a:t>agrupamento.</a:t>
+            </a:r>
+            <a:endParaRPr lang="en-us" sz="1500" cap="none">
+              <a:solidFill>
+                <a:srgbClr val="283441"/>
+              </a:solidFill>
+            </a:endParaRPr>
+          </a:p>
+          <a:p>
+            <a:pPr marL="177800" indent="-177800" algn="l">
+              <a:spcAft>
+                <a:spcPts val="800"/>
+              </a:spcAft>
+              <a:buSzTx/>
+              <a:buChar char="•"/>
+            </a:pPr>
+            <a:r>
+              <a:rPr lang="en-us" sz="1500" cap="none">
+                <a:solidFill>
+                  <a:srgbClr val="283441"/>
+                </a:solidFill>
+              </a:rPr>
+              <a:t>Tratamos </a:t>
+            </a:r>
+            <a:r>
+              <a:rPr lang="en-us" sz="1500" cap="none">
                 <a:solidFill>
                   <a:srgbClr val="283441"/>
                 </a:solidFill>
@@ -14397,7 +14790,7 @@
               <a:t>isso </a:t>
             </a:r>
             <a:r>
-              <a:rPr lang="en-us" sz="1500" b="1" cap="none">
+              <a:rPr lang="en-us" sz="1500" cap="none">
                 <a:solidFill>
                   <a:srgbClr val="283441"/>
                 </a:solidFill>
@@ -14405,7 +14798,7 @@
               <a:t>como </a:t>
             </a:r>
             <a:r>
-              <a:rPr lang="en-us" sz="1500" b="1" cap="none">
+              <a:rPr lang="en-us" sz="1500" cap="none">
                 <a:solidFill>
                   <a:srgbClr val="283441"/>
                 </a:solidFill>
@@ -14413,7 +14806,7 @@
               <a:t>hipótese </a:t>
             </a:r>
             <a:r>
-              <a:rPr lang="en-us" sz="1500" b="1" cap="none">
+              <a:rPr lang="en-us" sz="1500" cap="none">
                 <a:solidFill>
                   <a:srgbClr val="283441"/>
                 </a:solidFill>
@@ -14421,7 +14814,7 @@
               <a:t>exploratória, </a:t>
             </a:r>
             <a:r>
-              <a:rPr lang="en-us" sz="1500" b="1" cap="none">
+              <a:rPr lang="en-us" sz="1500" cap="none">
                 <a:solidFill>
                   <a:srgbClr val="283441"/>
                 </a:solidFill>
@@ -14429,7 +14822,7 @@
               <a:t>não </a:t>
             </a:r>
             <a:r>
-              <a:rPr lang="en-us" sz="1500" b="1" cap="none">
+              <a:rPr lang="en-us" sz="1500" cap="none">
                 <a:solidFill>
                   <a:srgbClr val="283441"/>
                 </a:solidFill>
@@ -14437,7 +14830,7 @@
               <a:t>como </a:t>
             </a:r>
             <a:r>
-              <a:rPr lang="en-us" sz="1500" b="1" cap="none">
+              <a:rPr lang="en-us" sz="1500" cap="none">
                 <a:solidFill>
                   <a:srgbClr val="283441"/>
                 </a:solidFill>
@@ -14445,7 +14838,7 @@
               <a:t>prova de </a:t>
             </a:r>
             <a:r>
-              <a:rPr lang="en-us" sz="1500" b="1" cap="none">
+              <a:rPr lang="en-us" sz="1500" cap="none">
                 <a:solidFill>
                   <a:srgbClr val="283441"/>
                 </a:solidFill>
@@ -14453,14 +14846,14 @@
               <a:t>grupos </a:t>
             </a:r>
             <a:r>
-              <a:rPr lang="en-us" sz="1500" b="1" cap="none">
+              <a:rPr lang="en-us" sz="1500" cap="none">
                 <a:solidFill>
                   <a:srgbClr val="283441"/>
                 </a:solidFill>
               </a:rPr>
               <a:t>naturais.</a:t>
             </a:r>
-            <a:endParaRPr lang="en-us" sz="1500" b="1" cap="none">
+            <a:endParaRPr lang="en-us" sz="1500" cap="none">
               <a:solidFill>
                 <a:srgbClr val="283441"/>
               </a:solidFill>
@@ -14736,6 +15129,47 @@
   <a:extraClrSchemeLst>
     <a:extraClrScheme>
       <a:clrScheme name="Presentation 1">
+        <a:dk1>
+          <a:srgbClr val="000000"/>
+        </a:dk1>
+        <a:lt1>
+          <a:srgbClr val="FFFFFF"/>
+        </a:lt1>
+        <a:dk2>
+          <a:srgbClr val="44546A"/>
+        </a:dk2>
+        <a:lt2>
+          <a:srgbClr val="E7E6E6"/>
+        </a:lt2>
+        <a:accent1>
+          <a:srgbClr val="4472C4"/>
+        </a:accent1>
+        <a:accent2>
+          <a:srgbClr val="ED7D31"/>
+        </a:accent2>
+        <a:accent3>
+          <a:srgbClr val="A5A5A5"/>
+        </a:accent3>
+        <a:accent4>
+          <a:srgbClr val="FFC000"/>
+        </a:accent4>
+        <a:accent5>
+          <a:srgbClr val="5B9BD5"/>
+        </a:accent5>
+        <a:accent6>
+          <a:srgbClr val="70AD47"/>
+        </a:accent6>
+        <a:hlink>
+          <a:srgbClr val="0563C1"/>
+        </a:hlink>
+        <a:folHlink>
+          <a:srgbClr val="954F72"/>
+        </a:folHlink>
+      </a:clrScheme>
+      <a:clrMap bg1="lt1" tx1="dk1" bg2="lt2" tx2="dk2" accent1="accent1" accent2="accent2" accent3="accent3" accent4="accent4" accent5="accent5" accent6="accent6" hlink="hlink" folHlink="folHlink"/>
+    </a:extraClrScheme>
+    <a:extraClrScheme>
+      <a:clrScheme name="Presentation 2">
         <a:dk1>
           <a:srgbClr val="000000"/>
         </a:dk1>
@@ -15071,13 +15505,54 @@
       </a:clrScheme>
       <a:clrMap bg1="lt1" tx1="dk1" bg2="lt2" tx2="dk2" accent1="accent1" accent2="accent2" accent3="accent3" accent4="accent4" accent5="accent5" accent6="accent6" hlink="hlink" folHlink="folHlink"/>
     </a:extraClrScheme>
+    <a:extraClrScheme>
+      <a:clrScheme name="Presentation 2">
+        <a:dk1>
+          <a:srgbClr val="000000"/>
+        </a:dk1>
+        <a:lt1>
+          <a:srgbClr val="FFFFFF"/>
+        </a:lt1>
+        <a:dk2>
+          <a:srgbClr val="44546A"/>
+        </a:dk2>
+        <a:lt2>
+          <a:srgbClr val="E7E6E6"/>
+        </a:lt2>
+        <a:accent1>
+          <a:srgbClr val="4472C4"/>
+        </a:accent1>
+        <a:accent2>
+          <a:srgbClr val="ED7D31"/>
+        </a:accent2>
+        <a:accent3>
+          <a:srgbClr val="A5A5A5"/>
+        </a:accent3>
+        <a:accent4>
+          <a:srgbClr val="FFC000"/>
+        </a:accent4>
+        <a:accent5>
+          <a:srgbClr val="5B9BD5"/>
+        </a:accent5>
+        <a:accent6>
+          <a:srgbClr val="70AD47"/>
+        </a:accent6>
+        <a:hlink>
+          <a:srgbClr val="0563C1"/>
+        </a:hlink>
+        <a:folHlink>
+          <a:srgbClr val="954F72"/>
+        </a:folHlink>
+      </a:clrScheme>
+      <a:clrMap bg1="lt1" tx1="dk1" bg2="lt2" tx2="dk2" accent1="accent1" accent2="accent2" accent3="accent3" accent4="accent4" accent5="accent5" accent6="accent6" hlink="hlink" folHlink="folHlink"/>
+    </a:extraClrScheme>
   </a:extraClrSchemeLst>
 </a:theme>
 </file>
 
 <file path=ppt/theme/themeOverride1.xml><?xml version="1.0" encoding="utf-8"?>
 <a:themeOverride xmlns:a="http://schemas.openxmlformats.org/drawingml/2006/main">
-  <a:clrScheme name="Presentation">
+  <a:clrScheme name="Presentation 1">
     <a:dk1>
       <a:srgbClr val="000000"/>
     </a:dk1>
@@ -15120,7 +15595,7 @@
 
 <file path=ppt/theme/themeOverride10.xml><?xml version="1.0" encoding="utf-8"?>
 <a:themeOverride xmlns:a="http://schemas.openxmlformats.org/drawingml/2006/main">
-  <a:clrScheme name="Presentation">
+  <a:clrScheme name="Presentation 1">
     <a:dk1>
       <a:srgbClr val="000000"/>
     </a:dk1>
@@ -15163,7 +15638,7 @@
 
 <file path=ppt/theme/themeOverride11.xml><?xml version="1.0" encoding="utf-8"?>
 <a:themeOverride xmlns:a="http://schemas.openxmlformats.org/drawingml/2006/main">
-  <a:clrScheme name="Presentation">
+  <a:clrScheme name="Presentation 1">
     <a:dk1>
       <a:srgbClr val="000000"/>
     </a:dk1>
@@ -15206,7 +15681,7 @@
 
 <file path=ppt/theme/themeOverride12.xml><?xml version="1.0" encoding="utf-8"?>
 <a:themeOverride xmlns:a="http://schemas.openxmlformats.org/drawingml/2006/main">
-  <a:clrScheme name="Presentation">
+  <a:clrScheme name="Presentation 1">
     <a:dk1>
       <a:srgbClr val="000000"/>
     </a:dk1>
@@ -15249,7 +15724,7 @@
 
 <file path=ppt/theme/themeOverride13.xml><?xml version="1.0" encoding="utf-8"?>
 <a:themeOverride xmlns:a="http://schemas.openxmlformats.org/drawingml/2006/main">
-  <a:clrScheme name="Presentation">
+  <a:clrScheme name="Presentation 1">
     <a:dk1>
       <a:srgbClr val="000000"/>
     </a:dk1>
@@ -15292,7 +15767,7 @@
 
 <file path=ppt/theme/themeOverride14.xml><?xml version="1.0" encoding="utf-8"?>
 <a:themeOverride xmlns:a="http://schemas.openxmlformats.org/drawingml/2006/main">
-  <a:clrScheme name="Presentation">
+  <a:clrScheme name="Presentation 1">
     <a:dk1>
       <a:srgbClr val="000000"/>
     </a:dk1>
@@ -15335,7 +15810,7 @@
 
 <file path=ppt/theme/themeOverride2.xml><?xml version="1.0" encoding="utf-8"?>
 <a:themeOverride xmlns:a="http://schemas.openxmlformats.org/drawingml/2006/main">
-  <a:clrScheme name="Presentation">
+  <a:clrScheme name="Presentation 1">
     <a:dk1>
       <a:srgbClr val="000000"/>
     </a:dk1>
@@ -15378,7 +15853,7 @@
 
 <file path=ppt/theme/themeOverride3.xml><?xml version="1.0" encoding="utf-8"?>
 <a:themeOverride xmlns:a="http://schemas.openxmlformats.org/drawingml/2006/main">
-  <a:clrScheme name="Presentation">
+  <a:clrScheme name="Presentation 1">
     <a:dk1>
       <a:srgbClr val="000000"/>
     </a:dk1>
@@ -15421,7 +15896,7 @@
 
 <file path=ppt/theme/themeOverride4.xml><?xml version="1.0" encoding="utf-8"?>
 <a:themeOverride xmlns:a="http://schemas.openxmlformats.org/drawingml/2006/main">
-  <a:clrScheme name="Presentation">
+  <a:clrScheme name="Presentation 1">
     <a:dk1>
       <a:srgbClr val="000000"/>
     </a:dk1>
@@ -15464,7 +15939,7 @@
 
 <file path=ppt/theme/themeOverride5.xml><?xml version="1.0" encoding="utf-8"?>
 <a:themeOverride xmlns:a="http://schemas.openxmlformats.org/drawingml/2006/main">
-  <a:clrScheme name="Presentation">
+  <a:clrScheme name="Presentation 1">
     <a:dk1>
       <a:srgbClr val="000000"/>
     </a:dk1>
@@ -15507,7 +15982,7 @@
 
 <file path=ppt/theme/themeOverride6.xml><?xml version="1.0" encoding="utf-8"?>
 <a:themeOverride xmlns:a="http://schemas.openxmlformats.org/drawingml/2006/main">
-  <a:clrScheme name="Presentation">
+  <a:clrScheme name="Presentation 1">
     <a:dk1>
       <a:srgbClr val="000000"/>
     </a:dk1>
@@ -15550,7 +16025,7 @@
 
 <file path=ppt/theme/themeOverride7.xml><?xml version="1.0" encoding="utf-8"?>
 <a:themeOverride xmlns:a="http://schemas.openxmlformats.org/drawingml/2006/main">
-  <a:clrScheme name="Presentation">
+  <a:clrScheme name="Presentation 1">
     <a:dk1>
       <a:srgbClr val="000000"/>
     </a:dk1>
@@ -15593,7 +16068,7 @@
 
 <file path=ppt/theme/themeOverride8.xml><?xml version="1.0" encoding="utf-8"?>
 <a:themeOverride xmlns:a="http://schemas.openxmlformats.org/drawingml/2006/main">
-  <a:clrScheme name="Presentation">
+  <a:clrScheme name="Presentation 1">
     <a:dk1>
       <a:srgbClr val="000000"/>
     </a:dk1>
@@ -15636,7 +16111,7 @@
 
 <file path=ppt/theme/themeOverride9.xml><?xml version="1.0" encoding="utf-8"?>
 <a:themeOverride xmlns:a="http://schemas.openxmlformats.org/drawingml/2006/main">
-  <a:clrScheme name="Presentation">
+  <a:clrScheme name="Presentation 1">
     <a:dk1>
       <a:srgbClr val="000000"/>
     </a:dk1>
